--- a/ground-vehicle/docs/courses/advanced/l3_bluetooth_and_storage.pptx
+++ b/ground-vehicle/docs/courses/advanced/l3_bluetooth_and_storage.pptx
@@ -3145,267 +3145,9 @@
           </a:p>
         </p:txBody>
       </p:sp>
-      <p:sp>
-        <p:nvSpPr>
-          <p:cNvPr id="3" name="TextBox 2"/>
-          <p:cNvSpPr txBox="1"/>
-          <p:nvPr/>
-        </p:nvSpPr>
-        <p:spPr>
-          <a:xfrm>
-            <a:off x="502920" y="1051560"/>
-            <a:ext cx="6492240" cy="365760"/>
-          </a:xfrm>
-          <a:prstGeom prst="rect">
-            <a:avLst/>
-          </a:prstGeom>
-          <a:noFill/>
-        </p:spPr>
-        <p:txBody>
-          <a:bodyPr wrap="square" lIns="0" tIns="0" rIns="0" bIns="0">
-            <a:spAutoFit/>
-          </a:bodyPr>
-          <a:lstStyle/>
-          <a:p>
-            <a:pPr algn="l">
-              <a:lnSpc>
-                <a:spcPct val="100000"/>
-              </a:lnSpc>
-              <a:spcAft>
-                <a:spcPts val="0"/>
-              </a:spcAft>
-              <a:defRPr sz="1600" b="1">
-                <a:solidFill>
-                  <a:srgbClr val="0E7C86"/>
-                </a:solidFill>
-                <a:latin typeface="Calibri"/>
-              </a:defRPr>
-            </a:pPr>
-            <a:r>
-              <a:rPr sz="1600" b="1">
-                <a:solidFill>
-                  <a:srgbClr val="0E7C86"/>
-                </a:solidFill>
-                <a:latin typeface="Calibri"/>
-              </a:rPr>
-              <a:t>LESSON 3</a:t>
-            </a:r>
-          </a:p>
-        </p:txBody>
-      </p:sp>
-      <p:sp>
-        <p:nvSpPr>
-          <p:cNvPr id="4" name="TextBox 3"/>
-          <p:cNvSpPr txBox="1"/>
-          <p:nvPr/>
-        </p:nvSpPr>
-        <p:spPr>
-          <a:xfrm>
-            <a:off x="502920" y="1481328"/>
-            <a:ext cx="6492240" cy="1554480"/>
-          </a:xfrm>
-          <a:prstGeom prst="rect">
-            <a:avLst/>
-          </a:prstGeom>
-          <a:noFill/>
-        </p:spPr>
-        <p:txBody>
-          <a:bodyPr wrap="square" lIns="0" tIns="0" rIns="0" bIns="0">
-            <a:spAutoFit/>
-          </a:bodyPr>
-          <a:lstStyle/>
-          <a:p>
-            <a:pPr algn="l">
-              <a:lnSpc>
-                <a:spcPct val="95000"/>
-              </a:lnSpc>
-              <a:spcAft>
-                <a:spcPts val="0"/>
-              </a:spcAft>
-              <a:defRPr sz="4000" b="1">
-                <a:solidFill>
-                  <a:srgbClr val="1F3A5F"/>
-                </a:solidFill>
-                <a:latin typeface="Calibri"/>
-              </a:defRPr>
-            </a:pPr>
-            <a:r>
-              <a:rPr sz="4000" b="1">
-                <a:solidFill>
-                  <a:srgbClr val="1F3A5F"/>
-                </a:solidFill>
-                <a:latin typeface="Calibri"/>
-              </a:rPr>
-              <a:t>Bluetooth and Persistent Storage</a:t>
-            </a:r>
-          </a:p>
-        </p:txBody>
-      </p:sp>
-      <p:sp>
-        <p:nvSpPr>
-          <p:cNvPr id="5" name="TextBox 4"/>
-          <p:cNvSpPr txBox="1"/>
-          <p:nvPr/>
-        </p:nvSpPr>
-        <p:spPr>
-          <a:xfrm>
-            <a:off x="502920" y="3154680"/>
-            <a:ext cx="6492240" cy="960120"/>
-          </a:xfrm>
-          <a:prstGeom prst="rect">
-            <a:avLst/>
-          </a:prstGeom>
-          <a:noFill/>
-        </p:spPr>
-        <p:txBody>
-          <a:bodyPr wrap="square" lIns="0" tIns="0" rIns="0" bIns="0">
-            <a:spAutoFit/>
-          </a:bodyPr>
-          <a:lstStyle/>
-          <a:p>
-            <a:pPr algn="l">
-              <a:lnSpc>
-                <a:spcPct val="100000"/>
-              </a:lnSpc>
-              <a:spcAft>
-                <a:spcPts val="0"/>
-              </a:spcAft>
-              <a:defRPr sz="1700" b="0">
-                <a:solidFill>
-                  <a:srgbClr val="222222"/>
-                </a:solidFill>
-                <a:latin typeface="Calibri"/>
-              </a:defRPr>
-            </a:pPr>
-            <a:r>
-              <a:rPr sz="1700" b="0">
-                <a:solidFill>
-                  <a:srgbClr val="222222"/>
-                </a:solidFill>
-                <a:latin typeface="Calibri"/>
-              </a:rPr>
-              <a:t>Allowlists, callbacks, EEPROM that is not EEPROM, and making a vehicle remember which controller is its own.</a:t>
-            </a:r>
-          </a:p>
-        </p:txBody>
-      </p:sp>
-      <p:sp>
-        <p:nvSpPr>
-          <p:cNvPr id="6" name="TextBox 5"/>
-          <p:cNvSpPr txBox="1"/>
-          <p:nvPr/>
-        </p:nvSpPr>
-        <p:spPr>
-          <a:xfrm>
-            <a:off x="502920" y="4224528"/>
-            <a:ext cx="6492240" cy="1371600"/>
-          </a:xfrm>
-          <a:prstGeom prst="rect">
-            <a:avLst/>
-          </a:prstGeom>
-          <a:noFill/>
-        </p:spPr>
-        <p:txBody>
-          <a:bodyPr wrap="square" lIns="0" tIns="0" rIns="0" bIns="0">
-            <a:spAutoFit/>
-          </a:bodyPr>
-          <a:lstStyle/>
-          <a:p>
-            <a:pPr algn="l">
-              <a:lnSpc>
-                <a:spcPct val="100000"/>
-              </a:lnSpc>
-              <a:spcAft>
-                <a:spcPts val="200"/>
-              </a:spcAft>
-              <a:defRPr sz="1300" b="0">
-                <a:solidFill>
-                  <a:srgbClr val="666666"/>
-                </a:solidFill>
-                <a:latin typeface="Calibri"/>
-              </a:defRPr>
-            </a:pPr>
-            <a:r>
-              <a:rPr sz="1300" b="0">
-                <a:solidFill>
-                  <a:srgbClr val="666666"/>
-                </a:solidFill>
-                <a:latin typeface="Calibri"/>
-              </a:rPr>
-              <a:t>Porpoise Robotics  -  porpoiserobotics.org</a:t>
-            </a:r>
-          </a:p>
-          <a:p>
-            <a:pPr algn="l">
-              <a:lnSpc>
-                <a:spcPct val="100000"/>
-              </a:lnSpc>
-              <a:spcAft>
-                <a:spcPts val="200"/>
-              </a:spcAft>
-              <a:defRPr sz="1300" b="0">
-                <a:solidFill>
-                  <a:srgbClr val="666666"/>
-                </a:solidFill>
-                <a:latin typeface="Calibri"/>
-              </a:defRPr>
-            </a:pPr>
-            <a:r>
-              <a:rPr sz="1300" b="0">
-                <a:solidFill>
-                  <a:srgbClr val="666666"/>
-                </a:solidFill>
-                <a:latin typeface="Calibri"/>
-              </a:rPr>
-              <a:t>Kevin P. Bowen, President  -  kbowen6@icloud.com</a:t>
-            </a:r>
-          </a:p>
-          <a:p>
-            <a:pPr algn="l">
-              <a:lnSpc>
-                <a:spcPct val="100000"/>
-              </a:lnSpc>
-              <a:spcAft>
-                <a:spcPts val="200"/>
-              </a:spcAft>
-              <a:defRPr sz="1300" b="0">
-                <a:solidFill>
-                  <a:srgbClr val="666666"/>
-                </a:solidFill>
-                <a:latin typeface="Calibri"/>
-              </a:defRPr>
-            </a:pPr>
-          </a:p>
-          <a:p>
-            <a:pPr algn="l">
-              <a:lnSpc>
-                <a:spcPct val="100000"/>
-              </a:lnSpc>
-              <a:spcAft>
-                <a:spcPts val="200"/>
-              </a:spcAft>
-              <a:defRPr sz="1300" b="0">
-                <a:solidFill>
-                  <a:srgbClr val="666666"/>
-                </a:solidFill>
-                <a:latin typeface="Calibri"/>
-              </a:defRPr>
-            </a:pPr>
-            <a:r>
-              <a:rPr sz="1300" b="0">
-                <a:solidFill>
-                  <a:srgbClr val="666666"/>
-                </a:solidFill>
-                <a:latin typeface="Calibri"/>
-              </a:rPr>
-              <a:t>Three hours.  Bring two controllers per group if you can.</a:t>
-            </a:r>
-          </a:p>
-        </p:txBody>
-      </p:sp>
       <p:pic>
         <p:nvPicPr>
-          <p:cNvPr id="7" name="Picture 6" descr="control-board-bare.jpg"/>
+          <p:cNvPr id="3" name="Picture 2" descr="porpoise-logo.png"/>
           <p:cNvPicPr>
             <a:picLocks noChangeAspect="1"/>
           </p:cNvPicPr>
@@ -3419,8 +3161,8 @@
         </p:blipFill>
         <p:spPr>
           <a:xfrm>
-            <a:off x="7223760" y="1371600"/>
-            <a:ext cx="4480560" cy="4480560"/>
+            <a:off x="10922762" y="457200"/>
+            <a:ext cx="766013" cy="777240"/>
           </a:xfrm>
           <a:prstGeom prst="rect">
             <a:avLst/>
@@ -3429,7 +3171,289 @@
       </p:pic>
       <p:sp>
         <p:nvSpPr>
-          <p:cNvPr id="8" name="TextBox 7"/>
+          <p:cNvPr id="4" name="TextBox 3"/>
+          <p:cNvSpPr txBox="1"/>
+          <p:nvPr/>
+        </p:nvSpPr>
+        <p:spPr>
+          <a:xfrm>
+            <a:off x="502920" y="1051560"/>
+            <a:ext cx="6492240" cy="365760"/>
+          </a:xfrm>
+          <a:prstGeom prst="rect">
+            <a:avLst/>
+          </a:prstGeom>
+          <a:noFill/>
+        </p:spPr>
+        <p:txBody>
+          <a:bodyPr wrap="square" lIns="0" tIns="0" rIns="0" bIns="0">
+            <a:spAutoFit/>
+          </a:bodyPr>
+          <a:lstStyle/>
+          <a:p>
+            <a:pPr algn="l">
+              <a:lnSpc>
+                <a:spcPct val="100000"/>
+              </a:lnSpc>
+              <a:spcAft>
+                <a:spcPts val="0"/>
+              </a:spcAft>
+              <a:defRPr sz="1600" b="1">
+                <a:solidFill>
+                  <a:srgbClr val="0E7C86"/>
+                </a:solidFill>
+                <a:latin typeface="Calibri"/>
+              </a:defRPr>
+            </a:pPr>
+            <a:r>
+              <a:rPr sz="1600" b="1">
+                <a:solidFill>
+                  <a:srgbClr val="0E7C86"/>
+                </a:solidFill>
+                <a:latin typeface="Calibri"/>
+              </a:rPr>
+              <a:t>LESSON 3</a:t>
+            </a:r>
+          </a:p>
+        </p:txBody>
+      </p:sp>
+      <p:sp>
+        <p:nvSpPr>
+          <p:cNvPr id="5" name="TextBox 4"/>
+          <p:cNvSpPr txBox="1"/>
+          <p:nvPr/>
+        </p:nvSpPr>
+        <p:spPr>
+          <a:xfrm>
+            <a:off x="502920" y="1481328"/>
+            <a:ext cx="6492240" cy="1554480"/>
+          </a:xfrm>
+          <a:prstGeom prst="rect">
+            <a:avLst/>
+          </a:prstGeom>
+          <a:noFill/>
+        </p:spPr>
+        <p:txBody>
+          <a:bodyPr wrap="square" lIns="0" tIns="0" rIns="0" bIns="0">
+            <a:spAutoFit/>
+          </a:bodyPr>
+          <a:lstStyle/>
+          <a:p>
+            <a:pPr algn="l">
+              <a:lnSpc>
+                <a:spcPct val="95000"/>
+              </a:lnSpc>
+              <a:spcAft>
+                <a:spcPts val="0"/>
+              </a:spcAft>
+              <a:defRPr sz="4000" b="1">
+                <a:solidFill>
+                  <a:srgbClr val="1F3A5F"/>
+                </a:solidFill>
+                <a:latin typeface="Calibri"/>
+              </a:defRPr>
+            </a:pPr>
+            <a:r>
+              <a:rPr sz="4000" b="1">
+                <a:solidFill>
+                  <a:srgbClr val="1F3A5F"/>
+                </a:solidFill>
+                <a:latin typeface="Calibri"/>
+              </a:rPr>
+              <a:t>Bluetooth and Persistent Storage</a:t>
+            </a:r>
+          </a:p>
+        </p:txBody>
+      </p:sp>
+      <p:sp>
+        <p:nvSpPr>
+          <p:cNvPr id="6" name="TextBox 5"/>
+          <p:cNvSpPr txBox="1"/>
+          <p:nvPr/>
+        </p:nvSpPr>
+        <p:spPr>
+          <a:xfrm>
+            <a:off x="502920" y="3154680"/>
+            <a:ext cx="6492240" cy="960120"/>
+          </a:xfrm>
+          <a:prstGeom prst="rect">
+            <a:avLst/>
+          </a:prstGeom>
+          <a:noFill/>
+        </p:spPr>
+        <p:txBody>
+          <a:bodyPr wrap="square" lIns="0" tIns="0" rIns="0" bIns="0">
+            <a:spAutoFit/>
+          </a:bodyPr>
+          <a:lstStyle/>
+          <a:p>
+            <a:pPr algn="l">
+              <a:lnSpc>
+                <a:spcPct val="100000"/>
+              </a:lnSpc>
+              <a:spcAft>
+                <a:spcPts val="0"/>
+              </a:spcAft>
+              <a:defRPr sz="1700" b="0">
+                <a:solidFill>
+                  <a:srgbClr val="222222"/>
+                </a:solidFill>
+                <a:latin typeface="Calibri"/>
+              </a:defRPr>
+            </a:pPr>
+            <a:r>
+              <a:rPr sz="1700" b="0">
+                <a:solidFill>
+                  <a:srgbClr val="222222"/>
+                </a:solidFill>
+                <a:latin typeface="Calibri"/>
+              </a:rPr>
+              <a:t>Allowlists, callbacks, EEPROM that is not EEPROM, and making a vehicle remember which controller is its own.</a:t>
+            </a:r>
+          </a:p>
+        </p:txBody>
+      </p:sp>
+      <p:sp>
+        <p:nvSpPr>
+          <p:cNvPr id="7" name="TextBox 6"/>
+          <p:cNvSpPr txBox="1"/>
+          <p:nvPr/>
+        </p:nvSpPr>
+        <p:spPr>
+          <a:xfrm>
+            <a:off x="502920" y="4224528"/>
+            <a:ext cx="6492240" cy="1371600"/>
+          </a:xfrm>
+          <a:prstGeom prst="rect">
+            <a:avLst/>
+          </a:prstGeom>
+          <a:noFill/>
+        </p:spPr>
+        <p:txBody>
+          <a:bodyPr wrap="square" lIns="0" tIns="0" rIns="0" bIns="0">
+            <a:spAutoFit/>
+          </a:bodyPr>
+          <a:lstStyle/>
+          <a:p>
+            <a:pPr algn="l">
+              <a:lnSpc>
+                <a:spcPct val="100000"/>
+              </a:lnSpc>
+              <a:spcAft>
+                <a:spcPts val="200"/>
+              </a:spcAft>
+              <a:defRPr sz="1300" b="0">
+                <a:solidFill>
+                  <a:srgbClr val="666666"/>
+                </a:solidFill>
+                <a:latin typeface="Calibri"/>
+              </a:defRPr>
+            </a:pPr>
+            <a:r>
+              <a:rPr sz="1300" b="0">
+                <a:solidFill>
+                  <a:srgbClr val="666666"/>
+                </a:solidFill>
+                <a:latin typeface="Calibri"/>
+              </a:rPr>
+              <a:t>Porpoise Robotics  -  porpoiserobotics.org</a:t>
+            </a:r>
+          </a:p>
+          <a:p>
+            <a:pPr algn="l">
+              <a:lnSpc>
+                <a:spcPct val="100000"/>
+              </a:lnSpc>
+              <a:spcAft>
+                <a:spcPts val="200"/>
+              </a:spcAft>
+              <a:defRPr sz="1300" b="0">
+                <a:solidFill>
+                  <a:srgbClr val="666666"/>
+                </a:solidFill>
+                <a:latin typeface="Calibri"/>
+              </a:defRPr>
+            </a:pPr>
+            <a:r>
+              <a:rPr sz="1300" b="0">
+                <a:solidFill>
+                  <a:srgbClr val="666666"/>
+                </a:solidFill>
+                <a:latin typeface="Calibri"/>
+              </a:rPr>
+              <a:t>Kevin P. Bowen, President  -  kbowen6@icloud.com</a:t>
+            </a:r>
+          </a:p>
+          <a:p>
+            <a:pPr algn="l">
+              <a:lnSpc>
+                <a:spcPct val="100000"/>
+              </a:lnSpc>
+              <a:spcAft>
+                <a:spcPts val="200"/>
+              </a:spcAft>
+              <a:defRPr sz="1300" b="0">
+                <a:solidFill>
+                  <a:srgbClr val="666666"/>
+                </a:solidFill>
+                <a:latin typeface="Calibri"/>
+              </a:defRPr>
+            </a:pPr>
+          </a:p>
+          <a:p>
+            <a:pPr algn="l">
+              <a:lnSpc>
+                <a:spcPct val="100000"/>
+              </a:lnSpc>
+              <a:spcAft>
+                <a:spcPts val="200"/>
+              </a:spcAft>
+              <a:defRPr sz="1300" b="0">
+                <a:solidFill>
+                  <a:srgbClr val="666666"/>
+                </a:solidFill>
+                <a:latin typeface="Calibri"/>
+              </a:defRPr>
+            </a:pPr>
+            <a:r>
+              <a:rPr sz="1300" b="0">
+                <a:solidFill>
+                  <a:srgbClr val="666666"/>
+                </a:solidFill>
+                <a:latin typeface="Calibri"/>
+              </a:rPr>
+              <a:t>Three hours.  Bring two controllers per group if you can.</a:t>
+            </a:r>
+          </a:p>
+        </p:txBody>
+      </p:sp>
+      <p:pic>
+        <p:nvPicPr>
+          <p:cNvPr id="8" name="Picture 7" descr="control-board-bare.jpg"/>
+          <p:cNvPicPr>
+            <a:picLocks noChangeAspect="1"/>
+          </p:cNvPicPr>
+          <p:nvPr/>
+        </p:nvPicPr>
+        <p:blipFill>
+          <a:blip r:embed="rId3"/>
+          <a:stretch>
+            <a:fillRect/>
+          </a:stretch>
+        </p:blipFill>
+        <p:spPr>
+          <a:xfrm>
+            <a:off x="7223760" y="1371600"/>
+            <a:ext cx="4480560" cy="4480560"/>
+          </a:xfrm>
+          <a:prstGeom prst="rect">
+            <a:avLst/>
+          </a:prstGeom>
+        </p:spPr>
+      </p:pic>
+      <p:sp>
+        <p:nvSpPr>
+          <p:cNvPr id="9" name="TextBox 8"/>
           <p:cNvSpPr txBox="1"/>
           <p:nvPr/>
         </p:nvSpPr>

--- a/ground-vehicle/docs/courses/advanced/l3_bluetooth_and_storage.pptx
+++ b/ground-vehicle/docs/courses/advanced/l3_bluetooth_and_storage.pptx
@@ -5105,7 +5105,7 @@
       </p:sp>
       <p:sp>
         <p:nvSpPr>
-          <p:cNvPr id="7" name="Rounded Rectangle 6"/>
+          <p:cNvPr id="7" name="CODE_PANEL"/>
           <p:cNvSpPr/>
           <p:nvPr/>
         </p:nvSpPr>
@@ -10090,7 +10090,7 @@
       </p:sp>
       <p:sp>
         <p:nvSpPr>
-          <p:cNvPr id="7" name="Rounded Rectangle 6"/>
+          <p:cNvPr id="7" name="CODE_PANEL"/>
           <p:cNvSpPr/>
           <p:nvPr/>
         </p:nvSpPr>

--- a/ground-vehicle/docs/courses/advanced/l3_bluetooth_and_storage.pptx
+++ b/ground-vehicle/docs/courses/advanced/l3_bluetooth_and_storage.pptx
@@ -19,6 +19,10 @@
     <p:sldId id="267" r:id="rId18"/>
     <p:sldId id="268" r:id="rId19"/>
     <p:sldId id="269" r:id="rId20"/>
+    <p:sldId id="270" r:id="rId21"/>
+    <p:sldId id="271" r:id="rId22"/>
+    <p:sldId id="272" r:id="rId23"/>
+    <p:sldId id="273" r:id="rId24"/>
   </p:sldIdLst>
   <p:sldSz cx="12191695" cy="6858000" type="screen4x3"/>
   <p:notesSz cx="6858000" cy="9144000"/>
@@ -3558,7 +3562,7 @@
                 </a:solidFill>
                 <a:latin typeface="Calibri"/>
               </a:rPr>
-              <a:t>Do it now  -  settings that survive</a:t>
+              <a:t>The storage map, and why the addresses are spaced out</a:t>
             </a:r>
           </a:p>
         </p:txBody>
@@ -3636,7 +3640,7 @@
               <a:spcAft>
                 <a:spcPts val="0"/>
               </a:spcAft>
-              <a:defRPr sz="900" b="0">
+              <a:defRPr sz="1000" b="0">
                 <a:solidFill>
                   <a:srgbClr val="666666"/>
                 </a:solidFill>
@@ -3644,7 +3648,7 @@
               </a:defRPr>
             </a:pPr>
             <a:r>
-              <a:rPr sz="900" b="0">
+              <a:rPr sz="1000" b="0">
                 <a:solidFill>
                   <a:srgbClr val="666666"/>
                 </a:solidFill>
@@ -3684,7 +3688,7 @@
               <a:spcAft>
                 <a:spcPts val="0"/>
               </a:spcAft>
-              <a:defRPr sz="900" b="0">
+              <a:defRPr sz="1000" b="0">
                 <a:solidFill>
                   <a:srgbClr val="666666"/>
                 </a:solidFill>
@@ -3692,7 +3696,7 @@
               </a:defRPr>
             </a:pPr>
             <a:r>
-              <a:rPr sz="900" b="0">
+              <a:rPr sz="1000" b="0">
                 <a:solidFill>
                   <a:srgbClr val="666666"/>
                 </a:solidFill>
@@ -3705,14 +3709,62 @@
       </p:sp>
       <p:sp>
         <p:nvSpPr>
-          <p:cNvPr id="6" name="Rounded Rectangle 5"/>
+          <p:cNvPr id="6" name="TextBox 5"/>
+          <p:cNvSpPr txBox="1"/>
+          <p:nvPr/>
+        </p:nvSpPr>
+        <p:spPr>
+          <a:xfrm>
+            <a:off x="502920" y="1188720"/>
+            <a:ext cx="7047088" cy="274320"/>
+          </a:xfrm>
+          <a:prstGeom prst="rect">
+            <a:avLst/>
+          </a:prstGeom>
+          <a:noFill/>
+        </p:spPr>
+        <p:txBody>
+          <a:bodyPr wrap="square" lIns="0" tIns="0" rIns="0" bIns="0">
+            <a:spAutoFit/>
+          </a:bodyPr>
+          <a:lstStyle/>
+          <a:p>
+            <a:pPr algn="l">
+              <a:lnSpc>
+                <a:spcPct val="100000"/>
+              </a:lnSpc>
+              <a:spcAft>
+                <a:spcPts val="200"/>
+              </a:spcAft>
+              <a:defRPr sz="1200" b="1">
+                <a:solidFill>
+                  <a:srgbClr val="0E7C86"/>
+                </a:solidFill>
+                <a:latin typeface="Consolas"/>
+              </a:defRPr>
+            </a:pPr>
+            <a:r>
+              <a:rPr sz="1200" b="1">
+                <a:solidFill>
+                  <a:srgbClr val="0E7C86"/>
+                </a:solidFill>
+                <a:latin typeface="Consolas"/>
+              </a:rPr>
+              <a:t>Config.h</a:t>
+            </a:r>
+          </a:p>
+        </p:txBody>
+      </p:sp>
+      <p:sp>
+        <p:nvSpPr>
+          <p:cNvPr id="7" name="CODE_PANEL"/>
           <p:cNvSpPr/>
           <p:nvPr/>
         </p:nvSpPr>
         <p:spPr>
           <a:xfrm>
-            <a:off x="502920" y="1188720"/>
-            <a:ext cx="11185855" cy="530352"/>
+            <a:off x="502920" y="1517904"/>
+            <a:ext cx="7047088" cy="4745736"/>
           </a:xfrm>
           <a:prstGeom prst="roundRect">
             <a:avLst>
@@ -3720,10 +3772,12 @@
             </a:avLst>
           </a:prstGeom>
           <a:solidFill>
-            <a:srgbClr val="0E7C86"/>
+            <a:srgbClr val="F4F6F8"/>
           </a:solidFill>
-          <a:ln>
-            <a:noFill/>
+          <a:ln w="12700">
+            <a:solidFill>
+              <a:srgbClr val="C8D2DE"/>
+            </a:solidFill>
           </a:ln>
           <a:effectLst/>
         </p:spPr>
@@ -3742,50 +3796,306 @@
           </a:fontRef>
         </p:style>
         <p:txBody>
-          <a:bodyPr rtlCol="0" anchor="ctr" wrap="square" lIns="182880"/>
-          <a:lstStyle/>
-          <a:p>
-            <a:pPr algn="l"/>
+          <a:bodyPr rtlCol="0" anchor="t" wrap="square" lIns="146304" tIns="91440" bIns="73152"/>
+          <a:lstStyle/>
+          <a:p>
+            <a:pPr algn="l">
+              <a:lnSpc>
+                <a:spcPct val="100000"/>
+              </a:lnSpc>
+              <a:spcAft>
+                <a:spcPts val="0"/>
+              </a:spcAft>
+              <a:defRPr sz="1300">
+                <a:latin typeface="Consolas"/>
+              </a:defRPr>
+            </a:pPr>
+            <a:r>
+              <a:rPr sz="1300">
+                <a:solidFill>
+                  <a:srgbClr val="222222"/>
+                </a:solidFill>
+                <a:latin typeface="Consolas"/>
+              </a:rPr>
+              <a:t>const int ADDR_DEADZONE       =  0;   // int,   4 bytes</a:t>
+            </a:r>
+          </a:p>
+          <a:p>
+            <a:pPr algn="l">
+              <a:lnSpc>
+                <a:spcPct val="100000"/>
+              </a:lnSpc>
+              <a:spcAft>
+                <a:spcPts val="0"/>
+              </a:spcAft>
+              <a:defRPr sz="1300">
+                <a:latin typeface="Consolas"/>
+              </a:defRPr>
+            </a:pPr>
+            <a:r>
+              <a:rPr sz="1300">
+                <a:solidFill>
+                  <a:srgbClr val="222222"/>
+                </a:solidFill>
+                <a:latin typeface="Consolas"/>
+              </a:rPr>
+              <a:t>const int ADDR_DEADZONE_LS_X  =  4;</a:t>
+            </a:r>
+          </a:p>
+          <a:p>
+            <a:pPr algn="l">
+              <a:lnSpc>
+                <a:spcPct val="100000"/>
+              </a:lnSpc>
+              <a:spcAft>
+                <a:spcPts val="0"/>
+              </a:spcAft>
+              <a:defRPr sz="1300">
+                <a:latin typeface="Consolas"/>
+              </a:defRPr>
+            </a:pPr>
+            <a:r>
+              <a:rPr sz="1300">
+                <a:solidFill>
+                  <a:srgbClr val="222222"/>
+                </a:solidFill>
+                <a:latin typeface="Consolas"/>
+              </a:rPr>
+              <a:t>const int ADDR_DEADZONE_LS_Y  =  8;</a:t>
+            </a:r>
+          </a:p>
+          <a:p>
+            <a:pPr algn="l">
+              <a:lnSpc>
+                <a:spcPct val="100000"/>
+              </a:lnSpc>
+              <a:spcAft>
+                <a:spcPts val="0"/>
+              </a:spcAft>
+              <a:defRPr sz="1300">
+                <a:latin typeface="Consolas"/>
+              </a:defRPr>
+            </a:pPr>
+            <a:r>
+              <a:rPr sz="1300">
+                <a:solidFill>
+                  <a:srgbClr val="222222"/>
+                </a:solidFill>
+                <a:latin typeface="Consolas"/>
+              </a:rPr>
+              <a:t>const int ADDR_DEADZONE_RS_X  = 12;</a:t>
+            </a:r>
+          </a:p>
+          <a:p>
+            <a:pPr algn="l">
+              <a:lnSpc>
+                <a:spcPct val="100000"/>
+              </a:lnSpc>
+              <a:spcAft>
+                <a:spcPts val="0"/>
+              </a:spcAft>
+              <a:defRPr sz="1300">
+                <a:latin typeface="Consolas"/>
+              </a:defRPr>
+            </a:pPr>
+            <a:r>
+              <a:rPr sz="1300">
+                <a:solidFill>
+                  <a:srgbClr val="222222"/>
+                </a:solidFill>
+                <a:latin typeface="Consolas"/>
+              </a:rPr>
+              <a:t>const int ADDR_DEADZONE_RS_Y  = 16;</a:t>
+            </a:r>
+          </a:p>
+          <a:p>
+            <a:pPr algn="l">
+              <a:lnSpc>
+                <a:spcPct val="100000"/>
+              </a:lnSpc>
+              <a:spcAft>
+                <a:spcPts val="0"/>
+              </a:spcAft>
+              <a:defRPr sz="1300">
+                <a:latin typeface="Consolas"/>
+              </a:defRPr>
+            </a:pPr>
+            <a:r>
+              <a:rPr sz="1300">
+                <a:solidFill>
+                  <a:srgbClr val="222222"/>
+                </a:solidFill>
+                <a:latin typeface="Consolas"/>
+              </a:rPr>
+              <a:t>const int ADDR_LS_Y_SC        = 20;   // float, 4 bytes</a:t>
+            </a:r>
+          </a:p>
+          <a:p>
+            <a:pPr algn="l">
+              <a:lnSpc>
+                <a:spcPct val="100000"/>
+              </a:lnSpc>
+              <a:spcAft>
+                <a:spcPts val="0"/>
+              </a:spcAft>
+              <a:defRPr sz="1300">
+                <a:latin typeface="Consolas"/>
+              </a:defRPr>
+            </a:pPr>
+            <a:r>
+              <a:rPr sz="1300">
+                <a:solidFill>
+                  <a:srgbClr val="222222"/>
+                </a:solidFill>
+                <a:latin typeface="Consolas"/>
+              </a:rPr>
+              <a:t>const int ADDR_LS_X_SC        = 24;</a:t>
+            </a:r>
+          </a:p>
+          <a:p>
+            <a:pPr algn="l">
+              <a:lnSpc>
+                <a:spcPct val="100000"/>
+              </a:lnSpc>
+              <a:spcAft>
+                <a:spcPts val="0"/>
+              </a:spcAft>
+              <a:defRPr sz="1300">
+                <a:latin typeface="Consolas"/>
+              </a:defRPr>
+            </a:pPr>
+            <a:r>
+              <a:rPr sz="1300">
+                <a:solidFill>
+                  <a:srgbClr val="222222"/>
+                </a:solidFill>
+                <a:latin typeface="Consolas"/>
+              </a:rPr>
+              <a:t>const int ADDR_RS_Y_SC        = 28;</a:t>
+            </a:r>
+          </a:p>
+          <a:p>
+            <a:pPr algn="l">
+              <a:lnSpc>
+                <a:spcPct val="100000"/>
+              </a:lnSpc>
+              <a:spcAft>
+                <a:spcPts val="0"/>
+              </a:spcAft>
+              <a:defRPr sz="1300">
+                <a:latin typeface="Consolas"/>
+              </a:defRPr>
+            </a:pPr>
+            <a:r>
+              <a:rPr sz="1300">
+                <a:solidFill>
+                  <a:srgbClr val="222222"/>
+                </a:solidFill>
+                <a:latin typeface="Consolas"/>
+              </a:rPr>
+              <a:t>const int ADDR_RS_X_SC        = 32;</a:t>
+            </a:r>
+          </a:p>
+          <a:p>
+            <a:pPr algn="l">
+              <a:lnSpc>
+                <a:spcPct val="100000"/>
+              </a:lnSpc>
+              <a:spcAft>
+                <a:spcPts val="0"/>
+              </a:spcAft>
+              <a:defRPr sz="1300">
+                <a:latin typeface="Consolas"/>
+              </a:defRPr>
+            </a:pPr>
             <a:r>
               <a:rPr sz="1300" b="1">
                 <a:solidFill>
-                  <a:srgbClr val="FFFFFF"/>
-                </a:solidFill>
-                <a:latin typeface="Calibri"/>
-              </a:rPr>
-              <a:t>UPLOAD AND RUN:   </a:t>
-            </a:r>
-            <a:r>
-              <a:rPr sz="1500" b="1">
-                <a:solidFill>
-                  <a:srgbClr val="FFFFFF"/>
+                  <a:srgbClr val="0E7C86"/>
                 </a:solidFill>
                 <a:latin typeface="Consolas"/>
               </a:rPr>
-              <a:t>a3b_eeprom_settings</a:t>
-            </a:r>
-            <a:r>
-              <a:rPr sz="1200">
-                <a:solidFill>
-                  <a:srgbClr val="FFFFFF"/>
-                </a:solidFill>
-                <a:latin typeface="Calibri"/>
-              </a:rPr>
-              <a:t>     (30 minutes)</a:t>
-            </a:r>
-          </a:p>
-        </p:txBody>
-      </p:sp>
-      <p:sp>
-        <p:nvSpPr>
-          <p:cNvPr id="7" name="TextBox 6"/>
+              <a:t>const int ADDR_PAIRED_VALID   = 36;   // 1 byte:  0xA5 when valid</a:t>
+            </a:r>
+          </a:p>
+          <a:p>
+            <a:pPr algn="l">
+              <a:lnSpc>
+                <a:spcPct val="100000"/>
+              </a:lnSpc>
+              <a:spcAft>
+                <a:spcPts val="0"/>
+              </a:spcAft>
+              <a:defRPr sz="1300">
+                <a:latin typeface="Consolas"/>
+              </a:defRPr>
+            </a:pPr>
+            <a:r>
+              <a:rPr sz="1300" b="1">
+                <a:solidFill>
+                  <a:srgbClr val="0E7C86"/>
+                </a:solidFill>
+                <a:latin typeface="Consolas"/>
+              </a:rPr>
+              <a:t>const int ADDR_PAIRED_ADDR    = 37;   // 6 bytes: the address</a:t>
+            </a:r>
+          </a:p>
+          <a:p>
+            <a:pPr algn="l">
+              <a:lnSpc>
+                <a:spcPct val="100000"/>
+              </a:lnSpc>
+              <a:spcAft>
+                <a:spcPts val="0"/>
+              </a:spcAft>
+              <a:defRPr sz="1300">
+                <a:latin typeface="Consolas"/>
+              </a:defRPr>
+            </a:pPr>
+            <a:r>
+              <a:rPr sz="1300">
+                <a:solidFill>
+                  <a:srgbClr val="222222"/>
+                </a:solidFill>
+                <a:latin typeface="Consolas"/>
+              </a:rPr>
+              <a:t> </a:t>
+            </a:r>
+          </a:p>
+          <a:p>
+            <a:pPr algn="l">
+              <a:lnSpc>
+                <a:spcPct val="100000"/>
+              </a:lnSpc>
+              <a:spcAft>
+                <a:spcPts val="0"/>
+              </a:spcAft>
+              <a:defRPr sz="1300">
+                <a:latin typeface="Consolas"/>
+              </a:defRPr>
+            </a:pPr>
+            <a:r>
+              <a:rPr sz="1300" b="1">
+                <a:solidFill>
+                  <a:srgbClr val="0E7C86"/>
+                </a:solidFill>
+                <a:latin typeface="Consolas"/>
+              </a:rPr>
+              <a:t>const uint8_t PAIRED_VALID_MAGIC = 0xA5;</a:t>
+            </a:r>
+          </a:p>
+        </p:txBody>
+      </p:sp>
+      <p:sp>
+        <p:nvSpPr>
+          <p:cNvPr id="8" name="TextBox 7"/>
           <p:cNvSpPr txBox="1"/>
           <p:nvPr/>
         </p:nvSpPr>
         <p:spPr>
           <a:xfrm>
-            <a:off x="502920" y="1901952"/>
-            <a:ext cx="5387187" cy="4361688"/>
+            <a:off x="7870048" y="1517904"/>
+            <a:ext cx="3818727" cy="4745736"/>
           </a:xfrm>
           <a:prstGeom prst="rect">
             <a:avLst/>
@@ -3803,317 +4113,25 @@
                 <a:spcPct val="100000"/>
               </a:lnSpc>
               <a:spcAft>
-                <a:spcPts val="800"/>
-              </a:spcAft>
-              <a:defRPr sz="1600" b="0">
-                <a:solidFill>
-                  <a:srgbClr val="222222"/>
-                </a:solidFill>
-                <a:latin typeface="Calibri"/>
-              </a:defRPr>
-            </a:pPr>
-            <a:r>
-              <a:rPr sz="1600" b="0">
-                <a:solidFill>
-                  <a:srgbClr val="222222"/>
-                </a:solidFill>
-                <a:latin typeface="Calibri"/>
-              </a:rPr>
-              <a:t>1.  set deadzone 100,  save. Now UNPLUG the board and plug it back in. Type  show.</a:t>
-            </a:r>
-          </a:p>
-          <a:p>
-            <a:pPr algn="l">
-              <a:lnSpc>
-                <a:spcPct val="100000"/>
-              </a:lnSpc>
-              <a:spcAft>
-                <a:spcPts val="800"/>
-              </a:spcAft>
-              <a:defRPr sz="1600" b="0">
-                <a:solidFill>
-                  <a:srgbClr val="222222"/>
-                </a:solidFill>
-                <a:latin typeface="Calibri"/>
-              </a:defRPr>
-            </a:pPr>
-            <a:r>
-              <a:rPr sz="1600" b="0">
-                <a:solidFill>
-                  <a:srgbClr val="222222"/>
-                </a:solidFill>
-                <a:latin typeface="Calibri"/>
-              </a:rPr>
-              <a:t>2.  set deadzone 200  and do NOT save. Reset the board. What happened, and why?</a:t>
-            </a:r>
-          </a:p>
-          <a:p>
-            <a:pPr algn="l">
-              <a:lnSpc>
-                <a:spcPct val="100000"/>
-              </a:lnSpc>
-              <a:spcAft>
-                <a:spcPts val="800"/>
-              </a:spcAft>
-              <a:defRPr sz="1600" b="0">
-                <a:solidFill>
-                  <a:srgbClr val="222222"/>
-                </a:solidFill>
-                <a:latin typeface="Calibri"/>
-              </a:defRPr>
-            </a:pPr>
-            <a:r>
-              <a:rPr sz="1600" b="0">
-                <a:solidFill>
-                  <a:srgbClr val="222222"/>
-                </a:solidFill>
-                <a:latin typeface="Calibri"/>
-              </a:rPr>
-              <a:t>3.  erase, then reset. Where did the values come from this time?</a:t>
-            </a:r>
-          </a:p>
-          <a:p>
-            <a:pPr algn="l">
-              <a:lnSpc>
-                <a:spcPct val="100000"/>
-              </a:lnSpc>
-              <a:spcAft>
-                <a:spcPts val="800"/>
-              </a:spcAft>
-              <a:defRPr sz="1600" b="0">
-                <a:solidFill>
-                  <a:srgbClr val="222222"/>
-                </a:solidFill>
-                <a:latin typeface="Calibri"/>
-              </a:defRPr>
-            </a:pPr>
-            <a:r>
-              <a:rPr sz="1600" b="0">
-                <a:solidFill>
-                  <a:srgbClr val="222222"/>
-                </a:solidFill>
-                <a:latin typeface="Calibri"/>
-              </a:rPr>
-              <a:t>4.  dump  before and after a save. Find the magic byte.</a:t>
-            </a:r>
-          </a:p>
-          <a:p>
-            <a:pPr algn="l">
-              <a:lnSpc>
-                <a:spcPct val="100000"/>
-              </a:lnSpc>
-              <a:spcAft>
-                <a:spcPts val="800"/>
-              </a:spcAft>
-              <a:defRPr sz="1600" b="0">
-                <a:solidFill>
-                  <a:srgbClr val="222222"/>
-                </a:solidFill>
-                <a:latin typeface="Calibri"/>
-              </a:defRPr>
-            </a:pPr>
-            <a:r>
-              <a:rPr sz="1600" b="0">
-                <a:solidFill>
-                  <a:srgbClr val="222222"/>
-                </a:solidFill>
-                <a:latin typeface="Calibri"/>
-              </a:rPr>
-              <a:t>5.  Comment out the EEPROM.commit() in saveSettings. Save, reset, and see the bug you will one day write for real.</a:t>
-            </a:r>
-          </a:p>
-          <a:p>
-            <a:pPr algn="l">
-              <a:lnSpc>
-                <a:spcPct val="100000"/>
-              </a:lnSpc>
-              <a:spcAft>
-                <a:spcPts val="800"/>
-              </a:spcAft>
-              <a:defRPr sz="1600" b="0">
-                <a:solidFill>
-                  <a:srgbClr val="222222"/>
-                </a:solidFill>
-                <a:latin typeface="Calibri"/>
-              </a:defRPr>
-            </a:pPr>
-            <a:r>
-              <a:rPr sz="1600" b="0">
-                <a:solidFill>
-                  <a:srgbClr val="222222"/>
-                </a:solidFill>
-                <a:latin typeface="Calibri"/>
-              </a:rPr>
-              <a:t>6.  Deliberately overlap two ADDR_ constants and watch one setting eat the other.</a:t>
-            </a:r>
-          </a:p>
-        </p:txBody>
-      </p:sp>
-      <p:sp>
-        <p:nvSpPr>
-          <p:cNvPr id="8" name="TextBox 7"/>
-          <p:cNvSpPr txBox="1"/>
-          <p:nvPr/>
-        </p:nvSpPr>
-        <p:spPr>
-          <a:xfrm>
-            <a:off x="6301587" y="1901952"/>
-            <a:ext cx="5387187" cy="310896"/>
-          </a:xfrm>
-          <a:prstGeom prst="rect">
-            <a:avLst/>
-          </a:prstGeom>
-          <a:noFill/>
-        </p:spPr>
-        <p:txBody>
-          <a:bodyPr wrap="square" lIns="0" tIns="0" rIns="0" bIns="0">
-            <a:spAutoFit/>
-          </a:bodyPr>
-          <a:lstStyle/>
-          <a:p>
-            <a:pPr algn="l">
-              <a:lnSpc>
-                <a:spcPct val="100000"/>
-              </a:lnSpc>
-              <a:spcAft>
-                <a:spcPts val="300"/>
-              </a:spcAft>
-              <a:defRPr sz="1200" b="1">
-                <a:solidFill>
-                  <a:srgbClr val="0E7C86"/>
-                </a:solidFill>
-                <a:latin typeface="Calibri"/>
-              </a:defRPr>
-            </a:pPr>
-            <a:r>
-              <a:rPr sz="1200" b="1">
-                <a:solidFill>
-                  <a:srgbClr val="0E7C86"/>
-                </a:solidFill>
-                <a:latin typeface="Calibri"/>
-              </a:rPr>
-              <a:t>What you should see</a:t>
-            </a:r>
-          </a:p>
-        </p:txBody>
-      </p:sp>
-      <p:sp>
-        <p:nvSpPr>
-          <p:cNvPr id="9" name="TextBox 8"/>
-          <p:cNvSpPr txBox="1"/>
-          <p:nvPr/>
-        </p:nvSpPr>
-        <p:spPr>
-          <a:xfrm>
-            <a:off x="6301587" y="2249424"/>
-            <a:ext cx="5387187" cy="1815084"/>
-          </a:xfrm>
-          <a:prstGeom prst="rect">
-            <a:avLst/>
-          </a:prstGeom>
-          <a:noFill/>
-        </p:spPr>
-        <p:txBody>
-          <a:bodyPr wrap="square" lIns="0" tIns="0" rIns="0" bIns="0">
-            <a:spAutoFit/>
-          </a:bodyPr>
-          <a:lstStyle/>
-          <a:p>
-            <a:pPr algn="l">
-              <a:lnSpc>
-                <a:spcPct val="100000"/>
-              </a:lnSpc>
-              <a:spcAft>
                 <a:spcPts val="600"/>
               </a:spcAft>
-              <a:defRPr sz="1500" b="0">
-                <a:solidFill>
-                  <a:srgbClr val="222222"/>
-                </a:solidFill>
-                <a:latin typeface="Calibri"/>
-              </a:defRPr>
-            </a:pPr>
-            <a:r>
-              <a:rPr sz="1500" b="0">
-                <a:solidFill>
-                  <a:srgbClr val="222222"/>
-                </a:solidFill>
-                <a:latin typeface="Calibri"/>
-              </a:rPr>
-              <a:t>Step 1: the value is still 100 after a power cycle. Step 2: it is back to 100, not 200.</a:t>
-            </a:r>
-          </a:p>
-        </p:txBody>
-      </p:sp>
-      <p:sp>
-        <p:nvSpPr>
-          <p:cNvPr id="10" name="TextBox 9"/>
-          <p:cNvSpPr txBox="1"/>
-          <p:nvPr/>
-        </p:nvSpPr>
-        <p:spPr>
-          <a:xfrm>
-            <a:off x="6301587" y="4101084"/>
-            <a:ext cx="5387187" cy="310896"/>
-          </a:xfrm>
-          <a:prstGeom prst="rect">
-            <a:avLst/>
-          </a:prstGeom>
-          <a:noFill/>
-        </p:spPr>
-        <p:txBody>
-          <a:bodyPr wrap="square" lIns="0" tIns="0" rIns="0" bIns="0">
-            <a:spAutoFit/>
-          </a:bodyPr>
-          <a:lstStyle/>
-          <a:p>
-            <a:pPr algn="l">
-              <a:lnSpc>
-                <a:spcPct val="100000"/>
-              </a:lnSpc>
-              <a:spcAft>
-                <a:spcPts val="300"/>
-              </a:spcAft>
-              <a:defRPr sz="1200" b="1">
-                <a:solidFill>
-                  <a:srgbClr val="0E7C86"/>
-                </a:solidFill>
-                <a:latin typeface="Calibri"/>
-              </a:defRPr>
-            </a:pPr>
-            <a:r>
-              <a:rPr sz="1200" b="1">
-                <a:solidFill>
-                  <a:srgbClr val="0E7C86"/>
-                </a:solidFill>
-                <a:latin typeface="Calibri"/>
-              </a:rPr>
-              <a:t>Answer these</a:t>
-            </a:r>
-          </a:p>
-        </p:txBody>
-      </p:sp>
-      <p:sp>
-        <p:nvSpPr>
-          <p:cNvPr id="11" name="TextBox 10"/>
-          <p:cNvSpPr txBox="1"/>
-          <p:nvPr/>
-        </p:nvSpPr>
-        <p:spPr>
-          <a:xfrm>
-            <a:off x="6301587" y="4448556"/>
-            <a:ext cx="5387187" cy="1815084"/>
-          </a:xfrm>
-          <a:prstGeom prst="rect">
-            <a:avLst/>
-          </a:prstGeom>
-          <a:noFill/>
-        </p:spPr>
-        <p:txBody>
-          <a:bodyPr wrap="square" lIns="0" tIns="0" rIns="0" bIns="0">
-            <a:spAutoFit/>
-          </a:bodyPr>
-          <a:lstStyle/>
+              <a:defRPr sz="1800" b="0">
+                <a:solidFill>
+                  <a:srgbClr val="222222"/>
+                </a:solidFill>
+                <a:latin typeface="Calibri"/>
+              </a:defRPr>
+            </a:pPr>
+            <a:r>
+              <a:rPr sz="1800" b="0">
+                <a:solidFill>
+                  <a:srgbClr val="222222"/>
+                </a:solidFill>
+                <a:latin typeface="Calibri"/>
+              </a:rPr>
+              <a:t>EEPROM is a flat array of bytes. YOU choose where each value lives, and nothing stops two values overlapping.</a:t>
+            </a:r>
+          </a:p>
           <a:p>
             <a:pPr algn="l">
               <a:lnSpc>
@@ -4122,21 +4140,21 @@
               <a:spcAft>
                 <a:spcPts val="600"/>
               </a:spcAft>
-              <a:defRPr sz="1500" b="0">
-                <a:solidFill>
-                  <a:srgbClr val="222222"/>
-                </a:solidFill>
-                <a:latin typeface="Calibri"/>
-              </a:defRPr>
-            </a:pPr>
-            <a:r>
-              <a:rPr sz="1500" b="0">
-                <a:solidFill>
-                  <a:srgbClr val="222222"/>
-                </a:solidFill>
-                <a:latin typeface="Calibri"/>
-              </a:rPr>
-              <a:t>What is at address 0 in the dump, and what does it mean?</a:t>
+              <a:defRPr sz="1800" b="0">
+                <a:solidFill>
+                  <a:srgbClr val="222222"/>
+                </a:solidFill>
+                <a:latin typeface="Calibri"/>
+              </a:defRPr>
+            </a:pPr>
+            <a:r>
+              <a:rPr sz="1800" b="0">
+                <a:solidFill>
+                  <a:srgbClr val="222222"/>
+                </a:solidFill>
+                <a:latin typeface="Calibri"/>
+              </a:rPr>
+              <a:t>An int is 4 bytes and a float is 4 bytes on this chip, so each slot gets 4.</a:t>
             </a:r>
           </a:p>
           <a:p>
@@ -4147,21 +4165,46 @@
               <a:spcAft>
                 <a:spcPts val="600"/>
               </a:spcAft>
-              <a:defRPr sz="1500" b="0">
-                <a:solidFill>
-                  <a:srgbClr val="222222"/>
-                </a:solidFill>
-                <a:latin typeface="Calibri"/>
-              </a:defRPr>
-            </a:pPr>
-            <a:r>
-              <a:rPr sz="1500" b="0">
-                <a:solidFill>
-                  <a:srgbClr val="222222"/>
-                </a:solidFill>
-                <a:latin typeface="Calibri"/>
-              </a:rPr>
-              <a:t>Why is range checking needed even when the magic byte is correct?</a:t>
+              <a:defRPr sz="1800" b="0">
+                <a:solidFill>
+                  <a:srgbClr val="222222"/>
+                </a:solidFill>
+                <a:latin typeface="Calibri"/>
+              </a:defRPr>
+            </a:pPr>
+            <a:r>
+              <a:rPr sz="1800" b="0">
+                <a:solidFill>
+                  <a:srgbClr val="222222"/>
+                </a:solidFill>
+                <a:latin typeface="Calibri"/>
+              </a:rPr>
+              <a:t>Laying them out as one ADDR_ constant per value, in one place, is what makes an overlap visible when you read the file.</a:t>
+            </a:r>
+          </a:p>
+          <a:p>
+            <a:pPr algn="l">
+              <a:lnSpc>
+                <a:spcPct val="100000"/>
+              </a:lnSpc>
+              <a:spcAft>
+                <a:spcPts val="600"/>
+              </a:spcAft>
+              <a:defRPr sz="1800" b="0">
+                <a:solidFill>
+                  <a:srgbClr val="222222"/>
+                </a:solidFill>
+                <a:latin typeface="Calibri"/>
+              </a:defRPr>
+            </a:pPr>
+            <a:r>
+              <a:rPr sz="1800" b="0">
+                <a:solidFill>
+                  <a:srgbClr val="222222"/>
+                </a:solidFill>
+                <a:latin typeface="Calibri"/>
+              </a:rPr>
+              <a:t>Get this wrong and one setting silently corrupts another. It will look like a hardware fault.</a:t>
             </a:r>
           </a:p>
         </p:txBody>
@@ -4225,7 +4268,7 @@
                 </a:solidFill>
                 <a:latin typeface="Calibri"/>
               </a:rPr>
-              <a:t>Where each program keeps its controller address</a:t>
+              <a:t>The magic byte, and never trusting storage</a:t>
             </a:r>
           </a:p>
         </p:txBody>
@@ -4303,7 +4346,7 @@
               <a:spcAft>
                 <a:spcPts val="0"/>
               </a:spcAft>
-              <a:defRPr sz="900" b="0">
+              <a:defRPr sz="1000" b="0">
                 <a:solidFill>
                   <a:srgbClr val="666666"/>
                 </a:solidFill>
@@ -4311,7 +4354,7 @@
               </a:defRPr>
             </a:pPr>
             <a:r>
-              <a:rPr sz="900" b="0">
+              <a:rPr sz="1000" b="0">
                 <a:solidFill>
                   <a:srgbClr val="666666"/>
                 </a:solidFill>
@@ -4351,7 +4394,7 @@
               <a:spcAft>
                 <a:spcPts val="0"/>
               </a:spcAft>
-              <a:defRPr sz="900" b="0">
+              <a:defRPr sz="1000" b="0">
                 <a:solidFill>
                   <a:srgbClr val="666666"/>
                 </a:solidFill>
@@ -4359,13 +4402,1380 @@
               </a:defRPr>
             </a:pPr>
             <a:r>
-              <a:rPr sz="900" b="0">
+              <a:rPr sz="1000" b="0">
                 <a:solidFill>
                   <a:srgbClr val="666666"/>
                 </a:solidFill>
                 <a:latin typeface="Calibri"/>
               </a:rPr>
               <a:t>10</a:t>
+            </a:r>
+          </a:p>
+        </p:txBody>
+      </p:sp>
+      <p:sp>
+        <p:nvSpPr>
+          <p:cNvPr id="6" name="TextBox 5"/>
+          <p:cNvSpPr txBox="1"/>
+          <p:nvPr/>
+        </p:nvSpPr>
+        <p:spPr>
+          <a:xfrm>
+            <a:off x="502920" y="1188720"/>
+            <a:ext cx="11185855" cy="530352"/>
+          </a:xfrm>
+          <a:prstGeom prst="rect">
+            <a:avLst/>
+          </a:prstGeom>
+          <a:noFill/>
+        </p:spPr>
+        <p:txBody>
+          <a:bodyPr wrap="square" lIns="0" tIns="0" rIns="0" bIns="0">
+            <a:spAutoFit/>
+          </a:bodyPr>
+          <a:lstStyle/>
+          <a:p>
+            <a:pPr algn="l">
+              <a:lnSpc>
+                <a:spcPct val="100000"/>
+              </a:lnSpc>
+              <a:spcAft>
+                <a:spcPts val="600"/>
+              </a:spcAft>
+              <a:defRPr sz="1900" b="1">
+                <a:solidFill>
+                  <a:srgbClr val="0E7C86"/>
+                </a:solidFill>
+                <a:latin typeface="Calibri"/>
+              </a:defRPr>
+            </a:pPr>
+            <a:r>
+              <a:rPr sz="1900" b="1">
+                <a:solidFill>
+                  <a:srgbClr val="0E7C86"/>
+                </a:solidFill>
+                <a:latin typeface="Calibri"/>
+              </a:rPr>
+              <a:t>Two separate checks, for two separate problems</a:t>
+            </a:r>
+          </a:p>
+        </p:txBody>
+      </p:sp>
+      <p:sp>
+        <p:nvSpPr>
+          <p:cNvPr id="7" name="TextBox 6"/>
+          <p:cNvSpPr txBox="1"/>
+          <p:nvPr/>
+        </p:nvSpPr>
+        <p:spPr>
+          <a:xfrm>
+            <a:off x="502920" y="1755648"/>
+            <a:ext cx="11185855" cy="4507992"/>
+          </a:xfrm>
+          <a:prstGeom prst="rect">
+            <a:avLst/>
+          </a:prstGeom>
+          <a:noFill/>
+        </p:spPr>
+        <p:txBody>
+          <a:bodyPr wrap="square" lIns="0" tIns="0" rIns="0" bIns="0">
+            <a:spAutoFit/>
+          </a:bodyPr>
+          <a:lstStyle/>
+          <a:p>
+            <a:pPr algn="l">
+              <a:lnSpc>
+                <a:spcPct val="100000"/>
+              </a:lnSpc>
+              <a:spcAft>
+                <a:spcPts val="900"/>
+              </a:spcAft>
+              <a:defRPr sz="1800" b="0">
+                <a:solidFill>
+                  <a:srgbClr val="222222"/>
+                </a:solidFill>
+                <a:latin typeface="Calibri"/>
+              </a:defRPr>
+            </a:pPr>
+            <a:r>
+              <a:rPr sz="1800" b="0">
+                <a:solidFill>
+                  <a:srgbClr val="222222"/>
+                </a:solidFill>
+                <a:latin typeface="Calibri"/>
+              </a:rPr>
+              <a:t>A brand new ESP32 has flash full of 0xFF. Read an int out of that and you get -1. Read a float and you get something meaningless.</a:t>
+            </a:r>
+          </a:p>
+          <a:p>
+            <a:pPr algn="l">
+              <a:lnSpc>
+                <a:spcPct val="100000"/>
+              </a:lnSpc>
+              <a:spcAft>
+                <a:spcPts val="900"/>
+              </a:spcAft>
+              <a:defRPr sz="1800" b="0">
+                <a:solidFill>
+                  <a:srgbClr val="222222"/>
+                </a:solidFill>
+                <a:latin typeface="Calibri"/>
+              </a:defRPr>
+            </a:pPr>
+          </a:p>
+          <a:p>
+            <a:pPr algn="l">
+              <a:lnSpc>
+                <a:spcPct val="100000"/>
+              </a:lnSpc>
+              <a:spcAft>
+                <a:spcPts val="900"/>
+              </a:spcAft>
+              <a:defRPr sz="1800" b="0">
+                <a:solidFill>
+                  <a:srgbClr val="222222"/>
+                </a:solidFill>
+                <a:latin typeface="Calibri"/>
+              </a:defRPr>
+            </a:pPr>
+            <a:r>
+              <a:rPr sz="1800" b="0">
+                <a:solidFill>
+                  <a:srgbClr val="222222"/>
+                </a:solidFill>
+                <a:latin typeface="Calibri"/>
+              </a:rPr>
+              <a:t>So the first byte of the block is a MARKER, written only after a successful save. If it is not 0xA5, the data is not ours and we use the compiled-in defaults.</a:t>
+            </a:r>
+          </a:p>
+          <a:p>
+            <a:pPr algn="l">
+              <a:lnSpc>
+                <a:spcPct val="100000"/>
+              </a:lnSpc>
+              <a:spcAft>
+                <a:spcPts val="900"/>
+              </a:spcAft>
+              <a:defRPr sz="1800" b="0">
+                <a:solidFill>
+                  <a:srgbClr val="222222"/>
+                </a:solidFill>
+                <a:latin typeface="Calibri"/>
+              </a:defRPr>
+            </a:pPr>
+          </a:p>
+          <a:p>
+            <a:pPr algn="l">
+              <a:lnSpc>
+                <a:spcPct val="100000"/>
+              </a:lnSpc>
+              <a:spcAft>
+                <a:spcPts val="900"/>
+              </a:spcAft>
+              <a:defRPr sz="1800" b="0">
+                <a:solidFill>
+                  <a:srgbClr val="222222"/>
+                </a:solidFill>
+                <a:latin typeface="Calibri"/>
+              </a:defRPr>
+            </a:pPr>
+            <a:r>
+              <a:rPr sz="1800" b="0">
+                <a:solidFill>
+                  <a:srgbClr val="222222"/>
+                </a:solidFill>
+                <a:latin typeface="Calibri"/>
+              </a:rPr>
+              <a:t>But that is not enough on its own. Even WITH the marker, every value is range checked as it loads:</a:t>
+            </a:r>
+          </a:p>
+          <a:p>
+            <a:pPr lvl="1" algn="l">
+              <a:lnSpc>
+                <a:spcPct val="100000"/>
+              </a:lnSpc>
+              <a:spcAft>
+                <a:spcPts val="900"/>
+              </a:spcAft>
+              <a:defRPr sz="1800" b="0">
+                <a:solidFill>
+                  <a:srgbClr val="222222"/>
+                </a:solidFill>
+                <a:latin typeface="Calibri"/>
+              </a:defRPr>
+            </a:pPr>
+            <a:r>
+              <a:rPr sz="1800" b="0">
+                <a:solidFill>
+                  <a:srgbClr val="222222"/>
+                </a:solidFill>
+                <a:latin typeface="Calibri"/>
+              </a:rPr>
+              <a:t>if (saved_dz &gt;= 0 &amp;&amp; saved_dz &lt;= DEADZONE_MAX)  INPUT_DEADZONE = saved_dz;</a:t>
+            </a:r>
+          </a:p>
+        </p:txBody>
+      </p:sp>
+    </p:spTree>
+  </p:cSld>
+  <p:clrMapOvr>
+    <a:masterClrMapping/>
+  </p:clrMapOvr>
+</p:sld>
+</file>
+
+<file path=ppt/slides/slide12.xml><?xml version="1.0" encoding="utf-8"?>
+<p:sld xmlns:a="http://schemas.openxmlformats.org/drawingml/2006/main" xmlns:p="http://schemas.openxmlformats.org/presentationml/2006/main" xmlns:r="http://schemas.openxmlformats.org/officeDocument/2006/relationships">
+  <p:cSld>
+    <p:spTree>
+      <p:nvGrpSpPr>
+        <p:cNvPr id="1" name=""/>
+        <p:cNvGrpSpPr/>
+        <p:nvPr/>
+      </p:nvGrpSpPr>
+      <p:grpSpPr/>
+      <p:sp>
+        <p:nvSpPr>
+          <p:cNvPr id="2" name="Title 1"/>
+          <p:cNvSpPr>
+            <a:spLocks noGrp="1"/>
+          </p:cNvSpPr>
+          <p:nvPr>
+            <p:ph type="title"/>
+          </p:nvPr>
+        </p:nvSpPr>
+        <p:spPr>
+          <a:xfrm>
+            <a:off x="502920" y="274320"/>
+            <a:ext cx="11185855" cy="777240"/>
+          </a:xfrm>
+        </p:spPr>
+        <p:txBody>
+          <a:bodyPr wrap="square" anchor="b"/>
+          <a:lstStyle/>
+          <a:p>
+            <a:pPr algn="l">
+              <a:lnSpc>
+                <a:spcPct val="100000"/>
+              </a:lnSpc>
+              <a:spcAft>
+                <a:spcPts val="0"/>
+              </a:spcAft>
+              <a:defRPr sz="2800" b="1">
+                <a:solidFill>
+                  <a:srgbClr val="1F3A5F"/>
+                </a:solidFill>
+                <a:latin typeface="Calibri"/>
+              </a:defRPr>
+            </a:pPr>
+            <a:r>
+              <a:rPr sz="2800" b="1">
+                <a:solidFill>
+                  <a:srgbClr val="1F3A5F"/>
+                </a:solidFill>
+                <a:latin typeface="Calibri"/>
+              </a:rPr>
+              <a:t>The magic byte, and never trusting storage  (continued)</a:t>
+            </a:r>
+          </a:p>
+        </p:txBody>
+      </p:sp>
+      <p:sp>
+        <p:nvSpPr>
+          <p:cNvPr id="3" name="Rectangle 2"/>
+          <p:cNvSpPr/>
+          <p:nvPr/>
+        </p:nvSpPr>
+        <p:spPr>
+          <a:xfrm>
+            <a:off x="502920" y="1097280"/>
+            <a:ext cx="11185855" cy="19050"/>
+          </a:xfrm>
+          <a:prstGeom prst="rect">
+            <a:avLst/>
+          </a:prstGeom>
+          <a:solidFill>
+            <a:srgbClr val="C8D2DE"/>
+          </a:solidFill>
+          <a:ln>
+            <a:noFill/>
+          </a:ln>
+          <a:effectLst/>
+        </p:spPr>
+        <p:style>
+          <a:lnRef idx="1">
+            <a:schemeClr val="accent1"/>
+          </a:lnRef>
+          <a:fillRef idx="3">
+            <a:schemeClr val="accent1"/>
+          </a:fillRef>
+          <a:effectRef idx="2">
+            <a:schemeClr val="accent1"/>
+          </a:effectRef>
+          <a:fontRef idx="minor">
+            <a:schemeClr val="lt1"/>
+          </a:fontRef>
+        </p:style>
+        <p:txBody>
+          <a:bodyPr rtlCol="0" anchor="ctr"/>
+          <a:lstStyle/>
+          <a:p>
+            <a:pPr algn="ctr"/>
+          </a:p>
+        </p:txBody>
+      </p:sp>
+      <p:sp>
+        <p:nvSpPr>
+          <p:cNvPr id="4" name="TextBox 3"/>
+          <p:cNvSpPr txBox="1"/>
+          <p:nvPr/>
+        </p:nvSpPr>
+        <p:spPr>
+          <a:xfrm>
+            <a:off x="502920" y="6382512"/>
+            <a:ext cx="10545775" cy="274320"/>
+          </a:xfrm>
+          <a:prstGeom prst="rect">
+            <a:avLst/>
+          </a:prstGeom>
+          <a:noFill/>
+        </p:spPr>
+        <p:txBody>
+          <a:bodyPr wrap="square" lIns="0" tIns="0">
+            <a:spAutoFit/>
+          </a:bodyPr>
+          <a:lstStyle/>
+          <a:p>
+            <a:pPr algn="l">
+              <a:lnSpc>
+                <a:spcPct val="100000"/>
+              </a:lnSpc>
+              <a:spcAft>
+                <a:spcPts val="0"/>
+              </a:spcAft>
+              <a:defRPr sz="1000" b="0">
+                <a:solidFill>
+                  <a:srgbClr val="666666"/>
+                </a:solidFill>
+                <a:latin typeface="Calibri"/>
+              </a:defRPr>
+            </a:pPr>
+            <a:r>
+              <a:rPr sz="1000" b="0">
+                <a:solidFill>
+                  <a:srgbClr val="666666"/>
+                </a:solidFill>
+                <a:latin typeface="Calibri"/>
+              </a:rPr>
+              <a:t>Pathfinder Advanced - Op Program 12  |  Lesson 3</a:t>
+            </a:r>
+          </a:p>
+        </p:txBody>
+      </p:sp>
+      <p:sp>
+        <p:nvSpPr>
+          <p:cNvPr id="5" name="TextBox 4"/>
+          <p:cNvSpPr txBox="1"/>
+          <p:nvPr/>
+        </p:nvSpPr>
+        <p:spPr>
+          <a:xfrm>
+            <a:off x="11231575" y="6382512"/>
+            <a:ext cx="457200" cy="274320"/>
+          </a:xfrm>
+          <a:prstGeom prst="rect">
+            <a:avLst/>
+          </a:prstGeom>
+          <a:noFill/>
+        </p:spPr>
+        <p:txBody>
+          <a:bodyPr wrap="square" lIns="0" tIns="0">
+            <a:spAutoFit/>
+          </a:bodyPr>
+          <a:lstStyle/>
+          <a:p>
+            <a:pPr algn="r">
+              <a:lnSpc>
+                <a:spcPct val="100000"/>
+              </a:lnSpc>
+              <a:spcAft>
+                <a:spcPts val="0"/>
+              </a:spcAft>
+              <a:defRPr sz="1000" b="0">
+                <a:solidFill>
+                  <a:srgbClr val="666666"/>
+                </a:solidFill>
+                <a:latin typeface="Calibri"/>
+              </a:defRPr>
+            </a:pPr>
+            <a:r>
+              <a:rPr sz="1000" b="0">
+                <a:solidFill>
+                  <a:srgbClr val="666666"/>
+                </a:solidFill>
+                <a:latin typeface="Calibri"/>
+              </a:rPr>
+              <a:t>11</a:t>
+            </a:r>
+          </a:p>
+        </p:txBody>
+      </p:sp>
+      <p:sp>
+        <p:nvSpPr>
+          <p:cNvPr id="6" name="TextBox 5"/>
+          <p:cNvSpPr txBox="1"/>
+          <p:nvPr/>
+        </p:nvSpPr>
+        <p:spPr>
+          <a:xfrm>
+            <a:off x="502920" y="1188720"/>
+            <a:ext cx="11185855" cy="5074920"/>
+          </a:xfrm>
+          <a:prstGeom prst="rect">
+            <a:avLst/>
+          </a:prstGeom>
+          <a:noFill/>
+        </p:spPr>
+        <p:txBody>
+          <a:bodyPr wrap="square" lIns="0" tIns="0" rIns="0" bIns="0">
+            <a:spAutoFit/>
+          </a:bodyPr>
+          <a:lstStyle/>
+          <a:p>
+            <a:pPr algn="l">
+              <a:lnSpc>
+                <a:spcPct val="100000"/>
+              </a:lnSpc>
+              <a:spcAft>
+                <a:spcPts val="900"/>
+              </a:spcAft>
+              <a:defRPr sz="1800" b="0">
+                <a:solidFill>
+                  <a:srgbClr val="222222"/>
+                </a:solidFill>
+                <a:latin typeface="Calibri"/>
+              </a:defRPr>
+            </a:pPr>
+            <a:r>
+              <a:rPr sz="1800" b="0">
+                <a:solidFill>
+                  <a:srgbClr val="222222"/>
+                </a:solidFill>
+                <a:latin typeface="Calibri"/>
+              </a:rPr>
+              <a:t>Why? Because a value saved by an OLDER version of the program is perfectly valid data and still wrong for this one. The marker tells you the bytes are yours. It does not tell you they still make sense.</a:t>
+            </a:r>
+          </a:p>
+          <a:p>
+            <a:pPr algn="l">
+              <a:lnSpc>
+                <a:spcPct val="100000"/>
+              </a:lnSpc>
+              <a:spcAft>
+                <a:spcPts val="900"/>
+              </a:spcAft>
+              <a:defRPr sz="1800" b="0">
+                <a:solidFill>
+                  <a:srgbClr val="222222"/>
+                </a:solidFill>
+                <a:latin typeface="Calibri"/>
+              </a:defRPr>
+            </a:pPr>
+          </a:p>
+          <a:p>
+            <a:pPr algn="l">
+              <a:lnSpc>
+                <a:spcPct val="100000"/>
+              </a:lnSpc>
+              <a:spcAft>
+                <a:spcPts val="900"/>
+              </a:spcAft>
+              <a:defRPr sz="1800" b="0">
+                <a:solidFill>
+                  <a:srgbClr val="222222"/>
+                </a:solidFill>
+                <a:latin typeface="Calibri"/>
+              </a:defRPr>
+            </a:pPr>
+            <a:r>
+              <a:rPr sz="1800" b="0">
+                <a:solidFill>
+                  <a:srgbClr val="222222"/>
+                </a:solidFill>
+                <a:latin typeface="Calibri"/>
+              </a:rPr>
+              <a:t>Defensive loading is not paranoia. It is the difference between a vehicle that boots with odd settings and one that will not boot.</a:t>
+            </a:r>
+          </a:p>
+        </p:txBody>
+      </p:sp>
+    </p:spTree>
+  </p:cSld>
+  <p:clrMapOvr>
+    <a:masterClrMapping/>
+  </p:clrMapOvr>
+</p:sld>
+</file>
+
+<file path=ppt/slides/slide13.xml><?xml version="1.0" encoding="utf-8"?>
+<p:sld xmlns:a="http://schemas.openxmlformats.org/drawingml/2006/main" xmlns:p="http://schemas.openxmlformats.org/presentationml/2006/main" xmlns:r="http://schemas.openxmlformats.org/officeDocument/2006/relationships">
+  <p:cSld>
+    <p:spTree>
+      <p:nvGrpSpPr>
+        <p:cNvPr id="1" name=""/>
+        <p:cNvGrpSpPr/>
+        <p:nvPr/>
+      </p:nvGrpSpPr>
+      <p:grpSpPr/>
+      <p:sp>
+        <p:nvSpPr>
+          <p:cNvPr id="2" name="Title 1"/>
+          <p:cNvSpPr>
+            <a:spLocks noGrp="1"/>
+          </p:cNvSpPr>
+          <p:nvPr>
+            <p:ph type="title"/>
+          </p:nvPr>
+        </p:nvSpPr>
+        <p:spPr>
+          <a:xfrm>
+            <a:off x="502920" y="274320"/>
+            <a:ext cx="11185855" cy="777240"/>
+          </a:xfrm>
+        </p:spPr>
+        <p:txBody>
+          <a:bodyPr wrap="square" anchor="b"/>
+          <a:lstStyle/>
+          <a:p>
+            <a:pPr algn="l">
+              <a:lnSpc>
+                <a:spcPct val="100000"/>
+              </a:lnSpc>
+              <a:spcAft>
+                <a:spcPts val="0"/>
+              </a:spcAft>
+              <a:defRPr sz="2800" b="1">
+                <a:solidFill>
+                  <a:srgbClr val="1F3A5F"/>
+                </a:solidFill>
+                <a:latin typeface="Calibri"/>
+              </a:defRPr>
+            </a:pPr>
+            <a:r>
+              <a:rPr sz="2800" b="1">
+                <a:solidFill>
+                  <a:srgbClr val="1F3A5F"/>
+                </a:solidFill>
+                <a:latin typeface="Calibri"/>
+              </a:rPr>
+              <a:t>Do it now  -  settings that survive</a:t>
+            </a:r>
+          </a:p>
+        </p:txBody>
+      </p:sp>
+      <p:sp>
+        <p:nvSpPr>
+          <p:cNvPr id="3" name="Rectangle 2"/>
+          <p:cNvSpPr/>
+          <p:nvPr/>
+        </p:nvSpPr>
+        <p:spPr>
+          <a:xfrm>
+            <a:off x="502920" y="1097280"/>
+            <a:ext cx="11185855" cy="19050"/>
+          </a:xfrm>
+          <a:prstGeom prst="rect">
+            <a:avLst/>
+          </a:prstGeom>
+          <a:solidFill>
+            <a:srgbClr val="C8D2DE"/>
+          </a:solidFill>
+          <a:ln>
+            <a:noFill/>
+          </a:ln>
+          <a:effectLst/>
+        </p:spPr>
+        <p:style>
+          <a:lnRef idx="1">
+            <a:schemeClr val="accent1"/>
+          </a:lnRef>
+          <a:fillRef idx="3">
+            <a:schemeClr val="accent1"/>
+          </a:fillRef>
+          <a:effectRef idx="2">
+            <a:schemeClr val="accent1"/>
+          </a:effectRef>
+          <a:fontRef idx="minor">
+            <a:schemeClr val="lt1"/>
+          </a:fontRef>
+        </p:style>
+        <p:txBody>
+          <a:bodyPr rtlCol="0" anchor="ctr"/>
+          <a:lstStyle/>
+          <a:p>
+            <a:pPr algn="ctr"/>
+          </a:p>
+        </p:txBody>
+      </p:sp>
+      <p:sp>
+        <p:nvSpPr>
+          <p:cNvPr id="4" name="TextBox 3"/>
+          <p:cNvSpPr txBox="1"/>
+          <p:nvPr/>
+        </p:nvSpPr>
+        <p:spPr>
+          <a:xfrm>
+            <a:off x="502920" y="6382512"/>
+            <a:ext cx="10545775" cy="274320"/>
+          </a:xfrm>
+          <a:prstGeom prst="rect">
+            <a:avLst/>
+          </a:prstGeom>
+          <a:noFill/>
+        </p:spPr>
+        <p:txBody>
+          <a:bodyPr wrap="square" lIns="0" tIns="0">
+            <a:spAutoFit/>
+          </a:bodyPr>
+          <a:lstStyle/>
+          <a:p>
+            <a:pPr algn="l">
+              <a:lnSpc>
+                <a:spcPct val="100000"/>
+              </a:lnSpc>
+              <a:spcAft>
+                <a:spcPts val="0"/>
+              </a:spcAft>
+              <a:defRPr sz="1000" b="0">
+                <a:solidFill>
+                  <a:srgbClr val="666666"/>
+                </a:solidFill>
+                <a:latin typeface="Calibri"/>
+              </a:defRPr>
+            </a:pPr>
+            <a:r>
+              <a:rPr sz="1000" b="0">
+                <a:solidFill>
+                  <a:srgbClr val="666666"/>
+                </a:solidFill>
+                <a:latin typeface="Calibri"/>
+              </a:rPr>
+              <a:t>Pathfinder Advanced - Op Program 12  |  Lesson 3</a:t>
+            </a:r>
+          </a:p>
+        </p:txBody>
+      </p:sp>
+      <p:sp>
+        <p:nvSpPr>
+          <p:cNvPr id="5" name="TextBox 4"/>
+          <p:cNvSpPr txBox="1"/>
+          <p:nvPr/>
+        </p:nvSpPr>
+        <p:spPr>
+          <a:xfrm>
+            <a:off x="11231575" y="6382512"/>
+            <a:ext cx="457200" cy="274320"/>
+          </a:xfrm>
+          <a:prstGeom prst="rect">
+            <a:avLst/>
+          </a:prstGeom>
+          <a:noFill/>
+        </p:spPr>
+        <p:txBody>
+          <a:bodyPr wrap="square" lIns="0" tIns="0">
+            <a:spAutoFit/>
+          </a:bodyPr>
+          <a:lstStyle/>
+          <a:p>
+            <a:pPr algn="r">
+              <a:lnSpc>
+                <a:spcPct val="100000"/>
+              </a:lnSpc>
+              <a:spcAft>
+                <a:spcPts val="0"/>
+              </a:spcAft>
+              <a:defRPr sz="1000" b="0">
+                <a:solidFill>
+                  <a:srgbClr val="666666"/>
+                </a:solidFill>
+                <a:latin typeface="Calibri"/>
+              </a:defRPr>
+            </a:pPr>
+            <a:r>
+              <a:rPr sz="1000" b="0">
+                <a:solidFill>
+                  <a:srgbClr val="666666"/>
+                </a:solidFill>
+                <a:latin typeface="Calibri"/>
+              </a:rPr>
+              <a:t>12</a:t>
+            </a:r>
+          </a:p>
+        </p:txBody>
+      </p:sp>
+      <p:sp>
+        <p:nvSpPr>
+          <p:cNvPr id="6" name="Rounded Rectangle 5"/>
+          <p:cNvSpPr/>
+          <p:nvPr/>
+        </p:nvSpPr>
+        <p:spPr>
+          <a:xfrm>
+            <a:off x="502920" y="1188720"/>
+            <a:ext cx="11185855" cy="530352"/>
+          </a:xfrm>
+          <a:prstGeom prst="roundRect">
+            <a:avLst>
+              <a:gd name="adj" fmla="val 4000"/>
+            </a:avLst>
+          </a:prstGeom>
+          <a:solidFill>
+            <a:srgbClr val="0E7C86"/>
+          </a:solidFill>
+          <a:ln>
+            <a:noFill/>
+          </a:ln>
+          <a:effectLst/>
+        </p:spPr>
+        <p:style>
+          <a:lnRef idx="1">
+            <a:schemeClr val="accent1"/>
+          </a:lnRef>
+          <a:fillRef idx="3">
+            <a:schemeClr val="accent1"/>
+          </a:fillRef>
+          <a:effectRef idx="2">
+            <a:schemeClr val="accent1"/>
+          </a:effectRef>
+          <a:fontRef idx="minor">
+            <a:schemeClr val="lt1"/>
+          </a:fontRef>
+        </p:style>
+        <p:txBody>
+          <a:bodyPr rtlCol="0" anchor="ctr" wrap="square" lIns="182880"/>
+          <a:lstStyle/>
+          <a:p>
+            <a:pPr algn="l"/>
+            <a:r>
+              <a:rPr sz="1300" b="1">
+                <a:solidFill>
+                  <a:srgbClr val="FFFFFF"/>
+                </a:solidFill>
+                <a:latin typeface="Calibri"/>
+              </a:rPr>
+              <a:t>UPLOAD AND RUN:   </a:t>
+            </a:r>
+            <a:r>
+              <a:rPr sz="1500" b="1">
+                <a:solidFill>
+                  <a:srgbClr val="FFFFFF"/>
+                </a:solidFill>
+                <a:latin typeface="Consolas"/>
+              </a:rPr>
+              <a:t>a3b_eeprom_settings</a:t>
+            </a:r>
+            <a:r>
+              <a:rPr sz="1200">
+                <a:solidFill>
+                  <a:srgbClr val="FFFFFF"/>
+                </a:solidFill>
+                <a:latin typeface="Calibri"/>
+              </a:rPr>
+              <a:t>     (30 minutes)</a:t>
+            </a:r>
+          </a:p>
+        </p:txBody>
+      </p:sp>
+      <p:sp>
+        <p:nvSpPr>
+          <p:cNvPr id="7" name="TextBox 6"/>
+          <p:cNvSpPr txBox="1"/>
+          <p:nvPr/>
+        </p:nvSpPr>
+        <p:spPr>
+          <a:xfrm>
+            <a:off x="502920" y="1901952"/>
+            <a:ext cx="5387187" cy="4361688"/>
+          </a:xfrm>
+          <a:prstGeom prst="rect">
+            <a:avLst/>
+          </a:prstGeom>
+          <a:noFill/>
+        </p:spPr>
+        <p:txBody>
+          <a:bodyPr wrap="square" lIns="0" tIns="0" rIns="0" bIns="0">
+            <a:spAutoFit/>
+          </a:bodyPr>
+          <a:lstStyle/>
+          <a:p>
+            <a:pPr algn="l">
+              <a:lnSpc>
+                <a:spcPct val="100000"/>
+              </a:lnSpc>
+              <a:spcAft>
+                <a:spcPts val="400"/>
+              </a:spcAft>
+              <a:defRPr sz="1800" b="0">
+                <a:solidFill>
+                  <a:srgbClr val="222222"/>
+                </a:solidFill>
+                <a:latin typeface="Calibri"/>
+              </a:defRPr>
+            </a:pPr>
+            <a:r>
+              <a:rPr sz="1800" b="0">
+                <a:solidFill>
+                  <a:srgbClr val="222222"/>
+                </a:solidFill>
+                <a:latin typeface="Calibri"/>
+              </a:rPr>
+              <a:t>1.  set deadzone 100,  save. Now UNPLUG the board and plug it back in. Type  show.</a:t>
+            </a:r>
+          </a:p>
+          <a:p>
+            <a:pPr algn="l">
+              <a:lnSpc>
+                <a:spcPct val="100000"/>
+              </a:lnSpc>
+              <a:spcAft>
+                <a:spcPts val="400"/>
+              </a:spcAft>
+              <a:defRPr sz="1800" b="0">
+                <a:solidFill>
+                  <a:srgbClr val="222222"/>
+                </a:solidFill>
+                <a:latin typeface="Calibri"/>
+              </a:defRPr>
+            </a:pPr>
+            <a:r>
+              <a:rPr sz="1800" b="0">
+                <a:solidFill>
+                  <a:srgbClr val="222222"/>
+                </a:solidFill>
+                <a:latin typeface="Calibri"/>
+              </a:rPr>
+              <a:t>2.  set deadzone 200  and do NOT save. Reset the board. What happened, and why?</a:t>
+            </a:r>
+          </a:p>
+          <a:p>
+            <a:pPr algn="l">
+              <a:lnSpc>
+                <a:spcPct val="100000"/>
+              </a:lnSpc>
+              <a:spcAft>
+                <a:spcPts val="400"/>
+              </a:spcAft>
+              <a:defRPr sz="1800" b="0">
+                <a:solidFill>
+                  <a:srgbClr val="222222"/>
+                </a:solidFill>
+                <a:latin typeface="Calibri"/>
+              </a:defRPr>
+            </a:pPr>
+            <a:r>
+              <a:rPr sz="1800" b="0">
+                <a:solidFill>
+                  <a:srgbClr val="222222"/>
+                </a:solidFill>
+                <a:latin typeface="Calibri"/>
+              </a:rPr>
+              <a:t>3.  erase, then reset. Where did the values come from this time?</a:t>
+            </a:r>
+          </a:p>
+          <a:p>
+            <a:pPr algn="l">
+              <a:lnSpc>
+                <a:spcPct val="100000"/>
+              </a:lnSpc>
+              <a:spcAft>
+                <a:spcPts val="400"/>
+              </a:spcAft>
+              <a:defRPr sz="1800" b="0">
+                <a:solidFill>
+                  <a:srgbClr val="222222"/>
+                </a:solidFill>
+                <a:latin typeface="Calibri"/>
+              </a:defRPr>
+            </a:pPr>
+            <a:r>
+              <a:rPr sz="1800" b="0">
+                <a:solidFill>
+                  <a:srgbClr val="222222"/>
+                </a:solidFill>
+                <a:latin typeface="Calibri"/>
+              </a:rPr>
+              <a:t>4.  dump  before and after a save. Find the magic byte.</a:t>
+            </a:r>
+          </a:p>
+          <a:p>
+            <a:pPr algn="l">
+              <a:lnSpc>
+                <a:spcPct val="100000"/>
+              </a:lnSpc>
+              <a:spcAft>
+                <a:spcPts val="400"/>
+              </a:spcAft>
+              <a:defRPr sz="1800" b="0">
+                <a:solidFill>
+                  <a:srgbClr val="222222"/>
+                </a:solidFill>
+                <a:latin typeface="Calibri"/>
+              </a:defRPr>
+            </a:pPr>
+            <a:r>
+              <a:rPr sz="1800" b="0">
+                <a:solidFill>
+                  <a:srgbClr val="222222"/>
+                </a:solidFill>
+                <a:latin typeface="Calibri"/>
+              </a:rPr>
+              <a:t>5.  Comment out the EEPROM.commit() in saveSettings. Save, reset, and see the bug you will one day write for real.</a:t>
+            </a:r>
+          </a:p>
+          <a:p>
+            <a:pPr algn="l">
+              <a:lnSpc>
+                <a:spcPct val="100000"/>
+              </a:lnSpc>
+              <a:spcAft>
+                <a:spcPts val="400"/>
+              </a:spcAft>
+              <a:defRPr sz="1800" b="0">
+                <a:solidFill>
+                  <a:srgbClr val="222222"/>
+                </a:solidFill>
+                <a:latin typeface="Calibri"/>
+              </a:defRPr>
+            </a:pPr>
+            <a:r>
+              <a:rPr sz="1800" b="0">
+                <a:solidFill>
+                  <a:srgbClr val="222222"/>
+                </a:solidFill>
+                <a:latin typeface="Calibri"/>
+              </a:rPr>
+              <a:t>6.  Deliberately overlap two ADDR_ constants and watch one setting eat the other.</a:t>
+            </a:r>
+          </a:p>
+        </p:txBody>
+      </p:sp>
+      <p:sp>
+        <p:nvSpPr>
+          <p:cNvPr id="8" name="TextBox 7"/>
+          <p:cNvSpPr txBox="1"/>
+          <p:nvPr/>
+        </p:nvSpPr>
+        <p:spPr>
+          <a:xfrm>
+            <a:off x="6301587" y="1901952"/>
+            <a:ext cx="5387187" cy="365760"/>
+          </a:xfrm>
+          <a:prstGeom prst="rect">
+            <a:avLst/>
+          </a:prstGeom>
+          <a:noFill/>
+        </p:spPr>
+        <p:txBody>
+          <a:bodyPr wrap="square" lIns="0" tIns="0" rIns="0" bIns="0">
+            <a:spAutoFit/>
+          </a:bodyPr>
+          <a:lstStyle/>
+          <a:p>
+            <a:pPr algn="l">
+              <a:lnSpc>
+                <a:spcPct val="100000"/>
+              </a:lnSpc>
+              <a:spcAft>
+                <a:spcPts val="200"/>
+              </a:spcAft>
+              <a:defRPr sz="1800" b="1">
+                <a:solidFill>
+                  <a:srgbClr val="0E7C86"/>
+                </a:solidFill>
+                <a:latin typeface="Calibri"/>
+              </a:defRPr>
+            </a:pPr>
+            <a:r>
+              <a:rPr sz="1800" b="1">
+                <a:solidFill>
+                  <a:srgbClr val="0E7C86"/>
+                </a:solidFill>
+                <a:latin typeface="Calibri"/>
+              </a:rPr>
+              <a:t>What you should see</a:t>
+            </a:r>
+          </a:p>
+        </p:txBody>
+      </p:sp>
+      <p:sp>
+        <p:nvSpPr>
+          <p:cNvPr id="9" name="TextBox 8"/>
+          <p:cNvSpPr txBox="1"/>
+          <p:nvPr/>
+        </p:nvSpPr>
+        <p:spPr>
+          <a:xfrm>
+            <a:off x="6301587" y="2304288"/>
+            <a:ext cx="5387187" cy="1778508"/>
+          </a:xfrm>
+          <a:prstGeom prst="rect">
+            <a:avLst/>
+          </a:prstGeom>
+          <a:noFill/>
+        </p:spPr>
+        <p:txBody>
+          <a:bodyPr wrap="square" lIns="0" tIns="0" rIns="0" bIns="0">
+            <a:spAutoFit/>
+          </a:bodyPr>
+          <a:lstStyle/>
+          <a:p>
+            <a:pPr algn="l">
+              <a:lnSpc>
+                <a:spcPct val="100000"/>
+              </a:lnSpc>
+              <a:spcAft>
+                <a:spcPts val="200"/>
+              </a:spcAft>
+              <a:defRPr sz="1800" b="0">
+                <a:solidFill>
+                  <a:srgbClr val="222222"/>
+                </a:solidFill>
+                <a:latin typeface="Calibri"/>
+              </a:defRPr>
+            </a:pPr>
+            <a:r>
+              <a:rPr sz="1800" b="0">
+                <a:solidFill>
+                  <a:srgbClr val="222222"/>
+                </a:solidFill>
+                <a:latin typeface="Calibri"/>
+              </a:rPr>
+              <a:t>Step 1: the value is still 100 after a power cycle. Step 2: it is back to 100, not 200.</a:t>
+            </a:r>
+          </a:p>
+        </p:txBody>
+      </p:sp>
+      <p:sp>
+        <p:nvSpPr>
+          <p:cNvPr id="10" name="TextBox 9"/>
+          <p:cNvSpPr txBox="1"/>
+          <p:nvPr/>
+        </p:nvSpPr>
+        <p:spPr>
+          <a:xfrm>
+            <a:off x="6301587" y="4119372"/>
+            <a:ext cx="5387187" cy="365760"/>
+          </a:xfrm>
+          <a:prstGeom prst="rect">
+            <a:avLst/>
+          </a:prstGeom>
+          <a:noFill/>
+        </p:spPr>
+        <p:txBody>
+          <a:bodyPr wrap="square" lIns="0" tIns="0" rIns="0" bIns="0">
+            <a:spAutoFit/>
+          </a:bodyPr>
+          <a:lstStyle/>
+          <a:p>
+            <a:pPr algn="l">
+              <a:lnSpc>
+                <a:spcPct val="100000"/>
+              </a:lnSpc>
+              <a:spcAft>
+                <a:spcPts val="200"/>
+              </a:spcAft>
+              <a:defRPr sz="1800" b="1">
+                <a:solidFill>
+                  <a:srgbClr val="0E7C86"/>
+                </a:solidFill>
+                <a:latin typeface="Calibri"/>
+              </a:defRPr>
+            </a:pPr>
+            <a:r>
+              <a:rPr sz="1800" b="1">
+                <a:solidFill>
+                  <a:srgbClr val="0E7C86"/>
+                </a:solidFill>
+                <a:latin typeface="Calibri"/>
+              </a:rPr>
+              <a:t>Answer these</a:t>
+            </a:r>
+          </a:p>
+        </p:txBody>
+      </p:sp>
+      <p:sp>
+        <p:nvSpPr>
+          <p:cNvPr id="11" name="TextBox 10"/>
+          <p:cNvSpPr txBox="1"/>
+          <p:nvPr/>
+        </p:nvSpPr>
+        <p:spPr>
+          <a:xfrm>
+            <a:off x="6301587" y="4521708"/>
+            <a:ext cx="5387187" cy="1778508"/>
+          </a:xfrm>
+          <a:prstGeom prst="rect">
+            <a:avLst/>
+          </a:prstGeom>
+          <a:noFill/>
+        </p:spPr>
+        <p:txBody>
+          <a:bodyPr wrap="square" lIns="0" tIns="0" rIns="0" bIns="0">
+            <a:spAutoFit/>
+          </a:bodyPr>
+          <a:lstStyle/>
+          <a:p>
+            <a:pPr algn="l">
+              <a:lnSpc>
+                <a:spcPct val="100000"/>
+              </a:lnSpc>
+              <a:spcAft>
+                <a:spcPts val="200"/>
+              </a:spcAft>
+              <a:defRPr sz="1800" b="0">
+                <a:solidFill>
+                  <a:srgbClr val="222222"/>
+                </a:solidFill>
+                <a:latin typeface="Calibri"/>
+              </a:defRPr>
+            </a:pPr>
+            <a:r>
+              <a:rPr sz="1800" b="0">
+                <a:solidFill>
+                  <a:srgbClr val="222222"/>
+                </a:solidFill>
+                <a:latin typeface="Calibri"/>
+              </a:rPr>
+              <a:t>What is at address 0 in the dump, and what does it mean?</a:t>
+            </a:r>
+          </a:p>
+          <a:p>
+            <a:pPr algn="l">
+              <a:lnSpc>
+                <a:spcPct val="100000"/>
+              </a:lnSpc>
+              <a:spcAft>
+                <a:spcPts val="200"/>
+              </a:spcAft>
+              <a:defRPr sz="1800" b="0">
+                <a:solidFill>
+                  <a:srgbClr val="222222"/>
+                </a:solidFill>
+                <a:latin typeface="Calibri"/>
+              </a:defRPr>
+            </a:pPr>
+            <a:r>
+              <a:rPr sz="1800" b="0">
+                <a:solidFill>
+                  <a:srgbClr val="222222"/>
+                </a:solidFill>
+                <a:latin typeface="Calibri"/>
+              </a:rPr>
+              <a:t>Why is range checking needed even when the magic byte is correct?</a:t>
+            </a:r>
+          </a:p>
+        </p:txBody>
+      </p:sp>
+    </p:spTree>
+  </p:cSld>
+  <p:clrMapOvr>
+    <a:masterClrMapping/>
+  </p:clrMapOvr>
+</p:sld>
+</file>
+
+<file path=ppt/slides/slide14.xml><?xml version="1.0" encoding="utf-8"?>
+<p:sld xmlns:a="http://schemas.openxmlformats.org/drawingml/2006/main" xmlns:p="http://schemas.openxmlformats.org/presentationml/2006/main" xmlns:r="http://schemas.openxmlformats.org/officeDocument/2006/relationships">
+  <p:cSld>
+    <p:spTree>
+      <p:nvGrpSpPr>
+        <p:cNvPr id="1" name=""/>
+        <p:cNvGrpSpPr/>
+        <p:nvPr/>
+      </p:nvGrpSpPr>
+      <p:grpSpPr/>
+      <p:sp>
+        <p:nvSpPr>
+          <p:cNvPr id="2" name="Title 1"/>
+          <p:cNvSpPr>
+            <a:spLocks noGrp="1"/>
+          </p:cNvSpPr>
+          <p:nvPr>
+            <p:ph type="title"/>
+          </p:nvPr>
+        </p:nvSpPr>
+        <p:spPr>
+          <a:xfrm>
+            <a:off x="502920" y="274320"/>
+            <a:ext cx="11185855" cy="777240"/>
+          </a:xfrm>
+        </p:spPr>
+        <p:txBody>
+          <a:bodyPr wrap="square" anchor="b"/>
+          <a:lstStyle/>
+          <a:p>
+            <a:pPr algn="l">
+              <a:lnSpc>
+                <a:spcPct val="100000"/>
+              </a:lnSpc>
+              <a:spcAft>
+                <a:spcPts val="0"/>
+              </a:spcAft>
+              <a:defRPr sz="2800" b="1">
+                <a:solidFill>
+                  <a:srgbClr val="1F3A5F"/>
+                </a:solidFill>
+                <a:latin typeface="Calibri"/>
+              </a:defRPr>
+            </a:pPr>
+            <a:r>
+              <a:rPr sz="2800" b="1">
+                <a:solidFill>
+                  <a:srgbClr val="1F3A5F"/>
+                </a:solidFill>
+                <a:latin typeface="Calibri"/>
+              </a:rPr>
+              <a:t>Where each program keeps its controller address</a:t>
+            </a:r>
+          </a:p>
+        </p:txBody>
+      </p:sp>
+      <p:sp>
+        <p:nvSpPr>
+          <p:cNvPr id="3" name="Rectangle 2"/>
+          <p:cNvSpPr/>
+          <p:nvPr/>
+        </p:nvSpPr>
+        <p:spPr>
+          <a:xfrm>
+            <a:off x="502920" y="1097280"/>
+            <a:ext cx="11185855" cy="19050"/>
+          </a:xfrm>
+          <a:prstGeom prst="rect">
+            <a:avLst/>
+          </a:prstGeom>
+          <a:solidFill>
+            <a:srgbClr val="C8D2DE"/>
+          </a:solidFill>
+          <a:ln>
+            <a:noFill/>
+          </a:ln>
+          <a:effectLst/>
+        </p:spPr>
+        <p:style>
+          <a:lnRef idx="1">
+            <a:schemeClr val="accent1"/>
+          </a:lnRef>
+          <a:fillRef idx="3">
+            <a:schemeClr val="accent1"/>
+          </a:fillRef>
+          <a:effectRef idx="2">
+            <a:schemeClr val="accent1"/>
+          </a:effectRef>
+          <a:fontRef idx="minor">
+            <a:schemeClr val="lt1"/>
+          </a:fontRef>
+        </p:style>
+        <p:txBody>
+          <a:bodyPr rtlCol="0" anchor="ctr"/>
+          <a:lstStyle/>
+          <a:p>
+            <a:pPr algn="ctr"/>
+          </a:p>
+        </p:txBody>
+      </p:sp>
+      <p:sp>
+        <p:nvSpPr>
+          <p:cNvPr id="4" name="TextBox 3"/>
+          <p:cNvSpPr txBox="1"/>
+          <p:nvPr/>
+        </p:nvSpPr>
+        <p:spPr>
+          <a:xfrm>
+            <a:off x="502920" y="6382512"/>
+            <a:ext cx="10545775" cy="274320"/>
+          </a:xfrm>
+          <a:prstGeom prst="rect">
+            <a:avLst/>
+          </a:prstGeom>
+          <a:noFill/>
+        </p:spPr>
+        <p:txBody>
+          <a:bodyPr wrap="square" lIns="0" tIns="0">
+            <a:spAutoFit/>
+          </a:bodyPr>
+          <a:lstStyle/>
+          <a:p>
+            <a:pPr algn="l">
+              <a:lnSpc>
+                <a:spcPct val="100000"/>
+              </a:lnSpc>
+              <a:spcAft>
+                <a:spcPts val="0"/>
+              </a:spcAft>
+              <a:defRPr sz="1000" b="0">
+                <a:solidFill>
+                  <a:srgbClr val="666666"/>
+                </a:solidFill>
+                <a:latin typeface="Calibri"/>
+              </a:defRPr>
+            </a:pPr>
+            <a:r>
+              <a:rPr sz="1000" b="0">
+                <a:solidFill>
+                  <a:srgbClr val="666666"/>
+                </a:solidFill>
+                <a:latin typeface="Calibri"/>
+              </a:rPr>
+              <a:t>Pathfinder Advanced - Op Program 12  |  Lesson 3</a:t>
+            </a:r>
+          </a:p>
+        </p:txBody>
+      </p:sp>
+      <p:sp>
+        <p:nvSpPr>
+          <p:cNvPr id="5" name="TextBox 4"/>
+          <p:cNvSpPr txBox="1"/>
+          <p:nvPr/>
+        </p:nvSpPr>
+        <p:spPr>
+          <a:xfrm>
+            <a:off x="11231575" y="6382512"/>
+            <a:ext cx="457200" cy="274320"/>
+          </a:xfrm>
+          <a:prstGeom prst="rect">
+            <a:avLst/>
+          </a:prstGeom>
+          <a:noFill/>
+        </p:spPr>
+        <p:txBody>
+          <a:bodyPr wrap="square" lIns="0" tIns="0">
+            <a:spAutoFit/>
+          </a:bodyPr>
+          <a:lstStyle/>
+          <a:p>
+            <a:pPr algn="r">
+              <a:lnSpc>
+                <a:spcPct val="100000"/>
+              </a:lnSpc>
+              <a:spcAft>
+                <a:spcPts val="0"/>
+              </a:spcAft>
+              <a:defRPr sz="1000" b="0">
+                <a:solidFill>
+                  <a:srgbClr val="666666"/>
+                </a:solidFill>
+                <a:latin typeface="Calibri"/>
+              </a:defRPr>
+            </a:pPr>
+            <a:r>
+              <a:rPr sz="1000" b="0">
+                <a:solidFill>
+                  <a:srgbClr val="666666"/>
+                </a:solidFill>
+                <a:latin typeface="Calibri"/>
+              </a:rPr>
+              <a:t>13</a:t>
             </a:r>
           </a:p>
         </p:txBody>
@@ -4859,7 +6269,7 @@
 </p:sld>
 </file>
 
-<file path=ppt/slides/slide12.xml><?xml version="1.0" encoding="utf-8"?>
+<file path=ppt/slides/slide15.xml><?xml version="1.0" encoding="utf-8"?>
 <p:sld xmlns:a="http://schemas.openxmlformats.org/drawingml/2006/main" xmlns:p="http://schemas.openxmlformats.org/presentationml/2006/main" xmlns:r="http://schemas.openxmlformats.org/officeDocument/2006/relationships">
   <p:cSld>
     <p:spTree>
@@ -4988,7 +6398,7 @@
               <a:spcAft>
                 <a:spcPts val="0"/>
               </a:spcAft>
-              <a:defRPr sz="900" b="0">
+              <a:defRPr sz="1000" b="0">
                 <a:solidFill>
                   <a:srgbClr val="666666"/>
                 </a:solidFill>
@@ -4996,7 +6406,7 @@
               </a:defRPr>
             </a:pPr>
             <a:r>
-              <a:rPr sz="900" b="0">
+              <a:rPr sz="1000" b="0">
                 <a:solidFill>
                   <a:srgbClr val="666666"/>
                 </a:solidFill>
@@ -5036,7 +6446,7 @@
               <a:spcAft>
                 <a:spcPts val="0"/>
               </a:spcAft>
-              <a:defRPr sz="900" b="0">
+              <a:defRPr sz="1000" b="0">
                 <a:solidFill>
                   <a:srgbClr val="666666"/>
                 </a:solidFill>
@@ -5044,13 +6454,13 @@
               </a:defRPr>
             </a:pPr>
             <a:r>
-              <a:rPr sz="900" b="0">
+              <a:rPr sz="1000" b="0">
                 <a:solidFill>
                   <a:srgbClr val="666666"/>
                 </a:solidFill>
                 <a:latin typeface="Calibri"/>
               </a:rPr>
-              <a:t>11</a:t>
+              <a:t>14</a:t>
             </a:r>
           </a:p>
         </p:txBody>
@@ -5082,9 +6492,9 @@
                 <a:spcPct val="100000"/>
               </a:lnSpc>
               <a:spcAft>
-                <a:spcPts val="300"/>
-              </a:spcAft>
-              <a:defRPr sz="900" b="1">
+                <a:spcPts val="200"/>
+              </a:spcAft>
+              <a:defRPr sz="1200" b="1">
                 <a:solidFill>
                   <a:srgbClr val="0E7C86"/>
                 </a:solidFill>
@@ -5092,7 +6502,7 @@
               </a:defRPr>
             </a:pPr>
             <a:r>
-              <a:rPr sz="900" b="1">
+              <a:rPr sz="1200" b="1">
                 <a:solidFill>
                   <a:srgbClr val="0E7C86"/>
                 </a:solidFill>
@@ -5571,17 +6981,17 @@
                 <a:spcPct val="100000"/>
               </a:lnSpc>
               <a:spcAft>
-                <a:spcPts val="1100"/>
-              </a:spcAft>
-              <a:defRPr sz="1500" b="0">
-                <a:solidFill>
-                  <a:srgbClr val="222222"/>
-                </a:solidFill>
-                <a:latin typeface="Calibri"/>
-              </a:defRPr>
-            </a:pPr>
-            <a:r>
-              <a:rPr sz="1500" b="0">
+                <a:spcPts val="600"/>
+              </a:spcAft>
+              <a:defRPr sz="1800" b="0">
+                <a:solidFill>
+                  <a:srgbClr val="222222"/>
+                </a:solidFill>
+                <a:latin typeface="Calibri"/>
+              </a:defRPr>
+            </a:pPr>
+            <a:r>
+              <a:rPr sz="1800" b="0">
                 <a:solidFill>
                   <a:srgbClr val="222222"/>
                 </a:solidFill>
@@ -5596,17 +7006,17 @@
                 <a:spcPct val="100000"/>
               </a:lnSpc>
               <a:spcAft>
-                <a:spcPts val="1100"/>
-              </a:spcAft>
-              <a:defRPr sz="1500" b="0">
-                <a:solidFill>
-                  <a:srgbClr val="222222"/>
-                </a:solidFill>
-                <a:latin typeface="Calibri"/>
-              </a:defRPr>
-            </a:pPr>
-            <a:r>
-              <a:rPr sz="1500" b="0">
+                <a:spcPts val="600"/>
+              </a:spcAft>
+              <a:defRPr sz="1800" b="0">
+                <a:solidFill>
+                  <a:srgbClr val="222222"/>
+                </a:solidFill>
+                <a:latin typeface="Calibri"/>
+              </a:defRPr>
+            </a:pPr>
+            <a:r>
+              <a:rPr sz="1800" b="0">
                 <a:solidFill>
                   <a:srgbClr val="222222"/>
                 </a:solidFill>
@@ -5621,17 +7031,17 @@
                 <a:spcPct val="100000"/>
               </a:lnSpc>
               <a:spcAft>
-                <a:spcPts val="1100"/>
-              </a:spcAft>
-              <a:defRPr sz="1500" b="0">
-                <a:solidFill>
-                  <a:srgbClr val="222222"/>
-                </a:solidFill>
-                <a:latin typeface="Calibri"/>
-              </a:defRPr>
-            </a:pPr>
-            <a:r>
-              <a:rPr sz="1500" b="0">
+                <a:spcPts val="600"/>
+              </a:spcAft>
+              <a:defRPr sz="1800" b="0">
+                <a:solidFill>
+                  <a:srgbClr val="222222"/>
+                </a:solidFill>
+                <a:latin typeface="Calibri"/>
+              </a:defRPr>
+            </a:pPr>
+            <a:r>
+              <a:rPr sz="1800" b="0">
                 <a:solidFill>
                   <a:srgbClr val="222222"/>
                 </a:solidFill>
@@ -5646,17 +7056,17 @@
                 <a:spcPct val="100000"/>
               </a:lnSpc>
               <a:spcAft>
-                <a:spcPts val="1100"/>
-              </a:spcAft>
-              <a:defRPr sz="1500" b="0">
-                <a:solidFill>
-                  <a:srgbClr val="222222"/>
-                </a:solidFill>
-                <a:latin typeface="Calibri"/>
-              </a:defRPr>
-            </a:pPr>
-            <a:r>
-              <a:rPr sz="1500" b="0">
+                <a:spcPts val="600"/>
+              </a:spcAft>
+              <a:defRPr sz="1800" b="0">
+                <a:solidFill>
+                  <a:srgbClr val="222222"/>
+                </a:solidFill>
+                <a:latin typeface="Calibri"/>
+              </a:defRPr>
+            </a:pPr>
+            <a:r>
+              <a:rPr sz="1800" b="0">
                 <a:solidFill>
                   <a:srgbClr val="222222"/>
                 </a:solidFill>
@@ -5675,7 +7085,7 @@
 </p:sld>
 </file>
 
-<file path=ppt/slides/slide13.xml><?xml version="1.0" encoding="utf-8"?>
+<file path=ppt/slides/slide16.xml><?xml version="1.0" encoding="utf-8"?>
 <p:sld xmlns:a="http://schemas.openxmlformats.org/drawingml/2006/main" xmlns:p="http://schemas.openxmlformats.org/presentationml/2006/main" xmlns:r="http://schemas.openxmlformats.org/officeDocument/2006/relationships">
   <p:cSld>
     <p:spTree>
@@ -5804,7 +7214,7 @@
               <a:spcAft>
                 <a:spcPts val="0"/>
               </a:spcAft>
-              <a:defRPr sz="900" b="0">
+              <a:defRPr sz="1000" b="0">
                 <a:solidFill>
                   <a:srgbClr val="666666"/>
                 </a:solidFill>
@@ -5812,7 +7222,7 @@
               </a:defRPr>
             </a:pPr>
             <a:r>
-              <a:rPr sz="900" b="0">
+              <a:rPr sz="1000" b="0">
                 <a:solidFill>
                   <a:srgbClr val="666666"/>
                 </a:solidFill>
@@ -5852,7 +7262,7 @@
               <a:spcAft>
                 <a:spcPts val="0"/>
               </a:spcAft>
-              <a:defRPr sz="900" b="0">
+              <a:defRPr sz="1000" b="0">
                 <a:solidFill>
                   <a:srgbClr val="666666"/>
                 </a:solidFill>
@@ -5860,13 +7270,13 @@
               </a:defRPr>
             </a:pPr>
             <a:r>
-              <a:rPr sz="900" b="0">
+              <a:rPr sz="1000" b="0">
                 <a:solidFill>
                   <a:srgbClr val="666666"/>
                 </a:solidFill>
                 <a:latin typeface="Calibri"/>
               </a:rPr>
-              <a:t>12</a:t>
+              <a:t>15</a:t>
             </a:r>
           </a:p>
         </p:txBody>
@@ -5928,7 +7338,7 @@
         <p:spPr>
           <a:xfrm>
             <a:off x="502920" y="1755648"/>
-            <a:ext cx="11185855" cy="3456432"/>
+            <a:ext cx="11185855" cy="4507992"/>
           </a:xfrm>
           <a:prstGeom prst="rect">
             <a:avLst/>
@@ -5946,17 +7356,17 @@
                 <a:spcPct val="100000"/>
               </a:lnSpc>
               <a:spcAft>
-                <a:spcPts val="600"/>
-              </a:spcAft>
-              <a:defRPr sz="1400" b="0">
-                <a:solidFill>
-                  <a:srgbClr val="222222"/>
-                </a:solidFill>
-                <a:latin typeface="Calibri"/>
-              </a:defRPr>
-            </a:pPr>
-            <a:r>
-              <a:rPr sz="1400" b="0">
+                <a:spcPts val="900"/>
+              </a:spcAft>
+              <a:defRPr sz="1800" b="0">
+                <a:solidFill>
+                  <a:srgbClr val="222222"/>
+                </a:solidFill>
+                <a:latin typeface="Calibri"/>
+              </a:defRPr>
+            </a:pPr>
+            <a:r>
+              <a:rPr sz="1800" b="0">
                 <a:solidFill>
                   <a:srgbClr val="222222"/>
                 </a:solidFill>
@@ -5971,33 +7381,33 @@
                 <a:spcPct val="100000"/>
               </a:lnSpc>
               <a:spcAft>
-                <a:spcPts val="600"/>
-              </a:spcAft>
-              <a:defRPr sz="1400" b="0">
-                <a:solidFill>
-                  <a:srgbClr val="222222"/>
-                </a:solidFill>
-                <a:latin typeface="Calibri"/>
-              </a:defRPr>
-            </a:pPr>
-          </a:p>
-          <a:p>
-            <a:pPr algn="l">
-              <a:lnSpc>
-                <a:spcPct val="100000"/>
-              </a:lnSpc>
-              <a:spcAft>
-                <a:spcPts val="600"/>
-              </a:spcAft>
-              <a:defRPr sz="1400" b="0">
-                <a:solidFill>
-                  <a:srgbClr val="222222"/>
-                </a:solidFill>
-                <a:latin typeface="Calibri"/>
-              </a:defRPr>
-            </a:pPr>
-            <a:r>
-              <a:rPr sz="1400" b="0">
+                <a:spcPts val="900"/>
+              </a:spcAft>
+              <a:defRPr sz="1800" b="0">
+                <a:solidFill>
+                  <a:srgbClr val="222222"/>
+                </a:solidFill>
+                <a:latin typeface="Calibri"/>
+              </a:defRPr>
+            </a:pPr>
+          </a:p>
+          <a:p>
+            <a:pPr algn="l">
+              <a:lnSpc>
+                <a:spcPct val="100000"/>
+              </a:lnSpc>
+              <a:spcAft>
+                <a:spcPts val="900"/>
+              </a:spcAft>
+              <a:defRPr sz="1800" b="0">
+                <a:solidFill>
+                  <a:srgbClr val="222222"/>
+                </a:solidFill>
+                <a:latin typeface="Calibri"/>
+              </a:defRPr>
+            </a:pPr>
+            <a:r>
+              <a:rPr sz="1800" b="0">
                 <a:solidFill>
                   <a:srgbClr val="222222"/>
                 </a:solidFill>
@@ -6012,33 +7422,33 @@
                 <a:spcPct val="100000"/>
               </a:lnSpc>
               <a:spcAft>
-                <a:spcPts val="600"/>
-              </a:spcAft>
-              <a:defRPr sz="1400" b="0">
-                <a:solidFill>
-                  <a:srgbClr val="222222"/>
-                </a:solidFill>
-                <a:latin typeface="Calibri"/>
-              </a:defRPr>
-            </a:pPr>
-          </a:p>
-          <a:p>
-            <a:pPr algn="l">
-              <a:lnSpc>
-                <a:spcPct val="100000"/>
-              </a:lnSpc>
-              <a:spcAft>
-                <a:spcPts val="600"/>
-              </a:spcAft>
-              <a:defRPr sz="1400" b="0">
-                <a:solidFill>
-                  <a:srgbClr val="222222"/>
-                </a:solidFill>
-                <a:latin typeface="Calibri"/>
-              </a:defRPr>
-            </a:pPr>
-            <a:r>
-              <a:rPr sz="1400" b="0">
+                <a:spcPts val="900"/>
+              </a:spcAft>
+              <a:defRPr sz="1800" b="0">
+                <a:solidFill>
+                  <a:srgbClr val="222222"/>
+                </a:solidFill>
+                <a:latin typeface="Calibri"/>
+              </a:defRPr>
+            </a:pPr>
+          </a:p>
+          <a:p>
+            <a:pPr algn="l">
+              <a:lnSpc>
+                <a:spcPct val="100000"/>
+              </a:lnSpc>
+              <a:spcAft>
+                <a:spcPts val="900"/>
+              </a:spcAft>
+              <a:defRPr sz="1800" b="0">
+                <a:solidFill>
+                  <a:srgbClr val="222222"/>
+                </a:solidFill>
+                <a:latin typeface="Calibri"/>
+              </a:defRPr>
+            </a:pPr>
+            <a:r>
+              <a:rPr sz="1800" b="0">
                 <a:solidFill>
                   <a:srgbClr val="222222"/>
                 </a:solidFill>
@@ -6053,33 +7463,33 @@
                 <a:spcPct val="100000"/>
               </a:lnSpc>
               <a:spcAft>
-                <a:spcPts val="600"/>
-              </a:spcAft>
-              <a:defRPr sz="1400" b="0">
-                <a:solidFill>
-                  <a:srgbClr val="222222"/>
-                </a:solidFill>
-                <a:latin typeface="Calibri"/>
-              </a:defRPr>
-            </a:pPr>
-          </a:p>
-          <a:p>
-            <a:pPr algn="l">
-              <a:lnSpc>
-                <a:spcPct val="100000"/>
-              </a:lnSpc>
-              <a:spcAft>
-                <a:spcPts val="600"/>
-              </a:spcAft>
-              <a:defRPr sz="1400" b="0">
-                <a:solidFill>
-                  <a:srgbClr val="222222"/>
-                </a:solidFill>
-                <a:latin typeface="Calibri"/>
-              </a:defRPr>
-            </a:pPr>
-            <a:r>
-              <a:rPr sz="1400" b="0">
+                <a:spcPts val="900"/>
+              </a:spcAft>
+              <a:defRPr sz="1800" b="0">
+                <a:solidFill>
+                  <a:srgbClr val="222222"/>
+                </a:solidFill>
+                <a:latin typeface="Calibri"/>
+              </a:defRPr>
+            </a:pPr>
+          </a:p>
+          <a:p>
+            <a:pPr algn="l">
+              <a:lnSpc>
+                <a:spcPct val="100000"/>
+              </a:lnSpc>
+              <a:spcAft>
+                <a:spcPts val="900"/>
+              </a:spcAft>
+              <a:defRPr sz="1800" b="0">
+                <a:solidFill>
+                  <a:srgbClr val="222222"/>
+                </a:solidFill>
+                <a:latin typeface="Calibri"/>
+              </a:defRPr>
+            </a:pPr>
+            <a:r>
+              <a:rPr sz="1800" b="0">
                 <a:solidFill>
                   <a:srgbClr val="222222"/>
                 </a:solidFill>
@@ -6088,23 +7498,250 @@
               <a:t>Two lessons:</a:t>
             </a:r>
           </a:p>
+        </p:txBody>
+      </p:sp>
+    </p:spTree>
+  </p:cSld>
+  <p:clrMapOvr>
+    <a:masterClrMapping/>
+  </p:clrMapOvr>
+</p:sld>
+</file>
+
+<file path=ppt/slides/slide17.xml><?xml version="1.0" encoding="utf-8"?>
+<p:sld xmlns:a="http://schemas.openxmlformats.org/drawingml/2006/main" xmlns:p="http://schemas.openxmlformats.org/presentationml/2006/main" xmlns:r="http://schemas.openxmlformats.org/officeDocument/2006/relationships">
+  <p:cSld>
+    <p:spTree>
+      <p:nvGrpSpPr>
+        <p:cNvPr id="1" name=""/>
+        <p:cNvGrpSpPr/>
+        <p:nvPr/>
+      </p:nvGrpSpPr>
+      <p:grpSpPr/>
+      <p:sp>
+        <p:nvSpPr>
+          <p:cNvPr id="2" name="Title 1"/>
+          <p:cNvSpPr>
+            <a:spLocks noGrp="1"/>
+          </p:cNvSpPr>
+          <p:nvPr>
+            <p:ph type="title"/>
+          </p:nvPr>
+        </p:nvSpPr>
+        <p:spPr>
+          <a:xfrm>
+            <a:off x="502920" y="274320"/>
+            <a:ext cx="11185855" cy="777240"/>
+          </a:xfrm>
+        </p:spPr>
+        <p:txBody>
+          <a:bodyPr wrap="square" anchor="b"/>
+          <a:lstStyle/>
+          <a:p>
+            <a:pPr algn="l">
+              <a:lnSpc>
+                <a:spcPct val="100000"/>
+              </a:lnSpc>
+              <a:spcAft>
+                <a:spcPts val="0"/>
+              </a:spcAft>
+              <a:defRPr sz="2800" b="1">
+                <a:solidFill>
+                  <a:srgbClr val="1F3A5F"/>
+                </a:solidFill>
+                <a:latin typeface="Calibri"/>
+              </a:defRPr>
+            </a:pPr>
+            <a:r>
+              <a:rPr sz="2800" b="1">
+                <a:solidFill>
+                  <a:srgbClr val="1F3A5F"/>
+                </a:solidFill>
+                <a:latin typeface="Calibri"/>
+              </a:rPr>
+              <a:t>One more bug worth knowing about  (continued)</a:t>
+            </a:r>
+          </a:p>
+        </p:txBody>
+      </p:sp>
+      <p:sp>
+        <p:nvSpPr>
+          <p:cNvPr id="3" name="Rectangle 2"/>
+          <p:cNvSpPr/>
+          <p:nvPr/>
+        </p:nvSpPr>
+        <p:spPr>
+          <a:xfrm>
+            <a:off x="502920" y="1097280"/>
+            <a:ext cx="11185855" cy="19050"/>
+          </a:xfrm>
+          <a:prstGeom prst="rect">
+            <a:avLst/>
+          </a:prstGeom>
+          <a:solidFill>
+            <a:srgbClr val="C8D2DE"/>
+          </a:solidFill>
+          <a:ln>
+            <a:noFill/>
+          </a:ln>
+          <a:effectLst/>
+        </p:spPr>
+        <p:style>
+          <a:lnRef idx="1">
+            <a:schemeClr val="accent1"/>
+          </a:lnRef>
+          <a:fillRef idx="3">
+            <a:schemeClr val="accent1"/>
+          </a:fillRef>
+          <a:effectRef idx="2">
+            <a:schemeClr val="accent1"/>
+          </a:effectRef>
+          <a:fontRef idx="minor">
+            <a:schemeClr val="lt1"/>
+          </a:fontRef>
+        </p:style>
+        <p:txBody>
+          <a:bodyPr rtlCol="0" anchor="ctr"/>
+          <a:lstStyle/>
+          <a:p>
+            <a:pPr algn="ctr"/>
+          </a:p>
+        </p:txBody>
+      </p:sp>
+      <p:sp>
+        <p:nvSpPr>
+          <p:cNvPr id="4" name="TextBox 3"/>
+          <p:cNvSpPr txBox="1"/>
+          <p:nvPr/>
+        </p:nvSpPr>
+        <p:spPr>
+          <a:xfrm>
+            <a:off x="502920" y="6382512"/>
+            <a:ext cx="10545775" cy="274320"/>
+          </a:xfrm>
+          <a:prstGeom prst="rect">
+            <a:avLst/>
+          </a:prstGeom>
+          <a:noFill/>
+        </p:spPr>
+        <p:txBody>
+          <a:bodyPr wrap="square" lIns="0" tIns="0">
+            <a:spAutoFit/>
+          </a:bodyPr>
+          <a:lstStyle/>
+          <a:p>
+            <a:pPr algn="l">
+              <a:lnSpc>
+                <a:spcPct val="100000"/>
+              </a:lnSpc>
+              <a:spcAft>
+                <a:spcPts val="0"/>
+              </a:spcAft>
+              <a:defRPr sz="1000" b="0">
+                <a:solidFill>
+                  <a:srgbClr val="666666"/>
+                </a:solidFill>
+                <a:latin typeface="Calibri"/>
+              </a:defRPr>
+            </a:pPr>
+            <a:r>
+              <a:rPr sz="1000" b="0">
+                <a:solidFill>
+                  <a:srgbClr val="666666"/>
+                </a:solidFill>
+                <a:latin typeface="Calibri"/>
+              </a:rPr>
+              <a:t>Pathfinder Advanced - Op Program 12  |  Lesson 3</a:t>
+            </a:r>
+          </a:p>
+        </p:txBody>
+      </p:sp>
+      <p:sp>
+        <p:nvSpPr>
+          <p:cNvPr id="5" name="TextBox 4"/>
+          <p:cNvSpPr txBox="1"/>
+          <p:nvPr/>
+        </p:nvSpPr>
+        <p:spPr>
+          <a:xfrm>
+            <a:off x="11231575" y="6382512"/>
+            <a:ext cx="457200" cy="274320"/>
+          </a:xfrm>
+          <a:prstGeom prst="rect">
+            <a:avLst/>
+          </a:prstGeom>
+          <a:noFill/>
+        </p:spPr>
+        <p:txBody>
+          <a:bodyPr wrap="square" lIns="0" tIns="0">
+            <a:spAutoFit/>
+          </a:bodyPr>
+          <a:lstStyle/>
+          <a:p>
+            <a:pPr algn="r">
+              <a:lnSpc>
+                <a:spcPct val="100000"/>
+              </a:lnSpc>
+              <a:spcAft>
+                <a:spcPts val="0"/>
+              </a:spcAft>
+              <a:defRPr sz="1000" b="0">
+                <a:solidFill>
+                  <a:srgbClr val="666666"/>
+                </a:solidFill>
+                <a:latin typeface="Calibri"/>
+              </a:defRPr>
+            </a:pPr>
+            <a:r>
+              <a:rPr sz="1000" b="0">
+                <a:solidFill>
+                  <a:srgbClr val="666666"/>
+                </a:solidFill>
+                <a:latin typeface="Calibri"/>
+              </a:rPr>
+              <a:t>16</a:t>
+            </a:r>
+          </a:p>
+        </p:txBody>
+      </p:sp>
+      <p:sp>
+        <p:nvSpPr>
+          <p:cNvPr id="6" name="TextBox 5"/>
+          <p:cNvSpPr txBox="1"/>
+          <p:nvPr/>
+        </p:nvSpPr>
+        <p:spPr>
+          <a:xfrm>
+            <a:off x="502920" y="1188720"/>
+            <a:ext cx="11185855" cy="4023360"/>
+          </a:xfrm>
+          <a:prstGeom prst="rect">
+            <a:avLst/>
+          </a:prstGeom>
+          <a:noFill/>
+        </p:spPr>
+        <p:txBody>
+          <a:bodyPr wrap="square" lIns="0" tIns="0" rIns="0" bIns="0">
+            <a:spAutoFit/>
+          </a:bodyPr>
+          <a:lstStyle/>
           <a:p>
             <a:pPr lvl="1" algn="l">
               <a:lnSpc>
                 <a:spcPct val="100000"/>
               </a:lnSpc>
               <a:spcAft>
-                <a:spcPts val="600"/>
-              </a:spcAft>
-              <a:defRPr sz="1400" b="0">
-                <a:solidFill>
-                  <a:srgbClr val="222222"/>
-                </a:solidFill>
-                <a:latin typeface="Calibri"/>
-              </a:defRPr>
-            </a:pPr>
-            <a:r>
-              <a:rPr sz="1400" b="0">
+                <a:spcPts val="900"/>
+              </a:spcAft>
+              <a:defRPr sz="1800" b="0">
+                <a:solidFill>
+                  <a:srgbClr val="222222"/>
+                </a:solidFill>
+                <a:latin typeface="Calibri"/>
+              </a:defRPr>
+            </a:pPr>
+            <a:r>
+              <a:rPr sz="1800" b="0">
                 <a:solidFill>
                   <a:srgbClr val="222222"/>
                 </a:solidFill>
@@ -6119,17 +7756,17 @@
                 <a:spcPct val="100000"/>
               </a:lnSpc>
               <a:spcAft>
-                <a:spcPts val="600"/>
-              </a:spcAft>
-              <a:defRPr sz="1400" b="0">
-                <a:solidFill>
-                  <a:srgbClr val="222222"/>
-                </a:solidFill>
-                <a:latin typeface="Calibri"/>
-              </a:defRPr>
-            </a:pPr>
-            <a:r>
-              <a:rPr sz="1400" b="0">
+                <a:spcPts val="900"/>
+              </a:spcAft>
+              <a:defRPr sz="1800" b="0">
+                <a:solidFill>
+                  <a:srgbClr val="222222"/>
+                </a:solidFill>
+                <a:latin typeface="Calibri"/>
+              </a:defRPr>
+            </a:pPr>
+            <a:r>
+              <a:rPr sz="1800" b="0">
                 <a:solidFill>
                   <a:srgbClr val="222222"/>
                 </a:solidFill>
@@ -6142,7 +7779,7 @@
       </p:sp>
       <p:sp>
         <p:nvSpPr>
-          <p:cNvPr id="8" name="Rounded Rectangle 7"/>
+          <p:cNvPr id="7" name="Rounded Rectangle 6"/>
           <p:cNvSpPr/>
           <p:nvPr/>
         </p:nvSpPr>
@@ -6214,7 +7851,7 @@
 </p:sld>
 </file>
 
-<file path=ppt/slides/slide14.xml><?xml version="1.0" encoding="utf-8"?>
+<file path=ppt/slides/slide18.xml><?xml version="1.0" encoding="utf-8"?>
 <p:sld xmlns:a="http://schemas.openxmlformats.org/drawingml/2006/main" xmlns:p="http://schemas.openxmlformats.org/presentationml/2006/main" xmlns:r="http://schemas.openxmlformats.org/officeDocument/2006/relationships">
   <p:cSld>
     <p:spTree>
@@ -6343,7 +7980,7 @@
               <a:spcAft>
                 <a:spcPts val="0"/>
               </a:spcAft>
-              <a:defRPr sz="900" b="0">
+              <a:defRPr sz="1000" b="0">
                 <a:solidFill>
                   <a:srgbClr val="666666"/>
                 </a:solidFill>
@@ -6351,7 +7988,7 @@
               </a:defRPr>
             </a:pPr>
             <a:r>
-              <a:rPr sz="900" b="0">
+              <a:rPr sz="1000" b="0">
                 <a:solidFill>
                   <a:srgbClr val="666666"/>
                 </a:solidFill>
@@ -6391,7 +8028,7 @@
               <a:spcAft>
                 <a:spcPts val="0"/>
               </a:spcAft>
-              <a:defRPr sz="900" b="0">
+              <a:defRPr sz="1000" b="0">
                 <a:solidFill>
                   <a:srgbClr val="666666"/>
                 </a:solidFill>
@@ -6399,13 +8036,13 @@
               </a:defRPr>
             </a:pPr>
             <a:r>
-              <a:rPr sz="900" b="0">
+              <a:rPr sz="1000" b="0">
                 <a:solidFill>
                   <a:srgbClr val="666666"/>
                 </a:solidFill>
                 <a:latin typeface="Calibri"/>
               </a:rPr>
-              <a:t>13</a:t>
+              <a:t>17</a:t>
             </a:r>
           </a:p>
         </p:txBody>
@@ -6485,17 +8122,17 @@
                 <a:spcPct val="100000"/>
               </a:lnSpc>
               <a:spcAft>
-                <a:spcPts val="1400"/>
-              </a:spcAft>
-              <a:defRPr sz="1700" b="0">
-                <a:solidFill>
-                  <a:srgbClr val="222222"/>
-                </a:solidFill>
-                <a:latin typeface="Calibri"/>
-              </a:defRPr>
-            </a:pPr>
-            <a:r>
-              <a:rPr sz="1700" b="0">
+                <a:spcPts val="1000"/>
+              </a:spcAft>
+              <a:defRPr sz="1800" b="0">
+                <a:solidFill>
+                  <a:srgbClr val="222222"/>
+                </a:solidFill>
+                <a:latin typeface="Calibri"/>
+              </a:defRPr>
+            </a:pPr>
+            <a:r>
+              <a:rPr sz="1800" b="0">
                 <a:solidFill>
                   <a:srgbClr val="222222"/>
                 </a:solidFill>
@@ -6510,17 +8147,17 @@
                 <a:spcPct val="100000"/>
               </a:lnSpc>
               <a:spcAft>
-                <a:spcPts val="1400"/>
-              </a:spcAft>
-              <a:defRPr sz="1700" b="0">
-                <a:solidFill>
-                  <a:srgbClr val="222222"/>
-                </a:solidFill>
-                <a:latin typeface="Calibri"/>
-              </a:defRPr>
-            </a:pPr>
-            <a:r>
-              <a:rPr sz="1700" b="0">
+                <a:spcPts val="1000"/>
+              </a:spcAft>
+              <a:defRPr sz="1800" b="0">
+                <a:solidFill>
+                  <a:srgbClr val="222222"/>
+                </a:solidFill>
+                <a:latin typeface="Calibri"/>
+              </a:defRPr>
+            </a:pPr>
+            <a:r>
+              <a:rPr sz="1800" b="0">
                 <a:solidFill>
                   <a:srgbClr val="222222"/>
                 </a:solidFill>
@@ -6535,17 +8172,17 @@
                 <a:spcPct val="100000"/>
               </a:lnSpc>
               <a:spcAft>
-                <a:spcPts val="1400"/>
-              </a:spcAft>
-              <a:defRPr sz="1700" b="0">
-                <a:solidFill>
-                  <a:srgbClr val="222222"/>
-                </a:solidFill>
-                <a:latin typeface="Calibri"/>
-              </a:defRPr>
-            </a:pPr>
-            <a:r>
-              <a:rPr sz="1700" b="0">
+                <a:spcPts val="1000"/>
+              </a:spcAft>
+              <a:defRPr sz="1800" b="0">
+                <a:solidFill>
+                  <a:srgbClr val="222222"/>
+                </a:solidFill>
+                <a:latin typeface="Calibri"/>
+              </a:defRPr>
+            </a:pPr>
+            <a:r>
+              <a:rPr sz="1800" b="0">
                 <a:solidFill>
                   <a:srgbClr val="222222"/>
                 </a:solidFill>
@@ -6560,17 +8197,17 @@
                 <a:spcPct val="100000"/>
               </a:lnSpc>
               <a:spcAft>
-                <a:spcPts val="1400"/>
-              </a:spcAft>
-              <a:defRPr sz="1700" b="0">
-                <a:solidFill>
-                  <a:srgbClr val="222222"/>
-                </a:solidFill>
-                <a:latin typeface="Calibri"/>
-              </a:defRPr>
-            </a:pPr>
-            <a:r>
-              <a:rPr sz="1700" b="0">
+                <a:spcPts val="1000"/>
+              </a:spcAft>
+              <a:defRPr sz="1800" b="0">
+                <a:solidFill>
+                  <a:srgbClr val="222222"/>
+                </a:solidFill>
+                <a:latin typeface="Calibri"/>
+              </a:defRPr>
+            </a:pPr>
+            <a:r>
+              <a:rPr sz="1800" b="0">
                 <a:solidFill>
                   <a:srgbClr val="222222"/>
                 </a:solidFill>
@@ -6585,17 +8222,17 @@
                 <a:spcPct val="100000"/>
               </a:lnSpc>
               <a:spcAft>
-                <a:spcPts val="1400"/>
-              </a:spcAft>
-              <a:defRPr sz="1700" b="0">
-                <a:solidFill>
-                  <a:srgbClr val="222222"/>
-                </a:solidFill>
-                <a:latin typeface="Calibri"/>
-              </a:defRPr>
-            </a:pPr>
-            <a:r>
-              <a:rPr sz="1700" b="0">
+                <a:spcPts val="1000"/>
+              </a:spcAft>
+              <a:defRPr sz="1800" b="0">
+                <a:solidFill>
+                  <a:srgbClr val="222222"/>
+                </a:solidFill>
+                <a:latin typeface="Calibri"/>
+              </a:defRPr>
+            </a:pPr>
+            <a:r>
+              <a:rPr sz="1800" b="0">
                 <a:solidFill>
                   <a:srgbClr val="222222"/>
                 </a:solidFill>
@@ -6610,17 +8247,17 @@
                 <a:spcPct val="100000"/>
               </a:lnSpc>
               <a:spcAft>
-                <a:spcPts val="1400"/>
-              </a:spcAft>
-              <a:defRPr sz="1700" b="0">
-                <a:solidFill>
-                  <a:srgbClr val="222222"/>
-                </a:solidFill>
-                <a:latin typeface="Calibri"/>
-              </a:defRPr>
-            </a:pPr>
-            <a:r>
-              <a:rPr sz="1700" b="0">
+                <a:spcPts val="1000"/>
+              </a:spcAft>
+              <a:defRPr sz="1800" b="0">
+                <a:solidFill>
+                  <a:srgbClr val="222222"/>
+                </a:solidFill>
+                <a:latin typeface="Calibri"/>
+              </a:defRPr>
+            </a:pPr>
+            <a:r>
+              <a:rPr sz="1800" b="0">
                 <a:solidFill>
                   <a:srgbClr val="222222"/>
                 </a:solidFill>
@@ -6635,17 +8272,17 @@
                 <a:spcPct val="100000"/>
               </a:lnSpc>
               <a:spcAft>
-                <a:spcPts val="1400"/>
-              </a:spcAft>
-              <a:defRPr sz="1700" b="0">
-                <a:solidFill>
-                  <a:srgbClr val="222222"/>
-                </a:solidFill>
-                <a:latin typeface="Calibri"/>
-              </a:defRPr>
-            </a:pPr>
-            <a:r>
-              <a:rPr sz="1700" b="0">
+                <a:spcPts val="1000"/>
+              </a:spcAft>
+              <a:defRPr sz="1800" b="0">
+                <a:solidFill>
+                  <a:srgbClr val="222222"/>
+                </a:solidFill>
+                <a:latin typeface="Calibri"/>
+              </a:defRPr>
+            </a:pPr>
+            <a:r>
+              <a:rPr sz="1800" b="0">
                 <a:solidFill>
                   <a:srgbClr val="222222"/>
                 </a:solidFill>
@@ -6660,17 +8297,17 @@
                 <a:spcPct val="100000"/>
               </a:lnSpc>
               <a:spcAft>
-                <a:spcPts val="1400"/>
-              </a:spcAft>
-              <a:defRPr sz="1700" b="0">
-                <a:solidFill>
-                  <a:srgbClr val="222222"/>
-                </a:solidFill>
-                <a:latin typeface="Calibri"/>
-              </a:defRPr>
-            </a:pPr>
-            <a:r>
-              <a:rPr sz="1700" b="0">
+                <a:spcPts val="1000"/>
+              </a:spcAft>
+              <a:defRPr sz="1800" b="0">
+                <a:solidFill>
+                  <a:srgbClr val="222222"/>
+                </a:solidFill>
+                <a:latin typeface="Calibri"/>
+              </a:defRPr>
+            </a:pPr>
+            <a:r>
+              <a:rPr sz="1800" b="0">
                 <a:solidFill>
                   <a:srgbClr val="222222"/>
                 </a:solidFill>
@@ -6818,7 +8455,7 @@
               <a:spcAft>
                 <a:spcPts val="0"/>
               </a:spcAft>
-              <a:defRPr sz="900" b="0">
+              <a:defRPr sz="1000" b="0">
                 <a:solidFill>
                   <a:srgbClr val="666666"/>
                 </a:solidFill>
@@ -6826,7 +8463,7 @@
               </a:defRPr>
             </a:pPr>
             <a:r>
-              <a:rPr sz="900" b="0">
+              <a:rPr sz="1000" b="0">
                 <a:solidFill>
                   <a:srgbClr val="666666"/>
                 </a:solidFill>
@@ -6866,7 +8503,7 @@
               <a:spcAft>
                 <a:spcPts val="0"/>
               </a:spcAft>
-              <a:defRPr sz="900" b="0">
+              <a:defRPr sz="1000" b="0">
                 <a:solidFill>
                   <a:srgbClr val="666666"/>
                 </a:solidFill>
@@ -6874,7 +8511,7 @@
               </a:defRPr>
             </a:pPr>
             <a:r>
-              <a:rPr sz="900" b="0">
+              <a:rPr sz="1000" b="0">
                 <a:solidFill>
                   <a:srgbClr val="666666"/>
                 </a:solidFill>
@@ -7462,7 +9099,7 @@
               <a:spcAft>
                 <a:spcPts val="0"/>
               </a:spcAft>
-              <a:defRPr sz="900" b="0">
+              <a:defRPr sz="1000" b="0">
                 <a:solidFill>
                   <a:srgbClr val="666666"/>
                 </a:solidFill>
@@ -7470,7 +9107,7 @@
               </a:defRPr>
             </a:pPr>
             <a:r>
-              <a:rPr sz="900" b="0">
+              <a:rPr sz="1000" b="0">
                 <a:solidFill>
                   <a:srgbClr val="666666"/>
                 </a:solidFill>
@@ -7510,7 +9147,7 @@
               <a:spcAft>
                 <a:spcPts val="0"/>
               </a:spcAft>
-              <a:defRPr sz="900" b="0">
+              <a:defRPr sz="1000" b="0">
                 <a:solidFill>
                   <a:srgbClr val="666666"/>
                 </a:solidFill>
@@ -7518,7 +9155,7 @@
               </a:defRPr>
             </a:pPr>
             <a:r>
-              <a:rPr sz="900" b="0">
+              <a:rPr sz="1000" b="0">
                 <a:solidFill>
                   <a:srgbClr val="666666"/>
                 </a:solidFill>
@@ -7604,17 +9241,17 @@
                 <a:spcPct val="100000"/>
               </a:lnSpc>
               <a:spcAft>
-                <a:spcPts val="600"/>
-              </a:spcAft>
-              <a:defRPr sz="1500" b="0">
-                <a:solidFill>
-                  <a:srgbClr val="222222"/>
-                </a:solidFill>
-                <a:latin typeface="Calibri"/>
-              </a:defRPr>
-            </a:pPr>
-            <a:r>
-              <a:rPr sz="1500" b="0">
+                <a:spcPts val="900"/>
+              </a:spcAft>
+              <a:defRPr sz="1800" b="0">
+                <a:solidFill>
+                  <a:srgbClr val="222222"/>
+                </a:solidFill>
+                <a:latin typeface="Calibri"/>
+              </a:defRPr>
+            </a:pPr>
+            <a:r>
+              <a:rPr sz="1800" b="0">
                 <a:solidFill>
                   <a:srgbClr val="222222"/>
                 </a:solidFill>
@@ -7629,33 +9266,33 @@
                 <a:spcPct val="100000"/>
               </a:lnSpc>
               <a:spcAft>
-                <a:spcPts val="600"/>
-              </a:spcAft>
-              <a:defRPr sz="1500" b="0">
-                <a:solidFill>
-                  <a:srgbClr val="222222"/>
-                </a:solidFill>
-                <a:latin typeface="Calibri"/>
-              </a:defRPr>
-            </a:pPr>
-          </a:p>
-          <a:p>
-            <a:pPr algn="l">
-              <a:lnSpc>
-                <a:spcPct val="100000"/>
-              </a:lnSpc>
-              <a:spcAft>
-                <a:spcPts val="600"/>
-              </a:spcAft>
-              <a:defRPr sz="1500" b="0">
-                <a:solidFill>
-                  <a:srgbClr val="222222"/>
-                </a:solidFill>
-                <a:latin typeface="Calibri"/>
-              </a:defRPr>
-            </a:pPr>
-            <a:r>
-              <a:rPr sz="1500" b="0">
+                <a:spcPts val="900"/>
+              </a:spcAft>
+              <a:defRPr sz="1800" b="0">
+                <a:solidFill>
+                  <a:srgbClr val="222222"/>
+                </a:solidFill>
+                <a:latin typeface="Calibri"/>
+              </a:defRPr>
+            </a:pPr>
+          </a:p>
+          <a:p>
+            <a:pPr algn="l">
+              <a:lnSpc>
+                <a:spcPct val="100000"/>
+              </a:lnSpc>
+              <a:spcAft>
+                <a:spcPts val="900"/>
+              </a:spcAft>
+              <a:defRPr sz="1800" b="0">
+                <a:solidFill>
+                  <a:srgbClr val="222222"/>
+                </a:solidFill>
+                <a:latin typeface="Calibri"/>
+              </a:defRPr>
+            </a:pPr>
+            <a:r>
+              <a:rPr sz="1800" b="0">
                 <a:solidFill>
                   <a:srgbClr val="222222"/>
                 </a:solidFill>
@@ -7670,33 +9307,33 @@
                 <a:spcPct val="100000"/>
               </a:lnSpc>
               <a:spcAft>
-                <a:spcPts val="600"/>
-              </a:spcAft>
-              <a:defRPr sz="1500" b="0">
-                <a:solidFill>
-                  <a:srgbClr val="222222"/>
-                </a:solidFill>
-                <a:latin typeface="Calibri"/>
-              </a:defRPr>
-            </a:pPr>
-          </a:p>
-          <a:p>
-            <a:pPr algn="l">
-              <a:lnSpc>
-                <a:spcPct val="100000"/>
-              </a:lnSpc>
-              <a:spcAft>
-                <a:spcPts val="600"/>
-              </a:spcAft>
-              <a:defRPr sz="1500" b="0">
-                <a:solidFill>
-                  <a:srgbClr val="222222"/>
-                </a:solidFill>
-                <a:latin typeface="Calibri"/>
-              </a:defRPr>
-            </a:pPr>
-            <a:r>
-              <a:rPr sz="1500" b="0">
+                <a:spcPts val="900"/>
+              </a:spcAft>
+              <a:defRPr sz="1800" b="0">
+                <a:solidFill>
+                  <a:srgbClr val="222222"/>
+                </a:solidFill>
+                <a:latin typeface="Calibri"/>
+              </a:defRPr>
+            </a:pPr>
+          </a:p>
+          <a:p>
+            <a:pPr algn="l">
+              <a:lnSpc>
+                <a:spcPct val="100000"/>
+              </a:lnSpc>
+              <a:spcAft>
+                <a:spcPts val="900"/>
+              </a:spcAft>
+              <a:defRPr sz="1800" b="0">
+                <a:solidFill>
+                  <a:srgbClr val="222222"/>
+                </a:solidFill>
+                <a:latin typeface="Calibri"/>
+              </a:defRPr>
+            </a:pPr>
+            <a:r>
+              <a:rPr sz="1800" b="0">
                 <a:solidFill>
                   <a:srgbClr val="222222"/>
                 </a:solidFill>
@@ -7711,33 +9348,33 @@
                 <a:spcPct val="100000"/>
               </a:lnSpc>
               <a:spcAft>
-                <a:spcPts val="600"/>
-              </a:spcAft>
-              <a:defRPr sz="1500" b="0">
-                <a:solidFill>
-                  <a:srgbClr val="222222"/>
-                </a:solidFill>
-                <a:latin typeface="Calibri"/>
-              </a:defRPr>
-            </a:pPr>
-          </a:p>
-          <a:p>
-            <a:pPr algn="l">
-              <a:lnSpc>
-                <a:spcPct val="100000"/>
-              </a:lnSpc>
-              <a:spcAft>
-                <a:spcPts val="600"/>
-              </a:spcAft>
-              <a:defRPr sz="1500" b="0">
-                <a:solidFill>
-                  <a:srgbClr val="222222"/>
-                </a:solidFill>
-                <a:latin typeface="Calibri"/>
-              </a:defRPr>
-            </a:pPr>
-            <a:r>
-              <a:rPr sz="1500" b="0">
+                <a:spcPts val="900"/>
+              </a:spcAft>
+              <a:defRPr sz="1800" b="0">
+                <a:solidFill>
+                  <a:srgbClr val="222222"/>
+                </a:solidFill>
+                <a:latin typeface="Calibri"/>
+              </a:defRPr>
+            </a:pPr>
+          </a:p>
+          <a:p>
+            <a:pPr algn="l">
+              <a:lnSpc>
+                <a:spcPct val="100000"/>
+              </a:lnSpc>
+              <a:spcAft>
+                <a:spcPts val="900"/>
+              </a:spcAft>
+              <a:defRPr sz="1800" b="0">
+                <a:solidFill>
+                  <a:srgbClr val="222222"/>
+                </a:solidFill>
+                <a:latin typeface="Calibri"/>
+              </a:defRPr>
+            </a:pPr>
+            <a:r>
+              <a:rPr sz="1800" b="0">
                 <a:solidFill>
                   <a:srgbClr val="222222"/>
                 </a:solidFill>
@@ -7752,80 +9389,39 @@
                 <a:spcPct val="100000"/>
               </a:lnSpc>
               <a:spcAft>
-                <a:spcPts val="600"/>
-              </a:spcAft>
-              <a:defRPr sz="1500" b="0">
-                <a:solidFill>
-                  <a:srgbClr val="222222"/>
-                </a:solidFill>
-                <a:latin typeface="Calibri"/>
-              </a:defRPr>
-            </a:pPr>
-          </a:p>
-          <a:p>
-            <a:pPr algn="l">
-              <a:lnSpc>
-                <a:spcPct val="100000"/>
-              </a:lnSpc>
-              <a:spcAft>
-                <a:spcPts val="600"/>
-              </a:spcAft>
-              <a:defRPr sz="1500" b="0">
-                <a:solidFill>
-                  <a:srgbClr val="222222"/>
-                </a:solidFill>
-                <a:latin typeface="Calibri"/>
-              </a:defRPr>
-            </a:pPr>
-            <a:r>
-              <a:rPr sz="1500" b="0">
+                <a:spcPts val="900"/>
+              </a:spcAft>
+              <a:defRPr sz="1800" b="0">
+                <a:solidFill>
+                  <a:srgbClr val="222222"/>
+                </a:solidFill>
+                <a:latin typeface="Calibri"/>
+              </a:defRPr>
+            </a:pPr>
+          </a:p>
+          <a:p>
+            <a:pPr algn="l">
+              <a:lnSpc>
+                <a:spcPct val="100000"/>
+              </a:lnSpc>
+              <a:spcAft>
+                <a:spcPts val="900"/>
+              </a:spcAft>
+              <a:defRPr sz="1800" b="0">
+                <a:solidFill>
+                  <a:srgbClr val="222222"/>
+                </a:solidFill>
+                <a:latin typeface="Calibri"/>
+              </a:defRPr>
+            </a:pPr>
+            <a:r>
+              <a:rPr sz="1800" b="0">
                 <a:solidFill>
                   <a:srgbClr val="222222"/>
                 </a:solidFill>
                 <a:latin typeface="Calibri"/>
               </a:rPr>
               <a:t>Here, both callbacks run from inside BP32.update(), which you call yourself from loop(). So they run on your thread, at a moment you chose, and it is safe to print and to touch program state.</a:t>
-            </a:r>
-          </a:p>
-          <a:p>
-            <a:pPr algn="l">
-              <a:lnSpc>
-                <a:spcPct val="100000"/>
-              </a:lnSpc>
-              <a:spcAft>
-                <a:spcPts val="600"/>
-              </a:spcAft>
-              <a:defRPr sz="1500" b="0">
-                <a:solidFill>
-                  <a:srgbClr val="222222"/>
-                </a:solidFill>
-                <a:latin typeface="Calibri"/>
-              </a:defRPr>
-            </a:pPr>
-          </a:p>
-          <a:p>
-            <a:pPr algn="l">
-              <a:lnSpc>
-                <a:spcPct val="100000"/>
-              </a:lnSpc>
-              <a:spcAft>
-                <a:spcPts val="600"/>
-              </a:spcAft>
-              <a:defRPr sz="1500" b="0">
-                <a:solidFill>
-                  <a:srgbClr val="222222"/>
-                </a:solidFill>
-                <a:latin typeface="Calibri"/>
-              </a:defRPr>
-            </a:pPr>
-            <a:r>
-              <a:rPr sz="1500" b="0">
-                <a:solidFill>
-                  <a:srgbClr val="222222"/>
-                </a:solidFill>
-                <a:latin typeface="Calibri"/>
-              </a:rPr>
-              <a:t>If they ran from an interrupt, neither of those would be true.</a:t>
             </a:r>
           </a:p>
         </p:txBody>
@@ -7889,7 +9485,7 @@
                 </a:solidFill>
                 <a:latin typeface="Calibri"/>
               </a:rPr>
-              <a:t>The allowlist, and the two ways to get it wrong</a:t>
+              <a:t>Callbacks: functions you write and never call  (continued)</a:t>
             </a:r>
           </a:p>
         </p:txBody>
@@ -7967,7 +9563,7 @@
               <a:spcAft>
                 <a:spcPts val="0"/>
               </a:spcAft>
-              <a:defRPr sz="900" b="0">
+              <a:defRPr sz="1000" b="0">
                 <a:solidFill>
                   <a:srgbClr val="666666"/>
                 </a:solidFill>
@@ -7975,7 +9571,7 @@
               </a:defRPr>
             </a:pPr>
             <a:r>
-              <a:rPr sz="900" b="0">
+              <a:rPr sz="1000" b="0">
                 <a:solidFill>
                   <a:srgbClr val="666666"/>
                 </a:solidFill>
@@ -8015,7 +9611,7 @@
               <a:spcAft>
                 <a:spcPts val="0"/>
               </a:spcAft>
-              <a:defRPr sz="900" b="0">
+              <a:defRPr sz="1000" b="0">
                 <a:solidFill>
                   <a:srgbClr val="666666"/>
                 </a:solidFill>
@@ -8023,7 +9619,7 @@
               </a:defRPr>
             </a:pPr>
             <a:r>
-              <a:rPr sz="900" b="0">
+              <a:rPr sz="1000" b="0">
                 <a:solidFill>
                   <a:srgbClr val="666666"/>
                 </a:solidFill>
@@ -8043,7 +9639,7 @@
         <p:spPr>
           <a:xfrm>
             <a:off x="502920" y="1188720"/>
-            <a:ext cx="11185855" cy="530352"/>
+            <a:ext cx="11185855" cy="5074920"/>
           </a:xfrm>
           <a:prstGeom prst="rect">
             <a:avLst/>
@@ -8061,54 +9657,6 @@
                 <a:spcPct val="100000"/>
               </a:lnSpc>
               <a:spcAft>
-                <a:spcPts val="600"/>
-              </a:spcAft>
-              <a:defRPr sz="1900" b="1">
-                <a:solidFill>
-                  <a:srgbClr val="0E7C86"/>
-                </a:solidFill>
-                <a:latin typeface="Calibri"/>
-              </a:defRPr>
-            </a:pPr>
-            <a:r>
-              <a:rPr sz="1900" b="1">
-                <a:solidFill>
-                  <a:srgbClr val="0E7C86"/>
-                </a:solidFill>
-                <a:latin typeface="Calibri"/>
-              </a:rPr>
-              <a:t>A guest list, checked at the door</a:t>
-            </a:r>
-          </a:p>
-        </p:txBody>
-      </p:sp>
-      <p:sp>
-        <p:nvSpPr>
-          <p:cNvPr id="7" name="TextBox 6"/>
-          <p:cNvSpPr txBox="1"/>
-          <p:nvPr/>
-        </p:nvSpPr>
-        <p:spPr>
-          <a:xfrm>
-            <a:off x="502920" y="1755648"/>
-            <a:ext cx="11185855" cy="4507992"/>
-          </a:xfrm>
-          <a:prstGeom prst="rect">
-            <a:avLst/>
-          </a:prstGeom>
-          <a:noFill/>
-        </p:spPr>
-        <p:txBody>
-          <a:bodyPr wrap="square" lIns="0" tIns="0" rIns="0" bIns="0">
-            <a:spAutoFit/>
-          </a:bodyPr>
-          <a:lstStyle/>
-          <a:p>
-            <a:pPr algn="l">
-              <a:lnSpc>
-                <a:spcPct val="100000"/>
-              </a:lnSpc>
-              <a:spcAft>
                 <a:spcPts val="900"/>
               </a:spcAft>
               <a:defRPr sz="1800" b="0">
@@ -8118,6 +9666,22 @@
                 <a:latin typeface="Calibri"/>
               </a:defRPr>
             </a:pPr>
+          </a:p>
+          <a:p>
+            <a:pPr algn="l">
+              <a:lnSpc>
+                <a:spcPct val="100000"/>
+              </a:lnSpc>
+              <a:spcAft>
+                <a:spcPts val="900"/>
+              </a:spcAft>
+              <a:defRPr sz="1800" b="0">
+                <a:solidFill>
+                  <a:srgbClr val="222222"/>
+                </a:solidFill>
+                <a:latin typeface="Calibri"/>
+              </a:defRPr>
+            </a:pPr>
             <a:r>
               <a:rPr sz="1800" b="0">
                 <a:solidFill>
@@ -8125,164 +9689,7 @@
                 </a:solidFill>
                 <a:latin typeface="Calibri"/>
               </a:rPr>
-              <a:t>A Switch pad in pairing mode connects to whichever host answers first. Pairing alone does not give you one-vehicle-one-controller.</a:t>
-            </a:r>
-          </a:p>
-          <a:p>
-            <a:pPr algn="l">
-              <a:lnSpc>
-                <a:spcPct val="100000"/>
-              </a:lnSpc>
-              <a:spcAft>
-                <a:spcPts val="900"/>
-              </a:spcAft>
-              <a:defRPr sz="1800" b="0">
-                <a:solidFill>
-                  <a:srgbClr val="222222"/>
-                </a:solidFill>
-                <a:latin typeface="Calibri"/>
-              </a:defRPr>
-            </a:pPr>
-          </a:p>
-          <a:p>
-            <a:pPr algn="l">
-              <a:lnSpc>
-                <a:spcPct val="100000"/>
-              </a:lnSpc>
-              <a:spcAft>
-                <a:spcPts val="900"/>
-              </a:spcAft>
-              <a:defRPr sz="1800" b="0">
-                <a:solidFill>
-                  <a:srgbClr val="222222"/>
-                </a:solidFill>
-                <a:latin typeface="Calibri"/>
-              </a:defRPr>
-            </a:pPr>
-            <a:r>
-              <a:rPr sz="1800" b="0">
-                <a:solidFill>
-                  <a:srgbClr val="222222"/>
-                </a:solidFill>
-                <a:latin typeface="Calibri"/>
-              </a:rPr>
-              <a:t>The allowlist is a guest list checked BEFORE a connection is accepted:</a:t>
-            </a:r>
-          </a:p>
-          <a:p>
-            <a:pPr lvl="1" algn="l">
-              <a:lnSpc>
-                <a:spcPct val="100000"/>
-              </a:lnSpc>
-              <a:spcAft>
-                <a:spcPts val="900"/>
-              </a:spcAft>
-              <a:defRPr sz="1800" b="0">
-                <a:solidFill>
-                  <a:srgbClr val="222222"/>
-                </a:solidFill>
-                <a:latin typeface="Calibri"/>
-              </a:defRPr>
-            </a:pPr>
-            <a:r>
-              <a:rPr sz="1800" b="0">
-                <a:solidFill>
-                  <a:srgbClr val="222222"/>
-                </a:solidFill>
-                <a:latin typeface="Calibri"/>
-              </a:rPr>
-              <a:t>uni_bt_allowlist_remove_all();</a:t>
-            </a:r>
-          </a:p>
-          <a:p>
-            <a:pPr lvl="1" algn="l">
-              <a:lnSpc>
-                <a:spcPct val="100000"/>
-              </a:lnSpc>
-              <a:spcAft>
-                <a:spcPts val="900"/>
-              </a:spcAft>
-              <a:defRPr sz="1800" b="0">
-                <a:solidFill>
-                  <a:srgbClr val="222222"/>
-                </a:solidFill>
-                <a:latin typeface="Calibri"/>
-              </a:defRPr>
-            </a:pPr>
-            <a:r>
-              <a:rPr sz="1800" b="0">
-                <a:solidFill>
-                  <a:srgbClr val="222222"/>
-                </a:solidFill>
-                <a:latin typeface="Calibri"/>
-              </a:rPr>
-              <a:t>uni_bt_allowlist_add_addr(address);</a:t>
-            </a:r>
-          </a:p>
-          <a:p>
-            <a:pPr lvl="1" algn="l">
-              <a:lnSpc>
-                <a:spcPct val="100000"/>
-              </a:lnSpc>
-              <a:spcAft>
-                <a:spcPts val="900"/>
-              </a:spcAft>
-              <a:defRPr sz="1800" b="0">
-                <a:solidFill>
-                  <a:srgbClr val="222222"/>
-                </a:solidFill>
-                <a:latin typeface="Calibri"/>
-              </a:defRPr>
-            </a:pPr>
-            <a:r>
-              <a:rPr sz="1800" b="0">
-                <a:solidFill>
-                  <a:srgbClr val="222222"/>
-                </a:solidFill>
-                <a:latin typeface="Calibri"/>
-              </a:rPr>
-              <a:t>uni_bt_allowlist_set_enabled(true);</a:t>
-            </a:r>
-          </a:p>
-          <a:p>
-            <a:pPr algn="l">
-              <a:lnSpc>
-                <a:spcPct val="100000"/>
-              </a:lnSpc>
-              <a:spcAft>
-                <a:spcPts val="900"/>
-              </a:spcAft>
-              <a:defRPr sz="1800" b="0">
-                <a:solidFill>
-                  <a:srgbClr val="222222"/>
-                </a:solidFill>
-                <a:latin typeface="Calibri"/>
-              </a:defRPr>
-            </a:pPr>
-          </a:p>
-          <a:p>
-            <a:pPr algn="l">
-              <a:lnSpc>
-                <a:spcPct val="100000"/>
-              </a:lnSpc>
-              <a:spcAft>
-                <a:spcPts val="900"/>
-              </a:spcAft>
-              <a:defRPr sz="1800" b="0">
-                <a:solidFill>
-                  <a:srgbClr val="222222"/>
-                </a:solidFill>
-                <a:latin typeface="Calibri"/>
-              </a:defRPr>
-            </a:pPr>
-            <a:r>
-              <a:rPr sz="1800" b="0">
-                <a:solidFill>
-                  <a:srgbClr val="222222"/>
-                </a:solidFill>
-                <a:latin typeface="Calibri"/>
-              </a:rPr>
-              <a:t>MISTAKE ONE: calling them before BP32.setup(). Setup is what brings the Bluetooth stack up. Before that there is no list to add to, and the calls do nothing at all - silently.</a:t>
+              <a:t>If they ran from an interrupt, neither of those would be true.</a:t>
             </a:r>
           </a:p>
         </p:txBody>
@@ -8346,7 +9753,7 @@
                 </a:solidFill>
                 <a:latin typeface="Calibri"/>
               </a:rPr>
-              <a:t>The allowlist, and the two ways to get it wrong  (continued)</a:t>
+              <a:t>The allowlist, and the two ways to get it wrong</a:t>
             </a:r>
           </a:p>
         </p:txBody>
@@ -8424,7 +9831,7 @@
               <a:spcAft>
                 <a:spcPts val="0"/>
               </a:spcAft>
-              <a:defRPr sz="900" b="0">
+              <a:defRPr sz="1000" b="0">
                 <a:solidFill>
                   <a:srgbClr val="666666"/>
                 </a:solidFill>
@@ -8432,7 +9839,7 @@
               </a:defRPr>
             </a:pPr>
             <a:r>
-              <a:rPr sz="900" b="0">
+              <a:rPr sz="1000" b="0">
                 <a:solidFill>
                   <a:srgbClr val="666666"/>
                 </a:solidFill>
@@ -8472,7 +9879,7 @@
               <a:spcAft>
                 <a:spcPts val="0"/>
               </a:spcAft>
-              <a:defRPr sz="900" b="0">
+              <a:defRPr sz="1000" b="0">
                 <a:solidFill>
                   <a:srgbClr val="666666"/>
                 </a:solidFill>
@@ -8480,7 +9887,7 @@
               </a:defRPr>
             </a:pPr>
             <a:r>
-              <a:rPr sz="900" b="0">
+              <a:rPr sz="1000" b="0">
                 <a:solidFill>
                   <a:srgbClr val="666666"/>
                 </a:solidFill>
@@ -8500,7 +9907,7 @@
         <p:spPr>
           <a:xfrm>
             <a:off x="502920" y="1188720"/>
-            <a:ext cx="11185855" cy="4023360"/>
+            <a:ext cx="11185855" cy="530352"/>
           </a:xfrm>
           <a:prstGeom prst="rect">
             <a:avLst/>
@@ -8518,6 +9925,54 @@
                 <a:spcPct val="100000"/>
               </a:lnSpc>
               <a:spcAft>
+                <a:spcPts val="600"/>
+              </a:spcAft>
+              <a:defRPr sz="1900" b="1">
+                <a:solidFill>
+                  <a:srgbClr val="0E7C86"/>
+                </a:solidFill>
+                <a:latin typeface="Calibri"/>
+              </a:defRPr>
+            </a:pPr>
+            <a:r>
+              <a:rPr sz="1900" b="1">
+                <a:solidFill>
+                  <a:srgbClr val="0E7C86"/>
+                </a:solidFill>
+                <a:latin typeface="Calibri"/>
+              </a:rPr>
+              <a:t>A guest list, checked at the door</a:t>
+            </a:r>
+          </a:p>
+        </p:txBody>
+      </p:sp>
+      <p:sp>
+        <p:nvSpPr>
+          <p:cNvPr id="7" name="TextBox 6"/>
+          <p:cNvSpPr txBox="1"/>
+          <p:nvPr/>
+        </p:nvSpPr>
+        <p:spPr>
+          <a:xfrm>
+            <a:off x="502920" y="1755648"/>
+            <a:ext cx="11185855" cy="4507992"/>
+          </a:xfrm>
+          <a:prstGeom prst="rect">
+            <a:avLst/>
+          </a:prstGeom>
+          <a:noFill/>
+        </p:spPr>
+        <p:txBody>
+          <a:bodyPr wrap="square" lIns="0" tIns="0" rIns="0" bIns="0">
+            <a:spAutoFit/>
+          </a:bodyPr>
+          <a:lstStyle/>
+          <a:p>
+            <a:pPr algn="l">
+              <a:lnSpc>
+                <a:spcPct val="100000"/>
+              </a:lnSpc>
+              <a:spcAft>
                 <a:spcPts val="900"/>
               </a:spcAft>
               <a:defRPr sz="1800" b="0">
@@ -8534,7 +9989,7 @@
                 </a:solidFill>
                 <a:latin typeface="Calibri"/>
               </a:rPr>
-              <a:t>MISTAKE TWO: adding to the list instead of rebuilding it. Rebuild from scratch every boot and the sketch is always the single source of truth. Add, and stale entries accumulate where nobody can see them.</a:t>
+              <a:t>A Switch pad in pairing mode connects to whichever host answers first. Pairing alone does not give you one-vehicle-one-controller.</a:t>
             </a:r>
           </a:p>
           <a:p>
@@ -8575,73 +10030,82 @@
                 </a:solidFill>
                 <a:latin typeface="Calibri"/>
               </a:rPr>
-              <a:t>Note that enableNewBluetoothConnections stays TRUE. The allowlist keeps other people out; leaving new connections on means your own pad can always get back in even if the bonding keys are lost.</a:t>
-            </a:r>
-          </a:p>
-        </p:txBody>
-      </p:sp>
-      <p:sp>
-        <p:nvSpPr>
-          <p:cNvPr id="7" name="Rounded Rectangle 6"/>
-          <p:cNvSpPr/>
-          <p:nvPr/>
-        </p:nvSpPr>
-        <p:spPr>
-          <a:xfrm>
-            <a:off x="502920" y="5303520"/>
-            <a:ext cx="11185855" cy="960120"/>
-          </a:xfrm>
-          <a:prstGeom prst="roundRect">
-            <a:avLst>
-              <a:gd name="adj" fmla="val 4000"/>
-            </a:avLst>
-          </a:prstGeom>
-          <a:solidFill>
-            <a:srgbClr val="FDF3E3"/>
-          </a:solidFill>
-          <a:ln w="12700">
-            <a:solidFill>
-              <a:srgbClr val="B46A0F"/>
-            </a:solidFill>
-          </a:ln>
-          <a:effectLst/>
-        </p:spPr>
-        <p:style>
-          <a:lnRef idx="1">
-            <a:schemeClr val="accent1"/>
-          </a:lnRef>
-          <a:fillRef idx="3">
-            <a:schemeClr val="accent1"/>
-          </a:fillRef>
-          <a:effectRef idx="2">
-            <a:schemeClr val="accent1"/>
-          </a:effectRef>
-          <a:fontRef idx="minor">
-            <a:schemeClr val="lt1"/>
-          </a:fontRef>
-        </p:style>
-        <p:txBody>
-          <a:bodyPr rtlCol="0" anchor="ctr" wrap="square" lIns="164592" rIns="164592" tIns="73152" bIns="73152"/>
-          <a:lstStyle/>
-          <a:p>
-            <a:pPr algn="l"/>
-            <a:r>
-              <a:rPr sz="1300" b="1">
-                <a:solidFill>
-                  <a:srgbClr val="B46A0F"/>
-                </a:solidFill>
-                <a:latin typeface="Calibri"/>
-              </a:rPr>
-              <a:t>WATCH OUT   </a:t>
-            </a:r>
-            <a:r>
-              <a:rPr sz="1500">
-                <a:solidFill>
-                  <a:srgbClr val="222222"/>
-                </a:solidFill>
-                <a:latin typeface="Calibri"/>
-              </a:rPr>
-              <a:t>11.2 added addresses at runtime only. If those entries did not survive a reboot, a vehicle could come back up with an empty allowlist AND new connections disabled - and then refuse its own controller with no way in.</a:t>
+              <a:t>The allowlist is a guest list checked BEFORE a connection is accepted:</a:t>
+            </a:r>
+          </a:p>
+          <a:p>
+            <a:pPr lvl="1" algn="l">
+              <a:lnSpc>
+                <a:spcPct val="100000"/>
+              </a:lnSpc>
+              <a:spcAft>
+                <a:spcPts val="900"/>
+              </a:spcAft>
+              <a:defRPr sz="1800" b="0">
+                <a:solidFill>
+                  <a:srgbClr val="222222"/>
+                </a:solidFill>
+                <a:latin typeface="Calibri"/>
+              </a:defRPr>
+            </a:pPr>
+            <a:r>
+              <a:rPr sz="1800" b="0">
+                <a:solidFill>
+                  <a:srgbClr val="222222"/>
+                </a:solidFill>
+                <a:latin typeface="Calibri"/>
+              </a:rPr>
+              <a:t>uni_bt_allowlist_remove_all();</a:t>
+            </a:r>
+          </a:p>
+          <a:p>
+            <a:pPr lvl="1" algn="l">
+              <a:lnSpc>
+                <a:spcPct val="100000"/>
+              </a:lnSpc>
+              <a:spcAft>
+                <a:spcPts val="900"/>
+              </a:spcAft>
+              <a:defRPr sz="1800" b="0">
+                <a:solidFill>
+                  <a:srgbClr val="222222"/>
+                </a:solidFill>
+                <a:latin typeface="Calibri"/>
+              </a:defRPr>
+            </a:pPr>
+            <a:r>
+              <a:rPr sz="1800" b="0">
+                <a:solidFill>
+                  <a:srgbClr val="222222"/>
+                </a:solidFill>
+                <a:latin typeface="Calibri"/>
+              </a:rPr>
+              <a:t>uni_bt_allowlist_add_addr(address);</a:t>
+            </a:r>
+          </a:p>
+          <a:p>
+            <a:pPr lvl="1" algn="l">
+              <a:lnSpc>
+                <a:spcPct val="100000"/>
+              </a:lnSpc>
+              <a:spcAft>
+                <a:spcPts val="900"/>
+              </a:spcAft>
+              <a:defRPr sz="1800" b="0">
+                <a:solidFill>
+                  <a:srgbClr val="222222"/>
+                </a:solidFill>
+                <a:latin typeface="Calibri"/>
+              </a:defRPr>
+            </a:pPr>
+            <a:r>
+              <a:rPr sz="1800" b="0">
+                <a:solidFill>
+                  <a:srgbClr val="222222"/>
+                </a:solidFill>
+                <a:latin typeface="Calibri"/>
+              </a:rPr>
+              <a:t>uni_bt_allowlist_set_enabled(true);</a:t>
             </a:r>
           </a:p>
         </p:txBody>
@@ -8705,7 +10169,7 @@
                 </a:solidFill>
                 <a:latin typeface="Calibri"/>
               </a:rPr>
-              <a:t>Do it now  -  lock a board to one pad</a:t>
+              <a:t>The allowlist, and the two ways to get it wrong  (continued)</a:t>
             </a:r>
           </a:p>
         </p:txBody>
@@ -8783,7 +10247,7 @@
               <a:spcAft>
                 <a:spcPts val="0"/>
               </a:spcAft>
-              <a:defRPr sz="900" b="0">
+              <a:defRPr sz="1000" b="0">
                 <a:solidFill>
                   <a:srgbClr val="666666"/>
                 </a:solidFill>
@@ -8791,7 +10255,7 @@
               </a:defRPr>
             </a:pPr>
             <a:r>
-              <a:rPr sz="900" b="0">
+              <a:rPr sz="1000" b="0">
                 <a:solidFill>
                   <a:srgbClr val="666666"/>
                 </a:solidFill>
@@ -8831,7 +10295,7 @@
               <a:spcAft>
                 <a:spcPts val="0"/>
               </a:spcAft>
-              <a:defRPr sz="900" b="0">
+              <a:defRPr sz="1000" b="0">
                 <a:solidFill>
                   <a:srgbClr val="666666"/>
                 </a:solidFill>
@@ -8839,7 +10303,7 @@
               </a:defRPr>
             </a:pPr>
             <a:r>
-              <a:rPr sz="900" b="0">
+              <a:rPr sz="1000" b="0">
                 <a:solidFill>
                   <a:srgbClr val="666666"/>
                 </a:solidFill>
@@ -8852,14 +10316,144 @@
       </p:sp>
       <p:sp>
         <p:nvSpPr>
-          <p:cNvPr id="6" name="Rounded Rectangle 5"/>
+          <p:cNvPr id="6" name="TextBox 5"/>
+          <p:cNvSpPr txBox="1"/>
+          <p:nvPr/>
+        </p:nvSpPr>
+        <p:spPr>
+          <a:xfrm>
+            <a:off x="502920" y="1188720"/>
+            <a:ext cx="11185855" cy="4023360"/>
+          </a:xfrm>
+          <a:prstGeom prst="rect">
+            <a:avLst/>
+          </a:prstGeom>
+          <a:noFill/>
+        </p:spPr>
+        <p:txBody>
+          <a:bodyPr wrap="square" lIns="0" tIns="0" rIns="0" bIns="0">
+            <a:spAutoFit/>
+          </a:bodyPr>
+          <a:lstStyle/>
+          <a:p>
+            <a:pPr algn="l">
+              <a:lnSpc>
+                <a:spcPct val="100000"/>
+              </a:lnSpc>
+              <a:spcAft>
+                <a:spcPts val="900"/>
+              </a:spcAft>
+              <a:defRPr sz="1800" b="0">
+                <a:solidFill>
+                  <a:srgbClr val="222222"/>
+                </a:solidFill>
+                <a:latin typeface="Calibri"/>
+              </a:defRPr>
+            </a:pPr>
+            <a:r>
+              <a:rPr sz="1800" b="0">
+                <a:solidFill>
+                  <a:srgbClr val="222222"/>
+                </a:solidFill>
+                <a:latin typeface="Calibri"/>
+              </a:rPr>
+              <a:t>MISTAKE ONE: calling them before BP32.setup(). Setup is what brings the Bluetooth stack up. Before that there is no list to add to, and the calls do nothing at all - silently.</a:t>
+            </a:r>
+          </a:p>
+          <a:p>
+            <a:pPr algn="l">
+              <a:lnSpc>
+                <a:spcPct val="100000"/>
+              </a:lnSpc>
+              <a:spcAft>
+                <a:spcPts val="900"/>
+              </a:spcAft>
+              <a:defRPr sz="1800" b="0">
+                <a:solidFill>
+                  <a:srgbClr val="222222"/>
+                </a:solidFill>
+                <a:latin typeface="Calibri"/>
+              </a:defRPr>
+            </a:pPr>
+          </a:p>
+          <a:p>
+            <a:pPr algn="l">
+              <a:lnSpc>
+                <a:spcPct val="100000"/>
+              </a:lnSpc>
+              <a:spcAft>
+                <a:spcPts val="900"/>
+              </a:spcAft>
+              <a:defRPr sz="1800" b="0">
+                <a:solidFill>
+                  <a:srgbClr val="222222"/>
+                </a:solidFill>
+                <a:latin typeface="Calibri"/>
+              </a:defRPr>
+            </a:pPr>
+            <a:r>
+              <a:rPr sz="1800" b="0">
+                <a:solidFill>
+                  <a:srgbClr val="222222"/>
+                </a:solidFill>
+                <a:latin typeface="Calibri"/>
+              </a:rPr>
+              <a:t>MISTAKE TWO: adding to the list instead of rebuilding it. Rebuild from scratch every boot and the sketch is always the single source of truth. Add, and stale entries accumulate where nobody can see them.</a:t>
+            </a:r>
+          </a:p>
+          <a:p>
+            <a:pPr algn="l">
+              <a:lnSpc>
+                <a:spcPct val="100000"/>
+              </a:lnSpc>
+              <a:spcAft>
+                <a:spcPts val="900"/>
+              </a:spcAft>
+              <a:defRPr sz="1800" b="0">
+                <a:solidFill>
+                  <a:srgbClr val="222222"/>
+                </a:solidFill>
+                <a:latin typeface="Calibri"/>
+              </a:defRPr>
+            </a:pPr>
+          </a:p>
+          <a:p>
+            <a:pPr algn="l">
+              <a:lnSpc>
+                <a:spcPct val="100000"/>
+              </a:lnSpc>
+              <a:spcAft>
+                <a:spcPts val="900"/>
+              </a:spcAft>
+              <a:defRPr sz="1800" b="0">
+                <a:solidFill>
+                  <a:srgbClr val="222222"/>
+                </a:solidFill>
+                <a:latin typeface="Calibri"/>
+              </a:defRPr>
+            </a:pPr>
+            <a:r>
+              <a:rPr sz="1800" b="0">
+                <a:solidFill>
+                  <a:srgbClr val="222222"/>
+                </a:solidFill>
+                <a:latin typeface="Calibri"/>
+              </a:rPr>
+              <a:t>Note that enableNewBluetoothConnections stays TRUE. The allowlist keeps other people out; leaving new connections on means your own pad can always get back in even if the bonding keys are lost.</a:t>
+            </a:r>
+          </a:p>
+        </p:txBody>
+      </p:sp>
+      <p:sp>
+        <p:nvSpPr>
+          <p:cNvPr id="7" name="Rounded Rectangle 6"/>
           <p:cNvSpPr/>
           <p:nvPr/>
         </p:nvSpPr>
         <p:spPr>
           <a:xfrm>
-            <a:off x="502920" y="1188720"/>
-            <a:ext cx="11185855" cy="530352"/>
+            <a:off x="502920" y="5303520"/>
+            <a:ext cx="11185855" cy="960120"/>
           </a:xfrm>
           <a:prstGeom prst="roundRect">
             <a:avLst>
@@ -8867,10 +10461,12 @@
             </a:avLst>
           </a:prstGeom>
           <a:solidFill>
-            <a:srgbClr val="0E7C86"/>
+            <a:srgbClr val="FDF3E3"/>
           </a:solidFill>
-          <a:ln>
-            <a:noFill/>
+          <a:ln w="12700">
+            <a:solidFill>
+              <a:srgbClr val="B46A0F"/>
+            </a:solidFill>
           </a:ln>
           <a:effectLst/>
         </p:spPr>
@@ -8889,426 +10485,27 @@
           </a:fontRef>
         </p:style>
         <p:txBody>
-          <a:bodyPr rtlCol="0" anchor="ctr" wrap="square" lIns="182880"/>
+          <a:bodyPr rtlCol="0" anchor="ctr" wrap="square" lIns="164592" rIns="164592" tIns="73152" bIns="73152"/>
           <a:lstStyle/>
           <a:p>
             <a:pPr algn="l"/>
             <a:r>
               <a:rPr sz="1300" b="1">
                 <a:solidFill>
-                  <a:srgbClr val="FFFFFF"/>
-                </a:solidFill>
-                <a:latin typeface="Calibri"/>
-              </a:rPr>
-              <a:t>UPLOAD AND RUN:   </a:t>
-            </a:r>
-            <a:r>
-              <a:rPr sz="1500" b="1">
-                <a:solidFill>
-                  <a:srgbClr val="FFFFFF"/>
-                </a:solidFill>
-                <a:latin typeface="Consolas"/>
-              </a:rPr>
-              <a:t>a3a_controller_address</a:t>
-            </a:r>
-            <a:r>
-              <a:rPr sz="1200">
-                <a:solidFill>
-                  <a:srgbClr val="FFFFFF"/>
-                </a:solidFill>
-                <a:latin typeface="Calibri"/>
-              </a:rPr>
-              <a:t>     (35 minutes)</a:t>
-            </a:r>
-          </a:p>
-        </p:txBody>
-      </p:sp>
-      <p:sp>
-        <p:nvSpPr>
-          <p:cNvPr id="7" name="TextBox 6"/>
-          <p:cNvSpPr txBox="1"/>
-          <p:nvPr/>
-        </p:nvSpPr>
-        <p:spPr>
-          <a:xfrm>
-            <a:off x="502920" y="1901952"/>
-            <a:ext cx="5387187" cy="4361688"/>
-          </a:xfrm>
-          <a:prstGeom prst="rect">
-            <a:avLst/>
-          </a:prstGeom>
-          <a:noFill/>
-        </p:spPr>
-        <p:txBody>
-          <a:bodyPr wrap="square" lIns="0" tIns="0" rIns="0" bIns="0">
-            <a:spAutoFit/>
-          </a:bodyPr>
-          <a:lstStyle/>
-          <a:p>
-            <a:pPr algn="l">
-              <a:lnSpc>
-                <a:spcPct val="100000"/>
-              </a:lnSpc>
-              <a:spcAft>
-                <a:spcPts val="800"/>
-              </a:spcAft>
-              <a:defRPr sz="1600" b="0">
-                <a:solidFill>
-                  <a:srgbClr val="222222"/>
-                </a:solidFill>
-                <a:latin typeface="Calibri"/>
-              </a:defRPr>
-            </a:pPr>
-            <a:r>
-              <a:rPr sz="1600" b="0">
-                <a:solidFill>
-                  <a:srgbClr val="222222"/>
-                </a:solidFill>
-                <a:latin typeface="Calibri"/>
-              </a:rPr>
-              <a:t>1.  Upload. The allowlist starts OFF. Connect a controller.</a:t>
-            </a:r>
-          </a:p>
-          <a:p>
-            <a:pPr algn="l">
-              <a:lnSpc>
-                <a:spcPct val="100000"/>
-              </a:lnSpc>
-              <a:spcAft>
-                <a:spcPts val="800"/>
-              </a:spcAft>
-              <a:defRPr sz="1600" b="0">
-                <a:solidFill>
-                  <a:srgbClr val="222222"/>
-                </a:solidFill>
-                <a:latin typeface="Calibri"/>
-              </a:defRPr>
-            </a:pPr>
-            <a:r>
-              <a:rPr sz="1600" b="0">
-                <a:solidFill>
-                  <a:srgbClr val="222222"/>
-                </a:solidFill>
-                <a:latin typeface="Calibri"/>
-              </a:rPr>
-              <a:t>2.  Type  lock. Disconnect, and connect a DIFFERENT controller.</a:t>
-            </a:r>
-          </a:p>
-          <a:p>
-            <a:pPr algn="l">
-              <a:lnSpc>
-                <a:spcPct val="100000"/>
-              </a:lnSpc>
-              <a:spcAft>
-                <a:spcPts val="800"/>
-              </a:spcAft>
-              <a:defRPr sz="1600" b="0">
-                <a:solidFill>
-                  <a:srgbClr val="222222"/>
-                </a:solidFill>
-                <a:latin typeface="Calibri"/>
-              </a:defRPr>
-            </a:pPr>
-            <a:r>
-              <a:rPr sz="1600" b="0">
-                <a:solidFill>
-                  <a:srgbClr val="222222"/>
-                </a:solidFill>
-                <a:latin typeface="Calibri"/>
-              </a:rPr>
-              <a:t>3.  Watch the refusal in the Serial Monitor.</a:t>
-            </a:r>
-          </a:p>
-          <a:p>
-            <a:pPr algn="l">
-              <a:lnSpc>
-                <a:spcPct val="100000"/>
-              </a:lnSpc>
-              <a:spcAft>
-                <a:spcPts val="800"/>
-              </a:spcAft>
-              <a:defRPr sz="1600" b="0">
-                <a:solidFill>
-                  <a:srgbClr val="222222"/>
-                </a:solidFill>
-                <a:latin typeface="Calibri"/>
-              </a:defRPr>
-            </a:pPr>
-            <a:r>
-              <a:rPr sz="1600" b="0">
-                <a:solidFill>
-                  <a:srgbClr val="222222"/>
-                </a:solidFill>
-                <a:latin typeface="Calibri"/>
-              </a:rPr>
-              <a:t>4.  Type  open  and try the second one again.</a:t>
-            </a:r>
-          </a:p>
-          <a:p>
-            <a:pPr algn="l">
-              <a:lnSpc>
-                <a:spcPct val="100000"/>
-              </a:lnSpc>
-              <a:spcAft>
-                <a:spcPts val="800"/>
-              </a:spcAft>
-              <a:defRPr sz="1600" b="0">
-                <a:solidFill>
-                  <a:srgbClr val="222222"/>
-                </a:solidFill>
-                <a:latin typeface="Calibri"/>
-              </a:defRPr>
-            </a:pPr>
-            <a:r>
-              <a:rPr sz="1600" b="0">
-                <a:solidFill>
-                  <a:srgbClr val="222222"/>
-                </a:solidFill>
-                <a:latin typeface="Calibri"/>
-              </a:rPr>
-              <a:t>5.  Type  lockaddr 00:11:22:33:44:55  and try to connect anything.</a:t>
-            </a:r>
-          </a:p>
-          <a:p>
-            <a:pPr algn="l">
-              <a:lnSpc>
-                <a:spcPct val="100000"/>
-              </a:lnSpc>
-              <a:spcAft>
-                <a:spcPts val="800"/>
-              </a:spcAft>
-              <a:defRPr sz="1600" b="0">
-                <a:solidFill>
-                  <a:srgbClr val="222222"/>
-                </a:solidFill>
-                <a:latin typeface="Calibri"/>
-              </a:defRPr>
-            </a:pPr>
-            <a:r>
-              <a:rPr sz="1600" b="0">
-                <a:solidFill>
-                  <a:srgbClr val="222222"/>
-                </a:solidFill>
-                <a:latin typeface="Calibri"/>
-              </a:rPr>
-              <a:t>6.  Type  whoami. Compare with what a Bluetooth scanner app on your phone shows for this board.</a:t>
-            </a:r>
-          </a:p>
-        </p:txBody>
-      </p:sp>
-      <p:sp>
-        <p:nvSpPr>
-          <p:cNvPr id="8" name="TextBox 7"/>
-          <p:cNvSpPr txBox="1"/>
-          <p:nvPr/>
-        </p:nvSpPr>
-        <p:spPr>
-          <a:xfrm>
-            <a:off x="6301587" y="1901952"/>
-            <a:ext cx="5387187" cy="310896"/>
-          </a:xfrm>
-          <a:prstGeom prst="rect">
-            <a:avLst/>
-          </a:prstGeom>
-          <a:noFill/>
-        </p:spPr>
-        <p:txBody>
-          <a:bodyPr wrap="square" lIns="0" tIns="0" rIns="0" bIns="0">
-            <a:spAutoFit/>
-          </a:bodyPr>
-          <a:lstStyle/>
-          <a:p>
-            <a:pPr algn="l">
-              <a:lnSpc>
-                <a:spcPct val="100000"/>
-              </a:lnSpc>
-              <a:spcAft>
-                <a:spcPts val="300"/>
-              </a:spcAft>
-              <a:defRPr sz="1200" b="1">
-                <a:solidFill>
-                  <a:srgbClr val="0E7C86"/>
-                </a:solidFill>
-                <a:latin typeface="Calibri"/>
-              </a:defRPr>
-            </a:pPr>
-            <a:r>
-              <a:rPr sz="1200" b="1">
-                <a:solidFill>
-                  <a:srgbClr val="0E7C86"/>
-                </a:solidFill>
-                <a:latin typeface="Calibri"/>
-              </a:rPr>
-              <a:t>What you should see</a:t>
-            </a:r>
-          </a:p>
-        </p:txBody>
-      </p:sp>
-      <p:sp>
-        <p:nvSpPr>
-          <p:cNvPr id="9" name="TextBox 8"/>
-          <p:cNvSpPr txBox="1"/>
-          <p:nvPr/>
-        </p:nvSpPr>
-        <p:spPr>
-          <a:xfrm>
-            <a:off x="6301587" y="2249424"/>
-            <a:ext cx="5387187" cy="1815084"/>
-          </a:xfrm>
-          <a:prstGeom prst="rect">
-            <a:avLst/>
-          </a:prstGeom>
-          <a:noFill/>
-        </p:spPr>
-        <p:txBody>
-          <a:bodyPr wrap="square" lIns="0" tIns="0" rIns="0" bIns="0">
-            <a:spAutoFit/>
-          </a:bodyPr>
-          <a:lstStyle/>
-          <a:p>
-            <a:pPr algn="l">
-              <a:lnSpc>
-                <a:spcPct val="100000"/>
-              </a:lnSpc>
-              <a:spcAft>
-                <a:spcPts val="600"/>
-              </a:spcAft>
-              <a:defRPr sz="1500" b="0">
-                <a:solidFill>
-                  <a:srgbClr val="222222"/>
-                </a:solidFill>
-                <a:latin typeface="Calibri"/>
-              </a:defRPr>
-            </a:pPr>
-            <a:r>
-              <a:rPr sz="1500" b="0">
-                <a:solidFill>
-                  <a:srgbClr val="222222"/>
-                </a:solidFill>
-                <a:latin typeface="Calibri"/>
-              </a:rPr>
-              <a:t>Every connection attempt prints an address. With the lock on, everything except the locked address is turned away.</a:t>
-            </a:r>
-          </a:p>
-        </p:txBody>
-      </p:sp>
-      <p:sp>
-        <p:nvSpPr>
-          <p:cNvPr id="10" name="TextBox 9"/>
-          <p:cNvSpPr txBox="1"/>
-          <p:nvPr/>
-        </p:nvSpPr>
-        <p:spPr>
-          <a:xfrm>
-            <a:off x="6301587" y="4101084"/>
-            <a:ext cx="5387187" cy="310896"/>
-          </a:xfrm>
-          <a:prstGeom prst="rect">
-            <a:avLst/>
-          </a:prstGeom>
-          <a:noFill/>
-        </p:spPr>
-        <p:txBody>
-          <a:bodyPr wrap="square" lIns="0" tIns="0" rIns="0" bIns="0">
-            <a:spAutoFit/>
-          </a:bodyPr>
-          <a:lstStyle/>
-          <a:p>
-            <a:pPr algn="l">
-              <a:lnSpc>
-                <a:spcPct val="100000"/>
-              </a:lnSpc>
-              <a:spcAft>
-                <a:spcPts val="300"/>
-              </a:spcAft>
-              <a:defRPr sz="1200" b="1">
-                <a:solidFill>
-                  <a:srgbClr val="0E7C86"/>
-                </a:solidFill>
-                <a:latin typeface="Calibri"/>
-              </a:defRPr>
-            </a:pPr>
-            <a:r>
-              <a:rPr sz="1200" b="1">
-                <a:solidFill>
-                  <a:srgbClr val="0E7C86"/>
-                </a:solidFill>
-                <a:latin typeface="Calibri"/>
-              </a:rPr>
-              <a:t>Answer these</a:t>
-            </a:r>
-          </a:p>
-        </p:txBody>
-      </p:sp>
-      <p:sp>
-        <p:nvSpPr>
-          <p:cNvPr id="11" name="TextBox 10"/>
-          <p:cNvSpPr txBox="1"/>
-          <p:nvPr/>
-        </p:nvSpPr>
-        <p:spPr>
-          <a:xfrm>
-            <a:off x="6301587" y="4448556"/>
-            <a:ext cx="5387187" cy="1815084"/>
-          </a:xfrm>
-          <a:prstGeom prst="rect">
-            <a:avLst/>
-          </a:prstGeom>
-          <a:noFill/>
-        </p:spPr>
-        <p:txBody>
-          <a:bodyPr wrap="square" lIns="0" tIns="0" rIns="0" bIns="0">
-            <a:spAutoFit/>
-          </a:bodyPr>
-          <a:lstStyle/>
-          <a:p>
-            <a:pPr algn="l">
-              <a:lnSpc>
-                <a:spcPct val="100000"/>
-              </a:lnSpc>
-              <a:spcAft>
-                <a:spcPts val="600"/>
-              </a:spcAft>
-              <a:defRPr sz="1500" b="0">
-                <a:solidFill>
-                  <a:srgbClr val="222222"/>
-                </a:solidFill>
-                <a:latin typeface="Calibri"/>
-              </a:defRPr>
-            </a:pPr>
-            <a:r>
-              <a:rPr sz="1500" b="0">
-                <a:solidFill>
-                  <a:srgbClr val="222222"/>
-                </a:solidFill>
-                <a:latin typeface="Calibri"/>
-              </a:rPr>
-              <a:t>Where does this sketch keep its locked address, and what happens to it at the next reset?</a:t>
-            </a:r>
-          </a:p>
-          <a:p>
-            <a:pPr algn="l">
-              <a:lnSpc>
-                <a:spcPct val="100000"/>
-              </a:lnSpc>
-              <a:spcAft>
-                <a:spcPts val="600"/>
-              </a:spcAft>
-              <a:defRPr sz="1500" b="0">
-                <a:solidFill>
-                  <a:srgbClr val="222222"/>
-                </a:solidFill>
-                <a:latin typeface="Calibri"/>
-              </a:defRPr>
-            </a:pPr>
-            <a:r>
-              <a:rPr sz="1500" b="0">
-                <a:solidFill>
-                  <a:srgbClr val="222222"/>
-                </a:solidFill>
-                <a:latin typeface="Calibri"/>
-              </a:rPr>
-              <a:t>Why does the sketch call applyAllowlist() AFTER BP32.setup()?</a:t>
+                  <a:srgbClr val="B46A0F"/>
+                </a:solidFill>
+                <a:latin typeface="Calibri"/>
+              </a:rPr>
+              <a:t>WATCH OUT   </a:t>
+            </a:r>
+            <a:r>
+              <a:rPr sz="1500">
+                <a:solidFill>
+                  <a:srgbClr val="222222"/>
+                </a:solidFill>
+                <a:latin typeface="Calibri"/>
+              </a:rPr>
+              <a:t>11.2 added addresses at runtime only. If those entries did not survive a reboot, a vehicle could come back up with an empty allowlist AND new connections disabled - and then refuse its own controller with no way in.</a:t>
             </a:r>
           </a:p>
         </p:txBody>
@@ -9372,7 +10569,7 @@
                 </a:solidFill>
                 <a:latin typeface="Calibri"/>
               </a:rPr>
-              <a:t>There is no EEPROM on an ESP32</a:t>
+              <a:t>Do it now  -  lock a board to one pad</a:t>
             </a:r>
           </a:p>
         </p:txBody>
@@ -9450,7 +10647,7 @@
               <a:spcAft>
                 <a:spcPts val="0"/>
               </a:spcAft>
-              <a:defRPr sz="900" b="0">
+              <a:defRPr sz="1000" b="0">
                 <a:solidFill>
                   <a:srgbClr val="666666"/>
                 </a:solidFill>
@@ -9458,7 +10655,7 @@
               </a:defRPr>
             </a:pPr>
             <a:r>
-              <a:rPr sz="900" b="0">
+              <a:rPr sz="1000" b="0">
                 <a:solidFill>
                   <a:srgbClr val="666666"/>
                 </a:solidFill>
@@ -9498,7 +10695,7 @@
               <a:spcAft>
                 <a:spcPts val="0"/>
               </a:spcAft>
-              <a:defRPr sz="900" b="0">
+              <a:defRPr sz="1000" b="0">
                 <a:solidFill>
                   <a:srgbClr val="666666"/>
                 </a:solidFill>
@@ -9506,7 +10703,7 @@
               </a:defRPr>
             </a:pPr>
             <a:r>
-              <a:rPr sz="900" b="0">
+              <a:rPr sz="1000" b="0">
                 <a:solidFill>
                   <a:srgbClr val="666666"/>
                 </a:solidFill>
@@ -9519,267 +10716,14 @@
       </p:sp>
       <p:sp>
         <p:nvSpPr>
-          <p:cNvPr id="6" name="TextBox 5"/>
-          <p:cNvSpPr txBox="1"/>
+          <p:cNvPr id="6" name="Rounded Rectangle 5"/>
+          <p:cNvSpPr/>
           <p:nvPr/>
         </p:nvSpPr>
         <p:spPr>
           <a:xfrm>
             <a:off x="502920" y="1188720"/>
             <a:ext cx="11185855" cy="530352"/>
-          </a:xfrm>
-          <a:prstGeom prst="rect">
-            <a:avLst/>
-          </a:prstGeom>
-          <a:noFill/>
-        </p:spPr>
-        <p:txBody>
-          <a:bodyPr wrap="square" lIns="0" tIns="0" rIns="0" bIns="0">
-            <a:spAutoFit/>
-          </a:bodyPr>
-          <a:lstStyle/>
-          <a:p>
-            <a:pPr algn="l">
-              <a:lnSpc>
-                <a:spcPct val="100000"/>
-              </a:lnSpc>
-              <a:spcAft>
-                <a:spcPts val="600"/>
-              </a:spcAft>
-              <a:defRPr sz="1900" b="1">
-                <a:solidFill>
-                  <a:srgbClr val="0E7C86"/>
-                </a:solidFill>
-                <a:latin typeface="Calibri"/>
-              </a:defRPr>
-            </a:pPr>
-            <a:r>
-              <a:rPr sz="1900" b="1">
-                <a:solidFill>
-                  <a:srgbClr val="0E7C86"/>
-                </a:solidFill>
-                <a:latin typeface="Calibri"/>
-              </a:rPr>
-              <a:t>It is flash, pretending</a:t>
-            </a:r>
-          </a:p>
-        </p:txBody>
-      </p:sp>
-      <p:sp>
-        <p:nvSpPr>
-          <p:cNvPr id="7" name="TextBox 6"/>
-          <p:cNvSpPr txBox="1"/>
-          <p:nvPr/>
-        </p:nvSpPr>
-        <p:spPr>
-          <a:xfrm>
-            <a:off x="502920" y="1755648"/>
-            <a:ext cx="11185855" cy="3456432"/>
-          </a:xfrm>
-          <a:prstGeom prst="rect">
-            <a:avLst/>
-          </a:prstGeom>
-          <a:noFill/>
-        </p:spPr>
-        <p:txBody>
-          <a:bodyPr wrap="square" lIns="0" tIns="0" rIns="0" bIns="0">
-            <a:spAutoFit/>
-          </a:bodyPr>
-          <a:lstStyle/>
-          <a:p>
-            <a:pPr algn="l">
-              <a:lnSpc>
-                <a:spcPct val="100000"/>
-              </a:lnSpc>
-              <a:spcAft>
-                <a:spcPts val="600"/>
-              </a:spcAft>
-              <a:defRPr sz="1500" b="0">
-                <a:solidFill>
-                  <a:srgbClr val="222222"/>
-                </a:solidFill>
-                <a:latin typeface="Calibri"/>
-              </a:defRPr>
-            </a:pPr>
-            <a:r>
-              <a:rPr sz="1500" b="0">
-                <a:solidFill>
-                  <a:srgbClr val="222222"/>
-                </a:solidFill>
-                <a:latin typeface="Calibri"/>
-              </a:rPr>
-              <a:t>The EEPROM library is an EMULATION. It reserves a slice of the flash chip, keeps a copy in RAM, and only writes the flash when you call commit().</a:t>
-            </a:r>
-          </a:p>
-          <a:p>
-            <a:pPr algn="l">
-              <a:lnSpc>
-                <a:spcPct val="100000"/>
-              </a:lnSpc>
-              <a:spcAft>
-                <a:spcPts val="600"/>
-              </a:spcAft>
-              <a:defRPr sz="1500" b="0">
-                <a:solidFill>
-                  <a:srgbClr val="222222"/>
-                </a:solidFill>
-                <a:latin typeface="Calibri"/>
-              </a:defRPr>
-            </a:pPr>
-          </a:p>
-          <a:p>
-            <a:pPr algn="l">
-              <a:lnSpc>
-                <a:spcPct val="100000"/>
-              </a:lnSpc>
-              <a:spcAft>
-                <a:spcPts val="600"/>
-              </a:spcAft>
-              <a:defRPr sz="1500" b="0">
-                <a:solidFill>
-                  <a:srgbClr val="222222"/>
-                </a:solidFill>
-                <a:latin typeface="Calibri"/>
-              </a:defRPr>
-            </a:pPr>
-            <a:r>
-              <a:rPr sz="1500" b="0">
-                <a:solidFill>
-                  <a:srgbClr val="222222"/>
-                </a:solidFill>
-                <a:latin typeface="Calibri"/>
-              </a:rPr>
-              <a:t>Three consequences:</a:t>
-            </a:r>
-          </a:p>
-          <a:p>
-            <a:pPr lvl="1" algn="l">
-              <a:lnSpc>
-                <a:spcPct val="100000"/>
-              </a:lnSpc>
-              <a:spcAft>
-                <a:spcPts val="600"/>
-              </a:spcAft>
-              <a:defRPr sz="1500" b="0">
-                <a:solidFill>
-                  <a:srgbClr val="222222"/>
-                </a:solidFill>
-                <a:latin typeface="Calibri"/>
-              </a:defRPr>
-            </a:pPr>
-            <a:r>
-              <a:rPr sz="1500" b="0">
-                <a:solidFill>
-                  <a:srgbClr val="222222"/>
-                </a:solidFill>
-                <a:latin typeface="Calibri"/>
-              </a:rPr>
-              <a:t>EEPROM.begin(size) must come first, before any get or put.</a:t>
-            </a:r>
-          </a:p>
-          <a:p>
-            <a:pPr lvl="1" algn="l">
-              <a:lnSpc>
-                <a:spcPct val="100000"/>
-              </a:lnSpc>
-              <a:spcAft>
-                <a:spcPts val="600"/>
-              </a:spcAft>
-              <a:defRPr sz="1500" b="0">
-                <a:solidFill>
-                  <a:srgbClr val="222222"/>
-                </a:solidFill>
-                <a:latin typeface="Calibri"/>
-              </a:defRPr>
-            </a:pPr>
-            <a:r>
-              <a:rPr sz="1500" b="0">
-                <a:solidFill>
-                  <a:srgbClr val="222222"/>
-                </a:solidFill>
-                <a:latin typeface="Calibri"/>
-              </a:rPr>
-              <a:t>Nothing is stored until EEPROM.commit(). Forgetting it is the single most common cause of "my settings did not save".</a:t>
-            </a:r>
-          </a:p>
-          <a:p>
-            <a:pPr lvl="1" algn="l">
-              <a:lnSpc>
-                <a:spcPct val="100000"/>
-              </a:lnSpc>
-              <a:spcAft>
-                <a:spcPts val="600"/>
-              </a:spcAft>
-              <a:defRPr sz="1500" b="0">
-                <a:solidFill>
-                  <a:srgbClr val="222222"/>
-                </a:solidFill>
-                <a:latin typeface="Calibri"/>
-              </a:defRPr>
-            </a:pPr>
-            <a:r>
-              <a:rPr sz="1500" b="0">
-                <a:solidFill>
-                  <a:srgbClr val="222222"/>
-                </a:solidFill>
-                <a:latin typeface="Calibri"/>
-              </a:rPr>
-              <a:t>Flash WEARS OUT - roughly a hundred thousand erase cycles per sector. Plenty for saving when a human asks. Nowhere near enough to commit() inside loop().</a:t>
-            </a:r>
-          </a:p>
-          <a:p>
-            <a:pPr algn="l">
-              <a:lnSpc>
-                <a:spcPct val="100000"/>
-              </a:lnSpc>
-              <a:spcAft>
-                <a:spcPts val="600"/>
-              </a:spcAft>
-              <a:defRPr sz="1500" b="0">
-                <a:solidFill>
-                  <a:srgbClr val="222222"/>
-                </a:solidFill>
-                <a:latin typeface="Calibri"/>
-              </a:defRPr>
-            </a:pPr>
-          </a:p>
-          <a:p>
-            <a:pPr algn="l">
-              <a:lnSpc>
-                <a:spcPct val="100000"/>
-              </a:lnSpc>
-              <a:spcAft>
-                <a:spcPts val="600"/>
-              </a:spcAft>
-              <a:defRPr sz="1500" b="0">
-                <a:solidFill>
-                  <a:srgbClr val="222222"/>
-                </a:solidFill>
-                <a:latin typeface="Calibri"/>
-              </a:defRPr>
-            </a:pPr>
-            <a:r>
-              <a:rPr sz="1500" b="0">
-                <a:solidFill>
-                  <a:srgbClr val="222222"/>
-                </a:solidFill>
-                <a:latin typeface="Calibri"/>
-              </a:rPr>
-              <a:t>Never write on a schedule. Write when something actually changed, and only when a person asked for it.</a:t>
-            </a:r>
-          </a:p>
-        </p:txBody>
-      </p:sp>
-      <p:sp>
-        <p:nvSpPr>
-          <p:cNvPr id="8" name="Rounded Rectangle 7"/>
-          <p:cNvSpPr/>
-          <p:nvPr/>
-        </p:nvSpPr>
-        <p:spPr>
-          <a:xfrm>
-            <a:off x="502920" y="5303520"/>
-            <a:ext cx="11185855" cy="960120"/>
           </a:xfrm>
           <a:prstGeom prst="roundRect">
             <a:avLst>
@@ -9787,12 +10731,10 @@
             </a:avLst>
           </a:prstGeom>
           <a:solidFill>
-            <a:srgbClr val="FDF3E3"/>
+            <a:srgbClr val="0E7C86"/>
           </a:solidFill>
-          <a:ln w="12700">
-            <a:solidFill>
-              <a:srgbClr val="B46A0F"/>
-            </a:solidFill>
+          <a:ln>
+            <a:noFill/>
           </a:ln>
           <a:effectLst/>
         </p:spPr>
@@ -9811,27 +10753,426 @@
           </a:fontRef>
         </p:style>
         <p:txBody>
-          <a:bodyPr rtlCol="0" anchor="ctr" wrap="square" lIns="164592" rIns="164592" tIns="73152" bIns="73152"/>
+          <a:bodyPr rtlCol="0" anchor="ctr" wrap="square" lIns="182880"/>
           <a:lstStyle/>
           <a:p>
             <a:pPr algn="l"/>
             <a:r>
               <a:rPr sz="1300" b="1">
                 <a:solidFill>
-                  <a:srgbClr val="B46A0F"/>
-                </a:solidFill>
-                <a:latin typeface="Calibri"/>
-              </a:rPr>
-              <a:t>WATCH OUT   </a:t>
-            </a:r>
-            <a:r>
-              <a:rPr sz="1500">
-                <a:solidFill>
-                  <a:srgbClr val="222222"/>
-                </a:solidFill>
-                <a:latin typeface="Calibri"/>
-              </a:rPr>
-              <a:t>A commit() in loop() at 30 Hz burns through a hundred thousand cycles in under an hour.</a:t>
+                  <a:srgbClr val="FFFFFF"/>
+                </a:solidFill>
+                <a:latin typeface="Calibri"/>
+              </a:rPr>
+              <a:t>UPLOAD AND RUN:   </a:t>
+            </a:r>
+            <a:r>
+              <a:rPr sz="1500" b="1">
+                <a:solidFill>
+                  <a:srgbClr val="FFFFFF"/>
+                </a:solidFill>
+                <a:latin typeface="Consolas"/>
+              </a:rPr>
+              <a:t>a3a_controller_address</a:t>
+            </a:r>
+            <a:r>
+              <a:rPr sz="1200">
+                <a:solidFill>
+                  <a:srgbClr val="FFFFFF"/>
+                </a:solidFill>
+                <a:latin typeface="Calibri"/>
+              </a:rPr>
+              <a:t>     (35 minutes)</a:t>
+            </a:r>
+          </a:p>
+        </p:txBody>
+      </p:sp>
+      <p:sp>
+        <p:nvSpPr>
+          <p:cNvPr id="7" name="TextBox 6"/>
+          <p:cNvSpPr txBox="1"/>
+          <p:nvPr/>
+        </p:nvSpPr>
+        <p:spPr>
+          <a:xfrm>
+            <a:off x="502920" y="1901952"/>
+            <a:ext cx="5387187" cy="4361688"/>
+          </a:xfrm>
+          <a:prstGeom prst="rect">
+            <a:avLst/>
+          </a:prstGeom>
+          <a:noFill/>
+        </p:spPr>
+        <p:txBody>
+          <a:bodyPr wrap="square" lIns="0" tIns="0" rIns="0" bIns="0">
+            <a:spAutoFit/>
+          </a:bodyPr>
+          <a:lstStyle/>
+          <a:p>
+            <a:pPr algn="l">
+              <a:lnSpc>
+                <a:spcPct val="100000"/>
+              </a:lnSpc>
+              <a:spcAft>
+                <a:spcPts val="400"/>
+              </a:spcAft>
+              <a:defRPr sz="1800" b="0">
+                <a:solidFill>
+                  <a:srgbClr val="222222"/>
+                </a:solidFill>
+                <a:latin typeface="Calibri"/>
+              </a:defRPr>
+            </a:pPr>
+            <a:r>
+              <a:rPr sz="1800" b="0">
+                <a:solidFill>
+                  <a:srgbClr val="222222"/>
+                </a:solidFill>
+                <a:latin typeface="Calibri"/>
+              </a:rPr>
+              <a:t>1.  Upload. The allowlist starts OFF. Connect a controller.</a:t>
+            </a:r>
+          </a:p>
+          <a:p>
+            <a:pPr algn="l">
+              <a:lnSpc>
+                <a:spcPct val="100000"/>
+              </a:lnSpc>
+              <a:spcAft>
+                <a:spcPts val="400"/>
+              </a:spcAft>
+              <a:defRPr sz="1800" b="0">
+                <a:solidFill>
+                  <a:srgbClr val="222222"/>
+                </a:solidFill>
+                <a:latin typeface="Calibri"/>
+              </a:defRPr>
+            </a:pPr>
+            <a:r>
+              <a:rPr sz="1800" b="0">
+                <a:solidFill>
+                  <a:srgbClr val="222222"/>
+                </a:solidFill>
+                <a:latin typeface="Calibri"/>
+              </a:rPr>
+              <a:t>2.  Type  lock. Disconnect, and connect a DIFFERENT controller.</a:t>
+            </a:r>
+          </a:p>
+          <a:p>
+            <a:pPr algn="l">
+              <a:lnSpc>
+                <a:spcPct val="100000"/>
+              </a:lnSpc>
+              <a:spcAft>
+                <a:spcPts val="400"/>
+              </a:spcAft>
+              <a:defRPr sz="1800" b="0">
+                <a:solidFill>
+                  <a:srgbClr val="222222"/>
+                </a:solidFill>
+                <a:latin typeface="Calibri"/>
+              </a:defRPr>
+            </a:pPr>
+            <a:r>
+              <a:rPr sz="1800" b="0">
+                <a:solidFill>
+                  <a:srgbClr val="222222"/>
+                </a:solidFill>
+                <a:latin typeface="Calibri"/>
+              </a:rPr>
+              <a:t>3.  Watch the refusal in the Serial Monitor.</a:t>
+            </a:r>
+          </a:p>
+          <a:p>
+            <a:pPr algn="l">
+              <a:lnSpc>
+                <a:spcPct val="100000"/>
+              </a:lnSpc>
+              <a:spcAft>
+                <a:spcPts val="400"/>
+              </a:spcAft>
+              <a:defRPr sz="1800" b="0">
+                <a:solidFill>
+                  <a:srgbClr val="222222"/>
+                </a:solidFill>
+                <a:latin typeface="Calibri"/>
+              </a:defRPr>
+            </a:pPr>
+            <a:r>
+              <a:rPr sz="1800" b="0">
+                <a:solidFill>
+                  <a:srgbClr val="222222"/>
+                </a:solidFill>
+                <a:latin typeface="Calibri"/>
+              </a:rPr>
+              <a:t>4.  Type  open  and try the second one again.</a:t>
+            </a:r>
+          </a:p>
+          <a:p>
+            <a:pPr algn="l">
+              <a:lnSpc>
+                <a:spcPct val="100000"/>
+              </a:lnSpc>
+              <a:spcAft>
+                <a:spcPts val="400"/>
+              </a:spcAft>
+              <a:defRPr sz="1800" b="0">
+                <a:solidFill>
+                  <a:srgbClr val="222222"/>
+                </a:solidFill>
+                <a:latin typeface="Calibri"/>
+              </a:defRPr>
+            </a:pPr>
+            <a:r>
+              <a:rPr sz="1800" b="0">
+                <a:solidFill>
+                  <a:srgbClr val="222222"/>
+                </a:solidFill>
+                <a:latin typeface="Calibri"/>
+              </a:rPr>
+              <a:t>5.  Type  lockaddr 00:11:22:33:44:55  and try to connect anything.</a:t>
+            </a:r>
+          </a:p>
+          <a:p>
+            <a:pPr algn="l">
+              <a:lnSpc>
+                <a:spcPct val="100000"/>
+              </a:lnSpc>
+              <a:spcAft>
+                <a:spcPts val="400"/>
+              </a:spcAft>
+              <a:defRPr sz="1800" b="0">
+                <a:solidFill>
+                  <a:srgbClr val="222222"/>
+                </a:solidFill>
+                <a:latin typeface="Calibri"/>
+              </a:defRPr>
+            </a:pPr>
+            <a:r>
+              <a:rPr sz="1800" b="0">
+                <a:solidFill>
+                  <a:srgbClr val="222222"/>
+                </a:solidFill>
+                <a:latin typeface="Calibri"/>
+              </a:rPr>
+              <a:t>6.  Type  whoami. Compare with what a Bluetooth scanner app on your phone shows for this board.</a:t>
+            </a:r>
+          </a:p>
+        </p:txBody>
+      </p:sp>
+      <p:sp>
+        <p:nvSpPr>
+          <p:cNvPr id="8" name="TextBox 7"/>
+          <p:cNvSpPr txBox="1"/>
+          <p:nvPr/>
+        </p:nvSpPr>
+        <p:spPr>
+          <a:xfrm>
+            <a:off x="6301587" y="1901952"/>
+            <a:ext cx="5387187" cy="365760"/>
+          </a:xfrm>
+          <a:prstGeom prst="rect">
+            <a:avLst/>
+          </a:prstGeom>
+          <a:noFill/>
+        </p:spPr>
+        <p:txBody>
+          <a:bodyPr wrap="square" lIns="0" tIns="0" rIns="0" bIns="0">
+            <a:spAutoFit/>
+          </a:bodyPr>
+          <a:lstStyle/>
+          <a:p>
+            <a:pPr algn="l">
+              <a:lnSpc>
+                <a:spcPct val="100000"/>
+              </a:lnSpc>
+              <a:spcAft>
+                <a:spcPts val="200"/>
+              </a:spcAft>
+              <a:defRPr sz="1800" b="1">
+                <a:solidFill>
+                  <a:srgbClr val="0E7C86"/>
+                </a:solidFill>
+                <a:latin typeface="Calibri"/>
+              </a:defRPr>
+            </a:pPr>
+            <a:r>
+              <a:rPr sz="1800" b="1">
+                <a:solidFill>
+                  <a:srgbClr val="0E7C86"/>
+                </a:solidFill>
+                <a:latin typeface="Calibri"/>
+              </a:rPr>
+              <a:t>What you should see</a:t>
+            </a:r>
+          </a:p>
+        </p:txBody>
+      </p:sp>
+      <p:sp>
+        <p:nvSpPr>
+          <p:cNvPr id="9" name="TextBox 8"/>
+          <p:cNvSpPr txBox="1"/>
+          <p:nvPr/>
+        </p:nvSpPr>
+        <p:spPr>
+          <a:xfrm>
+            <a:off x="6301587" y="2304288"/>
+            <a:ext cx="5387187" cy="1778508"/>
+          </a:xfrm>
+          <a:prstGeom prst="rect">
+            <a:avLst/>
+          </a:prstGeom>
+          <a:noFill/>
+        </p:spPr>
+        <p:txBody>
+          <a:bodyPr wrap="square" lIns="0" tIns="0" rIns="0" bIns="0">
+            <a:spAutoFit/>
+          </a:bodyPr>
+          <a:lstStyle/>
+          <a:p>
+            <a:pPr algn="l">
+              <a:lnSpc>
+                <a:spcPct val="100000"/>
+              </a:lnSpc>
+              <a:spcAft>
+                <a:spcPts val="200"/>
+              </a:spcAft>
+              <a:defRPr sz="1800" b="0">
+                <a:solidFill>
+                  <a:srgbClr val="222222"/>
+                </a:solidFill>
+                <a:latin typeface="Calibri"/>
+              </a:defRPr>
+            </a:pPr>
+            <a:r>
+              <a:rPr sz="1800" b="0">
+                <a:solidFill>
+                  <a:srgbClr val="222222"/>
+                </a:solidFill>
+                <a:latin typeface="Calibri"/>
+              </a:rPr>
+              <a:t>Every connection attempt prints an address. With the lock on, everything except the locked address is turned away.</a:t>
+            </a:r>
+          </a:p>
+        </p:txBody>
+      </p:sp>
+      <p:sp>
+        <p:nvSpPr>
+          <p:cNvPr id="10" name="TextBox 9"/>
+          <p:cNvSpPr txBox="1"/>
+          <p:nvPr/>
+        </p:nvSpPr>
+        <p:spPr>
+          <a:xfrm>
+            <a:off x="6301587" y="4119372"/>
+            <a:ext cx="5387187" cy="365760"/>
+          </a:xfrm>
+          <a:prstGeom prst="rect">
+            <a:avLst/>
+          </a:prstGeom>
+          <a:noFill/>
+        </p:spPr>
+        <p:txBody>
+          <a:bodyPr wrap="square" lIns="0" tIns="0" rIns="0" bIns="0">
+            <a:spAutoFit/>
+          </a:bodyPr>
+          <a:lstStyle/>
+          <a:p>
+            <a:pPr algn="l">
+              <a:lnSpc>
+                <a:spcPct val="100000"/>
+              </a:lnSpc>
+              <a:spcAft>
+                <a:spcPts val="200"/>
+              </a:spcAft>
+              <a:defRPr sz="1800" b="1">
+                <a:solidFill>
+                  <a:srgbClr val="0E7C86"/>
+                </a:solidFill>
+                <a:latin typeface="Calibri"/>
+              </a:defRPr>
+            </a:pPr>
+            <a:r>
+              <a:rPr sz="1800" b="1">
+                <a:solidFill>
+                  <a:srgbClr val="0E7C86"/>
+                </a:solidFill>
+                <a:latin typeface="Calibri"/>
+              </a:rPr>
+              <a:t>Answer these</a:t>
+            </a:r>
+          </a:p>
+        </p:txBody>
+      </p:sp>
+      <p:sp>
+        <p:nvSpPr>
+          <p:cNvPr id="11" name="TextBox 10"/>
+          <p:cNvSpPr txBox="1"/>
+          <p:nvPr/>
+        </p:nvSpPr>
+        <p:spPr>
+          <a:xfrm>
+            <a:off x="6301587" y="4521708"/>
+            <a:ext cx="5387187" cy="1778508"/>
+          </a:xfrm>
+          <a:prstGeom prst="rect">
+            <a:avLst/>
+          </a:prstGeom>
+          <a:noFill/>
+        </p:spPr>
+        <p:txBody>
+          <a:bodyPr wrap="square" lIns="0" tIns="0" rIns="0" bIns="0">
+            <a:spAutoFit/>
+          </a:bodyPr>
+          <a:lstStyle/>
+          <a:p>
+            <a:pPr algn="l">
+              <a:lnSpc>
+                <a:spcPct val="100000"/>
+              </a:lnSpc>
+              <a:spcAft>
+                <a:spcPts val="200"/>
+              </a:spcAft>
+              <a:defRPr sz="1800" b="0">
+                <a:solidFill>
+                  <a:srgbClr val="222222"/>
+                </a:solidFill>
+                <a:latin typeface="Calibri"/>
+              </a:defRPr>
+            </a:pPr>
+            <a:r>
+              <a:rPr sz="1800" b="0">
+                <a:solidFill>
+                  <a:srgbClr val="222222"/>
+                </a:solidFill>
+                <a:latin typeface="Calibri"/>
+              </a:rPr>
+              <a:t>Where does this sketch keep its locked address, and what happens to it at the next reset?</a:t>
+            </a:r>
+          </a:p>
+          <a:p>
+            <a:pPr algn="l">
+              <a:lnSpc>
+                <a:spcPct val="100000"/>
+              </a:lnSpc>
+              <a:spcAft>
+                <a:spcPts val="200"/>
+              </a:spcAft>
+              <a:defRPr sz="1800" b="0">
+                <a:solidFill>
+                  <a:srgbClr val="222222"/>
+                </a:solidFill>
+                <a:latin typeface="Calibri"/>
+              </a:defRPr>
+            </a:pPr>
+            <a:r>
+              <a:rPr sz="1800" b="0">
+                <a:solidFill>
+                  <a:srgbClr val="222222"/>
+                </a:solidFill>
+                <a:latin typeface="Calibri"/>
+              </a:rPr>
+              <a:t>Why does the sketch call applyAllowlist() AFTER BP32.setup()?</a:t>
             </a:r>
           </a:p>
         </p:txBody>
@@ -9895,7 +11236,7 @@
                 </a:solidFill>
                 <a:latin typeface="Calibri"/>
               </a:rPr>
-              <a:t>The storage map, and why the addresses are spaced out</a:t>
+              <a:t>There is no EEPROM on an ESP32</a:t>
             </a:r>
           </a:p>
         </p:txBody>
@@ -9973,7 +11314,7 @@
               <a:spcAft>
                 <a:spcPts val="0"/>
               </a:spcAft>
-              <a:defRPr sz="900" b="0">
+              <a:defRPr sz="1000" b="0">
                 <a:solidFill>
                   <a:srgbClr val="666666"/>
                 </a:solidFill>
@@ -9981,7 +11322,7 @@
               </a:defRPr>
             </a:pPr>
             <a:r>
-              <a:rPr sz="900" b="0">
+              <a:rPr sz="1000" b="0">
                 <a:solidFill>
                   <a:srgbClr val="666666"/>
                 </a:solidFill>
@@ -10021,7 +11362,7 @@
               <a:spcAft>
                 <a:spcPts val="0"/>
               </a:spcAft>
-              <a:defRPr sz="900" b="0">
+              <a:defRPr sz="1000" b="0">
                 <a:solidFill>
                   <a:srgbClr val="666666"/>
                 </a:solidFill>
@@ -10029,7 +11370,7 @@
               </a:defRPr>
             </a:pPr>
             <a:r>
-              <a:rPr sz="900" b="0">
+              <a:rPr sz="1000" b="0">
                 <a:solidFill>
                   <a:srgbClr val="666666"/>
                 </a:solidFill>
@@ -10049,7 +11390,7 @@
         <p:spPr>
           <a:xfrm>
             <a:off x="502920" y="1188720"/>
-            <a:ext cx="7047088" cy="274320"/>
+            <a:ext cx="11185855" cy="530352"/>
           </a:xfrm>
           <a:prstGeom prst="rect">
             <a:avLst/>
@@ -10067,368 +11408,37 @@
                 <a:spcPct val="100000"/>
               </a:lnSpc>
               <a:spcAft>
-                <a:spcPts val="300"/>
-              </a:spcAft>
-              <a:defRPr sz="900" b="1">
+                <a:spcPts val="600"/>
+              </a:spcAft>
+              <a:defRPr sz="1900" b="1">
                 <a:solidFill>
                   <a:srgbClr val="0E7C86"/>
                 </a:solidFill>
-                <a:latin typeface="Consolas"/>
-              </a:defRPr>
-            </a:pPr>
-            <a:r>
-              <a:rPr sz="900" b="1">
+                <a:latin typeface="Calibri"/>
+              </a:defRPr>
+            </a:pPr>
+            <a:r>
+              <a:rPr sz="1900" b="1">
                 <a:solidFill>
                   <a:srgbClr val="0E7C86"/>
                 </a:solidFill>
-                <a:latin typeface="Consolas"/>
-              </a:rPr>
-              <a:t>Config.h</a:t>
-            </a:r>
-          </a:p>
-        </p:txBody>
-      </p:sp>
-      <p:sp>
-        <p:nvSpPr>
-          <p:cNvPr id="7" name="CODE_PANEL"/>
-          <p:cNvSpPr/>
-          <p:nvPr/>
-        </p:nvSpPr>
-        <p:spPr>
-          <a:xfrm>
-            <a:off x="502920" y="1517904"/>
-            <a:ext cx="7047088" cy="4745736"/>
-          </a:xfrm>
-          <a:prstGeom prst="roundRect">
-            <a:avLst>
-              <a:gd name="adj" fmla="val 4000"/>
-            </a:avLst>
-          </a:prstGeom>
-          <a:solidFill>
-            <a:srgbClr val="F4F6F8"/>
-          </a:solidFill>
-          <a:ln w="12700">
-            <a:solidFill>
-              <a:srgbClr val="C8D2DE"/>
-            </a:solidFill>
-          </a:ln>
-          <a:effectLst/>
-        </p:spPr>
-        <p:style>
-          <a:lnRef idx="1">
-            <a:schemeClr val="accent1"/>
-          </a:lnRef>
-          <a:fillRef idx="3">
-            <a:schemeClr val="accent1"/>
-          </a:fillRef>
-          <a:effectRef idx="2">
-            <a:schemeClr val="accent1"/>
-          </a:effectRef>
-          <a:fontRef idx="minor">
-            <a:schemeClr val="lt1"/>
-          </a:fontRef>
-        </p:style>
-        <p:txBody>
-          <a:bodyPr rtlCol="0" anchor="t" wrap="square" lIns="146304" tIns="91440" bIns="73152"/>
-          <a:lstStyle/>
-          <a:p>
-            <a:pPr algn="l">
-              <a:lnSpc>
-                <a:spcPct val="100000"/>
-              </a:lnSpc>
-              <a:spcAft>
-                <a:spcPts val="0"/>
-              </a:spcAft>
-              <a:defRPr sz="1300">
-                <a:latin typeface="Consolas"/>
-              </a:defRPr>
-            </a:pPr>
-            <a:r>
-              <a:rPr sz="1300">
-                <a:solidFill>
-                  <a:srgbClr val="222222"/>
-                </a:solidFill>
-                <a:latin typeface="Consolas"/>
-              </a:rPr>
-              <a:t>const int ADDR_DEADZONE       =  0;   // int,   4 bytes</a:t>
-            </a:r>
-          </a:p>
-          <a:p>
-            <a:pPr algn="l">
-              <a:lnSpc>
-                <a:spcPct val="100000"/>
-              </a:lnSpc>
-              <a:spcAft>
-                <a:spcPts val="0"/>
-              </a:spcAft>
-              <a:defRPr sz="1300">
-                <a:latin typeface="Consolas"/>
-              </a:defRPr>
-            </a:pPr>
-            <a:r>
-              <a:rPr sz="1300">
-                <a:solidFill>
-                  <a:srgbClr val="222222"/>
-                </a:solidFill>
-                <a:latin typeface="Consolas"/>
-              </a:rPr>
-              <a:t>const int ADDR_DEADZONE_LS_X  =  4;</a:t>
-            </a:r>
-          </a:p>
-          <a:p>
-            <a:pPr algn="l">
-              <a:lnSpc>
-                <a:spcPct val="100000"/>
-              </a:lnSpc>
-              <a:spcAft>
-                <a:spcPts val="0"/>
-              </a:spcAft>
-              <a:defRPr sz="1300">
-                <a:latin typeface="Consolas"/>
-              </a:defRPr>
-            </a:pPr>
-            <a:r>
-              <a:rPr sz="1300">
-                <a:solidFill>
-                  <a:srgbClr val="222222"/>
-                </a:solidFill>
-                <a:latin typeface="Consolas"/>
-              </a:rPr>
-              <a:t>const int ADDR_DEADZONE_LS_Y  =  8;</a:t>
-            </a:r>
-          </a:p>
-          <a:p>
-            <a:pPr algn="l">
-              <a:lnSpc>
-                <a:spcPct val="100000"/>
-              </a:lnSpc>
-              <a:spcAft>
-                <a:spcPts val="0"/>
-              </a:spcAft>
-              <a:defRPr sz="1300">
-                <a:latin typeface="Consolas"/>
-              </a:defRPr>
-            </a:pPr>
-            <a:r>
-              <a:rPr sz="1300">
-                <a:solidFill>
-                  <a:srgbClr val="222222"/>
-                </a:solidFill>
-                <a:latin typeface="Consolas"/>
-              </a:rPr>
-              <a:t>const int ADDR_DEADZONE_RS_X  = 12;</a:t>
-            </a:r>
-          </a:p>
-          <a:p>
-            <a:pPr algn="l">
-              <a:lnSpc>
-                <a:spcPct val="100000"/>
-              </a:lnSpc>
-              <a:spcAft>
-                <a:spcPts val="0"/>
-              </a:spcAft>
-              <a:defRPr sz="1300">
-                <a:latin typeface="Consolas"/>
-              </a:defRPr>
-            </a:pPr>
-            <a:r>
-              <a:rPr sz="1300">
-                <a:solidFill>
-                  <a:srgbClr val="222222"/>
-                </a:solidFill>
-                <a:latin typeface="Consolas"/>
-              </a:rPr>
-              <a:t>const int ADDR_DEADZONE_RS_Y  = 16;</a:t>
-            </a:r>
-          </a:p>
-          <a:p>
-            <a:pPr algn="l">
-              <a:lnSpc>
-                <a:spcPct val="100000"/>
-              </a:lnSpc>
-              <a:spcAft>
-                <a:spcPts val="0"/>
-              </a:spcAft>
-              <a:defRPr sz="1300">
-                <a:latin typeface="Consolas"/>
-              </a:defRPr>
-            </a:pPr>
-            <a:r>
-              <a:rPr sz="1300">
-                <a:solidFill>
-                  <a:srgbClr val="222222"/>
-                </a:solidFill>
-                <a:latin typeface="Consolas"/>
-              </a:rPr>
-              <a:t>const int ADDR_LS_Y_SC        = 20;   // float, 4 bytes</a:t>
-            </a:r>
-          </a:p>
-          <a:p>
-            <a:pPr algn="l">
-              <a:lnSpc>
-                <a:spcPct val="100000"/>
-              </a:lnSpc>
-              <a:spcAft>
-                <a:spcPts val="0"/>
-              </a:spcAft>
-              <a:defRPr sz="1300">
-                <a:latin typeface="Consolas"/>
-              </a:defRPr>
-            </a:pPr>
-            <a:r>
-              <a:rPr sz="1300">
-                <a:solidFill>
-                  <a:srgbClr val="222222"/>
-                </a:solidFill>
-                <a:latin typeface="Consolas"/>
-              </a:rPr>
-              <a:t>const int ADDR_LS_X_SC        = 24;</a:t>
-            </a:r>
-          </a:p>
-          <a:p>
-            <a:pPr algn="l">
-              <a:lnSpc>
-                <a:spcPct val="100000"/>
-              </a:lnSpc>
-              <a:spcAft>
-                <a:spcPts val="0"/>
-              </a:spcAft>
-              <a:defRPr sz="1300">
-                <a:latin typeface="Consolas"/>
-              </a:defRPr>
-            </a:pPr>
-            <a:r>
-              <a:rPr sz="1300">
-                <a:solidFill>
-                  <a:srgbClr val="222222"/>
-                </a:solidFill>
-                <a:latin typeface="Consolas"/>
-              </a:rPr>
-              <a:t>const int ADDR_RS_Y_SC        = 28;</a:t>
-            </a:r>
-          </a:p>
-          <a:p>
-            <a:pPr algn="l">
-              <a:lnSpc>
-                <a:spcPct val="100000"/>
-              </a:lnSpc>
-              <a:spcAft>
-                <a:spcPts val="0"/>
-              </a:spcAft>
-              <a:defRPr sz="1300">
-                <a:latin typeface="Consolas"/>
-              </a:defRPr>
-            </a:pPr>
-            <a:r>
-              <a:rPr sz="1300">
-                <a:solidFill>
-                  <a:srgbClr val="222222"/>
-                </a:solidFill>
-                <a:latin typeface="Consolas"/>
-              </a:rPr>
-              <a:t>const int ADDR_RS_X_SC        = 32;</a:t>
-            </a:r>
-          </a:p>
-          <a:p>
-            <a:pPr algn="l">
-              <a:lnSpc>
-                <a:spcPct val="100000"/>
-              </a:lnSpc>
-              <a:spcAft>
-                <a:spcPts val="0"/>
-              </a:spcAft>
-              <a:defRPr sz="1300">
-                <a:latin typeface="Consolas"/>
-              </a:defRPr>
-            </a:pPr>
-            <a:r>
-              <a:rPr sz="1300" b="1">
-                <a:solidFill>
-                  <a:srgbClr val="0E7C86"/>
-                </a:solidFill>
-                <a:latin typeface="Consolas"/>
-              </a:rPr>
-              <a:t>const int ADDR_PAIRED_VALID   = 36;   // 1 byte:  0xA5 when valid</a:t>
-            </a:r>
-          </a:p>
-          <a:p>
-            <a:pPr algn="l">
-              <a:lnSpc>
-                <a:spcPct val="100000"/>
-              </a:lnSpc>
-              <a:spcAft>
-                <a:spcPts val="0"/>
-              </a:spcAft>
-              <a:defRPr sz="1300">
-                <a:latin typeface="Consolas"/>
-              </a:defRPr>
-            </a:pPr>
-            <a:r>
-              <a:rPr sz="1300" b="1">
-                <a:solidFill>
-                  <a:srgbClr val="0E7C86"/>
-                </a:solidFill>
-                <a:latin typeface="Consolas"/>
-              </a:rPr>
-              <a:t>const int ADDR_PAIRED_ADDR    = 37;   // 6 bytes: the address</a:t>
-            </a:r>
-          </a:p>
-          <a:p>
-            <a:pPr algn="l">
-              <a:lnSpc>
-                <a:spcPct val="100000"/>
-              </a:lnSpc>
-              <a:spcAft>
-                <a:spcPts val="0"/>
-              </a:spcAft>
-              <a:defRPr sz="1300">
-                <a:latin typeface="Consolas"/>
-              </a:defRPr>
-            </a:pPr>
-            <a:r>
-              <a:rPr sz="1300">
-                <a:solidFill>
-                  <a:srgbClr val="222222"/>
-                </a:solidFill>
-                <a:latin typeface="Consolas"/>
-              </a:rPr>
-              <a:t> </a:t>
-            </a:r>
-          </a:p>
-          <a:p>
-            <a:pPr algn="l">
-              <a:lnSpc>
-                <a:spcPct val="100000"/>
-              </a:lnSpc>
-              <a:spcAft>
-                <a:spcPts val="0"/>
-              </a:spcAft>
-              <a:defRPr sz="1300">
-                <a:latin typeface="Consolas"/>
-              </a:defRPr>
-            </a:pPr>
-            <a:r>
-              <a:rPr sz="1300" b="1">
-                <a:solidFill>
-                  <a:srgbClr val="0E7C86"/>
-                </a:solidFill>
-                <a:latin typeface="Consolas"/>
-              </a:rPr>
-              <a:t>const uint8_t PAIRED_VALID_MAGIC = 0xA5;</a:t>
-            </a:r>
-          </a:p>
-        </p:txBody>
-      </p:sp>
-      <p:sp>
-        <p:nvSpPr>
-          <p:cNvPr id="8" name="TextBox 7"/>
+                <a:latin typeface="Calibri"/>
+              </a:rPr>
+              <a:t>It is flash, pretending</a:t>
+            </a:r>
+          </a:p>
+        </p:txBody>
+      </p:sp>
+      <p:sp>
+        <p:nvSpPr>
+          <p:cNvPr id="7" name="TextBox 6"/>
           <p:cNvSpPr txBox="1"/>
           <p:nvPr/>
         </p:nvSpPr>
         <p:spPr>
           <a:xfrm>
-            <a:off x="7870048" y="1517904"/>
-            <a:ext cx="3818727" cy="4745736"/>
+            <a:off x="502920" y="1755648"/>
+            <a:ext cx="11185855" cy="4507992"/>
           </a:xfrm>
           <a:prstGeom prst="rect">
             <a:avLst/>
@@ -10446,98 +11456,139 @@
                 <a:spcPct val="100000"/>
               </a:lnSpc>
               <a:spcAft>
-                <a:spcPts val="1100"/>
-              </a:spcAft>
-              <a:defRPr sz="1500" b="0">
-                <a:solidFill>
-                  <a:srgbClr val="222222"/>
-                </a:solidFill>
-                <a:latin typeface="Calibri"/>
-              </a:defRPr>
-            </a:pPr>
-            <a:r>
-              <a:rPr sz="1500" b="0">
-                <a:solidFill>
-                  <a:srgbClr val="222222"/>
-                </a:solidFill>
-                <a:latin typeface="Calibri"/>
-              </a:rPr>
-              <a:t>EEPROM is a flat array of bytes. YOU choose where each value lives, and nothing stops two values overlapping.</a:t>
-            </a:r>
-          </a:p>
-          <a:p>
-            <a:pPr algn="l">
-              <a:lnSpc>
-                <a:spcPct val="100000"/>
-              </a:lnSpc>
-              <a:spcAft>
-                <a:spcPts val="1100"/>
-              </a:spcAft>
-              <a:defRPr sz="1500" b="0">
-                <a:solidFill>
-                  <a:srgbClr val="222222"/>
-                </a:solidFill>
-                <a:latin typeface="Calibri"/>
-              </a:defRPr>
-            </a:pPr>
-            <a:r>
-              <a:rPr sz="1500" b="0">
-                <a:solidFill>
-                  <a:srgbClr val="222222"/>
-                </a:solidFill>
-                <a:latin typeface="Calibri"/>
-              </a:rPr>
-              <a:t>An int is 4 bytes and a float is 4 bytes on this chip, so each slot gets 4.</a:t>
-            </a:r>
-          </a:p>
-          <a:p>
-            <a:pPr algn="l">
-              <a:lnSpc>
-                <a:spcPct val="100000"/>
-              </a:lnSpc>
-              <a:spcAft>
-                <a:spcPts val="1100"/>
-              </a:spcAft>
-              <a:defRPr sz="1500" b="0">
-                <a:solidFill>
-                  <a:srgbClr val="222222"/>
-                </a:solidFill>
-                <a:latin typeface="Calibri"/>
-              </a:defRPr>
-            </a:pPr>
-            <a:r>
-              <a:rPr sz="1500" b="0">
-                <a:solidFill>
-                  <a:srgbClr val="222222"/>
-                </a:solidFill>
-                <a:latin typeface="Calibri"/>
-              </a:rPr>
-              <a:t>Laying them out as one ADDR_ constant per value, in one place, is what makes an overlap visible when you read the file.</a:t>
-            </a:r>
-          </a:p>
-          <a:p>
-            <a:pPr algn="l">
-              <a:lnSpc>
-                <a:spcPct val="100000"/>
-              </a:lnSpc>
-              <a:spcAft>
-                <a:spcPts val="1100"/>
-              </a:spcAft>
-              <a:defRPr sz="1500" b="0">
-                <a:solidFill>
-                  <a:srgbClr val="222222"/>
-                </a:solidFill>
-                <a:latin typeface="Calibri"/>
-              </a:defRPr>
-            </a:pPr>
-            <a:r>
-              <a:rPr sz="1500" b="0">
-                <a:solidFill>
-                  <a:srgbClr val="222222"/>
-                </a:solidFill>
-                <a:latin typeface="Calibri"/>
-              </a:rPr>
-              <a:t>Get this wrong and one setting silently corrupts another. It will look like a hardware fault.</a:t>
+                <a:spcPts val="900"/>
+              </a:spcAft>
+              <a:defRPr sz="1800" b="0">
+                <a:solidFill>
+                  <a:srgbClr val="222222"/>
+                </a:solidFill>
+                <a:latin typeface="Calibri"/>
+              </a:defRPr>
+            </a:pPr>
+            <a:r>
+              <a:rPr sz="1800" b="0">
+                <a:solidFill>
+                  <a:srgbClr val="222222"/>
+                </a:solidFill>
+                <a:latin typeface="Calibri"/>
+              </a:rPr>
+              <a:t>The EEPROM library is an EMULATION. It reserves a slice of the flash chip, keeps a copy in RAM, and only writes the flash when you call commit().</a:t>
+            </a:r>
+          </a:p>
+          <a:p>
+            <a:pPr algn="l">
+              <a:lnSpc>
+                <a:spcPct val="100000"/>
+              </a:lnSpc>
+              <a:spcAft>
+                <a:spcPts val="900"/>
+              </a:spcAft>
+              <a:defRPr sz="1800" b="0">
+                <a:solidFill>
+                  <a:srgbClr val="222222"/>
+                </a:solidFill>
+                <a:latin typeface="Calibri"/>
+              </a:defRPr>
+            </a:pPr>
+          </a:p>
+          <a:p>
+            <a:pPr algn="l">
+              <a:lnSpc>
+                <a:spcPct val="100000"/>
+              </a:lnSpc>
+              <a:spcAft>
+                <a:spcPts val="900"/>
+              </a:spcAft>
+              <a:defRPr sz="1800" b="0">
+                <a:solidFill>
+                  <a:srgbClr val="222222"/>
+                </a:solidFill>
+                <a:latin typeface="Calibri"/>
+              </a:defRPr>
+            </a:pPr>
+            <a:r>
+              <a:rPr sz="1800" b="0">
+                <a:solidFill>
+                  <a:srgbClr val="222222"/>
+                </a:solidFill>
+                <a:latin typeface="Calibri"/>
+              </a:rPr>
+              <a:t>Three consequences:</a:t>
+            </a:r>
+          </a:p>
+          <a:p>
+            <a:pPr lvl="1" algn="l">
+              <a:lnSpc>
+                <a:spcPct val="100000"/>
+              </a:lnSpc>
+              <a:spcAft>
+                <a:spcPts val="900"/>
+              </a:spcAft>
+              <a:defRPr sz="1800" b="0">
+                <a:solidFill>
+                  <a:srgbClr val="222222"/>
+                </a:solidFill>
+                <a:latin typeface="Calibri"/>
+              </a:defRPr>
+            </a:pPr>
+            <a:r>
+              <a:rPr sz="1800" b="0">
+                <a:solidFill>
+                  <a:srgbClr val="222222"/>
+                </a:solidFill>
+                <a:latin typeface="Calibri"/>
+              </a:rPr>
+              <a:t>EEPROM.begin(size) must come first, before any get or put.</a:t>
+            </a:r>
+          </a:p>
+          <a:p>
+            <a:pPr lvl="1" algn="l">
+              <a:lnSpc>
+                <a:spcPct val="100000"/>
+              </a:lnSpc>
+              <a:spcAft>
+                <a:spcPts val="900"/>
+              </a:spcAft>
+              <a:defRPr sz="1800" b="0">
+                <a:solidFill>
+                  <a:srgbClr val="222222"/>
+                </a:solidFill>
+                <a:latin typeface="Calibri"/>
+              </a:defRPr>
+            </a:pPr>
+            <a:r>
+              <a:rPr sz="1800" b="0">
+                <a:solidFill>
+                  <a:srgbClr val="222222"/>
+                </a:solidFill>
+                <a:latin typeface="Calibri"/>
+              </a:rPr>
+              <a:t>Nothing is stored until EEPROM.commit(). Forgetting it is the single most common cause of "my settings did not save".</a:t>
+            </a:r>
+          </a:p>
+          <a:p>
+            <a:pPr lvl="1" algn="l">
+              <a:lnSpc>
+                <a:spcPct val="100000"/>
+              </a:lnSpc>
+              <a:spcAft>
+                <a:spcPts val="900"/>
+              </a:spcAft>
+              <a:defRPr sz="1800" b="0">
+                <a:solidFill>
+                  <a:srgbClr val="222222"/>
+                </a:solidFill>
+                <a:latin typeface="Calibri"/>
+              </a:defRPr>
+            </a:pPr>
+            <a:r>
+              <a:rPr sz="1800" b="0">
+                <a:solidFill>
+                  <a:srgbClr val="222222"/>
+                </a:solidFill>
+                <a:latin typeface="Calibri"/>
+              </a:rPr>
+              <a:t>Flash WEARS OUT - roughly a hundred thousand erase cycles per sector. Plenty for saving when a human asks. Nowhere near enough to commit() inside loop().</a:t>
             </a:r>
           </a:p>
         </p:txBody>
@@ -10601,7 +11652,7 @@
                 </a:solidFill>
                 <a:latin typeface="Calibri"/>
               </a:rPr>
-              <a:t>The magic byte, and never trusting storage</a:t>
+              <a:t>There is no EEPROM on an ESP32  (continued)</a:t>
             </a:r>
           </a:p>
         </p:txBody>
@@ -10679,7 +11730,7 @@
               <a:spcAft>
                 <a:spcPts val="0"/>
               </a:spcAft>
-              <a:defRPr sz="900" b="0">
+              <a:defRPr sz="1000" b="0">
                 <a:solidFill>
                   <a:srgbClr val="666666"/>
                 </a:solidFill>
@@ -10687,7 +11738,7 @@
               </a:defRPr>
             </a:pPr>
             <a:r>
-              <a:rPr sz="900" b="0">
+              <a:rPr sz="1000" b="0">
                 <a:solidFill>
                   <a:srgbClr val="666666"/>
                 </a:solidFill>
@@ -10727,7 +11778,7 @@
               <a:spcAft>
                 <a:spcPts val="0"/>
               </a:spcAft>
-              <a:defRPr sz="900" b="0">
+              <a:defRPr sz="1000" b="0">
                 <a:solidFill>
                   <a:srgbClr val="666666"/>
                 </a:solidFill>
@@ -10735,7 +11786,7 @@
               </a:defRPr>
             </a:pPr>
             <a:r>
-              <a:rPr sz="900" b="0">
+              <a:rPr sz="1000" b="0">
                 <a:solidFill>
                   <a:srgbClr val="666666"/>
                 </a:solidFill>
@@ -10755,7 +11806,7 @@
         <p:spPr>
           <a:xfrm>
             <a:off x="502920" y="1188720"/>
-            <a:ext cx="11185855" cy="530352"/>
+            <a:ext cx="11185855" cy="4023360"/>
           </a:xfrm>
           <a:prstGeom prst="rect">
             <a:avLst/>
@@ -10773,260 +11824,105 @@
                 <a:spcPct val="100000"/>
               </a:lnSpc>
               <a:spcAft>
-                <a:spcPts val="600"/>
-              </a:spcAft>
-              <a:defRPr sz="1900" b="1">
-                <a:solidFill>
-                  <a:srgbClr val="0E7C86"/>
-                </a:solidFill>
-                <a:latin typeface="Calibri"/>
-              </a:defRPr>
-            </a:pPr>
-            <a:r>
-              <a:rPr sz="1900" b="1">
-                <a:solidFill>
-                  <a:srgbClr val="0E7C86"/>
-                </a:solidFill>
-                <a:latin typeface="Calibri"/>
-              </a:rPr>
-              <a:t>Two separate checks, for two separate problems</a:t>
-            </a:r>
-          </a:p>
-        </p:txBody>
-      </p:sp>
-      <p:sp>
-        <p:nvSpPr>
-          <p:cNvPr id="7" name="TextBox 6"/>
-          <p:cNvSpPr txBox="1"/>
+                <a:spcPts val="900"/>
+              </a:spcAft>
+              <a:defRPr sz="1800" b="0">
+                <a:solidFill>
+                  <a:srgbClr val="222222"/>
+                </a:solidFill>
+                <a:latin typeface="Calibri"/>
+              </a:defRPr>
+            </a:pPr>
+          </a:p>
+          <a:p>
+            <a:pPr algn="l">
+              <a:lnSpc>
+                <a:spcPct val="100000"/>
+              </a:lnSpc>
+              <a:spcAft>
+                <a:spcPts val="900"/>
+              </a:spcAft>
+              <a:defRPr sz="1800" b="0">
+                <a:solidFill>
+                  <a:srgbClr val="222222"/>
+                </a:solidFill>
+                <a:latin typeface="Calibri"/>
+              </a:defRPr>
+            </a:pPr>
+            <a:r>
+              <a:rPr sz="1800" b="0">
+                <a:solidFill>
+                  <a:srgbClr val="222222"/>
+                </a:solidFill>
+                <a:latin typeface="Calibri"/>
+              </a:rPr>
+              <a:t>Never write on a schedule. Write when something actually changed, and only when a person asked for it.</a:t>
+            </a:r>
+          </a:p>
+        </p:txBody>
+      </p:sp>
+      <p:sp>
+        <p:nvSpPr>
+          <p:cNvPr id="7" name="Rounded Rectangle 6"/>
+          <p:cNvSpPr/>
           <p:nvPr/>
         </p:nvSpPr>
         <p:spPr>
           <a:xfrm>
-            <a:off x="502920" y="1755648"/>
-            <a:ext cx="11185855" cy="4507992"/>
-          </a:xfrm>
-          <a:prstGeom prst="rect">
-            <a:avLst/>
+            <a:off x="502920" y="5303520"/>
+            <a:ext cx="11185855" cy="960120"/>
+          </a:xfrm>
+          <a:prstGeom prst="roundRect">
+            <a:avLst>
+              <a:gd name="adj" fmla="val 4000"/>
+            </a:avLst>
           </a:prstGeom>
-          <a:noFill/>
-        </p:spPr>
-        <p:txBody>
-          <a:bodyPr wrap="square" lIns="0" tIns="0" rIns="0" bIns="0">
-            <a:spAutoFit/>
-          </a:bodyPr>
-          <a:lstStyle/>
-          <a:p>
-            <a:pPr algn="l">
-              <a:lnSpc>
-                <a:spcPct val="100000"/>
-              </a:lnSpc>
-              <a:spcAft>
-                <a:spcPts val="600"/>
-              </a:spcAft>
-              <a:defRPr sz="1500" b="0">
-                <a:solidFill>
-                  <a:srgbClr val="222222"/>
-                </a:solidFill>
-                <a:latin typeface="Calibri"/>
-              </a:defRPr>
-            </a:pPr>
-            <a:r>
-              <a:rPr sz="1500" b="0">
-                <a:solidFill>
-                  <a:srgbClr val="222222"/>
-                </a:solidFill>
-                <a:latin typeface="Calibri"/>
-              </a:rPr>
-              <a:t>A brand new ESP32 has flash full of 0xFF. Read an int out of that and you get -1. Read a float and you get something meaningless.</a:t>
-            </a:r>
-          </a:p>
-          <a:p>
-            <a:pPr algn="l">
-              <a:lnSpc>
-                <a:spcPct val="100000"/>
-              </a:lnSpc>
-              <a:spcAft>
-                <a:spcPts val="600"/>
-              </a:spcAft>
-              <a:defRPr sz="1500" b="0">
-                <a:solidFill>
-                  <a:srgbClr val="222222"/>
-                </a:solidFill>
-                <a:latin typeface="Calibri"/>
-              </a:defRPr>
-            </a:pPr>
-          </a:p>
-          <a:p>
-            <a:pPr algn="l">
-              <a:lnSpc>
-                <a:spcPct val="100000"/>
-              </a:lnSpc>
-              <a:spcAft>
-                <a:spcPts val="600"/>
-              </a:spcAft>
-              <a:defRPr sz="1500" b="0">
-                <a:solidFill>
-                  <a:srgbClr val="222222"/>
-                </a:solidFill>
-                <a:latin typeface="Calibri"/>
-              </a:defRPr>
-            </a:pPr>
-            <a:r>
-              <a:rPr sz="1500" b="0">
-                <a:solidFill>
-                  <a:srgbClr val="222222"/>
-                </a:solidFill>
-                <a:latin typeface="Calibri"/>
-              </a:rPr>
-              <a:t>So the first byte of the block is a MARKER, written only after a successful save. If it is not 0xA5, the data is not ours and we use the compiled-in defaults.</a:t>
-            </a:r>
-          </a:p>
-          <a:p>
-            <a:pPr algn="l">
-              <a:lnSpc>
-                <a:spcPct val="100000"/>
-              </a:lnSpc>
-              <a:spcAft>
-                <a:spcPts val="600"/>
-              </a:spcAft>
-              <a:defRPr sz="1500" b="0">
-                <a:solidFill>
-                  <a:srgbClr val="222222"/>
-                </a:solidFill>
-                <a:latin typeface="Calibri"/>
-              </a:defRPr>
-            </a:pPr>
-          </a:p>
-          <a:p>
-            <a:pPr algn="l">
-              <a:lnSpc>
-                <a:spcPct val="100000"/>
-              </a:lnSpc>
-              <a:spcAft>
-                <a:spcPts val="600"/>
-              </a:spcAft>
-              <a:defRPr sz="1500" b="0">
-                <a:solidFill>
-                  <a:srgbClr val="222222"/>
-                </a:solidFill>
-                <a:latin typeface="Calibri"/>
-              </a:defRPr>
-            </a:pPr>
-            <a:r>
-              <a:rPr sz="1500" b="0">
-                <a:solidFill>
-                  <a:srgbClr val="222222"/>
-                </a:solidFill>
-                <a:latin typeface="Calibri"/>
-              </a:rPr>
-              <a:t>But that is not enough on its own. Even WITH the marker, every value is range checked as it loads:</a:t>
-            </a:r>
-          </a:p>
-          <a:p>
-            <a:pPr lvl="1" algn="l">
-              <a:lnSpc>
-                <a:spcPct val="100000"/>
-              </a:lnSpc>
-              <a:spcAft>
-                <a:spcPts val="600"/>
-              </a:spcAft>
-              <a:defRPr sz="1500" b="0">
-                <a:solidFill>
-                  <a:srgbClr val="222222"/>
-                </a:solidFill>
-                <a:latin typeface="Calibri"/>
-              </a:defRPr>
-            </a:pPr>
-            <a:r>
-              <a:rPr sz="1500" b="0">
-                <a:solidFill>
-                  <a:srgbClr val="222222"/>
-                </a:solidFill>
-                <a:latin typeface="Calibri"/>
-              </a:rPr>
-              <a:t>if (saved_dz &gt;= 0 &amp;&amp; saved_dz &lt;= DEADZONE_MAX)  INPUT_DEADZONE = saved_dz;</a:t>
-            </a:r>
-          </a:p>
-          <a:p>
-            <a:pPr algn="l">
-              <a:lnSpc>
-                <a:spcPct val="100000"/>
-              </a:lnSpc>
-              <a:spcAft>
-                <a:spcPts val="600"/>
-              </a:spcAft>
-              <a:defRPr sz="1500" b="0">
-                <a:solidFill>
-                  <a:srgbClr val="222222"/>
-                </a:solidFill>
-                <a:latin typeface="Calibri"/>
-              </a:defRPr>
-            </a:pPr>
-          </a:p>
-          <a:p>
-            <a:pPr algn="l">
-              <a:lnSpc>
-                <a:spcPct val="100000"/>
-              </a:lnSpc>
-              <a:spcAft>
-                <a:spcPts val="600"/>
-              </a:spcAft>
-              <a:defRPr sz="1500" b="0">
-                <a:solidFill>
-                  <a:srgbClr val="222222"/>
-                </a:solidFill>
-                <a:latin typeface="Calibri"/>
-              </a:defRPr>
-            </a:pPr>
-            <a:r>
-              <a:rPr sz="1500" b="0">
-                <a:solidFill>
-                  <a:srgbClr val="222222"/>
-                </a:solidFill>
-                <a:latin typeface="Calibri"/>
-              </a:rPr>
-              <a:t>Why? Because a value saved by an OLDER version of the program is perfectly valid data and still wrong for this one. The marker tells you the bytes are yours. It does not tell you they still make sense.</a:t>
-            </a:r>
-          </a:p>
-          <a:p>
-            <a:pPr algn="l">
-              <a:lnSpc>
-                <a:spcPct val="100000"/>
-              </a:lnSpc>
-              <a:spcAft>
-                <a:spcPts val="600"/>
-              </a:spcAft>
-              <a:defRPr sz="1500" b="0">
-                <a:solidFill>
-                  <a:srgbClr val="222222"/>
-                </a:solidFill>
-                <a:latin typeface="Calibri"/>
-              </a:defRPr>
-            </a:pPr>
-          </a:p>
-          <a:p>
-            <a:pPr algn="l">
-              <a:lnSpc>
-                <a:spcPct val="100000"/>
-              </a:lnSpc>
-              <a:spcAft>
-                <a:spcPts val="600"/>
-              </a:spcAft>
-              <a:defRPr sz="1500" b="0">
-                <a:solidFill>
-                  <a:srgbClr val="222222"/>
-                </a:solidFill>
-                <a:latin typeface="Calibri"/>
-              </a:defRPr>
-            </a:pPr>
-            <a:r>
-              <a:rPr sz="1500" b="0">
-                <a:solidFill>
-                  <a:srgbClr val="222222"/>
-                </a:solidFill>
-                <a:latin typeface="Calibri"/>
-              </a:rPr>
-              <a:t>Defensive loading is not paranoia. It is the difference between a vehicle that boots with odd settings and one that will not boot.</a:t>
+          <a:solidFill>
+            <a:srgbClr val="FDF3E3"/>
+          </a:solidFill>
+          <a:ln w="12700">
+            <a:solidFill>
+              <a:srgbClr val="B46A0F"/>
+            </a:solidFill>
+          </a:ln>
+          <a:effectLst/>
+        </p:spPr>
+        <p:style>
+          <a:lnRef idx="1">
+            <a:schemeClr val="accent1"/>
+          </a:lnRef>
+          <a:fillRef idx="3">
+            <a:schemeClr val="accent1"/>
+          </a:fillRef>
+          <a:effectRef idx="2">
+            <a:schemeClr val="accent1"/>
+          </a:effectRef>
+          <a:fontRef idx="minor">
+            <a:schemeClr val="lt1"/>
+          </a:fontRef>
+        </p:style>
+        <p:txBody>
+          <a:bodyPr rtlCol="0" anchor="ctr" wrap="square" lIns="164592" rIns="164592" tIns="73152" bIns="73152"/>
+          <a:lstStyle/>
+          <a:p>
+            <a:pPr algn="l"/>
+            <a:r>
+              <a:rPr sz="1300" b="1">
+                <a:solidFill>
+                  <a:srgbClr val="B46A0F"/>
+                </a:solidFill>
+                <a:latin typeface="Calibri"/>
+              </a:rPr>
+              <a:t>WATCH OUT   </a:t>
+            </a:r>
+            <a:r>
+              <a:rPr sz="1500">
+                <a:solidFill>
+                  <a:srgbClr val="222222"/>
+                </a:solidFill>
+                <a:latin typeface="Calibri"/>
+              </a:rPr>
+              <a:t>A commit() in loop() at 30 Hz burns through a hundred thousand cycles in under an hour.</a:t>
             </a:r>
           </a:p>
         </p:txBody>

--- a/ground-vehicle/docs/courses/advanced/l3_bluetooth_and_storage.pptx
+++ b/ground-vehicle/docs/courses/advanced/l3_bluetooth_and_storage.pptx
@@ -23,6 +23,9 @@
     <p:sldId id="271" r:id="rId22"/>
     <p:sldId id="272" r:id="rId23"/>
     <p:sldId id="273" r:id="rId24"/>
+    <p:sldId id="274" r:id="rId25"/>
+    <p:sldId id="275" r:id="rId26"/>
+    <p:sldId id="276" r:id="rId27"/>
   </p:sldIdLst>
   <p:sldSz cx="12191695" cy="6858000" type="screen4x3"/>
   <p:notesSz cx="6858000" cy="9144000"/>
@@ -3325,8 +3328,8 @@
         </p:nvSpPr>
         <p:spPr>
           <a:xfrm>
-            <a:off x="502920" y="4224528"/>
-            <a:ext cx="6492240" cy="1371600"/>
+            <a:off x="502920" y="3931920"/>
+            <a:ext cx="6492240" cy="2148840"/>
           </a:xfrm>
           <a:prstGeom prst="rect">
             <a:avLst/>
@@ -3344,9 +3347,9 @@
                 <a:spcPct val="100000"/>
               </a:lnSpc>
               <a:spcAft>
-                <a:spcPts val="200"/>
-              </a:spcAft>
-              <a:defRPr sz="1300" b="0">
+                <a:spcPts val="100"/>
+              </a:spcAft>
+              <a:defRPr sz="1200" b="0">
                 <a:solidFill>
                   <a:srgbClr val="666666"/>
                 </a:solidFill>
@@ -3354,24 +3357,24 @@
               </a:defRPr>
             </a:pPr>
             <a:r>
-              <a:rPr sz="1300" b="0">
+              <a:rPr sz="1200" b="0">
                 <a:solidFill>
                   <a:srgbClr val="666666"/>
                 </a:solidFill>
                 <a:latin typeface="Calibri"/>
               </a:rPr>
-              <a:t>Porpoise Robotics  -  porpoiserobotics.org</a:t>
-            </a:r>
-          </a:p>
-          <a:p>
-            <a:pPr algn="l">
-              <a:lnSpc>
-                <a:spcPct val="100000"/>
-              </a:lnSpc>
-              <a:spcAft>
-                <a:spcPts val="200"/>
-              </a:spcAft>
-              <a:defRPr sz="1300" b="0">
+              <a:t>PORPOISE ROBOTICS  -  Precision Oceanographic Program On and In the Sea Environment</a:t>
+            </a:r>
+          </a:p>
+          <a:p>
+            <a:pPr algn="l">
+              <a:lnSpc>
+                <a:spcPct val="100000"/>
+              </a:lnSpc>
+              <a:spcAft>
+                <a:spcPts val="100"/>
+              </a:spcAft>
+              <a:defRPr sz="1200" b="0">
                 <a:solidFill>
                   <a:srgbClr val="666666"/>
                 </a:solidFill>
@@ -3379,24 +3382,24 @@
               </a:defRPr>
             </a:pPr>
             <a:r>
-              <a:rPr sz="1300" b="0">
+              <a:rPr sz="1200" b="0">
                 <a:solidFill>
                   <a:srgbClr val="666666"/>
                 </a:solidFill>
                 <a:latin typeface="Calibri"/>
               </a:rPr>
-              <a:t>Kevin P. Bowen, President  -  kbowen6@icloud.com</a:t>
-            </a:r>
-          </a:p>
-          <a:p>
-            <a:pPr algn="l">
-              <a:lnSpc>
-                <a:spcPct val="100000"/>
-              </a:lnSpc>
-              <a:spcAft>
-                <a:spcPts val="200"/>
-              </a:spcAft>
-              <a:defRPr sz="1300" b="0">
+              <a:t>porpoiserobotics.org</a:t>
+            </a:r>
+          </a:p>
+          <a:p>
+            <a:pPr algn="l">
+              <a:lnSpc>
+                <a:spcPct val="100000"/>
+              </a:lnSpc>
+              <a:spcAft>
+                <a:spcPts val="100"/>
+              </a:spcAft>
+              <a:defRPr sz="1200" b="0">
                 <a:solidFill>
                   <a:srgbClr val="666666"/>
                 </a:solidFill>
@@ -3410,9 +3413,9 @@
                 <a:spcPct val="100000"/>
               </a:lnSpc>
               <a:spcAft>
-                <a:spcPts val="200"/>
-              </a:spcAft>
-              <a:defRPr sz="1300" b="0">
+                <a:spcPts val="100"/>
+              </a:spcAft>
+              <a:defRPr sz="1200" b="0">
                 <a:solidFill>
                   <a:srgbClr val="666666"/>
                 </a:solidFill>
@@ -3420,7 +3423,148 @@
               </a:defRPr>
             </a:pPr>
             <a:r>
-              <a:rPr sz="1300" b="0">
+              <a:rPr sz="1200" b="0">
+                <a:solidFill>
+                  <a:srgbClr val="666666"/>
+                </a:solidFill>
+                <a:latin typeface="Calibri"/>
+              </a:rPr>
+              <a:t>Kevin Bowen, President  -  kbowen6@icloud.com</a:t>
+            </a:r>
+          </a:p>
+          <a:p>
+            <a:pPr algn="l">
+              <a:lnSpc>
+                <a:spcPct val="100000"/>
+              </a:lnSpc>
+              <a:spcAft>
+                <a:spcPts val="100"/>
+              </a:spcAft>
+              <a:defRPr sz="1200" b="0">
+                <a:solidFill>
+                  <a:srgbClr val="666666"/>
+                </a:solidFill>
+                <a:latin typeface="Calibri"/>
+              </a:defRPr>
+            </a:pPr>
+            <a:r>
+              <a:rPr sz="1200" b="0">
+                <a:solidFill>
+                  <a:srgbClr val="666666"/>
+                </a:solidFill>
+                <a:latin typeface="Calibri"/>
+              </a:rPr>
+              <a:t>Malcom Graham, VP Education      Louis Parker, VP Technology</a:t>
+            </a:r>
+          </a:p>
+          <a:p>
+            <a:pPr algn="l">
+              <a:lnSpc>
+                <a:spcPct val="100000"/>
+              </a:lnSpc>
+              <a:spcAft>
+                <a:spcPts val="100"/>
+              </a:spcAft>
+              <a:defRPr sz="1200" b="0">
+                <a:solidFill>
+                  <a:srgbClr val="666666"/>
+                </a:solidFill>
+                <a:latin typeface="Calibri"/>
+              </a:defRPr>
+            </a:pPr>
+            <a:r>
+              <a:rPr sz="1200" b="0">
+                <a:solidFill>
+                  <a:srgbClr val="666666"/>
+                </a:solidFill>
+                <a:latin typeface="Calibri"/>
+              </a:rPr>
+              <a:t>Valen Farre, System Engineer      Gary Howland, Animation</a:t>
+            </a:r>
+          </a:p>
+          <a:p>
+            <a:pPr algn="l">
+              <a:lnSpc>
+                <a:spcPct val="100000"/>
+              </a:lnSpc>
+              <a:spcAft>
+                <a:spcPts val="100"/>
+              </a:spcAft>
+              <a:defRPr sz="1200" b="0">
+                <a:solidFill>
+                  <a:srgbClr val="666666"/>
+                </a:solidFill>
+                <a:latin typeface="Calibri"/>
+              </a:defRPr>
+            </a:pPr>
+            <a:r>
+              <a:rPr sz="1200" b="0">
+                <a:solidFill>
+                  <a:srgbClr val="666666"/>
+                </a:solidFill>
+                <a:latin typeface="Calibri"/>
+              </a:rPr>
+              <a:t>Eddie Revollo, Artificial Intelligence</a:t>
+            </a:r>
+          </a:p>
+          <a:p>
+            <a:pPr algn="l">
+              <a:lnSpc>
+                <a:spcPct val="100000"/>
+              </a:lnSpc>
+              <a:spcAft>
+                <a:spcPts val="100"/>
+              </a:spcAft>
+              <a:defRPr sz="1200" b="0">
+                <a:solidFill>
+                  <a:srgbClr val="666666"/>
+                </a:solidFill>
+                <a:latin typeface="Calibri"/>
+              </a:defRPr>
+            </a:pPr>
+            <a:r>
+              <a:rPr sz="1200" b="0">
+                <a:solidFill>
+                  <a:srgbClr val="666666"/>
+                </a:solidFill>
+                <a:latin typeface="Calibri"/>
+              </a:rPr>
+              <a:t>Interns: Oscar Canazales, Krishnansh Vemulapalli, Soham Gangal, Erik Olsen</a:t>
+            </a:r>
+          </a:p>
+          <a:p>
+            <a:pPr algn="l">
+              <a:lnSpc>
+                <a:spcPct val="100000"/>
+              </a:lnSpc>
+              <a:spcAft>
+                <a:spcPts val="100"/>
+              </a:spcAft>
+              <a:defRPr sz="1200" b="0">
+                <a:solidFill>
+                  <a:srgbClr val="666666"/>
+                </a:solidFill>
+                <a:latin typeface="Calibri"/>
+              </a:defRPr>
+            </a:pPr>
+          </a:p>
+          <a:p>
+            <a:pPr algn="l">
+              <a:lnSpc>
+                <a:spcPct val="100000"/>
+              </a:lnSpc>
+              <a:spcAft>
+                <a:spcPts val="100"/>
+              </a:spcAft>
+              <a:defRPr sz="1200" b="0">
+                <a:solidFill>
+                  <a:srgbClr val="666666"/>
+                </a:solidFill>
+                <a:latin typeface="Calibri"/>
+              </a:defRPr>
+            </a:pPr>
+            <a:r>
+              <a:rPr sz="1200" b="0">
                 <a:solidFill>
                   <a:srgbClr val="666666"/>
                 </a:solidFill>
@@ -3562,7 +3706,7 @@
                 </a:solidFill>
                 <a:latin typeface="Calibri"/>
               </a:rPr>
-              <a:t>The storage map, and why the addresses are spaced out</a:t>
+              <a:t>There is no EEPROM on an ESP32</a:t>
             </a:r>
           </a:p>
         </p:txBody>
@@ -3716,7 +3860,7 @@
         <p:spPr>
           <a:xfrm>
             <a:off x="502920" y="1188720"/>
-            <a:ext cx="7047088" cy="274320"/>
+            <a:ext cx="11185855" cy="530352"/>
           </a:xfrm>
           <a:prstGeom prst="rect">
             <a:avLst/>
@@ -3734,368 +3878,37 @@
                 <a:spcPct val="100000"/>
               </a:lnSpc>
               <a:spcAft>
-                <a:spcPts val="200"/>
-              </a:spcAft>
-              <a:defRPr sz="1200" b="1">
+                <a:spcPts val="600"/>
+              </a:spcAft>
+              <a:defRPr sz="1900" b="1">
                 <a:solidFill>
                   <a:srgbClr val="0E7C86"/>
                 </a:solidFill>
-                <a:latin typeface="Consolas"/>
-              </a:defRPr>
-            </a:pPr>
-            <a:r>
-              <a:rPr sz="1200" b="1">
+                <a:latin typeface="Calibri"/>
+              </a:defRPr>
+            </a:pPr>
+            <a:r>
+              <a:rPr sz="1900" b="1">
                 <a:solidFill>
                   <a:srgbClr val="0E7C86"/>
                 </a:solidFill>
-                <a:latin typeface="Consolas"/>
-              </a:rPr>
-              <a:t>Config.h</a:t>
-            </a:r>
-          </a:p>
-        </p:txBody>
-      </p:sp>
-      <p:sp>
-        <p:nvSpPr>
-          <p:cNvPr id="7" name="CODE_PANEL"/>
-          <p:cNvSpPr/>
-          <p:nvPr/>
-        </p:nvSpPr>
-        <p:spPr>
-          <a:xfrm>
-            <a:off x="502920" y="1517904"/>
-            <a:ext cx="7047088" cy="4745736"/>
-          </a:xfrm>
-          <a:prstGeom prst="roundRect">
-            <a:avLst>
-              <a:gd name="adj" fmla="val 4000"/>
-            </a:avLst>
-          </a:prstGeom>
-          <a:solidFill>
-            <a:srgbClr val="F4F6F8"/>
-          </a:solidFill>
-          <a:ln w="12700">
-            <a:solidFill>
-              <a:srgbClr val="C8D2DE"/>
-            </a:solidFill>
-          </a:ln>
-          <a:effectLst/>
-        </p:spPr>
-        <p:style>
-          <a:lnRef idx="1">
-            <a:schemeClr val="accent1"/>
-          </a:lnRef>
-          <a:fillRef idx="3">
-            <a:schemeClr val="accent1"/>
-          </a:fillRef>
-          <a:effectRef idx="2">
-            <a:schemeClr val="accent1"/>
-          </a:effectRef>
-          <a:fontRef idx="minor">
-            <a:schemeClr val="lt1"/>
-          </a:fontRef>
-        </p:style>
-        <p:txBody>
-          <a:bodyPr rtlCol="0" anchor="t" wrap="square" lIns="146304" tIns="91440" bIns="73152"/>
-          <a:lstStyle/>
-          <a:p>
-            <a:pPr algn="l">
-              <a:lnSpc>
-                <a:spcPct val="100000"/>
-              </a:lnSpc>
-              <a:spcAft>
-                <a:spcPts val="0"/>
-              </a:spcAft>
-              <a:defRPr sz="1300">
-                <a:latin typeface="Consolas"/>
-              </a:defRPr>
-            </a:pPr>
-            <a:r>
-              <a:rPr sz="1300">
-                <a:solidFill>
-                  <a:srgbClr val="222222"/>
-                </a:solidFill>
-                <a:latin typeface="Consolas"/>
-              </a:rPr>
-              <a:t>const int ADDR_DEADZONE       =  0;   // int,   4 bytes</a:t>
-            </a:r>
-          </a:p>
-          <a:p>
-            <a:pPr algn="l">
-              <a:lnSpc>
-                <a:spcPct val="100000"/>
-              </a:lnSpc>
-              <a:spcAft>
-                <a:spcPts val="0"/>
-              </a:spcAft>
-              <a:defRPr sz="1300">
-                <a:latin typeface="Consolas"/>
-              </a:defRPr>
-            </a:pPr>
-            <a:r>
-              <a:rPr sz="1300">
-                <a:solidFill>
-                  <a:srgbClr val="222222"/>
-                </a:solidFill>
-                <a:latin typeface="Consolas"/>
-              </a:rPr>
-              <a:t>const int ADDR_DEADZONE_LS_X  =  4;</a:t>
-            </a:r>
-          </a:p>
-          <a:p>
-            <a:pPr algn="l">
-              <a:lnSpc>
-                <a:spcPct val="100000"/>
-              </a:lnSpc>
-              <a:spcAft>
-                <a:spcPts val="0"/>
-              </a:spcAft>
-              <a:defRPr sz="1300">
-                <a:latin typeface="Consolas"/>
-              </a:defRPr>
-            </a:pPr>
-            <a:r>
-              <a:rPr sz="1300">
-                <a:solidFill>
-                  <a:srgbClr val="222222"/>
-                </a:solidFill>
-                <a:latin typeface="Consolas"/>
-              </a:rPr>
-              <a:t>const int ADDR_DEADZONE_LS_Y  =  8;</a:t>
-            </a:r>
-          </a:p>
-          <a:p>
-            <a:pPr algn="l">
-              <a:lnSpc>
-                <a:spcPct val="100000"/>
-              </a:lnSpc>
-              <a:spcAft>
-                <a:spcPts val="0"/>
-              </a:spcAft>
-              <a:defRPr sz="1300">
-                <a:latin typeface="Consolas"/>
-              </a:defRPr>
-            </a:pPr>
-            <a:r>
-              <a:rPr sz="1300">
-                <a:solidFill>
-                  <a:srgbClr val="222222"/>
-                </a:solidFill>
-                <a:latin typeface="Consolas"/>
-              </a:rPr>
-              <a:t>const int ADDR_DEADZONE_RS_X  = 12;</a:t>
-            </a:r>
-          </a:p>
-          <a:p>
-            <a:pPr algn="l">
-              <a:lnSpc>
-                <a:spcPct val="100000"/>
-              </a:lnSpc>
-              <a:spcAft>
-                <a:spcPts val="0"/>
-              </a:spcAft>
-              <a:defRPr sz="1300">
-                <a:latin typeface="Consolas"/>
-              </a:defRPr>
-            </a:pPr>
-            <a:r>
-              <a:rPr sz="1300">
-                <a:solidFill>
-                  <a:srgbClr val="222222"/>
-                </a:solidFill>
-                <a:latin typeface="Consolas"/>
-              </a:rPr>
-              <a:t>const int ADDR_DEADZONE_RS_Y  = 16;</a:t>
-            </a:r>
-          </a:p>
-          <a:p>
-            <a:pPr algn="l">
-              <a:lnSpc>
-                <a:spcPct val="100000"/>
-              </a:lnSpc>
-              <a:spcAft>
-                <a:spcPts val="0"/>
-              </a:spcAft>
-              <a:defRPr sz="1300">
-                <a:latin typeface="Consolas"/>
-              </a:defRPr>
-            </a:pPr>
-            <a:r>
-              <a:rPr sz="1300">
-                <a:solidFill>
-                  <a:srgbClr val="222222"/>
-                </a:solidFill>
-                <a:latin typeface="Consolas"/>
-              </a:rPr>
-              <a:t>const int ADDR_LS_Y_SC        = 20;   // float, 4 bytes</a:t>
-            </a:r>
-          </a:p>
-          <a:p>
-            <a:pPr algn="l">
-              <a:lnSpc>
-                <a:spcPct val="100000"/>
-              </a:lnSpc>
-              <a:spcAft>
-                <a:spcPts val="0"/>
-              </a:spcAft>
-              <a:defRPr sz="1300">
-                <a:latin typeface="Consolas"/>
-              </a:defRPr>
-            </a:pPr>
-            <a:r>
-              <a:rPr sz="1300">
-                <a:solidFill>
-                  <a:srgbClr val="222222"/>
-                </a:solidFill>
-                <a:latin typeface="Consolas"/>
-              </a:rPr>
-              <a:t>const int ADDR_LS_X_SC        = 24;</a:t>
-            </a:r>
-          </a:p>
-          <a:p>
-            <a:pPr algn="l">
-              <a:lnSpc>
-                <a:spcPct val="100000"/>
-              </a:lnSpc>
-              <a:spcAft>
-                <a:spcPts val="0"/>
-              </a:spcAft>
-              <a:defRPr sz="1300">
-                <a:latin typeface="Consolas"/>
-              </a:defRPr>
-            </a:pPr>
-            <a:r>
-              <a:rPr sz="1300">
-                <a:solidFill>
-                  <a:srgbClr val="222222"/>
-                </a:solidFill>
-                <a:latin typeface="Consolas"/>
-              </a:rPr>
-              <a:t>const int ADDR_RS_Y_SC        = 28;</a:t>
-            </a:r>
-          </a:p>
-          <a:p>
-            <a:pPr algn="l">
-              <a:lnSpc>
-                <a:spcPct val="100000"/>
-              </a:lnSpc>
-              <a:spcAft>
-                <a:spcPts val="0"/>
-              </a:spcAft>
-              <a:defRPr sz="1300">
-                <a:latin typeface="Consolas"/>
-              </a:defRPr>
-            </a:pPr>
-            <a:r>
-              <a:rPr sz="1300">
-                <a:solidFill>
-                  <a:srgbClr val="222222"/>
-                </a:solidFill>
-                <a:latin typeface="Consolas"/>
-              </a:rPr>
-              <a:t>const int ADDR_RS_X_SC        = 32;</a:t>
-            </a:r>
-          </a:p>
-          <a:p>
-            <a:pPr algn="l">
-              <a:lnSpc>
-                <a:spcPct val="100000"/>
-              </a:lnSpc>
-              <a:spcAft>
-                <a:spcPts val="0"/>
-              </a:spcAft>
-              <a:defRPr sz="1300">
-                <a:latin typeface="Consolas"/>
-              </a:defRPr>
-            </a:pPr>
-            <a:r>
-              <a:rPr sz="1300" b="1">
-                <a:solidFill>
-                  <a:srgbClr val="0E7C86"/>
-                </a:solidFill>
-                <a:latin typeface="Consolas"/>
-              </a:rPr>
-              <a:t>const int ADDR_PAIRED_VALID   = 36;   // 1 byte:  0xA5 when valid</a:t>
-            </a:r>
-          </a:p>
-          <a:p>
-            <a:pPr algn="l">
-              <a:lnSpc>
-                <a:spcPct val="100000"/>
-              </a:lnSpc>
-              <a:spcAft>
-                <a:spcPts val="0"/>
-              </a:spcAft>
-              <a:defRPr sz="1300">
-                <a:latin typeface="Consolas"/>
-              </a:defRPr>
-            </a:pPr>
-            <a:r>
-              <a:rPr sz="1300" b="1">
-                <a:solidFill>
-                  <a:srgbClr val="0E7C86"/>
-                </a:solidFill>
-                <a:latin typeface="Consolas"/>
-              </a:rPr>
-              <a:t>const int ADDR_PAIRED_ADDR    = 37;   // 6 bytes: the address</a:t>
-            </a:r>
-          </a:p>
-          <a:p>
-            <a:pPr algn="l">
-              <a:lnSpc>
-                <a:spcPct val="100000"/>
-              </a:lnSpc>
-              <a:spcAft>
-                <a:spcPts val="0"/>
-              </a:spcAft>
-              <a:defRPr sz="1300">
-                <a:latin typeface="Consolas"/>
-              </a:defRPr>
-            </a:pPr>
-            <a:r>
-              <a:rPr sz="1300">
-                <a:solidFill>
-                  <a:srgbClr val="222222"/>
-                </a:solidFill>
-                <a:latin typeface="Consolas"/>
-              </a:rPr>
-              <a:t> </a:t>
-            </a:r>
-          </a:p>
-          <a:p>
-            <a:pPr algn="l">
-              <a:lnSpc>
-                <a:spcPct val="100000"/>
-              </a:lnSpc>
-              <a:spcAft>
-                <a:spcPts val="0"/>
-              </a:spcAft>
-              <a:defRPr sz="1300">
-                <a:latin typeface="Consolas"/>
-              </a:defRPr>
-            </a:pPr>
-            <a:r>
-              <a:rPr sz="1300" b="1">
-                <a:solidFill>
-                  <a:srgbClr val="0E7C86"/>
-                </a:solidFill>
-                <a:latin typeface="Consolas"/>
-              </a:rPr>
-              <a:t>const uint8_t PAIRED_VALID_MAGIC = 0xA5;</a:t>
-            </a:r>
-          </a:p>
-        </p:txBody>
-      </p:sp>
-      <p:sp>
-        <p:nvSpPr>
-          <p:cNvPr id="8" name="TextBox 7"/>
+                <a:latin typeface="Calibri"/>
+              </a:rPr>
+              <a:t>It is flash, pretending</a:t>
+            </a:r>
+          </a:p>
+        </p:txBody>
+      </p:sp>
+      <p:sp>
+        <p:nvSpPr>
+          <p:cNvPr id="7" name="TextBox 6"/>
           <p:cNvSpPr txBox="1"/>
           <p:nvPr/>
         </p:nvSpPr>
         <p:spPr>
           <a:xfrm>
-            <a:off x="7870048" y="1517904"/>
-            <a:ext cx="3818727" cy="4745736"/>
+            <a:off x="502920" y="1755648"/>
+            <a:ext cx="11185855" cy="4507992"/>
           </a:xfrm>
           <a:prstGeom prst="rect">
             <a:avLst/>
@@ -4113,7 +3926,7 @@
                 <a:spcPct val="100000"/>
               </a:lnSpc>
               <a:spcAft>
-                <a:spcPts val="600"/>
+                <a:spcPts val="900"/>
               </a:spcAft>
               <a:defRPr sz="1800" b="0">
                 <a:solidFill>
@@ -4129,16 +3942,16 @@
                 </a:solidFill>
                 <a:latin typeface="Calibri"/>
               </a:rPr>
-              <a:t>EEPROM is a flat array of bytes. YOU choose where each value lives, and nothing stops two values overlapping.</a:t>
-            </a:r>
-          </a:p>
-          <a:p>
-            <a:pPr algn="l">
-              <a:lnSpc>
-                <a:spcPct val="100000"/>
-              </a:lnSpc>
-              <a:spcAft>
-                <a:spcPts val="600"/>
+              <a:t>The EEPROM library is an EMULATION. It reserves a slice of the flash chip, keeps a copy in RAM, and only writes the flash when you call commit().</a:t>
+            </a:r>
+          </a:p>
+          <a:p>
+            <a:pPr algn="l">
+              <a:lnSpc>
+                <a:spcPct val="100000"/>
+              </a:lnSpc>
+              <a:spcAft>
+                <a:spcPts val="900"/>
               </a:spcAft>
               <a:defRPr sz="1800" b="0">
                 <a:solidFill>
@@ -4147,6 +3960,22 @@
                 <a:latin typeface="Calibri"/>
               </a:defRPr>
             </a:pPr>
+          </a:p>
+          <a:p>
+            <a:pPr algn="l">
+              <a:lnSpc>
+                <a:spcPct val="100000"/>
+              </a:lnSpc>
+              <a:spcAft>
+                <a:spcPts val="900"/>
+              </a:spcAft>
+              <a:defRPr sz="1800" b="0">
+                <a:solidFill>
+                  <a:srgbClr val="222222"/>
+                </a:solidFill>
+                <a:latin typeface="Calibri"/>
+              </a:defRPr>
+            </a:pPr>
             <a:r>
               <a:rPr sz="1800" b="0">
                 <a:solidFill>
@@ -4154,16 +3983,16 @@
                 </a:solidFill>
                 <a:latin typeface="Calibri"/>
               </a:rPr>
-              <a:t>An int is 4 bytes and a float is 4 bytes on this chip, so each slot gets 4.</a:t>
-            </a:r>
-          </a:p>
-          <a:p>
-            <a:pPr algn="l">
-              <a:lnSpc>
-                <a:spcPct val="100000"/>
-              </a:lnSpc>
-              <a:spcAft>
-                <a:spcPts val="600"/>
+              <a:t>Three consequences:</a:t>
+            </a:r>
+          </a:p>
+          <a:p>
+            <a:pPr lvl="1" algn="l">
+              <a:lnSpc>
+                <a:spcPct val="100000"/>
+              </a:lnSpc>
+              <a:spcAft>
+                <a:spcPts val="900"/>
               </a:spcAft>
               <a:defRPr sz="1800" b="0">
                 <a:solidFill>
@@ -4179,16 +4008,16 @@
                 </a:solidFill>
                 <a:latin typeface="Calibri"/>
               </a:rPr>
-              <a:t>Laying them out as one ADDR_ constant per value, in one place, is what makes an overlap visible when you read the file.</a:t>
-            </a:r>
-          </a:p>
-          <a:p>
-            <a:pPr algn="l">
-              <a:lnSpc>
-                <a:spcPct val="100000"/>
-              </a:lnSpc>
-              <a:spcAft>
-                <a:spcPts val="600"/>
+              <a:t>EEPROM.begin(size) must come first, before any get or put.</a:t>
+            </a:r>
+          </a:p>
+          <a:p>
+            <a:pPr lvl="1" algn="l">
+              <a:lnSpc>
+                <a:spcPct val="100000"/>
+              </a:lnSpc>
+              <a:spcAft>
+                <a:spcPts val="900"/>
               </a:spcAft>
               <a:defRPr sz="1800" b="0">
                 <a:solidFill>
@@ -4204,7 +4033,32 @@
                 </a:solidFill>
                 <a:latin typeface="Calibri"/>
               </a:rPr>
-              <a:t>Get this wrong and one setting silently corrupts another. It will look like a hardware fault.</a:t>
+              <a:t>Nothing is stored until EEPROM.commit(). Forgetting it is the single most common cause of "my settings did not save".</a:t>
+            </a:r>
+          </a:p>
+          <a:p>
+            <a:pPr lvl="1" algn="l">
+              <a:lnSpc>
+                <a:spcPct val="100000"/>
+              </a:lnSpc>
+              <a:spcAft>
+                <a:spcPts val="900"/>
+              </a:spcAft>
+              <a:defRPr sz="1800" b="0">
+                <a:solidFill>
+                  <a:srgbClr val="222222"/>
+                </a:solidFill>
+                <a:latin typeface="Calibri"/>
+              </a:defRPr>
+            </a:pPr>
+            <a:r>
+              <a:rPr sz="1800" b="0">
+                <a:solidFill>
+                  <a:srgbClr val="222222"/>
+                </a:solidFill>
+                <a:latin typeface="Calibri"/>
+              </a:rPr>
+              <a:t>Flash WEARS OUT - roughly a hundred thousand erase cycles per sector. Plenty for saving when a human asks. Nowhere near enough to commit() inside loop().</a:t>
             </a:r>
           </a:p>
         </p:txBody>
@@ -4268,7 +4122,7 @@
                 </a:solidFill>
                 <a:latin typeface="Calibri"/>
               </a:rPr>
-              <a:t>The magic byte, and never trusting storage</a:t>
+              <a:t>There is no EEPROM on an ESP32  (continued)</a:t>
             </a:r>
           </a:p>
         </p:txBody>
@@ -4422,7 +4276,7 @@
         <p:spPr>
           <a:xfrm>
             <a:off x="502920" y="1188720"/>
-            <a:ext cx="11185855" cy="530352"/>
+            <a:ext cx="11185855" cy="4023360"/>
           </a:xfrm>
           <a:prstGeom prst="rect">
             <a:avLst/>
@@ -4440,178 +4294,105 @@
                 <a:spcPct val="100000"/>
               </a:lnSpc>
               <a:spcAft>
-                <a:spcPts val="600"/>
-              </a:spcAft>
-              <a:defRPr sz="1900" b="1">
-                <a:solidFill>
-                  <a:srgbClr val="0E7C86"/>
-                </a:solidFill>
-                <a:latin typeface="Calibri"/>
-              </a:defRPr>
-            </a:pPr>
-            <a:r>
-              <a:rPr sz="1900" b="1">
-                <a:solidFill>
-                  <a:srgbClr val="0E7C86"/>
-                </a:solidFill>
-                <a:latin typeface="Calibri"/>
-              </a:rPr>
-              <a:t>Two separate checks, for two separate problems</a:t>
-            </a:r>
-          </a:p>
-        </p:txBody>
-      </p:sp>
-      <p:sp>
-        <p:nvSpPr>
-          <p:cNvPr id="7" name="TextBox 6"/>
-          <p:cNvSpPr txBox="1"/>
+                <a:spcPts val="900"/>
+              </a:spcAft>
+              <a:defRPr sz="1800" b="0">
+                <a:solidFill>
+                  <a:srgbClr val="222222"/>
+                </a:solidFill>
+                <a:latin typeface="Calibri"/>
+              </a:defRPr>
+            </a:pPr>
+          </a:p>
+          <a:p>
+            <a:pPr algn="l">
+              <a:lnSpc>
+                <a:spcPct val="100000"/>
+              </a:lnSpc>
+              <a:spcAft>
+                <a:spcPts val="900"/>
+              </a:spcAft>
+              <a:defRPr sz="1800" b="0">
+                <a:solidFill>
+                  <a:srgbClr val="222222"/>
+                </a:solidFill>
+                <a:latin typeface="Calibri"/>
+              </a:defRPr>
+            </a:pPr>
+            <a:r>
+              <a:rPr sz="1800" b="0">
+                <a:solidFill>
+                  <a:srgbClr val="222222"/>
+                </a:solidFill>
+                <a:latin typeface="Calibri"/>
+              </a:rPr>
+              <a:t>Never write on a schedule. Write when something actually changed, and only when a person asked for it.</a:t>
+            </a:r>
+          </a:p>
+        </p:txBody>
+      </p:sp>
+      <p:sp>
+        <p:nvSpPr>
+          <p:cNvPr id="7" name="Rounded Rectangle 6"/>
+          <p:cNvSpPr/>
           <p:nvPr/>
         </p:nvSpPr>
         <p:spPr>
           <a:xfrm>
-            <a:off x="502920" y="1755648"/>
-            <a:ext cx="11185855" cy="4507992"/>
-          </a:xfrm>
-          <a:prstGeom prst="rect">
-            <a:avLst/>
+            <a:off x="502920" y="5303520"/>
+            <a:ext cx="11185855" cy="960120"/>
+          </a:xfrm>
+          <a:prstGeom prst="roundRect">
+            <a:avLst>
+              <a:gd name="adj" fmla="val 4000"/>
+            </a:avLst>
           </a:prstGeom>
-          <a:noFill/>
-        </p:spPr>
-        <p:txBody>
-          <a:bodyPr wrap="square" lIns="0" tIns="0" rIns="0" bIns="0">
-            <a:spAutoFit/>
-          </a:bodyPr>
-          <a:lstStyle/>
-          <a:p>
-            <a:pPr algn="l">
-              <a:lnSpc>
-                <a:spcPct val="100000"/>
-              </a:lnSpc>
-              <a:spcAft>
-                <a:spcPts val="900"/>
-              </a:spcAft>
-              <a:defRPr sz="1800" b="0">
-                <a:solidFill>
-                  <a:srgbClr val="222222"/>
-                </a:solidFill>
-                <a:latin typeface="Calibri"/>
-              </a:defRPr>
-            </a:pPr>
-            <a:r>
-              <a:rPr sz="1800" b="0">
-                <a:solidFill>
-                  <a:srgbClr val="222222"/>
-                </a:solidFill>
-                <a:latin typeface="Calibri"/>
-              </a:rPr>
-              <a:t>A brand new ESP32 has flash full of 0xFF. Read an int out of that and you get -1. Read a float and you get something meaningless.</a:t>
-            </a:r>
-          </a:p>
-          <a:p>
-            <a:pPr algn="l">
-              <a:lnSpc>
-                <a:spcPct val="100000"/>
-              </a:lnSpc>
-              <a:spcAft>
-                <a:spcPts val="900"/>
-              </a:spcAft>
-              <a:defRPr sz="1800" b="0">
-                <a:solidFill>
-                  <a:srgbClr val="222222"/>
-                </a:solidFill>
-                <a:latin typeface="Calibri"/>
-              </a:defRPr>
-            </a:pPr>
-          </a:p>
-          <a:p>
-            <a:pPr algn="l">
-              <a:lnSpc>
-                <a:spcPct val="100000"/>
-              </a:lnSpc>
-              <a:spcAft>
-                <a:spcPts val="900"/>
-              </a:spcAft>
-              <a:defRPr sz="1800" b="0">
-                <a:solidFill>
-                  <a:srgbClr val="222222"/>
-                </a:solidFill>
-                <a:latin typeface="Calibri"/>
-              </a:defRPr>
-            </a:pPr>
-            <a:r>
-              <a:rPr sz="1800" b="0">
-                <a:solidFill>
-                  <a:srgbClr val="222222"/>
-                </a:solidFill>
-                <a:latin typeface="Calibri"/>
-              </a:rPr>
-              <a:t>So the first byte of the block is a MARKER, written only after a successful save. If it is not 0xA5, the data is not ours and we use the compiled-in defaults.</a:t>
-            </a:r>
-          </a:p>
-          <a:p>
-            <a:pPr algn="l">
-              <a:lnSpc>
-                <a:spcPct val="100000"/>
-              </a:lnSpc>
-              <a:spcAft>
-                <a:spcPts val="900"/>
-              </a:spcAft>
-              <a:defRPr sz="1800" b="0">
-                <a:solidFill>
-                  <a:srgbClr val="222222"/>
-                </a:solidFill>
-                <a:latin typeface="Calibri"/>
-              </a:defRPr>
-            </a:pPr>
-          </a:p>
-          <a:p>
-            <a:pPr algn="l">
-              <a:lnSpc>
-                <a:spcPct val="100000"/>
-              </a:lnSpc>
-              <a:spcAft>
-                <a:spcPts val="900"/>
-              </a:spcAft>
-              <a:defRPr sz="1800" b="0">
-                <a:solidFill>
-                  <a:srgbClr val="222222"/>
-                </a:solidFill>
-                <a:latin typeface="Calibri"/>
-              </a:defRPr>
-            </a:pPr>
-            <a:r>
-              <a:rPr sz="1800" b="0">
-                <a:solidFill>
-                  <a:srgbClr val="222222"/>
-                </a:solidFill>
-                <a:latin typeface="Calibri"/>
-              </a:rPr>
-              <a:t>But that is not enough on its own. Even WITH the marker, every value is range checked as it loads:</a:t>
-            </a:r>
-          </a:p>
-          <a:p>
-            <a:pPr lvl="1" algn="l">
-              <a:lnSpc>
-                <a:spcPct val="100000"/>
-              </a:lnSpc>
-              <a:spcAft>
-                <a:spcPts val="900"/>
-              </a:spcAft>
-              <a:defRPr sz="1800" b="0">
-                <a:solidFill>
-                  <a:srgbClr val="222222"/>
-                </a:solidFill>
-                <a:latin typeface="Calibri"/>
-              </a:defRPr>
-            </a:pPr>
-            <a:r>
-              <a:rPr sz="1800" b="0">
-                <a:solidFill>
-                  <a:srgbClr val="222222"/>
-                </a:solidFill>
-                <a:latin typeface="Calibri"/>
-              </a:rPr>
-              <a:t>if (saved_dz &gt;= 0 &amp;&amp; saved_dz &lt;= DEADZONE_MAX)  INPUT_DEADZONE = saved_dz;</a:t>
+          <a:solidFill>
+            <a:srgbClr val="FDF3E3"/>
+          </a:solidFill>
+          <a:ln w="12700">
+            <a:solidFill>
+              <a:srgbClr val="B46A0F"/>
+            </a:solidFill>
+          </a:ln>
+          <a:effectLst/>
+        </p:spPr>
+        <p:style>
+          <a:lnRef idx="1">
+            <a:schemeClr val="accent1"/>
+          </a:lnRef>
+          <a:fillRef idx="3">
+            <a:schemeClr val="accent1"/>
+          </a:fillRef>
+          <a:effectRef idx="2">
+            <a:schemeClr val="accent1"/>
+          </a:effectRef>
+          <a:fontRef idx="minor">
+            <a:schemeClr val="lt1"/>
+          </a:fontRef>
+        </p:style>
+        <p:txBody>
+          <a:bodyPr rtlCol="0" anchor="ctr" wrap="square" lIns="164592" rIns="164592" tIns="73152" bIns="73152"/>
+          <a:lstStyle/>
+          <a:p>
+            <a:pPr algn="l"/>
+            <a:r>
+              <a:rPr sz="1300" b="1">
+                <a:solidFill>
+                  <a:srgbClr val="B46A0F"/>
+                </a:solidFill>
+                <a:latin typeface="Calibri"/>
+              </a:rPr>
+              <a:t>WATCH OUT   </a:t>
+            </a:r>
+            <a:r>
+              <a:rPr sz="1500">
+                <a:solidFill>
+                  <a:srgbClr val="222222"/>
+                </a:solidFill>
+                <a:latin typeface="Calibri"/>
+              </a:rPr>
+              <a:t>A commit() in loop() at 30 Hz burns through a hundred thousand cycles in under an hour.</a:t>
             </a:r>
           </a:p>
         </p:txBody>
@@ -4675,7 +4456,7 @@
                 </a:solidFill>
                 <a:latin typeface="Calibri"/>
               </a:rPr>
-              <a:t>The magic byte, and never trusting storage  (continued)</a:t>
+              <a:t>The storage map, and why the addresses are spaced out</a:t>
             </a:r>
           </a:p>
         </p:txBody>
@@ -4829,7 +4610,7 @@
         <p:spPr>
           <a:xfrm>
             <a:off x="502920" y="1188720"/>
-            <a:ext cx="11185855" cy="5074920"/>
+            <a:ext cx="7047088" cy="274320"/>
           </a:xfrm>
           <a:prstGeom prst="rect">
             <a:avLst/>
@@ -4847,7 +4628,386 @@
                 <a:spcPct val="100000"/>
               </a:lnSpc>
               <a:spcAft>
-                <a:spcPts val="900"/>
+                <a:spcPts val="200"/>
+              </a:spcAft>
+              <a:defRPr sz="1200" b="1">
+                <a:solidFill>
+                  <a:srgbClr val="0E7C86"/>
+                </a:solidFill>
+                <a:latin typeface="Consolas"/>
+              </a:defRPr>
+            </a:pPr>
+            <a:r>
+              <a:rPr sz="1200" b="1">
+                <a:solidFill>
+                  <a:srgbClr val="0E7C86"/>
+                </a:solidFill>
+                <a:latin typeface="Consolas"/>
+              </a:rPr>
+              <a:t>Config.h</a:t>
+            </a:r>
+          </a:p>
+        </p:txBody>
+      </p:sp>
+      <p:sp>
+        <p:nvSpPr>
+          <p:cNvPr id="7" name="CODE_PANEL"/>
+          <p:cNvSpPr/>
+          <p:nvPr/>
+        </p:nvSpPr>
+        <p:spPr>
+          <a:xfrm>
+            <a:off x="502920" y="1517904"/>
+            <a:ext cx="7047088" cy="4745736"/>
+          </a:xfrm>
+          <a:prstGeom prst="roundRect">
+            <a:avLst>
+              <a:gd name="adj" fmla="val 4000"/>
+            </a:avLst>
+          </a:prstGeom>
+          <a:solidFill>
+            <a:srgbClr val="F4F6F8"/>
+          </a:solidFill>
+          <a:ln w="12700">
+            <a:solidFill>
+              <a:srgbClr val="C8D2DE"/>
+            </a:solidFill>
+          </a:ln>
+          <a:effectLst/>
+        </p:spPr>
+        <p:style>
+          <a:lnRef idx="1">
+            <a:schemeClr val="accent1"/>
+          </a:lnRef>
+          <a:fillRef idx="3">
+            <a:schemeClr val="accent1"/>
+          </a:fillRef>
+          <a:effectRef idx="2">
+            <a:schemeClr val="accent1"/>
+          </a:effectRef>
+          <a:fontRef idx="minor">
+            <a:schemeClr val="lt1"/>
+          </a:fontRef>
+        </p:style>
+        <p:txBody>
+          <a:bodyPr rtlCol="0" anchor="t" wrap="square" lIns="146304" tIns="91440" bIns="73152"/>
+          <a:lstStyle/>
+          <a:p>
+            <a:pPr algn="l">
+              <a:lnSpc>
+                <a:spcPct val="100000"/>
+              </a:lnSpc>
+              <a:spcAft>
+                <a:spcPts val="0"/>
+              </a:spcAft>
+              <a:defRPr sz="1300">
+                <a:latin typeface="Consolas"/>
+              </a:defRPr>
+            </a:pPr>
+            <a:r>
+              <a:rPr sz="1300">
+                <a:solidFill>
+                  <a:srgbClr val="222222"/>
+                </a:solidFill>
+                <a:latin typeface="Consolas"/>
+              </a:rPr>
+              <a:t>const int ADDR_DEADZONE       =  0;   // int,   4 bytes</a:t>
+            </a:r>
+          </a:p>
+          <a:p>
+            <a:pPr algn="l">
+              <a:lnSpc>
+                <a:spcPct val="100000"/>
+              </a:lnSpc>
+              <a:spcAft>
+                <a:spcPts val="0"/>
+              </a:spcAft>
+              <a:defRPr sz="1300">
+                <a:latin typeface="Consolas"/>
+              </a:defRPr>
+            </a:pPr>
+            <a:r>
+              <a:rPr sz="1300">
+                <a:solidFill>
+                  <a:srgbClr val="222222"/>
+                </a:solidFill>
+                <a:latin typeface="Consolas"/>
+              </a:rPr>
+              <a:t>const int ADDR_DEADZONE_LS_X  =  4;</a:t>
+            </a:r>
+          </a:p>
+          <a:p>
+            <a:pPr algn="l">
+              <a:lnSpc>
+                <a:spcPct val="100000"/>
+              </a:lnSpc>
+              <a:spcAft>
+                <a:spcPts val="0"/>
+              </a:spcAft>
+              <a:defRPr sz="1300">
+                <a:latin typeface="Consolas"/>
+              </a:defRPr>
+            </a:pPr>
+            <a:r>
+              <a:rPr sz="1300">
+                <a:solidFill>
+                  <a:srgbClr val="222222"/>
+                </a:solidFill>
+                <a:latin typeface="Consolas"/>
+              </a:rPr>
+              <a:t>const int ADDR_DEADZONE_LS_Y  =  8;</a:t>
+            </a:r>
+          </a:p>
+          <a:p>
+            <a:pPr algn="l">
+              <a:lnSpc>
+                <a:spcPct val="100000"/>
+              </a:lnSpc>
+              <a:spcAft>
+                <a:spcPts val="0"/>
+              </a:spcAft>
+              <a:defRPr sz="1300">
+                <a:latin typeface="Consolas"/>
+              </a:defRPr>
+            </a:pPr>
+            <a:r>
+              <a:rPr sz="1300">
+                <a:solidFill>
+                  <a:srgbClr val="222222"/>
+                </a:solidFill>
+                <a:latin typeface="Consolas"/>
+              </a:rPr>
+              <a:t>const int ADDR_DEADZONE_RS_X  = 12;</a:t>
+            </a:r>
+          </a:p>
+          <a:p>
+            <a:pPr algn="l">
+              <a:lnSpc>
+                <a:spcPct val="100000"/>
+              </a:lnSpc>
+              <a:spcAft>
+                <a:spcPts val="0"/>
+              </a:spcAft>
+              <a:defRPr sz="1300">
+                <a:latin typeface="Consolas"/>
+              </a:defRPr>
+            </a:pPr>
+            <a:r>
+              <a:rPr sz="1300">
+                <a:solidFill>
+                  <a:srgbClr val="222222"/>
+                </a:solidFill>
+                <a:latin typeface="Consolas"/>
+              </a:rPr>
+              <a:t>const int ADDR_DEADZONE_RS_Y  = 16;</a:t>
+            </a:r>
+          </a:p>
+          <a:p>
+            <a:pPr algn="l">
+              <a:lnSpc>
+                <a:spcPct val="100000"/>
+              </a:lnSpc>
+              <a:spcAft>
+                <a:spcPts val="0"/>
+              </a:spcAft>
+              <a:defRPr sz="1300">
+                <a:latin typeface="Consolas"/>
+              </a:defRPr>
+            </a:pPr>
+            <a:r>
+              <a:rPr sz="1300">
+                <a:solidFill>
+                  <a:srgbClr val="222222"/>
+                </a:solidFill>
+                <a:latin typeface="Consolas"/>
+              </a:rPr>
+              <a:t>const int ADDR_LS_Y_SC        = 20;   // float, 4 bytes</a:t>
+            </a:r>
+          </a:p>
+          <a:p>
+            <a:pPr algn="l">
+              <a:lnSpc>
+                <a:spcPct val="100000"/>
+              </a:lnSpc>
+              <a:spcAft>
+                <a:spcPts val="0"/>
+              </a:spcAft>
+              <a:defRPr sz="1300">
+                <a:latin typeface="Consolas"/>
+              </a:defRPr>
+            </a:pPr>
+            <a:r>
+              <a:rPr sz="1300">
+                <a:solidFill>
+                  <a:srgbClr val="222222"/>
+                </a:solidFill>
+                <a:latin typeface="Consolas"/>
+              </a:rPr>
+              <a:t>const int ADDR_LS_X_SC        = 24;</a:t>
+            </a:r>
+          </a:p>
+          <a:p>
+            <a:pPr algn="l">
+              <a:lnSpc>
+                <a:spcPct val="100000"/>
+              </a:lnSpc>
+              <a:spcAft>
+                <a:spcPts val="0"/>
+              </a:spcAft>
+              <a:defRPr sz="1300">
+                <a:latin typeface="Consolas"/>
+              </a:defRPr>
+            </a:pPr>
+            <a:r>
+              <a:rPr sz="1300">
+                <a:solidFill>
+                  <a:srgbClr val="222222"/>
+                </a:solidFill>
+                <a:latin typeface="Consolas"/>
+              </a:rPr>
+              <a:t>const int ADDR_RS_Y_SC        = 28;</a:t>
+            </a:r>
+          </a:p>
+          <a:p>
+            <a:pPr algn="l">
+              <a:lnSpc>
+                <a:spcPct val="100000"/>
+              </a:lnSpc>
+              <a:spcAft>
+                <a:spcPts val="0"/>
+              </a:spcAft>
+              <a:defRPr sz="1300">
+                <a:latin typeface="Consolas"/>
+              </a:defRPr>
+            </a:pPr>
+            <a:r>
+              <a:rPr sz="1300">
+                <a:solidFill>
+                  <a:srgbClr val="222222"/>
+                </a:solidFill>
+                <a:latin typeface="Consolas"/>
+              </a:rPr>
+              <a:t>const int ADDR_RS_X_SC        = 32;</a:t>
+            </a:r>
+          </a:p>
+          <a:p>
+            <a:pPr algn="l">
+              <a:lnSpc>
+                <a:spcPct val="100000"/>
+              </a:lnSpc>
+              <a:spcAft>
+                <a:spcPts val="0"/>
+              </a:spcAft>
+              <a:defRPr sz="1300">
+                <a:latin typeface="Consolas"/>
+              </a:defRPr>
+            </a:pPr>
+            <a:r>
+              <a:rPr sz="1300" b="1">
+                <a:solidFill>
+                  <a:srgbClr val="0E7C86"/>
+                </a:solidFill>
+                <a:latin typeface="Consolas"/>
+              </a:rPr>
+              <a:t>const int ADDR_PAIRED_VALID   = 36;   // 1 byte:  0xA5 when valid</a:t>
+            </a:r>
+          </a:p>
+          <a:p>
+            <a:pPr algn="l">
+              <a:lnSpc>
+                <a:spcPct val="100000"/>
+              </a:lnSpc>
+              <a:spcAft>
+                <a:spcPts val="0"/>
+              </a:spcAft>
+              <a:defRPr sz="1300">
+                <a:latin typeface="Consolas"/>
+              </a:defRPr>
+            </a:pPr>
+            <a:r>
+              <a:rPr sz="1300" b="1">
+                <a:solidFill>
+                  <a:srgbClr val="0E7C86"/>
+                </a:solidFill>
+                <a:latin typeface="Consolas"/>
+              </a:rPr>
+              <a:t>const int ADDR_PAIRED_ADDR    = 37;   // 6 bytes: the address</a:t>
+            </a:r>
+          </a:p>
+          <a:p>
+            <a:pPr algn="l">
+              <a:lnSpc>
+                <a:spcPct val="100000"/>
+              </a:lnSpc>
+              <a:spcAft>
+                <a:spcPts val="0"/>
+              </a:spcAft>
+              <a:defRPr sz="1300">
+                <a:latin typeface="Consolas"/>
+              </a:defRPr>
+            </a:pPr>
+            <a:r>
+              <a:rPr sz="1300">
+                <a:solidFill>
+                  <a:srgbClr val="222222"/>
+                </a:solidFill>
+                <a:latin typeface="Consolas"/>
+              </a:rPr>
+              <a:t> </a:t>
+            </a:r>
+          </a:p>
+          <a:p>
+            <a:pPr algn="l">
+              <a:lnSpc>
+                <a:spcPct val="100000"/>
+              </a:lnSpc>
+              <a:spcAft>
+                <a:spcPts val="0"/>
+              </a:spcAft>
+              <a:defRPr sz="1300">
+                <a:latin typeface="Consolas"/>
+              </a:defRPr>
+            </a:pPr>
+            <a:r>
+              <a:rPr sz="1300" b="1">
+                <a:solidFill>
+                  <a:srgbClr val="0E7C86"/>
+                </a:solidFill>
+                <a:latin typeface="Consolas"/>
+              </a:rPr>
+              <a:t>const uint8_t PAIRED_VALID_MAGIC = 0xA5;</a:t>
+            </a:r>
+          </a:p>
+        </p:txBody>
+      </p:sp>
+      <p:sp>
+        <p:nvSpPr>
+          <p:cNvPr id="8" name="TextBox 7"/>
+          <p:cNvSpPr txBox="1"/>
+          <p:nvPr/>
+        </p:nvSpPr>
+        <p:spPr>
+          <a:xfrm>
+            <a:off x="7870048" y="1517904"/>
+            <a:ext cx="3818727" cy="4745736"/>
+          </a:xfrm>
+          <a:prstGeom prst="rect">
+            <a:avLst/>
+          </a:prstGeom>
+          <a:noFill/>
+        </p:spPr>
+        <p:txBody>
+          <a:bodyPr wrap="square" lIns="0" tIns="0" rIns="0" bIns="0">
+            <a:spAutoFit/>
+          </a:bodyPr>
+          <a:lstStyle/>
+          <a:p>
+            <a:pPr algn="l">
+              <a:lnSpc>
+                <a:spcPct val="100000"/>
+              </a:lnSpc>
+              <a:spcAft>
+                <a:spcPts val="600"/>
               </a:spcAft>
               <a:defRPr sz="1800" b="0">
                 <a:solidFill>
@@ -4863,16 +5023,16 @@
                 </a:solidFill>
                 <a:latin typeface="Calibri"/>
               </a:rPr>
-              <a:t>Why? Because a value saved by an OLDER version of the program is perfectly valid data and still wrong for this one. The marker tells you the bytes are yours. It does not tell you they still make sense.</a:t>
-            </a:r>
-          </a:p>
-          <a:p>
-            <a:pPr algn="l">
-              <a:lnSpc>
-                <a:spcPct val="100000"/>
-              </a:lnSpc>
-              <a:spcAft>
-                <a:spcPts val="900"/>
+              <a:t>EEPROM is a flat array of bytes. YOU choose where each value lives, and nothing stops two values overlapping.</a:t>
+            </a:r>
+          </a:p>
+          <a:p>
+            <a:pPr algn="l">
+              <a:lnSpc>
+                <a:spcPct val="100000"/>
+              </a:lnSpc>
+              <a:spcAft>
+                <a:spcPts val="600"/>
               </a:spcAft>
               <a:defRPr sz="1800" b="0">
                 <a:solidFill>
@@ -4881,14 +5041,23 @@
                 <a:latin typeface="Calibri"/>
               </a:defRPr>
             </a:pPr>
-          </a:p>
-          <a:p>
-            <a:pPr algn="l">
-              <a:lnSpc>
-                <a:spcPct val="100000"/>
-              </a:lnSpc>
-              <a:spcAft>
-                <a:spcPts val="900"/>
+            <a:r>
+              <a:rPr sz="1800" b="0">
+                <a:solidFill>
+                  <a:srgbClr val="222222"/>
+                </a:solidFill>
+                <a:latin typeface="Calibri"/>
+              </a:rPr>
+              <a:t>An int is 4 bytes and a float is 4 bytes on this chip, so each slot gets 4.</a:t>
+            </a:r>
+          </a:p>
+          <a:p>
+            <a:pPr algn="l">
+              <a:lnSpc>
+                <a:spcPct val="100000"/>
+              </a:lnSpc>
+              <a:spcAft>
+                <a:spcPts val="600"/>
               </a:spcAft>
               <a:defRPr sz="1800" b="0">
                 <a:solidFill>
@@ -4904,7 +5073,32 @@
                 </a:solidFill>
                 <a:latin typeface="Calibri"/>
               </a:rPr>
-              <a:t>Defensive loading is not paranoia. It is the difference between a vehicle that boots with odd settings and one that will not boot.</a:t>
+              <a:t>Laying them out as one ADDR_ constant per value, in one place, is what makes an overlap visible when you read the file.</a:t>
+            </a:r>
+          </a:p>
+          <a:p>
+            <a:pPr algn="l">
+              <a:lnSpc>
+                <a:spcPct val="100000"/>
+              </a:lnSpc>
+              <a:spcAft>
+                <a:spcPts val="600"/>
+              </a:spcAft>
+              <a:defRPr sz="1800" b="0">
+                <a:solidFill>
+                  <a:srgbClr val="222222"/>
+                </a:solidFill>
+                <a:latin typeface="Calibri"/>
+              </a:defRPr>
+            </a:pPr>
+            <a:r>
+              <a:rPr sz="1800" b="0">
+                <a:solidFill>
+                  <a:srgbClr val="222222"/>
+                </a:solidFill>
+                <a:latin typeface="Calibri"/>
+              </a:rPr>
+              <a:t>Get this wrong and one setting silently corrupts another. It will look like a hardware fault.</a:t>
             </a:r>
           </a:p>
         </p:txBody>
@@ -4968,7 +5162,7 @@
                 </a:solidFill>
                 <a:latin typeface="Calibri"/>
               </a:rPr>
-              <a:t>Do it now  -  settings that survive</a:t>
+              <a:t>The magic byte, and never trusting storage</a:t>
             </a:r>
           </a:p>
         </p:txBody>
@@ -5115,87 +5309,14 @@
       </p:sp>
       <p:sp>
         <p:nvSpPr>
-          <p:cNvPr id="6" name="Rounded Rectangle 5"/>
-          <p:cNvSpPr/>
+          <p:cNvPr id="6" name="TextBox 5"/>
+          <p:cNvSpPr txBox="1"/>
           <p:nvPr/>
         </p:nvSpPr>
         <p:spPr>
           <a:xfrm>
             <a:off x="502920" y="1188720"/>
             <a:ext cx="11185855" cy="530352"/>
-          </a:xfrm>
-          <a:prstGeom prst="roundRect">
-            <a:avLst>
-              <a:gd name="adj" fmla="val 4000"/>
-            </a:avLst>
-          </a:prstGeom>
-          <a:solidFill>
-            <a:srgbClr val="0E7C86"/>
-          </a:solidFill>
-          <a:ln>
-            <a:noFill/>
-          </a:ln>
-          <a:effectLst/>
-        </p:spPr>
-        <p:style>
-          <a:lnRef idx="1">
-            <a:schemeClr val="accent1"/>
-          </a:lnRef>
-          <a:fillRef idx="3">
-            <a:schemeClr val="accent1"/>
-          </a:fillRef>
-          <a:effectRef idx="2">
-            <a:schemeClr val="accent1"/>
-          </a:effectRef>
-          <a:fontRef idx="minor">
-            <a:schemeClr val="lt1"/>
-          </a:fontRef>
-        </p:style>
-        <p:txBody>
-          <a:bodyPr rtlCol="0" anchor="ctr" wrap="square" lIns="182880"/>
-          <a:lstStyle/>
-          <a:p>
-            <a:pPr algn="l"/>
-            <a:r>
-              <a:rPr sz="1300" b="1">
-                <a:solidFill>
-                  <a:srgbClr val="FFFFFF"/>
-                </a:solidFill>
-                <a:latin typeface="Calibri"/>
-              </a:rPr>
-              <a:t>UPLOAD AND RUN:   </a:t>
-            </a:r>
-            <a:r>
-              <a:rPr sz="1500" b="1">
-                <a:solidFill>
-                  <a:srgbClr val="FFFFFF"/>
-                </a:solidFill>
-                <a:latin typeface="Consolas"/>
-              </a:rPr>
-              <a:t>a3b_eeprom_settings</a:t>
-            </a:r>
-            <a:r>
-              <a:rPr sz="1200">
-                <a:solidFill>
-                  <a:srgbClr val="FFFFFF"/>
-                </a:solidFill>
-                <a:latin typeface="Calibri"/>
-              </a:rPr>
-              <a:t>     (30 minutes)</a:t>
-            </a:r>
-          </a:p>
-        </p:txBody>
-      </p:sp>
-      <p:sp>
-        <p:nvSpPr>
-          <p:cNvPr id="7" name="TextBox 6"/>
-          <p:cNvSpPr txBox="1"/>
-          <p:nvPr/>
-        </p:nvSpPr>
-        <p:spPr>
-          <a:xfrm>
-            <a:off x="502920" y="1901952"/>
-            <a:ext cx="5387187" cy="4361688"/>
           </a:xfrm>
           <a:prstGeom prst="rect">
             <a:avLst/>
@@ -5213,162 +5334,37 @@
                 <a:spcPct val="100000"/>
               </a:lnSpc>
               <a:spcAft>
-                <a:spcPts val="400"/>
-              </a:spcAft>
-              <a:defRPr sz="1800" b="0">
-                <a:solidFill>
-                  <a:srgbClr val="222222"/>
-                </a:solidFill>
-                <a:latin typeface="Calibri"/>
-              </a:defRPr>
-            </a:pPr>
-            <a:r>
-              <a:rPr sz="1800" b="0">
-                <a:solidFill>
-                  <a:srgbClr val="222222"/>
-                </a:solidFill>
-                <a:latin typeface="Calibri"/>
-              </a:rPr>
-              <a:t>1.  set deadzone 100,  save. Now UNPLUG the board and plug it back in. Type  show.</a:t>
-            </a:r>
-          </a:p>
-          <a:p>
-            <a:pPr algn="l">
-              <a:lnSpc>
-                <a:spcPct val="100000"/>
-              </a:lnSpc>
-              <a:spcAft>
-                <a:spcPts val="400"/>
-              </a:spcAft>
-              <a:defRPr sz="1800" b="0">
-                <a:solidFill>
-                  <a:srgbClr val="222222"/>
-                </a:solidFill>
-                <a:latin typeface="Calibri"/>
-              </a:defRPr>
-            </a:pPr>
-            <a:r>
-              <a:rPr sz="1800" b="0">
-                <a:solidFill>
-                  <a:srgbClr val="222222"/>
-                </a:solidFill>
-                <a:latin typeface="Calibri"/>
-              </a:rPr>
-              <a:t>2.  set deadzone 200  and do NOT save. Reset the board. What happened, and why?</a:t>
-            </a:r>
-          </a:p>
-          <a:p>
-            <a:pPr algn="l">
-              <a:lnSpc>
-                <a:spcPct val="100000"/>
-              </a:lnSpc>
-              <a:spcAft>
-                <a:spcPts val="400"/>
-              </a:spcAft>
-              <a:defRPr sz="1800" b="0">
-                <a:solidFill>
-                  <a:srgbClr val="222222"/>
-                </a:solidFill>
-                <a:latin typeface="Calibri"/>
-              </a:defRPr>
-            </a:pPr>
-            <a:r>
-              <a:rPr sz="1800" b="0">
-                <a:solidFill>
-                  <a:srgbClr val="222222"/>
-                </a:solidFill>
-                <a:latin typeface="Calibri"/>
-              </a:rPr>
-              <a:t>3.  erase, then reset. Where did the values come from this time?</a:t>
-            </a:r>
-          </a:p>
-          <a:p>
-            <a:pPr algn="l">
-              <a:lnSpc>
-                <a:spcPct val="100000"/>
-              </a:lnSpc>
-              <a:spcAft>
-                <a:spcPts val="400"/>
-              </a:spcAft>
-              <a:defRPr sz="1800" b="0">
-                <a:solidFill>
-                  <a:srgbClr val="222222"/>
-                </a:solidFill>
-                <a:latin typeface="Calibri"/>
-              </a:defRPr>
-            </a:pPr>
-            <a:r>
-              <a:rPr sz="1800" b="0">
-                <a:solidFill>
-                  <a:srgbClr val="222222"/>
-                </a:solidFill>
-                <a:latin typeface="Calibri"/>
-              </a:rPr>
-              <a:t>4.  dump  before and after a save. Find the magic byte.</a:t>
-            </a:r>
-          </a:p>
-          <a:p>
-            <a:pPr algn="l">
-              <a:lnSpc>
-                <a:spcPct val="100000"/>
-              </a:lnSpc>
-              <a:spcAft>
-                <a:spcPts val="400"/>
-              </a:spcAft>
-              <a:defRPr sz="1800" b="0">
-                <a:solidFill>
-                  <a:srgbClr val="222222"/>
-                </a:solidFill>
-                <a:latin typeface="Calibri"/>
-              </a:defRPr>
-            </a:pPr>
-            <a:r>
-              <a:rPr sz="1800" b="0">
-                <a:solidFill>
-                  <a:srgbClr val="222222"/>
-                </a:solidFill>
-                <a:latin typeface="Calibri"/>
-              </a:rPr>
-              <a:t>5.  Comment out the EEPROM.commit() in saveSettings. Save, reset, and see the bug you will one day write for real.</a:t>
-            </a:r>
-          </a:p>
-          <a:p>
-            <a:pPr algn="l">
-              <a:lnSpc>
-                <a:spcPct val="100000"/>
-              </a:lnSpc>
-              <a:spcAft>
-                <a:spcPts val="400"/>
-              </a:spcAft>
-              <a:defRPr sz="1800" b="0">
-                <a:solidFill>
-                  <a:srgbClr val="222222"/>
-                </a:solidFill>
-                <a:latin typeface="Calibri"/>
-              </a:defRPr>
-            </a:pPr>
-            <a:r>
-              <a:rPr sz="1800" b="0">
-                <a:solidFill>
-                  <a:srgbClr val="222222"/>
-                </a:solidFill>
-                <a:latin typeface="Calibri"/>
-              </a:rPr>
-              <a:t>6.  Deliberately overlap two ADDR_ constants and watch one setting eat the other.</a:t>
-            </a:r>
-          </a:p>
-        </p:txBody>
-      </p:sp>
-      <p:sp>
-        <p:nvSpPr>
-          <p:cNvPr id="8" name="TextBox 7"/>
+                <a:spcPts val="600"/>
+              </a:spcAft>
+              <a:defRPr sz="1900" b="1">
+                <a:solidFill>
+                  <a:srgbClr val="0E7C86"/>
+                </a:solidFill>
+                <a:latin typeface="Calibri"/>
+              </a:defRPr>
+            </a:pPr>
+            <a:r>
+              <a:rPr sz="1900" b="1">
+                <a:solidFill>
+                  <a:srgbClr val="0E7C86"/>
+                </a:solidFill>
+                <a:latin typeface="Calibri"/>
+              </a:rPr>
+              <a:t>Two separate checks, for two separate problems</a:t>
+            </a:r>
+          </a:p>
+        </p:txBody>
+      </p:sp>
+      <p:sp>
+        <p:nvSpPr>
+          <p:cNvPr id="7" name="TextBox 6"/>
           <p:cNvSpPr txBox="1"/>
           <p:nvPr/>
         </p:nvSpPr>
         <p:spPr>
           <a:xfrm>
-            <a:off x="6301587" y="1901952"/>
-            <a:ext cx="5387187" cy="365760"/>
+            <a:off x="502920" y="1755648"/>
+            <a:ext cx="11185855" cy="4507992"/>
           </a:xfrm>
           <a:prstGeom prst="rect">
             <a:avLst/>
@@ -5386,55 +5382,7 @@
                 <a:spcPct val="100000"/>
               </a:lnSpc>
               <a:spcAft>
-                <a:spcPts val="200"/>
-              </a:spcAft>
-              <a:defRPr sz="1800" b="1">
-                <a:solidFill>
-                  <a:srgbClr val="0E7C86"/>
-                </a:solidFill>
-                <a:latin typeface="Calibri"/>
-              </a:defRPr>
-            </a:pPr>
-            <a:r>
-              <a:rPr sz="1800" b="1">
-                <a:solidFill>
-                  <a:srgbClr val="0E7C86"/>
-                </a:solidFill>
-                <a:latin typeface="Calibri"/>
-              </a:rPr>
-              <a:t>What you should see</a:t>
-            </a:r>
-          </a:p>
-        </p:txBody>
-      </p:sp>
-      <p:sp>
-        <p:nvSpPr>
-          <p:cNvPr id="9" name="TextBox 8"/>
-          <p:cNvSpPr txBox="1"/>
-          <p:nvPr/>
-        </p:nvSpPr>
-        <p:spPr>
-          <a:xfrm>
-            <a:off x="6301587" y="2304288"/>
-            <a:ext cx="5387187" cy="1778508"/>
-          </a:xfrm>
-          <a:prstGeom prst="rect">
-            <a:avLst/>
-          </a:prstGeom>
-          <a:noFill/>
-        </p:spPr>
-        <p:txBody>
-          <a:bodyPr wrap="square" lIns="0" tIns="0" rIns="0" bIns="0">
-            <a:spAutoFit/>
-          </a:bodyPr>
-          <a:lstStyle/>
-          <a:p>
-            <a:pPr algn="l">
-              <a:lnSpc>
-                <a:spcPct val="100000"/>
-              </a:lnSpc>
-              <a:spcAft>
-                <a:spcPts val="200"/>
+                <a:spcPts val="900"/>
               </a:spcAft>
               <a:defRPr sz="1800" b="0">
                 <a:solidFill>
@@ -5450,87 +5398,16 @@
                 </a:solidFill>
                 <a:latin typeface="Calibri"/>
               </a:rPr>
-              <a:t>Step 1: the value is still 100 after a power cycle. Step 2: it is back to 100, not 200.</a:t>
-            </a:r>
-          </a:p>
-        </p:txBody>
-      </p:sp>
-      <p:sp>
-        <p:nvSpPr>
-          <p:cNvPr id="10" name="TextBox 9"/>
-          <p:cNvSpPr txBox="1"/>
-          <p:nvPr/>
-        </p:nvSpPr>
-        <p:spPr>
-          <a:xfrm>
-            <a:off x="6301587" y="4119372"/>
-            <a:ext cx="5387187" cy="365760"/>
-          </a:xfrm>
-          <a:prstGeom prst="rect">
-            <a:avLst/>
-          </a:prstGeom>
-          <a:noFill/>
-        </p:spPr>
-        <p:txBody>
-          <a:bodyPr wrap="square" lIns="0" tIns="0" rIns="0" bIns="0">
-            <a:spAutoFit/>
-          </a:bodyPr>
-          <a:lstStyle/>
-          <a:p>
-            <a:pPr algn="l">
-              <a:lnSpc>
-                <a:spcPct val="100000"/>
-              </a:lnSpc>
-              <a:spcAft>
-                <a:spcPts val="200"/>
-              </a:spcAft>
-              <a:defRPr sz="1800" b="1">
-                <a:solidFill>
-                  <a:srgbClr val="0E7C86"/>
-                </a:solidFill>
-                <a:latin typeface="Calibri"/>
-              </a:defRPr>
-            </a:pPr>
-            <a:r>
-              <a:rPr sz="1800" b="1">
-                <a:solidFill>
-                  <a:srgbClr val="0E7C86"/>
-                </a:solidFill>
-                <a:latin typeface="Calibri"/>
-              </a:rPr>
-              <a:t>Answer these</a:t>
-            </a:r>
-          </a:p>
-        </p:txBody>
-      </p:sp>
-      <p:sp>
-        <p:nvSpPr>
-          <p:cNvPr id="11" name="TextBox 10"/>
-          <p:cNvSpPr txBox="1"/>
-          <p:nvPr/>
-        </p:nvSpPr>
-        <p:spPr>
-          <a:xfrm>
-            <a:off x="6301587" y="4521708"/>
-            <a:ext cx="5387187" cy="1778508"/>
-          </a:xfrm>
-          <a:prstGeom prst="rect">
-            <a:avLst/>
-          </a:prstGeom>
-          <a:noFill/>
-        </p:spPr>
-        <p:txBody>
-          <a:bodyPr wrap="square" lIns="0" tIns="0" rIns="0" bIns="0">
-            <a:spAutoFit/>
-          </a:bodyPr>
-          <a:lstStyle/>
-          <a:p>
-            <a:pPr algn="l">
-              <a:lnSpc>
-                <a:spcPct val="100000"/>
-              </a:lnSpc>
-              <a:spcAft>
-                <a:spcPts val="200"/>
+              <a:t>A brand new ESP32 has flash full of 0xFF. Read an int out of that and you get -1. Read a float and you get something meaningless.</a:t>
+            </a:r>
+          </a:p>
+          <a:p>
+            <a:pPr algn="l">
+              <a:lnSpc>
+                <a:spcPct val="100000"/>
+              </a:lnSpc>
+              <a:spcAft>
+                <a:spcPts val="900"/>
               </a:spcAft>
               <a:defRPr sz="1800" b="0">
                 <a:solidFill>
@@ -5539,6 +5416,22 @@
                 <a:latin typeface="Calibri"/>
               </a:defRPr>
             </a:pPr>
+          </a:p>
+          <a:p>
+            <a:pPr algn="l">
+              <a:lnSpc>
+                <a:spcPct val="100000"/>
+              </a:lnSpc>
+              <a:spcAft>
+                <a:spcPts val="900"/>
+              </a:spcAft>
+              <a:defRPr sz="1800" b="0">
+                <a:solidFill>
+                  <a:srgbClr val="222222"/>
+                </a:solidFill>
+                <a:latin typeface="Calibri"/>
+              </a:defRPr>
+            </a:pPr>
             <a:r>
               <a:rPr sz="1800" b="0">
                 <a:solidFill>
@@ -5546,16 +5439,16 @@
                 </a:solidFill>
                 <a:latin typeface="Calibri"/>
               </a:rPr>
-              <a:t>What is at address 0 in the dump, and what does it mean?</a:t>
-            </a:r>
-          </a:p>
-          <a:p>
-            <a:pPr algn="l">
-              <a:lnSpc>
-                <a:spcPct val="100000"/>
-              </a:lnSpc>
-              <a:spcAft>
-                <a:spcPts val="200"/>
+              <a:t>So the first byte of the block is a MARKER, written only after a successful save. If it is not 0xA5, the data is not ours and we use the compiled-in defaults.</a:t>
+            </a:r>
+          </a:p>
+          <a:p>
+            <a:pPr algn="l">
+              <a:lnSpc>
+                <a:spcPct val="100000"/>
+              </a:lnSpc>
+              <a:spcAft>
+                <a:spcPts val="900"/>
               </a:spcAft>
               <a:defRPr sz="1800" b="0">
                 <a:solidFill>
@@ -5564,6 +5457,22 @@
                 <a:latin typeface="Calibri"/>
               </a:defRPr>
             </a:pPr>
+          </a:p>
+          <a:p>
+            <a:pPr algn="l">
+              <a:lnSpc>
+                <a:spcPct val="100000"/>
+              </a:lnSpc>
+              <a:spcAft>
+                <a:spcPts val="900"/>
+              </a:spcAft>
+              <a:defRPr sz="1800" b="0">
+                <a:solidFill>
+                  <a:srgbClr val="222222"/>
+                </a:solidFill>
+                <a:latin typeface="Calibri"/>
+              </a:defRPr>
+            </a:pPr>
             <a:r>
               <a:rPr sz="1800" b="0">
                 <a:solidFill>
@@ -5571,7 +5480,32 @@
                 </a:solidFill>
                 <a:latin typeface="Calibri"/>
               </a:rPr>
-              <a:t>Why is range checking needed even when the magic byte is correct?</a:t>
+              <a:t>But that is not enough on its own. Even WITH the marker, every value is range checked as it loads:</a:t>
+            </a:r>
+          </a:p>
+          <a:p>
+            <a:pPr lvl="1" algn="l">
+              <a:lnSpc>
+                <a:spcPct val="100000"/>
+              </a:lnSpc>
+              <a:spcAft>
+                <a:spcPts val="900"/>
+              </a:spcAft>
+              <a:defRPr sz="1800" b="0">
+                <a:solidFill>
+                  <a:srgbClr val="222222"/>
+                </a:solidFill>
+                <a:latin typeface="Calibri"/>
+              </a:defRPr>
+            </a:pPr>
+            <a:r>
+              <a:rPr sz="1800" b="0">
+                <a:solidFill>
+                  <a:srgbClr val="222222"/>
+                </a:solidFill>
+                <a:latin typeface="Calibri"/>
+              </a:rPr>
+              <a:t>if (saved_dz &gt;= 0 &amp;&amp; saved_dz &lt;= DEADZONE_MAX)  INPUT_DEADZONE = saved_dz;</a:t>
             </a:r>
           </a:p>
         </p:txBody>
@@ -5635,7 +5569,7 @@
                 </a:solidFill>
                 <a:latin typeface="Calibri"/>
               </a:rPr>
-              <a:t>Where each program keeps its controller address</a:t>
+              <a:t>The magic byte, and never trusting storage  (continued)</a:t>
             </a:r>
           </a:p>
         </p:txBody>
@@ -5776,6 +5710,1524 @@
                 <a:latin typeface="Calibri"/>
               </a:rPr>
               <a:t>13</a:t>
+            </a:r>
+          </a:p>
+        </p:txBody>
+      </p:sp>
+      <p:sp>
+        <p:nvSpPr>
+          <p:cNvPr id="6" name="TextBox 5"/>
+          <p:cNvSpPr txBox="1"/>
+          <p:nvPr/>
+        </p:nvSpPr>
+        <p:spPr>
+          <a:xfrm>
+            <a:off x="502920" y="1188720"/>
+            <a:ext cx="11185855" cy="5074920"/>
+          </a:xfrm>
+          <a:prstGeom prst="rect">
+            <a:avLst/>
+          </a:prstGeom>
+          <a:noFill/>
+        </p:spPr>
+        <p:txBody>
+          <a:bodyPr wrap="square" lIns="0" tIns="0" rIns="0" bIns="0">
+            <a:spAutoFit/>
+          </a:bodyPr>
+          <a:lstStyle/>
+          <a:p>
+            <a:pPr algn="l">
+              <a:lnSpc>
+                <a:spcPct val="100000"/>
+              </a:lnSpc>
+              <a:spcAft>
+                <a:spcPts val="900"/>
+              </a:spcAft>
+              <a:defRPr sz="1800" b="0">
+                <a:solidFill>
+                  <a:srgbClr val="222222"/>
+                </a:solidFill>
+                <a:latin typeface="Calibri"/>
+              </a:defRPr>
+            </a:pPr>
+            <a:r>
+              <a:rPr sz="1800" b="0">
+                <a:solidFill>
+                  <a:srgbClr val="222222"/>
+                </a:solidFill>
+                <a:latin typeface="Calibri"/>
+              </a:rPr>
+              <a:t>Why? Because a value saved by an OLDER version of the program is perfectly valid data and still wrong for this one. The marker tells you the bytes are yours. It does not tell you they still make sense.</a:t>
+            </a:r>
+          </a:p>
+          <a:p>
+            <a:pPr algn="l">
+              <a:lnSpc>
+                <a:spcPct val="100000"/>
+              </a:lnSpc>
+              <a:spcAft>
+                <a:spcPts val="900"/>
+              </a:spcAft>
+              <a:defRPr sz="1800" b="0">
+                <a:solidFill>
+                  <a:srgbClr val="222222"/>
+                </a:solidFill>
+                <a:latin typeface="Calibri"/>
+              </a:defRPr>
+            </a:pPr>
+          </a:p>
+          <a:p>
+            <a:pPr algn="l">
+              <a:lnSpc>
+                <a:spcPct val="100000"/>
+              </a:lnSpc>
+              <a:spcAft>
+                <a:spcPts val="900"/>
+              </a:spcAft>
+              <a:defRPr sz="1800" b="0">
+                <a:solidFill>
+                  <a:srgbClr val="222222"/>
+                </a:solidFill>
+                <a:latin typeface="Calibri"/>
+              </a:defRPr>
+            </a:pPr>
+            <a:r>
+              <a:rPr sz="1800" b="0">
+                <a:solidFill>
+                  <a:srgbClr val="222222"/>
+                </a:solidFill>
+                <a:latin typeface="Calibri"/>
+              </a:rPr>
+              <a:t>Defensive loading is not paranoia. It is the difference between a vehicle that boots with odd settings and one that will not boot.</a:t>
+            </a:r>
+          </a:p>
+        </p:txBody>
+      </p:sp>
+    </p:spTree>
+  </p:cSld>
+  <p:clrMapOvr>
+    <a:masterClrMapping/>
+  </p:clrMapOvr>
+</p:sld>
+</file>
+
+<file path=ppt/slides/slide15.xml><?xml version="1.0" encoding="utf-8"?>
+<p:sld xmlns:a="http://schemas.openxmlformats.org/drawingml/2006/main" xmlns:p="http://schemas.openxmlformats.org/presentationml/2006/main" xmlns:r="http://schemas.openxmlformats.org/officeDocument/2006/relationships">
+  <p:cSld>
+    <p:spTree>
+      <p:nvGrpSpPr>
+        <p:cNvPr id="1" name=""/>
+        <p:cNvGrpSpPr/>
+        <p:nvPr/>
+      </p:nvGrpSpPr>
+      <p:grpSpPr/>
+      <p:sp>
+        <p:nvSpPr>
+          <p:cNvPr id="2" name="Title 1"/>
+          <p:cNvSpPr>
+            <a:spLocks noGrp="1"/>
+          </p:cNvSpPr>
+          <p:nvPr>
+            <p:ph type="title"/>
+          </p:nvPr>
+        </p:nvSpPr>
+        <p:spPr>
+          <a:xfrm>
+            <a:off x="502920" y="274320"/>
+            <a:ext cx="11185855" cy="777240"/>
+          </a:xfrm>
+        </p:spPr>
+        <p:txBody>
+          <a:bodyPr wrap="square" anchor="b"/>
+          <a:lstStyle/>
+          <a:p>
+            <a:pPr algn="l">
+              <a:lnSpc>
+                <a:spcPct val="100000"/>
+              </a:lnSpc>
+              <a:spcAft>
+                <a:spcPts val="0"/>
+              </a:spcAft>
+              <a:defRPr sz="2800" b="1">
+                <a:solidFill>
+                  <a:srgbClr val="1F3A5F"/>
+                </a:solidFill>
+                <a:latin typeface="Calibri"/>
+              </a:defRPr>
+            </a:pPr>
+            <a:r>
+              <a:rPr sz="2800" b="1">
+                <a:solidFill>
+                  <a:srgbClr val="1F3A5F"/>
+                </a:solidFill>
+                <a:latin typeface="Calibri"/>
+              </a:rPr>
+              <a:t>Where we are</a:t>
+            </a:r>
+          </a:p>
+        </p:txBody>
+      </p:sp>
+      <p:sp>
+        <p:nvSpPr>
+          <p:cNvPr id="3" name="Rectangle 2"/>
+          <p:cNvSpPr/>
+          <p:nvPr/>
+        </p:nvSpPr>
+        <p:spPr>
+          <a:xfrm>
+            <a:off x="502920" y="1097280"/>
+            <a:ext cx="11185855" cy="19050"/>
+          </a:xfrm>
+          <a:prstGeom prst="rect">
+            <a:avLst/>
+          </a:prstGeom>
+          <a:solidFill>
+            <a:srgbClr val="C8D2DE"/>
+          </a:solidFill>
+          <a:ln>
+            <a:noFill/>
+          </a:ln>
+          <a:effectLst/>
+        </p:spPr>
+        <p:style>
+          <a:lnRef idx="1">
+            <a:schemeClr val="accent1"/>
+          </a:lnRef>
+          <a:fillRef idx="3">
+            <a:schemeClr val="accent1"/>
+          </a:fillRef>
+          <a:effectRef idx="2">
+            <a:schemeClr val="accent1"/>
+          </a:effectRef>
+          <a:fontRef idx="minor">
+            <a:schemeClr val="lt1"/>
+          </a:fontRef>
+        </p:style>
+        <p:txBody>
+          <a:bodyPr rtlCol="0" anchor="ctr"/>
+          <a:lstStyle/>
+          <a:p>
+            <a:pPr algn="ctr"/>
+          </a:p>
+        </p:txBody>
+      </p:sp>
+      <p:sp>
+        <p:nvSpPr>
+          <p:cNvPr id="4" name="TextBox 3"/>
+          <p:cNvSpPr txBox="1"/>
+          <p:nvPr/>
+        </p:nvSpPr>
+        <p:spPr>
+          <a:xfrm>
+            <a:off x="502920" y="6382512"/>
+            <a:ext cx="10545775" cy="274320"/>
+          </a:xfrm>
+          <a:prstGeom prst="rect">
+            <a:avLst/>
+          </a:prstGeom>
+          <a:noFill/>
+        </p:spPr>
+        <p:txBody>
+          <a:bodyPr wrap="square" lIns="0" tIns="0">
+            <a:spAutoFit/>
+          </a:bodyPr>
+          <a:lstStyle/>
+          <a:p>
+            <a:pPr algn="l">
+              <a:lnSpc>
+                <a:spcPct val="100000"/>
+              </a:lnSpc>
+              <a:spcAft>
+                <a:spcPts val="0"/>
+              </a:spcAft>
+              <a:defRPr sz="1000" b="0">
+                <a:solidFill>
+                  <a:srgbClr val="666666"/>
+                </a:solidFill>
+                <a:latin typeface="Calibri"/>
+              </a:defRPr>
+            </a:pPr>
+            <a:r>
+              <a:rPr sz="1000" b="0">
+                <a:solidFill>
+                  <a:srgbClr val="666666"/>
+                </a:solidFill>
+                <a:latin typeface="Calibri"/>
+              </a:rPr>
+              <a:t>Pathfinder Advanced - Op Program 12  |  Lesson 3</a:t>
+            </a:r>
+          </a:p>
+        </p:txBody>
+      </p:sp>
+      <p:sp>
+        <p:nvSpPr>
+          <p:cNvPr id="5" name="TextBox 4"/>
+          <p:cNvSpPr txBox="1"/>
+          <p:nvPr/>
+        </p:nvSpPr>
+        <p:spPr>
+          <a:xfrm>
+            <a:off x="11231575" y="6382512"/>
+            <a:ext cx="457200" cy="274320"/>
+          </a:xfrm>
+          <a:prstGeom prst="rect">
+            <a:avLst/>
+          </a:prstGeom>
+          <a:noFill/>
+        </p:spPr>
+        <p:txBody>
+          <a:bodyPr wrap="square" lIns="0" tIns="0">
+            <a:spAutoFit/>
+          </a:bodyPr>
+          <a:lstStyle/>
+          <a:p>
+            <a:pPr algn="r">
+              <a:lnSpc>
+                <a:spcPct val="100000"/>
+              </a:lnSpc>
+              <a:spcAft>
+                <a:spcPts val="0"/>
+              </a:spcAft>
+              <a:defRPr sz="1000" b="0">
+                <a:solidFill>
+                  <a:srgbClr val="666666"/>
+                </a:solidFill>
+                <a:latin typeface="Calibri"/>
+              </a:defRPr>
+            </a:pPr>
+            <a:r>
+              <a:rPr sz="1000" b="0">
+                <a:solidFill>
+                  <a:srgbClr val="666666"/>
+                </a:solidFill>
+                <a:latin typeface="Calibri"/>
+              </a:rPr>
+              <a:t>14</a:t>
+            </a:r>
+          </a:p>
+        </p:txBody>
+      </p:sp>
+      <p:sp>
+        <p:nvSpPr>
+          <p:cNvPr id="6" name="Rounded Rectangle 5"/>
+          <p:cNvSpPr/>
+          <p:nvPr/>
+        </p:nvSpPr>
+        <p:spPr>
+          <a:xfrm>
+            <a:off x="502920" y="2240280"/>
+            <a:ext cx="3631082" cy="1737360"/>
+          </a:xfrm>
+          <a:prstGeom prst="roundRect">
+            <a:avLst>
+              <a:gd name="adj" fmla="val 8000"/>
+            </a:avLst>
+          </a:prstGeom>
+          <a:solidFill>
+            <a:srgbClr val="EEF3F8"/>
+          </a:solidFill>
+          <a:ln w="12700">
+            <a:solidFill>
+              <a:srgbClr val="0E7C86"/>
+            </a:solidFill>
+          </a:ln>
+          <a:effectLst/>
+        </p:spPr>
+        <p:style>
+          <a:lnRef idx="1">
+            <a:schemeClr val="accent1"/>
+          </a:lnRef>
+          <a:fillRef idx="3">
+            <a:schemeClr val="accent1"/>
+          </a:fillRef>
+          <a:effectRef idx="2">
+            <a:schemeClr val="accent1"/>
+          </a:effectRef>
+          <a:fontRef idx="minor">
+            <a:schemeClr val="lt1"/>
+          </a:fontRef>
+        </p:style>
+        <p:txBody>
+          <a:bodyPr rtlCol="0" anchor="ctr" wrap="square" lIns="73152" rIns="73152"/>
+          <a:lstStyle/>
+          <a:p>
+            <a:pPr algn="ctr">
+              <a:lnSpc>
+                <a:spcPct val="100000"/>
+              </a:lnSpc>
+              <a:spcAft>
+                <a:spcPts val="0"/>
+              </a:spcAft>
+              <a:defRPr sz="1700" b="0">
+                <a:solidFill>
+                  <a:srgbClr val="1F3A5F"/>
+                </a:solidFill>
+                <a:latin typeface="Calibri"/>
+              </a:defRPr>
+            </a:pPr>
+            <a:r>
+              <a:rPr sz="1700" b="0">
+                <a:solidFill>
+                  <a:srgbClr val="1F3A5F"/>
+                </a:solidFill>
+                <a:latin typeface="Calibri"/>
+              </a:rPr>
+              <a:t>Callbacks and allowlist</a:t>
+            </a:r>
+          </a:p>
+        </p:txBody>
+      </p:sp>
+      <p:sp>
+        <p:nvSpPr>
+          <p:cNvPr id="7" name="TextBox 6"/>
+          <p:cNvSpPr txBox="1"/>
+          <p:nvPr/>
+        </p:nvSpPr>
+        <p:spPr>
+          <a:xfrm>
+            <a:off x="502920" y="1856232"/>
+            <a:ext cx="3631082" cy="347472"/>
+          </a:xfrm>
+          <a:prstGeom prst="rect">
+            <a:avLst/>
+          </a:prstGeom>
+          <a:noFill/>
+        </p:spPr>
+        <p:txBody>
+          <a:bodyPr wrap="square" lIns="0" tIns="0" rIns="0" bIns="0">
+            <a:spAutoFit/>
+          </a:bodyPr>
+          <a:lstStyle/>
+          <a:p>
+            <a:pPr algn="ctr">
+              <a:lnSpc>
+                <a:spcPct val="100000"/>
+              </a:lnSpc>
+              <a:spcAft>
+                <a:spcPts val="600"/>
+              </a:spcAft>
+              <a:defRPr sz="1200" b="1">
+                <a:solidFill>
+                  <a:srgbClr val="0E7C86"/>
+                </a:solidFill>
+                <a:latin typeface="Calibri"/>
+              </a:defRPr>
+            </a:pPr>
+            <a:r>
+              <a:rPr sz="1200" b="1">
+                <a:solidFill>
+                  <a:srgbClr val="0E7C86"/>
+                </a:solidFill>
+                <a:latin typeface="Calibri"/>
+              </a:rPr>
+              <a:t>done</a:t>
+            </a:r>
+          </a:p>
+        </p:txBody>
+      </p:sp>
+      <p:sp>
+        <p:nvSpPr>
+          <p:cNvPr id="8" name="Rounded Rectangle 7"/>
+          <p:cNvSpPr/>
+          <p:nvPr/>
+        </p:nvSpPr>
+        <p:spPr>
+          <a:xfrm>
+            <a:off x="4280306" y="2240280"/>
+            <a:ext cx="3631082" cy="1737360"/>
+          </a:xfrm>
+          <a:prstGeom prst="roundRect">
+            <a:avLst>
+              <a:gd name="adj" fmla="val 8000"/>
+            </a:avLst>
+          </a:prstGeom>
+          <a:solidFill>
+            <a:srgbClr val="EEF3F8"/>
+          </a:solidFill>
+          <a:ln w="12700">
+            <a:solidFill>
+              <a:srgbClr val="0E7C86"/>
+            </a:solidFill>
+          </a:ln>
+          <a:effectLst/>
+        </p:spPr>
+        <p:style>
+          <a:lnRef idx="1">
+            <a:schemeClr val="accent1"/>
+          </a:lnRef>
+          <a:fillRef idx="3">
+            <a:schemeClr val="accent1"/>
+          </a:fillRef>
+          <a:effectRef idx="2">
+            <a:schemeClr val="accent1"/>
+          </a:effectRef>
+          <a:fontRef idx="minor">
+            <a:schemeClr val="lt1"/>
+          </a:fontRef>
+        </p:style>
+        <p:txBody>
+          <a:bodyPr rtlCol="0" anchor="ctr" wrap="square" lIns="73152" rIns="73152"/>
+          <a:lstStyle/>
+          <a:p>
+            <a:pPr algn="ctr">
+              <a:lnSpc>
+                <a:spcPct val="100000"/>
+              </a:lnSpc>
+              <a:spcAft>
+                <a:spcPts val="0"/>
+              </a:spcAft>
+              <a:defRPr sz="1700" b="0">
+                <a:solidFill>
+                  <a:srgbClr val="1F3A5F"/>
+                </a:solidFill>
+                <a:latin typeface="Calibri"/>
+              </a:defRPr>
+            </a:pPr>
+            <a:r>
+              <a:rPr sz="1700" b="0">
+                <a:solidFill>
+                  <a:srgbClr val="1F3A5F"/>
+                </a:solidFill>
+                <a:latin typeface="Calibri"/>
+              </a:rPr>
+              <a:t>Locking a board</a:t>
+            </a:r>
+          </a:p>
+        </p:txBody>
+      </p:sp>
+      <p:sp>
+        <p:nvSpPr>
+          <p:cNvPr id="9" name="TextBox 8"/>
+          <p:cNvSpPr txBox="1"/>
+          <p:nvPr/>
+        </p:nvSpPr>
+        <p:spPr>
+          <a:xfrm>
+            <a:off x="4280306" y="1856232"/>
+            <a:ext cx="3631082" cy="347472"/>
+          </a:xfrm>
+          <a:prstGeom prst="rect">
+            <a:avLst/>
+          </a:prstGeom>
+          <a:noFill/>
+        </p:spPr>
+        <p:txBody>
+          <a:bodyPr wrap="square" lIns="0" tIns="0" rIns="0" bIns="0">
+            <a:spAutoFit/>
+          </a:bodyPr>
+          <a:lstStyle/>
+          <a:p>
+            <a:pPr algn="ctr">
+              <a:lnSpc>
+                <a:spcPct val="100000"/>
+              </a:lnSpc>
+              <a:spcAft>
+                <a:spcPts val="600"/>
+              </a:spcAft>
+              <a:defRPr sz="1200" b="1">
+                <a:solidFill>
+                  <a:srgbClr val="0E7C86"/>
+                </a:solidFill>
+                <a:latin typeface="Calibri"/>
+              </a:defRPr>
+            </a:pPr>
+            <a:r>
+              <a:rPr sz="1200" b="1">
+                <a:solidFill>
+                  <a:srgbClr val="0E7C86"/>
+                </a:solidFill>
+                <a:latin typeface="Calibri"/>
+              </a:rPr>
+              <a:t>done</a:t>
+            </a:r>
+          </a:p>
+        </p:txBody>
+      </p:sp>
+      <p:sp>
+        <p:nvSpPr>
+          <p:cNvPr id="10" name="Rounded Rectangle 9"/>
+          <p:cNvSpPr/>
+          <p:nvPr/>
+        </p:nvSpPr>
+        <p:spPr>
+          <a:xfrm>
+            <a:off x="8057692" y="2240280"/>
+            <a:ext cx="3631082" cy="1737360"/>
+          </a:xfrm>
+          <a:prstGeom prst="roundRect">
+            <a:avLst>
+              <a:gd name="adj" fmla="val 8000"/>
+            </a:avLst>
+          </a:prstGeom>
+          <a:solidFill>
+            <a:srgbClr val="D6ECEE"/>
+          </a:solidFill>
+          <a:ln w="25400">
+            <a:solidFill>
+              <a:srgbClr val="0E7C86"/>
+            </a:solidFill>
+          </a:ln>
+          <a:effectLst/>
+        </p:spPr>
+        <p:style>
+          <a:lnRef idx="1">
+            <a:schemeClr val="accent1"/>
+          </a:lnRef>
+          <a:fillRef idx="3">
+            <a:schemeClr val="accent1"/>
+          </a:fillRef>
+          <a:effectRef idx="2">
+            <a:schemeClr val="accent1"/>
+          </a:effectRef>
+          <a:fontRef idx="minor">
+            <a:schemeClr val="lt1"/>
+          </a:fontRef>
+        </p:style>
+        <p:txBody>
+          <a:bodyPr rtlCol="0" anchor="ctr" wrap="square" lIns="73152" rIns="73152"/>
+          <a:lstStyle/>
+          <a:p>
+            <a:pPr algn="ctr">
+              <a:lnSpc>
+                <a:spcPct val="100000"/>
+              </a:lnSpc>
+              <a:spcAft>
+                <a:spcPts val="0"/>
+              </a:spcAft>
+              <a:defRPr sz="1700" b="1">
+                <a:solidFill>
+                  <a:srgbClr val="1F3A5F"/>
+                </a:solidFill>
+                <a:latin typeface="Calibri"/>
+              </a:defRPr>
+            </a:pPr>
+            <a:r>
+              <a:rPr sz="1700" b="1">
+                <a:solidFill>
+                  <a:srgbClr val="1F3A5F"/>
+                </a:solidFill>
+                <a:latin typeface="Calibri"/>
+              </a:rPr>
+              <a:t>EEPROM</a:t>
+            </a:r>
+          </a:p>
+        </p:txBody>
+      </p:sp>
+      <p:sp>
+        <p:nvSpPr>
+          <p:cNvPr id="11" name="TextBox 10"/>
+          <p:cNvSpPr txBox="1"/>
+          <p:nvPr/>
+        </p:nvSpPr>
+        <p:spPr>
+          <a:xfrm>
+            <a:off x="8057692" y="1856232"/>
+            <a:ext cx="3631082" cy="347472"/>
+          </a:xfrm>
+          <a:prstGeom prst="rect">
+            <a:avLst/>
+          </a:prstGeom>
+          <a:noFill/>
+        </p:spPr>
+        <p:txBody>
+          <a:bodyPr wrap="square" lIns="0" tIns="0" rIns="0" bIns="0">
+            <a:spAutoFit/>
+          </a:bodyPr>
+          <a:lstStyle/>
+          <a:p>
+            <a:pPr algn="ctr">
+              <a:lnSpc>
+                <a:spcPct val="100000"/>
+              </a:lnSpc>
+              <a:spcAft>
+                <a:spcPts val="600"/>
+              </a:spcAft>
+              <a:defRPr sz="1200" b="1">
+                <a:solidFill>
+                  <a:srgbClr val="0E7C86"/>
+                </a:solidFill>
+                <a:latin typeface="Calibri"/>
+              </a:defRPr>
+            </a:pPr>
+            <a:r>
+              <a:rPr sz="1200" b="1">
+                <a:solidFill>
+                  <a:srgbClr val="0E7C86"/>
+                </a:solidFill>
+                <a:latin typeface="Calibri"/>
+              </a:rPr>
+              <a:t>NOW</a:t>
+            </a:r>
+          </a:p>
+        </p:txBody>
+      </p:sp>
+    </p:spTree>
+  </p:cSld>
+  <p:clrMapOvr>
+    <a:masterClrMapping/>
+  </p:clrMapOvr>
+</p:sld>
+</file>
+
+<file path=ppt/slides/slide16.xml><?xml version="1.0" encoding="utf-8"?>
+<p:sld xmlns:a="http://schemas.openxmlformats.org/drawingml/2006/main" xmlns:p="http://schemas.openxmlformats.org/presentationml/2006/main" xmlns:r="http://schemas.openxmlformats.org/officeDocument/2006/relationships">
+  <p:cSld>
+    <p:spTree>
+      <p:nvGrpSpPr>
+        <p:cNvPr id="1" name=""/>
+        <p:cNvGrpSpPr/>
+        <p:nvPr/>
+      </p:nvGrpSpPr>
+      <p:grpSpPr/>
+      <p:sp>
+        <p:nvSpPr>
+          <p:cNvPr id="2" name="Title 1"/>
+          <p:cNvSpPr>
+            <a:spLocks noGrp="1"/>
+          </p:cNvSpPr>
+          <p:nvPr>
+            <p:ph type="title"/>
+          </p:nvPr>
+        </p:nvSpPr>
+        <p:spPr>
+          <a:xfrm>
+            <a:off x="502920" y="274320"/>
+            <a:ext cx="11185855" cy="777240"/>
+          </a:xfrm>
+        </p:spPr>
+        <p:txBody>
+          <a:bodyPr wrap="square" anchor="b"/>
+          <a:lstStyle/>
+          <a:p>
+            <a:pPr algn="l">
+              <a:lnSpc>
+                <a:spcPct val="100000"/>
+              </a:lnSpc>
+              <a:spcAft>
+                <a:spcPts val="0"/>
+              </a:spcAft>
+              <a:defRPr sz="2800" b="1">
+                <a:solidFill>
+                  <a:srgbClr val="1F3A5F"/>
+                </a:solidFill>
+                <a:latin typeface="Calibri"/>
+              </a:defRPr>
+            </a:pPr>
+            <a:r>
+              <a:rPr sz="2800" b="1">
+                <a:solidFill>
+                  <a:srgbClr val="1F3A5F"/>
+                </a:solidFill>
+                <a:latin typeface="Calibri"/>
+              </a:rPr>
+              <a:t>Do it now  -  settings that survive</a:t>
+            </a:r>
+          </a:p>
+        </p:txBody>
+      </p:sp>
+      <p:sp>
+        <p:nvSpPr>
+          <p:cNvPr id="3" name="Rectangle 2"/>
+          <p:cNvSpPr/>
+          <p:nvPr/>
+        </p:nvSpPr>
+        <p:spPr>
+          <a:xfrm>
+            <a:off x="502920" y="1097280"/>
+            <a:ext cx="11185855" cy="19050"/>
+          </a:xfrm>
+          <a:prstGeom prst="rect">
+            <a:avLst/>
+          </a:prstGeom>
+          <a:solidFill>
+            <a:srgbClr val="C8D2DE"/>
+          </a:solidFill>
+          <a:ln>
+            <a:noFill/>
+          </a:ln>
+          <a:effectLst/>
+        </p:spPr>
+        <p:style>
+          <a:lnRef idx="1">
+            <a:schemeClr val="accent1"/>
+          </a:lnRef>
+          <a:fillRef idx="3">
+            <a:schemeClr val="accent1"/>
+          </a:fillRef>
+          <a:effectRef idx="2">
+            <a:schemeClr val="accent1"/>
+          </a:effectRef>
+          <a:fontRef idx="minor">
+            <a:schemeClr val="lt1"/>
+          </a:fontRef>
+        </p:style>
+        <p:txBody>
+          <a:bodyPr rtlCol="0" anchor="ctr"/>
+          <a:lstStyle/>
+          <a:p>
+            <a:pPr algn="ctr"/>
+          </a:p>
+        </p:txBody>
+      </p:sp>
+      <p:sp>
+        <p:nvSpPr>
+          <p:cNvPr id="4" name="TextBox 3"/>
+          <p:cNvSpPr txBox="1"/>
+          <p:nvPr/>
+        </p:nvSpPr>
+        <p:spPr>
+          <a:xfrm>
+            <a:off x="502920" y="6382512"/>
+            <a:ext cx="10545775" cy="274320"/>
+          </a:xfrm>
+          <a:prstGeom prst="rect">
+            <a:avLst/>
+          </a:prstGeom>
+          <a:noFill/>
+        </p:spPr>
+        <p:txBody>
+          <a:bodyPr wrap="square" lIns="0" tIns="0">
+            <a:spAutoFit/>
+          </a:bodyPr>
+          <a:lstStyle/>
+          <a:p>
+            <a:pPr algn="l">
+              <a:lnSpc>
+                <a:spcPct val="100000"/>
+              </a:lnSpc>
+              <a:spcAft>
+                <a:spcPts val="0"/>
+              </a:spcAft>
+              <a:defRPr sz="1000" b="0">
+                <a:solidFill>
+                  <a:srgbClr val="666666"/>
+                </a:solidFill>
+                <a:latin typeface="Calibri"/>
+              </a:defRPr>
+            </a:pPr>
+            <a:r>
+              <a:rPr sz="1000" b="0">
+                <a:solidFill>
+                  <a:srgbClr val="666666"/>
+                </a:solidFill>
+                <a:latin typeface="Calibri"/>
+              </a:rPr>
+              <a:t>Pathfinder Advanced - Op Program 12  |  Lesson 3</a:t>
+            </a:r>
+          </a:p>
+        </p:txBody>
+      </p:sp>
+      <p:sp>
+        <p:nvSpPr>
+          <p:cNvPr id="5" name="TextBox 4"/>
+          <p:cNvSpPr txBox="1"/>
+          <p:nvPr/>
+        </p:nvSpPr>
+        <p:spPr>
+          <a:xfrm>
+            <a:off x="11231575" y="6382512"/>
+            <a:ext cx="457200" cy="274320"/>
+          </a:xfrm>
+          <a:prstGeom prst="rect">
+            <a:avLst/>
+          </a:prstGeom>
+          <a:noFill/>
+        </p:spPr>
+        <p:txBody>
+          <a:bodyPr wrap="square" lIns="0" tIns="0">
+            <a:spAutoFit/>
+          </a:bodyPr>
+          <a:lstStyle/>
+          <a:p>
+            <a:pPr algn="r">
+              <a:lnSpc>
+                <a:spcPct val="100000"/>
+              </a:lnSpc>
+              <a:spcAft>
+                <a:spcPts val="0"/>
+              </a:spcAft>
+              <a:defRPr sz="1000" b="0">
+                <a:solidFill>
+                  <a:srgbClr val="666666"/>
+                </a:solidFill>
+                <a:latin typeface="Calibri"/>
+              </a:defRPr>
+            </a:pPr>
+            <a:r>
+              <a:rPr sz="1000" b="0">
+                <a:solidFill>
+                  <a:srgbClr val="666666"/>
+                </a:solidFill>
+                <a:latin typeface="Calibri"/>
+              </a:rPr>
+              <a:t>15</a:t>
+            </a:r>
+          </a:p>
+        </p:txBody>
+      </p:sp>
+      <p:sp>
+        <p:nvSpPr>
+          <p:cNvPr id="6" name="Rounded Rectangle 5"/>
+          <p:cNvSpPr/>
+          <p:nvPr/>
+        </p:nvSpPr>
+        <p:spPr>
+          <a:xfrm>
+            <a:off x="502920" y="1188720"/>
+            <a:ext cx="11185855" cy="530352"/>
+          </a:xfrm>
+          <a:prstGeom prst="roundRect">
+            <a:avLst>
+              <a:gd name="adj" fmla="val 4000"/>
+            </a:avLst>
+          </a:prstGeom>
+          <a:solidFill>
+            <a:srgbClr val="0E7C86"/>
+          </a:solidFill>
+          <a:ln>
+            <a:noFill/>
+          </a:ln>
+          <a:effectLst/>
+        </p:spPr>
+        <p:style>
+          <a:lnRef idx="1">
+            <a:schemeClr val="accent1"/>
+          </a:lnRef>
+          <a:fillRef idx="3">
+            <a:schemeClr val="accent1"/>
+          </a:fillRef>
+          <a:effectRef idx="2">
+            <a:schemeClr val="accent1"/>
+          </a:effectRef>
+          <a:fontRef idx="minor">
+            <a:schemeClr val="lt1"/>
+          </a:fontRef>
+        </p:style>
+        <p:txBody>
+          <a:bodyPr rtlCol="0" anchor="ctr" wrap="square" lIns="182880"/>
+          <a:lstStyle/>
+          <a:p>
+            <a:pPr algn="l"/>
+            <a:r>
+              <a:rPr sz="1300" b="1">
+                <a:solidFill>
+                  <a:srgbClr val="FFFFFF"/>
+                </a:solidFill>
+                <a:latin typeface="Calibri"/>
+              </a:rPr>
+              <a:t>UPLOAD AND RUN:   </a:t>
+            </a:r>
+            <a:r>
+              <a:rPr sz="1500" b="1">
+                <a:solidFill>
+                  <a:srgbClr val="FFFFFF"/>
+                </a:solidFill>
+                <a:latin typeface="Consolas"/>
+              </a:rPr>
+              <a:t>a3b_eeprom_settings</a:t>
+            </a:r>
+            <a:r>
+              <a:rPr sz="1200">
+                <a:solidFill>
+                  <a:srgbClr val="FFFFFF"/>
+                </a:solidFill>
+                <a:latin typeface="Calibri"/>
+              </a:rPr>
+              <a:t>     (30 minutes)</a:t>
+            </a:r>
+          </a:p>
+        </p:txBody>
+      </p:sp>
+      <p:sp>
+        <p:nvSpPr>
+          <p:cNvPr id="7" name="TextBox 6"/>
+          <p:cNvSpPr txBox="1"/>
+          <p:nvPr/>
+        </p:nvSpPr>
+        <p:spPr>
+          <a:xfrm>
+            <a:off x="502920" y="1901952"/>
+            <a:ext cx="5387187" cy="4361688"/>
+          </a:xfrm>
+          <a:prstGeom prst="rect">
+            <a:avLst/>
+          </a:prstGeom>
+          <a:noFill/>
+        </p:spPr>
+        <p:txBody>
+          <a:bodyPr wrap="square" lIns="0" tIns="0" rIns="0" bIns="0">
+            <a:spAutoFit/>
+          </a:bodyPr>
+          <a:lstStyle/>
+          <a:p>
+            <a:pPr algn="l">
+              <a:lnSpc>
+                <a:spcPct val="100000"/>
+              </a:lnSpc>
+              <a:spcAft>
+                <a:spcPts val="400"/>
+              </a:spcAft>
+              <a:defRPr sz="1800" b="0">
+                <a:solidFill>
+                  <a:srgbClr val="222222"/>
+                </a:solidFill>
+                <a:latin typeface="Calibri"/>
+              </a:defRPr>
+            </a:pPr>
+            <a:r>
+              <a:rPr sz="1800" b="0">
+                <a:solidFill>
+                  <a:srgbClr val="222222"/>
+                </a:solidFill>
+                <a:latin typeface="Calibri"/>
+              </a:rPr>
+              <a:t>1.  set deadzone 100,  save. Now UNPLUG the board and plug it back in. Type  show.</a:t>
+            </a:r>
+          </a:p>
+          <a:p>
+            <a:pPr algn="l">
+              <a:lnSpc>
+                <a:spcPct val="100000"/>
+              </a:lnSpc>
+              <a:spcAft>
+                <a:spcPts val="400"/>
+              </a:spcAft>
+              <a:defRPr sz="1800" b="0">
+                <a:solidFill>
+                  <a:srgbClr val="222222"/>
+                </a:solidFill>
+                <a:latin typeface="Calibri"/>
+              </a:defRPr>
+            </a:pPr>
+            <a:r>
+              <a:rPr sz="1800" b="0">
+                <a:solidFill>
+                  <a:srgbClr val="222222"/>
+                </a:solidFill>
+                <a:latin typeface="Calibri"/>
+              </a:rPr>
+              <a:t>2.  set deadzone 200  and do NOT save. Reset the board. What happened, and why?</a:t>
+            </a:r>
+          </a:p>
+          <a:p>
+            <a:pPr algn="l">
+              <a:lnSpc>
+                <a:spcPct val="100000"/>
+              </a:lnSpc>
+              <a:spcAft>
+                <a:spcPts val="400"/>
+              </a:spcAft>
+              <a:defRPr sz="1800" b="0">
+                <a:solidFill>
+                  <a:srgbClr val="222222"/>
+                </a:solidFill>
+                <a:latin typeface="Calibri"/>
+              </a:defRPr>
+            </a:pPr>
+            <a:r>
+              <a:rPr sz="1800" b="0">
+                <a:solidFill>
+                  <a:srgbClr val="222222"/>
+                </a:solidFill>
+                <a:latin typeface="Calibri"/>
+              </a:rPr>
+              <a:t>3.  erase, then reset. Where did the values come from this time?</a:t>
+            </a:r>
+          </a:p>
+          <a:p>
+            <a:pPr algn="l">
+              <a:lnSpc>
+                <a:spcPct val="100000"/>
+              </a:lnSpc>
+              <a:spcAft>
+                <a:spcPts val="400"/>
+              </a:spcAft>
+              <a:defRPr sz="1800" b="0">
+                <a:solidFill>
+                  <a:srgbClr val="222222"/>
+                </a:solidFill>
+                <a:latin typeface="Calibri"/>
+              </a:defRPr>
+            </a:pPr>
+            <a:r>
+              <a:rPr sz="1800" b="0">
+                <a:solidFill>
+                  <a:srgbClr val="222222"/>
+                </a:solidFill>
+                <a:latin typeface="Calibri"/>
+              </a:rPr>
+              <a:t>4.  dump  before and after a save. Find the magic byte.</a:t>
+            </a:r>
+          </a:p>
+          <a:p>
+            <a:pPr algn="l">
+              <a:lnSpc>
+                <a:spcPct val="100000"/>
+              </a:lnSpc>
+              <a:spcAft>
+                <a:spcPts val="400"/>
+              </a:spcAft>
+              <a:defRPr sz="1800" b="0">
+                <a:solidFill>
+                  <a:srgbClr val="222222"/>
+                </a:solidFill>
+                <a:latin typeface="Calibri"/>
+              </a:defRPr>
+            </a:pPr>
+            <a:r>
+              <a:rPr sz="1800" b="0">
+                <a:solidFill>
+                  <a:srgbClr val="222222"/>
+                </a:solidFill>
+                <a:latin typeface="Calibri"/>
+              </a:rPr>
+              <a:t>5.  Comment out the EEPROM.commit() in saveSettings. Save, reset, and see the bug you will one day write for real.</a:t>
+            </a:r>
+          </a:p>
+          <a:p>
+            <a:pPr algn="l">
+              <a:lnSpc>
+                <a:spcPct val="100000"/>
+              </a:lnSpc>
+              <a:spcAft>
+                <a:spcPts val="400"/>
+              </a:spcAft>
+              <a:defRPr sz="1800" b="0">
+                <a:solidFill>
+                  <a:srgbClr val="222222"/>
+                </a:solidFill>
+                <a:latin typeface="Calibri"/>
+              </a:defRPr>
+            </a:pPr>
+            <a:r>
+              <a:rPr sz="1800" b="0">
+                <a:solidFill>
+                  <a:srgbClr val="222222"/>
+                </a:solidFill>
+                <a:latin typeface="Calibri"/>
+              </a:rPr>
+              <a:t>6.  Deliberately overlap two ADDR_ constants and watch one setting eat the other.</a:t>
+            </a:r>
+          </a:p>
+        </p:txBody>
+      </p:sp>
+      <p:sp>
+        <p:nvSpPr>
+          <p:cNvPr id="8" name="TextBox 7"/>
+          <p:cNvSpPr txBox="1"/>
+          <p:nvPr/>
+        </p:nvSpPr>
+        <p:spPr>
+          <a:xfrm>
+            <a:off x="6301587" y="1901952"/>
+            <a:ext cx="5387187" cy="365760"/>
+          </a:xfrm>
+          <a:prstGeom prst="rect">
+            <a:avLst/>
+          </a:prstGeom>
+          <a:noFill/>
+        </p:spPr>
+        <p:txBody>
+          <a:bodyPr wrap="square" lIns="0" tIns="0" rIns="0" bIns="0">
+            <a:spAutoFit/>
+          </a:bodyPr>
+          <a:lstStyle/>
+          <a:p>
+            <a:pPr algn="l">
+              <a:lnSpc>
+                <a:spcPct val="100000"/>
+              </a:lnSpc>
+              <a:spcAft>
+                <a:spcPts val="200"/>
+              </a:spcAft>
+              <a:defRPr sz="1800" b="1">
+                <a:solidFill>
+                  <a:srgbClr val="0E7C86"/>
+                </a:solidFill>
+                <a:latin typeface="Calibri"/>
+              </a:defRPr>
+            </a:pPr>
+            <a:r>
+              <a:rPr sz="1800" b="1">
+                <a:solidFill>
+                  <a:srgbClr val="0E7C86"/>
+                </a:solidFill>
+                <a:latin typeface="Calibri"/>
+              </a:rPr>
+              <a:t>What you should see</a:t>
+            </a:r>
+          </a:p>
+        </p:txBody>
+      </p:sp>
+      <p:sp>
+        <p:nvSpPr>
+          <p:cNvPr id="9" name="TextBox 8"/>
+          <p:cNvSpPr txBox="1"/>
+          <p:nvPr/>
+        </p:nvSpPr>
+        <p:spPr>
+          <a:xfrm>
+            <a:off x="6301587" y="2304288"/>
+            <a:ext cx="5387187" cy="1778508"/>
+          </a:xfrm>
+          <a:prstGeom prst="rect">
+            <a:avLst/>
+          </a:prstGeom>
+          <a:noFill/>
+        </p:spPr>
+        <p:txBody>
+          <a:bodyPr wrap="square" lIns="0" tIns="0" rIns="0" bIns="0">
+            <a:spAutoFit/>
+          </a:bodyPr>
+          <a:lstStyle/>
+          <a:p>
+            <a:pPr algn="l">
+              <a:lnSpc>
+                <a:spcPct val="100000"/>
+              </a:lnSpc>
+              <a:spcAft>
+                <a:spcPts val="200"/>
+              </a:spcAft>
+              <a:defRPr sz="1800" b="0">
+                <a:solidFill>
+                  <a:srgbClr val="222222"/>
+                </a:solidFill>
+                <a:latin typeface="Calibri"/>
+              </a:defRPr>
+            </a:pPr>
+            <a:r>
+              <a:rPr sz="1800" b="0">
+                <a:solidFill>
+                  <a:srgbClr val="222222"/>
+                </a:solidFill>
+                <a:latin typeface="Calibri"/>
+              </a:rPr>
+              <a:t>Step 1: the value is still 100 after a power cycle. Step 2: it is back to 100, not 200.</a:t>
+            </a:r>
+          </a:p>
+        </p:txBody>
+      </p:sp>
+      <p:sp>
+        <p:nvSpPr>
+          <p:cNvPr id="10" name="TextBox 9"/>
+          <p:cNvSpPr txBox="1"/>
+          <p:nvPr/>
+        </p:nvSpPr>
+        <p:spPr>
+          <a:xfrm>
+            <a:off x="6301587" y="4119372"/>
+            <a:ext cx="5387187" cy="365760"/>
+          </a:xfrm>
+          <a:prstGeom prst="rect">
+            <a:avLst/>
+          </a:prstGeom>
+          <a:noFill/>
+        </p:spPr>
+        <p:txBody>
+          <a:bodyPr wrap="square" lIns="0" tIns="0" rIns="0" bIns="0">
+            <a:spAutoFit/>
+          </a:bodyPr>
+          <a:lstStyle/>
+          <a:p>
+            <a:pPr algn="l">
+              <a:lnSpc>
+                <a:spcPct val="100000"/>
+              </a:lnSpc>
+              <a:spcAft>
+                <a:spcPts val="200"/>
+              </a:spcAft>
+              <a:defRPr sz="1800" b="1">
+                <a:solidFill>
+                  <a:srgbClr val="0E7C86"/>
+                </a:solidFill>
+                <a:latin typeface="Calibri"/>
+              </a:defRPr>
+            </a:pPr>
+            <a:r>
+              <a:rPr sz="1800" b="1">
+                <a:solidFill>
+                  <a:srgbClr val="0E7C86"/>
+                </a:solidFill>
+                <a:latin typeface="Calibri"/>
+              </a:rPr>
+              <a:t>Answer these</a:t>
+            </a:r>
+          </a:p>
+        </p:txBody>
+      </p:sp>
+      <p:sp>
+        <p:nvSpPr>
+          <p:cNvPr id="11" name="TextBox 10"/>
+          <p:cNvSpPr txBox="1"/>
+          <p:nvPr/>
+        </p:nvSpPr>
+        <p:spPr>
+          <a:xfrm>
+            <a:off x="6301587" y="4521708"/>
+            <a:ext cx="5387187" cy="1778508"/>
+          </a:xfrm>
+          <a:prstGeom prst="rect">
+            <a:avLst/>
+          </a:prstGeom>
+          <a:noFill/>
+        </p:spPr>
+        <p:txBody>
+          <a:bodyPr wrap="square" lIns="0" tIns="0" rIns="0" bIns="0">
+            <a:spAutoFit/>
+          </a:bodyPr>
+          <a:lstStyle/>
+          <a:p>
+            <a:pPr algn="l">
+              <a:lnSpc>
+                <a:spcPct val="100000"/>
+              </a:lnSpc>
+              <a:spcAft>
+                <a:spcPts val="200"/>
+              </a:spcAft>
+              <a:defRPr sz="1800" b="0">
+                <a:solidFill>
+                  <a:srgbClr val="222222"/>
+                </a:solidFill>
+                <a:latin typeface="Calibri"/>
+              </a:defRPr>
+            </a:pPr>
+            <a:r>
+              <a:rPr sz="1800" b="0">
+                <a:solidFill>
+                  <a:srgbClr val="222222"/>
+                </a:solidFill>
+                <a:latin typeface="Calibri"/>
+              </a:rPr>
+              <a:t>What is at address 0 in the dump, and what does it mean?</a:t>
+            </a:r>
+          </a:p>
+          <a:p>
+            <a:pPr algn="l">
+              <a:lnSpc>
+                <a:spcPct val="100000"/>
+              </a:lnSpc>
+              <a:spcAft>
+                <a:spcPts val="200"/>
+              </a:spcAft>
+              <a:defRPr sz="1800" b="0">
+                <a:solidFill>
+                  <a:srgbClr val="222222"/>
+                </a:solidFill>
+                <a:latin typeface="Calibri"/>
+              </a:defRPr>
+            </a:pPr>
+            <a:r>
+              <a:rPr sz="1800" b="0">
+                <a:solidFill>
+                  <a:srgbClr val="222222"/>
+                </a:solidFill>
+                <a:latin typeface="Calibri"/>
+              </a:rPr>
+              <a:t>Why is range checking needed even when the magic byte is correct?</a:t>
+            </a:r>
+          </a:p>
+        </p:txBody>
+      </p:sp>
+    </p:spTree>
+  </p:cSld>
+  <p:clrMapOvr>
+    <a:masterClrMapping/>
+  </p:clrMapOvr>
+</p:sld>
+</file>
+
+<file path=ppt/slides/slide17.xml><?xml version="1.0" encoding="utf-8"?>
+<p:sld xmlns:a="http://schemas.openxmlformats.org/drawingml/2006/main" xmlns:p="http://schemas.openxmlformats.org/presentationml/2006/main" xmlns:r="http://schemas.openxmlformats.org/officeDocument/2006/relationships">
+  <p:cSld>
+    <p:spTree>
+      <p:nvGrpSpPr>
+        <p:cNvPr id="1" name=""/>
+        <p:cNvGrpSpPr/>
+        <p:nvPr/>
+      </p:nvGrpSpPr>
+      <p:grpSpPr/>
+      <p:sp>
+        <p:nvSpPr>
+          <p:cNvPr id="2" name="Title 1"/>
+          <p:cNvSpPr>
+            <a:spLocks noGrp="1"/>
+          </p:cNvSpPr>
+          <p:nvPr>
+            <p:ph type="title"/>
+          </p:nvPr>
+        </p:nvSpPr>
+        <p:spPr>
+          <a:xfrm>
+            <a:off x="502920" y="274320"/>
+            <a:ext cx="11185855" cy="777240"/>
+          </a:xfrm>
+        </p:spPr>
+        <p:txBody>
+          <a:bodyPr wrap="square" anchor="b"/>
+          <a:lstStyle/>
+          <a:p>
+            <a:pPr algn="l">
+              <a:lnSpc>
+                <a:spcPct val="100000"/>
+              </a:lnSpc>
+              <a:spcAft>
+                <a:spcPts val="0"/>
+              </a:spcAft>
+              <a:defRPr sz="2800" b="1">
+                <a:solidFill>
+                  <a:srgbClr val="1F3A5F"/>
+                </a:solidFill>
+                <a:latin typeface="Calibri"/>
+              </a:defRPr>
+            </a:pPr>
+            <a:r>
+              <a:rPr sz="2800" b="1">
+                <a:solidFill>
+                  <a:srgbClr val="1F3A5F"/>
+                </a:solidFill>
+                <a:latin typeface="Calibri"/>
+              </a:rPr>
+              <a:t>Where each program keeps its controller address</a:t>
+            </a:r>
+          </a:p>
+        </p:txBody>
+      </p:sp>
+      <p:sp>
+        <p:nvSpPr>
+          <p:cNvPr id="3" name="Rectangle 2"/>
+          <p:cNvSpPr/>
+          <p:nvPr/>
+        </p:nvSpPr>
+        <p:spPr>
+          <a:xfrm>
+            <a:off x="502920" y="1097280"/>
+            <a:ext cx="11185855" cy="19050"/>
+          </a:xfrm>
+          <a:prstGeom prst="rect">
+            <a:avLst/>
+          </a:prstGeom>
+          <a:solidFill>
+            <a:srgbClr val="C8D2DE"/>
+          </a:solidFill>
+          <a:ln>
+            <a:noFill/>
+          </a:ln>
+          <a:effectLst/>
+        </p:spPr>
+        <p:style>
+          <a:lnRef idx="1">
+            <a:schemeClr val="accent1"/>
+          </a:lnRef>
+          <a:fillRef idx="3">
+            <a:schemeClr val="accent1"/>
+          </a:fillRef>
+          <a:effectRef idx="2">
+            <a:schemeClr val="accent1"/>
+          </a:effectRef>
+          <a:fontRef idx="minor">
+            <a:schemeClr val="lt1"/>
+          </a:fontRef>
+        </p:style>
+        <p:txBody>
+          <a:bodyPr rtlCol="0" anchor="ctr"/>
+          <a:lstStyle/>
+          <a:p>
+            <a:pPr algn="ctr"/>
+          </a:p>
+        </p:txBody>
+      </p:sp>
+      <p:sp>
+        <p:nvSpPr>
+          <p:cNvPr id="4" name="TextBox 3"/>
+          <p:cNvSpPr txBox="1"/>
+          <p:nvPr/>
+        </p:nvSpPr>
+        <p:spPr>
+          <a:xfrm>
+            <a:off x="502920" y="6382512"/>
+            <a:ext cx="10545775" cy="274320"/>
+          </a:xfrm>
+          <a:prstGeom prst="rect">
+            <a:avLst/>
+          </a:prstGeom>
+          <a:noFill/>
+        </p:spPr>
+        <p:txBody>
+          <a:bodyPr wrap="square" lIns="0" tIns="0">
+            <a:spAutoFit/>
+          </a:bodyPr>
+          <a:lstStyle/>
+          <a:p>
+            <a:pPr algn="l">
+              <a:lnSpc>
+                <a:spcPct val="100000"/>
+              </a:lnSpc>
+              <a:spcAft>
+                <a:spcPts val="0"/>
+              </a:spcAft>
+              <a:defRPr sz="1000" b="0">
+                <a:solidFill>
+                  <a:srgbClr val="666666"/>
+                </a:solidFill>
+                <a:latin typeface="Calibri"/>
+              </a:defRPr>
+            </a:pPr>
+            <a:r>
+              <a:rPr sz="1000" b="0">
+                <a:solidFill>
+                  <a:srgbClr val="666666"/>
+                </a:solidFill>
+                <a:latin typeface="Calibri"/>
+              </a:rPr>
+              <a:t>Pathfinder Advanced - Op Program 12  |  Lesson 3</a:t>
+            </a:r>
+          </a:p>
+        </p:txBody>
+      </p:sp>
+      <p:sp>
+        <p:nvSpPr>
+          <p:cNvPr id="5" name="TextBox 4"/>
+          <p:cNvSpPr txBox="1"/>
+          <p:nvPr/>
+        </p:nvSpPr>
+        <p:spPr>
+          <a:xfrm>
+            <a:off x="11231575" y="6382512"/>
+            <a:ext cx="457200" cy="274320"/>
+          </a:xfrm>
+          <a:prstGeom prst="rect">
+            <a:avLst/>
+          </a:prstGeom>
+          <a:noFill/>
+        </p:spPr>
+        <p:txBody>
+          <a:bodyPr wrap="square" lIns="0" tIns="0">
+            <a:spAutoFit/>
+          </a:bodyPr>
+          <a:lstStyle/>
+          <a:p>
+            <a:pPr algn="r">
+              <a:lnSpc>
+                <a:spcPct val="100000"/>
+              </a:lnSpc>
+              <a:spcAft>
+                <a:spcPts val="0"/>
+              </a:spcAft>
+              <a:defRPr sz="1000" b="0">
+                <a:solidFill>
+                  <a:srgbClr val="666666"/>
+                </a:solidFill>
+                <a:latin typeface="Calibri"/>
+              </a:defRPr>
+            </a:pPr>
+            <a:r>
+              <a:rPr sz="1000" b="0">
+                <a:solidFill>
+                  <a:srgbClr val="666666"/>
+                </a:solidFill>
+                <a:latin typeface="Calibri"/>
+              </a:rPr>
+              <a:t>16</a:t>
             </a:r>
           </a:p>
         </p:txBody>
@@ -6269,7 +7721,7 @@
 </p:sld>
 </file>
 
-<file path=ppt/slides/slide15.xml><?xml version="1.0" encoding="utf-8"?>
+<file path=ppt/slides/slide18.xml><?xml version="1.0" encoding="utf-8"?>
 <p:sld xmlns:a="http://schemas.openxmlformats.org/drawingml/2006/main" xmlns:p="http://schemas.openxmlformats.org/presentationml/2006/main" xmlns:r="http://schemas.openxmlformats.org/officeDocument/2006/relationships">
   <p:cSld>
     <p:spTree>
@@ -6460,7 +7912,7 @@
                 </a:solidFill>
                 <a:latin typeface="Calibri"/>
               </a:rPr>
-              <a:t>14</a:t>
+              <a:t>17</a:t>
             </a:r>
           </a:p>
         </p:txBody>
@@ -7085,7 +8537,7 @@
 </p:sld>
 </file>
 
-<file path=ppt/slides/slide16.xml><?xml version="1.0" encoding="utf-8"?>
+<file path=ppt/slides/slide19.xml><?xml version="1.0" encoding="utf-8"?>
 <p:sld xmlns:a="http://schemas.openxmlformats.org/drawingml/2006/main" xmlns:p="http://schemas.openxmlformats.org/presentationml/2006/main" xmlns:r="http://schemas.openxmlformats.org/officeDocument/2006/relationships">
   <p:cSld>
     <p:spTree>
@@ -7276,7 +8728,7 @@
                 </a:solidFill>
                 <a:latin typeface="Calibri"/>
               </a:rPr>
-              <a:t>15</a:t>
+              <a:t>18</a:t>
             </a:r>
           </a:p>
         </p:txBody>
@@ -7496,824 +8948,6 @@
                 <a:latin typeface="Calibri"/>
               </a:rPr>
               <a:t>Two lessons:</a:t>
-            </a:r>
-          </a:p>
-        </p:txBody>
-      </p:sp>
-    </p:spTree>
-  </p:cSld>
-  <p:clrMapOvr>
-    <a:masterClrMapping/>
-  </p:clrMapOvr>
-</p:sld>
-</file>
-
-<file path=ppt/slides/slide17.xml><?xml version="1.0" encoding="utf-8"?>
-<p:sld xmlns:a="http://schemas.openxmlformats.org/drawingml/2006/main" xmlns:p="http://schemas.openxmlformats.org/presentationml/2006/main" xmlns:r="http://schemas.openxmlformats.org/officeDocument/2006/relationships">
-  <p:cSld>
-    <p:spTree>
-      <p:nvGrpSpPr>
-        <p:cNvPr id="1" name=""/>
-        <p:cNvGrpSpPr/>
-        <p:nvPr/>
-      </p:nvGrpSpPr>
-      <p:grpSpPr/>
-      <p:sp>
-        <p:nvSpPr>
-          <p:cNvPr id="2" name="Title 1"/>
-          <p:cNvSpPr>
-            <a:spLocks noGrp="1"/>
-          </p:cNvSpPr>
-          <p:nvPr>
-            <p:ph type="title"/>
-          </p:nvPr>
-        </p:nvSpPr>
-        <p:spPr>
-          <a:xfrm>
-            <a:off x="502920" y="274320"/>
-            <a:ext cx="11185855" cy="777240"/>
-          </a:xfrm>
-        </p:spPr>
-        <p:txBody>
-          <a:bodyPr wrap="square" anchor="b"/>
-          <a:lstStyle/>
-          <a:p>
-            <a:pPr algn="l">
-              <a:lnSpc>
-                <a:spcPct val="100000"/>
-              </a:lnSpc>
-              <a:spcAft>
-                <a:spcPts val="0"/>
-              </a:spcAft>
-              <a:defRPr sz="2800" b="1">
-                <a:solidFill>
-                  <a:srgbClr val="1F3A5F"/>
-                </a:solidFill>
-                <a:latin typeface="Calibri"/>
-              </a:defRPr>
-            </a:pPr>
-            <a:r>
-              <a:rPr sz="2800" b="1">
-                <a:solidFill>
-                  <a:srgbClr val="1F3A5F"/>
-                </a:solidFill>
-                <a:latin typeface="Calibri"/>
-              </a:rPr>
-              <a:t>One more bug worth knowing about  (continued)</a:t>
-            </a:r>
-          </a:p>
-        </p:txBody>
-      </p:sp>
-      <p:sp>
-        <p:nvSpPr>
-          <p:cNvPr id="3" name="Rectangle 2"/>
-          <p:cNvSpPr/>
-          <p:nvPr/>
-        </p:nvSpPr>
-        <p:spPr>
-          <a:xfrm>
-            <a:off x="502920" y="1097280"/>
-            <a:ext cx="11185855" cy="19050"/>
-          </a:xfrm>
-          <a:prstGeom prst="rect">
-            <a:avLst/>
-          </a:prstGeom>
-          <a:solidFill>
-            <a:srgbClr val="C8D2DE"/>
-          </a:solidFill>
-          <a:ln>
-            <a:noFill/>
-          </a:ln>
-          <a:effectLst/>
-        </p:spPr>
-        <p:style>
-          <a:lnRef idx="1">
-            <a:schemeClr val="accent1"/>
-          </a:lnRef>
-          <a:fillRef idx="3">
-            <a:schemeClr val="accent1"/>
-          </a:fillRef>
-          <a:effectRef idx="2">
-            <a:schemeClr val="accent1"/>
-          </a:effectRef>
-          <a:fontRef idx="minor">
-            <a:schemeClr val="lt1"/>
-          </a:fontRef>
-        </p:style>
-        <p:txBody>
-          <a:bodyPr rtlCol="0" anchor="ctr"/>
-          <a:lstStyle/>
-          <a:p>
-            <a:pPr algn="ctr"/>
-          </a:p>
-        </p:txBody>
-      </p:sp>
-      <p:sp>
-        <p:nvSpPr>
-          <p:cNvPr id="4" name="TextBox 3"/>
-          <p:cNvSpPr txBox="1"/>
-          <p:nvPr/>
-        </p:nvSpPr>
-        <p:spPr>
-          <a:xfrm>
-            <a:off x="502920" y="6382512"/>
-            <a:ext cx="10545775" cy="274320"/>
-          </a:xfrm>
-          <a:prstGeom prst="rect">
-            <a:avLst/>
-          </a:prstGeom>
-          <a:noFill/>
-        </p:spPr>
-        <p:txBody>
-          <a:bodyPr wrap="square" lIns="0" tIns="0">
-            <a:spAutoFit/>
-          </a:bodyPr>
-          <a:lstStyle/>
-          <a:p>
-            <a:pPr algn="l">
-              <a:lnSpc>
-                <a:spcPct val="100000"/>
-              </a:lnSpc>
-              <a:spcAft>
-                <a:spcPts val="0"/>
-              </a:spcAft>
-              <a:defRPr sz="1000" b="0">
-                <a:solidFill>
-                  <a:srgbClr val="666666"/>
-                </a:solidFill>
-                <a:latin typeface="Calibri"/>
-              </a:defRPr>
-            </a:pPr>
-            <a:r>
-              <a:rPr sz="1000" b="0">
-                <a:solidFill>
-                  <a:srgbClr val="666666"/>
-                </a:solidFill>
-                <a:latin typeface="Calibri"/>
-              </a:rPr>
-              <a:t>Pathfinder Advanced - Op Program 12  |  Lesson 3</a:t>
-            </a:r>
-          </a:p>
-        </p:txBody>
-      </p:sp>
-      <p:sp>
-        <p:nvSpPr>
-          <p:cNvPr id="5" name="TextBox 4"/>
-          <p:cNvSpPr txBox="1"/>
-          <p:nvPr/>
-        </p:nvSpPr>
-        <p:spPr>
-          <a:xfrm>
-            <a:off x="11231575" y="6382512"/>
-            <a:ext cx="457200" cy="274320"/>
-          </a:xfrm>
-          <a:prstGeom prst="rect">
-            <a:avLst/>
-          </a:prstGeom>
-          <a:noFill/>
-        </p:spPr>
-        <p:txBody>
-          <a:bodyPr wrap="square" lIns="0" tIns="0">
-            <a:spAutoFit/>
-          </a:bodyPr>
-          <a:lstStyle/>
-          <a:p>
-            <a:pPr algn="r">
-              <a:lnSpc>
-                <a:spcPct val="100000"/>
-              </a:lnSpc>
-              <a:spcAft>
-                <a:spcPts val="0"/>
-              </a:spcAft>
-              <a:defRPr sz="1000" b="0">
-                <a:solidFill>
-                  <a:srgbClr val="666666"/>
-                </a:solidFill>
-                <a:latin typeface="Calibri"/>
-              </a:defRPr>
-            </a:pPr>
-            <a:r>
-              <a:rPr sz="1000" b="0">
-                <a:solidFill>
-                  <a:srgbClr val="666666"/>
-                </a:solidFill>
-                <a:latin typeface="Calibri"/>
-              </a:rPr>
-              <a:t>16</a:t>
-            </a:r>
-          </a:p>
-        </p:txBody>
-      </p:sp>
-      <p:sp>
-        <p:nvSpPr>
-          <p:cNvPr id="6" name="TextBox 5"/>
-          <p:cNvSpPr txBox="1"/>
-          <p:nvPr/>
-        </p:nvSpPr>
-        <p:spPr>
-          <a:xfrm>
-            <a:off x="502920" y="1188720"/>
-            <a:ext cx="11185855" cy="4023360"/>
-          </a:xfrm>
-          <a:prstGeom prst="rect">
-            <a:avLst/>
-          </a:prstGeom>
-          <a:noFill/>
-        </p:spPr>
-        <p:txBody>
-          <a:bodyPr wrap="square" lIns="0" tIns="0" rIns="0" bIns="0">
-            <a:spAutoFit/>
-          </a:bodyPr>
-          <a:lstStyle/>
-          <a:p>
-            <a:pPr lvl="1" algn="l">
-              <a:lnSpc>
-                <a:spcPct val="100000"/>
-              </a:lnSpc>
-              <a:spcAft>
-                <a:spcPts val="900"/>
-              </a:spcAft>
-              <a:defRPr sz="1800" b="0">
-                <a:solidFill>
-                  <a:srgbClr val="222222"/>
-                </a:solidFill>
-                <a:latin typeface="Calibri"/>
-              </a:defRPr>
-            </a:pPr>
-            <a:r>
-              <a:rPr sz="1800" b="0">
-                <a:solidFill>
-                  <a:srgbClr val="222222"/>
-                </a:solidFill>
-                <a:latin typeface="Calibri"/>
-              </a:rPr>
-              <a:t>When an address will not work, print it at BOTH ends and compare them character by character.</a:t>
-            </a:r>
-          </a:p>
-          <a:p>
-            <a:pPr lvl="1" algn="l">
-              <a:lnSpc>
-                <a:spcPct val="100000"/>
-              </a:lnSpc>
-              <a:spcAft>
-                <a:spcPts val="900"/>
-              </a:spcAft>
-              <a:defRPr sz="1800" b="0">
-                <a:solidFill>
-                  <a:srgbClr val="222222"/>
-                </a:solidFill>
-                <a:latin typeface="Calibri"/>
-              </a:defRPr>
-            </a:pPr>
-            <a:r>
-              <a:rPr sz="1800" b="0">
-                <a:solidFill>
-                  <a:srgbClr val="222222"/>
-                </a:solidFill>
-                <a:latin typeface="Calibri"/>
-              </a:rPr>
-              <a:t>Byte order is a real category of bug. It is why network protocols specify it explicitly, and why the phrase big-endian exists.</a:t>
-            </a:r>
-          </a:p>
-        </p:txBody>
-      </p:sp>
-      <p:sp>
-        <p:nvSpPr>
-          <p:cNvPr id="7" name="Rounded Rectangle 6"/>
-          <p:cNvSpPr/>
-          <p:nvPr/>
-        </p:nvSpPr>
-        <p:spPr>
-          <a:xfrm>
-            <a:off x="502920" y="5303520"/>
-            <a:ext cx="11185855" cy="960120"/>
-          </a:xfrm>
-          <a:prstGeom prst="roundRect">
-            <a:avLst>
-              <a:gd name="adj" fmla="val 4000"/>
-            </a:avLst>
-          </a:prstGeom>
-          <a:solidFill>
-            <a:srgbClr val="EEF3F8"/>
-          </a:solidFill>
-          <a:ln w="12700">
-            <a:solidFill>
-              <a:srgbClr val="0E7C86"/>
-            </a:solidFill>
-          </a:ln>
-          <a:effectLst/>
-        </p:spPr>
-        <p:style>
-          <a:lnRef idx="1">
-            <a:schemeClr val="accent1"/>
-          </a:lnRef>
-          <a:fillRef idx="3">
-            <a:schemeClr val="accent1"/>
-          </a:fillRef>
-          <a:effectRef idx="2">
-            <a:schemeClr val="accent1"/>
-          </a:effectRef>
-          <a:fontRef idx="minor">
-            <a:schemeClr val="lt1"/>
-          </a:fontRef>
-        </p:style>
-        <p:txBody>
-          <a:bodyPr rtlCol="0" anchor="ctr" wrap="square" lIns="164592" rIns="164592" tIns="73152" bIns="73152"/>
-          <a:lstStyle/>
-          <a:p>
-            <a:pPr algn="l"/>
-            <a:r>
-              <a:rPr sz="1300" b="1">
-                <a:solidFill>
-                  <a:srgbClr val="0E7C86"/>
-                </a:solidFill>
-                <a:latin typeface="Calibri"/>
-              </a:rPr>
-              <a:t>KEY POINT   </a:t>
-            </a:r>
-            <a:r>
-              <a:rPr sz="1500">
-                <a:solidFill>
-                  <a:srgbClr val="222222"/>
-                </a:solidFill>
-                <a:latin typeface="Calibri"/>
-              </a:rPr>
-              <a:t>Op 12 prints most significant byte first, which matches every Bluetooth scanner you will compare against.</a:t>
-            </a:r>
-          </a:p>
-        </p:txBody>
-      </p:sp>
-    </p:spTree>
-  </p:cSld>
-  <p:clrMapOvr>
-    <a:masterClrMapping/>
-  </p:clrMapOvr>
-</p:sld>
-</file>
-
-<file path=ppt/slides/slide18.xml><?xml version="1.0" encoding="utf-8"?>
-<p:sld xmlns:a="http://schemas.openxmlformats.org/drawingml/2006/main" xmlns:p="http://schemas.openxmlformats.org/presentationml/2006/main" xmlns:r="http://schemas.openxmlformats.org/officeDocument/2006/relationships">
-  <p:cSld>
-    <p:spTree>
-      <p:nvGrpSpPr>
-        <p:cNvPr id="1" name=""/>
-        <p:cNvGrpSpPr/>
-        <p:nvPr/>
-      </p:nvGrpSpPr>
-      <p:grpSpPr/>
-      <p:sp>
-        <p:nvSpPr>
-          <p:cNvPr id="2" name="Title 1"/>
-          <p:cNvSpPr>
-            <a:spLocks noGrp="1"/>
-          </p:cNvSpPr>
-          <p:nvPr>
-            <p:ph type="title"/>
-          </p:nvPr>
-        </p:nvSpPr>
-        <p:spPr>
-          <a:xfrm>
-            <a:off x="502920" y="274320"/>
-            <a:ext cx="11185855" cy="777240"/>
-          </a:xfrm>
-        </p:spPr>
-        <p:txBody>
-          <a:bodyPr wrap="square" anchor="b"/>
-          <a:lstStyle/>
-          <a:p>
-            <a:pPr algn="l">
-              <a:lnSpc>
-                <a:spcPct val="100000"/>
-              </a:lnSpc>
-              <a:spcAft>
-                <a:spcPts val="0"/>
-              </a:spcAft>
-              <a:defRPr sz="2800" b="1">
-                <a:solidFill>
-                  <a:srgbClr val="1F3A5F"/>
-                </a:solidFill>
-                <a:latin typeface="Calibri"/>
-              </a:defRPr>
-            </a:pPr>
-            <a:r>
-              <a:rPr sz="2800" b="1">
-                <a:solidFill>
-                  <a:srgbClr val="1F3A5F"/>
-                </a:solidFill>
-                <a:latin typeface="Calibri"/>
-              </a:rPr>
-              <a:t>Check yourself</a:t>
-            </a:r>
-          </a:p>
-        </p:txBody>
-      </p:sp>
-      <p:sp>
-        <p:nvSpPr>
-          <p:cNvPr id="3" name="Rectangle 2"/>
-          <p:cNvSpPr/>
-          <p:nvPr/>
-        </p:nvSpPr>
-        <p:spPr>
-          <a:xfrm>
-            <a:off x="502920" y="1097280"/>
-            <a:ext cx="11185855" cy="19050"/>
-          </a:xfrm>
-          <a:prstGeom prst="rect">
-            <a:avLst/>
-          </a:prstGeom>
-          <a:solidFill>
-            <a:srgbClr val="C8D2DE"/>
-          </a:solidFill>
-          <a:ln>
-            <a:noFill/>
-          </a:ln>
-          <a:effectLst/>
-        </p:spPr>
-        <p:style>
-          <a:lnRef idx="1">
-            <a:schemeClr val="accent1"/>
-          </a:lnRef>
-          <a:fillRef idx="3">
-            <a:schemeClr val="accent1"/>
-          </a:fillRef>
-          <a:effectRef idx="2">
-            <a:schemeClr val="accent1"/>
-          </a:effectRef>
-          <a:fontRef idx="minor">
-            <a:schemeClr val="lt1"/>
-          </a:fontRef>
-        </p:style>
-        <p:txBody>
-          <a:bodyPr rtlCol="0" anchor="ctr"/>
-          <a:lstStyle/>
-          <a:p>
-            <a:pPr algn="ctr"/>
-          </a:p>
-        </p:txBody>
-      </p:sp>
-      <p:sp>
-        <p:nvSpPr>
-          <p:cNvPr id="4" name="TextBox 3"/>
-          <p:cNvSpPr txBox="1"/>
-          <p:nvPr/>
-        </p:nvSpPr>
-        <p:spPr>
-          <a:xfrm>
-            <a:off x="502920" y="6382512"/>
-            <a:ext cx="10545775" cy="274320"/>
-          </a:xfrm>
-          <a:prstGeom prst="rect">
-            <a:avLst/>
-          </a:prstGeom>
-          <a:noFill/>
-        </p:spPr>
-        <p:txBody>
-          <a:bodyPr wrap="square" lIns="0" tIns="0">
-            <a:spAutoFit/>
-          </a:bodyPr>
-          <a:lstStyle/>
-          <a:p>
-            <a:pPr algn="l">
-              <a:lnSpc>
-                <a:spcPct val="100000"/>
-              </a:lnSpc>
-              <a:spcAft>
-                <a:spcPts val="0"/>
-              </a:spcAft>
-              <a:defRPr sz="1000" b="0">
-                <a:solidFill>
-                  <a:srgbClr val="666666"/>
-                </a:solidFill>
-                <a:latin typeface="Calibri"/>
-              </a:defRPr>
-            </a:pPr>
-            <a:r>
-              <a:rPr sz="1000" b="0">
-                <a:solidFill>
-                  <a:srgbClr val="666666"/>
-                </a:solidFill>
-                <a:latin typeface="Calibri"/>
-              </a:rPr>
-              <a:t>Pathfinder Advanced - Op Program 12  |  Lesson 3</a:t>
-            </a:r>
-          </a:p>
-        </p:txBody>
-      </p:sp>
-      <p:sp>
-        <p:nvSpPr>
-          <p:cNvPr id="5" name="TextBox 4"/>
-          <p:cNvSpPr txBox="1"/>
-          <p:nvPr/>
-        </p:nvSpPr>
-        <p:spPr>
-          <a:xfrm>
-            <a:off x="11231575" y="6382512"/>
-            <a:ext cx="457200" cy="274320"/>
-          </a:xfrm>
-          <a:prstGeom prst="rect">
-            <a:avLst/>
-          </a:prstGeom>
-          <a:noFill/>
-        </p:spPr>
-        <p:txBody>
-          <a:bodyPr wrap="square" lIns="0" tIns="0">
-            <a:spAutoFit/>
-          </a:bodyPr>
-          <a:lstStyle/>
-          <a:p>
-            <a:pPr algn="r">
-              <a:lnSpc>
-                <a:spcPct val="100000"/>
-              </a:lnSpc>
-              <a:spcAft>
-                <a:spcPts val="0"/>
-              </a:spcAft>
-              <a:defRPr sz="1000" b="0">
-                <a:solidFill>
-                  <a:srgbClr val="666666"/>
-                </a:solidFill>
-                <a:latin typeface="Calibri"/>
-              </a:defRPr>
-            </a:pPr>
-            <a:r>
-              <a:rPr sz="1000" b="0">
-                <a:solidFill>
-                  <a:srgbClr val="666666"/>
-                </a:solidFill>
-                <a:latin typeface="Calibri"/>
-              </a:rPr>
-              <a:t>17</a:t>
-            </a:r>
-          </a:p>
-        </p:txBody>
-      </p:sp>
-      <p:sp>
-        <p:nvSpPr>
-          <p:cNvPr id="6" name="TextBox 5"/>
-          <p:cNvSpPr txBox="1"/>
-          <p:nvPr/>
-        </p:nvSpPr>
-        <p:spPr>
-          <a:xfrm>
-            <a:off x="502920" y="1188720"/>
-            <a:ext cx="11185855" cy="411480"/>
-          </a:xfrm>
-          <a:prstGeom prst="rect">
-            <a:avLst/>
-          </a:prstGeom>
-          <a:noFill/>
-        </p:spPr>
-        <p:txBody>
-          <a:bodyPr wrap="square" lIns="0" tIns="0" rIns="0" bIns="0">
-            <a:spAutoFit/>
-          </a:bodyPr>
-          <a:lstStyle/>
-          <a:p>
-            <a:pPr algn="l">
-              <a:lnSpc>
-                <a:spcPct val="100000"/>
-              </a:lnSpc>
-              <a:spcAft>
-                <a:spcPts val="600"/>
-              </a:spcAft>
-              <a:defRPr sz="1600" b="0">
-                <a:solidFill>
-                  <a:srgbClr val="666666"/>
-                </a:solidFill>
-                <a:latin typeface="Calibri"/>
-              </a:defRPr>
-            </a:pPr>
-            <a:r>
-              <a:rPr sz="1600" b="0">
-                <a:solidFill>
-                  <a:srgbClr val="666666"/>
-                </a:solidFill>
-                <a:latin typeface="Calibri"/>
-              </a:rPr>
-              <a:t>Next week: never block, and never redraw for nothing.</a:t>
-            </a:r>
-          </a:p>
-        </p:txBody>
-      </p:sp>
-      <p:sp>
-        <p:nvSpPr>
-          <p:cNvPr id="7" name="TextBox 6"/>
-          <p:cNvSpPr txBox="1"/>
-          <p:nvPr/>
-        </p:nvSpPr>
-        <p:spPr>
-          <a:xfrm>
-            <a:off x="502920" y="1664208"/>
-            <a:ext cx="11185855" cy="4599432"/>
-          </a:xfrm>
-          <a:prstGeom prst="rect">
-            <a:avLst/>
-          </a:prstGeom>
-          <a:noFill/>
-        </p:spPr>
-        <p:txBody>
-          <a:bodyPr wrap="square" lIns="0" tIns="0" rIns="0" bIns="0">
-            <a:spAutoFit/>
-          </a:bodyPr>
-          <a:lstStyle/>
-          <a:p>
-            <a:pPr algn="l">
-              <a:lnSpc>
-                <a:spcPct val="100000"/>
-              </a:lnSpc>
-              <a:spcAft>
-                <a:spcPts val="1000"/>
-              </a:spcAft>
-              <a:defRPr sz="1800" b="0">
-                <a:solidFill>
-                  <a:srgbClr val="222222"/>
-                </a:solidFill>
-                <a:latin typeface="Calibri"/>
-              </a:defRPr>
-            </a:pPr>
-            <a:r>
-              <a:rPr sz="1800" b="0">
-                <a:solidFill>
-                  <a:srgbClr val="222222"/>
-                </a:solidFill>
-                <a:latin typeface="Calibri"/>
-              </a:rPr>
-              <a:t>1.  What is a callback, and who calls it?</a:t>
-            </a:r>
-          </a:p>
-          <a:p>
-            <a:pPr algn="l">
-              <a:lnSpc>
-                <a:spcPct val="100000"/>
-              </a:lnSpc>
-              <a:spcAft>
-                <a:spcPts val="1000"/>
-              </a:spcAft>
-              <a:defRPr sz="1800" b="0">
-                <a:solidFill>
-                  <a:srgbClr val="222222"/>
-                </a:solidFill>
-                <a:latin typeface="Calibri"/>
-              </a:defRPr>
-            </a:pPr>
-            <a:r>
-              <a:rPr sz="1800" b="0">
-                <a:solidFill>
-                  <a:srgbClr val="222222"/>
-                </a:solidFill>
-                <a:latin typeface="Calibri"/>
-              </a:rPr>
-              <a:t>2.  Why must the allowlist calls come after BP32.setup()?</a:t>
-            </a:r>
-          </a:p>
-          <a:p>
-            <a:pPr algn="l">
-              <a:lnSpc>
-                <a:spcPct val="100000"/>
-              </a:lnSpc>
-              <a:spcAft>
-                <a:spcPts val="1000"/>
-              </a:spcAft>
-              <a:defRPr sz="1800" b="0">
-                <a:solidFill>
-                  <a:srgbClr val="222222"/>
-                </a:solidFill>
-                <a:latin typeface="Calibri"/>
-              </a:defRPr>
-            </a:pPr>
-            <a:r>
-              <a:rPr sz="1800" b="0">
-                <a:solidFill>
-                  <a:srgbClr val="222222"/>
-                </a:solidFill>
-                <a:latin typeface="Calibri"/>
-              </a:rPr>
-              <a:t>3.  Why rebuild the allowlist every boot instead of adding to it?</a:t>
-            </a:r>
-          </a:p>
-          <a:p>
-            <a:pPr algn="l">
-              <a:lnSpc>
-                <a:spcPct val="100000"/>
-              </a:lnSpc>
-              <a:spcAft>
-                <a:spcPts val="1000"/>
-              </a:spcAft>
-              <a:defRPr sz="1800" b="0">
-                <a:solidFill>
-                  <a:srgbClr val="222222"/>
-                </a:solidFill>
-                <a:latin typeface="Calibri"/>
-              </a:defRPr>
-            </a:pPr>
-            <a:r>
-              <a:rPr sz="1800" b="0">
-                <a:solidFill>
-                  <a:srgbClr val="222222"/>
-                </a:solidFill>
-                <a:latin typeface="Calibri"/>
-              </a:rPr>
-              <a:t>4.  Why does Op 12 leave new Bluetooth connections enabled?</a:t>
-            </a:r>
-          </a:p>
-          <a:p>
-            <a:pPr algn="l">
-              <a:lnSpc>
-                <a:spcPct val="100000"/>
-              </a:lnSpc>
-              <a:spcAft>
-                <a:spcPts val="1000"/>
-              </a:spcAft>
-              <a:defRPr sz="1800" b="0">
-                <a:solidFill>
-                  <a:srgbClr val="222222"/>
-                </a:solidFill>
-                <a:latin typeface="Calibri"/>
-              </a:defRPr>
-            </a:pPr>
-            <a:r>
-              <a:rPr sz="1800" b="0">
-                <a:solidFill>
-                  <a:srgbClr val="222222"/>
-                </a:solidFill>
-                <a:latin typeface="Calibri"/>
-              </a:rPr>
-              <a:t>5.  What actually happens when you call EEPROM.put()? When does the flash get written?</a:t>
-            </a:r>
-          </a:p>
-          <a:p>
-            <a:pPr algn="l">
-              <a:lnSpc>
-                <a:spcPct val="100000"/>
-              </a:lnSpc>
-              <a:spcAft>
-                <a:spcPts val="1000"/>
-              </a:spcAft>
-              <a:defRPr sz="1800" b="0">
-                <a:solidFill>
-                  <a:srgbClr val="222222"/>
-                </a:solidFill>
-                <a:latin typeface="Calibri"/>
-              </a:defRPr>
-            </a:pPr>
-            <a:r>
-              <a:rPr sz="1800" b="0">
-                <a:solidFill>
-                  <a:srgbClr val="222222"/>
-                </a:solidFill>
-                <a:latin typeface="Calibri"/>
-              </a:rPr>
-              <a:t>6.  Why must you never call EEPROM.commit() from loop()?</a:t>
-            </a:r>
-          </a:p>
-          <a:p>
-            <a:pPr algn="l">
-              <a:lnSpc>
-                <a:spcPct val="100000"/>
-              </a:lnSpc>
-              <a:spcAft>
-                <a:spcPts val="1000"/>
-              </a:spcAft>
-              <a:defRPr sz="1800" b="0">
-                <a:solidFill>
-                  <a:srgbClr val="222222"/>
-                </a:solidFill>
-                <a:latin typeface="Calibri"/>
-              </a:defRPr>
-            </a:pPr>
-            <a:r>
-              <a:rPr sz="1800" b="0">
-                <a:solidFill>
-                  <a:srgbClr val="222222"/>
-                </a:solidFill>
-                <a:latin typeface="Calibri"/>
-              </a:rPr>
-              <a:t>7.  What is the magic byte for, and why is it not sufficient on its own?</a:t>
-            </a:r>
-          </a:p>
-          <a:p>
-            <a:pPr algn="l">
-              <a:lnSpc>
-                <a:spcPct val="100000"/>
-              </a:lnSpc>
-              <a:spcAft>
-                <a:spcPts val="1000"/>
-              </a:spcAft>
-              <a:defRPr sz="1800" b="0">
-                <a:solidFill>
-                  <a:srgbClr val="222222"/>
-                </a:solidFill>
-                <a:latin typeface="Calibri"/>
-              </a:defRPr>
-            </a:pPr>
-            <a:r>
-              <a:rPr sz="1800" b="0">
-                <a:solidFill>
-                  <a:srgbClr val="222222"/>
-                </a:solidFill>
-                <a:latin typeface="Calibri"/>
-              </a:rPr>
-              <a:t>8.  A vehicle refuses its own controller after a power cycle. Give two possible causes.</a:t>
             </a:r>
           </a:p>
         </p:txBody>
@@ -8377,7 +9011,7 @@
                 </a:solidFill>
                 <a:latin typeface="Calibri"/>
               </a:rPr>
-              <a:t>Today, in order</a:t>
+              <a:t>What you will be able to do by the end</a:t>
             </a:r>
           </a:p>
         </p:txBody>
@@ -8522,6 +9156,1224 @@
           </a:p>
         </p:txBody>
       </p:sp>
+      <p:sp>
+        <p:nvSpPr>
+          <p:cNvPr id="6" name="TextBox 5"/>
+          <p:cNvSpPr txBox="1"/>
+          <p:nvPr/>
+        </p:nvSpPr>
+        <p:spPr>
+          <a:xfrm>
+            <a:off x="502920" y="1188720"/>
+            <a:ext cx="11185855" cy="502920"/>
+          </a:xfrm>
+          <a:prstGeom prst="rect">
+            <a:avLst/>
+          </a:prstGeom>
+          <a:noFill/>
+        </p:spPr>
+        <p:txBody>
+          <a:bodyPr wrap="square" lIns="0" tIns="0" rIns="0" bIns="0">
+            <a:spAutoFit/>
+          </a:bodyPr>
+          <a:lstStyle/>
+          <a:p>
+            <a:pPr algn="l">
+              <a:lnSpc>
+                <a:spcPct val="100000"/>
+              </a:lnSpc>
+              <a:spcAft>
+                <a:spcPts val="600"/>
+              </a:spcAft>
+              <a:defRPr sz="1900" b="1">
+                <a:solidFill>
+                  <a:srgbClr val="0E7C86"/>
+                </a:solidFill>
+                <a:latin typeface="Calibri"/>
+              </a:defRPr>
+            </a:pPr>
+            <a:r>
+              <a:rPr sz="1900" b="1">
+                <a:solidFill>
+                  <a:srgbClr val="0E7C86"/>
+                </a:solidFill>
+                <a:latin typeface="Calibri"/>
+              </a:rPr>
+              <a:t>By the end of this lesson you will be able to:</a:t>
+            </a:r>
+          </a:p>
+        </p:txBody>
+      </p:sp>
+      <p:sp>
+        <p:nvSpPr>
+          <p:cNvPr id="7" name="TextBox 6"/>
+          <p:cNvSpPr txBox="1"/>
+          <p:nvPr/>
+        </p:nvSpPr>
+        <p:spPr>
+          <a:xfrm>
+            <a:off x="502920" y="1737360"/>
+            <a:ext cx="11185855" cy="4526280"/>
+          </a:xfrm>
+          <a:prstGeom prst="rect">
+            <a:avLst/>
+          </a:prstGeom>
+          <a:noFill/>
+        </p:spPr>
+        <p:txBody>
+          <a:bodyPr wrap="square" lIns="0" tIns="0" rIns="0" bIns="0">
+            <a:spAutoFit/>
+          </a:bodyPr>
+          <a:lstStyle/>
+          <a:p>
+            <a:pPr algn="l">
+              <a:lnSpc>
+                <a:spcPct val="100000"/>
+              </a:lnSpc>
+              <a:spcAft>
+                <a:spcPts val="1300"/>
+              </a:spcAft>
+              <a:defRPr sz="1900" b="0">
+                <a:solidFill>
+                  <a:srgbClr val="222222"/>
+                </a:solidFill>
+                <a:latin typeface="Calibri"/>
+              </a:defRPr>
+            </a:pPr>
+            <a:r>
+              <a:rPr sz="1900" b="0">
+                <a:solidFill>
+                  <a:srgbClr val="222222"/>
+                </a:solidFill>
+                <a:latin typeface="Calibri"/>
+              </a:rPr>
+              <a:t>1.   Explain what a callback is and when it runs</a:t>
+            </a:r>
+          </a:p>
+          <a:p>
+            <a:pPr algn="l">
+              <a:lnSpc>
+                <a:spcPct val="100000"/>
+              </a:lnSpc>
+              <a:spcAft>
+                <a:spcPts val="1300"/>
+              </a:spcAft>
+              <a:defRPr sz="1900" b="0">
+                <a:solidFill>
+                  <a:srgbClr val="222222"/>
+                </a:solidFill>
+                <a:latin typeface="Calibri"/>
+              </a:defRPr>
+            </a:pPr>
+            <a:r>
+              <a:rPr sz="1900" b="0">
+                <a:solidFill>
+                  <a:srgbClr val="222222"/>
+                </a:solidFill>
+                <a:latin typeface="Calibri"/>
+              </a:rPr>
+              <a:t>2.   Configure a Bluetooth allowlist correctly, in the right order</a:t>
+            </a:r>
+          </a:p>
+          <a:p>
+            <a:pPr algn="l">
+              <a:lnSpc>
+                <a:spcPct val="100000"/>
+              </a:lnSpc>
+              <a:spcAft>
+                <a:spcPts val="1300"/>
+              </a:spcAft>
+              <a:defRPr sz="1900" b="0">
+                <a:solidFill>
+                  <a:srgbClr val="222222"/>
+                </a:solidFill>
+                <a:latin typeface="Calibri"/>
+              </a:defRPr>
+            </a:pPr>
+            <a:r>
+              <a:rPr sz="1900" b="0">
+                <a:solidFill>
+                  <a:srgbClr val="222222"/>
+                </a:solidFill>
+                <a:latin typeface="Calibri"/>
+              </a:rPr>
+              <a:t>3.   Say what EEPROM.commit() actually does on an ESP32, and why it must not be called from loop()</a:t>
+            </a:r>
+          </a:p>
+          <a:p>
+            <a:pPr algn="l">
+              <a:lnSpc>
+                <a:spcPct val="100000"/>
+              </a:lnSpc>
+              <a:spcAft>
+                <a:spcPts val="1300"/>
+              </a:spcAft>
+              <a:defRPr sz="1900" b="0">
+                <a:solidFill>
+                  <a:srgbClr val="222222"/>
+                </a:solidFill>
+                <a:latin typeface="Calibri"/>
+              </a:defRPr>
+            </a:pPr>
+            <a:r>
+              <a:rPr sz="1900" b="0">
+                <a:solidFill>
+                  <a:srgbClr val="222222"/>
+                </a:solidFill>
+                <a:latin typeface="Calibri"/>
+              </a:rPr>
+              <a:t>4.   Design a storage map with a validity marker, and load it defensively</a:t>
+            </a:r>
+          </a:p>
+          <a:p>
+            <a:pPr algn="l">
+              <a:lnSpc>
+                <a:spcPct val="100000"/>
+              </a:lnSpc>
+              <a:spcAft>
+                <a:spcPts val="1300"/>
+              </a:spcAft>
+              <a:defRPr sz="1900" b="0">
+                <a:solidFill>
+                  <a:srgbClr val="222222"/>
+                </a:solidFill>
+                <a:latin typeface="Calibri"/>
+              </a:defRPr>
+            </a:pPr>
+            <a:r>
+              <a:rPr sz="1900" b="0">
+                <a:solidFill>
+                  <a:srgbClr val="222222"/>
+                </a:solidFill>
+                <a:latin typeface="Calibri"/>
+              </a:rPr>
+              <a:t>5.   Walk through the full pairing workflow end to end</a:t>
+            </a:r>
+          </a:p>
+        </p:txBody>
+      </p:sp>
+    </p:spTree>
+  </p:cSld>
+  <p:clrMapOvr>
+    <a:masterClrMapping/>
+  </p:clrMapOvr>
+</p:sld>
+</file>
+
+<file path=ppt/slides/slide20.xml><?xml version="1.0" encoding="utf-8"?>
+<p:sld xmlns:a="http://schemas.openxmlformats.org/drawingml/2006/main" xmlns:p="http://schemas.openxmlformats.org/presentationml/2006/main" xmlns:r="http://schemas.openxmlformats.org/officeDocument/2006/relationships">
+  <p:cSld>
+    <p:spTree>
+      <p:nvGrpSpPr>
+        <p:cNvPr id="1" name=""/>
+        <p:cNvGrpSpPr/>
+        <p:nvPr/>
+      </p:nvGrpSpPr>
+      <p:grpSpPr/>
+      <p:sp>
+        <p:nvSpPr>
+          <p:cNvPr id="2" name="Title 1"/>
+          <p:cNvSpPr>
+            <a:spLocks noGrp="1"/>
+          </p:cNvSpPr>
+          <p:nvPr>
+            <p:ph type="title"/>
+          </p:nvPr>
+        </p:nvSpPr>
+        <p:spPr>
+          <a:xfrm>
+            <a:off x="502920" y="274320"/>
+            <a:ext cx="11185855" cy="777240"/>
+          </a:xfrm>
+        </p:spPr>
+        <p:txBody>
+          <a:bodyPr wrap="square" anchor="b"/>
+          <a:lstStyle/>
+          <a:p>
+            <a:pPr algn="l">
+              <a:lnSpc>
+                <a:spcPct val="100000"/>
+              </a:lnSpc>
+              <a:spcAft>
+                <a:spcPts val="0"/>
+              </a:spcAft>
+              <a:defRPr sz="2800" b="1">
+                <a:solidFill>
+                  <a:srgbClr val="1F3A5F"/>
+                </a:solidFill>
+                <a:latin typeface="Calibri"/>
+              </a:defRPr>
+            </a:pPr>
+            <a:r>
+              <a:rPr sz="2800" b="1">
+                <a:solidFill>
+                  <a:srgbClr val="1F3A5F"/>
+                </a:solidFill>
+                <a:latin typeface="Calibri"/>
+              </a:rPr>
+              <a:t>One more bug worth knowing about  (continued)</a:t>
+            </a:r>
+          </a:p>
+        </p:txBody>
+      </p:sp>
+      <p:sp>
+        <p:nvSpPr>
+          <p:cNvPr id="3" name="Rectangle 2"/>
+          <p:cNvSpPr/>
+          <p:nvPr/>
+        </p:nvSpPr>
+        <p:spPr>
+          <a:xfrm>
+            <a:off x="502920" y="1097280"/>
+            <a:ext cx="11185855" cy="19050"/>
+          </a:xfrm>
+          <a:prstGeom prst="rect">
+            <a:avLst/>
+          </a:prstGeom>
+          <a:solidFill>
+            <a:srgbClr val="C8D2DE"/>
+          </a:solidFill>
+          <a:ln>
+            <a:noFill/>
+          </a:ln>
+          <a:effectLst/>
+        </p:spPr>
+        <p:style>
+          <a:lnRef idx="1">
+            <a:schemeClr val="accent1"/>
+          </a:lnRef>
+          <a:fillRef idx="3">
+            <a:schemeClr val="accent1"/>
+          </a:fillRef>
+          <a:effectRef idx="2">
+            <a:schemeClr val="accent1"/>
+          </a:effectRef>
+          <a:fontRef idx="minor">
+            <a:schemeClr val="lt1"/>
+          </a:fontRef>
+        </p:style>
+        <p:txBody>
+          <a:bodyPr rtlCol="0" anchor="ctr"/>
+          <a:lstStyle/>
+          <a:p>
+            <a:pPr algn="ctr"/>
+          </a:p>
+        </p:txBody>
+      </p:sp>
+      <p:sp>
+        <p:nvSpPr>
+          <p:cNvPr id="4" name="TextBox 3"/>
+          <p:cNvSpPr txBox="1"/>
+          <p:nvPr/>
+        </p:nvSpPr>
+        <p:spPr>
+          <a:xfrm>
+            <a:off x="502920" y="6382512"/>
+            <a:ext cx="10545775" cy="274320"/>
+          </a:xfrm>
+          <a:prstGeom prst="rect">
+            <a:avLst/>
+          </a:prstGeom>
+          <a:noFill/>
+        </p:spPr>
+        <p:txBody>
+          <a:bodyPr wrap="square" lIns="0" tIns="0">
+            <a:spAutoFit/>
+          </a:bodyPr>
+          <a:lstStyle/>
+          <a:p>
+            <a:pPr algn="l">
+              <a:lnSpc>
+                <a:spcPct val="100000"/>
+              </a:lnSpc>
+              <a:spcAft>
+                <a:spcPts val="0"/>
+              </a:spcAft>
+              <a:defRPr sz="1000" b="0">
+                <a:solidFill>
+                  <a:srgbClr val="666666"/>
+                </a:solidFill>
+                <a:latin typeface="Calibri"/>
+              </a:defRPr>
+            </a:pPr>
+            <a:r>
+              <a:rPr sz="1000" b="0">
+                <a:solidFill>
+                  <a:srgbClr val="666666"/>
+                </a:solidFill>
+                <a:latin typeface="Calibri"/>
+              </a:rPr>
+              <a:t>Pathfinder Advanced - Op Program 12  |  Lesson 3</a:t>
+            </a:r>
+          </a:p>
+        </p:txBody>
+      </p:sp>
+      <p:sp>
+        <p:nvSpPr>
+          <p:cNvPr id="5" name="TextBox 4"/>
+          <p:cNvSpPr txBox="1"/>
+          <p:nvPr/>
+        </p:nvSpPr>
+        <p:spPr>
+          <a:xfrm>
+            <a:off x="11231575" y="6382512"/>
+            <a:ext cx="457200" cy="274320"/>
+          </a:xfrm>
+          <a:prstGeom prst="rect">
+            <a:avLst/>
+          </a:prstGeom>
+          <a:noFill/>
+        </p:spPr>
+        <p:txBody>
+          <a:bodyPr wrap="square" lIns="0" tIns="0">
+            <a:spAutoFit/>
+          </a:bodyPr>
+          <a:lstStyle/>
+          <a:p>
+            <a:pPr algn="r">
+              <a:lnSpc>
+                <a:spcPct val="100000"/>
+              </a:lnSpc>
+              <a:spcAft>
+                <a:spcPts val="0"/>
+              </a:spcAft>
+              <a:defRPr sz="1000" b="0">
+                <a:solidFill>
+                  <a:srgbClr val="666666"/>
+                </a:solidFill>
+                <a:latin typeface="Calibri"/>
+              </a:defRPr>
+            </a:pPr>
+            <a:r>
+              <a:rPr sz="1000" b="0">
+                <a:solidFill>
+                  <a:srgbClr val="666666"/>
+                </a:solidFill>
+                <a:latin typeface="Calibri"/>
+              </a:rPr>
+              <a:t>19</a:t>
+            </a:r>
+          </a:p>
+        </p:txBody>
+      </p:sp>
+      <p:sp>
+        <p:nvSpPr>
+          <p:cNvPr id="6" name="TextBox 5"/>
+          <p:cNvSpPr txBox="1"/>
+          <p:nvPr/>
+        </p:nvSpPr>
+        <p:spPr>
+          <a:xfrm>
+            <a:off x="502920" y="1188720"/>
+            <a:ext cx="11185855" cy="4023360"/>
+          </a:xfrm>
+          <a:prstGeom prst="rect">
+            <a:avLst/>
+          </a:prstGeom>
+          <a:noFill/>
+        </p:spPr>
+        <p:txBody>
+          <a:bodyPr wrap="square" lIns="0" tIns="0" rIns="0" bIns="0">
+            <a:spAutoFit/>
+          </a:bodyPr>
+          <a:lstStyle/>
+          <a:p>
+            <a:pPr lvl="1" algn="l">
+              <a:lnSpc>
+                <a:spcPct val="100000"/>
+              </a:lnSpc>
+              <a:spcAft>
+                <a:spcPts val="900"/>
+              </a:spcAft>
+              <a:defRPr sz="1800" b="0">
+                <a:solidFill>
+                  <a:srgbClr val="222222"/>
+                </a:solidFill>
+                <a:latin typeface="Calibri"/>
+              </a:defRPr>
+            </a:pPr>
+            <a:r>
+              <a:rPr sz="1800" b="0">
+                <a:solidFill>
+                  <a:srgbClr val="222222"/>
+                </a:solidFill>
+                <a:latin typeface="Calibri"/>
+              </a:rPr>
+              <a:t>When an address will not work, print it at BOTH ends and compare them character by character.</a:t>
+            </a:r>
+          </a:p>
+          <a:p>
+            <a:pPr lvl="1" algn="l">
+              <a:lnSpc>
+                <a:spcPct val="100000"/>
+              </a:lnSpc>
+              <a:spcAft>
+                <a:spcPts val="900"/>
+              </a:spcAft>
+              <a:defRPr sz="1800" b="0">
+                <a:solidFill>
+                  <a:srgbClr val="222222"/>
+                </a:solidFill>
+                <a:latin typeface="Calibri"/>
+              </a:defRPr>
+            </a:pPr>
+            <a:r>
+              <a:rPr sz="1800" b="0">
+                <a:solidFill>
+                  <a:srgbClr val="222222"/>
+                </a:solidFill>
+                <a:latin typeface="Calibri"/>
+              </a:rPr>
+              <a:t>Byte order is a real category of bug. It is why network protocols specify it explicitly, and why the phrase big-endian exists.</a:t>
+            </a:r>
+          </a:p>
+        </p:txBody>
+      </p:sp>
+      <p:sp>
+        <p:nvSpPr>
+          <p:cNvPr id="7" name="Rounded Rectangle 6"/>
+          <p:cNvSpPr/>
+          <p:nvPr/>
+        </p:nvSpPr>
+        <p:spPr>
+          <a:xfrm>
+            <a:off x="502920" y="5303520"/>
+            <a:ext cx="11185855" cy="960120"/>
+          </a:xfrm>
+          <a:prstGeom prst="roundRect">
+            <a:avLst>
+              <a:gd name="adj" fmla="val 4000"/>
+            </a:avLst>
+          </a:prstGeom>
+          <a:solidFill>
+            <a:srgbClr val="EEF3F8"/>
+          </a:solidFill>
+          <a:ln w="12700">
+            <a:solidFill>
+              <a:srgbClr val="0E7C86"/>
+            </a:solidFill>
+          </a:ln>
+          <a:effectLst/>
+        </p:spPr>
+        <p:style>
+          <a:lnRef idx="1">
+            <a:schemeClr val="accent1"/>
+          </a:lnRef>
+          <a:fillRef idx="3">
+            <a:schemeClr val="accent1"/>
+          </a:fillRef>
+          <a:effectRef idx="2">
+            <a:schemeClr val="accent1"/>
+          </a:effectRef>
+          <a:fontRef idx="minor">
+            <a:schemeClr val="lt1"/>
+          </a:fontRef>
+        </p:style>
+        <p:txBody>
+          <a:bodyPr rtlCol="0" anchor="ctr" wrap="square" lIns="164592" rIns="164592" tIns="73152" bIns="73152"/>
+          <a:lstStyle/>
+          <a:p>
+            <a:pPr algn="l"/>
+            <a:r>
+              <a:rPr sz="1300" b="1">
+                <a:solidFill>
+                  <a:srgbClr val="0E7C86"/>
+                </a:solidFill>
+                <a:latin typeface="Calibri"/>
+              </a:rPr>
+              <a:t>KEY POINT   </a:t>
+            </a:r>
+            <a:r>
+              <a:rPr sz="1500">
+                <a:solidFill>
+                  <a:srgbClr val="222222"/>
+                </a:solidFill>
+                <a:latin typeface="Calibri"/>
+              </a:rPr>
+              <a:t>Op 12 prints most significant byte first, which matches every Bluetooth scanner you will compare against.</a:t>
+            </a:r>
+          </a:p>
+        </p:txBody>
+      </p:sp>
+    </p:spTree>
+  </p:cSld>
+  <p:clrMapOvr>
+    <a:masterClrMapping/>
+  </p:clrMapOvr>
+</p:sld>
+</file>
+
+<file path=ppt/slides/slide21.xml><?xml version="1.0" encoding="utf-8"?>
+<p:sld xmlns:a="http://schemas.openxmlformats.org/drawingml/2006/main" xmlns:p="http://schemas.openxmlformats.org/presentationml/2006/main" xmlns:r="http://schemas.openxmlformats.org/officeDocument/2006/relationships">
+  <p:cSld>
+    <p:spTree>
+      <p:nvGrpSpPr>
+        <p:cNvPr id="1" name=""/>
+        <p:cNvGrpSpPr/>
+        <p:nvPr/>
+      </p:nvGrpSpPr>
+      <p:grpSpPr/>
+      <p:sp>
+        <p:nvSpPr>
+          <p:cNvPr id="2" name="Title 1"/>
+          <p:cNvSpPr>
+            <a:spLocks noGrp="1"/>
+          </p:cNvSpPr>
+          <p:nvPr>
+            <p:ph type="title"/>
+          </p:nvPr>
+        </p:nvSpPr>
+        <p:spPr>
+          <a:xfrm>
+            <a:off x="502920" y="274320"/>
+            <a:ext cx="11185855" cy="777240"/>
+          </a:xfrm>
+        </p:spPr>
+        <p:txBody>
+          <a:bodyPr wrap="square" anchor="b"/>
+          <a:lstStyle/>
+          <a:p>
+            <a:pPr algn="l">
+              <a:lnSpc>
+                <a:spcPct val="100000"/>
+              </a:lnSpc>
+              <a:spcAft>
+                <a:spcPts val="0"/>
+              </a:spcAft>
+              <a:defRPr sz="2800" b="1">
+                <a:solidFill>
+                  <a:srgbClr val="1F3A5F"/>
+                </a:solidFill>
+                <a:latin typeface="Calibri"/>
+              </a:defRPr>
+            </a:pPr>
+            <a:r>
+              <a:rPr sz="2800" b="1">
+                <a:solidFill>
+                  <a:srgbClr val="1F3A5F"/>
+                </a:solidFill>
+                <a:latin typeface="Calibri"/>
+              </a:rPr>
+              <a:t>Check yourself</a:t>
+            </a:r>
+          </a:p>
+        </p:txBody>
+      </p:sp>
+      <p:sp>
+        <p:nvSpPr>
+          <p:cNvPr id="3" name="Rectangle 2"/>
+          <p:cNvSpPr/>
+          <p:nvPr/>
+        </p:nvSpPr>
+        <p:spPr>
+          <a:xfrm>
+            <a:off x="502920" y="1097280"/>
+            <a:ext cx="11185855" cy="19050"/>
+          </a:xfrm>
+          <a:prstGeom prst="rect">
+            <a:avLst/>
+          </a:prstGeom>
+          <a:solidFill>
+            <a:srgbClr val="C8D2DE"/>
+          </a:solidFill>
+          <a:ln>
+            <a:noFill/>
+          </a:ln>
+          <a:effectLst/>
+        </p:spPr>
+        <p:style>
+          <a:lnRef idx="1">
+            <a:schemeClr val="accent1"/>
+          </a:lnRef>
+          <a:fillRef idx="3">
+            <a:schemeClr val="accent1"/>
+          </a:fillRef>
+          <a:effectRef idx="2">
+            <a:schemeClr val="accent1"/>
+          </a:effectRef>
+          <a:fontRef idx="minor">
+            <a:schemeClr val="lt1"/>
+          </a:fontRef>
+        </p:style>
+        <p:txBody>
+          <a:bodyPr rtlCol="0" anchor="ctr"/>
+          <a:lstStyle/>
+          <a:p>
+            <a:pPr algn="ctr"/>
+          </a:p>
+        </p:txBody>
+      </p:sp>
+      <p:sp>
+        <p:nvSpPr>
+          <p:cNvPr id="4" name="TextBox 3"/>
+          <p:cNvSpPr txBox="1"/>
+          <p:nvPr/>
+        </p:nvSpPr>
+        <p:spPr>
+          <a:xfrm>
+            <a:off x="502920" y="6382512"/>
+            <a:ext cx="10545775" cy="274320"/>
+          </a:xfrm>
+          <a:prstGeom prst="rect">
+            <a:avLst/>
+          </a:prstGeom>
+          <a:noFill/>
+        </p:spPr>
+        <p:txBody>
+          <a:bodyPr wrap="square" lIns="0" tIns="0">
+            <a:spAutoFit/>
+          </a:bodyPr>
+          <a:lstStyle/>
+          <a:p>
+            <a:pPr algn="l">
+              <a:lnSpc>
+                <a:spcPct val="100000"/>
+              </a:lnSpc>
+              <a:spcAft>
+                <a:spcPts val="0"/>
+              </a:spcAft>
+              <a:defRPr sz="1000" b="0">
+                <a:solidFill>
+                  <a:srgbClr val="666666"/>
+                </a:solidFill>
+                <a:latin typeface="Calibri"/>
+              </a:defRPr>
+            </a:pPr>
+            <a:r>
+              <a:rPr sz="1000" b="0">
+                <a:solidFill>
+                  <a:srgbClr val="666666"/>
+                </a:solidFill>
+                <a:latin typeface="Calibri"/>
+              </a:rPr>
+              <a:t>Pathfinder Advanced - Op Program 12  |  Lesson 3</a:t>
+            </a:r>
+          </a:p>
+        </p:txBody>
+      </p:sp>
+      <p:sp>
+        <p:nvSpPr>
+          <p:cNvPr id="5" name="TextBox 4"/>
+          <p:cNvSpPr txBox="1"/>
+          <p:nvPr/>
+        </p:nvSpPr>
+        <p:spPr>
+          <a:xfrm>
+            <a:off x="11231575" y="6382512"/>
+            <a:ext cx="457200" cy="274320"/>
+          </a:xfrm>
+          <a:prstGeom prst="rect">
+            <a:avLst/>
+          </a:prstGeom>
+          <a:noFill/>
+        </p:spPr>
+        <p:txBody>
+          <a:bodyPr wrap="square" lIns="0" tIns="0">
+            <a:spAutoFit/>
+          </a:bodyPr>
+          <a:lstStyle/>
+          <a:p>
+            <a:pPr algn="r">
+              <a:lnSpc>
+                <a:spcPct val="100000"/>
+              </a:lnSpc>
+              <a:spcAft>
+                <a:spcPts val="0"/>
+              </a:spcAft>
+              <a:defRPr sz="1000" b="0">
+                <a:solidFill>
+                  <a:srgbClr val="666666"/>
+                </a:solidFill>
+                <a:latin typeface="Calibri"/>
+              </a:defRPr>
+            </a:pPr>
+            <a:r>
+              <a:rPr sz="1000" b="0">
+                <a:solidFill>
+                  <a:srgbClr val="666666"/>
+                </a:solidFill>
+                <a:latin typeface="Calibri"/>
+              </a:rPr>
+              <a:t>20</a:t>
+            </a:r>
+          </a:p>
+        </p:txBody>
+      </p:sp>
+      <p:sp>
+        <p:nvSpPr>
+          <p:cNvPr id="6" name="TextBox 5"/>
+          <p:cNvSpPr txBox="1"/>
+          <p:nvPr/>
+        </p:nvSpPr>
+        <p:spPr>
+          <a:xfrm>
+            <a:off x="502920" y="1188720"/>
+            <a:ext cx="11185855" cy="411480"/>
+          </a:xfrm>
+          <a:prstGeom prst="rect">
+            <a:avLst/>
+          </a:prstGeom>
+          <a:noFill/>
+        </p:spPr>
+        <p:txBody>
+          <a:bodyPr wrap="square" lIns="0" tIns="0" rIns="0" bIns="0">
+            <a:spAutoFit/>
+          </a:bodyPr>
+          <a:lstStyle/>
+          <a:p>
+            <a:pPr algn="l">
+              <a:lnSpc>
+                <a:spcPct val="100000"/>
+              </a:lnSpc>
+              <a:spcAft>
+                <a:spcPts val="600"/>
+              </a:spcAft>
+              <a:defRPr sz="1600" b="0">
+                <a:solidFill>
+                  <a:srgbClr val="666666"/>
+                </a:solidFill>
+                <a:latin typeface="Calibri"/>
+              </a:defRPr>
+            </a:pPr>
+            <a:r>
+              <a:rPr sz="1600" b="0">
+                <a:solidFill>
+                  <a:srgbClr val="666666"/>
+                </a:solidFill>
+                <a:latin typeface="Calibri"/>
+              </a:rPr>
+              <a:t>Next lesson: never block, and never redraw for nothing.</a:t>
+            </a:r>
+          </a:p>
+        </p:txBody>
+      </p:sp>
+      <p:sp>
+        <p:nvSpPr>
+          <p:cNvPr id="7" name="TextBox 6"/>
+          <p:cNvSpPr txBox="1"/>
+          <p:nvPr/>
+        </p:nvSpPr>
+        <p:spPr>
+          <a:xfrm>
+            <a:off x="502920" y="1664208"/>
+            <a:ext cx="11185855" cy="4599432"/>
+          </a:xfrm>
+          <a:prstGeom prst="rect">
+            <a:avLst/>
+          </a:prstGeom>
+          <a:noFill/>
+        </p:spPr>
+        <p:txBody>
+          <a:bodyPr wrap="square" lIns="0" tIns="0" rIns="0" bIns="0">
+            <a:spAutoFit/>
+          </a:bodyPr>
+          <a:lstStyle/>
+          <a:p>
+            <a:pPr algn="l">
+              <a:lnSpc>
+                <a:spcPct val="100000"/>
+              </a:lnSpc>
+              <a:spcAft>
+                <a:spcPts val="1000"/>
+              </a:spcAft>
+              <a:defRPr sz="1800" b="0">
+                <a:solidFill>
+                  <a:srgbClr val="222222"/>
+                </a:solidFill>
+                <a:latin typeface="Calibri"/>
+              </a:defRPr>
+            </a:pPr>
+            <a:r>
+              <a:rPr sz="1800" b="0">
+                <a:solidFill>
+                  <a:srgbClr val="222222"/>
+                </a:solidFill>
+                <a:latin typeface="Calibri"/>
+              </a:rPr>
+              <a:t>1.  What is a callback, and who calls it?</a:t>
+            </a:r>
+          </a:p>
+          <a:p>
+            <a:pPr algn="l">
+              <a:lnSpc>
+                <a:spcPct val="100000"/>
+              </a:lnSpc>
+              <a:spcAft>
+                <a:spcPts val="1000"/>
+              </a:spcAft>
+              <a:defRPr sz="1800" b="0">
+                <a:solidFill>
+                  <a:srgbClr val="222222"/>
+                </a:solidFill>
+                <a:latin typeface="Calibri"/>
+              </a:defRPr>
+            </a:pPr>
+            <a:r>
+              <a:rPr sz="1800" b="0">
+                <a:solidFill>
+                  <a:srgbClr val="222222"/>
+                </a:solidFill>
+                <a:latin typeface="Calibri"/>
+              </a:rPr>
+              <a:t>2.  Why must the allowlist calls come after BP32.setup()?</a:t>
+            </a:r>
+          </a:p>
+          <a:p>
+            <a:pPr algn="l">
+              <a:lnSpc>
+                <a:spcPct val="100000"/>
+              </a:lnSpc>
+              <a:spcAft>
+                <a:spcPts val="1000"/>
+              </a:spcAft>
+              <a:defRPr sz="1800" b="0">
+                <a:solidFill>
+                  <a:srgbClr val="222222"/>
+                </a:solidFill>
+                <a:latin typeface="Calibri"/>
+              </a:defRPr>
+            </a:pPr>
+            <a:r>
+              <a:rPr sz="1800" b="0">
+                <a:solidFill>
+                  <a:srgbClr val="222222"/>
+                </a:solidFill>
+                <a:latin typeface="Calibri"/>
+              </a:rPr>
+              <a:t>3.  Why rebuild the allowlist every boot instead of adding to it?</a:t>
+            </a:r>
+          </a:p>
+          <a:p>
+            <a:pPr algn="l">
+              <a:lnSpc>
+                <a:spcPct val="100000"/>
+              </a:lnSpc>
+              <a:spcAft>
+                <a:spcPts val="1000"/>
+              </a:spcAft>
+              <a:defRPr sz="1800" b="0">
+                <a:solidFill>
+                  <a:srgbClr val="222222"/>
+                </a:solidFill>
+                <a:latin typeface="Calibri"/>
+              </a:defRPr>
+            </a:pPr>
+            <a:r>
+              <a:rPr sz="1800" b="0">
+                <a:solidFill>
+                  <a:srgbClr val="222222"/>
+                </a:solidFill>
+                <a:latin typeface="Calibri"/>
+              </a:rPr>
+              <a:t>4.  Why does Op 12 leave new Bluetooth connections enabled?</a:t>
+            </a:r>
+          </a:p>
+          <a:p>
+            <a:pPr algn="l">
+              <a:lnSpc>
+                <a:spcPct val="100000"/>
+              </a:lnSpc>
+              <a:spcAft>
+                <a:spcPts val="1000"/>
+              </a:spcAft>
+              <a:defRPr sz="1800" b="0">
+                <a:solidFill>
+                  <a:srgbClr val="222222"/>
+                </a:solidFill>
+                <a:latin typeface="Calibri"/>
+              </a:defRPr>
+            </a:pPr>
+            <a:r>
+              <a:rPr sz="1800" b="0">
+                <a:solidFill>
+                  <a:srgbClr val="222222"/>
+                </a:solidFill>
+                <a:latin typeface="Calibri"/>
+              </a:rPr>
+              <a:t>5.  What actually happens when you call EEPROM.put()? When does the flash get written?</a:t>
+            </a:r>
+          </a:p>
+          <a:p>
+            <a:pPr algn="l">
+              <a:lnSpc>
+                <a:spcPct val="100000"/>
+              </a:lnSpc>
+              <a:spcAft>
+                <a:spcPts val="1000"/>
+              </a:spcAft>
+              <a:defRPr sz="1800" b="0">
+                <a:solidFill>
+                  <a:srgbClr val="222222"/>
+                </a:solidFill>
+                <a:latin typeface="Calibri"/>
+              </a:defRPr>
+            </a:pPr>
+            <a:r>
+              <a:rPr sz="1800" b="0">
+                <a:solidFill>
+                  <a:srgbClr val="222222"/>
+                </a:solidFill>
+                <a:latin typeface="Calibri"/>
+              </a:rPr>
+              <a:t>6.  Why must you never call EEPROM.commit() from loop()?</a:t>
+            </a:r>
+          </a:p>
+          <a:p>
+            <a:pPr algn="l">
+              <a:lnSpc>
+                <a:spcPct val="100000"/>
+              </a:lnSpc>
+              <a:spcAft>
+                <a:spcPts val="1000"/>
+              </a:spcAft>
+              <a:defRPr sz="1800" b="0">
+                <a:solidFill>
+                  <a:srgbClr val="222222"/>
+                </a:solidFill>
+                <a:latin typeface="Calibri"/>
+              </a:defRPr>
+            </a:pPr>
+            <a:r>
+              <a:rPr sz="1800" b="0">
+                <a:solidFill>
+                  <a:srgbClr val="222222"/>
+                </a:solidFill>
+                <a:latin typeface="Calibri"/>
+              </a:rPr>
+              <a:t>7.  What is the magic byte for, and why is it not sufficient on its own?</a:t>
+            </a:r>
+          </a:p>
+          <a:p>
+            <a:pPr algn="l">
+              <a:lnSpc>
+                <a:spcPct val="100000"/>
+              </a:lnSpc>
+              <a:spcAft>
+                <a:spcPts val="1000"/>
+              </a:spcAft>
+              <a:defRPr sz="1800" b="0">
+                <a:solidFill>
+                  <a:srgbClr val="222222"/>
+                </a:solidFill>
+                <a:latin typeface="Calibri"/>
+              </a:defRPr>
+            </a:pPr>
+            <a:r>
+              <a:rPr sz="1800" b="0">
+                <a:solidFill>
+                  <a:srgbClr val="222222"/>
+                </a:solidFill>
+                <a:latin typeface="Calibri"/>
+              </a:rPr>
+              <a:t>8.  A vehicle refuses its own controller after a power cycle. Give two possible causes.</a:t>
+            </a:r>
+          </a:p>
+        </p:txBody>
+      </p:sp>
+    </p:spTree>
+  </p:cSld>
+  <p:clrMapOvr>
+    <a:masterClrMapping/>
+  </p:clrMapOvr>
+</p:sld>
+</file>
+
+<file path=ppt/slides/slide3.xml><?xml version="1.0" encoding="utf-8"?>
+<p:sld xmlns:a="http://schemas.openxmlformats.org/drawingml/2006/main" xmlns:p="http://schemas.openxmlformats.org/presentationml/2006/main" xmlns:r="http://schemas.openxmlformats.org/officeDocument/2006/relationships">
+  <p:cSld>
+    <p:spTree>
+      <p:nvGrpSpPr>
+        <p:cNvPr id="1" name=""/>
+        <p:cNvGrpSpPr/>
+        <p:nvPr/>
+      </p:nvGrpSpPr>
+      <p:grpSpPr/>
+      <p:sp>
+        <p:nvSpPr>
+          <p:cNvPr id="2" name="Title 1"/>
+          <p:cNvSpPr>
+            <a:spLocks noGrp="1"/>
+          </p:cNvSpPr>
+          <p:nvPr>
+            <p:ph type="title"/>
+          </p:nvPr>
+        </p:nvSpPr>
+        <p:spPr>
+          <a:xfrm>
+            <a:off x="502920" y="274320"/>
+            <a:ext cx="11185855" cy="777240"/>
+          </a:xfrm>
+        </p:spPr>
+        <p:txBody>
+          <a:bodyPr wrap="square" anchor="b"/>
+          <a:lstStyle/>
+          <a:p>
+            <a:pPr algn="l">
+              <a:lnSpc>
+                <a:spcPct val="100000"/>
+              </a:lnSpc>
+              <a:spcAft>
+                <a:spcPts val="0"/>
+              </a:spcAft>
+              <a:defRPr sz="2800" b="1">
+                <a:solidFill>
+                  <a:srgbClr val="1F3A5F"/>
+                </a:solidFill>
+                <a:latin typeface="Calibri"/>
+              </a:defRPr>
+            </a:pPr>
+            <a:r>
+              <a:rPr sz="2800" b="1">
+                <a:solidFill>
+                  <a:srgbClr val="1F3A5F"/>
+                </a:solidFill>
+                <a:latin typeface="Calibri"/>
+              </a:rPr>
+              <a:t>Today, in order</a:t>
+            </a:r>
+          </a:p>
+        </p:txBody>
+      </p:sp>
+      <p:sp>
+        <p:nvSpPr>
+          <p:cNvPr id="3" name="Rectangle 2"/>
+          <p:cNvSpPr/>
+          <p:nvPr/>
+        </p:nvSpPr>
+        <p:spPr>
+          <a:xfrm>
+            <a:off x="502920" y="1097280"/>
+            <a:ext cx="11185855" cy="19050"/>
+          </a:xfrm>
+          <a:prstGeom prst="rect">
+            <a:avLst/>
+          </a:prstGeom>
+          <a:solidFill>
+            <a:srgbClr val="C8D2DE"/>
+          </a:solidFill>
+          <a:ln>
+            <a:noFill/>
+          </a:ln>
+          <a:effectLst/>
+        </p:spPr>
+        <p:style>
+          <a:lnRef idx="1">
+            <a:schemeClr val="accent1"/>
+          </a:lnRef>
+          <a:fillRef idx="3">
+            <a:schemeClr val="accent1"/>
+          </a:fillRef>
+          <a:effectRef idx="2">
+            <a:schemeClr val="accent1"/>
+          </a:effectRef>
+          <a:fontRef idx="minor">
+            <a:schemeClr val="lt1"/>
+          </a:fontRef>
+        </p:style>
+        <p:txBody>
+          <a:bodyPr rtlCol="0" anchor="ctr"/>
+          <a:lstStyle/>
+          <a:p>
+            <a:pPr algn="ctr"/>
+          </a:p>
+        </p:txBody>
+      </p:sp>
+      <p:sp>
+        <p:nvSpPr>
+          <p:cNvPr id="4" name="TextBox 3"/>
+          <p:cNvSpPr txBox="1"/>
+          <p:nvPr/>
+        </p:nvSpPr>
+        <p:spPr>
+          <a:xfrm>
+            <a:off x="502920" y="6382512"/>
+            <a:ext cx="10545775" cy="274320"/>
+          </a:xfrm>
+          <a:prstGeom prst="rect">
+            <a:avLst/>
+          </a:prstGeom>
+          <a:noFill/>
+        </p:spPr>
+        <p:txBody>
+          <a:bodyPr wrap="square" lIns="0" tIns="0">
+            <a:spAutoFit/>
+          </a:bodyPr>
+          <a:lstStyle/>
+          <a:p>
+            <a:pPr algn="l">
+              <a:lnSpc>
+                <a:spcPct val="100000"/>
+              </a:lnSpc>
+              <a:spcAft>
+                <a:spcPts val="0"/>
+              </a:spcAft>
+              <a:defRPr sz="1000" b="0">
+                <a:solidFill>
+                  <a:srgbClr val="666666"/>
+                </a:solidFill>
+                <a:latin typeface="Calibri"/>
+              </a:defRPr>
+            </a:pPr>
+            <a:r>
+              <a:rPr sz="1000" b="0">
+                <a:solidFill>
+                  <a:srgbClr val="666666"/>
+                </a:solidFill>
+                <a:latin typeface="Calibri"/>
+              </a:rPr>
+              <a:t>Pathfinder Advanced - Op Program 12  |  Lesson 3</a:t>
+            </a:r>
+          </a:p>
+        </p:txBody>
+      </p:sp>
+      <p:sp>
+        <p:nvSpPr>
+          <p:cNvPr id="5" name="TextBox 4"/>
+          <p:cNvSpPr txBox="1"/>
+          <p:nvPr/>
+        </p:nvSpPr>
+        <p:spPr>
+          <a:xfrm>
+            <a:off x="11231575" y="6382512"/>
+            <a:ext cx="457200" cy="274320"/>
+          </a:xfrm>
+          <a:prstGeom prst="rect">
+            <a:avLst/>
+          </a:prstGeom>
+          <a:noFill/>
+        </p:spPr>
+        <p:txBody>
+          <a:bodyPr wrap="square" lIns="0" tIns="0">
+            <a:spAutoFit/>
+          </a:bodyPr>
+          <a:lstStyle/>
+          <a:p>
+            <a:pPr algn="r">
+              <a:lnSpc>
+                <a:spcPct val="100000"/>
+              </a:lnSpc>
+              <a:spcAft>
+                <a:spcPts val="0"/>
+              </a:spcAft>
+              <a:defRPr sz="1000" b="0">
+                <a:solidFill>
+                  <a:srgbClr val="666666"/>
+                </a:solidFill>
+                <a:latin typeface="Calibri"/>
+              </a:defRPr>
+            </a:pPr>
+            <a:r>
+              <a:rPr sz="1000" b="0">
+                <a:solidFill>
+                  <a:srgbClr val="666666"/>
+                </a:solidFill>
+                <a:latin typeface="Calibri"/>
+              </a:rPr>
+              <a:t>2</a:t>
+            </a:r>
+          </a:p>
+        </p:txBody>
+      </p:sp>
       <p:graphicFrame>
         <p:nvGraphicFramePr>
           <p:cNvPr id="6" name="Table 5"/>
@@ -8532,7 +10384,7 @@
         </p:nvGraphicFramePr>
         <p:xfrm>
           <a:off x="502920" y="1188720"/>
-          <a:ext cx="11185854" cy="2686050"/>
+          <a:ext cx="11185854" cy="2984500"/>
         </p:xfrm>
         <a:graphic>
           <a:graphicData uri="http://schemas.openxmlformats.org/drawingml/2006/table">
@@ -8741,7 +10593,7 @@
                           </a:solidFill>
                           <a:latin typeface="Calibri"/>
                         </a:rPr>
-                        <a:t>1:25</a:t>
+                        <a:t>1:20</a:t>
                       </a:r>
                     </a:p>
                   </a:txBody>
@@ -8763,7 +10615,7 @@
                           </a:solidFill>
                           <a:latin typeface="Calibri"/>
                         </a:rPr>
-                        <a:t>Break</a:t>
+                        <a:t>BREAK  (10 minutes)</a:t>
                       </a:r>
                     </a:p>
                   </a:txBody>
@@ -8787,7 +10639,7 @@
                           </a:solidFill>
                           <a:latin typeface="Calibri"/>
                         </a:rPr>
-                        <a:t>1:35</a:t>
+                        <a:t>1:30</a:t>
                       </a:r>
                     </a:p>
                   </a:txBody>
@@ -8833,7 +10685,7 @@
                           </a:solidFill>
                           <a:latin typeface="Calibri"/>
                         </a:rPr>
-                        <a:t>2:00</a:t>
+                        <a:t>1:55</a:t>
                       </a:r>
                     </a:p>
                   </a:txBody>
@@ -8901,7 +10753,7 @@
                           </a:solidFill>
                           <a:latin typeface="Calibri"/>
                         </a:rPr>
-                        <a:t>Upload a3b_eeprom_settings. Pull the cable out</a:t>
+                        <a:t>BREAK  (10 minutes)</a:t>
                       </a:r>
                     </a:p>
                   </a:txBody>
@@ -8925,7 +10777,7 @@
                           </a:solidFill>
                           <a:latin typeface="Calibri"/>
                         </a:rPr>
-                        <a:t>2:45</a:t>
+                        <a:t>2:25</a:t>
                       </a:r>
                     </a:p>
                   </a:txBody>
@@ -8947,7 +10799,7 @@
                           </a:solidFill>
                           <a:latin typeface="Calibri"/>
                         </a:rPr>
-                        <a:t>The full pairing workflow in Op 12</a:t>
+                        <a:t>Upload a3b_eeprom_settings. Pull the cable out</a:t>
                       </a:r>
                     </a:p>
                   </a:txBody>
@@ -8958,474 +10810,56 @@
                   </a:tcPr>
                 </a:tc>
               </a:tr>
+              <a:tr h="298450">
+                <a:tc>
+                  <a:txBody>
+                    <a:bodyPr/>
+                    <a:lstStyle/>
+                    <a:p>
+                      <a:r>
+                        <a:rPr sz="1400">
+                          <a:solidFill>
+                            <a:srgbClr val="222222"/>
+                          </a:solidFill>
+                          <a:latin typeface="Calibri"/>
+                        </a:rPr>
+                        <a:t>2:50</a:t>
+                      </a:r>
+                    </a:p>
+                  </a:txBody>
+                  <a:tcPr marL="73152" marT="18288" marB="18288">
+                    <a:solidFill>
+                      <a:srgbClr val="FFFFFF"/>
+                    </a:solidFill>
+                  </a:tcPr>
+                </a:tc>
+                <a:tc>
+                  <a:txBody>
+                    <a:bodyPr/>
+                    <a:lstStyle/>
+                    <a:p>
+                      <a:r>
+                        <a:rPr sz="1400">
+                          <a:solidFill>
+                            <a:srgbClr val="222222"/>
+                          </a:solidFill>
+                          <a:latin typeface="Calibri"/>
+                        </a:rPr>
+                        <a:t>The full pairing workflow in Op 12</a:t>
+                      </a:r>
+                    </a:p>
+                  </a:txBody>
+                  <a:tcPr marL="73152" marT="18288" marB="18288">
+                    <a:solidFill>
+                      <a:srgbClr val="FFFFFF"/>
+                    </a:solidFill>
+                  </a:tcPr>
+                </a:tc>
+              </a:tr>
             </a:tbl>
           </a:graphicData>
         </a:graphic>
       </p:graphicFrame>
-    </p:spTree>
-  </p:cSld>
-  <p:clrMapOvr>
-    <a:masterClrMapping/>
-  </p:clrMapOvr>
-</p:sld>
-</file>
-
-<file path=ppt/slides/slide3.xml><?xml version="1.0" encoding="utf-8"?>
-<p:sld xmlns:a="http://schemas.openxmlformats.org/drawingml/2006/main" xmlns:p="http://schemas.openxmlformats.org/presentationml/2006/main" xmlns:r="http://schemas.openxmlformats.org/officeDocument/2006/relationships">
-  <p:cSld>
-    <p:spTree>
-      <p:nvGrpSpPr>
-        <p:cNvPr id="1" name=""/>
-        <p:cNvGrpSpPr/>
-        <p:nvPr/>
-      </p:nvGrpSpPr>
-      <p:grpSpPr/>
-      <p:sp>
-        <p:nvSpPr>
-          <p:cNvPr id="2" name="Title 1"/>
-          <p:cNvSpPr>
-            <a:spLocks noGrp="1"/>
-          </p:cNvSpPr>
-          <p:nvPr>
-            <p:ph type="title"/>
-          </p:nvPr>
-        </p:nvSpPr>
-        <p:spPr>
-          <a:xfrm>
-            <a:off x="502920" y="274320"/>
-            <a:ext cx="11185855" cy="777240"/>
-          </a:xfrm>
-        </p:spPr>
-        <p:txBody>
-          <a:bodyPr wrap="square" anchor="b"/>
-          <a:lstStyle/>
-          <a:p>
-            <a:pPr algn="l">
-              <a:lnSpc>
-                <a:spcPct val="100000"/>
-              </a:lnSpc>
-              <a:spcAft>
-                <a:spcPts val="0"/>
-              </a:spcAft>
-              <a:defRPr sz="2800" b="1">
-                <a:solidFill>
-                  <a:srgbClr val="1F3A5F"/>
-                </a:solidFill>
-                <a:latin typeface="Calibri"/>
-              </a:defRPr>
-            </a:pPr>
-            <a:r>
-              <a:rPr sz="2800" b="1">
-                <a:solidFill>
-                  <a:srgbClr val="1F3A5F"/>
-                </a:solidFill>
-                <a:latin typeface="Calibri"/>
-              </a:rPr>
-              <a:t>Callbacks: functions you write and never call</a:t>
-            </a:r>
-          </a:p>
-        </p:txBody>
-      </p:sp>
-      <p:sp>
-        <p:nvSpPr>
-          <p:cNvPr id="3" name="Rectangle 2"/>
-          <p:cNvSpPr/>
-          <p:nvPr/>
-        </p:nvSpPr>
-        <p:spPr>
-          <a:xfrm>
-            <a:off x="502920" y="1097280"/>
-            <a:ext cx="11185855" cy="19050"/>
-          </a:xfrm>
-          <a:prstGeom prst="rect">
-            <a:avLst/>
-          </a:prstGeom>
-          <a:solidFill>
-            <a:srgbClr val="C8D2DE"/>
-          </a:solidFill>
-          <a:ln>
-            <a:noFill/>
-          </a:ln>
-          <a:effectLst/>
-        </p:spPr>
-        <p:style>
-          <a:lnRef idx="1">
-            <a:schemeClr val="accent1"/>
-          </a:lnRef>
-          <a:fillRef idx="3">
-            <a:schemeClr val="accent1"/>
-          </a:fillRef>
-          <a:effectRef idx="2">
-            <a:schemeClr val="accent1"/>
-          </a:effectRef>
-          <a:fontRef idx="minor">
-            <a:schemeClr val="lt1"/>
-          </a:fontRef>
-        </p:style>
-        <p:txBody>
-          <a:bodyPr rtlCol="0" anchor="ctr"/>
-          <a:lstStyle/>
-          <a:p>
-            <a:pPr algn="ctr"/>
-          </a:p>
-        </p:txBody>
-      </p:sp>
-      <p:sp>
-        <p:nvSpPr>
-          <p:cNvPr id="4" name="TextBox 3"/>
-          <p:cNvSpPr txBox="1"/>
-          <p:nvPr/>
-        </p:nvSpPr>
-        <p:spPr>
-          <a:xfrm>
-            <a:off x="502920" y="6382512"/>
-            <a:ext cx="10545775" cy="274320"/>
-          </a:xfrm>
-          <a:prstGeom prst="rect">
-            <a:avLst/>
-          </a:prstGeom>
-          <a:noFill/>
-        </p:spPr>
-        <p:txBody>
-          <a:bodyPr wrap="square" lIns="0" tIns="0">
-            <a:spAutoFit/>
-          </a:bodyPr>
-          <a:lstStyle/>
-          <a:p>
-            <a:pPr algn="l">
-              <a:lnSpc>
-                <a:spcPct val="100000"/>
-              </a:lnSpc>
-              <a:spcAft>
-                <a:spcPts val="0"/>
-              </a:spcAft>
-              <a:defRPr sz="1000" b="0">
-                <a:solidFill>
-                  <a:srgbClr val="666666"/>
-                </a:solidFill>
-                <a:latin typeface="Calibri"/>
-              </a:defRPr>
-            </a:pPr>
-            <a:r>
-              <a:rPr sz="1000" b="0">
-                <a:solidFill>
-                  <a:srgbClr val="666666"/>
-                </a:solidFill>
-                <a:latin typeface="Calibri"/>
-              </a:rPr>
-              <a:t>Pathfinder Advanced - Op Program 12  |  Lesson 3</a:t>
-            </a:r>
-          </a:p>
-        </p:txBody>
-      </p:sp>
-      <p:sp>
-        <p:nvSpPr>
-          <p:cNvPr id="5" name="TextBox 4"/>
-          <p:cNvSpPr txBox="1"/>
-          <p:nvPr/>
-        </p:nvSpPr>
-        <p:spPr>
-          <a:xfrm>
-            <a:off x="11231575" y="6382512"/>
-            <a:ext cx="457200" cy="274320"/>
-          </a:xfrm>
-          <a:prstGeom prst="rect">
-            <a:avLst/>
-          </a:prstGeom>
-          <a:noFill/>
-        </p:spPr>
-        <p:txBody>
-          <a:bodyPr wrap="square" lIns="0" tIns="0">
-            <a:spAutoFit/>
-          </a:bodyPr>
-          <a:lstStyle/>
-          <a:p>
-            <a:pPr algn="r">
-              <a:lnSpc>
-                <a:spcPct val="100000"/>
-              </a:lnSpc>
-              <a:spcAft>
-                <a:spcPts val="0"/>
-              </a:spcAft>
-              <a:defRPr sz="1000" b="0">
-                <a:solidFill>
-                  <a:srgbClr val="666666"/>
-                </a:solidFill>
-                <a:latin typeface="Calibri"/>
-              </a:defRPr>
-            </a:pPr>
-            <a:r>
-              <a:rPr sz="1000" b="0">
-                <a:solidFill>
-                  <a:srgbClr val="666666"/>
-                </a:solidFill>
-                <a:latin typeface="Calibri"/>
-              </a:rPr>
-              <a:t>2</a:t>
-            </a:r>
-          </a:p>
-        </p:txBody>
-      </p:sp>
-      <p:sp>
-        <p:nvSpPr>
-          <p:cNvPr id="6" name="TextBox 5"/>
-          <p:cNvSpPr txBox="1"/>
-          <p:nvPr/>
-        </p:nvSpPr>
-        <p:spPr>
-          <a:xfrm>
-            <a:off x="502920" y="1188720"/>
-            <a:ext cx="11185855" cy="530352"/>
-          </a:xfrm>
-          <a:prstGeom prst="rect">
-            <a:avLst/>
-          </a:prstGeom>
-          <a:noFill/>
-        </p:spPr>
-        <p:txBody>
-          <a:bodyPr wrap="square" lIns="0" tIns="0" rIns="0" bIns="0">
-            <a:spAutoFit/>
-          </a:bodyPr>
-          <a:lstStyle/>
-          <a:p>
-            <a:pPr algn="l">
-              <a:lnSpc>
-                <a:spcPct val="100000"/>
-              </a:lnSpc>
-              <a:spcAft>
-                <a:spcPts val="600"/>
-              </a:spcAft>
-              <a:defRPr sz="1900" b="1">
-                <a:solidFill>
-                  <a:srgbClr val="0E7C86"/>
-                </a:solidFill>
-                <a:latin typeface="Calibri"/>
-              </a:defRPr>
-            </a:pPr>
-            <a:r>
-              <a:rPr sz="1900" b="1">
-                <a:solidFill>
-                  <a:srgbClr val="0E7C86"/>
-                </a:solidFill>
-                <a:latin typeface="Calibri"/>
-              </a:rPr>
-              <a:t>Inversion of control</a:t>
-            </a:r>
-          </a:p>
-        </p:txBody>
-      </p:sp>
-      <p:sp>
-        <p:nvSpPr>
-          <p:cNvPr id="7" name="TextBox 6"/>
-          <p:cNvSpPr txBox="1"/>
-          <p:nvPr/>
-        </p:nvSpPr>
-        <p:spPr>
-          <a:xfrm>
-            <a:off x="502920" y="1755648"/>
-            <a:ext cx="11185855" cy="4507992"/>
-          </a:xfrm>
-          <a:prstGeom prst="rect">
-            <a:avLst/>
-          </a:prstGeom>
-          <a:noFill/>
-        </p:spPr>
-        <p:txBody>
-          <a:bodyPr wrap="square" lIns="0" tIns="0" rIns="0" bIns="0">
-            <a:spAutoFit/>
-          </a:bodyPr>
-          <a:lstStyle/>
-          <a:p>
-            <a:pPr lvl="1" algn="l">
-              <a:lnSpc>
-                <a:spcPct val="100000"/>
-              </a:lnSpc>
-              <a:spcAft>
-                <a:spcPts val="900"/>
-              </a:spcAft>
-              <a:defRPr sz="1800" b="0">
-                <a:solidFill>
-                  <a:srgbClr val="222222"/>
-                </a:solidFill>
-                <a:latin typeface="Calibri"/>
-              </a:defRPr>
-            </a:pPr>
-            <a:r>
-              <a:rPr sz="1800" b="0">
-                <a:solidFill>
-                  <a:srgbClr val="222222"/>
-                </a:solidFill>
-                <a:latin typeface="Calibri"/>
-              </a:rPr>
-              <a:t>BP32.setup(&amp;onConnectedController, &amp;onDisconnectedController);</a:t>
-            </a:r>
-          </a:p>
-          <a:p>
-            <a:pPr algn="l">
-              <a:lnSpc>
-                <a:spcPct val="100000"/>
-              </a:lnSpc>
-              <a:spcAft>
-                <a:spcPts val="900"/>
-              </a:spcAft>
-              <a:defRPr sz="1800" b="0">
-                <a:solidFill>
-                  <a:srgbClr val="222222"/>
-                </a:solidFill>
-                <a:latin typeface="Calibri"/>
-              </a:defRPr>
-            </a:pPr>
-          </a:p>
-          <a:p>
-            <a:pPr algn="l">
-              <a:lnSpc>
-                <a:spcPct val="100000"/>
-              </a:lnSpc>
-              <a:spcAft>
-                <a:spcPts val="900"/>
-              </a:spcAft>
-              <a:defRPr sz="1800" b="0">
-                <a:solidFill>
-                  <a:srgbClr val="222222"/>
-                </a:solidFill>
-                <a:latin typeface="Calibri"/>
-              </a:defRPr>
-            </a:pPr>
-            <a:r>
-              <a:rPr sz="1800" b="0">
-                <a:solidFill>
-                  <a:srgbClr val="222222"/>
-                </a:solidFill>
-                <a:latin typeface="Calibri"/>
-              </a:rPr>
-              <a:t>You hand Bluepad32 the ADDRESSES of two of your functions. It calls them when something happens. You never call them yourself.</a:t>
-            </a:r>
-          </a:p>
-          <a:p>
-            <a:pPr algn="l">
-              <a:lnSpc>
-                <a:spcPct val="100000"/>
-              </a:lnSpc>
-              <a:spcAft>
-                <a:spcPts val="900"/>
-              </a:spcAft>
-              <a:defRPr sz="1800" b="0">
-                <a:solidFill>
-                  <a:srgbClr val="222222"/>
-                </a:solidFill>
-                <a:latin typeface="Calibri"/>
-              </a:defRPr>
-            </a:pPr>
-          </a:p>
-          <a:p>
-            <a:pPr algn="l">
-              <a:lnSpc>
-                <a:spcPct val="100000"/>
-              </a:lnSpc>
-              <a:spcAft>
-                <a:spcPts val="900"/>
-              </a:spcAft>
-              <a:defRPr sz="1800" b="0">
-                <a:solidFill>
-                  <a:srgbClr val="222222"/>
-                </a:solidFill>
-                <a:latin typeface="Calibri"/>
-              </a:defRPr>
-            </a:pPr>
-            <a:r>
-              <a:rPr sz="1800" b="0">
-                <a:solidFill>
-                  <a:srgbClr val="222222"/>
-                </a:solidFill>
-                <a:latin typeface="Calibri"/>
-              </a:rPr>
-              <a:t>That inversion is worth naming. Normally your code calls a library. With a callback, the library calls your code. It is how every event system works, from button handlers to network stacks.</a:t>
-            </a:r>
-          </a:p>
-          <a:p>
-            <a:pPr algn="l">
-              <a:lnSpc>
-                <a:spcPct val="100000"/>
-              </a:lnSpc>
-              <a:spcAft>
-                <a:spcPts val="900"/>
-              </a:spcAft>
-              <a:defRPr sz="1800" b="0">
-                <a:solidFill>
-                  <a:srgbClr val="222222"/>
-                </a:solidFill>
-                <a:latin typeface="Calibri"/>
-              </a:defRPr>
-            </a:pPr>
-          </a:p>
-          <a:p>
-            <a:pPr algn="l">
-              <a:lnSpc>
-                <a:spcPct val="100000"/>
-              </a:lnSpc>
-              <a:spcAft>
-                <a:spcPts val="900"/>
-              </a:spcAft>
-              <a:defRPr sz="1800" b="0">
-                <a:solidFill>
-                  <a:srgbClr val="222222"/>
-                </a:solidFill>
-                <a:latin typeface="Calibri"/>
-              </a:defRPr>
-            </a:pPr>
-            <a:r>
-              <a:rPr sz="1800" b="0">
-                <a:solidFill>
-                  <a:srgbClr val="222222"/>
-                </a:solidFill>
-                <a:latin typeface="Calibri"/>
-              </a:rPr>
-              <a:t>The practical question is always: WHEN does it run, and what is safe to do in there?</a:t>
-            </a:r>
-          </a:p>
-          <a:p>
-            <a:pPr algn="l">
-              <a:lnSpc>
-                <a:spcPct val="100000"/>
-              </a:lnSpc>
-              <a:spcAft>
-                <a:spcPts val="900"/>
-              </a:spcAft>
-              <a:defRPr sz="1800" b="0">
-                <a:solidFill>
-                  <a:srgbClr val="222222"/>
-                </a:solidFill>
-                <a:latin typeface="Calibri"/>
-              </a:defRPr>
-            </a:pPr>
-          </a:p>
-          <a:p>
-            <a:pPr algn="l">
-              <a:lnSpc>
-                <a:spcPct val="100000"/>
-              </a:lnSpc>
-              <a:spcAft>
-                <a:spcPts val="900"/>
-              </a:spcAft>
-              <a:defRPr sz="1800" b="0">
-                <a:solidFill>
-                  <a:srgbClr val="222222"/>
-                </a:solidFill>
-                <a:latin typeface="Calibri"/>
-              </a:defRPr>
-            </a:pPr>
-            <a:r>
-              <a:rPr sz="1800" b="0">
-                <a:solidFill>
-                  <a:srgbClr val="222222"/>
-                </a:solidFill>
-                <a:latin typeface="Calibri"/>
-              </a:rPr>
-              <a:t>Here, both callbacks run from inside BP32.update(), which you call yourself from loop(). So they run on your thread, at a moment you chose, and it is safe to print and to touch program state.</a:t>
-            </a:r>
-          </a:p>
-        </p:txBody>
-      </p:sp>
     </p:spTree>
   </p:cSld>
   <p:clrMapOvr>
@@ -9485,7 +10919,7 @@
                 </a:solidFill>
                 <a:latin typeface="Calibri"/>
               </a:rPr>
-              <a:t>Callbacks: functions you write and never call  (continued)</a:t>
+              <a:t>Callbacks: functions you write and never call</a:t>
             </a:r>
           </a:p>
         </p:txBody>
@@ -9639,7 +11073,7 @@
         <p:spPr>
           <a:xfrm>
             <a:off x="502920" y="1188720"/>
-            <a:ext cx="11185855" cy="5074920"/>
+            <a:ext cx="11185855" cy="530352"/>
           </a:xfrm>
           <a:prstGeom prst="rect">
             <a:avLst/>
@@ -9657,6 +11091,54 @@
                 <a:spcPct val="100000"/>
               </a:lnSpc>
               <a:spcAft>
+                <a:spcPts val="600"/>
+              </a:spcAft>
+              <a:defRPr sz="1900" b="1">
+                <a:solidFill>
+                  <a:srgbClr val="0E7C86"/>
+                </a:solidFill>
+                <a:latin typeface="Calibri"/>
+              </a:defRPr>
+            </a:pPr>
+            <a:r>
+              <a:rPr sz="1900" b="1">
+                <a:solidFill>
+                  <a:srgbClr val="0E7C86"/>
+                </a:solidFill>
+                <a:latin typeface="Calibri"/>
+              </a:rPr>
+              <a:t>Inversion of control</a:t>
+            </a:r>
+          </a:p>
+        </p:txBody>
+      </p:sp>
+      <p:sp>
+        <p:nvSpPr>
+          <p:cNvPr id="7" name="TextBox 6"/>
+          <p:cNvSpPr txBox="1"/>
+          <p:nvPr/>
+        </p:nvSpPr>
+        <p:spPr>
+          <a:xfrm>
+            <a:off x="502920" y="1755648"/>
+            <a:ext cx="11185855" cy="4507992"/>
+          </a:xfrm>
+          <a:prstGeom prst="rect">
+            <a:avLst/>
+          </a:prstGeom>
+          <a:noFill/>
+        </p:spPr>
+        <p:txBody>
+          <a:bodyPr wrap="square" lIns="0" tIns="0" rIns="0" bIns="0">
+            <a:spAutoFit/>
+          </a:bodyPr>
+          <a:lstStyle/>
+          <a:p>
+            <a:pPr lvl="1" algn="l">
+              <a:lnSpc>
+                <a:spcPct val="100000"/>
+              </a:lnSpc>
+              <a:spcAft>
                 <a:spcPts val="900"/>
               </a:spcAft>
               <a:defRPr sz="1800" b="0">
@@ -9666,6 +11148,15 @@
                 <a:latin typeface="Calibri"/>
               </a:defRPr>
             </a:pPr>
+            <a:r>
+              <a:rPr sz="1800" b="0">
+                <a:solidFill>
+                  <a:srgbClr val="222222"/>
+                </a:solidFill>
+                <a:latin typeface="Calibri"/>
+              </a:rPr>
+              <a:t>BP32.setup(&amp;onConnectedController, &amp;onDisconnectedController);</a:t>
+            </a:r>
           </a:p>
           <a:p>
             <a:pPr algn="l">
@@ -9682,6 +11173,22 @@
                 <a:latin typeface="Calibri"/>
               </a:defRPr>
             </a:pPr>
+          </a:p>
+          <a:p>
+            <a:pPr algn="l">
+              <a:lnSpc>
+                <a:spcPct val="100000"/>
+              </a:lnSpc>
+              <a:spcAft>
+                <a:spcPts val="900"/>
+              </a:spcAft>
+              <a:defRPr sz="1800" b="0">
+                <a:solidFill>
+                  <a:srgbClr val="222222"/>
+                </a:solidFill>
+                <a:latin typeface="Calibri"/>
+              </a:defRPr>
+            </a:pPr>
             <a:r>
               <a:rPr sz="1800" b="0">
                 <a:solidFill>
@@ -9689,7 +11196,130 @@
                 </a:solidFill>
                 <a:latin typeface="Calibri"/>
               </a:rPr>
-              <a:t>If they ran from an interrupt, neither of those would be true.</a:t>
+              <a:t>You hand Bluepad32 the ADDRESSES of two of your functions. It calls them when something happens. You never call them yourself.</a:t>
+            </a:r>
+          </a:p>
+          <a:p>
+            <a:pPr algn="l">
+              <a:lnSpc>
+                <a:spcPct val="100000"/>
+              </a:lnSpc>
+              <a:spcAft>
+                <a:spcPts val="900"/>
+              </a:spcAft>
+              <a:defRPr sz="1800" b="0">
+                <a:solidFill>
+                  <a:srgbClr val="222222"/>
+                </a:solidFill>
+                <a:latin typeface="Calibri"/>
+              </a:defRPr>
+            </a:pPr>
+          </a:p>
+          <a:p>
+            <a:pPr algn="l">
+              <a:lnSpc>
+                <a:spcPct val="100000"/>
+              </a:lnSpc>
+              <a:spcAft>
+                <a:spcPts val="900"/>
+              </a:spcAft>
+              <a:defRPr sz="1800" b="0">
+                <a:solidFill>
+                  <a:srgbClr val="222222"/>
+                </a:solidFill>
+                <a:latin typeface="Calibri"/>
+              </a:defRPr>
+            </a:pPr>
+            <a:r>
+              <a:rPr sz="1800" b="0">
+                <a:solidFill>
+                  <a:srgbClr val="222222"/>
+                </a:solidFill>
+                <a:latin typeface="Calibri"/>
+              </a:rPr>
+              <a:t>That inversion is worth naming. Normally your code calls a library. With a callback, the library calls your code. It is how every event system works, from button handlers to network stacks.</a:t>
+            </a:r>
+          </a:p>
+          <a:p>
+            <a:pPr algn="l">
+              <a:lnSpc>
+                <a:spcPct val="100000"/>
+              </a:lnSpc>
+              <a:spcAft>
+                <a:spcPts val="900"/>
+              </a:spcAft>
+              <a:defRPr sz="1800" b="0">
+                <a:solidFill>
+                  <a:srgbClr val="222222"/>
+                </a:solidFill>
+                <a:latin typeface="Calibri"/>
+              </a:defRPr>
+            </a:pPr>
+          </a:p>
+          <a:p>
+            <a:pPr algn="l">
+              <a:lnSpc>
+                <a:spcPct val="100000"/>
+              </a:lnSpc>
+              <a:spcAft>
+                <a:spcPts val="900"/>
+              </a:spcAft>
+              <a:defRPr sz="1800" b="0">
+                <a:solidFill>
+                  <a:srgbClr val="222222"/>
+                </a:solidFill>
+                <a:latin typeface="Calibri"/>
+              </a:defRPr>
+            </a:pPr>
+            <a:r>
+              <a:rPr sz="1800" b="0">
+                <a:solidFill>
+                  <a:srgbClr val="222222"/>
+                </a:solidFill>
+                <a:latin typeface="Calibri"/>
+              </a:rPr>
+              <a:t>The practical question is always: WHEN does it run, and what is safe to do in there?</a:t>
+            </a:r>
+          </a:p>
+          <a:p>
+            <a:pPr algn="l">
+              <a:lnSpc>
+                <a:spcPct val="100000"/>
+              </a:lnSpc>
+              <a:spcAft>
+                <a:spcPts val="900"/>
+              </a:spcAft>
+              <a:defRPr sz="1800" b="0">
+                <a:solidFill>
+                  <a:srgbClr val="222222"/>
+                </a:solidFill>
+                <a:latin typeface="Calibri"/>
+              </a:defRPr>
+            </a:pPr>
+          </a:p>
+          <a:p>
+            <a:pPr algn="l">
+              <a:lnSpc>
+                <a:spcPct val="100000"/>
+              </a:lnSpc>
+              <a:spcAft>
+                <a:spcPts val="900"/>
+              </a:spcAft>
+              <a:defRPr sz="1800" b="0">
+                <a:solidFill>
+                  <a:srgbClr val="222222"/>
+                </a:solidFill>
+                <a:latin typeface="Calibri"/>
+              </a:defRPr>
+            </a:pPr>
+            <a:r>
+              <a:rPr sz="1800" b="0">
+                <a:solidFill>
+                  <a:srgbClr val="222222"/>
+                </a:solidFill>
+                <a:latin typeface="Calibri"/>
+              </a:rPr>
+              <a:t>Here, both callbacks run from inside BP32.update(), which you call yourself from loop(). So they run on your thread, at a moment you chose, and it is safe to print and to touch program state.</a:t>
             </a:r>
           </a:p>
         </p:txBody>
@@ -9753,7 +11383,7 @@
                 </a:solidFill>
                 <a:latin typeface="Calibri"/>
               </a:rPr>
-              <a:t>The allowlist, and the two ways to get it wrong</a:t>
+              <a:t>Callbacks: functions you write and never call  (continued)</a:t>
             </a:r>
           </a:p>
         </p:txBody>
@@ -9907,7 +11537,7 @@
         <p:spPr>
           <a:xfrm>
             <a:off x="502920" y="1188720"/>
-            <a:ext cx="11185855" cy="530352"/>
+            <a:ext cx="11185855" cy="5074920"/>
           </a:xfrm>
           <a:prstGeom prst="rect">
             <a:avLst/>
@@ -9925,54 +11555,6 @@
                 <a:spcPct val="100000"/>
               </a:lnSpc>
               <a:spcAft>
-                <a:spcPts val="600"/>
-              </a:spcAft>
-              <a:defRPr sz="1900" b="1">
-                <a:solidFill>
-                  <a:srgbClr val="0E7C86"/>
-                </a:solidFill>
-                <a:latin typeface="Calibri"/>
-              </a:defRPr>
-            </a:pPr>
-            <a:r>
-              <a:rPr sz="1900" b="1">
-                <a:solidFill>
-                  <a:srgbClr val="0E7C86"/>
-                </a:solidFill>
-                <a:latin typeface="Calibri"/>
-              </a:rPr>
-              <a:t>A guest list, checked at the door</a:t>
-            </a:r>
-          </a:p>
-        </p:txBody>
-      </p:sp>
-      <p:sp>
-        <p:nvSpPr>
-          <p:cNvPr id="7" name="TextBox 6"/>
-          <p:cNvSpPr txBox="1"/>
-          <p:nvPr/>
-        </p:nvSpPr>
-        <p:spPr>
-          <a:xfrm>
-            <a:off x="502920" y="1755648"/>
-            <a:ext cx="11185855" cy="4507992"/>
-          </a:xfrm>
-          <a:prstGeom prst="rect">
-            <a:avLst/>
-          </a:prstGeom>
-          <a:noFill/>
-        </p:spPr>
-        <p:txBody>
-          <a:bodyPr wrap="square" lIns="0" tIns="0" rIns="0" bIns="0">
-            <a:spAutoFit/>
-          </a:bodyPr>
-          <a:lstStyle/>
-          <a:p>
-            <a:pPr algn="l">
-              <a:lnSpc>
-                <a:spcPct val="100000"/>
-              </a:lnSpc>
-              <a:spcAft>
                 <a:spcPts val="900"/>
               </a:spcAft>
               <a:defRPr sz="1800" b="0">
@@ -9982,6 +11564,22 @@
                 <a:latin typeface="Calibri"/>
               </a:defRPr>
             </a:pPr>
+          </a:p>
+          <a:p>
+            <a:pPr algn="l">
+              <a:lnSpc>
+                <a:spcPct val="100000"/>
+              </a:lnSpc>
+              <a:spcAft>
+                <a:spcPts val="900"/>
+              </a:spcAft>
+              <a:defRPr sz="1800" b="0">
+                <a:solidFill>
+                  <a:srgbClr val="222222"/>
+                </a:solidFill>
+                <a:latin typeface="Calibri"/>
+              </a:defRPr>
+            </a:pPr>
             <a:r>
               <a:rPr sz="1800" b="0">
                 <a:solidFill>
@@ -9989,123 +11587,7 @@
                 </a:solidFill>
                 <a:latin typeface="Calibri"/>
               </a:rPr>
-              <a:t>A Switch pad in pairing mode connects to whichever host answers first. Pairing alone does not give you one-vehicle-one-controller.</a:t>
-            </a:r>
-          </a:p>
-          <a:p>
-            <a:pPr algn="l">
-              <a:lnSpc>
-                <a:spcPct val="100000"/>
-              </a:lnSpc>
-              <a:spcAft>
-                <a:spcPts val="900"/>
-              </a:spcAft>
-              <a:defRPr sz="1800" b="0">
-                <a:solidFill>
-                  <a:srgbClr val="222222"/>
-                </a:solidFill>
-                <a:latin typeface="Calibri"/>
-              </a:defRPr>
-            </a:pPr>
-          </a:p>
-          <a:p>
-            <a:pPr algn="l">
-              <a:lnSpc>
-                <a:spcPct val="100000"/>
-              </a:lnSpc>
-              <a:spcAft>
-                <a:spcPts val="900"/>
-              </a:spcAft>
-              <a:defRPr sz="1800" b="0">
-                <a:solidFill>
-                  <a:srgbClr val="222222"/>
-                </a:solidFill>
-                <a:latin typeface="Calibri"/>
-              </a:defRPr>
-            </a:pPr>
-            <a:r>
-              <a:rPr sz="1800" b="0">
-                <a:solidFill>
-                  <a:srgbClr val="222222"/>
-                </a:solidFill>
-                <a:latin typeface="Calibri"/>
-              </a:rPr>
-              <a:t>The allowlist is a guest list checked BEFORE a connection is accepted:</a:t>
-            </a:r>
-          </a:p>
-          <a:p>
-            <a:pPr lvl="1" algn="l">
-              <a:lnSpc>
-                <a:spcPct val="100000"/>
-              </a:lnSpc>
-              <a:spcAft>
-                <a:spcPts val="900"/>
-              </a:spcAft>
-              <a:defRPr sz="1800" b="0">
-                <a:solidFill>
-                  <a:srgbClr val="222222"/>
-                </a:solidFill>
-                <a:latin typeface="Calibri"/>
-              </a:defRPr>
-            </a:pPr>
-            <a:r>
-              <a:rPr sz="1800" b="0">
-                <a:solidFill>
-                  <a:srgbClr val="222222"/>
-                </a:solidFill>
-                <a:latin typeface="Calibri"/>
-              </a:rPr>
-              <a:t>uni_bt_allowlist_remove_all();</a:t>
-            </a:r>
-          </a:p>
-          <a:p>
-            <a:pPr lvl="1" algn="l">
-              <a:lnSpc>
-                <a:spcPct val="100000"/>
-              </a:lnSpc>
-              <a:spcAft>
-                <a:spcPts val="900"/>
-              </a:spcAft>
-              <a:defRPr sz="1800" b="0">
-                <a:solidFill>
-                  <a:srgbClr val="222222"/>
-                </a:solidFill>
-                <a:latin typeface="Calibri"/>
-              </a:defRPr>
-            </a:pPr>
-            <a:r>
-              <a:rPr sz="1800" b="0">
-                <a:solidFill>
-                  <a:srgbClr val="222222"/>
-                </a:solidFill>
-                <a:latin typeface="Calibri"/>
-              </a:rPr>
-              <a:t>uni_bt_allowlist_add_addr(address);</a:t>
-            </a:r>
-          </a:p>
-          <a:p>
-            <a:pPr lvl="1" algn="l">
-              <a:lnSpc>
-                <a:spcPct val="100000"/>
-              </a:lnSpc>
-              <a:spcAft>
-                <a:spcPts val="900"/>
-              </a:spcAft>
-              <a:defRPr sz="1800" b="0">
-                <a:solidFill>
-                  <a:srgbClr val="222222"/>
-                </a:solidFill>
-                <a:latin typeface="Calibri"/>
-              </a:defRPr>
-            </a:pPr>
-            <a:r>
-              <a:rPr sz="1800" b="0">
-                <a:solidFill>
-                  <a:srgbClr val="222222"/>
-                </a:solidFill>
-                <a:latin typeface="Calibri"/>
-              </a:rPr>
-              <a:t>uni_bt_allowlist_set_enabled(true);</a:t>
+              <a:t>If they ran from an interrupt, neither of those would be true.</a:t>
             </a:r>
           </a:p>
         </p:txBody>
@@ -10169,7 +11651,7 @@
                 </a:solidFill>
                 <a:latin typeface="Calibri"/>
               </a:rPr>
-              <a:t>The allowlist, and the two ways to get it wrong  (continued)</a:t>
+              <a:t>The allowlist, and the two ways to get it wrong</a:t>
             </a:r>
           </a:p>
         </p:txBody>
@@ -10323,7 +11805,7 @@
         <p:spPr>
           <a:xfrm>
             <a:off x="502920" y="1188720"/>
-            <a:ext cx="11185855" cy="4023360"/>
+            <a:ext cx="11185855" cy="530352"/>
           </a:xfrm>
           <a:prstGeom prst="rect">
             <a:avLst/>
@@ -10341,6 +11823,54 @@
                 <a:spcPct val="100000"/>
               </a:lnSpc>
               <a:spcAft>
+                <a:spcPts val="600"/>
+              </a:spcAft>
+              <a:defRPr sz="1900" b="1">
+                <a:solidFill>
+                  <a:srgbClr val="0E7C86"/>
+                </a:solidFill>
+                <a:latin typeface="Calibri"/>
+              </a:defRPr>
+            </a:pPr>
+            <a:r>
+              <a:rPr sz="1900" b="1">
+                <a:solidFill>
+                  <a:srgbClr val="0E7C86"/>
+                </a:solidFill>
+                <a:latin typeface="Calibri"/>
+              </a:rPr>
+              <a:t>A guest list, checked at the door</a:t>
+            </a:r>
+          </a:p>
+        </p:txBody>
+      </p:sp>
+      <p:sp>
+        <p:nvSpPr>
+          <p:cNvPr id="7" name="TextBox 6"/>
+          <p:cNvSpPr txBox="1"/>
+          <p:nvPr/>
+        </p:nvSpPr>
+        <p:spPr>
+          <a:xfrm>
+            <a:off x="502920" y="1755648"/>
+            <a:ext cx="11185855" cy="4507992"/>
+          </a:xfrm>
+          <a:prstGeom prst="rect">
+            <a:avLst/>
+          </a:prstGeom>
+          <a:noFill/>
+        </p:spPr>
+        <p:txBody>
+          <a:bodyPr wrap="square" lIns="0" tIns="0" rIns="0" bIns="0">
+            <a:spAutoFit/>
+          </a:bodyPr>
+          <a:lstStyle/>
+          <a:p>
+            <a:pPr algn="l">
+              <a:lnSpc>
+                <a:spcPct val="100000"/>
+              </a:lnSpc>
+              <a:spcAft>
                 <a:spcPts val="900"/>
               </a:spcAft>
               <a:defRPr sz="1800" b="0">
@@ -10357,7 +11887,7 @@
                 </a:solidFill>
                 <a:latin typeface="Calibri"/>
               </a:rPr>
-              <a:t>MISTAKE ONE: calling them before BP32.setup(). Setup is what brings the Bluetooth stack up. Before that there is no list to add to, and the calls do nothing at all - silently.</a:t>
+              <a:t>A Switch pad in pairing mode connects to whichever host answers first. Pairing alone does not give you one-vehicle-one-controller.</a:t>
             </a:r>
           </a:p>
           <a:p>
@@ -10398,11 +11928,11 @@
                 </a:solidFill>
                 <a:latin typeface="Calibri"/>
               </a:rPr>
-              <a:t>MISTAKE TWO: adding to the list instead of rebuilding it. Rebuild from scratch every boot and the sketch is always the single source of truth. Add, and stale entries accumulate where nobody can see them.</a:t>
-            </a:r>
-          </a:p>
-          <a:p>
-            <a:pPr algn="l">
+              <a:t>The allowlist is a guest list checked BEFORE a connection is accepted:</a:t>
+            </a:r>
+          </a:p>
+          <a:p>
+            <a:pPr lvl="1" algn="l">
               <a:lnSpc>
                 <a:spcPct val="100000"/>
               </a:lnSpc>
@@ -10416,9 +11946,18 @@
                 <a:latin typeface="Calibri"/>
               </a:defRPr>
             </a:pPr>
-          </a:p>
-          <a:p>
-            <a:pPr algn="l">
+            <a:r>
+              <a:rPr sz="1800" b="0">
+                <a:solidFill>
+                  <a:srgbClr val="222222"/>
+                </a:solidFill>
+                <a:latin typeface="Calibri"/>
+              </a:rPr>
+              <a:t>uni_bt_allowlist_remove_all();</a:t>
+            </a:r>
+          </a:p>
+          <a:p>
+            <a:pPr lvl="1" algn="l">
               <a:lnSpc>
                 <a:spcPct val="100000"/>
               </a:lnSpc>
@@ -10439,73 +11978,32 @@
                 </a:solidFill>
                 <a:latin typeface="Calibri"/>
               </a:rPr>
-              <a:t>Note that enableNewBluetoothConnections stays TRUE. The allowlist keeps other people out; leaving new connections on means your own pad can always get back in even if the bonding keys are lost.</a:t>
-            </a:r>
-          </a:p>
-        </p:txBody>
-      </p:sp>
-      <p:sp>
-        <p:nvSpPr>
-          <p:cNvPr id="7" name="Rounded Rectangle 6"/>
-          <p:cNvSpPr/>
-          <p:nvPr/>
-        </p:nvSpPr>
-        <p:spPr>
-          <a:xfrm>
-            <a:off x="502920" y="5303520"/>
-            <a:ext cx="11185855" cy="960120"/>
-          </a:xfrm>
-          <a:prstGeom prst="roundRect">
-            <a:avLst>
-              <a:gd name="adj" fmla="val 4000"/>
-            </a:avLst>
-          </a:prstGeom>
-          <a:solidFill>
-            <a:srgbClr val="FDF3E3"/>
-          </a:solidFill>
-          <a:ln w="12700">
-            <a:solidFill>
-              <a:srgbClr val="B46A0F"/>
-            </a:solidFill>
-          </a:ln>
-          <a:effectLst/>
-        </p:spPr>
-        <p:style>
-          <a:lnRef idx="1">
-            <a:schemeClr val="accent1"/>
-          </a:lnRef>
-          <a:fillRef idx="3">
-            <a:schemeClr val="accent1"/>
-          </a:fillRef>
-          <a:effectRef idx="2">
-            <a:schemeClr val="accent1"/>
-          </a:effectRef>
-          <a:fontRef idx="minor">
-            <a:schemeClr val="lt1"/>
-          </a:fontRef>
-        </p:style>
-        <p:txBody>
-          <a:bodyPr rtlCol="0" anchor="ctr" wrap="square" lIns="164592" rIns="164592" tIns="73152" bIns="73152"/>
-          <a:lstStyle/>
-          <a:p>
-            <a:pPr algn="l"/>
-            <a:r>
-              <a:rPr sz="1300" b="1">
-                <a:solidFill>
-                  <a:srgbClr val="B46A0F"/>
-                </a:solidFill>
-                <a:latin typeface="Calibri"/>
-              </a:rPr>
-              <a:t>WATCH OUT   </a:t>
-            </a:r>
-            <a:r>
-              <a:rPr sz="1500">
-                <a:solidFill>
-                  <a:srgbClr val="222222"/>
-                </a:solidFill>
-                <a:latin typeface="Calibri"/>
-              </a:rPr>
-              <a:t>11.2 added addresses at runtime only. If those entries did not survive a reboot, a vehicle could come back up with an empty allowlist AND new connections disabled - and then refuse its own controller with no way in.</a:t>
+              <a:t>uni_bt_allowlist_add_addr(address);</a:t>
+            </a:r>
+          </a:p>
+          <a:p>
+            <a:pPr lvl="1" algn="l">
+              <a:lnSpc>
+                <a:spcPct val="100000"/>
+              </a:lnSpc>
+              <a:spcAft>
+                <a:spcPts val="900"/>
+              </a:spcAft>
+              <a:defRPr sz="1800" b="0">
+                <a:solidFill>
+                  <a:srgbClr val="222222"/>
+                </a:solidFill>
+                <a:latin typeface="Calibri"/>
+              </a:defRPr>
+            </a:pPr>
+            <a:r>
+              <a:rPr sz="1800" b="0">
+                <a:solidFill>
+                  <a:srgbClr val="222222"/>
+                </a:solidFill>
+                <a:latin typeface="Calibri"/>
+              </a:rPr>
+              <a:t>uni_bt_allowlist_set_enabled(true);</a:t>
             </a:r>
           </a:p>
         </p:txBody>
@@ -10569,7 +12067,7 @@
                 </a:solidFill>
                 <a:latin typeface="Calibri"/>
               </a:rPr>
-              <a:t>Do it now  -  lock a board to one pad</a:t>
+              <a:t>The allowlist, and the two ways to get it wrong  (continued)</a:t>
             </a:r>
           </a:p>
         </p:txBody>
@@ -10716,14 +12214,144 @@
       </p:sp>
       <p:sp>
         <p:nvSpPr>
-          <p:cNvPr id="6" name="Rounded Rectangle 5"/>
+          <p:cNvPr id="6" name="TextBox 5"/>
+          <p:cNvSpPr txBox="1"/>
+          <p:nvPr/>
+        </p:nvSpPr>
+        <p:spPr>
+          <a:xfrm>
+            <a:off x="502920" y="1188720"/>
+            <a:ext cx="11185855" cy="4023360"/>
+          </a:xfrm>
+          <a:prstGeom prst="rect">
+            <a:avLst/>
+          </a:prstGeom>
+          <a:noFill/>
+        </p:spPr>
+        <p:txBody>
+          <a:bodyPr wrap="square" lIns="0" tIns="0" rIns="0" bIns="0">
+            <a:spAutoFit/>
+          </a:bodyPr>
+          <a:lstStyle/>
+          <a:p>
+            <a:pPr algn="l">
+              <a:lnSpc>
+                <a:spcPct val="100000"/>
+              </a:lnSpc>
+              <a:spcAft>
+                <a:spcPts val="900"/>
+              </a:spcAft>
+              <a:defRPr sz="1800" b="0">
+                <a:solidFill>
+                  <a:srgbClr val="222222"/>
+                </a:solidFill>
+                <a:latin typeface="Calibri"/>
+              </a:defRPr>
+            </a:pPr>
+            <a:r>
+              <a:rPr sz="1800" b="0">
+                <a:solidFill>
+                  <a:srgbClr val="222222"/>
+                </a:solidFill>
+                <a:latin typeface="Calibri"/>
+              </a:rPr>
+              <a:t>MISTAKE ONE: calling them before BP32.setup(). Setup is what brings the Bluetooth stack up. Before that there is no list to add to, and the calls do nothing at all - silently.</a:t>
+            </a:r>
+          </a:p>
+          <a:p>
+            <a:pPr algn="l">
+              <a:lnSpc>
+                <a:spcPct val="100000"/>
+              </a:lnSpc>
+              <a:spcAft>
+                <a:spcPts val="900"/>
+              </a:spcAft>
+              <a:defRPr sz="1800" b="0">
+                <a:solidFill>
+                  <a:srgbClr val="222222"/>
+                </a:solidFill>
+                <a:latin typeface="Calibri"/>
+              </a:defRPr>
+            </a:pPr>
+          </a:p>
+          <a:p>
+            <a:pPr algn="l">
+              <a:lnSpc>
+                <a:spcPct val="100000"/>
+              </a:lnSpc>
+              <a:spcAft>
+                <a:spcPts val="900"/>
+              </a:spcAft>
+              <a:defRPr sz="1800" b="0">
+                <a:solidFill>
+                  <a:srgbClr val="222222"/>
+                </a:solidFill>
+                <a:latin typeface="Calibri"/>
+              </a:defRPr>
+            </a:pPr>
+            <a:r>
+              <a:rPr sz="1800" b="0">
+                <a:solidFill>
+                  <a:srgbClr val="222222"/>
+                </a:solidFill>
+                <a:latin typeface="Calibri"/>
+              </a:rPr>
+              <a:t>MISTAKE TWO: adding to the list instead of rebuilding it. Rebuild from scratch every boot and the sketch is always the single source of truth. Add, and stale entries accumulate where nobody can see them.</a:t>
+            </a:r>
+          </a:p>
+          <a:p>
+            <a:pPr algn="l">
+              <a:lnSpc>
+                <a:spcPct val="100000"/>
+              </a:lnSpc>
+              <a:spcAft>
+                <a:spcPts val="900"/>
+              </a:spcAft>
+              <a:defRPr sz="1800" b="0">
+                <a:solidFill>
+                  <a:srgbClr val="222222"/>
+                </a:solidFill>
+                <a:latin typeface="Calibri"/>
+              </a:defRPr>
+            </a:pPr>
+          </a:p>
+          <a:p>
+            <a:pPr algn="l">
+              <a:lnSpc>
+                <a:spcPct val="100000"/>
+              </a:lnSpc>
+              <a:spcAft>
+                <a:spcPts val="900"/>
+              </a:spcAft>
+              <a:defRPr sz="1800" b="0">
+                <a:solidFill>
+                  <a:srgbClr val="222222"/>
+                </a:solidFill>
+                <a:latin typeface="Calibri"/>
+              </a:defRPr>
+            </a:pPr>
+            <a:r>
+              <a:rPr sz="1800" b="0">
+                <a:solidFill>
+                  <a:srgbClr val="222222"/>
+                </a:solidFill>
+                <a:latin typeface="Calibri"/>
+              </a:rPr>
+              <a:t>Note that enableNewBluetoothConnections stays TRUE. The allowlist keeps other people out; leaving new connections on means your own pad can always get back in even if the bonding keys are lost.</a:t>
+            </a:r>
+          </a:p>
+        </p:txBody>
+      </p:sp>
+      <p:sp>
+        <p:nvSpPr>
+          <p:cNvPr id="7" name="Rounded Rectangle 6"/>
           <p:cNvSpPr/>
           <p:nvPr/>
         </p:nvSpPr>
         <p:spPr>
           <a:xfrm>
-            <a:off x="502920" y="1188720"/>
-            <a:ext cx="11185855" cy="530352"/>
+            <a:off x="502920" y="5303520"/>
+            <a:ext cx="11185855" cy="960120"/>
           </a:xfrm>
           <a:prstGeom prst="roundRect">
             <a:avLst>
@@ -10731,10 +12359,12 @@
             </a:avLst>
           </a:prstGeom>
           <a:solidFill>
-            <a:srgbClr val="0E7C86"/>
+            <a:srgbClr val="FDF3E3"/>
           </a:solidFill>
-          <a:ln>
-            <a:noFill/>
+          <a:ln w="12700">
+            <a:solidFill>
+              <a:srgbClr val="B46A0F"/>
+            </a:solidFill>
           </a:ln>
           <a:effectLst/>
         </p:spPr>
@@ -10753,426 +12383,27 @@
           </a:fontRef>
         </p:style>
         <p:txBody>
-          <a:bodyPr rtlCol="0" anchor="ctr" wrap="square" lIns="182880"/>
+          <a:bodyPr rtlCol="0" anchor="ctr" wrap="square" lIns="164592" rIns="164592" tIns="73152" bIns="73152"/>
           <a:lstStyle/>
           <a:p>
             <a:pPr algn="l"/>
             <a:r>
               <a:rPr sz="1300" b="1">
                 <a:solidFill>
-                  <a:srgbClr val="FFFFFF"/>
-                </a:solidFill>
-                <a:latin typeface="Calibri"/>
-              </a:rPr>
-              <a:t>UPLOAD AND RUN:   </a:t>
-            </a:r>
-            <a:r>
-              <a:rPr sz="1500" b="1">
-                <a:solidFill>
-                  <a:srgbClr val="FFFFFF"/>
-                </a:solidFill>
-                <a:latin typeface="Consolas"/>
-              </a:rPr>
-              <a:t>a3a_controller_address</a:t>
-            </a:r>
-            <a:r>
-              <a:rPr sz="1200">
-                <a:solidFill>
-                  <a:srgbClr val="FFFFFF"/>
-                </a:solidFill>
-                <a:latin typeface="Calibri"/>
-              </a:rPr>
-              <a:t>     (35 minutes)</a:t>
-            </a:r>
-          </a:p>
-        </p:txBody>
-      </p:sp>
-      <p:sp>
-        <p:nvSpPr>
-          <p:cNvPr id="7" name="TextBox 6"/>
-          <p:cNvSpPr txBox="1"/>
-          <p:nvPr/>
-        </p:nvSpPr>
-        <p:spPr>
-          <a:xfrm>
-            <a:off x="502920" y="1901952"/>
-            <a:ext cx="5387187" cy="4361688"/>
-          </a:xfrm>
-          <a:prstGeom prst="rect">
-            <a:avLst/>
-          </a:prstGeom>
-          <a:noFill/>
-        </p:spPr>
-        <p:txBody>
-          <a:bodyPr wrap="square" lIns="0" tIns="0" rIns="0" bIns="0">
-            <a:spAutoFit/>
-          </a:bodyPr>
-          <a:lstStyle/>
-          <a:p>
-            <a:pPr algn="l">
-              <a:lnSpc>
-                <a:spcPct val="100000"/>
-              </a:lnSpc>
-              <a:spcAft>
-                <a:spcPts val="400"/>
-              </a:spcAft>
-              <a:defRPr sz="1800" b="0">
-                <a:solidFill>
-                  <a:srgbClr val="222222"/>
-                </a:solidFill>
-                <a:latin typeface="Calibri"/>
-              </a:defRPr>
-            </a:pPr>
-            <a:r>
-              <a:rPr sz="1800" b="0">
-                <a:solidFill>
-                  <a:srgbClr val="222222"/>
-                </a:solidFill>
-                <a:latin typeface="Calibri"/>
-              </a:rPr>
-              <a:t>1.  Upload. The allowlist starts OFF. Connect a controller.</a:t>
-            </a:r>
-          </a:p>
-          <a:p>
-            <a:pPr algn="l">
-              <a:lnSpc>
-                <a:spcPct val="100000"/>
-              </a:lnSpc>
-              <a:spcAft>
-                <a:spcPts val="400"/>
-              </a:spcAft>
-              <a:defRPr sz="1800" b="0">
-                <a:solidFill>
-                  <a:srgbClr val="222222"/>
-                </a:solidFill>
-                <a:latin typeface="Calibri"/>
-              </a:defRPr>
-            </a:pPr>
-            <a:r>
-              <a:rPr sz="1800" b="0">
-                <a:solidFill>
-                  <a:srgbClr val="222222"/>
-                </a:solidFill>
-                <a:latin typeface="Calibri"/>
-              </a:rPr>
-              <a:t>2.  Type  lock. Disconnect, and connect a DIFFERENT controller.</a:t>
-            </a:r>
-          </a:p>
-          <a:p>
-            <a:pPr algn="l">
-              <a:lnSpc>
-                <a:spcPct val="100000"/>
-              </a:lnSpc>
-              <a:spcAft>
-                <a:spcPts val="400"/>
-              </a:spcAft>
-              <a:defRPr sz="1800" b="0">
-                <a:solidFill>
-                  <a:srgbClr val="222222"/>
-                </a:solidFill>
-                <a:latin typeface="Calibri"/>
-              </a:defRPr>
-            </a:pPr>
-            <a:r>
-              <a:rPr sz="1800" b="0">
-                <a:solidFill>
-                  <a:srgbClr val="222222"/>
-                </a:solidFill>
-                <a:latin typeface="Calibri"/>
-              </a:rPr>
-              <a:t>3.  Watch the refusal in the Serial Monitor.</a:t>
-            </a:r>
-          </a:p>
-          <a:p>
-            <a:pPr algn="l">
-              <a:lnSpc>
-                <a:spcPct val="100000"/>
-              </a:lnSpc>
-              <a:spcAft>
-                <a:spcPts val="400"/>
-              </a:spcAft>
-              <a:defRPr sz="1800" b="0">
-                <a:solidFill>
-                  <a:srgbClr val="222222"/>
-                </a:solidFill>
-                <a:latin typeface="Calibri"/>
-              </a:defRPr>
-            </a:pPr>
-            <a:r>
-              <a:rPr sz="1800" b="0">
-                <a:solidFill>
-                  <a:srgbClr val="222222"/>
-                </a:solidFill>
-                <a:latin typeface="Calibri"/>
-              </a:rPr>
-              <a:t>4.  Type  open  and try the second one again.</a:t>
-            </a:r>
-          </a:p>
-          <a:p>
-            <a:pPr algn="l">
-              <a:lnSpc>
-                <a:spcPct val="100000"/>
-              </a:lnSpc>
-              <a:spcAft>
-                <a:spcPts val="400"/>
-              </a:spcAft>
-              <a:defRPr sz="1800" b="0">
-                <a:solidFill>
-                  <a:srgbClr val="222222"/>
-                </a:solidFill>
-                <a:latin typeface="Calibri"/>
-              </a:defRPr>
-            </a:pPr>
-            <a:r>
-              <a:rPr sz="1800" b="0">
-                <a:solidFill>
-                  <a:srgbClr val="222222"/>
-                </a:solidFill>
-                <a:latin typeface="Calibri"/>
-              </a:rPr>
-              <a:t>5.  Type  lockaddr 00:11:22:33:44:55  and try to connect anything.</a:t>
-            </a:r>
-          </a:p>
-          <a:p>
-            <a:pPr algn="l">
-              <a:lnSpc>
-                <a:spcPct val="100000"/>
-              </a:lnSpc>
-              <a:spcAft>
-                <a:spcPts val="400"/>
-              </a:spcAft>
-              <a:defRPr sz="1800" b="0">
-                <a:solidFill>
-                  <a:srgbClr val="222222"/>
-                </a:solidFill>
-                <a:latin typeface="Calibri"/>
-              </a:defRPr>
-            </a:pPr>
-            <a:r>
-              <a:rPr sz="1800" b="0">
-                <a:solidFill>
-                  <a:srgbClr val="222222"/>
-                </a:solidFill>
-                <a:latin typeface="Calibri"/>
-              </a:rPr>
-              <a:t>6.  Type  whoami. Compare with what a Bluetooth scanner app on your phone shows for this board.</a:t>
-            </a:r>
-          </a:p>
-        </p:txBody>
-      </p:sp>
-      <p:sp>
-        <p:nvSpPr>
-          <p:cNvPr id="8" name="TextBox 7"/>
-          <p:cNvSpPr txBox="1"/>
-          <p:nvPr/>
-        </p:nvSpPr>
-        <p:spPr>
-          <a:xfrm>
-            <a:off x="6301587" y="1901952"/>
-            <a:ext cx="5387187" cy="365760"/>
-          </a:xfrm>
-          <a:prstGeom prst="rect">
-            <a:avLst/>
-          </a:prstGeom>
-          <a:noFill/>
-        </p:spPr>
-        <p:txBody>
-          <a:bodyPr wrap="square" lIns="0" tIns="0" rIns="0" bIns="0">
-            <a:spAutoFit/>
-          </a:bodyPr>
-          <a:lstStyle/>
-          <a:p>
-            <a:pPr algn="l">
-              <a:lnSpc>
-                <a:spcPct val="100000"/>
-              </a:lnSpc>
-              <a:spcAft>
-                <a:spcPts val="200"/>
-              </a:spcAft>
-              <a:defRPr sz="1800" b="1">
-                <a:solidFill>
-                  <a:srgbClr val="0E7C86"/>
-                </a:solidFill>
-                <a:latin typeface="Calibri"/>
-              </a:defRPr>
-            </a:pPr>
-            <a:r>
-              <a:rPr sz="1800" b="1">
-                <a:solidFill>
-                  <a:srgbClr val="0E7C86"/>
-                </a:solidFill>
-                <a:latin typeface="Calibri"/>
-              </a:rPr>
-              <a:t>What you should see</a:t>
-            </a:r>
-          </a:p>
-        </p:txBody>
-      </p:sp>
-      <p:sp>
-        <p:nvSpPr>
-          <p:cNvPr id="9" name="TextBox 8"/>
-          <p:cNvSpPr txBox="1"/>
-          <p:nvPr/>
-        </p:nvSpPr>
-        <p:spPr>
-          <a:xfrm>
-            <a:off x="6301587" y="2304288"/>
-            <a:ext cx="5387187" cy="1778508"/>
-          </a:xfrm>
-          <a:prstGeom prst="rect">
-            <a:avLst/>
-          </a:prstGeom>
-          <a:noFill/>
-        </p:spPr>
-        <p:txBody>
-          <a:bodyPr wrap="square" lIns="0" tIns="0" rIns="0" bIns="0">
-            <a:spAutoFit/>
-          </a:bodyPr>
-          <a:lstStyle/>
-          <a:p>
-            <a:pPr algn="l">
-              <a:lnSpc>
-                <a:spcPct val="100000"/>
-              </a:lnSpc>
-              <a:spcAft>
-                <a:spcPts val="200"/>
-              </a:spcAft>
-              <a:defRPr sz="1800" b="0">
-                <a:solidFill>
-                  <a:srgbClr val="222222"/>
-                </a:solidFill>
-                <a:latin typeface="Calibri"/>
-              </a:defRPr>
-            </a:pPr>
-            <a:r>
-              <a:rPr sz="1800" b="0">
-                <a:solidFill>
-                  <a:srgbClr val="222222"/>
-                </a:solidFill>
-                <a:latin typeface="Calibri"/>
-              </a:rPr>
-              <a:t>Every connection attempt prints an address. With the lock on, everything except the locked address is turned away.</a:t>
-            </a:r>
-          </a:p>
-        </p:txBody>
-      </p:sp>
-      <p:sp>
-        <p:nvSpPr>
-          <p:cNvPr id="10" name="TextBox 9"/>
-          <p:cNvSpPr txBox="1"/>
-          <p:nvPr/>
-        </p:nvSpPr>
-        <p:spPr>
-          <a:xfrm>
-            <a:off x="6301587" y="4119372"/>
-            <a:ext cx="5387187" cy="365760"/>
-          </a:xfrm>
-          <a:prstGeom prst="rect">
-            <a:avLst/>
-          </a:prstGeom>
-          <a:noFill/>
-        </p:spPr>
-        <p:txBody>
-          <a:bodyPr wrap="square" lIns="0" tIns="0" rIns="0" bIns="0">
-            <a:spAutoFit/>
-          </a:bodyPr>
-          <a:lstStyle/>
-          <a:p>
-            <a:pPr algn="l">
-              <a:lnSpc>
-                <a:spcPct val="100000"/>
-              </a:lnSpc>
-              <a:spcAft>
-                <a:spcPts val="200"/>
-              </a:spcAft>
-              <a:defRPr sz="1800" b="1">
-                <a:solidFill>
-                  <a:srgbClr val="0E7C86"/>
-                </a:solidFill>
-                <a:latin typeface="Calibri"/>
-              </a:defRPr>
-            </a:pPr>
-            <a:r>
-              <a:rPr sz="1800" b="1">
-                <a:solidFill>
-                  <a:srgbClr val="0E7C86"/>
-                </a:solidFill>
-                <a:latin typeface="Calibri"/>
-              </a:rPr>
-              <a:t>Answer these</a:t>
-            </a:r>
-          </a:p>
-        </p:txBody>
-      </p:sp>
-      <p:sp>
-        <p:nvSpPr>
-          <p:cNvPr id="11" name="TextBox 10"/>
-          <p:cNvSpPr txBox="1"/>
-          <p:nvPr/>
-        </p:nvSpPr>
-        <p:spPr>
-          <a:xfrm>
-            <a:off x="6301587" y="4521708"/>
-            <a:ext cx="5387187" cy="1778508"/>
-          </a:xfrm>
-          <a:prstGeom prst="rect">
-            <a:avLst/>
-          </a:prstGeom>
-          <a:noFill/>
-        </p:spPr>
-        <p:txBody>
-          <a:bodyPr wrap="square" lIns="0" tIns="0" rIns="0" bIns="0">
-            <a:spAutoFit/>
-          </a:bodyPr>
-          <a:lstStyle/>
-          <a:p>
-            <a:pPr algn="l">
-              <a:lnSpc>
-                <a:spcPct val="100000"/>
-              </a:lnSpc>
-              <a:spcAft>
-                <a:spcPts val="200"/>
-              </a:spcAft>
-              <a:defRPr sz="1800" b="0">
-                <a:solidFill>
-                  <a:srgbClr val="222222"/>
-                </a:solidFill>
-                <a:latin typeface="Calibri"/>
-              </a:defRPr>
-            </a:pPr>
-            <a:r>
-              <a:rPr sz="1800" b="0">
-                <a:solidFill>
-                  <a:srgbClr val="222222"/>
-                </a:solidFill>
-                <a:latin typeface="Calibri"/>
-              </a:rPr>
-              <a:t>Where does this sketch keep its locked address, and what happens to it at the next reset?</a:t>
-            </a:r>
-          </a:p>
-          <a:p>
-            <a:pPr algn="l">
-              <a:lnSpc>
-                <a:spcPct val="100000"/>
-              </a:lnSpc>
-              <a:spcAft>
-                <a:spcPts val="200"/>
-              </a:spcAft>
-              <a:defRPr sz="1800" b="0">
-                <a:solidFill>
-                  <a:srgbClr val="222222"/>
-                </a:solidFill>
-                <a:latin typeface="Calibri"/>
-              </a:defRPr>
-            </a:pPr>
-            <a:r>
-              <a:rPr sz="1800" b="0">
-                <a:solidFill>
-                  <a:srgbClr val="222222"/>
-                </a:solidFill>
-                <a:latin typeface="Calibri"/>
-              </a:rPr>
-              <a:t>Why does the sketch call applyAllowlist() AFTER BP32.setup()?</a:t>
+                  <a:srgbClr val="B46A0F"/>
+                </a:solidFill>
+                <a:latin typeface="Calibri"/>
+              </a:rPr>
+              <a:t>WATCH OUT   </a:t>
+            </a:r>
+            <a:r>
+              <a:rPr sz="1500">
+                <a:solidFill>
+                  <a:srgbClr val="222222"/>
+                </a:solidFill>
+                <a:latin typeface="Calibri"/>
+              </a:rPr>
+              <a:t>11.2 added addresses at runtime only. If those entries did not survive a reboot, a vehicle could come back up with an empty allowlist AND new connections disabled - and then refuse its own controller with no way in.</a:t>
             </a:r>
           </a:p>
         </p:txBody>
@@ -11236,7 +12467,7 @@
                 </a:solidFill>
                 <a:latin typeface="Calibri"/>
               </a:rPr>
-              <a:t>There is no EEPROM on an ESP32</a:t>
+              <a:t>Where we are</a:t>
             </a:r>
           </a:p>
         </p:txBody>
@@ -11383,14 +12614,84 @@
       </p:sp>
       <p:sp>
         <p:nvSpPr>
-          <p:cNvPr id="6" name="TextBox 5"/>
+          <p:cNvPr id="6" name="Rounded Rectangle 5"/>
+          <p:cNvSpPr/>
+          <p:nvPr/>
+        </p:nvSpPr>
+        <p:spPr>
+          <a:xfrm>
+            <a:off x="502920" y="2240280"/>
+            <a:ext cx="3631082" cy="1737360"/>
+          </a:xfrm>
+          <a:prstGeom prst="roundRect">
+            <a:avLst>
+              <a:gd name="adj" fmla="val 8000"/>
+            </a:avLst>
+          </a:prstGeom>
+          <a:solidFill>
+            <a:srgbClr val="EEF3F8"/>
+          </a:solidFill>
+          <a:ln w="12700">
+            <a:solidFill>
+              <a:srgbClr val="0E7C86"/>
+            </a:solidFill>
+          </a:ln>
+          <a:effectLst/>
+        </p:spPr>
+        <p:style>
+          <a:lnRef idx="1">
+            <a:schemeClr val="accent1"/>
+          </a:lnRef>
+          <a:fillRef idx="3">
+            <a:schemeClr val="accent1"/>
+          </a:fillRef>
+          <a:effectRef idx="2">
+            <a:schemeClr val="accent1"/>
+          </a:effectRef>
+          <a:fontRef idx="minor">
+            <a:schemeClr val="lt1"/>
+          </a:fontRef>
+        </p:style>
+        <p:txBody>
+          <a:bodyPr rtlCol="0" anchor="ctr" wrap="square" lIns="73152" rIns="73152"/>
+          <a:lstStyle/>
+          <a:p>
+            <a:pPr algn="ctr">
+              <a:lnSpc>
+                <a:spcPct val="100000"/>
+              </a:lnSpc>
+              <a:spcAft>
+                <a:spcPts val="0"/>
+              </a:spcAft>
+              <a:defRPr sz="1700" b="0">
+                <a:solidFill>
+                  <a:srgbClr val="1F3A5F"/>
+                </a:solidFill>
+                <a:latin typeface="Calibri"/>
+              </a:defRPr>
+            </a:pPr>
+            <a:r>
+              <a:rPr sz="1700" b="0">
+                <a:solidFill>
+                  <a:srgbClr val="1F3A5F"/>
+                </a:solidFill>
+                <a:latin typeface="Calibri"/>
+              </a:rPr>
+              <a:t>Callbacks and allowlist</a:t>
+            </a:r>
+          </a:p>
+        </p:txBody>
+      </p:sp>
+      <p:sp>
+        <p:nvSpPr>
+          <p:cNvPr id="7" name="TextBox 6"/>
           <p:cNvSpPr txBox="1"/>
           <p:nvPr/>
         </p:nvSpPr>
         <p:spPr>
           <a:xfrm>
-            <a:off x="502920" y="1188720"/>
-            <a:ext cx="11185855" cy="530352"/>
+            <a:off x="502920" y="1856232"/>
+            <a:ext cx="3631082" cy="347472"/>
           </a:xfrm>
           <a:prstGeom prst="rect">
             <a:avLst/>
@@ -11403,14 +12704,14 @@
           </a:bodyPr>
           <a:lstStyle/>
           <a:p>
-            <a:pPr algn="l">
+            <a:pPr algn="ctr">
               <a:lnSpc>
                 <a:spcPct val="100000"/>
               </a:lnSpc>
               <a:spcAft>
                 <a:spcPts val="600"/>
               </a:spcAft>
-              <a:defRPr sz="1900" b="1">
+              <a:defRPr sz="1200" b="1">
                 <a:solidFill>
                   <a:srgbClr val="0E7C86"/>
                 </a:solidFill>
@@ -11418,27 +12719,97 @@
               </a:defRPr>
             </a:pPr>
             <a:r>
-              <a:rPr sz="1900" b="1">
+              <a:rPr sz="1200" b="1">
                 <a:solidFill>
                   <a:srgbClr val="0E7C86"/>
                 </a:solidFill>
                 <a:latin typeface="Calibri"/>
               </a:rPr>
-              <a:t>It is flash, pretending</a:t>
-            </a:r>
-          </a:p>
-        </p:txBody>
-      </p:sp>
-      <p:sp>
-        <p:nvSpPr>
-          <p:cNvPr id="7" name="TextBox 6"/>
+              <a:t>done</a:t>
+            </a:r>
+          </a:p>
+        </p:txBody>
+      </p:sp>
+      <p:sp>
+        <p:nvSpPr>
+          <p:cNvPr id="8" name="Rounded Rectangle 7"/>
+          <p:cNvSpPr/>
+          <p:nvPr/>
+        </p:nvSpPr>
+        <p:spPr>
+          <a:xfrm>
+            <a:off x="4280306" y="2240280"/>
+            <a:ext cx="3631082" cy="1737360"/>
+          </a:xfrm>
+          <a:prstGeom prst="roundRect">
+            <a:avLst>
+              <a:gd name="adj" fmla="val 8000"/>
+            </a:avLst>
+          </a:prstGeom>
+          <a:solidFill>
+            <a:srgbClr val="D6ECEE"/>
+          </a:solidFill>
+          <a:ln w="25400">
+            <a:solidFill>
+              <a:srgbClr val="0E7C86"/>
+            </a:solidFill>
+          </a:ln>
+          <a:effectLst/>
+        </p:spPr>
+        <p:style>
+          <a:lnRef idx="1">
+            <a:schemeClr val="accent1"/>
+          </a:lnRef>
+          <a:fillRef idx="3">
+            <a:schemeClr val="accent1"/>
+          </a:fillRef>
+          <a:effectRef idx="2">
+            <a:schemeClr val="accent1"/>
+          </a:effectRef>
+          <a:fontRef idx="minor">
+            <a:schemeClr val="lt1"/>
+          </a:fontRef>
+        </p:style>
+        <p:txBody>
+          <a:bodyPr rtlCol="0" anchor="ctr" wrap="square" lIns="73152" rIns="73152"/>
+          <a:lstStyle/>
+          <a:p>
+            <a:pPr algn="ctr">
+              <a:lnSpc>
+                <a:spcPct val="100000"/>
+              </a:lnSpc>
+              <a:spcAft>
+                <a:spcPts val="0"/>
+              </a:spcAft>
+              <a:defRPr sz="1700" b="1">
+                <a:solidFill>
+                  <a:srgbClr val="1F3A5F"/>
+                </a:solidFill>
+                <a:latin typeface="Calibri"/>
+              </a:defRPr>
+            </a:pPr>
+            <a:r>
+              <a:rPr sz="1700" b="1">
+                <a:solidFill>
+                  <a:srgbClr val="1F3A5F"/>
+                </a:solidFill>
+                <a:latin typeface="Calibri"/>
+              </a:rPr>
+              <a:t>Locking a board</a:t>
+            </a:r>
+          </a:p>
+        </p:txBody>
+      </p:sp>
+      <p:sp>
+        <p:nvSpPr>
+          <p:cNvPr id="9" name="TextBox 8"/>
           <p:cNvSpPr txBox="1"/>
           <p:nvPr/>
         </p:nvSpPr>
         <p:spPr>
           <a:xfrm>
-            <a:off x="502920" y="1755648"/>
-            <a:ext cx="11185855" cy="4507992"/>
+            <a:off x="4280306" y="1856232"/>
+            <a:ext cx="3631082" cy="347472"/>
           </a:xfrm>
           <a:prstGeom prst="rect">
             <a:avLst/>
@@ -11451,144 +12822,98 @@
           </a:bodyPr>
           <a:lstStyle/>
           <a:p>
-            <a:pPr algn="l">
-              <a:lnSpc>
-                <a:spcPct val="100000"/>
-              </a:lnSpc>
-              <a:spcAft>
-                <a:spcPts val="900"/>
-              </a:spcAft>
-              <a:defRPr sz="1800" b="0">
-                <a:solidFill>
-                  <a:srgbClr val="222222"/>
-                </a:solidFill>
-                <a:latin typeface="Calibri"/>
-              </a:defRPr>
-            </a:pPr>
-            <a:r>
-              <a:rPr sz="1800" b="0">
-                <a:solidFill>
-                  <a:srgbClr val="222222"/>
-                </a:solidFill>
-                <a:latin typeface="Calibri"/>
-              </a:rPr>
-              <a:t>The EEPROM library is an EMULATION. It reserves a slice of the flash chip, keeps a copy in RAM, and only writes the flash when you call commit().</a:t>
-            </a:r>
-          </a:p>
-          <a:p>
-            <a:pPr algn="l">
-              <a:lnSpc>
-                <a:spcPct val="100000"/>
-              </a:lnSpc>
-              <a:spcAft>
-                <a:spcPts val="900"/>
-              </a:spcAft>
-              <a:defRPr sz="1800" b="0">
-                <a:solidFill>
-                  <a:srgbClr val="222222"/>
-                </a:solidFill>
-                <a:latin typeface="Calibri"/>
-              </a:defRPr>
-            </a:pPr>
-          </a:p>
-          <a:p>
-            <a:pPr algn="l">
-              <a:lnSpc>
-                <a:spcPct val="100000"/>
-              </a:lnSpc>
-              <a:spcAft>
-                <a:spcPts val="900"/>
-              </a:spcAft>
-              <a:defRPr sz="1800" b="0">
-                <a:solidFill>
-                  <a:srgbClr val="222222"/>
-                </a:solidFill>
-                <a:latin typeface="Calibri"/>
-              </a:defRPr>
-            </a:pPr>
-            <a:r>
-              <a:rPr sz="1800" b="0">
-                <a:solidFill>
-                  <a:srgbClr val="222222"/>
-                </a:solidFill>
-                <a:latin typeface="Calibri"/>
-              </a:rPr>
-              <a:t>Three consequences:</a:t>
-            </a:r>
-          </a:p>
-          <a:p>
-            <a:pPr lvl="1" algn="l">
-              <a:lnSpc>
-                <a:spcPct val="100000"/>
-              </a:lnSpc>
-              <a:spcAft>
-                <a:spcPts val="900"/>
-              </a:spcAft>
-              <a:defRPr sz="1800" b="0">
-                <a:solidFill>
-                  <a:srgbClr val="222222"/>
-                </a:solidFill>
-                <a:latin typeface="Calibri"/>
-              </a:defRPr>
-            </a:pPr>
-            <a:r>
-              <a:rPr sz="1800" b="0">
-                <a:solidFill>
-                  <a:srgbClr val="222222"/>
-                </a:solidFill>
-                <a:latin typeface="Calibri"/>
-              </a:rPr>
-              <a:t>EEPROM.begin(size) must come first, before any get or put.</a:t>
-            </a:r>
-          </a:p>
-          <a:p>
-            <a:pPr lvl="1" algn="l">
-              <a:lnSpc>
-                <a:spcPct val="100000"/>
-              </a:lnSpc>
-              <a:spcAft>
-                <a:spcPts val="900"/>
-              </a:spcAft>
-              <a:defRPr sz="1800" b="0">
-                <a:solidFill>
-                  <a:srgbClr val="222222"/>
-                </a:solidFill>
-                <a:latin typeface="Calibri"/>
-              </a:defRPr>
-            </a:pPr>
-            <a:r>
-              <a:rPr sz="1800" b="0">
-                <a:solidFill>
-                  <a:srgbClr val="222222"/>
-                </a:solidFill>
-                <a:latin typeface="Calibri"/>
-              </a:rPr>
-              <a:t>Nothing is stored until EEPROM.commit(). Forgetting it is the single most common cause of "my settings did not save".</a:t>
-            </a:r>
-          </a:p>
-          <a:p>
-            <a:pPr lvl="1" algn="l">
-              <a:lnSpc>
-                <a:spcPct val="100000"/>
-              </a:lnSpc>
-              <a:spcAft>
-                <a:spcPts val="900"/>
-              </a:spcAft>
-              <a:defRPr sz="1800" b="0">
-                <a:solidFill>
-                  <a:srgbClr val="222222"/>
-                </a:solidFill>
-                <a:latin typeface="Calibri"/>
-              </a:defRPr>
-            </a:pPr>
-            <a:r>
-              <a:rPr sz="1800" b="0">
-                <a:solidFill>
-                  <a:srgbClr val="222222"/>
-                </a:solidFill>
-                <a:latin typeface="Calibri"/>
-              </a:rPr>
-              <a:t>Flash WEARS OUT - roughly a hundred thousand erase cycles per sector. Plenty for saving when a human asks. Nowhere near enough to commit() inside loop().</a:t>
+            <a:pPr algn="ctr">
+              <a:lnSpc>
+                <a:spcPct val="100000"/>
+              </a:lnSpc>
+              <a:spcAft>
+                <a:spcPts val="600"/>
+              </a:spcAft>
+              <a:defRPr sz="1200" b="1">
+                <a:solidFill>
+                  <a:srgbClr val="0E7C86"/>
+                </a:solidFill>
+                <a:latin typeface="Calibri"/>
+              </a:defRPr>
+            </a:pPr>
+            <a:r>
+              <a:rPr sz="1200" b="1">
+                <a:solidFill>
+                  <a:srgbClr val="0E7C86"/>
+                </a:solidFill>
+                <a:latin typeface="Calibri"/>
+              </a:rPr>
+              <a:t>NOW</a:t>
+            </a:r>
+          </a:p>
+        </p:txBody>
+      </p:sp>
+      <p:sp>
+        <p:nvSpPr>
+          <p:cNvPr id="10" name="Rounded Rectangle 9"/>
+          <p:cNvSpPr/>
+          <p:nvPr/>
+        </p:nvSpPr>
+        <p:spPr>
+          <a:xfrm>
+            <a:off x="8057692" y="2240280"/>
+            <a:ext cx="3631082" cy="1737360"/>
+          </a:xfrm>
+          <a:prstGeom prst="roundRect">
+            <a:avLst>
+              <a:gd name="adj" fmla="val 8000"/>
+            </a:avLst>
+          </a:prstGeom>
+          <a:solidFill>
+            <a:srgbClr val="FFFFFF"/>
+          </a:solidFill>
+          <a:ln w="12700">
+            <a:solidFill>
+              <a:srgbClr val="C8D2DE"/>
+            </a:solidFill>
+          </a:ln>
+          <a:effectLst/>
+        </p:spPr>
+        <p:style>
+          <a:lnRef idx="1">
+            <a:schemeClr val="accent1"/>
+          </a:lnRef>
+          <a:fillRef idx="3">
+            <a:schemeClr val="accent1"/>
+          </a:fillRef>
+          <a:effectRef idx="2">
+            <a:schemeClr val="accent1"/>
+          </a:effectRef>
+          <a:fontRef idx="minor">
+            <a:schemeClr val="lt1"/>
+          </a:fontRef>
+        </p:style>
+        <p:txBody>
+          <a:bodyPr rtlCol="0" anchor="ctr" wrap="square" lIns="73152" rIns="73152"/>
+          <a:lstStyle/>
+          <a:p>
+            <a:pPr algn="ctr">
+              <a:lnSpc>
+                <a:spcPct val="100000"/>
+              </a:lnSpc>
+              <a:spcAft>
+                <a:spcPts val="0"/>
+              </a:spcAft>
+              <a:defRPr sz="1700" b="0">
+                <a:solidFill>
+                  <a:srgbClr val="666666"/>
+                </a:solidFill>
+                <a:latin typeface="Calibri"/>
+              </a:defRPr>
+            </a:pPr>
+            <a:r>
+              <a:rPr sz="1700" b="0">
+                <a:solidFill>
+                  <a:srgbClr val="666666"/>
+                </a:solidFill>
+                <a:latin typeface="Calibri"/>
+              </a:rPr>
+              <a:t>EEPROM</a:t>
             </a:r>
           </a:p>
         </p:txBody>
@@ -11652,7 +12977,7 @@
                 </a:solidFill>
                 <a:latin typeface="Calibri"/>
               </a:rPr>
-              <a:t>There is no EEPROM on an ESP32  (continued)</a:t>
+              <a:t>Do it now  -  lock a board to one pad</a:t>
             </a:r>
           </a:p>
         </p:txBody>
@@ -11799,78 +13124,14 @@
       </p:sp>
       <p:sp>
         <p:nvSpPr>
-          <p:cNvPr id="6" name="TextBox 5"/>
-          <p:cNvSpPr txBox="1"/>
-          <p:nvPr/>
-        </p:nvSpPr>
-        <p:spPr>
-          <a:xfrm>
-            <a:off x="502920" y="1188720"/>
-            <a:ext cx="11185855" cy="4023360"/>
-          </a:xfrm>
-          <a:prstGeom prst="rect">
-            <a:avLst/>
-          </a:prstGeom>
-          <a:noFill/>
-        </p:spPr>
-        <p:txBody>
-          <a:bodyPr wrap="square" lIns="0" tIns="0" rIns="0" bIns="0">
-            <a:spAutoFit/>
-          </a:bodyPr>
-          <a:lstStyle/>
-          <a:p>
-            <a:pPr algn="l">
-              <a:lnSpc>
-                <a:spcPct val="100000"/>
-              </a:lnSpc>
-              <a:spcAft>
-                <a:spcPts val="900"/>
-              </a:spcAft>
-              <a:defRPr sz="1800" b="0">
-                <a:solidFill>
-                  <a:srgbClr val="222222"/>
-                </a:solidFill>
-                <a:latin typeface="Calibri"/>
-              </a:defRPr>
-            </a:pPr>
-          </a:p>
-          <a:p>
-            <a:pPr algn="l">
-              <a:lnSpc>
-                <a:spcPct val="100000"/>
-              </a:lnSpc>
-              <a:spcAft>
-                <a:spcPts val="900"/>
-              </a:spcAft>
-              <a:defRPr sz="1800" b="0">
-                <a:solidFill>
-                  <a:srgbClr val="222222"/>
-                </a:solidFill>
-                <a:latin typeface="Calibri"/>
-              </a:defRPr>
-            </a:pPr>
-            <a:r>
-              <a:rPr sz="1800" b="0">
-                <a:solidFill>
-                  <a:srgbClr val="222222"/>
-                </a:solidFill>
-                <a:latin typeface="Calibri"/>
-              </a:rPr>
-              <a:t>Never write on a schedule. Write when something actually changed, and only when a person asked for it.</a:t>
-            </a:r>
-          </a:p>
-        </p:txBody>
-      </p:sp>
-      <p:sp>
-        <p:nvSpPr>
-          <p:cNvPr id="7" name="Rounded Rectangle 6"/>
+          <p:cNvPr id="6" name="Rounded Rectangle 5"/>
           <p:cNvSpPr/>
           <p:nvPr/>
         </p:nvSpPr>
         <p:spPr>
           <a:xfrm>
-            <a:off x="502920" y="5303520"/>
-            <a:ext cx="11185855" cy="960120"/>
+            <a:off x="502920" y="1188720"/>
+            <a:ext cx="11185855" cy="530352"/>
           </a:xfrm>
           <a:prstGeom prst="roundRect">
             <a:avLst>
@@ -11878,12 +13139,10 @@
             </a:avLst>
           </a:prstGeom>
           <a:solidFill>
-            <a:srgbClr val="FDF3E3"/>
+            <a:srgbClr val="0E7C86"/>
           </a:solidFill>
-          <a:ln w="12700">
-            <a:solidFill>
-              <a:srgbClr val="B46A0F"/>
-            </a:solidFill>
+          <a:ln>
+            <a:noFill/>
           </a:ln>
           <a:effectLst/>
         </p:spPr>
@@ -11902,27 +13161,426 @@
           </a:fontRef>
         </p:style>
         <p:txBody>
-          <a:bodyPr rtlCol="0" anchor="ctr" wrap="square" lIns="164592" rIns="164592" tIns="73152" bIns="73152"/>
+          <a:bodyPr rtlCol="0" anchor="ctr" wrap="square" lIns="182880"/>
           <a:lstStyle/>
           <a:p>
             <a:pPr algn="l"/>
             <a:r>
               <a:rPr sz="1300" b="1">
                 <a:solidFill>
-                  <a:srgbClr val="B46A0F"/>
-                </a:solidFill>
-                <a:latin typeface="Calibri"/>
-              </a:rPr>
-              <a:t>WATCH OUT   </a:t>
-            </a:r>
-            <a:r>
-              <a:rPr sz="1500">
-                <a:solidFill>
-                  <a:srgbClr val="222222"/>
-                </a:solidFill>
-                <a:latin typeface="Calibri"/>
-              </a:rPr>
-              <a:t>A commit() in loop() at 30 Hz burns through a hundred thousand cycles in under an hour.</a:t>
+                  <a:srgbClr val="FFFFFF"/>
+                </a:solidFill>
+                <a:latin typeface="Calibri"/>
+              </a:rPr>
+              <a:t>UPLOAD AND RUN:   </a:t>
+            </a:r>
+            <a:r>
+              <a:rPr sz="1500" b="1">
+                <a:solidFill>
+                  <a:srgbClr val="FFFFFF"/>
+                </a:solidFill>
+                <a:latin typeface="Consolas"/>
+              </a:rPr>
+              <a:t>a3a_controller_address</a:t>
+            </a:r>
+            <a:r>
+              <a:rPr sz="1200">
+                <a:solidFill>
+                  <a:srgbClr val="FFFFFF"/>
+                </a:solidFill>
+                <a:latin typeface="Calibri"/>
+              </a:rPr>
+              <a:t>     (35 minutes)</a:t>
+            </a:r>
+          </a:p>
+        </p:txBody>
+      </p:sp>
+      <p:sp>
+        <p:nvSpPr>
+          <p:cNvPr id="7" name="TextBox 6"/>
+          <p:cNvSpPr txBox="1"/>
+          <p:nvPr/>
+        </p:nvSpPr>
+        <p:spPr>
+          <a:xfrm>
+            <a:off x="502920" y="1901952"/>
+            <a:ext cx="5387187" cy="4361688"/>
+          </a:xfrm>
+          <a:prstGeom prst="rect">
+            <a:avLst/>
+          </a:prstGeom>
+          <a:noFill/>
+        </p:spPr>
+        <p:txBody>
+          <a:bodyPr wrap="square" lIns="0" tIns="0" rIns="0" bIns="0">
+            <a:spAutoFit/>
+          </a:bodyPr>
+          <a:lstStyle/>
+          <a:p>
+            <a:pPr algn="l">
+              <a:lnSpc>
+                <a:spcPct val="100000"/>
+              </a:lnSpc>
+              <a:spcAft>
+                <a:spcPts val="400"/>
+              </a:spcAft>
+              <a:defRPr sz="1800" b="0">
+                <a:solidFill>
+                  <a:srgbClr val="222222"/>
+                </a:solidFill>
+                <a:latin typeface="Calibri"/>
+              </a:defRPr>
+            </a:pPr>
+            <a:r>
+              <a:rPr sz="1800" b="0">
+                <a:solidFill>
+                  <a:srgbClr val="222222"/>
+                </a:solidFill>
+                <a:latin typeface="Calibri"/>
+              </a:rPr>
+              <a:t>1.  Upload. The allowlist starts OFF. Connect a controller.</a:t>
+            </a:r>
+          </a:p>
+          <a:p>
+            <a:pPr algn="l">
+              <a:lnSpc>
+                <a:spcPct val="100000"/>
+              </a:lnSpc>
+              <a:spcAft>
+                <a:spcPts val="400"/>
+              </a:spcAft>
+              <a:defRPr sz="1800" b="0">
+                <a:solidFill>
+                  <a:srgbClr val="222222"/>
+                </a:solidFill>
+                <a:latin typeface="Calibri"/>
+              </a:defRPr>
+            </a:pPr>
+            <a:r>
+              <a:rPr sz="1800" b="0">
+                <a:solidFill>
+                  <a:srgbClr val="222222"/>
+                </a:solidFill>
+                <a:latin typeface="Calibri"/>
+              </a:rPr>
+              <a:t>2.  Type  lock. Disconnect, and connect a DIFFERENT controller.</a:t>
+            </a:r>
+          </a:p>
+          <a:p>
+            <a:pPr algn="l">
+              <a:lnSpc>
+                <a:spcPct val="100000"/>
+              </a:lnSpc>
+              <a:spcAft>
+                <a:spcPts val="400"/>
+              </a:spcAft>
+              <a:defRPr sz="1800" b="0">
+                <a:solidFill>
+                  <a:srgbClr val="222222"/>
+                </a:solidFill>
+                <a:latin typeface="Calibri"/>
+              </a:defRPr>
+            </a:pPr>
+            <a:r>
+              <a:rPr sz="1800" b="0">
+                <a:solidFill>
+                  <a:srgbClr val="222222"/>
+                </a:solidFill>
+                <a:latin typeface="Calibri"/>
+              </a:rPr>
+              <a:t>3.  Watch the refusal in the Serial Monitor.</a:t>
+            </a:r>
+          </a:p>
+          <a:p>
+            <a:pPr algn="l">
+              <a:lnSpc>
+                <a:spcPct val="100000"/>
+              </a:lnSpc>
+              <a:spcAft>
+                <a:spcPts val="400"/>
+              </a:spcAft>
+              <a:defRPr sz="1800" b="0">
+                <a:solidFill>
+                  <a:srgbClr val="222222"/>
+                </a:solidFill>
+                <a:latin typeface="Calibri"/>
+              </a:defRPr>
+            </a:pPr>
+            <a:r>
+              <a:rPr sz="1800" b="0">
+                <a:solidFill>
+                  <a:srgbClr val="222222"/>
+                </a:solidFill>
+                <a:latin typeface="Calibri"/>
+              </a:rPr>
+              <a:t>4.  Type  open  and try the second one again.</a:t>
+            </a:r>
+          </a:p>
+          <a:p>
+            <a:pPr algn="l">
+              <a:lnSpc>
+                <a:spcPct val="100000"/>
+              </a:lnSpc>
+              <a:spcAft>
+                <a:spcPts val="400"/>
+              </a:spcAft>
+              <a:defRPr sz="1800" b="0">
+                <a:solidFill>
+                  <a:srgbClr val="222222"/>
+                </a:solidFill>
+                <a:latin typeface="Calibri"/>
+              </a:defRPr>
+            </a:pPr>
+            <a:r>
+              <a:rPr sz="1800" b="0">
+                <a:solidFill>
+                  <a:srgbClr val="222222"/>
+                </a:solidFill>
+                <a:latin typeface="Calibri"/>
+              </a:rPr>
+              <a:t>5.  Type  lockaddr 00:11:22:33:44:55  and try to connect anything.</a:t>
+            </a:r>
+          </a:p>
+          <a:p>
+            <a:pPr algn="l">
+              <a:lnSpc>
+                <a:spcPct val="100000"/>
+              </a:lnSpc>
+              <a:spcAft>
+                <a:spcPts val="400"/>
+              </a:spcAft>
+              <a:defRPr sz="1800" b="0">
+                <a:solidFill>
+                  <a:srgbClr val="222222"/>
+                </a:solidFill>
+                <a:latin typeface="Calibri"/>
+              </a:defRPr>
+            </a:pPr>
+            <a:r>
+              <a:rPr sz="1800" b="0">
+                <a:solidFill>
+                  <a:srgbClr val="222222"/>
+                </a:solidFill>
+                <a:latin typeface="Calibri"/>
+              </a:rPr>
+              <a:t>6.  Type  whoami. Compare with what a Bluetooth scanner app on your phone shows for this board.</a:t>
+            </a:r>
+          </a:p>
+        </p:txBody>
+      </p:sp>
+      <p:sp>
+        <p:nvSpPr>
+          <p:cNvPr id="8" name="TextBox 7"/>
+          <p:cNvSpPr txBox="1"/>
+          <p:nvPr/>
+        </p:nvSpPr>
+        <p:spPr>
+          <a:xfrm>
+            <a:off x="6301587" y="1901952"/>
+            <a:ext cx="5387187" cy="365760"/>
+          </a:xfrm>
+          <a:prstGeom prst="rect">
+            <a:avLst/>
+          </a:prstGeom>
+          <a:noFill/>
+        </p:spPr>
+        <p:txBody>
+          <a:bodyPr wrap="square" lIns="0" tIns="0" rIns="0" bIns="0">
+            <a:spAutoFit/>
+          </a:bodyPr>
+          <a:lstStyle/>
+          <a:p>
+            <a:pPr algn="l">
+              <a:lnSpc>
+                <a:spcPct val="100000"/>
+              </a:lnSpc>
+              <a:spcAft>
+                <a:spcPts val="200"/>
+              </a:spcAft>
+              <a:defRPr sz="1800" b="1">
+                <a:solidFill>
+                  <a:srgbClr val="0E7C86"/>
+                </a:solidFill>
+                <a:latin typeface="Calibri"/>
+              </a:defRPr>
+            </a:pPr>
+            <a:r>
+              <a:rPr sz="1800" b="1">
+                <a:solidFill>
+                  <a:srgbClr val="0E7C86"/>
+                </a:solidFill>
+                <a:latin typeface="Calibri"/>
+              </a:rPr>
+              <a:t>What you should see</a:t>
+            </a:r>
+          </a:p>
+        </p:txBody>
+      </p:sp>
+      <p:sp>
+        <p:nvSpPr>
+          <p:cNvPr id="9" name="TextBox 8"/>
+          <p:cNvSpPr txBox="1"/>
+          <p:nvPr/>
+        </p:nvSpPr>
+        <p:spPr>
+          <a:xfrm>
+            <a:off x="6301587" y="2304288"/>
+            <a:ext cx="5387187" cy="1778508"/>
+          </a:xfrm>
+          <a:prstGeom prst="rect">
+            <a:avLst/>
+          </a:prstGeom>
+          <a:noFill/>
+        </p:spPr>
+        <p:txBody>
+          <a:bodyPr wrap="square" lIns="0" tIns="0" rIns="0" bIns="0">
+            <a:spAutoFit/>
+          </a:bodyPr>
+          <a:lstStyle/>
+          <a:p>
+            <a:pPr algn="l">
+              <a:lnSpc>
+                <a:spcPct val="100000"/>
+              </a:lnSpc>
+              <a:spcAft>
+                <a:spcPts val="200"/>
+              </a:spcAft>
+              <a:defRPr sz="1800" b="0">
+                <a:solidFill>
+                  <a:srgbClr val="222222"/>
+                </a:solidFill>
+                <a:latin typeface="Calibri"/>
+              </a:defRPr>
+            </a:pPr>
+            <a:r>
+              <a:rPr sz="1800" b="0">
+                <a:solidFill>
+                  <a:srgbClr val="222222"/>
+                </a:solidFill>
+                <a:latin typeface="Calibri"/>
+              </a:rPr>
+              <a:t>Every connection attempt prints an address. With the lock on, everything except the locked address is turned away.</a:t>
+            </a:r>
+          </a:p>
+        </p:txBody>
+      </p:sp>
+      <p:sp>
+        <p:nvSpPr>
+          <p:cNvPr id="10" name="TextBox 9"/>
+          <p:cNvSpPr txBox="1"/>
+          <p:nvPr/>
+        </p:nvSpPr>
+        <p:spPr>
+          <a:xfrm>
+            <a:off x="6301587" y="4119372"/>
+            <a:ext cx="5387187" cy="365760"/>
+          </a:xfrm>
+          <a:prstGeom prst="rect">
+            <a:avLst/>
+          </a:prstGeom>
+          <a:noFill/>
+        </p:spPr>
+        <p:txBody>
+          <a:bodyPr wrap="square" lIns="0" tIns="0" rIns="0" bIns="0">
+            <a:spAutoFit/>
+          </a:bodyPr>
+          <a:lstStyle/>
+          <a:p>
+            <a:pPr algn="l">
+              <a:lnSpc>
+                <a:spcPct val="100000"/>
+              </a:lnSpc>
+              <a:spcAft>
+                <a:spcPts val="200"/>
+              </a:spcAft>
+              <a:defRPr sz="1800" b="1">
+                <a:solidFill>
+                  <a:srgbClr val="0E7C86"/>
+                </a:solidFill>
+                <a:latin typeface="Calibri"/>
+              </a:defRPr>
+            </a:pPr>
+            <a:r>
+              <a:rPr sz="1800" b="1">
+                <a:solidFill>
+                  <a:srgbClr val="0E7C86"/>
+                </a:solidFill>
+                <a:latin typeface="Calibri"/>
+              </a:rPr>
+              <a:t>Answer these</a:t>
+            </a:r>
+          </a:p>
+        </p:txBody>
+      </p:sp>
+      <p:sp>
+        <p:nvSpPr>
+          <p:cNvPr id="11" name="TextBox 10"/>
+          <p:cNvSpPr txBox="1"/>
+          <p:nvPr/>
+        </p:nvSpPr>
+        <p:spPr>
+          <a:xfrm>
+            <a:off x="6301587" y="4521708"/>
+            <a:ext cx="5387187" cy="1778508"/>
+          </a:xfrm>
+          <a:prstGeom prst="rect">
+            <a:avLst/>
+          </a:prstGeom>
+          <a:noFill/>
+        </p:spPr>
+        <p:txBody>
+          <a:bodyPr wrap="square" lIns="0" tIns="0" rIns="0" bIns="0">
+            <a:spAutoFit/>
+          </a:bodyPr>
+          <a:lstStyle/>
+          <a:p>
+            <a:pPr algn="l">
+              <a:lnSpc>
+                <a:spcPct val="100000"/>
+              </a:lnSpc>
+              <a:spcAft>
+                <a:spcPts val="200"/>
+              </a:spcAft>
+              <a:defRPr sz="1800" b="0">
+                <a:solidFill>
+                  <a:srgbClr val="222222"/>
+                </a:solidFill>
+                <a:latin typeface="Calibri"/>
+              </a:defRPr>
+            </a:pPr>
+            <a:r>
+              <a:rPr sz="1800" b="0">
+                <a:solidFill>
+                  <a:srgbClr val="222222"/>
+                </a:solidFill>
+                <a:latin typeface="Calibri"/>
+              </a:rPr>
+              <a:t>Where does this sketch keep its locked address, and what happens to it at the next reset?</a:t>
+            </a:r>
+          </a:p>
+          <a:p>
+            <a:pPr algn="l">
+              <a:lnSpc>
+                <a:spcPct val="100000"/>
+              </a:lnSpc>
+              <a:spcAft>
+                <a:spcPts val="200"/>
+              </a:spcAft>
+              <a:defRPr sz="1800" b="0">
+                <a:solidFill>
+                  <a:srgbClr val="222222"/>
+                </a:solidFill>
+                <a:latin typeface="Calibri"/>
+              </a:defRPr>
+            </a:pPr>
+            <a:r>
+              <a:rPr sz="1800" b="0">
+                <a:solidFill>
+                  <a:srgbClr val="222222"/>
+                </a:solidFill>
+                <a:latin typeface="Calibri"/>
+              </a:rPr>
+              <a:t>Why does the sketch call applyAllowlist() AFTER BP32.setup()?</a:t>
             </a:r>
           </a:p>
         </p:txBody>

--- a/ground-vehicle/docs/courses/advanced/l3_bluetooth_and_storage.pptx
+++ b/ground-vehicle/docs/courses/advanced/l3_bluetooth_and_storage.pptx
@@ -6,26 +6,26 @@
   </p:sldMasterIdLst>
   <p:sldIdLst>
     <p:sldId id="256" r:id="rId7"/>
-    <p:sldId id="257" r:id="rId8"/>
-    <p:sldId id="258" r:id="rId9"/>
-    <p:sldId id="259" r:id="rId10"/>
-    <p:sldId id="260" r:id="rId11"/>
-    <p:sldId id="261" r:id="rId12"/>
-    <p:sldId id="262" r:id="rId13"/>
-    <p:sldId id="263" r:id="rId14"/>
-    <p:sldId id="264" r:id="rId15"/>
-    <p:sldId id="265" r:id="rId16"/>
-    <p:sldId id="266" r:id="rId17"/>
-    <p:sldId id="267" r:id="rId18"/>
-    <p:sldId id="268" r:id="rId19"/>
-    <p:sldId id="269" r:id="rId20"/>
-    <p:sldId id="270" r:id="rId21"/>
-    <p:sldId id="271" r:id="rId22"/>
-    <p:sldId id="272" r:id="rId23"/>
-    <p:sldId id="273" r:id="rId24"/>
-    <p:sldId id="274" r:id="rId25"/>
-    <p:sldId id="275" r:id="rId26"/>
-    <p:sldId id="276" r:id="rId27"/>
+    <p:sldId id="257" r:id="rId9"/>
+    <p:sldId id="258" r:id="rId10"/>
+    <p:sldId id="259" r:id="rId11"/>
+    <p:sldId id="260" r:id="rId12"/>
+    <p:sldId id="261" r:id="rId13"/>
+    <p:sldId id="262" r:id="rId14"/>
+    <p:sldId id="263" r:id="rId15"/>
+    <p:sldId id="264" r:id="rId16"/>
+    <p:sldId id="265" r:id="rId17"/>
+    <p:sldId id="266" r:id="rId18"/>
+    <p:sldId id="267" r:id="rId19"/>
+    <p:sldId id="268" r:id="rId20"/>
+    <p:sldId id="269" r:id="rId21"/>
+    <p:sldId id="270" r:id="rId22"/>
+    <p:sldId id="271" r:id="rId23"/>
+    <p:sldId id="272" r:id="rId24"/>
+    <p:sldId id="273" r:id="rId25"/>
+    <p:sldId id="274" r:id="rId26"/>
+    <p:sldId id="275" r:id="rId27"/>
+    <p:sldId id="276" r:id="rId28"/>
   </p:sldIdLst>
   <p:sldSz cx="12191695" cy="6858000" type="screen4x3"/>
   <p:notesSz cx="6858000" cy="9144000"/>
@@ -125,6 +125,2350 @@
     </a:lvl9pPr>
   </p:defaultTextStyle>
 </p:presentation>
+</file>
+
+<file path=ppt/notesMasters/notesMaster1.xml><?xml version="1.0" encoding="utf-8"?>
+<p:notesMaster xmlns:a="http://schemas.openxmlformats.org/drawingml/2006/main" xmlns:p="http://schemas.openxmlformats.org/presentationml/2006/main" xmlns:r="http://schemas.openxmlformats.org/officeDocument/2006/relationships">
+  <p:cSld>
+    <p:bg>
+      <p:bgRef idx="1001">
+        <a:schemeClr val="bg1"/>
+      </p:bgRef>
+    </p:bg>
+    <p:spTree>
+      <p:nvGrpSpPr>
+        <p:cNvPr id="1" name=""/>
+        <p:cNvGrpSpPr/>
+        <p:nvPr/>
+      </p:nvGrpSpPr>
+      <p:grpSpPr>
+        <a:xfrm>
+          <a:off x="0" y="0"/>
+          <a:ext cx="0" cy="0"/>
+          <a:chOff x="0" y="0"/>
+          <a:chExt cx="0" cy="0"/>
+        </a:xfrm>
+      </p:grpSpPr>
+      <p:sp>
+        <p:nvSpPr>
+          <p:cNvPr id="2" name="Header Placeholder 1"/>
+          <p:cNvSpPr>
+            <a:spLocks noGrp="1"/>
+          </p:cNvSpPr>
+          <p:nvPr>
+            <p:ph type="hdr" sz="quarter"/>
+          </p:nvPr>
+        </p:nvSpPr>
+        <p:spPr>
+          <a:xfrm>
+            <a:off x="0" y="0"/>
+            <a:ext cx="2971800" cy="457200"/>
+          </a:xfrm>
+          <a:prstGeom prst="rect">
+            <a:avLst/>
+          </a:prstGeom>
+        </p:spPr>
+        <p:txBody>
+          <a:bodyPr vert="horz" lIns="91440" tIns="45720" rIns="91440" bIns="45720" rtlCol="0"/>
+          <a:lstStyle>
+            <a:lvl1pPr algn="l">
+              <a:defRPr sz="1200"/>
+            </a:lvl1pPr>
+          </a:lstStyle>
+          <a:p>
+            <a:endParaRPr lang="en-US"/>
+          </a:p>
+        </p:txBody>
+      </p:sp>
+      <p:sp>
+        <p:nvSpPr>
+          <p:cNvPr id="3" name="Date Placeholder 2"/>
+          <p:cNvSpPr>
+            <a:spLocks noGrp="1"/>
+          </p:cNvSpPr>
+          <p:nvPr>
+            <p:ph type="dt" idx="1"/>
+          </p:nvPr>
+        </p:nvSpPr>
+        <p:spPr>
+          <a:xfrm>
+            <a:off x="3884613" y="0"/>
+            <a:ext cx="2971800" cy="457200"/>
+          </a:xfrm>
+          <a:prstGeom prst="rect">
+            <a:avLst/>
+          </a:prstGeom>
+        </p:spPr>
+        <p:txBody>
+          <a:bodyPr vert="horz" lIns="91440" tIns="45720" rIns="91440" bIns="45720" rtlCol="0"/>
+          <a:lstStyle>
+            <a:lvl1pPr algn="r">
+              <a:defRPr sz="1200"/>
+            </a:lvl1pPr>
+          </a:lstStyle>
+          <a:p>
+            <a:fld id="{0F89C1C7-3DCD-1040-A9CF-14679D8B5DDD}" type="datetimeFigureOut">
+              <a:rPr lang="en-US" smtClean="0"/>
+              <a:t>10/17/16</a:t>
+            </a:fld>
+            <a:endParaRPr lang="en-US"/>
+          </a:p>
+        </p:txBody>
+      </p:sp>
+      <p:sp>
+        <p:nvSpPr>
+          <p:cNvPr id="4" name="Slide Image Placeholder 3"/>
+          <p:cNvSpPr>
+            <a:spLocks noGrp="1" noRot="1" noChangeAspect="1"/>
+          </p:cNvSpPr>
+          <p:nvPr>
+            <p:ph type="sldImg" idx="2"/>
+          </p:nvPr>
+        </p:nvSpPr>
+        <p:spPr>
+          <a:xfrm>
+            <a:off x="1143000" y="685800"/>
+            <a:ext cx="4572000" cy="3429000"/>
+          </a:xfrm>
+          <a:prstGeom prst="rect">
+            <a:avLst/>
+          </a:prstGeom>
+          <a:noFill/>
+          <a:ln w="12700">
+            <a:solidFill>
+              <a:prstClr val="black"/>
+            </a:solidFill>
+          </a:ln>
+        </p:spPr>
+        <p:txBody>
+          <a:bodyPr vert="horz" lIns="91440" tIns="45720" rIns="91440" bIns="45720" rtlCol="0" anchor="ctr"/>
+          <a:lstStyle/>
+          <a:p>
+            <a:endParaRPr lang="en-US"/>
+          </a:p>
+        </p:txBody>
+      </p:sp>
+      <p:sp>
+        <p:nvSpPr>
+          <p:cNvPr id="5" name="Notes Placeholder 4"/>
+          <p:cNvSpPr>
+            <a:spLocks noGrp="1"/>
+          </p:cNvSpPr>
+          <p:nvPr>
+            <p:ph type="body" sz="quarter" idx="3"/>
+          </p:nvPr>
+        </p:nvSpPr>
+        <p:spPr>
+          <a:xfrm>
+            <a:off x="685800" y="4343400"/>
+            <a:ext cx="5486400" cy="4114800"/>
+          </a:xfrm>
+          <a:prstGeom prst="rect">
+            <a:avLst/>
+          </a:prstGeom>
+        </p:spPr>
+        <p:txBody>
+          <a:bodyPr vert="horz" lIns="91440" tIns="45720" rIns="91440" bIns="45720" rtlCol="0"/>
+          <a:lstStyle/>
+          <a:p>
+            <a:pPr lvl="0"/>
+            <a:r>
+              <a:rPr lang="en-US" smtClean="0"/>
+              <a:t>Click to edit Master text styles</a:t>
+            </a:r>
+          </a:p>
+          <a:p>
+            <a:pPr lvl="1"/>
+            <a:r>
+              <a:rPr lang="en-US" smtClean="0"/>
+              <a:t>Second level</a:t>
+            </a:r>
+          </a:p>
+          <a:p>
+            <a:pPr lvl="2"/>
+            <a:r>
+              <a:rPr lang="en-US" smtClean="0"/>
+              <a:t>Third level</a:t>
+            </a:r>
+          </a:p>
+          <a:p>
+            <a:pPr lvl="3"/>
+            <a:r>
+              <a:rPr lang="en-US" smtClean="0"/>
+              <a:t>Fourth level</a:t>
+            </a:r>
+          </a:p>
+          <a:p>
+            <a:pPr lvl="4"/>
+            <a:r>
+              <a:rPr lang="en-US" smtClean="0"/>
+              <a:t>Fifth level</a:t>
+            </a:r>
+            <a:endParaRPr lang="en-US"/>
+          </a:p>
+        </p:txBody>
+      </p:sp>
+      <p:sp>
+        <p:nvSpPr>
+          <p:cNvPr id="6" name="Footer Placeholder 5"/>
+          <p:cNvSpPr>
+            <a:spLocks noGrp="1"/>
+          </p:cNvSpPr>
+          <p:nvPr>
+            <p:ph type="ftr" sz="quarter" idx="4"/>
+          </p:nvPr>
+        </p:nvSpPr>
+        <p:spPr>
+          <a:xfrm>
+            <a:off x="0" y="8685213"/>
+            <a:ext cx="2971800" cy="457200"/>
+          </a:xfrm>
+          <a:prstGeom prst="rect">
+            <a:avLst/>
+          </a:prstGeom>
+        </p:spPr>
+        <p:txBody>
+          <a:bodyPr vert="horz" lIns="91440" tIns="45720" rIns="91440" bIns="45720" rtlCol="0" anchor="b"/>
+          <a:lstStyle>
+            <a:lvl1pPr algn="l">
+              <a:defRPr sz="1200"/>
+            </a:lvl1pPr>
+          </a:lstStyle>
+          <a:p>
+            <a:endParaRPr lang="en-US"/>
+          </a:p>
+        </p:txBody>
+      </p:sp>
+      <p:sp>
+        <p:nvSpPr>
+          <p:cNvPr id="7" name="Slide Number Placeholder 6"/>
+          <p:cNvSpPr>
+            <a:spLocks noGrp="1"/>
+          </p:cNvSpPr>
+          <p:nvPr>
+            <p:ph type="sldNum" sz="quarter" idx="5"/>
+          </p:nvPr>
+        </p:nvSpPr>
+        <p:spPr>
+          <a:xfrm>
+            <a:off x="3884613" y="8685213"/>
+            <a:ext cx="2971800" cy="457200"/>
+          </a:xfrm>
+          <a:prstGeom prst="rect">
+            <a:avLst/>
+          </a:prstGeom>
+        </p:spPr>
+        <p:txBody>
+          <a:bodyPr vert="horz" lIns="91440" tIns="45720" rIns="91440" bIns="45720" rtlCol="0" anchor="b"/>
+          <a:lstStyle>
+            <a:lvl1pPr algn="r">
+              <a:defRPr sz="1200"/>
+            </a:lvl1pPr>
+          </a:lstStyle>
+          <a:p>
+            <a:fld id="{BB5E49A5-4136-284D-997B-48E1D791AD67}" type="slidenum">
+              <a:rPr lang="en-US" smtClean="0"/>
+              <a:t>‹#›</a:t>
+            </a:fld>
+            <a:endParaRPr lang="en-US"/>
+          </a:p>
+        </p:txBody>
+      </p:sp>
+    </p:spTree>
+    <p:extLst>
+      <p:ext uri="{BB962C8B-B14F-4D97-AF65-F5344CB8AC3E}">
+        <p14:creationId xmlns:p14="http://schemas.microsoft.com/office/powerpoint/2010/main" val="2623252185"/>
+      </p:ext>
+    </p:extLst>
+  </p:cSld>
+  <p:clrMap bg1="lt1" tx1="dk1" bg2="lt2" tx2="dk2" accent1="accent1" accent2="accent2" accent3="accent3" accent4="accent4" accent5="accent5" accent6="accent6" hlink="hlink" folHlink="folHlink"/>
+  <p:notesStyle>
+    <a:lvl1pPr marL="0" algn="l" defTabSz="457200" rtl="0" eaLnBrk="1" latinLnBrk="0" hangingPunct="1">
+      <a:defRPr sz="1200" kern="1200">
+        <a:solidFill>
+          <a:schemeClr val="tx1"/>
+        </a:solidFill>
+        <a:latin typeface="+mn-lt"/>
+        <a:ea typeface="+mn-ea"/>
+        <a:cs typeface="+mn-cs"/>
+      </a:defRPr>
+    </a:lvl1pPr>
+    <a:lvl2pPr marL="457200" algn="l" defTabSz="457200" rtl="0" eaLnBrk="1" latinLnBrk="0" hangingPunct="1">
+      <a:defRPr sz="1200" kern="1200">
+        <a:solidFill>
+          <a:schemeClr val="tx1"/>
+        </a:solidFill>
+        <a:latin typeface="+mn-lt"/>
+        <a:ea typeface="+mn-ea"/>
+        <a:cs typeface="+mn-cs"/>
+      </a:defRPr>
+    </a:lvl2pPr>
+    <a:lvl3pPr marL="914400" algn="l" defTabSz="457200" rtl="0" eaLnBrk="1" latinLnBrk="0" hangingPunct="1">
+      <a:defRPr sz="1200" kern="1200">
+        <a:solidFill>
+          <a:schemeClr val="tx1"/>
+        </a:solidFill>
+        <a:latin typeface="+mn-lt"/>
+        <a:ea typeface="+mn-ea"/>
+        <a:cs typeface="+mn-cs"/>
+      </a:defRPr>
+    </a:lvl3pPr>
+    <a:lvl4pPr marL="1371600" algn="l" defTabSz="457200" rtl="0" eaLnBrk="1" latinLnBrk="0" hangingPunct="1">
+      <a:defRPr sz="1200" kern="1200">
+        <a:solidFill>
+          <a:schemeClr val="tx1"/>
+        </a:solidFill>
+        <a:latin typeface="+mn-lt"/>
+        <a:ea typeface="+mn-ea"/>
+        <a:cs typeface="+mn-cs"/>
+      </a:defRPr>
+    </a:lvl4pPr>
+    <a:lvl5pPr marL="1828800" algn="l" defTabSz="457200" rtl="0" eaLnBrk="1" latinLnBrk="0" hangingPunct="1">
+      <a:defRPr sz="1200" kern="1200">
+        <a:solidFill>
+          <a:schemeClr val="tx1"/>
+        </a:solidFill>
+        <a:latin typeface="+mn-lt"/>
+        <a:ea typeface="+mn-ea"/>
+        <a:cs typeface="+mn-cs"/>
+      </a:defRPr>
+    </a:lvl5pPr>
+    <a:lvl6pPr marL="2286000" algn="l" defTabSz="457200" rtl="0" eaLnBrk="1" latinLnBrk="0" hangingPunct="1">
+      <a:defRPr sz="1200" kern="1200">
+        <a:solidFill>
+          <a:schemeClr val="tx1"/>
+        </a:solidFill>
+        <a:latin typeface="+mn-lt"/>
+        <a:ea typeface="+mn-ea"/>
+        <a:cs typeface="+mn-cs"/>
+      </a:defRPr>
+    </a:lvl6pPr>
+    <a:lvl7pPr marL="2743200" algn="l" defTabSz="457200" rtl="0" eaLnBrk="1" latinLnBrk="0" hangingPunct="1">
+      <a:defRPr sz="1200" kern="1200">
+        <a:solidFill>
+          <a:schemeClr val="tx1"/>
+        </a:solidFill>
+        <a:latin typeface="+mn-lt"/>
+        <a:ea typeface="+mn-ea"/>
+        <a:cs typeface="+mn-cs"/>
+      </a:defRPr>
+    </a:lvl7pPr>
+    <a:lvl8pPr marL="3200400" algn="l" defTabSz="457200" rtl="0" eaLnBrk="1" latinLnBrk="0" hangingPunct="1">
+      <a:defRPr sz="1200" kern="1200">
+        <a:solidFill>
+          <a:schemeClr val="tx1"/>
+        </a:solidFill>
+        <a:latin typeface="+mn-lt"/>
+        <a:ea typeface="+mn-ea"/>
+        <a:cs typeface="+mn-cs"/>
+      </a:defRPr>
+    </a:lvl8pPr>
+    <a:lvl9pPr marL="3657600" algn="l" defTabSz="457200" rtl="0" eaLnBrk="1" latinLnBrk="0" hangingPunct="1">
+      <a:defRPr sz="1200" kern="1200">
+        <a:solidFill>
+          <a:schemeClr val="tx1"/>
+        </a:solidFill>
+        <a:latin typeface="+mn-lt"/>
+        <a:ea typeface="+mn-ea"/>
+        <a:cs typeface="+mn-cs"/>
+      </a:defRPr>
+    </a:lvl9pPr>
+  </p:notesStyle>
+</p:notesMaster>
+</file>
+
+<file path=ppt/notesSlides/notesSlide1.xml><?xml version="1.0" encoding="utf-8"?>
+<p:notes xmlns:a="http://schemas.openxmlformats.org/drawingml/2006/main" xmlns:p="http://schemas.openxmlformats.org/presentationml/2006/main" xmlns:r="http://schemas.openxmlformats.org/officeDocument/2006/relationships">
+  <p:cSld>
+    <p:spTree>
+      <p:nvGrpSpPr>
+        <p:cNvPr id="1" name=""/>
+        <p:cNvGrpSpPr/>
+        <p:nvPr/>
+      </p:nvGrpSpPr>
+      <p:grpSpPr>
+        <a:xfrm>
+          <a:off x="0" y="0"/>
+          <a:ext cx="0" cy="0"/>
+          <a:chOff x="0" y="0"/>
+          <a:chExt cx="0" cy="0"/>
+        </a:xfrm>
+      </p:grpSpPr>
+      <p:sp>
+        <p:nvSpPr>
+          <p:cNvPr id="2" name="Slide Image Placeholder 1"/>
+          <p:cNvSpPr>
+            <a:spLocks noGrp="1"/>
+          </p:cNvSpPr>
+          <p:nvPr>
+            <p:ph type="sldImg" idx="2"/>
+          </p:nvPr>
+        </p:nvSpPr>
+        <p:spPr/>
+      </p:sp>
+      <p:sp>
+        <p:nvSpPr>
+          <p:cNvPr id="3" name="Notes Placeholder 2"/>
+          <p:cNvSpPr>
+            <a:spLocks noGrp="1"/>
+          </p:cNvSpPr>
+          <p:nvPr>
+            <p:ph type="body" idx="3" sz="quarter"/>
+          </p:nvPr>
+        </p:nvSpPr>
+        <p:spPr/>
+        <p:txBody>
+          <a:bodyPr/>
+          <a:lstStyle/>
+          <a:p>
+            <a:r>
+              <a:rPr sz="1200">
+                <a:latin typeface="Calibri"/>
+              </a:rPr>
+              <a:t>Two controllers per group makes the allowlist activity far better. If you only have one each, pair groups up for that section.</a:t>
+            </a:r>
+          </a:p>
+          <a:p>
+            <a:r>
+              <a:rPr sz="1200">
+                <a:latin typeface="Calibri"/>
+              </a:rPr>
+              <a:t>Charge every pad before the class. A flat controller looks exactly like a refused connection.</a:t>
+            </a:r>
+          </a:p>
+        </p:txBody>
+      </p:sp>
+      <p:sp>
+        <p:nvSpPr>
+          <p:cNvPr id="4" name="Slide Number Placeholder 3"/>
+          <p:cNvSpPr>
+            <a:spLocks noGrp="1"/>
+          </p:cNvSpPr>
+          <p:nvPr>
+            <p:ph type="sldNum" idx="5" sz="quarter"/>
+          </p:nvPr>
+        </p:nvSpPr>
+        <p:spPr/>
+      </p:sp>
+    </p:spTree>
+  </p:cSld>
+  <p:clrMapOvr>
+    <a:masterClrMapping/>
+  </p:clrMapOvr>
+</p:notes>
+</file>
+
+<file path=ppt/notesSlides/notesSlide10.xml><?xml version="1.0" encoding="utf-8"?>
+<p:notes xmlns:a="http://schemas.openxmlformats.org/drawingml/2006/main" xmlns:p="http://schemas.openxmlformats.org/presentationml/2006/main" xmlns:r="http://schemas.openxmlformats.org/officeDocument/2006/relationships">
+  <p:cSld>
+    <p:spTree>
+      <p:nvGrpSpPr>
+        <p:cNvPr id="1" name=""/>
+        <p:cNvGrpSpPr/>
+        <p:nvPr/>
+      </p:nvGrpSpPr>
+      <p:grpSpPr>
+        <a:xfrm>
+          <a:off x="0" y="0"/>
+          <a:ext cx="0" cy="0"/>
+          <a:chOff x="0" y="0"/>
+          <a:chExt cx="0" cy="0"/>
+        </a:xfrm>
+      </p:grpSpPr>
+      <p:sp>
+        <p:nvSpPr>
+          <p:cNvPr id="2" name="Slide Image Placeholder 1"/>
+          <p:cNvSpPr>
+            <a:spLocks noGrp="1"/>
+          </p:cNvSpPr>
+          <p:nvPr>
+            <p:ph type="sldImg" idx="2"/>
+          </p:nvPr>
+        </p:nvSpPr>
+        <p:spPr/>
+      </p:sp>
+      <p:sp>
+        <p:nvSpPr>
+          <p:cNvPr id="3" name="Notes Placeholder 2"/>
+          <p:cNvSpPr>
+            <a:spLocks noGrp="1"/>
+          </p:cNvSpPr>
+          <p:nvPr>
+            <p:ph type="body" idx="3" sz="quarter"/>
+          </p:nvPr>
+        </p:nvSpPr>
+        <p:spPr/>
+        <p:txBody>
+          <a:bodyPr/>
+          <a:lstStyle/>
+          <a:p>
+            <a:r>
+              <a:rPr sz="1200">
+                <a:latin typeface="Calibri"/>
+              </a:rPr>
+              <a:t>Lead with the headline: there is no EEPROM on this chip. The library is an emulation over flash.</a:t>
+            </a:r>
+          </a:p>
+          <a:p>
+            <a:r>
+              <a:rPr sz="1200">
+                <a:latin typeface="Calibri"/>
+              </a:rPr>
+              <a:t>The three consequences are all practical. begin() first, nothing saved without commit(), and flash wears out.</a:t>
+            </a:r>
+          </a:p>
+          <a:p>
+            <a:r>
+              <a:rPr sz="1200">
+                <a:latin typeface="Calibri"/>
+              </a:rPr>
+              <a:t>The warning panel has the arithmetic: a commit() in loop() at 30 Hz burns a hundred thousand cycles in under an hour. Say that number out loud.</a:t>
+            </a:r>
+          </a:p>
+          <a:p>
+            <a:r>
+              <a:rPr sz="1200">
+                <a:latin typeface="Calibri"/>
+              </a:rPr>
+              <a:t>The rule to take away: write when something changed and a person asked, never on a schedule.</a:t>
+            </a:r>
+          </a:p>
+        </p:txBody>
+      </p:sp>
+      <p:sp>
+        <p:nvSpPr>
+          <p:cNvPr id="4" name="Slide Number Placeholder 3"/>
+          <p:cNvSpPr>
+            <a:spLocks noGrp="1"/>
+          </p:cNvSpPr>
+          <p:nvPr>
+            <p:ph type="sldNum" idx="5" sz="quarter"/>
+          </p:nvPr>
+        </p:nvSpPr>
+        <p:spPr/>
+      </p:sp>
+    </p:spTree>
+  </p:cSld>
+  <p:clrMapOvr>
+    <a:masterClrMapping/>
+  </p:clrMapOvr>
+</p:notes>
+</file>
+
+<file path=ppt/notesSlides/notesSlide11.xml><?xml version="1.0" encoding="utf-8"?>
+<p:notes xmlns:a="http://schemas.openxmlformats.org/drawingml/2006/main" xmlns:p="http://schemas.openxmlformats.org/presentationml/2006/main" xmlns:r="http://schemas.openxmlformats.org/officeDocument/2006/relationships">
+  <p:cSld>
+    <p:spTree>
+      <p:nvGrpSpPr>
+        <p:cNvPr id="1" name=""/>
+        <p:cNvGrpSpPr/>
+        <p:nvPr/>
+      </p:nvGrpSpPr>
+      <p:grpSpPr>
+        <a:xfrm>
+          <a:off x="0" y="0"/>
+          <a:ext cx="0" cy="0"/>
+          <a:chOff x="0" y="0"/>
+          <a:chExt cx="0" cy="0"/>
+        </a:xfrm>
+      </p:grpSpPr>
+      <p:sp>
+        <p:nvSpPr>
+          <p:cNvPr id="2" name="Slide Image Placeholder 1"/>
+          <p:cNvSpPr>
+            <a:spLocks noGrp="1"/>
+          </p:cNvSpPr>
+          <p:nvPr>
+            <p:ph type="sldImg" idx="2"/>
+          </p:nvPr>
+        </p:nvSpPr>
+        <p:spPr/>
+      </p:sp>
+      <p:sp>
+        <p:nvSpPr>
+          <p:cNvPr id="3" name="Notes Placeholder 2"/>
+          <p:cNvSpPr>
+            <a:spLocks noGrp="1"/>
+          </p:cNvSpPr>
+          <p:nvPr>
+            <p:ph type="body" idx="3" sz="quarter"/>
+          </p:nvPr>
+        </p:nvSpPr>
+        <p:spPr/>
+        <p:txBody>
+          <a:bodyPr/>
+          <a:lstStyle/>
+          <a:p>
+            <a:r>
+              <a:rPr sz="1200">
+                <a:latin typeface="Calibri"/>
+              </a:rPr>
+              <a:t>(Continued from the previous slide - the same notes apply.)</a:t>
+            </a:r>
+          </a:p>
+          <a:p/>
+          <a:p>
+            <a:r>
+              <a:rPr sz="1200">
+                <a:latin typeface="Calibri"/>
+              </a:rPr>
+              <a:t>Lead with the headline: there is no EEPROM on this chip. The library is an emulation over flash.</a:t>
+            </a:r>
+          </a:p>
+          <a:p>
+            <a:r>
+              <a:rPr sz="1200">
+                <a:latin typeface="Calibri"/>
+              </a:rPr>
+              <a:t>The three consequences are all practical. begin() first, nothing saved without commit(), and flash wears out.</a:t>
+            </a:r>
+          </a:p>
+          <a:p>
+            <a:r>
+              <a:rPr sz="1200">
+                <a:latin typeface="Calibri"/>
+              </a:rPr>
+              <a:t>The warning panel has the arithmetic: a commit() in loop() at 30 Hz burns a hundred thousand cycles in under an hour. Say that number out loud.</a:t>
+            </a:r>
+          </a:p>
+          <a:p>
+            <a:r>
+              <a:rPr sz="1200">
+                <a:latin typeface="Calibri"/>
+              </a:rPr>
+              <a:t>The rule to take away: write when something changed and a person asked, never on a schedule.</a:t>
+            </a:r>
+          </a:p>
+        </p:txBody>
+      </p:sp>
+      <p:sp>
+        <p:nvSpPr>
+          <p:cNvPr id="4" name="Slide Number Placeholder 3"/>
+          <p:cNvSpPr>
+            <a:spLocks noGrp="1"/>
+          </p:cNvSpPr>
+          <p:nvPr>
+            <p:ph type="sldNum" idx="5" sz="quarter"/>
+          </p:nvPr>
+        </p:nvSpPr>
+        <p:spPr/>
+      </p:sp>
+    </p:spTree>
+  </p:cSld>
+  <p:clrMapOvr>
+    <a:masterClrMapping/>
+  </p:clrMapOvr>
+</p:notes>
+</file>
+
+<file path=ppt/notesSlides/notesSlide12.xml><?xml version="1.0" encoding="utf-8"?>
+<p:notes xmlns:a="http://schemas.openxmlformats.org/drawingml/2006/main" xmlns:p="http://schemas.openxmlformats.org/presentationml/2006/main" xmlns:r="http://schemas.openxmlformats.org/officeDocument/2006/relationships">
+  <p:cSld>
+    <p:spTree>
+      <p:nvGrpSpPr>
+        <p:cNvPr id="1" name=""/>
+        <p:cNvGrpSpPr/>
+        <p:nvPr/>
+      </p:nvGrpSpPr>
+      <p:grpSpPr>
+        <a:xfrm>
+          <a:off x="0" y="0"/>
+          <a:ext cx="0" cy="0"/>
+          <a:chOff x="0" y="0"/>
+          <a:chExt cx="0" cy="0"/>
+        </a:xfrm>
+      </p:grpSpPr>
+      <p:sp>
+        <p:nvSpPr>
+          <p:cNvPr id="2" name="Slide Image Placeholder 1"/>
+          <p:cNvSpPr>
+            <a:spLocks noGrp="1"/>
+          </p:cNvSpPr>
+          <p:nvPr>
+            <p:ph type="sldImg" idx="2"/>
+          </p:nvPr>
+        </p:nvSpPr>
+        <p:spPr/>
+      </p:sp>
+      <p:sp>
+        <p:nvSpPr>
+          <p:cNvPr id="3" name="Notes Placeholder 2"/>
+          <p:cNvSpPr>
+            <a:spLocks noGrp="1"/>
+          </p:cNvSpPr>
+          <p:nvPr>
+            <p:ph type="body" idx="3" sz="quarter"/>
+          </p:nvPr>
+        </p:nvSpPr>
+        <p:spPr/>
+        <p:txBody>
+          <a:bodyPr/>
+          <a:lstStyle/>
+          <a:p>
+            <a:r>
+              <a:rPr sz="1200">
+                <a:latin typeface="Calibri"/>
+              </a:rPr>
+              <a:t>EEPROM is a flat array of bytes and YOU choose the layout. Nothing stops two values overlapping - the compiler cannot help you here.</a:t>
+            </a:r>
+          </a:p>
+          <a:p>
+            <a:r>
+              <a:rPr sz="1200">
+                <a:latin typeface="Calibri"/>
+              </a:rPr>
+              <a:t>Four bytes per slot because an int and a float are both four bytes on this chip.</a:t>
+            </a:r>
+          </a:p>
+          <a:p>
+            <a:r>
+              <a:rPr sz="1200">
+                <a:latin typeface="Calibri"/>
+              </a:rPr>
+              <a:t>Ask why the addresses are spaced out and written down in one place. The answer is that a map you can read is a map you can extend safely.</a:t>
+            </a:r>
+          </a:p>
+          <a:p>
+            <a:r>
+              <a:rPr sz="1200">
+                <a:latin typeface="Calibri"/>
+              </a:rPr>
+              <a:t>They break this deliberately in step 6 of the activity, so plant the idea now.</a:t>
+            </a:r>
+          </a:p>
+        </p:txBody>
+      </p:sp>
+      <p:sp>
+        <p:nvSpPr>
+          <p:cNvPr id="4" name="Slide Number Placeholder 3"/>
+          <p:cNvSpPr>
+            <a:spLocks noGrp="1"/>
+          </p:cNvSpPr>
+          <p:nvPr>
+            <p:ph type="sldNum" idx="5" sz="quarter"/>
+          </p:nvPr>
+        </p:nvSpPr>
+        <p:spPr/>
+      </p:sp>
+    </p:spTree>
+  </p:cSld>
+  <p:clrMapOvr>
+    <a:masterClrMapping/>
+  </p:clrMapOvr>
+</p:notes>
+</file>
+
+<file path=ppt/notesSlides/notesSlide13.xml><?xml version="1.0" encoding="utf-8"?>
+<p:notes xmlns:a="http://schemas.openxmlformats.org/drawingml/2006/main" xmlns:p="http://schemas.openxmlformats.org/presentationml/2006/main" xmlns:r="http://schemas.openxmlformats.org/officeDocument/2006/relationships">
+  <p:cSld>
+    <p:spTree>
+      <p:nvGrpSpPr>
+        <p:cNvPr id="1" name=""/>
+        <p:cNvGrpSpPr/>
+        <p:nvPr/>
+      </p:nvGrpSpPr>
+      <p:grpSpPr>
+        <a:xfrm>
+          <a:off x="0" y="0"/>
+          <a:ext cx="0" cy="0"/>
+          <a:chOff x="0" y="0"/>
+          <a:chExt cx="0" cy="0"/>
+        </a:xfrm>
+      </p:grpSpPr>
+      <p:sp>
+        <p:nvSpPr>
+          <p:cNvPr id="2" name="Slide Image Placeholder 1"/>
+          <p:cNvSpPr>
+            <a:spLocks noGrp="1"/>
+          </p:cNvSpPr>
+          <p:nvPr>
+            <p:ph type="sldImg" idx="2"/>
+          </p:nvPr>
+        </p:nvSpPr>
+        <p:spPr/>
+      </p:sp>
+      <p:sp>
+        <p:nvSpPr>
+          <p:cNvPr id="3" name="Notes Placeholder 2"/>
+          <p:cNvSpPr>
+            <a:spLocks noGrp="1"/>
+          </p:cNvSpPr>
+          <p:nvPr>
+            <p:ph type="body" idx="3" sz="quarter"/>
+          </p:nvPr>
+        </p:nvSpPr>
+        <p:spPr/>
+        <p:txBody>
+          <a:bodyPr/>
+          <a:lstStyle/>
+          <a:p>
+            <a:r>
+              <a:rPr sz="1200">
+                <a:latin typeface="Calibri"/>
+              </a:rPr>
+              <a:t>Start with the fact: new flash is full of 0xFF. Read an int out of that and you get -1.</a:t>
+            </a:r>
+          </a:p>
+          <a:p>
+            <a:r>
+              <a:rPr sz="1200">
+                <a:latin typeface="Calibri"/>
+              </a:rPr>
+              <a:t>The magic byte says the bytes are OURS. It does not say they still make sense.</a:t>
+            </a:r>
+          </a:p>
+          <a:p>
+            <a:r>
+              <a:rPr sz="1200">
+                <a:latin typeface="Calibri"/>
+              </a:rPr>
+              <a:t>That distinction is the whole slide. A value written by an older version of the program is perfectly valid data and still wrong for this one.</a:t>
+            </a:r>
+          </a:p>
+          <a:p>
+            <a:r>
+              <a:rPr sz="1200">
+                <a:latin typeface="Calibri"/>
+              </a:rPr>
+              <a:t>Defensive loading is not paranoia - it is the difference between a vehicle that boots with odd settings and one that will not boot at all.</a:t>
+            </a:r>
+          </a:p>
+        </p:txBody>
+      </p:sp>
+      <p:sp>
+        <p:nvSpPr>
+          <p:cNvPr id="4" name="Slide Number Placeholder 3"/>
+          <p:cNvSpPr>
+            <a:spLocks noGrp="1"/>
+          </p:cNvSpPr>
+          <p:nvPr>
+            <p:ph type="sldNum" idx="5" sz="quarter"/>
+          </p:nvPr>
+        </p:nvSpPr>
+        <p:spPr/>
+      </p:sp>
+    </p:spTree>
+  </p:cSld>
+  <p:clrMapOvr>
+    <a:masterClrMapping/>
+  </p:clrMapOvr>
+</p:notes>
+</file>
+
+<file path=ppt/notesSlides/notesSlide14.xml><?xml version="1.0" encoding="utf-8"?>
+<p:notes xmlns:a="http://schemas.openxmlformats.org/drawingml/2006/main" xmlns:p="http://schemas.openxmlformats.org/presentationml/2006/main" xmlns:r="http://schemas.openxmlformats.org/officeDocument/2006/relationships">
+  <p:cSld>
+    <p:spTree>
+      <p:nvGrpSpPr>
+        <p:cNvPr id="1" name=""/>
+        <p:cNvGrpSpPr/>
+        <p:nvPr/>
+      </p:nvGrpSpPr>
+      <p:grpSpPr>
+        <a:xfrm>
+          <a:off x="0" y="0"/>
+          <a:ext cx="0" cy="0"/>
+          <a:chOff x="0" y="0"/>
+          <a:chExt cx="0" cy="0"/>
+        </a:xfrm>
+      </p:grpSpPr>
+      <p:sp>
+        <p:nvSpPr>
+          <p:cNvPr id="2" name="Slide Image Placeholder 1"/>
+          <p:cNvSpPr>
+            <a:spLocks noGrp="1"/>
+          </p:cNvSpPr>
+          <p:nvPr>
+            <p:ph type="sldImg" idx="2"/>
+          </p:nvPr>
+        </p:nvSpPr>
+        <p:spPr/>
+      </p:sp>
+      <p:sp>
+        <p:nvSpPr>
+          <p:cNvPr id="3" name="Notes Placeholder 2"/>
+          <p:cNvSpPr>
+            <a:spLocks noGrp="1"/>
+          </p:cNvSpPr>
+          <p:nvPr>
+            <p:ph type="body" idx="3" sz="quarter"/>
+          </p:nvPr>
+        </p:nvSpPr>
+        <p:spPr/>
+        <p:txBody>
+          <a:bodyPr/>
+          <a:lstStyle/>
+          <a:p>
+            <a:r>
+              <a:rPr sz="1200">
+                <a:latin typeface="Calibri"/>
+              </a:rPr>
+              <a:t>(Continued from the previous slide - the same notes apply.)</a:t>
+            </a:r>
+          </a:p>
+          <a:p/>
+          <a:p>
+            <a:r>
+              <a:rPr sz="1200">
+                <a:latin typeface="Calibri"/>
+              </a:rPr>
+              <a:t>Start with the fact: new flash is full of 0xFF. Read an int out of that and you get -1.</a:t>
+            </a:r>
+          </a:p>
+          <a:p>
+            <a:r>
+              <a:rPr sz="1200">
+                <a:latin typeface="Calibri"/>
+              </a:rPr>
+              <a:t>The magic byte says the bytes are OURS. It does not say they still make sense.</a:t>
+            </a:r>
+          </a:p>
+          <a:p>
+            <a:r>
+              <a:rPr sz="1200">
+                <a:latin typeface="Calibri"/>
+              </a:rPr>
+              <a:t>That distinction is the whole slide. A value written by an older version of the program is perfectly valid data and still wrong for this one.</a:t>
+            </a:r>
+          </a:p>
+          <a:p>
+            <a:r>
+              <a:rPr sz="1200">
+                <a:latin typeface="Calibri"/>
+              </a:rPr>
+              <a:t>Defensive loading is not paranoia - it is the difference between a vehicle that boots with odd settings and one that will not boot at all.</a:t>
+            </a:r>
+          </a:p>
+        </p:txBody>
+      </p:sp>
+      <p:sp>
+        <p:nvSpPr>
+          <p:cNvPr id="4" name="Slide Number Placeholder 3"/>
+          <p:cNvSpPr>
+            <a:spLocks noGrp="1"/>
+          </p:cNvSpPr>
+          <p:nvPr>
+            <p:ph type="sldNum" idx="5" sz="quarter"/>
+          </p:nvPr>
+        </p:nvSpPr>
+        <p:spPr/>
+      </p:sp>
+    </p:spTree>
+  </p:cSld>
+  <p:clrMapOvr>
+    <a:masterClrMapping/>
+  </p:clrMapOvr>
+</p:notes>
+</file>
+
+<file path=ppt/notesSlides/notesSlide15.xml><?xml version="1.0" encoding="utf-8"?>
+<p:notes xmlns:a="http://schemas.openxmlformats.org/drawingml/2006/main" xmlns:p="http://schemas.openxmlformats.org/presentationml/2006/main" xmlns:r="http://schemas.openxmlformats.org/officeDocument/2006/relationships">
+  <p:cSld>
+    <p:spTree>
+      <p:nvGrpSpPr>
+        <p:cNvPr id="1" name=""/>
+        <p:cNvGrpSpPr/>
+        <p:nvPr/>
+      </p:nvGrpSpPr>
+      <p:grpSpPr>
+        <a:xfrm>
+          <a:off x="0" y="0"/>
+          <a:ext cx="0" cy="0"/>
+          <a:chOff x="0" y="0"/>
+          <a:chExt cx="0" cy="0"/>
+        </a:xfrm>
+      </p:grpSpPr>
+      <p:sp>
+        <p:nvSpPr>
+          <p:cNvPr id="2" name="Slide Image Placeholder 1"/>
+          <p:cNvSpPr>
+            <a:spLocks noGrp="1"/>
+          </p:cNvSpPr>
+          <p:nvPr>
+            <p:ph type="sldImg" idx="2"/>
+          </p:nvPr>
+        </p:nvSpPr>
+        <p:spPr/>
+      </p:sp>
+      <p:sp>
+        <p:nvSpPr>
+          <p:cNvPr id="3" name="Notes Placeholder 2"/>
+          <p:cNvSpPr>
+            <a:spLocks noGrp="1"/>
+          </p:cNvSpPr>
+          <p:nvPr>
+            <p:ph type="body" idx="3" sz="quarter"/>
+          </p:nvPr>
+        </p:nvSpPr>
+        <p:spPr/>
+        <p:txBody>
+          <a:bodyPr/>
+          <a:lstStyle/>
+          <a:p>
+            <a:r>
+              <a:rPr sz="1200">
+                <a:latin typeface="Calibri"/>
+              </a:rPr>
+              <a:t>Twenty seconds. Second activity.</a:t>
+            </a:r>
+          </a:p>
+        </p:txBody>
+      </p:sp>
+      <p:sp>
+        <p:nvSpPr>
+          <p:cNvPr id="4" name="Slide Number Placeholder 3"/>
+          <p:cNvSpPr>
+            <a:spLocks noGrp="1"/>
+          </p:cNvSpPr>
+          <p:nvPr>
+            <p:ph type="sldNum" idx="5" sz="quarter"/>
+          </p:nvPr>
+        </p:nvSpPr>
+        <p:spPr/>
+      </p:sp>
+    </p:spTree>
+  </p:cSld>
+  <p:clrMapOvr>
+    <a:masterClrMapping/>
+  </p:clrMapOvr>
+</p:notes>
+</file>
+
+<file path=ppt/notesSlides/notesSlide16.xml><?xml version="1.0" encoding="utf-8"?>
+<p:notes xmlns:a="http://schemas.openxmlformats.org/drawingml/2006/main" xmlns:p="http://schemas.openxmlformats.org/presentationml/2006/main" xmlns:r="http://schemas.openxmlformats.org/officeDocument/2006/relationships">
+  <p:cSld>
+    <p:spTree>
+      <p:nvGrpSpPr>
+        <p:cNvPr id="1" name=""/>
+        <p:cNvGrpSpPr/>
+        <p:nvPr/>
+      </p:nvGrpSpPr>
+      <p:grpSpPr>
+        <a:xfrm>
+          <a:off x="0" y="0"/>
+          <a:ext cx="0" cy="0"/>
+          <a:chOff x="0" y="0"/>
+          <a:chExt cx="0" cy="0"/>
+        </a:xfrm>
+      </p:grpSpPr>
+      <p:sp>
+        <p:nvSpPr>
+          <p:cNvPr id="2" name="Slide Image Placeholder 1"/>
+          <p:cNvSpPr>
+            <a:spLocks noGrp="1"/>
+          </p:cNvSpPr>
+          <p:nvPr>
+            <p:ph type="sldImg" idx="2"/>
+          </p:nvPr>
+        </p:nvSpPr>
+        <p:spPr/>
+      </p:sp>
+      <p:sp>
+        <p:nvSpPr>
+          <p:cNvPr id="3" name="Notes Placeholder 2"/>
+          <p:cNvSpPr>
+            <a:spLocks noGrp="1"/>
+          </p:cNvSpPr>
+          <p:nvPr>
+            <p:ph type="body" idx="3" sz="quarter"/>
+          </p:nvPr>
+        </p:nvSpPr>
+        <p:spPr/>
+        <p:txBody>
+          <a:bodyPr/>
+          <a:lstStyle/>
+          <a:p>
+            <a:r>
+              <a:rPr sz="1200">
+                <a:latin typeface="Calibri"/>
+              </a:rPr>
+              <a:t>Step 1 involves physically unplugging the board. Make sure nobody is mid-upload when they do it.</a:t>
+            </a:r>
+          </a:p>
+          <a:p>
+            <a:r>
+              <a:rPr sz="1200">
+                <a:latin typeface="Calibri"/>
+              </a:rPr>
+              <a:t>Step 5 is the deliberate bug: comment out commit(), save, reset, and watch the setting vanish. That is the mistake they will one day make for real.</a:t>
+            </a:r>
+          </a:p>
+          <a:p>
+            <a:r>
+              <a:rPr sz="1200">
+                <a:latin typeface="Calibri"/>
+              </a:rPr>
+              <a:t>Step 6 overlaps two addresses on purpose and one setting eats the other. It makes the flat-array point concrete.</a:t>
+            </a:r>
+          </a:p>
+          <a:p>
+            <a:r>
+              <a:rPr sz="1200">
+                <a:latin typeface="Calibri"/>
+              </a:rPr>
+              <a:t>Answers: address 0 holds the deadzone int; and range checking is needed even with a correct magic byte because an older version could have written a value this version cannot use.</a:t>
+            </a:r>
+          </a:p>
+        </p:txBody>
+      </p:sp>
+      <p:sp>
+        <p:nvSpPr>
+          <p:cNvPr id="4" name="Slide Number Placeholder 3"/>
+          <p:cNvSpPr>
+            <a:spLocks noGrp="1"/>
+          </p:cNvSpPr>
+          <p:nvPr>
+            <p:ph type="sldNum" idx="5" sz="quarter"/>
+          </p:nvPr>
+        </p:nvSpPr>
+        <p:spPr/>
+      </p:sp>
+    </p:spTree>
+  </p:cSld>
+  <p:clrMapOvr>
+    <a:masterClrMapping/>
+  </p:clrMapOvr>
+</p:notes>
+</file>
+
+<file path=ppt/notesSlides/notesSlide17.xml><?xml version="1.0" encoding="utf-8"?>
+<p:notes xmlns:a="http://schemas.openxmlformats.org/drawingml/2006/main" xmlns:p="http://schemas.openxmlformats.org/presentationml/2006/main" xmlns:r="http://schemas.openxmlformats.org/officeDocument/2006/relationships">
+  <p:cSld>
+    <p:spTree>
+      <p:nvGrpSpPr>
+        <p:cNvPr id="1" name=""/>
+        <p:cNvGrpSpPr/>
+        <p:nvPr/>
+      </p:nvGrpSpPr>
+      <p:grpSpPr>
+        <a:xfrm>
+          <a:off x="0" y="0"/>
+          <a:ext cx="0" cy="0"/>
+          <a:chOff x="0" y="0"/>
+          <a:chExt cx="0" cy="0"/>
+        </a:xfrm>
+      </p:grpSpPr>
+      <p:sp>
+        <p:nvSpPr>
+          <p:cNvPr id="2" name="Slide Image Placeholder 1"/>
+          <p:cNvSpPr>
+            <a:spLocks noGrp="1"/>
+          </p:cNvSpPr>
+          <p:nvPr>
+            <p:ph type="sldImg" idx="2"/>
+          </p:nvPr>
+        </p:nvSpPr>
+        <p:spPr/>
+      </p:sp>
+      <p:sp>
+        <p:nvSpPr>
+          <p:cNvPr id="3" name="Notes Placeholder 2"/>
+          <p:cNvSpPr>
+            <a:spLocks noGrp="1"/>
+          </p:cNvSpPr>
+          <p:nvPr>
+            <p:ph type="body" idx="3" sz="quarter"/>
+          </p:nvPr>
+        </p:nvSpPr>
+        <p:spPr/>
+        <p:txBody>
+          <a:bodyPr/>
+          <a:lstStyle/>
+          <a:p>
+            <a:r>
+              <a:rPr sz="1200">
+                <a:latin typeface="Calibri"/>
+              </a:rPr>
+              <a:t>Four programs, four answers, and each is right for what it is for. Do not let this become a ranking.</a:t>
+            </a:r>
+          </a:p>
+          <a:p>
+            <a:r>
+              <a:rPr sz="1200">
+                <a:latin typeface="Calibri"/>
+              </a:rPr>
+              <a:t>The cost column is where the engineering judgement lives. Read that rather than the middle column.</a:t>
+            </a:r>
+          </a:p>
+          <a:p>
+            <a:r>
+              <a:rPr sz="1200">
+                <a:latin typeface="Calibri"/>
+              </a:rPr>
+              <a:t>The note is the argument for the EEPROM version: a field-serviceable machine should never need a laptop to change who is allowed to drive it.</a:t>
+            </a:r>
+          </a:p>
+        </p:txBody>
+      </p:sp>
+      <p:sp>
+        <p:nvSpPr>
+          <p:cNvPr id="4" name="Slide Number Placeholder 3"/>
+          <p:cNvSpPr>
+            <a:spLocks noGrp="1"/>
+          </p:cNvSpPr>
+          <p:nvPr>
+            <p:ph type="sldNum" idx="5" sz="quarter"/>
+          </p:nvPr>
+        </p:nvSpPr>
+        <p:spPr/>
+      </p:sp>
+    </p:spTree>
+  </p:cSld>
+  <p:clrMapOvr>
+    <a:masterClrMapping/>
+  </p:clrMapOvr>
+</p:notes>
+</file>
+
+<file path=ppt/notesSlides/notesSlide18.xml><?xml version="1.0" encoding="utf-8"?>
+<p:notes xmlns:a="http://schemas.openxmlformats.org/drawingml/2006/main" xmlns:p="http://schemas.openxmlformats.org/presentationml/2006/main" xmlns:r="http://schemas.openxmlformats.org/officeDocument/2006/relationships">
+  <p:cSld>
+    <p:spTree>
+      <p:nvGrpSpPr>
+        <p:cNvPr id="1" name=""/>
+        <p:cNvGrpSpPr/>
+        <p:nvPr/>
+      </p:nvGrpSpPr>
+      <p:grpSpPr>
+        <a:xfrm>
+          <a:off x="0" y="0"/>
+          <a:ext cx="0" cy="0"/>
+          <a:chOff x="0" y="0"/>
+          <a:chExt cx="0" cy="0"/>
+        </a:xfrm>
+      </p:grpSpPr>
+      <p:sp>
+        <p:nvSpPr>
+          <p:cNvPr id="2" name="Slide Image Placeholder 1"/>
+          <p:cNvSpPr>
+            <a:spLocks noGrp="1"/>
+          </p:cNvSpPr>
+          <p:nvPr>
+            <p:ph type="sldImg" idx="2"/>
+          </p:nvPr>
+        </p:nvSpPr>
+        <p:spPr/>
+      </p:sp>
+      <p:sp>
+        <p:nvSpPr>
+          <p:cNvPr id="3" name="Notes Placeholder 2"/>
+          <p:cNvSpPr>
+            <a:spLocks noGrp="1"/>
+          </p:cNvSpPr>
+          <p:nvPr>
+            <p:ph type="body" idx="3" sz="quarter"/>
+          </p:nvPr>
+        </p:nvSpPr>
+        <p:spPr/>
+        <p:txBody>
+          <a:bodyPr/>
+          <a:lstStyle/>
+          <a:p>
+            <a:r>
+              <a:rPr sz="1200">
+                <a:latin typeface="Calibri"/>
+              </a:rPr>
+              <a:t>Two ways in, one code path. That is a design choice worth pointing at - a button and a console command that do exactly the same thing.</a:t>
+            </a:r>
+          </a:p>
+          <a:p>
+            <a:r>
+              <a:rPr sz="1200">
+                <a:latin typeface="Calibri"/>
+              </a:rPr>
+              <a:t>The first controller to connect during pairing becomes the vehicle's own and is written down immediately, not at shutdown.</a:t>
+            </a:r>
+          </a:p>
+          <a:p>
+            <a:r>
+              <a:rPr sz="1200">
+                <a:latin typeface="Calibri"/>
+              </a:rPr>
+              <a:t>Ask why it is written immediately. Because a vehicle that loses power before saving would come back not knowing who it belongs to.</a:t>
+            </a:r>
+          </a:p>
+          <a:p>
+            <a:r>
+              <a:rPr sz="1200">
+                <a:latin typeface="Calibri"/>
+              </a:rPr>
+              <a:t>Walk the order: forget keys, clear the marker, rebuild the empty allowlist, enable new connections, show it on the LEDs.</a:t>
+            </a:r>
+          </a:p>
+        </p:txBody>
+      </p:sp>
+      <p:sp>
+        <p:nvSpPr>
+          <p:cNvPr id="4" name="Slide Number Placeholder 3"/>
+          <p:cNvSpPr>
+            <a:spLocks noGrp="1"/>
+          </p:cNvSpPr>
+          <p:nvPr>
+            <p:ph type="sldNum" idx="5" sz="quarter"/>
+          </p:nvPr>
+        </p:nvSpPr>
+        <p:spPr/>
+      </p:sp>
+    </p:spTree>
+  </p:cSld>
+  <p:clrMapOvr>
+    <a:masterClrMapping/>
+  </p:clrMapOvr>
+</p:notes>
+</file>
+
+<file path=ppt/notesSlides/notesSlide19.xml><?xml version="1.0" encoding="utf-8"?>
+<p:notes xmlns:a="http://schemas.openxmlformats.org/drawingml/2006/main" xmlns:p="http://schemas.openxmlformats.org/presentationml/2006/main" xmlns:r="http://schemas.openxmlformats.org/officeDocument/2006/relationships">
+  <p:cSld>
+    <p:spTree>
+      <p:nvGrpSpPr>
+        <p:cNvPr id="1" name=""/>
+        <p:cNvGrpSpPr/>
+        <p:nvPr/>
+      </p:nvGrpSpPr>
+      <p:grpSpPr>
+        <a:xfrm>
+          <a:off x="0" y="0"/>
+          <a:ext cx="0" cy="0"/>
+          <a:chOff x="0" y="0"/>
+          <a:chExt cx="0" cy="0"/>
+        </a:xfrm>
+      </p:grpSpPr>
+      <p:sp>
+        <p:nvSpPr>
+          <p:cNvPr id="2" name="Slide Image Placeholder 1"/>
+          <p:cNvSpPr>
+            <a:spLocks noGrp="1"/>
+          </p:cNvSpPr>
+          <p:nvPr>
+            <p:ph type="sldImg" idx="2"/>
+          </p:nvPr>
+        </p:nvSpPr>
+        <p:spPr/>
+      </p:sp>
+      <p:sp>
+        <p:nvSpPr>
+          <p:cNvPr id="3" name="Notes Placeholder 2"/>
+          <p:cNvSpPr>
+            <a:spLocks noGrp="1"/>
+          </p:cNvSpPr>
+          <p:nvPr>
+            <p:ph type="body" idx="3" sz="quarter"/>
+          </p:nvPr>
+        </p:nvSpPr>
+        <p:spPr/>
+        <p:txBody>
+          <a:bodyPr/>
+          <a:lstStyle/>
+          <a:p>
+            <a:r>
+              <a:rPr sz="1200">
+                <a:latin typeface="Calibri"/>
+              </a:rPr>
+              <a:t>This is the most human bug in the course. Everything looks correct and the address is simply backwards.</a:t>
+            </a:r>
+          </a:p>
+          <a:p>
+            <a:r>
+              <a:rPr sz="1200">
+                <a:latin typeface="Calibri"/>
+              </a:rPr>
+              <a:t>Describe the symptom before the cause: you write down what it printed, paste it somewhere else, and nothing ever connects.</a:t>
+            </a:r>
+          </a:p>
+          <a:p>
+            <a:r>
+              <a:rPr sz="1200">
+                <a:latin typeface="Calibri"/>
+              </a:rPr>
+              <a:t>The first lesson is a debugging habit: print it at both ends and compare character by character.</a:t>
+            </a:r>
+          </a:p>
+          <a:p>
+            <a:r>
+              <a:rPr sz="1200">
+                <a:latin typeface="Calibri"/>
+              </a:rPr>
+              <a:t>The second is a real category. Byte order is why network protocols specify it and why the word big-endian exists.</a:t>
+            </a:r>
+          </a:p>
+          <a:p>
+            <a:r>
+              <a:rPr sz="1200">
+                <a:latin typeface="Calibri"/>
+              </a:rPr>
+              <a:t>Op 12 now prints most significant byte first, matching every Bluetooth scanner they will ever use.</a:t>
+            </a:r>
+          </a:p>
+        </p:txBody>
+      </p:sp>
+      <p:sp>
+        <p:nvSpPr>
+          <p:cNvPr id="4" name="Slide Number Placeholder 3"/>
+          <p:cNvSpPr>
+            <a:spLocks noGrp="1"/>
+          </p:cNvSpPr>
+          <p:nvPr>
+            <p:ph type="sldNum" idx="5" sz="quarter"/>
+          </p:nvPr>
+        </p:nvSpPr>
+        <p:spPr/>
+      </p:sp>
+    </p:spTree>
+  </p:cSld>
+  <p:clrMapOvr>
+    <a:masterClrMapping/>
+  </p:clrMapOvr>
+</p:notes>
+</file>
+
+<file path=ppt/notesSlides/notesSlide2.xml><?xml version="1.0" encoding="utf-8"?>
+<p:notes xmlns:a="http://schemas.openxmlformats.org/drawingml/2006/main" xmlns:p="http://schemas.openxmlformats.org/presentationml/2006/main" xmlns:r="http://schemas.openxmlformats.org/officeDocument/2006/relationships">
+  <p:cSld>
+    <p:spTree>
+      <p:nvGrpSpPr>
+        <p:cNvPr id="1" name=""/>
+        <p:cNvGrpSpPr/>
+        <p:nvPr/>
+      </p:nvGrpSpPr>
+      <p:grpSpPr>
+        <a:xfrm>
+          <a:off x="0" y="0"/>
+          <a:ext cx="0" cy="0"/>
+          <a:chOff x="0" y="0"/>
+          <a:chExt cx="0" cy="0"/>
+        </a:xfrm>
+      </p:grpSpPr>
+      <p:sp>
+        <p:nvSpPr>
+          <p:cNvPr id="2" name="Slide Image Placeholder 1"/>
+          <p:cNvSpPr>
+            <a:spLocks noGrp="1"/>
+          </p:cNvSpPr>
+          <p:nvPr>
+            <p:ph type="sldImg" idx="2"/>
+          </p:nvPr>
+        </p:nvSpPr>
+        <p:spPr/>
+      </p:sp>
+      <p:sp>
+        <p:nvSpPr>
+          <p:cNvPr id="3" name="Notes Placeholder 2"/>
+          <p:cNvSpPr>
+            <a:spLocks noGrp="1"/>
+          </p:cNvSpPr>
+          <p:nvPr>
+            <p:ph type="body" idx="3" sz="quarter"/>
+          </p:nvPr>
+        </p:nvSpPr>
+        <p:spPr/>
+        <p:txBody>
+          <a:bodyPr/>
+          <a:lstStyle/>
+          <a:p>
+            <a:r>
+              <a:rPr sz="1200">
+                <a:latin typeface="Calibri"/>
+              </a:rPr>
+              <a:t>Objective three - what commit() actually does - is the one that prevents a real hardware failure later. Do not let it slide by.</a:t>
+            </a:r>
+          </a:p>
+        </p:txBody>
+      </p:sp>
+      <p:sp>
+        <p:nvSpPr>
+          <p:cNvPr id="4" name="Slide Number Placeholder 3"/>
+          <p:cNvSpPr>
+            <a:spLocks noGrp="1"/>
+          </p:cNvSpPr>
+          <p:nvPr>
+            <p:ph type="sldNum" idx="5" sz="quarter"/>
+          </p:nvPr>
+        </p:nvSpPr>
+        <p:spPr/>
+      </p:sp>
+    </p:spTree>
+  </p:cSld>
+  <p:clrMapOvr>
+    <a:masterClrMapping/>
+  </p:clrMapOvr>
+</p:notes>
+</file>
+
+<file path=ppt/notesSlides/notesSlide20.xml><?xml version="1.0" encoding="utf-8"?>
+<p:notes xmlns:a="http://schemas.openxmlformats.org/drawingml/2006/main" xmlns:p="http://schemas.openxmlformats.org/presentationml/2006/main" xmlns:r="http://schemas.openxmlformats.org/officeDocument/2006/relationships">
+  <p:cSld>
+    <p:spTree>
+      <p:nvGrpSpPr>
+        <p:cNvPr id="1" name=""/>
+        <p:cNvGrpSpPr/>
+        <p:nvPr/>
+      </p:nvGrpSpPr>
+      <p:grpSpPr>
+        <a:xfrm>
+          <a:off x="0" y="0"/>
+          <a:ext cx="0" cy="0"/>
+          <a:chOff x="0" y="0"/>
+          <a:chExt cx="0" cy="0"/>
+        </a:xfrm>
+      </p:grpSpPr>
+      <p:sp>
+        <p:nvSpPr>
+          <p:cNvPr id="2" name="Slide Image Placeholder 1"/>
+          <p:cNvSpPr>
+            <a:spLocks noGrp="1"/>
+          </p:cNvSpPr>
+          <p:nvPr>
+            <p:ph type="sldImg" idx="2"/>
+          </p:nvPr>
+        </p:nvSpPr>
+        <p:spPr/>
+      </p:sp>
+      <p:sp>
+        <p:nvSpPr>
+          <p:cNvPr id="3" name="Notes Placeholder 2"/>
+          <p:cNvSpPr>
+            <a:spLocks noGrp="1"/>
+          </p:cNvSpPr>
+          <p:nvPr>
+            <p:ph type="body" idx="3" sz="quarter"/>
+          </p:nvPr>
+        </p:nvSpPr>
+        <p:spPr/>
+        <p:txBody>
+          <a:bodyPr/>
+          <a:lstStyle/>
+          <a:p>
+            <a:r>
+              <a:rPr sz="1200">
+                <a:latin typeface="Calibri"/>
+              </a:rPr>
+              <a:t>(Continued from the previous slide - the same notes apply.)</a:t>
+            </a:r>
+          </a:p>
+          <a:p/>
+          <a:p>
+            <a:r>
+              <a:rPr sz="1200">
+                <a:latin typeface="Calibri"/>
+              </a:rPr>
+              <a:t>This is the most human bug in the course. Everything looks correct and the address is simply backwards.</a:t>
+            </a:r>
+          </a:p>
+          <a:p>
+            <a:r>
+              <a:rPr sz="1200">
+                <a:latin typeface="Calibri"/>
+              </a:rPr>
+              <a:t>Describe the symptom before the cause: you write down what it printed, paste it somewhere else, and nothing ever connects.</a:t>
+            </a:r>
+          </a:p>
+          <a:p>
+            <a:r>
+              <a:rPr sz="1200">
+                <a:latin typeface="Calibri"/>
+              </a:rPr>
+              <a:t>The first lesson is a debugging habit: print it at both ends and compare character by character.</a:t>
+            </a:r>
+          </a:p>
+          <a:p>
+            <a:r>
+              <a:rPr sz="1200">
+                <a:latin typeface="Calibri"/>
+              </a:rPr>
+              <a:t>The second is a real category. Byte order is why network protocols specify it and why the word big-endian exists.</a:t>
+            </a:r>
+          </a:p>
+          <a:p>
+            <a:r>
+              <a:rPr sz="1200">
+                <a:latin typeface="Calibri"/>
+              </a:rPr>
+              <a:t>Op 12 now prints most significant byte first, matching every Bluetooth scanner they will ever use.</a:t>
+            </a:r>
+          </a:p>
+        </p:txBody>
+      </p:sp>
+      <p:sp>
+        <p:nvSpPr>
+          <p:cNvPr id="4" name="Slide Number Placeholder 3"/>
+          <p:cNvSpPr>
+            <a:spLocks noGrp="1"/>
+          </p:cNvSpPr>
+          <p:nvPr>
+            <p:ph type="sldNum" idx="5" sz="quarter"/>
+          </p:nvPr>
+        </p:nvSpPr>
+        <p:spPr/>
+      </p:sp>
+    </p:spTree>
+  </p:cSld>
+  <p:clrMapOvr>
+    <a:masterClrMapping/>
+  </p:clrMapOvr>
+</p:notes>
+</file>
+
+<file path=ppt/notesSlides/notesSlide21.xml><?xml version="1.0" encoding="utf-8"?>
+<p:notes xmlns:a="http://schemas.openxmlformats.org/drawingml/2006/main" xmlns:p="http://schemas.openxmlformats.org/presentationml/2006/main" xmlns:r="http://schemas.openxmlformats.org/officeDocument/2006/relationships">
+  <p:cSld>
+    <p:spTree>
+      <p:nvGrpSpPr>
+        <p:cNvPr id="1" name=""/>
+        <p:cNvGrpSpPr/>
+        <p:nvPr/>
+      </p:nvGrpSpPr>
+      <p:grpSpPr>
+        <a:xfrm>
+          <a:off x="0" y="0"/>
+          <a:ext cx="0" cy="0"/>
+          <a:chOff x="0" y="0"/>
+          <a:chExt cx="0" cy="0"/>
+        </a:xfrm>
+      </p:grpSpPr>
+      <p:sp>
+        <p:nvSpPr>
+          <p:cNvPr id="2" name="Slide Image Placeholder 1"/>
+          <p:cNvSpPr>
+            <a:spLocks noGrp="1"/>
+          </p:cNvSpPr>
+          <p:nvPr>
+            <p:ph type="sldImg" idx="2"/>
+          </p:nvPr>
+        </p:nvSpPr>
+        <p:spPr/>
+      </p:sp>
+      <p:sp>
+        <p:nvSpPr>
+          <p:cNvPr id="3" name="Notes Placeholder 2"/>
+          <p:cNvSpPr>
+            <a:spLocks noGrp="1"/>
+          </p:cNvSpPr>
+          <p:nvPr>
+            <p:ph type="body" idx="3" sz="quarter"/>
+          </p:nvPr>
+        </p:nvSpPr>
+        <p:spPr/>
+        <p:txBody>
+          <a:bodyPr/>
+          <a:lstStyle/>
+          <a:p>
+            <a:r>
+              <a:rPr sz="1200">
+                <a:latin typeface="Calibri"/>
+              </a:rPr>
+              <a:t>Conversation, not a test.</a:t>
+            </a:r>
+          </a:p>
+          <a:p>
+            <a:r>
+              <a:rPr sz="1200">
+                <a:latin typeface="Calibri"/>
+              </a:rPr>
+              <a:t>Answers: a callback is a function you supply and the library calls; the allowlist needs the stack up first, which is what BP32.setup() does; rebuilding keeps the sketch as the single source of truth.</a:t>
+            </a:r>
+          </a:p>
+          <a:p>
+            <a:r>
+              <a:rPr sz="1200">
+                <a:latin typeface="Calibri"/>
+              </a:rPr>
+              <a:t>New connections stay enabled so a vehicle can be re-paired without a recompile.</a:t>
+            </a:r>
+          </a:p>
+          <a:p>
+            <a:r>
+              <a:rPr sz="1200">
+                <a:latin typeface="Calibri"/>
+              </a:rPr>
+              <a:t>put() only writes the RAM copy; the flash is written by commit(). Never from loop, because flash wears out.</a:t>
+            </a:r>
+          </a:p>
+          <a:p>
+            <a:r>
+              <a:rPr sz="1200">
+                <a:latin typeface="Calibri"/>
+              </a:rPr>
+              <a:t>The magic byte says the data is ours, not that it is still valid for this version.</a:t>
+            </a:r>
+          </a:p>
+          <a:p>
+            <a:r>
+              <a:rPr sz="1200">
+                <a:latin typeface="Calibri"/>
+              </a:rPr>
+              <a:t>For question 8: the allowlist was applied before setup, or the paired address was never committed to EEPROM.</a:t>
+            </a:r>
+          </a:p>
+        </p:txBody>
+      </p:sp>
+      <p:sp>
+        <p:nvSpPr>
+          <p:cNvPr id="4" name="Slide Number Placeholder 3"/>
+          <p:cNvSpPr>
+            <a:spLocks noGrp="1"/>
+          </p:cNvSpPr>
+          <p:nvPr>
+            <p:ph type="sldNum" idx="5" sz="quarter"/>
+          </p:nvPr>
+        </p:nvSpPr>
+        <p:spPr/>
+      </p:sp>
+    </p:spTree>
+  </p:cSld>
+  <p:clrMapOvr>
+    <a:masterClrMapping/>
+  </p:clrMapOvr>
+</p:notes>
+</file>
+
+<file path=ppt/notesSlides/notesSlide3.xml><?xml version="1.0" encoding="utf-8"?>
+<p:notes xmlns:a="http://schemas.openxmlformats.org/drawingml/2006/main" xmlns:p="http://schemas.openxmlformats.org/presentationml/2006/main" xmlns:r="http://schemas.openxmlformats.org/officeDocument/2006/relationships">
+  <p:cSld>
+    <p:spTree>
+      <p:nvGrpSpPr>
+        <p:cNvPr id="1" name=""/>
+        <p:cNvGrpSpPr/>
+        <p:nvPr/>
+      </p:nvGrpSpPr>
+      <p:grpSpPr>
+        <a:xfrm>
+          <a:off x="0" y="0"/>
+          <a:ext cx="0" cy="0"/>
+          <a:chOff x="0" y="0"/>
+          <a:chExt cx="0" cy="0"/>
+        </a:xfrm>
+      </p:grpSpPr>
+      <p:sp>
+        <p:nvSpPr>
+          <p:cNvPr id="2" name="Slide Image Placeholder 1"/>
+          <p:cNvSpPr>
+            <a:spLocks noGrp="1"/>
+          </p:cNvSpPr>
+          <p:nvPr>
+            <p:ph type="sldImg" idx="2"/>
+          </p:nvPr>
+        </p:nvSpPr>
+        <p:spPr/>
+      </p:sp>
+      <p:sp>
+        <p:nvSpPr>
+          <p:cNvPr id="3" name="Notes Placeholder 2"/>
+          <p:cNvSpPr>
+            <a:spLocks noGrp="1"/>
+          </p:cNvSpPr>
+          <p:nvPr>
+            <p:ph type="body" idx="3" sz="quarter"/>
+          </p:nvPr>
+        </p:nvSpPr>
+        <p:spPr/>
+        <p:txBody>
+          <a:bodyPr/>
+          <a:lstStyle/>
+          <a:p>
+            <a:r>
+              <a:rPr sz="1200">
+                <a:latin typeface="Calibri"/>
+              </a:rPr>
+              <a:t>Two breaks. Both activities are long and both are worth their time.</a:t>
+            </a:r>
+          </a:p>
+        </p:txBody>
+      </p:sp>
+      <p:sp>
+        <p:nvSpPr>
+          <p:cNvPr id="4" name="Slide Number Placeholder 3"/>
+          <p:cNvSpPr>
+            <a:spLocks noGrp="1"/>
+          </p:cNvSpPr>
+          <p:nvPr>
+            <p:ph type="sldNum" idx="5" sz="quarter"/>
+          </p:nvPr>
+        </p:nvSpPr>
+        <p:spPr/>
+      </p:sp>
+    </p:spTree>
+  </p:cSld>
+  <p:clrMapOvr>
+    <a:masterClrMapping/>
+  </p:clrMapOvr>
+</p:notes>
+</file>
+
+<file path=ppt/notesSlides/notesSlide4.xml><?xml version="1.0" encoding="utf-8"?>
+<p:notes xmlns:a="http://schemas.openxmlformats.org/drawingml/2006/main" xmlns:p="http://schemas.openxmlformats.org/presentationml/2006/main" xmlns:r="http://schemas.openxmlformats.org/officeDocument/2006/relationships">
+  <p:cSld>
+    <p:spTree>
+      <p:nvGrpSpPr>
+        <p:cNvPr id="1" name=""/>
+        <p:cNvGrpSpPr/>
+        <p:nvPr/>
+      </p:nvGrpSpPr>
+      <p:grpSpPr>
+        <a:xfrm>
+          <a:off x="0" y="0"/>
+          <a:ext cx="0" cy="0"/>
+          <a:chOff x="0" y="0"/>
+          <a:chExt cx="0" cy="0"/>
+        </a:xfrm>
+      </p:grpSpPr>
+      <p:sp>
+        <p:nvSpPr>
+          <p:cNvPr id="2" name="Slide Image Placeholder 1"/>
+          <p:cNvSpPr>
+            <a:spLocks noGrp="1"/>
+          </p:cNvSpPr>
+          <p:nvPr>
+            <p:ph type="sldImg" idx="2"/>
+          </p:nvPr>
+        </p:nvSpPr>
+        <p:spPr/>
+      </p:sp>
+      <p:sp>
+        <p:nvSpPr>
+          <p:cNvPr id="3" name="Notes Placeholder 2"/>
+          <p:cNvSpPr>
+            <a:spLocks noGrp="1"/>
+          </p:cNvSpPr>
+          <p:nvPr>
+            <p:ph type="body" idx="3" sz="quarter"/>
+          </p:nvPr>
+        </p:nvSpPr>
+        <p:spPr/>
+        <p:txBody>
+          <a:bodyPr/>
+          <a:lstStyle/>
+          <a:p>
+            <a:r>
+              <a:rPr sz="1200">
+                <a:latin typeface="Calibri"/>
+              </a:rPr>
+              <a:t>Name the inversion out loud: normally your code calls a library, and with a callback the library calls your code.</a:t>
+            </a:r>
+          </a:p>
+          <a:p>
+            <a:r>
+              <a:rPr sz="1200">
+                <a:latin typeface="Calibri"/>
+              </a:rPr>
+              <a:t>The practical question is always WHEN it runs and what is safe to do there. Ask that before you answer it.</a:t>
+            </a:r>
+          </a:p>
+          <a:p>
+            <a:r>
+              <a:rPr sz="1200">
+                <a:latin typeface="Calibri"/>
+              </a:rPr>
+              <a:t>Here both callbacks run inside BP32.update(), which they call themselves from loop(). So it is their thread, at a moment they chose, and printing is safe.</a:t>
+            </a:r>
+          </a:p>
+          <a:p>
+            <a:r>
+              <a:rPr sz="1200">
+                <a:latin typeface="Calibri"/>
+              </a:rPr>
+              <a:t>The last line is the important caveat. From an interrupt, neither of those would be true - and that is a whole category of embedded bug.</a:t>
+            </a:r>
+          </a:p>
+        </p:txBody>
+      </p:sp>
+      <p:sp>
+        <p:nvSpPr>
+          <p:cNvPr id="4" name="Slide Number Placeholder 3"/>
+          <p:cNvSpPr>
+            <a:spLocks noGrp="1"/>
+          </p:cNvSpPr>
+          <p:nvPr>
+            <p:ph type="sldNum" idx="5" sz="quarter"/>
+          </p:nvPr>
+        </p:nvSpPr>
+        <p:spPr/>
+      </p:sp>
+    </p:spTree>
+  </p:cSld>
+  <p:clrMapOvr>
+    <a:masterClrMapping/>
+  </p:clrMapOvr>
+</p:notes>
+</file>
+
+<file path=ppt/notesSlides/notesSlide5.xml><?xml version="1.0" encoding="utf-8"?>
+<p:notes xmlns:a="http://schemas.openxmlformats.org/drawingml/2006/main" xmlns:p="http://schemas.openxmlformats.org/presentationml/2006/main" xmlns:r="http://schemas.openxmlformats.org/officeDocument/2006/relationships">
+  <p:cSld>
+    <p:spTree>
+      <p:nvGrpSpPr>
+        <p:cNvPr id="1" name=""/>
+        <p:cNvGrpSpPr/>
+        <p:nvPr/>
+      </p:nvGrpSpPr>
+      <p:grpSpPr>
+        <a:xfrm>
+          <a:off x="0" y="0"/>
+          <a:ext cx="0" cy="0"/>
+          <a:chOff x="0" y="0"/>
+          <a:chExt cx="0" cy="0"/>
+        </a:xfrm>
+      </p:grpSpPr>
+      <p:sp>
+        <p:nvSpPr>
+          <p:cNvPr id="2" name="Slide Image Placeholder 1"/>
+          <p:cNvSpPr>
+            <a:spLocks noGrp="1"/>
+          </p:cNvSpPr>
+          <p:nvPr>
+            <p:ph type="sldImg" idx="2"/>
+          </p:nvPr>
+        </p:nvSpPr>
+        <p:spPr/>
+      </p:sp>
+      <p:sp>
+        <p:nvSpPr>
+          <p:cNvPr id="3" name="Notes Placeholder 2"/>
+          <p:cNvSpPr>
+            <a:spLocks noGrp="1"/>
+          </p:cNvSpPr>
+          <p:nvPr>
+            <p:ph type="body" idx="3" sz="quarter"/>
+          </p:nvPr>
+        </p:nvSpPr>
+        <p:spPr/>
+        <p:txBody>
+          <a:bodyPr/>
+          <a:lstStyle/>
+          <a:p>
+            <a:r>
+              <a:rPr sz="1200">
+                <a:latin typeface="Calibri"/>
+              </a:rPr>
+              <a:t>(Continued from the previous slide - the same notes apply.)</a:t>
+            </a:r>
+          </a:p>
+          <a:p/>
+          <a:p>
+            <a:r>
+              <a:rPr sz="1200">
+                <a:latin typeface="Calibri"/>
+              </a:rPr>
+              <a:t>Name the inversion out loud: normally your code calls a library, and with a callback the library calls your code.</a:t>
+            </a:r>
+          </a:p>
+          <a:p>
+            <a:r>
+              <a:rPr sz="1200">
+                <a:latin typeface="Calibri"/>
+              </a:rPr>
+              <a:t>The practical question is always WHEN it runs and what is safe to do there. Ask that before you answer it.</a:t>
+            </a:r>
+          </a:p>
+          <a:p>
+            <a:r>
+              <a:rPr sz="1200">
+                <a:latin typeface="Calibri"/>
+              </a:rPr>
+              <a:t>Here both callbacks run inside BP32.update(), which they call themselves from loop(). So it is their thread, at a moment they chose, and printing is safe.</a:t>
+            </a:r>
+          </a:p>
+          <a:p>
+            <a:r>
+              <a:rPr sz="1200">
+                <a:latin typeface="Calibri"/>
+              </a:rPr>
+              <a:t>The last line is the important caveat. From an interrupt, neither of those would be true - and that is a whole category of embedded bug.</a:t>
+            </a:r>
+          </a:p>
+        </p:txBody>
+      </p:sp>
+      <p:sp>
+        <p:nvSpPr>
+          <p:cNvPr id="4" name="Slide Number Placeholder 3"/>
+          <p:cNvSpPr>
+            <a:spLocks noGrp="1"/>
+          </p:cNvSpPr>
+          <p:nvPr>
+            <p:ph type="sldNum" idx="5" sz="quarter"/>
+          </p:nvPr>
+        </p:nvSpPr>
+        <p:spPr/>
+      </p:sp>
+    </p:spTree>
+  </p:cSld>
+  <p:clrMapOvr>
+    <a:masterClrMapping/>
+  </p:clrMapOvr>
+</p:notes>
+</file>
+
+<file path=ppt/notesSlides/notesSlide6.xml><?xml version="1.0" encoding="utf-8"?>
+<p:notes xmlns:a="http://schemas.openxmlformats.org/drawingml/2006/main" xmlns:p="http://schemas.openxmlformats.org/presentationml/2006/main" xmlns:r="http://schemas.openxmlformats.org/officeDocument/2006/relationships">
+  <p:cSld>
+    <p:spTree>
+      <p:nvGrpSpPr>
+        <p:cNvPr id="1" name=""/>
+        <p:cNvGrpSpPr/>
+        <p:nvPr/>
+      </p:nvGrpSpPr>
+      <p:grpSpPr>
+        <a:xfrm>
+          <a:off x="0" y="0"/>
+          <a:ext cx="0" cy="0"/>
+          <a:chOff x="0" y="0"/>
+          <a:chExt cx="0" cy="0"/>
+        </a:xfrm>
+      </p:grpSpPr>
+      <p:sp>
+        <p:nvSpPr>
+          <p:cNvPr id="2" name="Slide Image Placeholder 1"/>
+          <p:cNvSpPr>
+            <a:spLocks noGrp="1"/>
+          </p:cNvSpPr>
+          <p:nvPr>
+            <p:ph type="sldImg" idx="2"/>
+          </p:nvPr>
+        </p:nvSpPr>
+        <p:spPr/>
+      </p:sp>
+      <p:sp>
+        <p:nvSpPr>
+          <p:cNvPr id="3" name="Notes Placeholder 2"/>
+          <p:cNvSpPr>
+            <a:spLocks noGrp="1"/>
+          </p:cNvSpPr>
+          <p:nvPr>
+            <p:ph type="body" idx="3" sz="quarter"/>
+          </p:nvPr>
+        </p:nvSpPr>
+        <p:spPr/>
+        <p:txBody>
+          <a:bodyPr/>
+          <a:lstStyle/>
+          <a:p>
+            <a:r>
+              <a:rPr sz="1200">
+                <a:latin typeface="Calibri"/>
+              </a:rPr>
+              <a:t>Set the problem up first: pairing alone does not give you one vehicle per controller.</a:t>
+            </a:r>
+          </a:p>
+          <a:p>
+            <a:r>
+              <a:rPr sz="1200">
+                <a:latin typeface="Calibri"/>
+              </a:rPr>
+              <a:t>Mistake one is the cruel one. Called before setup(), the allowlist calls do nothing AT ALL, and they do it silently. No error, no warning.</a:t>
+            </a:r>
+          </a:p>
+          <a:p>
+            <a:r>
+              <a:rPr sz="1200">
+                <a:latin typeface="Calibri"/>
+              </a:rPr>
+              <a:t>Mistake two is the one that rots slowly: add rather than rebuild, and stale entries accumulate where nobody can see them.</a:t>
+            </a:r>
+          </a:p>
+          <a:p>
+            <a:r>
+              <a:rPr sz="1200">
+                <a:latin typeface="Calibri"/>
+              </a:rPr>
+              <a:t>Rebuild from scratch every boot, and the sketch is the single source of truth. That principle is worth stating generally.</a:t>
+            </a:r>
+          </a:p>
+        </p:txBody>
+      </p:sp>
+      <p:sp>
+        <p:nvSpPr>
+          <p:cNvPr id="4" name="Slide Number Placeholder 3"/>
+          <p:cNvSpPr>
+            <a:spLocks noGrp="1"/>
+          </p:cNvSpPr>
+          <p:nvPr>
+            <p:ph type="sldNum" idx="5" sz="quarter"/>
+          </p:nvPr>
+        </p:nvSpPr>
+        <p:spPr/>
+      </p:sp>
+    </p:spTree>
+  </p:cSld>
+  <p:clrMapOvr>
+    <a:masterClrMapping/>
+  </p:clrMapOvr>
+</p:notes>
+</file>
+
+<file path=ppt/notesSlides/notesSlide7.xml><?xml version="1.0" encoding="utf-8"?>
+<p:notes xmlns:a="http://schemas.openxmlformats.org/drawingml/2006/main" xmlns:p="http://schemas.openxmlformats.org/presentationml/2006/main" xmlns:r="http://schemas.openxmlformats.org/officeDocument/2006/relationships">
+  <p:cSld>
+    <p:spTree>
+      <p:nvGrpSpPr>
+        <p:cNvPr id="1" name=""/>
+        <p:cNvGrpSpPr/>
+        <p:nvPr/>
+      </p:nvGrpSpPr>
+      <p:grpSpPr>
+        <a:xfrm>
+          <a:off x="0" y="0"/>
+          <a:ext cx="0" cy="0"/>
+          <a:chOff x="0" y="0"/>
+          <a:chExt cx="0" cy="0"/>
+        </a:xfrm>
+      </p:grpSpPr>
+      <p:sp>
+        <p:nvSpPr>
+          <p:cNvPr id="2" name="Slide Image Placeholder 1"/>
+          <p:cNvSpPr>
+            <a:spLocks noGrp="1"/>
+          </p:cNvSpPr>
+          <p:nvPr>
+            <p:ph type="sldImg" idx="2"/>
+          </p:nvPr>
+        </p:nvSpPr>
+        <p:spPr/>
+      </p:sp>
+      <p:sp>
+        <p:nvSpPr>
+          <p:cNvPr id="3" name="Notes Placeholder 2"/>
+          <p:cNvSpPr>
+            <a:spLocks noGrp="1"/>
+          </p:cNvSpPr>
+          <p:nvPr>
+            <p:ph type="body" idx="3" sz="quarter"/>
+          </p:nvPr>
+        </p:nvSpPr>
+        <p:spPr/>
+        <p:txBody>
+          <a:bodyPr/>
+          <a:lstStyle/>
+          <a:p>
+            <a:r>
+              <a:rPr sz="1200">
+                <a:latin typeface="Calibri"/>
+              </a:rPr>
+              <a:t>(Continued from the previous slide - the same notes apply.)</a:t>
+            </a:r>
+          </a:p>
+          <a:p/>
+          <a:p>
+            <a:r>
+              <a:rPr sz="1200">
+                <a:latin typeface="Calibri"/>
+              </a:rPr>
+              <a:t>Set the problem up first: pairing alone does not give you one vehicle per controller.</a:t>
+            </a:r>
+          </a:p>
+          <a:p>
+            <a:r>
+              <a:rPr sz="1200">
+                <a:latin typeface="Calibri"/>
+              </a:rPr>
+              <a:t>Mistake one is the cruel one. Called before setup(), the allowlist calls do nothing AT ALL, and they do it silently. No error, no warning.</a:t>
+            </a:r>
+          </a:p>
+          <a:p>
+            <a:r>
+              <a:rPr sz="1200">
+                <a:latin typeface="Calibri"/>
+              </a:rPr>
+              <a:t>Mistake two is the one that rots slowly: add rather than rebuild, and stale entries accumulate where nobody can see them.</a:t>
+            </a:r>
+          </a:p>
+          <a:p>
+            <a:r>
+              <a:rPr sz="1200">
+                <a:latin typeface="Calibri"/>
+              </a:rPr>
+              <a:t>Rebuild from scratch every boot, and the sketch is the single source of truth. That principle is worth stating generally.</a:t>
+            </a:r>
+          </a:p>
+        </p:txBody>
+      </p:sp>
+      <p:sp>
+        <p:nvSpPr>
+          <p:cNvPr id="4" name="Slide Number Placeholder 3"/>
+          <p:cNvSpPr>
+            <a:spLocks noGrp="1"/>
+          </p:cNvSpPr>
+          <p:nvPr>
+            <p:ph type="sldNum" idx="5" sz="quarter"/>
+          </p:nvPr>
+        </p:nvSpPr>
+        <p:spPr/>
+      </p:sp>
+    </p:spTree>
+  </p:cSld>
+  <p:clrMapOvr>
+    <a:masterClrMapping/>
+  </p:clrMapOvr>
+</p:notes>
+</file>
+
+<file path=ppt/notesSlides/notesSlide8.xml><?xml version="1.0" encoding="utf-8"?>
+<p:notes xmlns:a="http://schemas.openxmlformats.org/drawingml/2006/main" xmlns:p="http://schemas.openxmlformats.org/presentationml/2006/main" xmlns:r="http://schemas.openxmlformats.org/officeDocument/2006/relationships">
+  <p:cSld>
+    <p:spTree>
+      <p:nvGrpSpPr>
+        <p:cNvPr id="1" name=""/>
+        <p:cNvGrpSpPr/>
+        <p:nvPr/>
+      </p:nvGrpSpPr>
+      <p:grpSpPr>
+        <a:xfrm>
+          <a:off x="0" y="0"/>
+          <a:ext cx="0" cy="0"/>
+          <a:chOff x="0" y="0"/>
+          <a:chExt cx="0" cy="0"/>
+        </a:xfrm>
+      </p:grpSpPr>
+      <p:sp>
+        <p:nvSpPr>
+          <p:cNvPr id="2" name="Slide Image Placeholder 1"/>
+          <p:cNvSpPr>
+            <a:spLocks noGrp="1"/>
+          </p:cNvSpPr>
+          <p:nvPr>
+            <p:ph type="sldImg" idx="2"/>
+          </p:nvPr>
+        </p:nvSpPr>
+        <p:spPr/>
+      </p:sp>
+      <p:sp>
+        <p:nvSpPr>
+          <p:cNvPr id="3" name="Notes Placeholder 2"/>
+          <p:cNvSpPr>
+            <a:spLocks noGrp="1"/>
+          </p:cNvSpPr>
+          <p:nvPr>
+            <p:ph type="body" idx="3" sz="quarter"/>
+          </p:nvPr>
+        </p:nvSpPr>
+        <p:spPr/>
+        <p:txBody>
+          <a:bodyPr/>
+          <a:lstStyle/>
+          <a:p>
+            <a:r>
+              <a:rPr sz="1200">
+                <a:latin typeface="Calibri"/>
+              </a:rPr>
+              <a:t>Twenty seconds. First activity.</a:t>
+            </a:r>
+          </a:p>
+        </p:txBody>
+      </p:sp>
+      <p:sp>
+        <p:nvSpPr>
+          <p:cNvPr id="4" name="Slide Number Placeholder 3"/>
+          <p:cNvSpPr>
+            <a:spLocks noGrp="1"/>
+          </p:cNvSpPr>
+          <p:nvPr>
+            <p:ph type="sldNum" idx="5" sz="quarter"/>
+          </p:nvPr>
+        </p:nvSpPr>
+        <p:spPr/>
+      </p:sp>
+    </p:spTree>
+  </p:cSld>
+  <p:clrMapOvr>
+    <a:masterClrMapping/>
+  </p:clrMapOvr>
+</p:notes>
+</file>
+
+<file path=ppt/notesSlides/notesSlide9.xml><?xml version="1.0" encoding="utf-8"?>
+<p:notes xmlns:a="http://schemas.openxmlformats.org/drawingml/2006/main" xmlns:p="http://schemas.openxmlformats.org/presentationml/2006/main" xmlns:r="http://schemas.openxmlformats.org/officeDocument/2006/relationships">
+  <p:cSld>
+    <p:spTree>
+      <p:nvGrpSpPr>
+        <p:cNvPr id="1" name=""/>
+        <p:cNvGrpSpPr/>
+        <p:nvPr/>
+      </p:nvGrpSpPr>
+      <p:grpSpPr>
+        <a:xfrm>
+          <a:off x="0" y="0"/>
+          <a:ext cx="0" cy="0"/>
+          <a:chOff x="0" y="0"/>
+          <a:chExt cx="0" cy="0"/>
+        </a:xfrm>
+      </p:grpSpPr>
+      <p:sp>
+        <p:nvSpPr>
+          <p:cNvPr id="2" name="Slide Image Placeholder 1"/>
+          <p:cNvSpPr>
+            <a:spLocks noGrp="1"/>
+          </p:cNvSpPr>
+          <p:nvPr>
+            <p:ph type="sldImg" idx="2"/>
+          </p:nvPr>
+        </p:nvSpPr>
+        <p:spPr/>
+      </p:sp>
+      <p:sp>
+        <p:nvSpPr>
+          <p:cNvPr id="3" name="Notes Placeholder 2"/>
+          <p:cNvSpPr>
+            <a:spLocks noGrp="1"/>
+          </p:cNvSpPr>
+          <p:nvPr>
+            <p:ph type="body" idx="3" sz="quarter"/>
+          </p:nvPr>
+        </p:nvSpPr>
+        <p:spPr/>
+        <p:txBody>
+          <a:bodyPr/>
+          <a:lstStyle/>
+          <a:p>
+            <a:r>
+              <a:rPr sz="1200">
+                <a:latin typeface="Calibri"/>
+              </a:rPr>
+              <a:t>Step 3 is the moment it becomes real: a second controller turned away with a printed reason.</a:t>
+            </a:r>
+          </a:p>
+          <a:p>
+            <a:r>
+              <a:rPr sz="1200">
+                <a:latin typeface="Calibri"/>
+              </a:rPr>
+              <a:t>Step 5 locks to an address that does not exist, so nothing can connect. Good for showing that the mechanism really is doing the work.</a:t>
+            </a:r>
+          </a:p>
+          <a:p>
+            <a:r>
+              <a:rPr sz="1200">
+                <a:latin typeface="Calibri"/>
+              </a:rPr>
+              <a:t>Step 6 cross-checks against a phone scanner app. Worth doing - it connects the number on screen to something outside the room.</a:t>
+            </a:r>
+          </a:p>
+          <a:p>
+            <a:r>
+              <a:rPr sz="1200">
+                <a:latin typeface="Calibri"/>
+              </a:rPr>
+              <a:t>Answers: this sketch keeps the address in RAM only, so it is gone at reset; and applyAllowlist() must come after BP32.setup() because setup is what brings the stack up.</a:t>
+            </a:r>
+          </a:p>
+        </p:txBody>
+      </p:sp>
+      <p:sp>
+        <p:nvSpPr>
+          <p:cNvPr id="4" name="Slide Number Placeholder 3"/>
+          <p:cNvSpPr>
+            <a:spLocks noGrp="1"/>
+          </p:cNvSpPr>
+          <p:nvPr>
+            <p:ph type="sldNum" idx="5" sz="quarter"/>
+          </p:nvPr>
+        </p:nvSpPr>
+        <p:spPr/>
+      </p:sp>
+    </p:spTree>
+  </p:cSld>
+  <p:clrMapOvr>
+    <a:masterClrMapping/>
+  </p:clrMapOvr>
+</p:notes>
 </file>
 
 <file path=ppt/slideLayouts/slideLayout1.xml><?xml version="1.0" encoding="utf-8"?>
@@ -3591,7 +5935,7 @@
         </p:blipFill>
         <p:spPr>
           <a:xfrm>
-            <a:off x="7223760" y="1371600"/>
+            <a:off x="7223760" y="1463040"/>
             <a:ext cx="4480560" cy="4480560"/>
           </a:xfrm>
           <a:prstGeom prst="rect">
@@ -5735,6 +8079,22 @@
             <a:spAutoFit/>
           </a:bodyPr>
           <a:lstStyle/>
+          <a:p>
+            <a:pPr algn="l">
+              <a:lnSpc>
+                <a:spcPct val="100000"/>
+              </a:lnSpc>
+              <a:spcAft>
+                <a:spcPts val="900"/>
+              </a:spcAft>
+              <a:defRPr sz="1800" b="0">
+                <a:solidFill>
+                  <a:srgbClr val="222222"/>
+                </a:solidFill>
+                <a:latin typeface="Calibri"/>
+              </a:defRPr>
+            </a:pPr>
+          </a:p>
           <a:p>
             <a:pPr algn="l">
               <a:lnSpc>
@@ -8909,47 +11269,6 @@
               <a:t>The symptom: you write down the address it printed, paste it into another program, and nothing ever connects. Everything looks correct. The address is simply backwards.</a:t>
             </a:r>
           </a:p>
-          <a:p>
-            <a:pPr algn="l">
-              <a:lnSpc>
-                <a:spcPct val="100000"/>
-              </a:lnSpc>
-              <a:spcAft>
-                <a:spcPts val="900"/>
-              </a:spcAft>
-              <a:defRPr sz="1800" b="0">
-                <a:solidFill>
-                  <a:srgbClr val="222222"/>
-                </a:solidFill>
-                <a:latin typeface="Calibri"/>
-              </a:defRPr>
-            </a:pPr>
-          </a:p>
-          <a:p>
-            <a:pPr algn="l">
-              <a:lnSpc>
-                <a:spcPct val="100000"/>
-              </a:lnSpc>
-              <a:spcAft>
-                <a:spcPts val="900"/>
-              </a:spcAft>
-              <a:defRPr sz="1800" b="0">
-                <a:solidFill>
-                  <a:srgbClr val="222222"/>
-                </a:solidFill>
-                <a:latin typeface="Calibri"/>
-              </a:defRPr>
-            </a:pPr>
-            <a:r>
-              <a:rPr sz="1800" b="0">
-                <a:solidFill>
-                  <a:srgbClr val="222222"/>
-                </a:solidFill>
-                <a:latin typeface="Calibri"/>
-              </a:rPr>
-              <a:t>Two lessons:</a:t>
-            </a:r>
-          </a:p>
         </p:txBody>
       </p:sp>
     </p:spTree>
@@ -9577,6 +11896,47 @@
             <a:spAutoFit/>
           </a:bodyPr>
           <a:lstStyle/>
+          <a:p>
+            <a:pPr algn="l">
+              <a:lnSpc>
+                <a:spcPct val="100000"/>
+              </a:lnSpc>
+              <a:spcAft>
+                <a:spcPts val="900"/>
+              </a:spcAft>
+              <a:defRPr sz="1800" b="0">
+                <a:solidFill>
+                  <a:srgbClr val="222222"/>
+                </a:solidFill>
+                <a:latin typeface="Calibri"/>
+              </a:defRPr>
+            </a:pPr>
+          </a:p>
+          <a:p>
+            <a:pPr algn="l">
+              <a:lnSpc>
+                <a:spcPct val="100000"/>
+              </a:lnSpc>
+              <a:spcAft>
+                <a:spcPts val="900"/>
+              </a:spcAft>
+              <a:defRPr sz="1800" b="0">
+                <a:solidFill>
+                  <a:srgbClr val="222222"/>
+                </a:solidFill>
+                <a:latin typeface="Calibri"/>
+              </a:defRPr>
+            </a:pPr>
+            <a:r>
+              <a:rPr sz="1800" b="0">
+                <a:solidFill>
+                  <a:srgbClr val="222222"/>
+                </a:solidFill>
+                <a:latin typeface="Calibri"/>
+              </a:rPr>
+              <a:t>Two lessons:</a:t>
+            </a:r>
+          </a:p>
           <a:p>
             <a:pPr lvl="1" algn="l">
               <a:lnSpc>
@@ -11240,88 +13600,6 @@
               <a:t>That inversion is worth naming. Normally your code calls a library. With a callback, the library calls your code. It is how every event system works, from button handlers to network stacks.</a:t>
             </a:r>
           </a:p>
-          <a:p>
-            <a:pPr algn="l">
-              <a:lnSpc>
-                <a:spcPct val="100000"/>
-              </a:lnSpc>
-              <a:spcAft>
-                <a:spcPts val="900"/>
-              </a:spcAft>
-              <a:defRPr sz="1800" b="0">
-                <a:solidFill>
-                  <a:srgbClr val="222222"/>
-                </a:solidFill>
-                <a:latin typeface="Calibri"/>
-              </a:defRPr>
-            </a:pPr>
-          </a:p>
-          <a:p>
-            <a:pPr algn="l">
-              <a:lnSpc>
-                <a:spcPct val="100000"/>
-              </a:lnSpc>
-              <a:spcAft>
-                <a:spcPts val="900"/>
-              </a:spcAft>
-              <a:defRPr sz="1800" b="0">
-                <a:solidFill>
-                  <a:srgbClr val="222222"/>
-                </a:solidFill>
-                <a:latin typeface="Calibri"/>
-              </a:defRPr>
-            </a:pPr>
-            <a:r>
-              <a:rPr sz="1800" b="0">
-                <a:solidFill>
-                  <a:srgbClr val="222222"/>
-                </a:solidFill>
-                <a:latin typeface="Calibri"/>
-              </a:rPr>
-              <a:t>The practical question is always: WHEN does it run, and what is safe to do in there?</a:t>
-            </a:r>
-          </a:p>
-          <a:p>
-            <a:pPr algn="l">
-              <a:lnSpc>
-                <a:spcPct val="100000"/>
-              </a:lnSpc>
-              <a:spcAft>
-                <a:spcPts val="900"/>
-              </a:spcAft>
-              <a:defRPr sz="1800" b="0">
-                <a:solidFill>
-                  <a:srgbClr val="222222"/>
-                </a:solidFill>
-                <a:latin typeface="Calibri"/>
-              </a:defRPr>
-            </a:pPr>
-          </a:p>
-          <a:p>
-            <a:pPr algn="l">
-              <a:lnSpc>
-                <a:spcPct val="100000"/>
-              </a:lnSpc>
-              <a:spcAft>
-                <a:spcPts val="900"/>
-              </a:spcAft>
-              <a:defRPr sz="1800" b="0">
-                <a:solidFill>
-                  <a:srgbClr val="222222"/>
-                </a:solidFill>
-                <a:latin typeface="Calibri"/>
-              </a:defRPr>
-            </a:pPr>
-            <a:r>
-              <a:rPr sz="1800" b="0">
-                <a:solidFill>
-                  <a:srgbClr val="222222"/>
-                </a:solidFill>
-                <a:latin typeface="Calibri"/>
-              </a:rPr>
-              <a:t>Here, both callbacks run from inside BP32.update(), which you call yourself from loop(). So they run on your thread, at a moment you chose, and it is safe to print and to touch program state.</a:t>
-            </a:r>
-          </a:p>
         </p:txBody>
       </p:sp>
     </p:spTree>
@@ -11549,6 +13827,88 @@
             <a:spAutoFit/>
           </a:bodyPr>
           <a:lstStyle/>
+          <a:p>
+            <a:pPr algn="l">
+              <a:lnSpc>
+                <a:spcPct val="100000"/>
+              </a:lnSpc>
+              <a:spcAft>
+                <a:spcPts val="900"/>
+              </a:spcAft>
+              <a:defRPr sz="1800" b="0">
+                <a:solidFill>
+                  <a:srgbClr val="222222"/>
+                </a:solidFill>
+                <a:latin typeface="Calibri"/>
+              </a:defRPr>
+            </a:pPr>
+          </a:p>
+          <a:p>
+            <a:pPr algn="l">
+              <a:lnSpc>
+                <a:spcPct val="100000"/>
+              </a:lnSpc>
+              <a:spcAft>
+                <a:spcPts val="900"/>
+              </a:spcAft>
+              <a:defRPr sz="1800" b="0">
+                <a:solidFill>
+                  <a:srgbClr val="222222"/>
+                </a:solidFill>
+                <a:latin typeface="Calibri"/>
+              </a:defRPr>
+            </a:pPr>
+            <a:r>
+              <a:rPr sz="1800" b="0">
+                <a:solidFill>
+                  <a:srgbClr val="222222"/>
+                </a:solidFill>
+                <a:latin typeface="Calibri"/>
+              </a:rPr>
+              <a:t>The practical question is always: WHEN does it run, and what is safe to do in there?</a:t>
+            </a:r>
+          </a:p>
+          <a:p>
+            <a:pPr algn="l">
+              <a:lnSpc>
+                <a:spcPct val="100000"/>
+              </a:lnSpc>
+              <a:spcAft>
+                <a:spcPts val="900"/>
+              </a:spcAft>
+              <a:defRPr sz="1800" b="0">
+                <a:solidFill>
+                  <a:srgbClr val="222222"/>
+                </a:solidFill>
+                <a:latin typeface="Calibri"/>
+              </a:defRPr>
+            </a:pPr>
+          </a:p>
+          <a:p>
+            <a:pPr algn="l">
+              <a:lnSpc>
+                <a:spcPct val="100000"/>
+              </a:lnSpc>
+              <a:spcAft>
+                <a:spcPts val="900"/>
+              </a:spcAft>
+              <a:defRPr sz="1800" b="0">
+                <a:solidFill>
+                  <a:srgbClr val="222222"/>
+                </a:solidFill>
+                <a:latin typeface="Calibri"/>
+              </a:defRPr>
+            </a:pPr>
+            <a:r>
+              <a:rPr sz="1800" b="0">
+                <a:solidFill>
+                  <a:srgbClr val="222222"/>
+                </a:solidFill>
+                <a:latin typeface="Calibri"/>
+              </a:rPr>
+              <a:t>Here, both callbacks run from inside BP32.update(), which you call yourself from loop(). So they run on your thread, at a moment you chose, and it is safe to print and to touch program state.</a:t>
+            </a:r>
+          </a:p>
           <a:p>
             <a:pPr algn="l">
               <a:lnSpc>
@@ -13911,4 +16271,324 @@
   </a:objectDefaults>
   <a:extraClrSchemeLst/>
 </a:theme>
+</file>
+
+<file path=ppt/theme/theme2.xml><?xml version="1.0" encoding="utf-8"?>
+<a:theme xmlns:a="http://schemas.openxmlformats.org/drawingml/2006/main" name="Office Theme">
+  <a:themeElements>
+    <a:clrScheme name="Office">
+      <a:dk1>
+        <a:sysClr val="windowText" lastClr="000000"/>
+      </a:dk1>
+      <a:lt1>
+        <a:sysClr val="window" lastClr="FFFFFF"/>
+      </a:lt1>
+      <a:dk2>
+        <a:srgbClr val="1F497D"/>
+      </a:dk2>
+      <a:lt2>
+        <a:srgbClr val="EEECE1"/>
+      </a:lt2>
+      <a:accent1>
+        <a:srgbClr val="4F81BD"/>
+      </a:accent1>
+      <a:accent2>
+        <a:srgbClr val="C0504D"/>
+      </a:accent2>
+      <a:accent3>
+        <a:srgbClr val="9BBB59"/>
+      </a:accent3>
+      <a:accent4>
+        <a:srgbClr val="8064A2"/>
+      </a:accent4>
+      <a:accent5>
+        <a:srgbClr val="4BACC6"/>
+      </a:accent5>
+      <a:accent6>
+        <a:srgbClr val="F79646"/>
+      </a:accent6>
+      <a:hlink>
+        <a:srgbClr val="0000FF"/>
+      </a:hlink>
+      <a:folHlink>
+        <a:srgbClr val="800080"/>
+      </a:folHlink>
+    </a:clrScheme>
+    <a:fontScheme name="Office">
+      <a:majorFont>
+        <a:latin typeface="Calibri"/>
+        <a:ea typeface=""/>
+        <a:cs typeface=""/>
+        <a:font script="Jpan" typeface="ＭＳ Ｐゴシック"/>
+        <a:font script="Hang" typeface="맑은 고딕"/>
+        <a:font script="Hans" typeface="宋体"/>
+        <a:font script="Hant" typeface="新細明體"/>
+        <a:font script="Arab" typeface="Times New Roman"/>
+        <a:font script="Hebr" typeface="Times New Roman"/>
+        <a:font script="Thai" typeface="Angsana New"/>
+        <a:font script="Ethi" typeface="Nyala"/>
+        <a:font script="Beng" typeface="Vrinda"/>
+        <a:font script="Gujr" typeface="Shruti"/>
+        <a:font script="Khmr" typeface="MoolBoran"/>
+        <a:font script="Knda" typeface="Tunga"/>
+        <a:font script="Guru" typeface="Raavi"/>
+        <a:font script="Cans" typeface="Euphemia"/>
+        <a:font script="Cher" typeface="Plantagenet Cherokee"/>
+        <a:font script="Yiii" typeface="Microsoft Yi Baiti"/>
+        <a:font script="Tibt" typeface="Microsoft Himalaya"/>
+        <a:font script="Thaa" typeface="MV Boli"/>
+        <a:font script="Deva" typeface="Mangal"/>
+        <a:font script="Telu" typeface="Gautami"/>
+        <a:font script="Taml" typeface="Latha"/>
+        <a:font script="Syrc" typeface="Estrangelo Edessa"/>
+        <a:font script="Orya" typeface="Kalinga"/>
+        <a:font script="Mlym" typeface="Kartika"/>
+        <a:font script="Laoo" typeface="DokChampa"/>
+        <a:font script="Sinh" typeface="Iskoola Pota"/>
+        <a:font script="Mong" typeface="Mongolian Baiti"/>
+        <a:font script="Viet" typeface="Times New Roman"/>
+        <a:font script="Uigh" typeface="Microsoft Uighur"/>
+        <a:font script="Geor" typeface="Sylfaen"/>
+      </a:majorFont>
+      <a:minorFont>
+        <a:latin typeface="Calibri"/>
+        <a:ea typeface=""/>
+        <a:cs typeface=""/>
+        <a:font script="Jpan" typeface="ＭＳ Ｐゴシック"/>
+        <a:font script="Hang" typeface="맑은 고딕"/>
+        <a:font script="Hans" typeface="宋体"/>
+        <a:font script="Hant" typeface="新細明體"/>
+        <a:font script="Arab" typeface="Arial"/>
+        <a:font script="Hebr" typeface="Arial"/>
+        <a:font script="Thai" typeface="Cordia New"/>
+        <a:font script="Ethi" typeface="Nyala"/>
+        <a:font script="Beng" typeface="Vrinda"/>
+        <a:font script="Gujr" typeface="Shruti"/>
+        <a:font script="Khmr" typeface="DaunPenh"/>
+        <a:font script="Knda" typeface="Tunga"/>
+        <a:font script="Guru" typeface="Raavi"/>
+        <a:font script="Cans" typeface="Euphemia"/>
+        <a:font script="Cher" typeface="Plantagenet Cherokee"/>
+        <a:font script="Yiii" typeface="Microsoft Yi Baiti"/>
+        <a:font script="Tibt" typeface="Microsoft Himalaya"/>
+        <a:font script="Thaa" typeface="MV Boli"/>
+        <a:font script="Deva" typeface="Mangal"/>
+        <a:font script="Telu" typeface="Gautami"/>
+        <a:font script="Taml" typeface="Latha"/>
+        <a:font script="Syrc" typeface="Estrangelo Edessa"/>
+        <a:font script="Orya" typeface="Kalinga"/>
+        <a:font script="Mlym" typeface="Kartika"/>
+        <a:font script="Laoo" typeface="DokChampa"/>
+        <a:font script="Sinh" typeface="Iskoola Pota"/>
+        <a:font script="Mong" typeface="Mongolian Baiti"/>
+        <a:font script="Viet" typeface="Arial"/>
+        <a:font script="Uigh" typeface="Microsoft Uighur"/>
+        <a:font script="Geor" typeface="Sylfaen"/>
+      </a:minorFont>
+    </a:fontScheme>
+    <a:fmtScheme name="Office">
+      <a:fillStyleLst>
+        <a:solidFill>
+          <a:schemeClr val="phClr"/>
+        </a:solidFill>
+        <a:gradFill rotWithShape="1">
+          <a:gsLst>
+            <a:gs pos="0">
+              <a:schemeClr val="phClr">
+                <a:tint val="50000"/>
+                <a:satMod val="300000"/>
+              </a:schemeClr>
+            </a:gs>
+            <a:gs pos="35000">
+              <a:schemeClr val="phClr">
+                <a:tint val="37000"/>
+                <a:satMod val="300000"/>
+              </a:schemeClr>
+            </a:gs>
+            <a:gs pos="100000">
+              <a:schemeClr val="phClr">
+                <a:tint val="15000"/>
+                <a:satMod val="350000"/>
+              </a:schemeClr>
+            </a:gs>
+          </a:gsLst>
+          <a:lin ang="16200000" scaled="1"/>
+        </a:gradFill>
+        <a:gradFill rotWithShape="1">
+          <a:gsLst>
+            <a:gs pos="0">
+              <a:schemeClr val="phClr">
+                <a:tint val="100000"/>
+                <a:shade val="100000"/>
+                <a:satMod val="130000"/>
+              </a:schemeClr>
+            </a:gs>
+            <a:gs pos="100000">
+              <a:schemeClr val="phClr">
+                <a:tint val="50000"/>
+                <a:shade val="100000"/>
+                <a:satMod val="350000"/>
+              </a:schemeClr>
+            </a:gs>
+          </a:gsLst>
+          <a:lin ang="16200000" scaled="0"/>
+        </a:gradFill>
+      </a:fillStyleLst>
+      <a:lnStyleLst>
+        <a:ln w="9525" cap="flat" cmpd="sng" algn="ctr">
+          <a:solidFill>
+            <a:schemeClr val="phClr">
+              <a:shade val="95000"/>
+              <a:satMod val="105000"/>
+            </a:schemeClr>
+          </a:solidFill>
+          <a:prstDash val="solid"/>
+        </a:ln>
+        <a:ln w="25400" cap="flat" cmpd="sng" algn="ctr">
+          <a:solidFill>
+            <a:schemeClr val="phClr"/>
+          </a:solidFill>
+          <a:prstDash val="solid"/>
+        </a:ln>
+        <a:ln w="38100" cap="flat" cmpd="sng" algn="ctr">
+          <a:solidFill>
+            <a:schemeClr val="phClr"/>
+          </a:solidFill>
+          <a:prstDash val="solid"/>
+        </a:ln>
+      </a:lnStyleLst>
+      <a:effectStyleLst>
+        <a:effectStyle>
+          <a:effectLst>
+            <a:outerShdw blurRad="40000" dist="20000" dir="5400000" rotWithShape="0">
+              <a:srgbClr val="000000">
+                <a:alpha val="38000"/>
+              </a:srgbClr>
+            </a:outerShdw>
+          </a:effectLst>
+        </a:effectStyle>
+        <a:effectStyle>
+          <a:effectLst>
+            <a:outerShdw blurRad="40000" dist="23000" dir="5400000" rotWithShape="0">
+              <a:srgbClr val="000000">
+                <a:alpha val="35000"/>
+              </a:srgbClr>
+            </a:outerShdw>
+          </a:effectLst>
+        </a:effectStyle>
+        <a:effectStyle>
+          <a:effectLst>
+            <a:outerShdw blurRad="40000" dist="23000" dir="5400000" rotWithShape="0">
+              <a:srgbClr val="000000">
+                <a:alpha val="35000"/>
+              </a:srgbClr>
+            </a:outerShdw>
+          </a:effectLst>
+          <a:scene3d>
+            <a:camera prst="orthographicFront">
+              <a:rot lat="0" lon="0" rev="0"/>
+            </a:camera>
+            <a:lightRig rig="threePt" dir="t">
+              <a:rot lat="0" lon="0" rev="1200000"/>
+            </a:lightRig>
+          </a:scene3d>
+          <a:sp3d>
+            <a:bevelT w="63500" h="25400"/>
+          </a:sp3d>
+        </a:effectStyle>
+      </a:effectStyleLst>
+      <a:bgFillStyleLst>
+        <a:solidFill>
+          <a:schemeClr val="phClr"/>
+        </a:solidFill>
+        <a:gradFill rotWithShape="1">
+          <a:gsLst>
+            <a:gs pos="0">
+              <a:schemeClr val="phClr">
+                <a:tint val="40000"/>
+                <a:satMod val="350000"/>
+              </a:schemeClr>
+            </a:gs>
+            <a:gs pos="40000">
+              <a:schemeClr val="phClr">
+                <a:tint val="45000"/>
+                <a:shade val="99000"/>
+                <a:satMod val="350000"/>
+              </a:schemeClr>
+            </a:gs>
+            <a:gs pos="100000">
+              <a:schemeClr val="phClr">
+                <a:shade val="20000"/>
+                <a:satMod val="255000"/>
+              </a:schemeClr>
+            </a:gs>
+          </a:gsLst>
+          <a:path path="circle">
+            <a:fillToRect l="50000" t="-80000" r="50000" b="180000"/>
+          </a:path>
+        </a:gradFill>
+        <a:gradFill rotWithShape="1">
+          <a:gsLst>
+            <a:gs pos="0">
+              <a:schemeClr val="phClr">
+                <a:tint val="80000"/>
+                <a:satMod val="300000"/>
+              </a:schemeClr>
+            </a:gs>
+            <a:gs pos="100000">
+              <a:schemeClr val="phClr">
+                <a:shade val="30000"/>
+                <a:satMod val="200000"/>
+              </a:schemeClr>
+            </a:gs>
+          </a:gsLst>
+          <a:path path="circle">
+            <a:fillToRect l="50000" t="50000" r="50000" b="50000"/>
+          </a:path>
+        </a:gradFill>
+      </a:bgFillStyleLst>
+    </a:fmtScheme>
+  </a:themeElements>
+  <a:objectDefaults>
+    <a:spDef>
+      <a:spPr/>
+      <a:bodyPr/>
+      <a:lstStyle/>
+      <a:style>
+        <a:lnRef idx="1">
+          <a:schemeClr val="accent1"/>
+        </a:lnRef>
+        <a:fillRef idx="3">
+          <a:schemeClr val="accent1"/>
+        </a:fillRef>
+        <a:effectRef idx="2">
+          <a:schemeClr val="accent1"/>
+        </a:effectRef>
+        <a:fontRef idx="minor">
+          <a:schemeClr val="lt1"/>
+        </a:fontRef>
+      </a:style>
+    </a:spDef>
+    <a:lnDef>
+      <a:spPr/>
+      <a:bodyPr/>
+      <a:lstStyle/>
+      <a:style>
+        <a:lnRef idx="2">
+          <a:schemeClr val="accent1"/>
+        </a:lnRef>
+        <a:fillRef idx="0">
+          <a:schemeClr val="accent1"/>
+        </a:fillRef>
+        <a:effectRef idx="1">
+          <a:schemeClr val="accent1"/>
+        </a:effectRef>
+        <a:fontRef idx="minor">
+          <a:schemeClr val="tx1"/>
+        </a:fontRef>
+      </a:style>
+    </a:lnDef>
+  </a:objectDefaults>
+  <a:extraClrSchemeLst/>
+</a:theme>
 </file>
--- a/ground-vehicle/docs/courses/advanced/l3_bluetooth_and_storage.pptx
+++ b/ground-vehicle/docs/courses/advanced/l3_bluetooth_and_storage.pptx
@@ -8157,7 +8157,7 @@
         <p:spPr>
           <a:xfrm>
             <a:off x="502920" y="1901952"/>
-            <a:ext cx="5387187" cy="4361688"/>
+            <a:ext cx="6249137" cy="4361688"/>
           </a:xfrm>
           <a:prstGeom prst="rect">
             <a:avLst/>
@@ -8329,8 +8329,8 @@
         </p:nvSpPr>
         <p:spPr>
           <a:xfrm>
-            <a:off x="6301587" y="1901952"/>
-            <a:ext cx="5387187" cy="365760"/>
+            <a:off x="7163537" y="1901952"/>
+            <a:ext cx="4525238" cy="365760"/>
           </a:xfrm>
           <a:prstGeom prst="rect">
             <a:avLst/>
@@ -8377,8 +8377,8 @@
         </p:nvSpPr>
         <p:spPr>
           <a:xfrm>
-            <a:off x="6301587" y="2304288"/>
-            <a:ext cx="5387187" cy="1778508"/>
+            <a:off x="7163537" y="2304288"/>
+            <a:ext cx="4525238" cy="1458305"/>
           </a:xfrm>
           <a:prstGeom prst="rect">
             <a:avLst/>
@@ -8396,17 +8396,17 @@
                 <a:spcPct val="100000"/>
               </a:lnSpc>
               <a:spcAft>
-                <a:spcPts val="600"/>
-              </a:spcAft>
-              <a:defRPr sz="2900" b="0">
-                <a:solidFill>
-                  <a:srgbClr val="222222"/>
-                </a:solidFill>
-                <a:latin typeface="Calibri"/>
-              </a:defRPr>
-            </a:pPr>
-            <a:r>
-              <a:rPr sz="2900" b="0">
+                <a:spcPts val="300"/>
+              </a:spcAft>
+              <a:defRPr sz="2400" b="0">
+                <a:solidFill>
+                  <a:srgbClr val="222222"/>
+                </a:solidFill>
+                <a:latin typeface="Calibri"/>
+              </a:defRPr>
+            </a:pPr>
+            <a:r>
+              <a:rPr sz="2400" b="0">
                 <a:solidFill>
                   <a:srgbClr val="222222"/>
                 </a:solidFill>
@@ -8425,8 +8425,8 @@
         </p:nvSpPr>
         <p:spPr>
           <a:xfrm>
-            <a:off x="6301587" y="4119372"/>
-            <a:ext cx="5387187" cy="365760"/>
+            <a:off x="7163537" y="3835745"/>
+            <a:ext cx="4525238" cy="365760"/>
           </a:xfrm>
           <a:prstGeom prst="rect">
             <a:avLst/>
@@ -8473,8 +8473,8 @@
         </p:nvSpPr>
         <p:spPr>
           <a:xfrm>
-            <a:off x="6301587" y="4521708"/>
-            <a:ext cx="5387187" cy="1778508"/>
+            <a:off x="7163537" y="4238081"/>
+            <a:ext cx="4525238" cy="2025558"/>
           </a:xfrm>
           <a:prstGeom prst="rect">
             <a:avLst/>
@@ -8494,15 +8494,15 @@
               <a:spcAft>
                 <a:spcPts val="300"/>
               </a:spcAft>
-              <a:defRPr sz="2500" b="0">
-                <a:solidFill>
-                  <a:srgbClr val="222222"/>
-                </a:solidFill>
-                <a:latin typeface="Calibri"/>
-              </a:defRPr>
-            </a:pPr>
-            <a:r>
-              <a:rPr sz="2500" b="0">
+              <a:defRPr sz="2400" b="0">
+                <a:solidFill>
+                  <a:srgbClr val="222222"/>
+                </a:solidFill>
+                <a:latin typeface="Calibri"/>
+              </a:defRPr>
+            </a:pPr>
+            <a:r>
+              <a:rPr sz="2400" b="0">
                 <a:solidFill>
                   <a:srgbClr val="222222"/>
                 </a:solidFill>
@@ -8519,15 +8519,15 @@
               <a:spcAft>
                 <a:spcPts val="300"/>
               </a:spcAft>
-              <a:defRPr sz="2500" b="0">
-                <a:solidFill>
-                  <a:srgbClr val="222222"/>
-                </a:solidFill>
-                <a:latin typeface="Calibri"/>
-              </a:defRPr>
-            </a:pPr>
-            <a:r>
-              <a:rPr sz="2500" b="0">
+              <a:defRPr sz="2400" b="0">
+                <a:solidFill>
+                  <a:srgbClr val="222222"/>
+                </a:solidFill>
+                <a:latin typeface="Calibri"/>
+              </a:defRPr>
+            </a:pPr>
+            <a:r>
+              <a:rPr sz="2400" b="0">
                 <a:solidFill>
                   <a:srgbClr val="222222"/>
                 </a:solidFill>
@@ -14494,7 +14494,7 @@
         <p:spPr>
           <a:xfrm>
             <a:off x="502920" y="1901952"/>
-            <a:ext cx="5387187" cy="4361688"/>
+            <a:ext cx="6249137" cy="4361688"/>
           </a:xfrm>
           <a:prstGeom prst="rect">
             <a:avLst/>
@@ -14514,15 +14514,15 @@
               <a:spcAft>
                 <a:spcPts val="800"/>
               </a:spcAft>
-              <a:defRPr sz="1900" b="0">
-                <a:solidFill>
-                  <a:srgbClr val="222222"/>
-                </a:solidFill>
-                <a:latin typeface="Calibri"/>
-              </a:defRPr>
-            </a:pPr>
-            <a:r>
-              <a:rPr sz="1900" b="0">
+              <a:defRPr sz="2100" b="0">
+                <a:solidFill>
+                  <a:srgbClr val="222222"/>
+                </a:solidFill>
+                <a:latin typeface="Calibri"/>
+              </a:defRPr>
+            </a:pPr>
+            <a:r>
+              <a:rPr sz="2100" b="0">
                 <a:solidFill>
                   <a:srgbClr val="222222"/>
                 </a:solidFill>
@@ -14539,15 +14539,15 @@
               <a:spcAft>
                 <a:spcPts val="800"/>
               </a:spcAft>
-              <a:defRPr sz="1900" b="0">
-                <a:solidFill>
-                  <a:srgbClr val="222222"/>
-                </a:solidFill>
-                <a:latin typeface="Calibri"/>
-              </a:defRPr>
-            </a:pPr>
-            <a:r>
-              <a:rPr sz="1900" b="0">
+              <a:defRPr sz="2100" b="0">
+                <a:solidFill>
+                  <a:srgbClr val="222222"/>
+                </a:solidFill>
+                <a:latin typeface="Calibri"/>
+              </a:defRPr>
+            </a:pPr>
+            <a:r>
+              <a:rPr sz="2100" b="0">
                 <a:solidFill>
                   <a:srgbClr val="222222"/>
                 </a:solidFill>
@@ -14564,15 +14564,15 @@
               <a:spcAft>
                 <a:spcPts val="800"/>
               </a:spcAft>
-              <a:defRPr sz="1900" b="0">
-                <a:solidFill>
-                  <a:srgbClr val="222222"/>
-                </a:solidFill>
-                <a:latin typeface="Calibri"/>
-              </a:defRPr>
-            </a:pPr>
-            <a:r>
-              <a:rPr sz="1900" b="0">
+              <a:defRPr sz="2100" b="0">
+                <a:solidFill>
+                  <a:srgbClr val="222222"/>
+                </a:solidFill>
+                <a:latin typeface="Calibri"/>
+              </a:defRPr>
+            </a:pPr>
+            <a:r>
+              <a:rPr sz="2100" b="0">
                 <a:solidFill>
                   <a:srgbClr val="222222"/>
                 </a:solidFill>
@@ -14589,15 +14589,15 @@
               <a:spcAft>
                 <a:spcPts val="800"/>
               </a:spcAft>
-              <a:defRPr sz="1900" b="0">
-                <a:solidFill>
-                  <a:srgbClr val="222222"/>
-                </a:solidFill>
-                <a:latin typeface="Calibri"/>
-              </a:defRPr>
-            </a:pPr>
-            <a:r>
-              <a:rPr sz="1900" b="0">
+              <a:defRPr sz="2100" b="0">
+                <a:solidFill>
+                  <a:srgbClr val="222222"/>
+                </a:solidFill>
+                <a:latin typeface="Calibri"/>
+              </a:defRPr>
+            </a:pPr>
+            <a:r>
+              <a:rPr sz="2100" b="0">
                 <a:solidFill>
                   <a:srgbClr val="222222"/>
                 </a:solidFill>
@@ -14614,15 +14614,15 @@
               <a:spcAft>
                 <a:spcPts val="800"/>
               </a:spcAft>
-              <a:defRPr sz="1900" b="0">
-                <a:solidFill>
-                  <a:srgbClr val="222222"/>
-                </a:solidFill>
-                <a:latin typeface="Calibri"/>
-              </a:defRPr>
-            </a:pPr>
-            <a:r>
-              <a:rPr sz="1900" b="0">
+              <a:defRPr sz="2100" b="0">
+                <a:solidFill>
+                  <a:srgbClr val="222222"/>
+                </a:solidFill>
+                <a:latin typeface="Calibri"/>
+              </a:defRPr>
+            </a:pPr>
+            <a:r>
+              <a:rPr sz="2100" b="0">
                 <a:solidFill>
                   <a:srgbClr val="222222"/>
                 </a:solidFill>
@@ -14639,15 +14639,15 @@
               <a:spcAft>
                 <a:spcPts val="800"/>
               </a:spcAft>
-              <a:defRPr sz="1900" b="0">
-                <a:solidFill>
-                  <a:srgbClr val="222222"/>
-                </a:solidFill>
-                <a:latin typeface="Calibri"/>
-              </a:defRPr>
-            </a:pPr>
-            <a:r>
-              <a:rPr sz="1900" b="0">
+              <a:defRPr sz="2100" b="0">
+                <a:solidFill>
+                  <a:srgbClr val="222222"/>
+                </a:solidFill>
+                <a:latin typeface="Calibri"/>
+              </a:defRPr>
+            </a:pPr>
+            <a:r>
+              <a:rPr sz="2100" b="0">
                 <a:solidFill>
                   <a:srgbClr val="222222"/>
                 </a:solidFill>
@@ -14666,8 +14666,8 @@
         </p:nvSpPr>
         <p:spPr>
           <a:xfrm>
-            <a:off x="6301587" y="1901952"/>
-            <a:ext cx="5387187" cy="365760"/>
+            <a:off x="7163537" y="1901952"/>
+            <a:ext cx="4525238" cy="365760"/>
           </a:xfrm>
           <a:prstGeom prst="rect">
             <a:avLst/>
@@ -14714,8 +14714,8 @@
         </p:nvSpPr>
         <p:spPr>
           <a:xfrm>
-            <a:off x="6301587" y="2304288"/>
-            <a:ext cx="5387187" cy="1778508"/>
+            <a:off x="7163537" y="2304288"/>
+            <a:ext cx="4525238" cy="1292958"/>
           </a:xfrm>
           <a:prstGeom prst="rect">
             <a:avLst/>
@@ -14735,15 +14735,15 @@
               <a:spcAft>
                 <a:spcPts val="300"/>
               </a:spcAft>
-              <a:defRPr sz="2600" b="0">
-                <a:solidFill>
-                  <a:srgbClr val="222222"/>
-                </a:solidFill>
-                <a:latin typeface="Calibri"/>
-              </a:defRPr>
-            </a:pPr>
-            <a:r>
-              <a:rPr sz="2600" b="0">
+              <a:defRPr sz="1900" b="0">
+                <a:solidFill>
+                  <a:srgbClr val="222222"/>
+                </a:solidFill>
+                <a:latin typeface="Calibri"/>
+              </a:defRPr>
+            </a:pPr>
+            <a:r>
+              <a:rPr sz="1900" b="0">
                 <a:solidFill>
                   <a:srgbClr val="222222"/>
                 </a:solidFill>
@@ -14762,8 +14762,8 @@
         </p:nvSpPr>
         <p:spPr>
           <a:xfrm>
-            <a:off x="6301587" y="4119372"/>
-            <a:ext cx="5387187" cy="365760"/>
+            <a:off x="7163537" y="3670398"/>
+            <a:ext cx="4525238" cy="365760"/>
           </a:xfrm>
           <a:prstGeom prst="rect">
             <a:avLst/>
@@ -14810,8 +14810,8 @@
         </p:nvSpPr>
         <p:spPr>
           <a:xfrm>
-            <a:off x="6301587" y="4521708"/>
-            <a:ext cx="5387187" cy="1778508"/>
+            <a:off x="7163537" y="4072734"/>
+            <a:ext cx="4525238" cy="2190905"/>
           </a:xfrm>
           <a:prstGeom prst="rect">
             <a:avLst/>
@@ -14831,15 +14831,15 @@
               <a:spcAft>
                 <a:spcPts val="300"/>
               </a:spcAft>
-              <a:defRPr sz="2000" b="0">
-                <a:solidFill>
-                  <a:srgbClr val="222222"/>
-                </a:solidFill>
-                <a:latin typeface="Calibri"/>
-              </a:defRPr>
-            </a:pPr>
-            <a:r>
-              <a:rPr sz="2000" b="0">
+              <a:defRPr sz="2200" b="0">
+                <a:solidFill>
+                  <a:srgbClr val="222222"/>
+                </a:solidFill>
+                <a:latin typeface="Calibri"/>
+              </a:defRPr>
+            </a:pPr>
+            <a:r>
+              <a:rPr sz="2200" b="0">
                 <a:solidFill>
                   <a:srgbClr val="222222"/>
                 </a:solidFill>
@@ -14856,15 +14856,15 @@
               <a:spcAft>
                 <a:spcPts val="300"/>
               </a:spcAft>
-              <a:defRPr sz="2000" b="0">
-                <a:solidFill>
-                  <a:srgbClr val="222222"/>
-                </a:solidFill>
-                <a:latin typeface="Calibri"/>
-              </a:defRPr>
-            </a:pPr>
-            <a:r>
-              <a:rPr sz="2000" b="0">
+              <a:defRPr sz="2200" b="0">
+                <a:solidFill>
+                  <a:srgbClr val="222222"/>
+                </a:solidFill>
+                <a:latin typeface="Calibri"/>
+              </a:defRPr>
+            </a:pPr>
+            <a:r>
+              <a:rPr sz="2200" b="0">
                 <a:solidFill>
                   <a:srgbClr val="222222"/>
                 </a:solidFill>

--- a/ground-vehicle/docs/courses/advanced/l3_bluetooth_and_storage.pptx
+++ b/ground-vehicle/docs/courses/advanced/l3_bluetooth_and_storage.pptx
@@ -22,8 +22,6 @@
     <p:sldId id="270" r:id="rId22"/>
     <p:sldId id="271" r:id="rId23"/>
     <p:sldId id="272" r:id="rId24"/>
-    <p:sldId id="273" r:id="rId25"/>
-    <p:sldId id="274" r:id="rId26"/>
   </p:sldIdLst>
   <p:sldSz cx="12191695" cy="6858000" type="screen4x3"/>
   <p:notesSz cx="6858000" cy="9144000"/>
@@ -604,16 +602,15 @@
               <a:rPr sz="1200">
                 <a:latin typeface="Calibri"/>
               </a:rPr>
-              <a:t>(Continued from the previous slide - the same notes apply.)</a:t>
-            </a:r>
-          </a:p>
-          <a:p/>
+              <a:t>EEPROM is a flat array of bytes and YOU choose the layout. Nothing stops two values overlapping - the compiler cannot help you here.</a:t>
+            </a:r>
+          </a:p>
           <a:p>
             <a:r>
               <a:rPr sz="1200">
                 <a:latin typeface="Calibri"/>
               </a:rPr>
-              <a:t>Lead with the headline: there is no EEPROM on this chip. The library is an emulation over flash.</a:t>
+              <a:t>Four bytes per slot because an int and a float are both four bytes on this chip.</a:t>
             </a:r>
           </a:p>
           <a:p>
@@ -621,7 +618,7 @@
               <a:rPr sz="1200">
                 <a:latin typeface="Calibri"/>
               </a:rPr>
-              <a:t>The three consequences are all practical. begin() first, nothing saved without commit(), and flash wears out.</a:t>
+              <a:t>Ask why the addresses are spaced out and written down in one place. The answer is that a map you can read is a map you can extend safely.</a:t>
             </a:r>
           </a:p>
           <a:p>
@@ -629,15 +626,7 @@
               <a:rPr sz="1200">
                 <a:latin typeface="Calibri"/>
               </a:rPr>
-              <a:t>The warning panel has the arithmetic: a commit() in loop() at 30 Hz burns a hundred thousand cycles in under an hour. Say that number out loud.</a:t>
-            </a:r>
-          </a:p>
-          <a:p>
-            <a:r>
-              <a:rPr sz="1200">
-                <a:latin typeface="Calibri"/>
-              </a:rPr>
-              <a:t>The rule to take away: write when something changed and a person asked, never on a schedule.</a:t>
+              <a:t>They break this deliberately in step 6 of the activity, so plant the idea now.</a:t>
             </a:r>
           </a:p>
         </p:txBody>
@@ -710,7 +699,7 @@
               <a:rPr sz="1200">
                 <a:latin typeface="Calibri"/>
               </a:rPr>
-              <a:t>EEPROM is a flat array of bytes and YOU choose the layout. Nothing stops two values overlapping - the compiler cannot help you here.</a:t>
+              <a:t>Start with the fact: new flash is full of 0xFF. Read an int out of that and you get -1.</a:t>
             </a:r>
           </a:p>
           <a:p>
@@ -718,7 +707,7 @@
               <a:rPr sz="1200">
                 <a:latin typeface="Calibri"/>
               </a:rPr>
-              <a:t>Four bytes per slot because an int and a float are both four bytes on this chip.</a:t>
+              <a:t>The magic byte says the bytes are OURS. It does not say they still make sense.</a:t>
             </a:r>
           </a:p>
           <a:p>
@@ -726,7 +715,7 @@
               <a:rPr sz="1200">
                 <a:latin typeface="Calibri"/>
               </a:rPr>
-              <a:t>Ask why the addresses are spaced out and written down in one place. The answer is that a map you can read is a map you can extend safely.</a:t>
+              <a:t>That distinction is the whole slide. A value written by an older version of the program is perfectly valid data and still wrong for this one.</a:t>
             </a:r>
           </a:p>
           <a:p>
@@ -734,7 +723,7 @@
               <a:rPr sz="1200">
                 <a:latin typeface="Calibri"/>
               </a:rPr>
-              <a:t>They break this deliberately in step 6 of the activity, so plant the idea now.</a:t>
+              <a:t>Defensive loading is not paranoia - it is the difference between a vehicle that boots with odd settings and one that will not boot at all.</a:t>
             </a:r>
           </a:p>
         </p:txBody>
@@ -807,31 +796,7 @@
               <a:rPr sz="1200">
                 <a:latin typeface="Calibri"/>
               </a:rPr>
-              <a:t>Start with the fact: new flash is full of 0xFF. Read an int out of that and you get -1.</a:t>
-            </a:r>
-          </a:p>
-          <a:p>
-            <a:r>
-              <a:rPr sz="1200">
-                <a:latin typeface="Calibri"/>
-              </a:rPr>
-              <a:t>The magic byte says the bytes are OURS. It does not say they still make sense.</a:t>
-            </a:r>
-          </a:p>
-          <a:p>
-            <a:r>
-              <a:rPr sz="1200">
-                <a:latin typeface="Calibri"/>
-              </a:rPr>
-              <a:t>That distinction is the whole slide. A value written by an older version of the program is perfectly valid data and still wrong for this one.</a:t>
-            </a:r>
-          </a:p>
-          <a:p>
-            <a:r>
-              <a:rPr sz="1200">
-                <a:latin typeface="Calibri"/>
-              </a:rPr>
-              <a:t>Defensive loading is not paranoia - it is the difference between a vehicle that boots with odd settings and one that will not boot at all.</a:t>
+              <a:t>Twenty seconds. Second activity.</a:t>
             </a:r>
           </a:p>
         </p:txBody>
@@ -904,7 +869,31 @@
               <a:rPr sz="1200">
                 <a:latin typeface="Calibri"/>
               </a:rPr>
-              <a:t>Twenty seconds. Second activity.</a:t>
+              <a:t>Step 1 involves physically unplugging the board. Make sure nobody is mid-upload when they do it.</a:t>
+            </a:r>
+          </a:p>
+          <a:p>
+            <a:r>
+              <a:rPr sz="1200">
+                <a:latin typeface="Calibri"/>
+              </a:rPr>
+              <a:t>Step 5 is the deliberate bug: comment out commit(), save, reset, and watch the setting vanish. That is the mistake they will one day make for real.</a:t>
+            </a:r>
+          </a:p>
+          <a:p>
+            <a:r>
+              <a:rPr sz="1200">
+                <a:latin typeface="Calibri"/>
+              </a:rPr>
+              <a:t>Step 6 overlaps two addresses on purpose and one setting eats the other. It makes the flat-array point concrete.</a:t>
+            </a:r>
+          </a:p>
+          <a:p>
+            <a:r>
+              <a:rPr sz="1200">
+                <a:latin typeface="Calibri"/>
+              </a:rPr>
+              <a:t>Answers: address 0 holds the deadzone int; and range checking is needed even with a correct magic byte because an older version could have written a value this version cannot use.</a:t>
             </a:r>
           </a:p>
         </p:txBody>
@@ -977,7 +966,7 @@
               <a:rPr sz="1200">
                 <a:latin typeface="Calibri"/>
               </a:rPr>
-              <a:t>Step 1 involves physically unplugging the board. Make sure nobody is mid-upload when they do it.</a:t>
+              <a:t>Four programs, four answers, and each is right for what it is for. Do not let this become a ranking.</a:t>
             </a:r>
           </a:p>
           <a:p>
@@ -985,7 +974,7 @@
               <a:rPr sz="1200">
                 <a:latin typeface="Calibri"/>
               </a:rPr>
-              <a:t>Step 5 is the deliberate bug: comment out commit(), save, reset, and watch the setting vanish. That is the mistake they will one day make for real.</a:t>
+              <a:t>The cost column is where the engineering judgement lives. Read that rather than the middle column.</a:t>
             </a:r>
           </a:p>
           <a:p>
@@ -993,15 +982,7 @@
               <a:rPr sz="1200">
                 <a:latin typeface="Calibri"/>
               </a:rPr>
-              <a:t>Step 6 overlaps two addresses on purpose and one setting eats the other. It makes the flat-array point concrete.</a:t>
-            </a:r>
-          </a:p>
-          <a:p>
-            <a:r>
-              <a:rPr sz="1200">
-                <a:latin typeface="Calibri"/>
-              </a:rPr>
-              <a:t>Answers: address 0 holds the deadzone int; and range checking is needed even with a correct magic byte because an older version could have written a value this version cannot use.</a:t>
+              <a:t>The note is the argument for the EEPROM version: a field-serviceable machine should never need a laptop to change who is allowed to drive it.</a:t>
             </a:r>
           </a:p>
         </p:txBody>
@@ -1074,7 +1055,7 @@
               <a:rPr sz="1200">
                 <a:latin typeface="Calibri"/>
               </a:rPr>
-              <a:t>Four programs, four answers, and each is right for what it is for. Do not let this become a ranking.</a:t>
+              <a:t>Two ways in, one code path. That is a design choice worth pointing at - a button and a console command that do exactly the same thing.</a:t>
             </a:r>
           </a:p>
           <a:p>
@@ -1082,7 +1063,7 @@
               <a:rPr sz="1200">
                 <a:latin typeface="Calibri"/>
               </a:rPr>
-              <a:t>The cost column is where the engineering judgement lives. Read that rather than the middle column.</a:t>
+              <a:t>The first controller to connect during pairing becomes the vehicle's own and is written down immediately, not at shutdown.</a:t>
             </a:r>
           </a:p>
           <a:p>
@@ -1090,7 +1071,15 @@
               <a:rPr sz="1200">
                 <a:latin typeface="Calibri"/>
               </a:rPr>
-              <a:t>The note is the argument for the EEPROM version: a field-serviceable machine should never need a laptop to change who is allowed to drive it.</a:t>
+              <a:t>Ask why it is written immediately. Because a vehicle that loses power before saving would come back not knowing who it belongs to.</a:t>
+            </a:r>
+          </a:p>
+          <a:p>
+            <a:r>
+              <a:rPr sz="1200">
+                <a:latin typeface="Calibri"/>
+              </a:rPr>
+              <a:t>Walk the order: forget keys, clear the marker, rebuild the empty allowlist, enable new connections, show it on the LEDs.</a:t>
             </a:r>
           </a:p>
         </p:txBody>
@@ -1163,7 +1152,7 @@
               <a:rPr sz="1200">
                 <a:latin typeface="Calibri"/>
               </a:rPr>
-              <a:t>Two ways in, one code path. That is a design choice worth pointing at - a button and a console command that do exactly the same thing.</a:t>
+              <a:t>This is the most human bug in the course. Everything looks correct and the address is simply backwards.</a:t>
             </a:r>
           </a:p>
           <a:p>
@@ -1171,7 +1160,7 @@
               <a:rPr sz="1200">
                 <a:latin typeface="Calibri"/>
               </a:rPr>
-              <a:t>The first controller to connect during pairing becomes the vehicle's own and is written down immediately, not at shutdown.</a:t>
+              <a:t>Describe the symptom before the cause: you write down what it printed, paste it somewhere else, and nothing ever connects.</a:t>
             </a:r>
           </a:p>
           <a:p>
@@ -1179,7 +1168,7 @@
               <a:rPr sz="1200">
                 <a:latin typeface="Calibri"/>
               </a:rPr>
-              <a:t>Ask why it is written immediately. Because a vehicle that loses power before saving would come back not knowing who it belongs to.</a:t>
+              <a:t>The first lesson is a debugging habit: print it at both ends and compare character by character.</a:t>
             </a:r>
           </a:p>
           <a:p>
@@ -1187,7 +1176,15 @@
               <a:rPr sz="1200">
                 <a:latin typeface="Calibri"/>
               </a:rPr>
-              <a:t>Walk the order: forget keys, clear the marker, rebuild the empty allowlist, enable new connections, show it on the LEDs.</a:t>
+              <a:t>The second is a real category. Byte order is why network protocols specify it and why the word big-endian exists.</a:t>
+            </a:r>
+          </a:p>
+          <a:p>
+            <a:r>
+              <a:rPr sz="1200">
+                <a:latin typeface="Calibri"/>
+              </a:rPr>
+              <a:t>Op 12 now prints most significant byte first, matching every Bluetooth scanner they will ever use.</a:t>
             </a:r>
           </a:p>
         </p:txBody>
@@ -1213,225 +1210,6 @@
 </file>
 
 <file path=ppt/notesSlides/notesSlide17.xml><?xml version="1.0" encoding="utf-8"?>
-<p:notes xmlns:a="http://schemas.openxmlformats.org/drawingml/2006/main" xmlns:p="http://schemas.openxmlformats.org/presentationml/2006/main" xmlns:r="http://schemas.openxmlformats.org/officeDocument/2006/relationships">
-  <p:cSld>
-    <p:spTree>
-      <p:nvGrpSpPr>
-        <p:cNvPr id="1" name=""/>
-        <p:cNvGrpSpPr/>
-        <p:nvPr/>
-      </p:nvGrpSpPr>
-      <p:grpSpPr>
-        <a:xfrm>
-          <a:off x="0" y="0"/>
-          <a:ext cx="0" cy="0"/>
-          <a:chOff x="0" y="0"/>
-          <a:chExt cx="0" cy="0"/>
-        </a:xfrm>
-      </p:grpSpPr>
-      <p:sp>
-        <p:nvSpPr>
-          <p:cNvPr id="2" name="Slide Image Placeholder 1"/>
-          <p:cNvSpPr>
-            <a:spLocks noGrp="1"/>
-          </p:cNvSpPr>
-          <p:nvPr>
-            <p:ph type="sldImg" idx="2"/>
-          </p:nvPr>
-        </p:nvSpPr>
-        <p:spPr/>
-      </p:sp>
-      <p:sp>
-        <p:nvSpPr>
-          <p:cNvPr id="3" name="Notes Placeholder 2"/>
-          <p:cNvSpPr>
-            <a:spLocks noGrp="1"/>
-          </p:cNvSpPr>
-          <p:nvPr>
-            <p:ph type="body" idx="3" sz="quarter"/>
-          </p:nvPr>
-        </p:nvSpPr>
-        <p:spPr/>
-        <p:txBody>
-          <a:bodyPr/>
-          <a:lstStyle/>
-          <a:p>
-            <a:r>
-              <a:rPr sz="1200">
-                <a:latin typeface="Calibri"/>
-              </a:rPr>
-              <a:t>This is the most human bug in the course. Everything looks correct and the address is simply backwards.</a:t>
-            </a:r>
-          </a:p>
-          <a:p>
-            <a:r>
-              <a:rPr sz="1200">
-                <a:latin typeface="Calibri"/>
-              </a:rPr>
-              <a:t>Describe the symptom before the cause: you write down what it printed, paste it somewhere else, and nothing ever connects.</a:t>
-            </a:r>
-          </a:p>
-          <a:p>
-            <a:r>
-              <a:rPr sz="1200">
-                <a:latin typeface="Calibri"/>
-              </a:rPr>
-              <a:t>The first lesson is a debugging habit: print it at both ends and compare character by character.</a:t>
-            </a:r>
-          </a:p>
-          <a:p>
-            <a:r>
-              <a:rPr sz="1200">
-                <a:latin typeface="Calibri"/>
-              </a:rPr>
-              <a:t>The second is a real category. Byte order is why network protocols specify it and why the word big-endian exists.</a:t>
-            </a:r>
-          </a:p>
-          <a:p>
-            <a:r>
-              <a:rPr sz="1200">
-                <a:latin typeface="Calibri"/>
-              </a:rPr>
-              <a:t>Op 12 now prints most significant byte first, matching every Bluetooth scanner they will ever use.</a:t>
-            </a:r>
-          </a:p>
-        </p:txBody>
-      </p:sp>
-      <p:sp>
-        <p:nvSpPr>
-          <p:cNvPr id="4" name="Slide Number Placeholder 3"/>
-          <p:cNvSpPr>
-            <a:spLocks noGrp="1"/>
-          </p:cNvSpPr>
-          <p:nvPr>
-            <p:ph type="sldNum" idx="5" sz="quarter"/>
-          </p:nvPr>
-        </p:nvSpPr>
-        <p:spPr/>
-      </p:sp>
-    </p:spTree>
-  </p:cSld>
-  <p:clrMapOvr>
-    <a:masterClrMapping/>
-  </p:clrMapOvr>
-</p:notes>
-</file>
-
-<file path=ppt/notesSlides/notesSlide18.xml><?xml version="1.0" encoding="utf-8"?>
-<p:notes xmlns:a="http://schemas.openxmlformats.org/drawingml/2006/main" xmlns:p="http://schemas.openxmlformats.org/presentationml/2006/main" xmlns:r="http://schemas.openxmlformats.org/officeDocument/2006/relationships">
-  <p:cSld>
-    <p:spTree>
-      <p:nvGrpSpPr>
-        <p:cNvPr id="1" name=""/>
-        <p:cNvGrpSpPr/>
-        <p:nvPr/>
-      </p:nvGrpSpPr>
-      <p:grpSpPr>
-        <a:xfrm>
-          <a:off x="0" y="0"/>
-          <a:ext cx="0" cy="0"/>
-          <a:chOff x="0" y="0"/>
-          <a:chExt cx="0" cy="0"/>
-        </a:xfrm>
-      </p:grpSpPr>
-      <p:sp>
-        <p:nvSpPr>
-          <p:cNvPr id="2" name="Slide Image Placeholder 1"/>
-          <p:cNvSpPr>
-            <a:spLocks noGrp="1"/>
-          </p:cNvSpPr>
-          <p:nvPr>
-            <p:ph type="sldImg" idx="2"/>
-          </p:nvPr>
-        </p:nvSpPr>
-        <p:spPr/>
-      </p:sp>
-      <p:sp>
-        <p:nvSpPr>
-          <p:cNvPr id="3" name="Notes Placeholder 2"/>
-          <p:cNvSpPr>
-            <a:spLocks noGrp="1"/>
-          </p:cNvSpPr>
-          <p:nvPr>
-            <p:ph type="body" idx="3" sz="quarter"/>
-          </p:nvPr>
-        </p:nvSpPr>
-        <p:spPr/>
-        <p:txBody>
-          <a:bodyPr/>
-          <a:lstStyle/>
-          <a:p>
-            <a:r>
-              <a:rPr sz="1200">
-                <a:latin typeface="Calibri"/>
-              </a:rPr>
-              <a:t>(Continued from the previous slide - the same notes apply.)</a:t>
-            </a:r>
-          </a:p>
-          <a:p/>
-          <a:p>
-            <a:r>
-              <a:rPr sz="1200">
-                <a:latin typeface="Calibri"/>
-              </a:rPr>
-              <a:t>This is the most human bug in the course. Everything looks correct and the address is simply backwards.</a:t>
-            </a:r>
-          </a:p>
-          <a:p>
-            <a:r>
-              <a:rPr sz="1200">
-                <a:latin typeface="Calibri"/>
-              </a:rPr>
-              <a:t>Describe the symptom before the cause: you write down what it printed, paste it somewhere else, and nothing ever connects.</a:t>
-            </a:r>
-          </a:p>
-          <a:p>
-            <a:r>
-              <a:rPr sz="1200">
-                <a:latin typeface="Calibri"/>
-              </a:rPr>
-              <a:t>The first lesson is a debugging habit: print it at both ends and compare character by character.</a:t>
-            </a:r>
-          </a:p>
-          <a:p>
-            <a:r>
-              <a:rPr sz="1200">
-                <a:latin typeface="Calibri"/>
-              </a:rPr>
-              <a:t>The second is a real category. Byte order is why network protocols specify it and why the word big-endian exists.</a:t>
-            </a:r>
-          </a:p>
-          <a:p>
-            <a:r>
-              <a:rPr sz="1200">
-                <a:latin typeface="Calibri"/>
-              </a:rPr>
-              <a:t>Op 12 now prints most significant byte first, matching every Bluetooth scanner they will ever use.</a:t>
-            </a:r>
-          </a:p>
-        </p:txBody>
-      </p:sp>
-      <p:sp>
-        <p:nvSpPr>
-          <p:cNvPr id="4" name="Slide Number Placeholder 3"/>
-          <p:cNvSpPr>
-            <a:spLocks noGrp="1"/>
-          </p:cNvSpPr>
-          <p:nvPr>
-            <p:ph type="sldNum" idx="5" sz="quarter"/>
-          </p:nvPr>
-        </p:nvSpPr>
-        <p:spPr/>
-      </p:sp>
-    </p:spTree>
-  </p:cSld>
-  <p:clrMapOvr>
-    <a:masterClrMapping/>
-  </p:clrMapOvr>
-</p:notes>
-</file>
-
-<file path=ppt/notesSlides/notesSlide19.xml><?xml version="1.0" encoding="utf-8"?>
 <p:notes xmlns:a="http://schemas.openxmlformats.org/drawingml/2006/main" xmlns:p="http://schemas.openxmlformats.org/presentationml/2006/main" xmlns:r="http://schemas.openxmlformats.org/officeDocument/2006/relationships">
   <p:cSld>
     <p:spTree>
@@ -5529,6 +5307,22 @@
               <a:spcAft>
                 <a:spcPts val="100"/>
               </a:spcAft>
+              <a:defRPr sz="600" b="0">
+                <a:solidFill>
+                  <a:srgbClr val="666666"/>
+                </a:solidFill>
+                <a:latin typeface="Calibri"/>
+              </a:defRPr>
+            </a:pPr>
+          </a:p>
+          <a:p>
+            <a:pPr algn="l">
+              <a:lnSpc>
+                <a:spcPct val="100000"/>
+              </a:lnSpc>
+              <a:spcAft>
+                <a:spcPts val="100"/>
+              </a:spcAft>
               <a:defRPr sz="1200" b="0">
                 <a:solidFill>
                   <a:srgbClr val="666666"/>
@@ -5536,6 +5330,15 @@
                 <a:latin typeface="Calibri"/>
               </a:defRPr>
             </a:pPr>
+            <a:r>
+              <a:rPr sz="1200" b="0">
+                <a:solidFill>
+                  <a:srgbClr val="666666"/>
+                </a:solidFill>
+                <a:latin typeface="Calibri"/>
+              </a:rPr>
+              <a:t>Kevin Bowen, President  -  kbowen6@icloud.com</a:t>
+            </a:r>
           </a:p>
           <a:p>
             <a:pPr algn="l">
@@ -5559,7 +5362,7 @@
                 </a:solidFill>
                 <a:latin typeface="Calibri"/>
               </a:rPr>
-              <a:t>Kevin Bowen, President  -  kbowen6@icloud.com</a:t>
+              <a:t>Malcom Graham, VP Education      Louis Parker, VP Technology</a:t>
             </a:r>
           </a:p>
           <a:p>
@@ -5584,7 +5387,7 @@
                 </a:solidFill>
                 <a:latin typeface="Calibri"/>
               </a:rPr>
-              <a:t>Malcom Graham, VP Education      Louis Parker, VP Technology</a:t>
+              <a:t>Valen Farre, System Engineer      Gary Howland, Animation</a:t>
             </a:r>
           </a:p>
           <a:p>
@@ -5609,7 +5412,7 @@
                 </a:solidFill>
                 <a:latin typeface="Calibri"/>
               </a:rPr>
-              <a:t>Valen Farre, System Engineer      Gary Howland, Animation</a:t>
+              <a:t>Eddie Revollo, Artificial Intelligence</a:t>
             </a:r>
           </a:p>
           <a:p>
@@ -5634,7 +5437,7 @@
                 </a:solidFill>
                 <a:latin typeface="Calibri"/>
               </a:rPr>
-              <a:t>Eddie Revollo, Artificial Intelligence</a:t>
+              <a:t>Interns: Oscar Canazales, Krishnansh Vemulapalli, Soham Gangal, Erik Olsen</a:t>
             </a:r>
           </a:p>
           <a:p>
@@ -5645,32 +5448,7 @@
               <a:spcAft>
                 <a:spcPts val="100"/>
               </a:spcAft>
-              <a:defRPr sz="1200" b="0">
-                <a:solidFill>
-                  <a:srgbClr val="666666"/>
-                </a:solidFill>
-                <a:latin typeface="Calibri"/>
-              </a:defRPr>
-            </a:pPr>
-            <a:r>
-              <a:rPr sz="1200" b="0">
-                <a:solidFill>
-                  <a:srgbClr val="666666"/>
-                </a:solidFill>
-                <a:latin typeface="Calibri"/>
-              </a:rPr>
-              <a:t>Interns: Oscar Canazales, Krishnansh Vemulapalli, Soham Gangal, Erik Olsen</a:t>
-            </a:r>
-          </a:p>
-          <a:p>
-            <a:pPr algn="l">
-              <a:lnSpc>
-                <a:spcPct val="100000"/>
-              </a:lnSpc>
-              <a:spcAft>
-                <a:spcPts val="100"/>
-              </a:spcAft>
-              <a:defRPr sz="1200" b="0">
+              <a:defRPr sz="600" b="0">
                 <a:solidFill>
                   <a:srgbClr val="666666"/>
                 </a:solidFill>
@@ -5836,7 +5614,7 @@
                 </a:solidFill>
                 <a:latin typeface="Calibri"/>
               </a:rPr>
-              <a:t>There is no EEPROM on an ESP32  (continued)</a:t>
+              <a:t>The storage map, and why the addresses are spaced out</a:t>
             </a:r>
           </a:p>
         </p:txBody>
@@ -5977,340 +5755,6 @@
                 <a:latin typeface="Calibri"/>
               </a:rPr>
               <a:t>9</a:t>
-            </a:r>
-          </a:p>
-        </p:txBody>
-      </p:sp>
-      <p:sp>
-        <p:nvSpPr>
-          <p:cNvPr id="6" name="TextBox 5"/>
-          <p:cNvSpPr txBox="1"/>
-          <p:nvPr/>
-        </p:nvSpPr>
-        <p:spPr>
-          <a:xfrm>
-            <a:off x="502920" y="1188720"/>
-            <a:ext cx="11185855" cy="3986784"/>
-          </a:xfrm>
-          <a:prstGeom prst="rect">
-            <a:avLst/>
-          </a:prstGeom>
-          <a:noFill/>
-        </p:spPr>
-        <p:txBody>
-          <a:bodyPr wrap="square" lIns="0" tIns="0" rIns="0" bIns="0">
-            <a:spAutoFit/>
-          </a:bodyPr>
-          <a:lstStyle/>
-          <a:p>
-            <a:pPr algn="l">
-              <a:lnSpc>
-                <a:spcPct val="100000"/>
-              </a:lnSpc>
-              <a:spcAft>
-                <a:spcPts val="900"/>
-              </a:spcAft>
-              <a:defRPr sz="3000" b="0">
-                <a:solidFill>
-                  <a:srgbClr val="222222"/>
-                </a:solidFill>
-                <a:latin typeface="Calibri"/>
-              </a:defRPr>
-            </a:pPr>
-          </a:p>
-          <a:p>
-            <a:pPr algn="l">
-              <a:lnSpc>
-                <a:spcPct val="100000"/>
-              </a:lnSpc>
-              <a:spcAft>
-                <a:spcPts val="900"/>
-              </a:spcAft>
-              <a:defRPr sz="3000" b="0">
-                <a:solidFill>
-                  <a:srgbClr val="222222"/>
-                </a:solidFill>
-                <a:latin typeface="Calibri"/>
-              </a:defRPr>
-            </a:pPr>
-            <a:r>
-              <a:rPr sz="3000" b="0">
-                <a:solidFill>
-                  <a:srgbClr val="222222"/>
-                </a:solidFill>
-                <a:latin typeface="Calibri"/>
-              </a:rPr>
-              <a:t>Never write on a schedule. Write when something actually changed, and only when a person asked for it.</a:t>
-            </a:r>
-          </a:p>
-        </p:txBody>
-      </p:sp>
-      <p:sp>
-        <p:nvSpPr>
-          <p:cNvPr id="7" name="Rounded Rectangle 6"/>
-          <p:cNvSpPr/>
-          <p:nvPr/>
-        </p:nvSpPr>
-        <p:spPr>
-          <a:xfrm>
-            <a:off x="502920" y="5303520"/>
-            <a:ext cx="11185855" cy="960120"/>
-          </a:xfrm>
-          <a:prstGeom prst="roundRect">
-            <a:avLst>
-              <a:gd name="adj" fmla="val 4000"/>
-            </a:avLst>
-          </a:prstGeom>
-          <a:solidFill>
-            <a:srgbClr val="FDF3E3"/>
-          </a:solidFill>
-          <a:ln w="12700">
-            <a:solidFill>
-              <a:srgbClr val="B46A0F"/>
-            </a:solidFill>
-          </a:ln>
-          <a:effectLst/>
-        </p:spPr>
-        <p:style>
-          <a:lnRef idx="1">
-            <a:schemeClr val="accent1"/>
-          </a:lnRef>
-          <a:fillRef idx="3">
-            <a:schemeClr val="accent1"/>
-          </a:fillRef>
-          <a:effectRef idx="2">
-            <a:schemeClr val="accent1"/>
-          </a:effectRef>
-          <a:fontRef idx="minor">
-            <a:schemeClr val="lt1"/>
-          </a:fontRef>
-        </p:style>
-        <p:txBody>
-          <a:bodyPr rtlCol="0" anchor="ctr" wrap="square" lIns="164592" rIns="164592" tIns="73152" bIns="73152"/>
-          <a:lstStyle/>
-          <a:p>
-            <a:pPr algn="l"/>
-            <a:r>
-              <a:rPr sz="1300" b="1">
-                <a:solidFill>
-                  <a:srgbClr val="B46A0F"/>
-                </a:solidFill>
-                <a:latin typeface="Calibri"/>
-              </a:rPr>
-              <a:t>WATCH OUT   </a:t>
-            </a:r>
-            <a:r>
-              <a:rPr sz="1500">
-                <a:solidFill>
-                  <a:srgbClr val="222222"/>
-                </a:solidFill>
-                <a:latin typeface="Calibri"/>
-              </a:rPr>
-              <a:t>A commit() in loop() at 30 Hz burns through a hundred thousand cycles in under an hour.</a:t>
-            </a:r>
-          </a:p>
-        </p:txBody>
-      </p:sp>
-    </p:spTree>
-  </p:cSld>
-  <p:clrMapOvr>
-    <a:masterClrMapping/>
-  </p:clrMapOvr>
-</p:sld>
-</file>
-
-<file path=ppt/slides/slide11.xml><?xml version="1.0" encoding="utf-8"?>
-<p:sld xmlns:a="http://schemas.openxmlformats.org/drawingml/2006/main" xmlns:p="http://schemas.openxmlformats.org/presentationml/2006/main" xmlns:r="http://schemas.openxmlformats.org/officeDocument/2006/relationships">
-  <p:cSld>
-    <p:spTree>
-      <p:nvGrpSpPr>
-        <p:cNvPr id="1" name=""/>
-        <p:cNvGrpSpPr/>
-        <p:nvPr/>
-      </p:nvGrpSpPr>
-      <p:grpSpPr/>
-      <p:sp>
-        <p:nvSpPr>
-          <p:cNvPr id="2" name="Title 1"/>
-          <p:cNvSpPr>
-            <a:spLocks noGrp="1"/>
-          </p:cNvSpPr>
-          <p:nvPr>
-            <p:ph type="title"/>
-          </p:nvPr>
-        </p:nvSpPr>
-        <p:spPr>
-          <a:xfrm>
-            <a:off x="502920" y="274320"/>
-            <a:ext cx="11185855" cy="777240"/>
-          </a:xfrm>
-        </p:spPr>
-        <p:txBody>
-          <a:bodyPr wrap="square" anchor="b"/>
-          <a:lstStyle/>
-          <a:p>
-            <a:pPr algn="l">
-              <a:lnSpc>
-                <a:spcPct val="100000"/>
-              </a:lnSpc>
-              <a:spcAft>
-                <a:spcPts val="0"/>
-              </a:spcAft>
-              <a:defRPr sz="2800" b="1">
-                <a:solidFill>
-                  <a:srgbClr val="1F3A5F"/>
-                </a:solidFill>
-                <a:latin typeface="Calibri"/>
-              </a:defRPr>
-            </a:pPr>
-            <a:r>
-              <a:rPr sz="2800" b="1">
-                <a:solidFill>
-                  <a:srgbClr val="1F3A5F"/>
-                </a:solidFill>
-                <a:latin typeface="Calibri"/>
-              </a:rPr>
-              <a:t>The storage map, and why the addresses are spaced out</a:t>
-            </a:r>
-          </a:p>
-        </p:txBody>
-      </p:sp>
-      <p:sp>
-        <p:nvSpPr>
-          <p:cNvPr id="3" name="Rectangle 2"/>
-          <p:cNvSpPr/>
-          <p:nvPr/>
-        </p:nvSpPr>
-        <p:spPr>
-          <a:xfrm>
-            <a:off x="502920" y="1097280"/>
-            <a:ext cx="11185855" cy="19050"/>
-          </a:xfrm>
-          <a:prstGeom prst="rect">
-            <a:avLst/>
-          </a:prstGeom>
-          <a:solidFill>
-            <a:srgbClr val="C8D2DE"/>
-          </a:solidFill>
-          <a:ln>
-            <a:noFill/>
-          </a:ln>
-          <a:effectLst/>
-        </p:spPr>
-        <p:style>
-          <a:lnRef idx="1">
-            <a:schemeClr val="accent1"/>
-          </a:lnRef>
-          <a:fillRef idx="3">
-            <a:schemeClr val="accent1"/>
-          </a:fillRef>
-          <a:effectRef idx="2">
-            <a:schemeClr val="accent1"/>
-          </a:effectRef>
-          <a:fontRef idx="minor">
-            <a:schemeClr val="lt1"/>
-          </a:fontRef>
-        </p:style>
-        <p:txBody>
-          <a:bodyPr rtlCol="0" anchor="ctr"/>
-          <a:lstStyle/>
-          <a:p>
-            <a:pPr algn="ctr"/>
-          </a:p>
-        </p:txBody>
-      </p:sp>
-      <p:sp>
-        <p:nvSpPr>
-          <p:cNvPr id="4" name="TextBox 3"/>
-          <p:cNvSpPr txBox="1"/>
-          <p:nvPr/>
-        </p:nvSpPr>
-        <p:spPr>
-          <a:xfrm>
-            <a:off x="502920" y="6382512"/>
-            <a:ext cx="10545775" cy="274320"/>
-          </a:xfrm>
-          <a:prstGeom prst="rect">
-            <a:avLst/>
-          </a:prstGeom>
-          <a:noFill/>
-        </p:spPr>
-        <p:txBody>
-          <a:bodyPr wrap="square" lIns="0" tIns="0">
-            <a:spAutoFit/>
-          </a:bodyPr>
-          <a:lstStyle/>
-          <a:p>
-            <a:pPr algn="l">
-              <a:lnSpc>
-                <a:spcPct val="100000"/>
-              </a:lnSpc>
-              <a:spcAft>
-                <a:spcPts val="0"/>
-              </a:spcAft>
-              <a:defRPr sz="1000" b="0">
-                <a:solidFill>
-                  <a:srgbClr val="666666"/>
-                </a:solidFill>
-                <a:latin typeface="Calibri"/>
-              </a:defRPr>
-            </a:pPr>
-            <a:r>
-              <a:rPr sz="1000" b="0">
-                <a:solidFill>
-                  <a:srgbClr val="666666"/>
-                </a:solidFill>
-                <a:latin typeface="Calibri"/>
-              </a:rPr>
-              <a:t>Pathfinder Advanced - Op Program 12  |  Lesson 3</a:t>
-            </a:r>
-          </a:p>
-        </p:txBody>
-      </p:sp>
-      <p:sp>
-        <p:nvSpPr>
-          <p:cNvPr id="5" name="TextBox 4"/>
-          <p:cNvSpPr txBox="1"/>
-          <p:nvPr/>
-        </p:nvSpPr>
-        <p:spPr>
-          <a:xfrm>
-            <a:off x="11231575" y="6382512"/>
-            <a:ext cx="457200" cy="274320"/>
-          </a:xfrm>
-          <a:prstGeom prst="rect">
-            <a:avLst/>
-          </a:prstGeom>
-          <a:noFill/>
-        </p:spPr>
-        <p:txBody>
-          <a:bodyPr wrap="square" lIns="0" tIns="0">
-            <a:spAutoFit/>
-          </a:bodyPr>
-          <a:lstStyle/>
-          <a:p>
-            <a:pPr algn="r">
-              <a:lnSpc>
-                <a:spcPct val="100000"/>
-              </a:lnSpc>
-              <a:spcAft>
-                <a:spcPts val="0"/>
-              </a:spcAft>
-              <a:defRPr sz="1000" b="0">
-                <a:solidFill>
-                  <a:srgbClr val="666666"/>
-                </a:solidFill>
-                <a:latin typeface="Calibri"/>
-              </a:defRPr>
-            </a:pPr>
-            <a:r>
-              <a:rPr sz="1000" b="0">
-                <a:solidFill>
-                  <a:srgbClr val="666666"/>
-                </a:solidFill>
-                <a:latin typeface="Calibri"/>
-              </a:rPr>
-              <a:t>10</a:t>
             </a:r>
           </a:p>
         </p:txBody>
@@ -6825,7 +6269,7 @@
 </p:sld>
 </file>
 
-<file path=ppt/slides/slide12.xml><?xml version="1.0" encoding="utf-8"?>
+<file path=ppt/slides/slide11.xml><?xml version="1.0" encoding="utf-8"?>
 <p:sld xmlns:a="http://schemas.openxmlformats.org/drawingml/2006/main" xmlns:p="http://schemas.openxmlformats.org/presentationml/2006/main" xmlns:r="http://schemas.openxmlformats.org/officeDocument/2006/relationships">
   <p:cSld>
     <p:spTree>
@@ -7016,7 +6460,7 @@
                 </a:solidFill>
                 <a:latin typeface="Calibri"/>
               </a:rPr>
-              <a:t>11</a:t>
+              <a:t>10</a:t>
             </a:r>
           </a:p>
         </p:txBody>
@@ -7096,7 +6540,7 @@
                 <a:spcPct val="100000"/>
               </a:lnSpc>
               <a:spcAft>
-                <a:spcPts val="500"/>
+                <a:spcPts val="900"/>
               </a:spcAft>
               <a:defRPr sz="1800" b="0">
                 <a:solidFill>
@@ -7121,7 +6565,23 @@
                 <a:spcPct val="100000"/>
               </a:lnSpc>
               <a:spcAft>
-                <a:spcPts val="500"/>
+                <a:spcPts val="900"/>
+              </a:spcAft>
+              <a:defRPr sz="900" b="0">
+                <a:solidFill>
+                  <a:srgbClr val="222222"/>
+                </a:solidFill>
+                <a:latin typeface="Calibri"/>
+              </a:defRPr>
+            </a:pPr>
+          </a:p>
+          <a:p>
+            <a:pPr algn="l">
+              <a:lnSpc>
+                <a:spcPct val="100000"/>
+              </a:lnSpc>
+              <a:spcAft>
+                <a:spcPts val="900"/>
               </a:spcAft>
               <a:defRPr sz="1800" b="0">
                 <a:solidFill>
@@ -7130,14 +6590,39 @@
                 <a:latin typeface="Calibri"/>
               </a:defRPr>
             </a:pPr>
-          </a:p>
-          <a:p>
-            <a:pPr algn="l">
-              <a:lnSpc>
-                <a:spcPct val="100000"/>
-              </a:lnSpc>
-              <a:spcAft>
-                <a:spcPts val="500"/>
+            <a:r>
+              <a:rPr sz="1800" b="0">
+                <a:solidFill>
+                  <a:srgbClr val="222222"/>
+                </a:solidFill>
+                <a:latin typeface="Calibri"/>
+              </a:rPr>
+              <a:t>So the first byte of the block is a MARKER, written only after a successful save. If it is not 0xA5, the data is not ours and we use the compiled-in defaults.</a:t>
+            </a:r>
+          </a:p>
+          <a:p>
+            <a:pPr algn="l">
+              <a:lnSpc>
+                <a:spcPct val="100000"/>
+              </a:lnSpc>
+              <a:spcAft>
+                <a:spcPts val="900"/>
+              </a:spcAft>
+              <a:defRPr sz="900" b="0">
+                <a:solidFill>
+                  <a:srgbClr val="222222"/>
+                </a:solidFill>
+                <a:latin typeface="Calibri"/>
+              </a:defRPr>
+            </a:pPr>
+          </a:p>
+          <a:p>
+            <a:pPr algn="l">
+              <a:lnSpc>
+                <a:spcPct val="100000"/>
+              </a:lnSpc>
+              <a:spcAft>
+                <a:spcPts val="900"/>
               </a:spcAft>
               <a:defRPr sz="1800" b="0">
                 <a:solidFill>
@@ -7153,47 +6638,6 @@
                 </a:solidFill>
                 <a:latin typeface="Calibri"/>
               </a:rPr>
-              <a:t>So the first byte of the block is a MARKER, written only after a successful save. If it is not 0xA5, the data is not ours and we use the compiled-in defaults.</a:t>
-            </a:r>
-          </a:p>
-          <a:p>
-            <a:pPr algn="l">
-              <a:lnSpc>
-                <a:spcPct val="100000"/>
-              </a:lnSpc>
-              <a:spcAft>
-                <a:spcPts val="500"/>
-              </a:spcAft>
-              <a:defRPr sz="1800" b="0">
-                <a:solidFill>
-                  <a:srgbClr val="222222"/>
-                </a:solidFill>
-                <a:latin typeface="Calibri"/>
-              </a:defRPr>
-            </a:pPr>
-          </a:p>
-          <a:p>
-            <a:pPr algn="l">
-              <a:lnSpc>
-                <a:spcPct val="100000"/>
-              </a:lnSpc>
-              <a:spcAft>
-                <a:spcPts val="500"/>
-              </a:spcAft>
-              <a:defRPr sz="1800" b="0">
-                <a:solidFill>
-                  <a:srgbClr val="222222"/>
-                </a:solidFill>
-                <a:latin typeface="Calibri"/>
-              </a:defRPr>
-            </a:pPr>
-            <a:r>
-              <a:rPr sz="1800" b="0">
-                <a:solidFill>
-                  <a:srgbClr val="222222"/>
-                </a:solidFill>
-                <a:latin typeface="Calibri"/>
-              </a:rPr>
               <a:t>But that is not enough on its own. Even WITH the marker, every value is range checked as it loads:</a:t>
             </a:r>
           </a:p>
@@ -7203,7 +6647,7 @@
                 <a:spcPct val="100000"/>
               </a:lnSpc>
               <a:spcAft>
-                <a:spcPts val="500"/>
+                <a:spcPts val="900"/>
               </a:spcAft>
               <a:defRPr sz="1800" b="0">
                 <a:solidFill>
@@ -7253,15 +6697,15 @@
               <a:spcAft>
                 <a:spcPts val="900"/>
               </a:spcAft>
-              <a:defRPr sz="1800" b="0">
-                <a:solidFill>
-                  <a:srgbClr val="222222"/>
-                </a:solidFill>
-                <a:latin typeface="Calibri"/>
-              </a:defRPr>
-            </a:pPr>
-            <a:r>
-              <a:rPr sz="1800" b="0">
+              <a:defRPr sz="1900" b="0">
+                <a:solidFill>
+                  <a:srgbClr val="222222"/>
+                </a:solidFill>
+                <a:latin typeface="Calibri"/>
+              </a:defRPr>
+            </a:pPr>
+            <a:r>
+              <a:rPr sz="1900" b="0">
                 <a:solidFill>
                   <a:srgbClr val="222222"/>
                 </a:solidFill>
@@ -7278,7 +6722,7 @@
               <a:spcAft>
                 <a:spcPts val="900"/>
               </a:spcAft>
-              <a:defRPr sz="1800" b="0">
+              <a:defRPr sz="950" b="0">
                 <a:solidFill>
                   <a:srgbClr val="222222"/>
                 </a:solidFill>
@@ -7294,15 +6738,15 @@
               <a:spcAft>
                 <a:spcPts val="900"/>
               </a:spcAft>
-              <a:defRPr sz="1800" b="0">
-                <a:solidFill>
-                  <a:srgbClr val="222222"/>
-                </a:solidFill>
-                <a:latin typeface="Calibri"/>
-              </a:defRPr>
-            </a:pPr>
-            <a:r>
-              <a:rPr sz="1800" b="0">
+              <a:defRPr sz="1900" b="0">
+                <a:solidFill>
+                  <a:srgbClr val="222222"/>
+                </a:solidFill>
+                <a:latin typeface="Calibri"/>
+              </a:defRPr>
+            </a:pPr>
+            <a:r>
+              <a:rPr sz="1900" b="0">
                 <a:solidFill>
                   <a:srgbClr val="222222"/>
                 </a:solidFill>
@@ -7321,7 +6765,7 @@
 </p:sld>
 </file>
 
-<file path=ppt/slides/slide13.xml><?xml version="1.0" encoding="utf-8"?>
+<file path=ppt/slides/slide12.xml><?xml version="1.0" encoding="utf-8"?>
 <p:sld xmlns:a="http://schemas.openxmlformats.org/drawingml/2006/main" xmlns:p="http://schemas.openxmlformats.org/presentationml/2006/main" xmlns:r="http://schemas.openxmlformats.org/officeDocument/2006/relationships">
   <p:cSld>
     <p:spTree>
@@ -7512,7 +6956,7 @@
                 </a:solidFill>
                 <a:latin typeface="Calibri"/>
               </a:rPr>
-              <a:t>12</a:t>
+              <a:t>11</a:t>
             </a:r>
           </a:p>
         </p:txBody>
@@ -7879,7 +7323,7 @@
 </p:sld>
 </file>
 
-<file path=ppt/slides/slide14.xml><?xml version="1.0" encoding="utf-8"?>
+<file path=ppt/slides/slide13.xml><?xml version="1.0" encoding="utf-8"?>
 <p:sld xmlns:a="http://schemas.openxmlformats.org/drawingml/2006/main" xmlns:p="http://schemas.openxmlformats.org/presentationml/2006/main" xmlns:r="http://schemas.openxmlformats.org/officeDocument/2006/relationships">
   <p:cSld>
     <p:spTree>
@@ -8070,7 +7514,7 @@
                 </a:solidFill>
                 <a:latin typeface="Calibri"/>
               </a:rPr>
-              <a:t>13</a:t>
+              <a:t>12</a:t>
             </a:r>
           </a:p>
         </p:txBody>
@@ -8546,7 +7990,7 @@
 </p:sld>
 </file>
 
-<file path=ppt/slides/slide15.xml><?xml version="1.0" encoding="utf-8"?>
+<file path=ppt/slides/slide14.xml><?xml version="1.0" encoding="utf-8"?>
 <p:sld xmlns:a="http://schemas.openxmlformats.org/drawingml/2006/main" xmlns:p="http://schemas.openxmlformats.org/presentationml/2006/main" xmlns:r="http://schemas.openxmlformats.org/officeDocument/2006/relationships">
   <p:cSld>
     <p:spTree>
@@ -8737,7 +8181,7 @@
                 </a:solidFill>
                 <a:latin typeface="Calibri"/>
               </a:rPr>
-              <a:t>14</a:t>
+              <a:t>13</a:t>
             </a:r>
           </a:p>
         </p:txBody>
@@ -9231,7 +8675,7 @@
 </p:sld>
 </file>
 
-<file path=ppt/slides/slide16.xml><?xml version="1.0" encoding="utf-8"?>
+<file path=ppt/slides/slide15.xml><?xml version="1.0" encoding="utf-8"?>
 <p:sld xmlns:a="http://schemas.openxmlformats.org/drawingml/2006/main" xmlns:p="http://schemas.openxmlformats.org/presentationml/2006/main" xmlns:r="http://schemas.openxmlformats.org/officeDocument/2006/relationships">
   <p:cSld>
     <p:spTree>
@@ -9422,7 +8866,7 @@
                 </a:solidFill>
                 <a:latin typeface="Calibri"/>
               </a:rPr>
-              <a:t>15</a:t>
+              <a:t>14</a:t>
             </a:r>
           </a:p>
         </p:txBody>
@@ -10047,7 +9491,7 @@
 </p:sld>
 </file>
 
-<file path=ppt/slides/slide17.xml><?xml version="1.0" encoding="utf-8"?>
+<file path=ppt/slides/slide16.xml><?xml version="1.0" encoding="utf-8"?>
 <p:sld xmlns:a="http://schemas.openxmlformats.org/drawingml/2006/main" xmlns:p="http://schemas.openxmlformats.org/presentationml/2006/main" xmlns:r="http://schemas.openxmlformats.org/officeDocument/2006/relationships">
   <p:cSld>
     <p:spTree>
@@ -10238,7 +9682,7 @@
                 </a:solidFill>
                 <a:latin typeface="Calibri"/>
               </a:rPr>
-              <a:t>16</a:t>
+              <a:t>15</a:t>
             </a:r>
           </a:p>
         </p:txBody>
@@ -10300,7 +9744,7 @@
         <p:spPr>
           <a:xfrm>
             <a:off x="502920" y="1755648"/>
-            <a:ext cx="11185855" cy="4507992"/>
+            <a:ext cx="5364327" cy="3419856"/>
           </a:xfrm>
           <a:prstGeom prst="rect">
             <a:avLst/>
@@ -10318,17 +9762,17 @@
                 <a:spcPct val="100000"/>
               </a:lnSpc>
               <a:spcAft>
-                <a:spcPts val="600"/>
-              </a:spcAft>
-              <a:defRPr sz="2700" b="0">
-                <a:solidFill>
-                  <a:srgbClr val="222222"/>
-                </a:solidFill>
-                <a:latin typeface="Calibri"/>
-              </a:defRPr>
-            </a:pPr>
-            <a:r>
-              <a:rPr sz="2700" b="0">
+                <a:spcPts val="500"/>
+              </a:spcAft>
+              <a:defRPr sz="1800" b="0">
+                <a:solidFill>
+                  <a:srgbClr val="222222"/>
+                </a:solidFill>
+                <a:latin typeface="Calibri"/>
+              </a:defRPr>
+            </a:pPr>
+            <a:r>
+              <a:rPr sz="1800" b="0">
                 <a:solidFill>
                   <a:srgbClr val="222222"/>
                 </a:solidFill>
@@ -10343,33 +9787,33 @@
                 <a:spcPct val="100000"/>
               </a:lnSpc>
               <a:spcAft>
-                <a:spcPts val="600"/>
-              </a:spcAft>
-              <a:defRPr sz="2700" b="0">
-                <a:solidFill>
-                  <a:srgbClr val="222222"/>
-                </a:solidFill>
-                <a:latin typeface="Calibri"/>
-              </a:defRPr>
-            </a:pPr>
-          </a:p>
-          <a:p>
-            <a:pPr algn="l">
-              <a:lnSpc>
-                <a:spcPct val="100000"/>
-              </a:lnSpc>
-              <a:spcAft>
-                <a:spcPts val="600"/>
-              </a:spcAft>
-              <a:defRPr sz="2700" b="0">
-                <a:solidFill>
-                  <a:srgbClr val="222222"/>
-                </a:solidFill>
-                <a:latin typeface="Calibri"/>
-              </a:defRPr>
-            </a:pPr>
-            <a:r>
-              <a:rPr sz="2700" b="0">
+                <a:spcPts val="500"/>
+              </a:spcAft>
+              <a:defRPr sz="900" b="0">
+                <a:solidFill>
+                  <a:srgbClr val="222222"/>
+                </a:solidFill>
+                <a:latin typeface="Calibri"/>
+              </a:defRPr>
+            </a:pPr>
+          </a:p>
+          <a:p>
+            <a:pPr algn="l">
+              <a:lnSpc>
+                <a:spcPct val="100000"/>
+              </a:lnSpc>
+              <a:spcAft>
+                <a:spcPts val="500"/>
+              </a:spcAft>
+              <a:defRPr sz="1800" b="0">
+                <a:solidFill>
+                  <a:srgbClr val="222222"/>
+                </a:solidFill>
+                <a:latin typeface="Calibri"/>
+              </a:defRPr>
+            </a:pPr>
+            <a:r>
+              <a:rPr sz="1800" b="0">
                 <a:solidFill>
                   <a:srgbClr val="222222"/>
                 </a:solidFill>
@@ -10384,33 +9828,33 @@
                 <a:spcPct val="100000"/>
               </a:lnSpc>
               <a:spcAft>
-                <a:spcPts val="600"/>
-              </a:spcAft>
-              <a:defRPr sz="2700" b="0">
-                <a:solidFill>
-                  <a:srgbClr val="222222"/>
-                </a:solidFill>
-                <a:latin typeface="Calibri"/>
-              </a:defRPr>
-            </a:pPr>
-          </a:p>
-          <a:p>
-            <a:pPr algn="l">
-              <a:lnSpc>
-                <a:spcPct val="100000"/>
-              </a:lnSpc>
-              <a:spcAft>
-                <a:spcPts val="600"/>
-              </a:spcAft>
-              <a:defRPr sz="2700" b="0">
-                <a:solidFill>
-                  <a:srgbClr val="222222"/>
-                </a:solidFill>
-                <a:latin typeface="Calibri"/>
-              </a:defRPr>
-            </a:pPr>
-            <a:r>
-              <a:rPr sz="2700" b="0">
+                <a:spcPts val="500"/>
+              </a:spcAft>
+              <a:defRPr sz="900" b="0">
+                <a:solidFill>
+                  <a:srgbClr val="222222"/>
+                </a:solidFill>
+                <a:latin typeface="Calibri"/>
+              </a:defRPr>
+            </a:pPr>
+          </a:p>
+          <a:p>
+            <a:pPr algn="l">
+              <a:lnSpc>
+                <a:spcPct val="100000"/>
+              </a:lnSpc>
+              <a:spcAft>
+                <a:spcPts val="500"/>
+              </a:spcAft>
+              <a:defRPr sz="1800" b="0">
+                <a:solidFill>
+                  <a:srgbClr val="222222"/>
+                </a:solidFill>
+                <a:latin typeface="Calibri"/>
+              </a:defRPr>
+            </a:pPr>
+            <a:r>
+              <a:rPr sz="1800" b="0">
                 <a:solidFill>
                   <a:srgbClr val="222222"/>
                 </a:solidFill>
@@ -10421,124 +9865,16 @@
           </a:p>
         </p:txBody>
       </p:sp>
-    </p:spTree>
-  </p:cSld>
-  <p:clrMapOvr>
-    <a:masterClrMapping/>
-  </p:clrMapOvr>
-</p:sld>
-</file>
-
-<file path=ppt/slides/slide18.xml><?xml version="1.0" encoding="utf-8"?>
-<p:sld xmlns:a="http://schemas.openxmlformats.org/drawingml/2006/main" xmlns:p="http://schemas.openxmlformats.org/presentationml/2006/main" xmlns:r="http://schemas.openxmlformats.org/officeDocument/2006/relationships">
-  <p:cSld>
-    <p:spTree>
-      <p:nvGrpSpPr>
-        <p:cNvPr id="1" name=""/>
-        <p:cNvGrpSpPr/>
-        <p:nvPr/>
-      </p:nvGrpSpPr>
-      <p:grpSpPr/>
-      <p:sp>
-        <p:nvSpPr>
-          <p:cNvPr id="2" name="Title 1"/>
-          <p:cNvSpPr>
-            <a:spLocks noGrp="1"/>
-          </p:cNvSpPr>
-          <p:nvPr>
-            <p:ph type="title"/>
-          </p:nvPr>
+      <p:sp>
+        <p:nvSpPr>
+          <p:cNvPr id="8" name="TextBox 7"/>
+          <p:cNvSpPr txBox="1"/>
+          <p:nvPr/>
         </p:nvSpPr>
         <p:spPr>
           <a:xfrm>
-            <a:off x="502920" y="274320"/>
-            <a:ext cx="11185855" cy="777240"/>
-          </a:xfrm>
-        </p:spPr>
-        <p:txBody>
-          <a:bodyPr wrap="square" anchor="b"/>
-          <a:lstStyle/>
-          <a:p>
-            <a:pPr algn="l">
-              <a:lnSpc>
-                <a:spcPct val="100000"/>
-              </a:lnSpc>
-              <a:spcAft>
-                <a:spcPts val="0"/>
-              </a:spcAft>
-              <a:defRPr sz="2800" b="1">
-                <a:solidFill>
-                  <a:srgbClr val="1F3A5F"/>
-                </a:solidFill>
-                <a:latin typeface="Calibri"/>
-              </a:defRPr>
-            </a:pPr>
-            <a:r>
-              <a:rPr sz="2800" b="1">
-                <a:solidFill>
-                  <a:srgbClr val="1F3A5F"/>
-                </a:solidFill>
-                <a:latin typeface="Calibri"/>
-              </a:rPr>
-              <a:t>One more bug worth knowing about  (continued)</a:t>
-            </a:r>
-          </a:p>
-        </p:txBody>
-      </p:sp>
-      <p:sp>
-        <p:nvSpPr>
-          <p:cNvPr id="3" name="Rectangle 2"/>
-          <p:cNvSpPr/>
-          <p:nvPr/>
-        </p:nvSpPr>
-        <p:spPr>
-          <a:xfrm>
-            <a:off x="502920" y="1097280"/>
-            <a:ext cx="11185855" cy="19050"/>
-          </a:xfrm>
-          <a:prstGeom prst="rect">
-            <a:avLst/>
-          </a:prstGeom>
-          <a:solidFill>
-            <a:srgbClr val="C8D2DE"/>
-          </a:solidFill>
-          <a:ln>
-            <a:noFill/>
-          </a:ln>
-          <a:effectLst/>
-        </p:spPr>
-        <p:style>
-          <a:lnRef idx="1">
-            <a:schemeClr val="accent1"/>
-          </a:lnRef>
-          <a:fillRef idx="3">
-            <a:schemeClr val="accent1"/>
-          </a:fillRef>
-          <a:effectRef idx="2">
-            <a:schemeClr val="accent1"/>
-          </a:effectRef>
-          <a:fontRef idx="minor">
-            <a:schemeClr val="lt1"/>
-          </a:fontRef>
-        </p:style>
-        <p:txBody>
-          <a:bodyPr rtlCol="0" anchor="ctr"/>
-          <a:lstStyle/>
-          <a:p>
-            <a:pPr algn="ctr"/>
-          </a:p>
-        </p:txBody>
-      </p:sp>
-      <p:sp>
-        <p:nvSpPr>
-          <p:cNvPr id="4" name="TextBox 3"/>
-          <p:cNvSpPr txBox="1"/>
-          <p:nvPr/>
-        </p:nvSpPr>
-        <p:spPr>
-          <a:xfrm>
-            <a:off x="502920" y="6382512"/>
-            <a:ext cx="10545775" cy="274320"/>
+            <a:off x="6324447" y="1755648"/>
+            <a:ext cx="5364327" cy="3419856"/>
           </a:xfrm>
           <a:prstGeom prst="rect">
             <a:avLst/>
@@ -10546,102 +9882,6 @@
           <a:noFill/>
         </p:spPr>
         <p:txBody>
-          <a:bodyPr wrap="square" lIns="0" tIns="0">
-            <a:spAutoFit/>
-          </a:bodyPr>
-          <a:lstStyle/>
-          <a:p>
-            <a:pPr algn="l">
-              <a:lnSpc>
-                <a:spcPct val="100000"/>
-              </a:lnSpc>
-              <a:spcAft>
-                <a:spcPts val="0"/>
-              </a:spcAft>
-              <a:defRPr sz="1000" b="0">
-                <a:solidFill>
-                  <a:srgbClr val="666666"/>
-                </a:solidFill>
-                <a:latin typeface="Calibri"/>
-              </a:defRPr>
-            </a:pPr>
-            <a:r>
-              <a:rPr sz="1000" b="0">
-                <a:solidFill>
-                  <a:srgbClr val="666666"/>
-                </a:solidFill>
-                <a:latin typeface="Calibri"/>
-              </a:rPr>
-              <a:t>Pathfinder Advanced - Op Program 12  |  Lesson 3</a:t>
-            </a:r>
-          </a:p>
-        </p:txBody>
-      </p:sp>
-      <p:sp>
-        <p:nvSpPr>
-          <p:cNvPr id="5" name="TextBox 4"/>
-          <p:cNvSpPr txBox="1"/>
-          <p:nvPr/>
-        </p:nvSpPr>
-        <p:spPr>
-          <a:xfrm>
-            <a:off x="11231575" y="6382512"/>
-            <a:ext cx="457200" cy="274320"/>
-          </a:xfrm>
-          <a:prstGeom prst="rect">
-            <a:avLst/>
-          </a:prstGeom>
-          <a:noFill/>
-        </p:spPr>
-        <p:txBody>
-          <a:bodyPr wrap="square" lIns="0" tIns="0">
-            <a:spAutoFit/>
-          </a:bodyPr>
-          <a:lstStyle/>
-          <a:p>
-            <a:pPr algn="r">
-              <a:lnSpc>
-                <a:spcPct val="100000"/>
-              </a:lnSpc>
-              <a:spcAft>
-                <a:spcPts val="0"/>
-              </a:spcAft>
-              <a:defRPr sz="1000" b="0">
-                <a:solidFill>
-                  <a:srgbClr val="666666"/>
-                </a:solidFill>
-                <a:latin typeface="Calibri"/>
-              </a:defRPr>
-            </a:pPr>
-            <a:r>
-              <a:rPr sz="1000" b="0">
-                <a:solidFill>
-                  <a:srgbClr val="666666"/>
-                </a:solidFill>
-                <a:latin typeface="Calibri"/>
-              </a:rPr>
-              <a:t>17</a:t>
-            </a:r>
-          </a:p>
-        </p:txBody>
-      </p:sp>
-      <p:sp>
-        <p:nvSpPr>
-          <p:cNvPr id="6" name="TextBox 5"/>
-          <p:cNvSpPr txBox="1"/>
-          <p:nvPr/>
-        </p:nvSpPr>
-        <p:spPr>
-          <a:xfrm>
-            <a:off x="502920" y="1188720"/>
-            <a:ext cx="11185855" cy="3986784"/>
-          </a:xfrm>
-          <a:prstGeom prst="rect">
-            <a:avLst/>
-          </a:prstGeom>
-          <a:noFill/>
-        </p:spPr>
-        <p:txBody>
           <a:bodyPr wrap="square" lIns="0" tIns="0" rIns="0" bIns="0">
             <a:spAutoFit/>
           </a:bodyPr>
@@ -10654,37 +9894,46 @@
               <a:spcAft>
                 <a:spcPts val="900"/>
               </a:spcAft>
-              <a:defRPr sz="3000" b="0">
-                <a:solidFill>
-                  <a:srgbClr val="222222"/>
-                </a:solidFill>
-                <a:latin typeface="Calibri"/>
-              </a:defRPr>
-            </a:pPr>
-          </a:p>
-          <a:p>
-            <a:pPr algn="l">
+              <a:defRPr sz="1800" b="0">
+                <a:solidFill>
+                  <a:srgbClr val="222222"/>
+                </a:solidFill>
+                <a:latin typeface="Calibri"/>
+              </a:defRPr>
+            </a:pPr>
+            <a:r>
+              <a:rPr sz="1800" b="0">
+                <a:solidFill>
+                  <a:srgbClr val="222222"/>
+                </a:solidFill>
+                <a:latin typeface="Calibri"/>
+              </a:rPr>
+              <a:t>Two lessons:</a:t>
+            </a:r>
+          </a:p>
+          <a:p>
+            <a:pPr lvl="1" algn="l">
               <a:lnSpc>
                 <a:spcPct val="100000"/>
               </a:lnSpc>
               <a:spcAft>
                 <a:spcPts val="900"/>
               </a:spcAft>
-              <a:defRPr sz="3000" b="0">
-                <a:solidFill>
-                  <a:srgbClr val="222222"/>
-                </a:solidFill>
-                <a:latin typeface="Calibri"/>
-              </a:defRPr>
-            </a:pPr>
-            <a:r>
-              <a:rPr sz="3000" b="0">
-                <a:solidFill>
-                  <a:srgbClr val="222222"/>
-                </a:solidFill>
-                <a:latin typeface="Calibri"/>
-              </a:rPr>
-              <a:t>Two lessons:</a:t>
+              <a:defRPr sz="1800" b="0">
+                <a:solidFill>
+                  <a:srgbClr val="222222"/>
+                </a:solidFill>
+                <a:latin typeface="Calibri"/>
+              </a:defRPr>
+            </a:pPr>
+            <a:r>
+              <a:rPr sz="1800" b="0">
+                <a:solidFill>
+                  <a:srgbClr val="222222"/>
+                </a:solidFill>
+                <a:latin typeface="Calibri"/>
+              </a:rPr>
+              <a:t>When an address will not work, print it at BOTH ends and compare them character by character.</a:t>
             </a:r>
           </a:p>
           <a:p>
@@ -10695,40 +9944,15 @@
               <a:spcAft>
                 <a:spcPts val="900"/>
               </a:spcAft>
-              <a:defRPr sz="3000" b="0">
-                <a:solidFill>
-                  <a:srgbClr val="222222"/>
-                </a:solidFill>
-                <a:latin typeface="Calibri"/>
-              </a:defRPr>
-            </a:pPr>
-            <a:r>
-              <a:rPr sz="3000" b="0">
-                <a:solidFill>
-                  <a:srgbClr val="222222"/>
-                </a:solidFill>
-                <a:latin typeface="Calibri"/>
-              </a:rPr>
-              <a:t>When an address will not work, print it at BOTH ends and compare them character by character.</a:t>
-            </a:r>
-          </a:p>
-          <a:p>
-            <a:pPr lvl="1" algn="l">
-              <a:lnSpc>
-                <a:spcPct val="100000"/>
-              </a:lnSpc>
-              <a:spcAft>
-                <a:spcPts val="900"/>
-              </a:spcAft>
-              <a:defRPr sz="3000" b="0">
-                <a:solidFill>
-                  <a:srgbClr val="222222"/>
-                </a:solidFill>
-                <a:latin typeface="Calibri"/>
-              </a:defRPr>
-            </a:pPr>
-            <a:r>
-              <a:rPr sz="3000" b="0">
+              <a:defRPr sz="1800" b="0">
+                <a:solidFill>
+                  <a:srgbClr val="222222"/>
+                </a:solidFill>
+                <a:latin typeface="Calibri"/>
+              </a:defRPr>
+            </a:pPr>
+            <a:r>
+              <a:rPr sz="1800" b="0">
                 <a:solidFill>
                   <a:srgbClr val="222222"/>
                 </a:solidFill>
@@ -10741,7 +9965,7 @@
       </p:sp>
       <p:sp>
         <p:nvSpPr>
-          <p:cNvPr id="7" name="Rounded Rectangle 6"/>
+          <p:cNvPr id="9" name="Rounded Rectangle 8"/>
           <p:cNvSpPr/>
           <p:nvPr/>
         </p:nvSpPr>
@@ -10813,7 +10037,7 @@
 </p:sld>
 </file>
 
-<file path=ppt/slides/slide19.xml><?xml version="1.0" encoding="utf-8"?>
+<file path=ppt/slides/slide17.xml><?xml version="1.0" encoding="utf-8"?>
 <p:sld xmlns:a="http://schemas.openxmlformats.org/drawingml/2006/main" xmlns:p="http://schemas.openxmlformats.org/presentationml/2006/main" xmlns:r="http://schemas.openxmlformats.org/officeDocument/2006/relationships">
   <p:cSld>
     <p:spTree>
@@ -11004,7 +10228,7 @@
                 </a:solidFill>
                 <a:latin typeface="Calibri"/>
               </a:rPr>
-              <a:t>18</a:t>
+              <a:t>16</a:t>
             </a:r>
           </a:p>
         </p:txBody>
@@ -12631,7 +11855,7 @@
         <p:spPr>
           <a:xfrm>
             <a:off x="502920" y="1755648"/>
-            <a:ext cx="5364327" cy="4507992"/>
+            <a:ext cx="11185855" cy="4507992"/>
           </a:xfrm>
           <a:prstGeom prst="rect">
             <a:avLst/>
@@ -12649,17 +11873,17 @@
                 <a:spcPct val="100000"/>
               </a:lnSpc>
               <a:spcAft>
-                <a:spcPts val="900"/>
-              </a:spcAft>
-              <a:defRPr sz="2000" b="0">
-                <a:solidFill>
-                  <a:srgbClr val="222222"/>
-                </a:solidFill>
-                <a:latin typeface="Calibri"/>
-              </a:defRPr>
-            </a:pPr>
-            <a:r>
-              <a:rPr sz="2000" b="0">
+                <a:spcPts val="600"/>
+              </a:spcAft>
+              <a:defRPr sz="1800" b="0">
+                <a:solidFill>
+                  <a:srgbClr val="222222"/>
+                </a:solidFill>
+                <a:latin typeface="Calibri"/>
+              </a:defRPr>
+            </a:pPr>
+            <a:r>
+              <a:rPr sz="1800" b="0">
                 <a:solidFill>
                   <a:srgbClr val="222222"/>
                 </a:solidFill>
@@ -12674,33 +11898,33 @@
                 <a:spcPct val="100000"/>
               </a:lnSpc>
               <a:spcAft>
-                <a:spcPts val="900"/>
-              </a:spcAft>
-              <a:defRPr sz="2000" b="0">
-                <a:solidFill>
-                  <a:srgbClr val="222222"/>
-                </a:solidFill>
-                <a:latin typeface="Calibri"/>
-              </a:defRPr>
-            </a:pPr>
-          </a:p>
-          <a:p>
-            <a:pPr algn="l">
-              <a:lnSpc>
-                <a:spcPct val="100000"/>
-              </a:lnSpc>
-              <a:spcAft>
-                <a:spcPts val="900"/>
-              </a:spcAft>
-              <a:defRPr sz="2000" b="0">
-                <a:solidFill>
-                  <a:srgbClr val="222222"/>
-                </a:solidFill>
-                <a:latin typeface="Calibri"/>
-              </a:defRPr>
-            </a:pPr>
-            <a:r>
-              <a:rPr sz="2000" b="0">
+                <a:spcPts val="600"/>
+              </a:spcAft>
+              <a:defRPr sz="900" b="0">
+                <a:solidFill>
+                  <a:srgbClr val="222222"/>
+                </a:solidFill>
+                <a:latin typeface="Calibri"/>
+              </a:defRPr>
+            </a:pPr>
+          </a:p>
+          <a:p>
+            <a:pPr algn="l">
+              <a:lnSpc>
+                <a:spcPct val="100000"/>
+              </a:lnSpc>
+              <a:spcAft>
+                <a:spcPts val="600"/>
+              </a:spcAft>
+              <a:defRPr sz="1800" b="0">
+                <a:solidFill>
+                  <a:srgbClr val="222222"/>
+                </a:solidFill>
+                <a:latin typeface="Calibri"/>
+              </a:defRPr>
+            </a:pPr>
+            <a:r>
+              <a:rPr sz="1800" b="0">
                 <a:solidFill>
                   <a:srgbClr val="222222"/>
                 </a:solidFill>
@@ -12715,33 +11939,33 @@
                 <a:spcPct val="100000"/>
               </a:lnSpc>
               <a:spcAft>
-                <a:spcPts val="900"/>
-              </a:spcAft>
-              <a:defRPr sz="2000" b="0">
-                <a:solidFill>
-                  <a:srgbClr val="222222"/>
-                </a:solidFill>
-                <a:latin typeface="Calibri"/>
-              </a:defRPr>
-            </a:pPr>
-          </a:p>
-          <a:p>
-            <a:pPr algn="l">
-              <a:lnSpc>
-                <a:spcPct val="100000"/>
-              </a:lnSpc>
-              <a:spcAft>
-                <a:spcPts val="900"/>
-              </a:spcAft>
-              <a:defRPr sz="2000" b="0">
-                <a:solidFill>
-                  <a:srgbClr val="222222"/>
-                </a:solidFill>
-                <a:latin typeface="Calibri"/>
-              </a:defRPr>
-            </a:pPr>
-            <a:r>
-              <a:rPr sz="2000" b="0">
+                <a:spcPts val="600"/>
+              </a:spcAft>
+              <a:defRPr sz="900" b="0">
+                <a:solidFill>
+                  <a:srgbClr val="222222"/>
+                </a:solidFill>
+                <a:latin typeface="Calibri"/>
+              </a:defRPr>
+            </a:pPr>
+          </a:p>
+          <a:p>
+            <a:pPr algn="l">
+              <a:lnSpc>
+                <a:spcPct val="100000"/>
+              </a:lnSpc>
+              <a:spcAft>
+                <a:spcPts val="600"/>
+              </a:spcAft>
+              <a:defRPr sz="1800" b="0">
+                <a:solidFill>
+                  <a:srgbClr val="222222"/>
+                </a:solidFill>
+                <a:latin typeface="Calibri"/>
+              </a:defRPr>
+            </a:pPr>
+            <a:r>
+              <a:rPr sz="1800" b="0">
                 <a:solidFill>
                   <a:srgbClr val="222222"/>
                 </a:solidFill>
@@ -12750,46 +11974,39 @@
               <a:t>That inversion is worth naming. Normally your code calls a library. With a callback, the library calls your code. It is how every event system works, from button handlers to network stacks.</a:t>
             </a:r>
           </a:p>
-        </p:txBody>
-      </p:sp>
-      <p:sp>
-        <p:nvSpPr>
-          <p:cNvPr id="8" name="TextBox 7"/>
-          <p:cNvSpPr txBox="1"/>
-          <p:nvPr/>
-        </p:nvSpPr>
-        <p:spPr>
-          <a:xfrm>
-            <a:off x="6324447" y="1755648"/>
-            <a:ext cx="5364327" cy="4507992"/>
-          </a:xfrm>
-          <a:prstGeom prst="rect">
-            <a:avLst/>
-          </a:prstGeom>
-          <a:noFill/>
-        </p:spPr>
-        <p:txBody>
-          <a:bodyPr wrap="square" lIns="0" tIns="0" rIns="0" bIns="0">
-            <a:spAutoFit/>
-          </a:bodyPr>
-          <a:lstStyle/>
-          <a:p>
-            <a:pPr algn="l">
-              <a:lnSpc>
-                <a:spcPct val="100000"/>
-              </a:lnSpc>
-              <a:spcAft>
-                <a:spcPts val="900"/>
-              </a:spcAft>
-              <a:defRPr sz="2000" b="0">
-                <a:solidFill>
-                  <a:srgbClr val="222222"/>
-                </a:solidFill>
-                <a:latin typeface="Calibri"/>
-              </a:defRPr>
-            </a:pPr>
-            <a:r>
-              <a:rPr sz="2000" b="0">
+          <a:p>
+            <a:pPr algn="l">
+              <a:lnSpc>
+                <a:spcPct val="100000"/>
+              </a:lnSpc>
+              <a:spcAft>
+                <a:spcPts val="600"/>
+              </a:spcAft>
+              <a:defRPr sz="900" b="0">
+                <a:solidFill>
+                  <a:srgbClr val="222222"/>
+                </a:solidFill>
+                <a:latin typeface="Calibri"/>
+              </a:defRPr>
+            </a:pPr>
+          </a:p>
+          <a:p>
+            <a:pPr algn="l">
+              <a:lnSpc>
+                <a:spcPct val="100000"/>
+              </a:lnSpc>
+              <a:spcAft>
+                <a:spcPts val="600"/>
+              </a:spcAft>
+              <a:defRPr sz="1800" b="0">
+                <a:solidFill>
+                  <a:srgbClr val="222222"/>
+                </a:solidFill>
+                <a:latin typeface="Calibri"/>
+              </a:defRPr>
+            </a:pPr>
+            <a:r>
+              <a:rPr sz="1800" b="0">
                 <a:solidFill>
                   <a:srgbClr val="222222"/>
                 </a:solidFill>
@@ -12804,33 +12021,33 @@
                 <a:spcPct val="100000"/>
               </a:lnSpc>
               <a:spcAft>
-                <a:spcPts val="900"/>
-              </a:spcAft>
-              <a:defRPr sz="2000" b="0">
-                <a:solidFill>
-                  <a:srgbClr val="222222"/>
-                </a:solidFill>
-                <a:latin typeface="Calibri"/>
-              </a:defRPr>
-            </a:pPr>
-          </a:p>
-          <a:p>
-            <a:pPr algn="l">
-              <a:lnSpc>
-                <a:spcPct val="100000"/>
-              </a:lnSpc>
-              <a:spcAft>
-                <a:spcPts val="900"/>
-              </a:spcAft>
-              <a:defRPr sz="2000" b="0">
-                <a:solidFill>
-                  <a:srgbClr val="222222"/>
-                </a:solidFill>
-                <a:latin typeface="Calibri"/>
-              </a:defRPr>
-            </a:pPr>
-            <a:r>
-              <a:rPr sz="2000" b="0">
+                <a:spcPts val="600"/>
+              </a:spcAft>
+              <a:defRPr sz="900" b="0">
+                <a:solidFill>
+                  <a:srgbClr val="222222"/>
+                </a:solidFill>
+                <a:latin typeface="Calibri"/>
+              </a:defRPr>
+            </a:pPr>
+          </a:p>
+          <a:p>
+            <a:pPr algn="l">
+              <a:lnSpc>
+                <a:spcPct val="100000"/>
+              </a:lnSpc>
+              <a:spcAft>
+                <a:spcPts val="600"/>
+              </a:spcAft>
+              <a:defRPr sz="1800" b="0">
+                <a:solidFill>
+                  <a:srgbClr val="222222"/>
+                </a:solidFill>
+                <a:latin typeface="Calibri"/>
+              </a:defRPr>
+            </a:pPr>
+            <a:r>
+              <a:rPr sz="1800" b="0">
                 <a:solidFill>
                   <a:srgbClr val="222222"/>
                 </a:solidFill>
@@ -12845,33 +12062,33 @@
                 <a:spcPct val="100000"/>
               </a:lnSpc>
               <a:spcAft>
-                <a:spcPts val="900"/>
-              </a:spcAft>
-              <a:defRPr sz="2000" b="0">
-                <a:solidFill>
-                  <a:srgbClr val="222222"/>
-                </a:solidFill>
-                <a:latin typeface="Calibri"/>
-              </a:defRPr>
-            </a:pPr>
-          </a:p>
-          <a:p>
-            <a:pPr algn="l">
-              <a:lnSpc>
-                <a:spcPct val="100000"/>
-              </a:lnSpc>
-              <a:spcAft>
-                <a:spcPts val="900"/>
-              </a:spcAft>
-              <a:defRPr sz="2000" b="0">
-                <a:solidFill>
-                  <a:srgbClr val="222222"/>
-                </a:solidFill>
-                <a:latin typeface="Calibri"/>
-              </a:defRPr>
-            </a:pPr>
-            <a:r>
-              <a:rPr sz="2000" b="0">
+                <a:spcPts val="600"/>
+              </a:spcAft>
+              <a:defRPr sz="900" b="0">
+                <a:solidFill>
+                  <a:srgbClr val="222222"/>
+                </a:solidFill>
+                <a:latin typeface="Calibri"/>
+              </a:defRPr>
+            </a:pPr>
+          </a:p>
+          <a:p>
+            <a:pPr algn="l">
+              <a:lnSpc>
+                <a:spcPct val="100000"/>
+              </a:lnSpc>
+              <a:spcAft>
+                <a:spcPts val="600"/>
+              </a:spcAft>
+              <a:defRPr sz="1800" b="0">
+                <a:solidFill>
+                  <a:srgbClr val="222222"/>
+                </a:solidFill>
+                <a:latin typeface="Calibri"/>
+              </a:defRPr>
+            </a:pPr>
+            <a:r>
+              <a:rPr sz="1800" b="0">
                 <a:solidFill>
                   <a:srgbClr val="222222"/>
                 </a:solidFill>
@@ -13161,17 +12378,17 @@
                 <a:spcPct val="100000"/>
               </a:lnSpc>
               <a:spcAft>
-                <a:spcPts val="600"/>
-              </a:spcAft>
-              <a:defRPr sz="2700" b="0">
-                <a:solidFill>
-                  <a:srgbClr val="222222"/>
-                </a:solidFill>
-                <a:latin typeface="Calibri"/>
-              </a:defRPr>
-            </a:pPr>
-            <a:r>
-              <a:rPr sz="2700" b="0">
+                <a:spcPts val="900"/>
+              </a:spcAft>
+              <a:defRPr sz="2800" b="0">
+                <a:solidFill>
+                  <a:srgbClr val="222222"/>
+                </a:solidFill>
+                <a:latin typeface="Calibri"/>
+              </a:defRPr>
+            </a:pPr>
+            <a:r>
+              <a:rPr sz="2800" b="0">
                 <a:solidFill>
                   <a:srgbClr val="222222"/>
                 </a:solidFill>
@@ -13186,33 +12403,33 @@
                 <a:spcPct val="100000"/>
               </a:lnSpc>
               <a:spcAft>
-                <a:spcPts val="600"/>
-              </a:spcAft>
-              <a:defRPr sz="2700" b="0">
-                <a:solidFill>
-                  <a:srgbClr val="222222"/>
-                </a:solidFill>
-                <a:latin typeface="Calibri"/>
-              </a:defRPr>
-            </a:pPr>
-          </a:p>
-          <a:p>
-            <a:pPr algn="l">
-              <a:lnSpc>
-                <a:spcPct val="100000"/>
-              </a:lnSpc>
-              <a:spcAft>
-                <a:spcPts val="600"/>
-              </a:spcAft>
-              <a:defRPr sz="2700" b="0">
-                <a:solidFill>
-                  <a:srgbClr val="222222"/>
-                </a:solidFill>
-                <a:latin typeface="Calibri"/>
-              </a:defRPr>
-            </a:pPr>
-            <a:r>
-              <a:rPr sz="2700" b="0">
+                <a:spcPts val="900"/>
+              </a:spcAft>
+              <a:defRPr sz="1400" b="0">
+                <a:solidFill>
+                  <a:srgbClr val="222222"/>
+                </a:solidFill>
+                <a:latin typeface="Calibri"/>
+              </a:defRPr>
+            </a:pPr>
+          </a:p>
+          <a:p>
+            <a:pPr algn="l">
+              <a:lnSpc>
+                <a:spcPct val="100000"/>
+              </a:lnSpc>
+              <a:spcAft>
+                <a:spcPts val="900"/>
+              </a:spcAft>
+              <a:defRPr sz="2800" b="0">
+                <a:solidFill>
+                  <a:srgbClr val="222222"/>
+                </a:solidFill>
+                <a:latin typeface="Calibri"/>
+              </a:defRPr>
+            </a:pPr>
+            <a:r>
+              <a:rPr sz="2800" b="0">
                 <a:solidFill>
                   <a:srgbClr val="222222"/>
                 </a:solidFill>
@@ -13227,17 +12444,17 @@
                 <a:spcPct val="100000"/>
               </a:lnSpc>
               <a:spcAft>
-                <a:spcPts val="600"/>
-              </a:spcAft>
-              <a:defRPr sz="2700" b="0">
-                <a:solidFill>
-                  <a:srgbClr val="222222"/>
-                </a:solidFill>
-                <a:latin typeface="Calibri"/>
-              </a:defRPr>
-            </a:pPr>
-            <a:r>
-              <a:rPr sz="2700" b="0">
+                <a:spcPts val="900"/>
+              </a:spcAft>
+              <a:defRPr sz="2800" b="0">
+                <a:solidFill>
+                  <a:srgbClr val="222222"/>
+                </a:solidFill>
+                <a:latin typeface="Calibri"/>
+              </a:defRPr>
+            </a:pPr>
+            <a:r>
+              <a:rPr sz="2800" b="0">
                 <a:solidFill>
                   <a:srgbClr val="222222"/>
                 </a:solidFill>
@@ -13252,17 +12469,17 @@
                 <a:spcPct val="100000"/>
               </a:lnSpc>
               <a:spcAft>
-                <a:spcPts val="600"/>
-              </a:spcAft>
-              <a:defRPr sz="2700" b="0">
-                <a:solidFill>
-                  <a:srgbClr val="222222"/>
-                </a:solidFill>
-                <a:latin typeface="Calibri"/>
-              </a:defRPr>
-            </a:pPr>
-            <a:r>
-              <a:rPr sz="2700" b="0">
+                <a:spcPts val="900"/>
+              </a:spcAft>
+              <a:defRPr sz="2800" b="0">
+                <a:solidFill>
+                  <a:srgbClr val="222222"/>
+                </a:solidFill>
+                <a:latin typeface="Calibri"/>
+              </a:defRPr>
+            </a:pPr>
+            <a:r>
+              <a:rPr sz="2800" b="0">
                 <a:solidFill>
                   <a:srgbClr val="222222"/>
                 </a:solidFill>
@@ -13277,17 +12494,17 @@
                 <a:spcPct val="100000"/>
               </a:lnSpc>
               <a:spcAft>
-                <a:spcPts val="600"/>
-              </a:spcAft>
-              <a:defRPr sz="2700" b="0">
-                <a:solidFill>
-                  <a:srgbClr val="222222"/>
-                </a:solidFill>
-                <a:latin typeface="Calibri"/>
-              </a:defRPr>
-            </a:pPr>
-            <a:r>
-              <a:rPr sz="2700" b="0">
+                <a:spcPts val="900"/>
+              </a:spcAft>
+              <a:defRPr sz="2800" b="0">
+                <a:solidFill>
+                  <a:srgbClr val="222222"/>
+                </a:solidFill>
+                <a:latin typeface="Calibri"/>
+              </a:defRPr>
+            </a:pPr>
+            <a:r>
+              <a:rPr sz="2800" b="0">
                 <a:solidFill>
                   <a:srgbClr val="222222"/>
                 </a:solidFill>
@@ -13531,15 +12748,15 @@
               <a:spcAft>
                 <a:spcPts val="600"/>
               </a:spcAft>
-              <a:defRPr sz="2000" b="0">
-                <a:solidFill>
-                  <a:srgbClr val="222222"/>
-                </a:solidFill>
-                <a:latin typeface="Calibri"/>
-              </a:defRPr>
-            </a:pPr>
-            <a:r>
-              <a:rPr sz="2000" b="0">
+              <a:defRPr sz="2200" b="0">
+                <a:solidFill>
+                  <a:srgbClr val="222222"/>
+                </a:solidFill>
+                <a:latin typeface="Calibri"/>
+              </a:defRPr>
+            </a:pPr>
+            <a:r>
+              <a:rPr sz="2200" b="0">
                 <a:solidFill>
                   <a:srgbClr val="222222"/>
                 </a:solidFill>
@@ -13556,7 +12773,7 @@
               <a:spcAft>
                 <a:spcPts val="600"/>
               </a:spcAft>
-              <a:defRPr sz="2000" b="0">
+              <a:defRPr sz="1100" b="0">
                 <a:solidFill>
                   <a:srgbClr val="222222"/>
                 </a:solidFill>
@@ -13572,15 +12789,15 @@
               <a:spcAft>
                 <a:spcPts val="600"/>
               </a:spcAft>
-              <a:defRPr sz="2000" b="0">
-                <a:solidFill>
-                  <a:srgbClr val="222222"/>
-                </a:solidFill>
-                <a:latin typeface="Calibri"/>
-              </a:defRPr>
-            </a:pPr>
-            <a:r>
-              <a:rPr sz="2000" b="0">
+              <a:defRPr sz="2200" b="0">
+                <a:solidFill>
+                  <a:srgbClr val="222222"/>
+                </a:solidFill>
+                <a:latin typeface="Calibri"/>
+              </a:defRPr>
+            </a:pPr>
+            <a:r>
+              <a:rPr sz="2200" b="0">
                 <a:solidFill>
                   <a:srgbClr val="222222"/>
                 </a:solidFill>
@@ -13597,7 +12814,7 @@
               <a:spcAft>
                 <a:spcPts val="600"/>
               </a:spcAft>
-              <a:defRPr sz="2000" b="0">
+              <a:defRPr sz="1100" b="0">
                 <a:solidFill>
                   <a:srgbClr val="222222"/>
                 </a:solidFill>
@@ -13613,15 +12830,15 @@
               <a:spcAft>
                 <a:spcPts val="600"/>
               </a:spcAft>
-              <a:defRPr sz="2000" b="0">
-                <a:solidFill>
-                  <a:srgbClr val="222222"/>
-                </a:solidFill>
-                <a:latin typeface="Calibri"/>
-              </a:defRPr>
-            </a:pPr>
-            <a:r>
-              <a:rPr sz="2000" b="0">
+              <a:defRPr sz="2200" b="0">
+                <a:solidFill>
+                  <a:srgbClr val="222222"/>
+                </a:solidFill>
+                <a:latin typeface="Calibri"/>
+              </a:defRPr>
+            </a:pPr>
+            <a:r>
+              <a:rPr sz="2200" b="0">
                 <a:solidFill>
                   <a:srgbClr val="222222"/>
                 </a:solidFill>
@@ -15136,7 +14353,7 @@
         <p:spPr>
           <a:xfrm>
             <a:off x="502920" y="1755648"/>
-            <a:ext cx="11185855" cy="4507992"/>
+            <a:ext cx="5364327" cy="3419856"/>
           </a:xfrm>
           <a:prstGeom prst="rect">
             <a:avLst/>
@@ -15154,17 +14371,17 @@
                 <a:spcPct val="100000"/>
               </a:lnSpc>
               <a:spcAft>
-                <a:spcPts val="600"/>
-              </a:spcAft>
-              <a:defRPr sz="2400" b="0">
-                <a:solidFill>
-                  <a:srgbClr val="222222"/>
-                </a:solidFill>
-                <a:latin typeface="Calibri"/>
-              </a:defRPr>
-            </a:pPr>
-            <a:r>
-              <a:rPr sz="2400" b="0">
+                <a:spcPts val="500"/>
+              </a:spcAft>
+              <a:defRPr sz="1800" b="0">
+                <a:solidFill>
+                  <a:srgbClr val="222222"/>
+                </a:solidFill>
+                <a:latin typeface="Calibri"/>
+              </a:defRPr>
+            </a:pPr>
+            <a:r>
+              <a:rPr sz="1800" b="0">
                 <a:solidFill>
                   <a:srgbClr val="222222"/>
                 </a:solidFill>
@@ -15179,33 +14396,33 @@
                 <a:spcPct val="100000"/>
               </a:lnSpc>
               <a:spcAft>
-                <a:spcPts val="600"/>
-              </a:spcAft>
-              <a:defRPr sz="2400" b="0">
-                <a:solidFill>
-                  <a:srgbClr val="222222"/>
-                </a:solidFill>
-                <a:latin typeface="Calibri"/>
-              </a:defRPr>
-            </a:pPr>
-          </a:p>
-          <a:p>
-            <a:pPr algn="l">
-              <a:lnSpc>
-                <a:spcPct val="100000"/>
-              </a:lnSpc>
-              <a:spcAft>
-                <a:spcPts val="600"/>
-              </a:spcAft>
-              <a:defRPr sz="2400" b="0">
-                <a:solidFill>
-                  <a:srgbClr val="222222"/>
-                </a:solidFill>
-                <a:latin typeface="Calibri"/>
-              </a:defRPr>
-            </a:pPr>
-            <a:r>
-              <a:rPr sz="2400" b="0">
+                <a:spcPts val="500"/>
+              </a:spcAft>
+              <a:defRPr sz="900" b="0">
+                <a:solidFill>
+                  <a:srgbClr val="222222"/>
+                </a:solidFill>
+                <a:latin typeface="Calibri"/>
+              </a:defRPr>
+            </a:pPr>
+          </a:p>
+          <a:p>
+            <a:pPr algn="l">
+              <a:lnSpc>
+                <a:spcPct val="100000"/>
+              </a:lnSpc>
+              <a:spcAft>
+                <a:spcPts val="500"/>
+              </a:spcAft>
+              <a:defRPr sz="1800" b="0">
+                <a:solidFill>
+                  <a:srgbClr val="222222"/>
+                </a:solidFill>
+                <a:latin typeface="Calibri"/>
+              </a:defRPr>
+            </a:pPr>
+            <a:r>
+              <a:rPr sz="1800" b="0">
                 <a:solidFill>
                   <a:srgbClr val="222222"/>
                 </a:solidFill>
@@ -15220,17 +14437,17 @@
                 <a:spcPct val="100000"/>
               </a:lnSpc>
               <a:spcAft>
-                <a:spcPts val="600"/>
-              </a:spcAft>
-              <a:defRPr sz="2400" b="0">
-                <a:solidFill>
-                  <a:srgbClr val="222222"/>
-                </a:solidFill>
-                <a:latin typeface="Calibri"/>
-              </a:defRPr>
-            </a:pPr>
-            <a:r>
-              <a:rPr sz="2400" b="0">
+                <a:spcPts val="500"/>
+              </a:spcAft>
+              <a:defRPr sz="1800" b="0">
+                <a:solidFill>
+                  <a:srgbClr val="222222"/>
+                </a:solidFill>
+                <a:latin typeface="Calibri"/>
+              </a:defRPr>
+            </a:pPr>
+            <a:r>
+              <a:rPr sz="1800" b="0">
                 <a:solidFill>
                   <a:srgbClr val="222222"/>
                 </a:solidFill>
@@ -15245,17 +14462,17 @@
                 <a:spcPct val="100000"/>
               </a:lnSpc>
               <a:spcAft>
-                <a:spcPts val="600"/>
-              </a:spcAft>
-              <a:defRPr sz="2400" b="0">
-                <a:solidFill>
-                  <a:srgbClr val="222222"/>
-                </a:solidFill>
-                <a:latin typeface="Calibri"/>
-              </a:defRPr>
-            </a:pPr>
-            <a:r>
-              <a:rPr sz="2400" b="0">
+                <a:spcPts val="500"/>
+              </a:spcAft>
+              <a:defRPr sz="1800" b="0">
+                <a:solidFill>
+                  <a:srgbClr val="222222"/>
+                </a:solidFill>
+                <a:latin typeface="Calibri"/>
+              </a:defRPr>
+            </a:pPr>
+            <a:r>
+              <a:rPr sz="1800" b="0">
                 <a:solidFill>
                   <a:srgbClr val="222222"/>
                 </a:solidFill>
@@ -15264,29 +14481,184 @@
               <a:t>Nothing is stored until EEPROM.commit(). Forgetting it is the single most common cause of "my settings did not save".</a:t>
             </a:r>
           </a:p>
+        </p:txBody>
+      </p:sp>
+      <p:sp>
+        <p:nvSpPr>
+          <p:cNvPr id="8" name="TextBox 7"/>
+          <p:cNvSpPr txBox="1"/>
+          <p:nvPr/>
+        </p:nvSpPr>
+        <p:spPr>
+          <a:xfrm>
+            <a:off x="6324447" y="1755648"/>
+            <a:ext cx="5364327" cy="3419856"/>
+          </a:xfrm>
+          <a:prstGeom prst="rect">
+            <a:avLst/>
+          </a:prstGeom>
+          <a:noFill/>
+        </p:spPr>
+        <p:txBody>
+          <a:bodyPr wrap="square" lIns="0" tIns="0" rIns="0" bIns="0">
+            <a:spAutoFit/>
+          </a:bodyPr>
+          <a:lstStyle/>
+          <a:p>
+            <a:pPr algn="l">
+              <a:lnSpc>
+                <a:spcPct val="100000"/>
+              </a:lnSpc>
+              <a:spcAft>
+                <a:spcPts val="900"/>
+              </a:spcAft>
+              <a:defRPr sz="1800" b="0">
+                <a:solidFill>
+                  <a:srgbClr val="222222"/>
+                </a:solidFill>
+                <a:latin typeface="Calibri"/>
+              </a:defRPr>
+            </a:pPr>
+            <a:r>
+              <a:rPr sz="1800" b="0">
+                <a:solidFill>
+                  <a:srgbClr val="222222"/>
+                </a:solidFill>
+                <a:latin typeface="Calibri"/>
+              </a:rPr>
+              <a:t>Three consequences  (cont.)</a:t>
+            </a:r>
+          </a:p>
           <a:p>
             <a:pPr lvl="1" algn="l">
               <a:lnSpc>
                 <a:spcPct val="100000"/>
               </a:lnSpc>
               <a:spcAft>
-                <a:spcPts val="600"/>
-              </a:spcAft>
-              <a:defRPr sz="2400" b="0">
-                <a:solidFill>
-                  <a:srgbClr val="222222"/>
-                </a:solidFill>
-                <a:latin typeface="Calibri"/>
-              </a:defRPr>
-            </a:pPr>
-            <a:r>
-              <a:rPr sz="2400" b="0">
+                <a:spcPts val="900"/>
+              </a:spcAft>
+              <a:defRPr sz="1800" b="0">
+                <a:solidFill>
+                  <a:srgbClr val="222222"/>
+                </a:solidFill>
+                <a:latin typeface="Calibri"/>
+              </a:defRPr>
+            </a:pPr>
+            <a:r>
+              <a:rPr sz="1800" b="0">
                 <a:solidFill>
                   <a:srgbClr val="222222"/>
                 </a:solidFill>
                 <a:latin typeface="Calibri"/>
               </a:rPr>
               <a:t>Flash WEARS OUT - roughly a hundred thousand erase cycles per sector. Plenty for saving when a human asks. Nowhere near enough to commit() inside loop().</a:t>
+            </a:r>
+          </a:p>
+          <a:p>
+            <a:pPr algn="l">
+              <a:lnSpc>
+                <a:spcPct val="100000"/>
+              </a:lnSpc>
+              <a:spcAft>
+                <a:spcPts val="900"/>
+              </a:spcAft>
+              <a:defRPr sz="900" b="0">
+                <a:solidFill>
+                  <a:srgbClr val="222222"/>
+                </a:solidFill>
+                <a:latin typeface="Calibri"/>
+              </a:defRPr>
+            </a:pPr>
+          </a:p>
+          <a:p>
+            <a:pPr algn="l">
+              <a:lnSpc>
+                <a:spcPct val="100000"/>
+              </a:lnSpc>
+              <a:spcAft>
+                <a:spcPts val="900"/>
+              </a:spcAft>
+              <a:defRPr sz="1800" b="0">
+                <a:solidFill>
+                  <a:srgbClr val="222222"/>
+                </a:solidFill>
+                <a:latin typeface="Calibri"/>
+              </a:defRPr>
+            </a:pPr>
+            <a:r>
+              <a:rPr sz="1800" b="0">
+                <a:solidFill>
+                  <a:srgbClr val="222222"/>
+                </a:solidFill>
+                <a:latin typeface="Calibri"/>
+              </a:rPr>
+              <a:t>Never write on a schedule. Write when something actually changed, and only when a person asked for it.</a:t>
+            </a:r>
+          </a:p>
+        </p:txBody>
+      </p:sp>
+      <p:sp>
+        <p:nvSpPr>
+          <p:cNvPr id="9" name="Rounded Rectangle 8"/>
+          <p:cNvSpPr/>
+          <p:nvPr/>
+        </p:nvSpPr>
+        <p:spPr>
+          <a:xfrm>
+            <a:off x="502920" y="5303520"/>
+            <a:ext cx="11185855" cy="960120"/>
+          </a:xfrm>
+          <a:prstGeom prst="roundRect">
+            <a:avLst>
+              <a:gd name="adj" fmla="val 4000"/>
+            </a:avLst>
+          </a:prstGeom>
+          <a:solidFill>
+            <a:srgbClr val="FDF3E3"/>
+          </a:solidFill>
+          <a:ln w="12700">
+            <a:solidFill>
+              <a:srgbClr val="B46A0F"/>
+            </a:solidFill>
+          </a:ln>
+          <a:effectLst/>
+        </p:spPr>
+        <p:style>
+          <a:lnRef idx="1">
+            <a:schemeClr val="accent1"/>
+          </a:lnRef>
+          <a:fillRef idx="3">
+            <a:schemeClr val="accent1"/>
+          </a:fillRef>
+          <a:effectRef idx="2">
+            <a:schemeClr val="accent1"/>
+          </a:effectRef>
+          <a:fontRef idx="minor">
+            <a:schemeClr val="lt1"/>
+          </a:fontRef>
+        </p:style>
+        <p:txBody>
+          <a:bodyPr rtlCol="0" anchor="ctr" wrap="square" lIns="164592" rIns="164592" tIns="73152" bIns="73152"/>
+          <a:lstStyle/>
+          <a:p>
+            <a:pPr algn="l"/>
+            <a:r>
+              <a:rPr sz="1300" b="1">
+                <a:solidFill>
+                  <a:srgbClr val="B46A0F"/>
+                </a:solidFill>
+                <a:latin typeface="Calibri"/>
+              </a:rPr>
+              <a:t>WATCH OUT   </a:t>
+            </a:r>
+            <a:r>
+              <a:rPr sz="1500">
+                <a:solidFill>
+                  <a:srgbClr val="222222"/>
+                </a:solidFill>
+                <a:latin typeface="Calibri"/>
+              </a:rPr>
+              <a:t>A commit() in loop() at 30 Hz burns through a hundred thousand cycles in under an hour.</a:t>
             </a:r>
           </a:p>
         </p:txBody>

--- a/ground-vehicle/docs/courses/advanced/l3_bluetooth_and_storage.pptx
+++ b/ground-vehicle/docs/courses/advanced/l3_bluetooth_and_storage.pptx
@@ -21,7 +21,6 @@
     <p:sldId id="269" r:id="rId21"/>
     <p:sldId id="270" r:id="rId22"/>
     <p:sldId id="271" r:id="rId23"/>
-    <p:sldId id="272" r:id="rId24"/>
   </p:sldIdLst>
   <p:sldSz cx="12191695" cy="6858000" type="screen4x3"/>
   <p:notesSz cx="6858000" cy="9144000"/>
@@ -602,7 +601,7 @@
               <a:rPr sz="1200">
                 <a:latin typeface="Calibri"/>
               </a:rPr>
-              <a:t>EEPROM is a flat array of bytes and YOU choose the layout. Nothing stops two values overlapping - the compiler cannot help you here.</a:t>
+              <a:t>Start with the fact: new flash is full of 0xFF. Read an int out of that and you get -1.</a:t>
             </a:r>
           </a:p>
           <a:p>
@@ -610,7 +609,7 @@
               <a:rPr sz="1200">
                 <a:latin typeface="Calibri"/>
               </a:rPr>
-              <a:t>Four bytes per slot because an int and a float are both four bytes on this chip.</a:t>
+              <a:t>The magic byte says the bytes are OURS. It does not say they still make sense.</a:t>
             </a:r>
           </a:p>
           <a:p>
@@ -618,7 +617,7 @@
               <a:rPr sz="1200">
                 <a:latin typeface="Calibri"/>
               </a:rPr>
-              <a:t>Ask why the addresses are spaced out and written down in one place. The answer is that a map you can read is a map you can extend safely.</a:t>
+              <a:t>That distinction is the whole slide. A value written by an older version of the program is perfectly valid data and still wrong for this one.</a:t>
             </a:r>
           </a:p>
           <a:p>
@@ -626,7 +625,7 @@
               <a:rPr sz="1200">
                 <a:latin typeface="Calibri"/>
               </a:rPr>
-              <a:t>They break this deliberately in step 6 of the activity, so plant the idea now.</a:t>
+              <a:t>Defensive loading is not paranoia - it is the difference between a vehicle that boots with odd settings and one that will not boot at all.</a:t>
             </a:r>
           </a:p>
         </p:txBody>
@@ -699,31 +698,7 @@
               <a:rPr sz="1200">
                 <a:latin typeface="Calibri"/>
               </a:rPr>
-              <a:t>Start with the fact: new flash is full of 0xFF. Read an int out of that and you get -1.</a:t>
-            </a:r>
-          </a:p>
-          <a:p>
-            <a:r>
-              <a:rPr sz="1200">
-                <a:latin typeface="Calibri"/>
-              </a:rPr>
-              <a:t>The magic byte says the bytes are OURS. It does not say they still make sense.</a:t>
-            </a:r>
-          </a:p>
-          <a:p>
-            <a:r>
-              <a:rPr sz="1200">
-                <a:latin typeface="Calibri"/>
-              </a:rPr>
-              <a:t>That distinction is the whole slide. A value written by an older version of the program is perfectly valid data and still wrong for this one.</a:t>
-            </a:r>
-          </a:p>
-          <a:p>
-            <a:r>
-              <a:rPr sz="1200">
-                <a:latin typeface="Calibri"/>
-              </a:rPr>
-              <a:t>Defensive loading is not paranoia - it is the difference between a vehicle that boots with odd settings and one that will not boot at all.</a:t>
+              <a:t>Twenty seconds. Second activity.</a:t>
             </a:r>
           </a:p>
         </p:txBody>
@@ -796,7 +771,31 @@
               <a:rPr sz="1200">
                 <a:latin typeface="Calibri"/>
               </a:rPr>
-              <a:t>Twenty seconds. Second activity.</a:t>
+              <a:t>Step 1 involves physically unplugging the board. Make sure nobody is mid-upload when they do it.</a:t>
+            </a:r>
+          </a:p>
+          <a:p>
+            <a:r>
+              <a:rPr sz="1200">
+                <a:latin typeface="Calibri"/>
+              </a:rPr>
+              <a:t>Step 5 is the deliberate bug: comment out commit(), save, reset, and watch the setting vanish. That is the mistake they will one day make for real.</a:t>
+            </a:r>
+          </a:p>
+          <a:p>
+            <a:r>
+              <a:rPr sz="1200">
+                <a:latin typeface="Calibri"/>
+              </a:rPr>
+              <a:t>Step 6 overlaps two addresses on purpose and one setting eats the other. It makes the flat-array point concrete.</a:t>
+            </a:r>
+          </a:p>
+          <a:p>
+            <a:r>
+              <a:rPr sz="1200">
+                <a:latin typeface="Calibri"/>
+              </a:rPr>
+              <a:t>Answers: address 0 holds the deadzone int; and range checking is needed even with a correct magic byte because an older version could have written a value this version cannot use.</a:t>
             </a:r>
           </a:p>
         </p:txBody>
@@ -869,7 +868,7 @@
               <a:rPr sz="1200">
                 <a:latin typeface="Calibri"/>
               </a:rPr>
-              <a:t>Step 1 involves physically unplugging the board. Make sure nobody is mid-upload when they do it.</a:t>
+              <a:t>Four programs, four answers, and each is right for what it is for. Do not let this become a ranking.</a:t>
             </a:r>
           </a:p>
           <a:p>
@@ -877,7 +876,7 @@
               <a:rPr sz="1200">
                 <a:latin typeface="Calibri"/>
               </a:rPr>
-              <a:t>Step 5 is the deliberate bug: comment out commit(), save, reset, and watch the setting vanish. That is the mistake they will one day make for real.</a:t>
+              <a:t>The cost column is where the engineering judgement lives. Read that rather than the middle column.</a:t>
             </a:r>
           </a:p>
           <a:p>
@@ -885,15 +884,7 @@
               <a:rPr sz="1200">
                 <a:latin typeface="Calibri"/>
               </a:rPr>
-              <a:t>Step 6 overlaps two addresses on purpose and one setting eats the other. It makes the flat-array point concrete.</a:t>
-            </a:r>
-          </a:p>
-          <a:p>
-            <a:r>
-              <a:rPr sz="1200">
-                <a:latin typeface="Calibri"/>
-              </a:rPr>
-              <a:t>Answers: address 0 holds the deadzone int; and range checking is needed even with a correct magic byte because an older version could have written a value this version cannot use.</a:t>
+              <a:t>The note is the argument for the EEPROM version: a field-serviceable machine should never need a laptop to change who is allowed to drive it.</a:t>
             </a:r>
           </a:p>
         </p:txBody>
@@ -966,7 +957,7 @@
               <a:rPr sz="1200">
                 <a:latin typeface="Calibri"/>
               </a:rPr>
-              <a:t>Four programs, four answers, and each is right for what it is for. Do not let this become a ranking.</a:t>
+              <a:t>Two ways in, one code path. That is a design choice worth pointing at - a button and a console command that do exactly the same thing.</a:t>
             </a:r>
           </a:p>
           <a:p>
@@ -974,7 +965,7 @@
               <a:rPr sz="1200">
                 <a:latin typeface="Calibri"/>
               </a:rPr>
-              <a:t>The cost column is where the engineering judgement lives. Read that rather than the middle column.</a:t>
+              <a:t>The first controller to connect during pairing becomes the vehicle's own and is written down immediately, not at shutdown.</a:t>
             </a:r>
           </a:p>
           <a:p>
@@ -982,7 +973,15 @@
               <a:rPr sz="1200">
                 <a:latin typeface="Calibri"/>
               </a:rPr>
-              <a:t>The note is the argument for the EEPROM version: a field-serviceable machine should never need a laptop to change who is allowed to drive it.</a:t>
+              <a:t>Ask why it is written immediately. Because a vehicle that loses power before saving would come back not knowing who it belongs to.</a:t>
+            </a:r>
+          </a:p>
+          <a:p>
+            <a:r>
+              <a:rPr sz="1200">
+                <a:latin typeface="Calibri"/>
+              </a:rPr>
+              <a:t>Walk the order: forget keys, clear the marker, rebuild the empty allowlist, enable new connections, show it on the LEDs.</a:t>
             </a:r>
           </a:p>
         </p:txBody>
@@ -1055,7 +1054,7 @@
               <a:rPr sz="1200">
                 <a:latin typeface="Calibri"/>
               </a:rPr>
-              <a:t>Two ways in, one code path. That is a design choice worth pointing at - a button and a console command that do exactly the same thing.</a:t>
+              <a:t>This is the most human bug in the course. Everything looks correct and the address is simply backwards.</a:t>
             </a:r>
           </a:p>
           <a:p>
@@ -1063,7 +1062,7 @@
               <a:rPr sz="1200">
                 <a:latin typeface="Calibri"/>
               </a:rPr>
-              <a:t>The first controller to connect during pairing becomes the vehicle's own and is written down immediately, not at shutdown.</a:t>
+              <a:t>Describe the symptom before the cause: you write down what it printed, paste it somewhere else, and nothing ever connects.</a:t>
             </a:r>
           </a:p>
           <a:p>
@@ -1071,7 +1070,7 @@
               <a:rPr sz="1200">
                 <a:latin typeface="Calibri"/>
               </a:rPr>
-              <a:t>Ask why it is written immediately. Because a vehicle that loses power before saving would come back not knowing who it belongs to.</a:t>
+              <a:t>The first lesson is a debugging habit: print it at both ends and compare character by character.</a:t>
             </a:r>
           </a:p>
           <a:p>
@@ -1079,7 +1078,15 @@
               <a:rPr sz="1200">
                 <a:latin typeface="Calibri"/>
               </a:rPr>
-              <a:t>Walk the order: forget keys, clear the marker, rebuild the empty allowlist, enable new connections, show it on the LEDs.</a:t>
+              <a:t>The second is a real category. Byte order is why network protocols specify it and why the word big-endian exists.</a:t>
+            </a:r>
+          </a:p>
+          <a:p>
+            <a:r>
+              <a:rPr sz="1200">
+                <a:latin typeface="Calibri"/>
+              </a:rPr>
+              <a:t>Op 12 now prints most significant byte first, matching every Bluetooth scanner they will ever use.</a:t>
             </a:r>
           </a:p>
         </p:txBody>
@@ -1152,111 +1159,6 @@
               <a:rPr sz="1200">
                 <a:latin typeface="Calibri"/>
               </a:rPr>
-              <a:t>This is the most human bug in the course. Everything looks correct and the address is simply backwards.</a:t>
-            </a:r>
-          </a:p>
-          <a:p>
-            <a:r>
-              <a:rPr sz="1200">
-                <a:latin typeface="Calibri"/>
-              </a:rPr>
-              <a:t>Describe the symptom before the cause: you write down what it printed, paste it somewhere else, and nothing ever connects.</a:t>
-            </a:r>
-          </a:p>
-          <a:p>
-            <a:r>
-              <a:rPr sz="1200">
-                <a:latin typeface="Calibri"/>
-              </a:rPr>
-              <a:t>The first lesson is a debugging habit: print it at both ends and compare character by character.</a:t>
-            </a:r>
-          </a:p>
-          <a:p>
-            <a:r>
-              <a:rPr sz="1200">
-                <a:latin typeface="Calibri"/>
-              </a:rPr>
-              <a:t>The second is a real category. Byte order is why network protocols specify it and why the word big-endian exists.</a:t>
-            </a:r>
-          </a:p>
-          <a:p>
-            <a:r>
-              <a:rPr sz="1200">
-                <a:latin typeface="Calibri"/>
-              </a:rPr>
-              <a:t>Op 12 now prints most significant byte first, matching every Bluetooth scanner they will ever use.</a:t>
-            </a:r>
-          </a:p>
-        </p:txBody>
-      </p:sp>
-      <p:sp>
-        <p:nvSpPr>
-          <p:cNvPr id="4" name="Slide Number Placeholder 3"/>
-          <p:cNvSpPr>
-            <a:spLocks noGrp="1"/>
-          </p:cNvSpPr>
-          <p:nvPr>
-            <p:ph type="sldNum" idx="5" sz="quarter"/>
-          </p:nvPr>
-        </p:nvSpPr>
-        <p:spPr/>
-      </p:sp>
-    </p:spTree>
-  </p:cSld>
-  <p:clrMapOvr>
-    <a:masterClrMapping/>
-  </p:clrMapOvr>
-</p:notes>
-</file>
-
-<file path=ppt/notesSlides/notesSlide17.xml><?xml version="1.0" encoding="utf-8"?>
-<p:notes xmlns:a="http://schemas.openxmlformats.org/drawingml/2006/main" xmlns:p="http://schemas.openxmlformats.org/presentationml/2006/main" xmlns:r="http://schemas.openxmlformats.org/officeDocument/2006/relationships">
-  <p:cSld>
-    <p:spTree>
-      <p:nvGrpSpPr>
-        <p:cNvPr id="1" name=""/>
-        <p:cNvGrpSpPr/>
-        <p:nvPr/>
-      </p:nvGrpSpPr>
-      <p:grpSpPr>
-        <a:xfrm>
-          <a:off x="0" y="0"/>
-          <a:ext cx="0" cy="0"/>
-          <a:chOff x="0" y="0"/>
-          <a:chExt cx="0" cy="0"/>
-        </a:xfrm>
-      </p:grpSpPr>
-      <p:sp>
-        <p:nvSpPr>
-          <p:cNvPr id="2" name="Slide Image Placeholder 1"/>
-          <p:cNvSpPr>
-            <a:spLocks noGrp="1"/>
-          </p:cNvSpPr>
-          <p:nvPr>
-            <p:ph type="sldImg" idx="2"/>
-          </p:nvPr>
-        </p:nvSpPr>
-        <p:spPr/>
-      </p:sp>
-      <p:sp>
-        <p:nvSpPr>
-          <p:cNvPr id="3" name="Notes Placeholder 2"/>
-          <p:cNvSpPr>
-            <a:spLocks noGrp="1"/>
-          </p:cNvSpPr>
-          <p:nvPr>
-            <p:ph type="body" idx="3" sz="quarter"/>
-          </p:nvPr>
-        </p:nvSpPr>
-        <p:spPr/>
-        <p:txBody>
-          <a:bodyPr/>
-          <a:lstStyle/>
-          <a:p>
-            <a:r>
-              <a:rPr sz="1200">
-                <a:latin typeface="Calibri"/>
-              </a:rPr>
               <a:t>Conversation, not a test.</a:t>
             </a:r>
           </a:p>
@@ -1613,6 +1515,14 @@
               <a:rPr sz="1200">
                 <a:latin typeface="Calibri"/>
               </a:rPr>
+              <a:t>The WATCH OUT used to carry this and it is worth saying out loud: 11.2 added addresses at runtime only. If those entries did not survive a reboot, a vehicle could come back up with an empty allowlist AND new connections disabled, and then refuse its own controller with no way in.</a:t>
+            </a:r>
+          </a:p>
+          <a:p>
+            <a:r>
+              <a:rPr sz="1200">
+                <a:latin typeface="Calibri"/>
+              </a:rPr>
               <a:t>Set the problem up first: pairing alone does not give you one vehicle per controller.</a:t>
             </a:r>
           </a:p>
@@ -1710,40 +1620,7 @@
               <a:rPr sz="1200">
                 <a:latin typeface="Calibri"/>
               </a:rPr>
-              <a:t>(Continued from the previous slide - the same notes apply.)</a:t>
-            </a:r>
-          </a:p>
-          <a:p/>
-          <a:p>
-            <a:r>
-              <a:rPr sz="1200">
-                <a:latin typeface="Calibri"/>
-              </a:rPr>
-              <a:t>Set the problem up first: pairing alone does not give you one vehicle per controller.</a:t>
-            </a:r>
-          </a:p>
-          <a:p>
-            <a:r>
-              <a:rPr sz="1200">
-                <a:latin typeface="Calibri"/>
-              </a:rPr>
-              <a:t>Mistake one is the cruel one. Called before setup(), the allowlist calls do nothing AT ALL, and they do it silently. No error, no warning.</a:t>
-            </a:r>
-          </a:p>
-          <a:p>
-            <a:r>
-              <a:rPr sz="1200">
-                <a:latin typeface="Calibri"/>
-              </a:rPr>
-              <a:t>Mistake two is the one that rots slowly: add rather than rebuild, and stale entries accumulate where nobody can see them.</a:t>
-            </a:r>
-          </a:p>
-          <a:p>
-            <a:r>
-              <a:rPr sz="1200">
-                <a:latin typeface="Calibri"/>
-              </a:rPr>
-              <a:t>Rebuild from scratch every boot, and the sketch is the single source of truth. That principle is worth stating generally.</a:t>
+              <a:t>Twenty seconds. First activity.</a:t>
             </a:r>
           </a:p>
         </p:txBody>
@@ -1816,7 +1693,31 @@
               <a:rPr sz="1200">
                 <a:latin typeface="Calibri"/>
               </a:rPr>
-              <a:t>Twenty seconds. First activity.</a:t>
+              <a:t>Step 3 is the moment it becomes real: a second controller turned away with a printed reason.</a:t>
+            </a:r>
+          </a:p>
+          <a:p>
+            <a:r>
+              <a:rPr sz="1200">
+                <a:latin typeface="Calibri"/>
+              </a:rPr>
+              <a:t>Step 5 locks to an address that does not exist, so nothing can connect. Good for showing that the mechanism really is doing the work.</a:t>
+            </a:r>
+          </a:p>
+          <a:p>
+            <a:r>
+              <a:rPr sz="1200">
+                <a:latin typeface="Calibri"/>
+              </a:rPr>
+              <a:t>Step 6 cross-checks against a phone scanner app. Worth doing - it connects the number on screen to something outside the room.</a:t>
+            </a:r>
+          </a:p>
+          <a:p>
+            <a:r>
+              <a:rPr sz="1200">
+                <a:latin typeface="Calibri"/>
+              </a:rPr>
+              <a:t>Answers: this sketch keeps the address in RAM only, so it is gone at reset; and applyAllowlist() must come after BP32.setup() because setup is what brings the stack up.</a:t>
             </a:r>
           </a:p>
         </p:txBody>
@@ -1889,7 +1790,7 @@
               <a:rPr sz="1200">
                 <a:latin typeface="Calibri"/>
               </a:rPr>
-              <a:t>Step 3 is the moment it becomes real: a second controller turned away with a printed reason.</a:t>
+              <a:t>Lead with the headline: there is no EEPROM on this chip. The library is an emulation over flash.</a:t>
             </a:r>
           </a:p>
           <a:p>
@@ -1897,7 +1798,7 @@
               <a:rPr sz="1200">
                 <a:latin typeface="Calibri"/>
               </a:rPr>
-              <a:t>Step 5 locks to an address that does not exist, so nothing can connect. Good for showing that the mechanism really is doing the work.</a:t>
+              <a:t>The three consequences are all practical. begin() first, nothing saved without commit(), and flash wears out.</a:t>
             </a:r>
           </a:p>
           <a:p>
@@ -1905,7 +1806,7 @@
               <a:rPr sz="1200">
                 <a:latin typeface="Calibri"/>
               </a:rPr>
-              <a:t>Step 6 cross-checks against a phone scanner app. Worth doing - it connects the number on screen to something outside the room.</a:t>
+              <a:t>The warning panel has the arithmetic: a commit() in loop() at 30 Hz burns a hundred thousand cycles in under an hour. Say that number out loud.</a:t>
             </a:r>
           </a:p>
           <a:p>
@@ -1913,7 +1814,7 @@
               <a:rPr sz="1200">
                 <a:latin typeface="Calibri"/>
               </a:rPr>
-              <a:t>Answers: this sketch keeps the address in RAM only, so it is gone at reset; and applyAllowlist() must come after BP32.setup() because setup is what brings the stack up.</a:t>
+              <a:t>The rule to take away: write when something changed and a person asked, never on a schedule.</a:t>
             </a:r>
           </a:p>
         </p:txBody>
@@ -1986,7 +1887,7 @@
               <a:rPr sz="1200">
                 <a:latin typeface="Calibri"/>
               </a:rPr>
-              <a:t>Lead with the headline: there is no EEPROM on this chip. The library is an emulation over flash.</a:t>
+              <a:t>EEPROM is a flat array of bytes and YOU choose the layout. Nothing stops two values overlapping - the compiler cannot help you here.</a:t>
             </a:r>
           </a:p>
           <a:p>
@@ -1994,7 +1895,7 @@
               <a:rPr sz="1200">
                 <a:latin typeface="Calibri"/>
               </a:rPr>
-              <a:t>The three consequences are all practical. begin() first, nothing saved without commit(), and flash wears out.</a:t>
+              <a:t>Four bytes per slot because an int and a float are both four bytes on this chip.</a:t>
             </a:r>
           </a:p>
           <a:p>
@@ -2002,7 +1903,7 @@
               <a:rPr sz="1200">
                 <a:latin typeface="Calibri"/>
               </a:rPr>
-              <a:t>The warning panel has the arithmetic: a commit() in loop() at 30 Hz burns a hundred thousand cycles in under an hour. Say that number out loud.</a:t>
+              <a:t>Ask why the addresses are spaced out and written down in one place. The answer is that a map you can read is a map you can extend safely.</a:t>
             </a:r>
           </a:p>
           <a:p>
@@ -2010,7 +1911,7 @@
               <a:rPr sz="1200">
                 <a:latin typeface="Calibri"/>
               </a:rPr>
-              <a:t>The rule to take away: write when something changed and a person asked, never on a schedule.</a:t>
+              <a:t>They break this deliberately in step 6 of the activity, so plant the idea now.</a:t>
             </a:r>
           </a:p>
         </p:txBody>
@@ -5614,7 +5515,7 @@
                 </a:solidFill>
                 <a:latin typeface="Calibri"/>
               </a:rPr>
-              <a:t>The storage map, and why the addresses are spaced out</a:t>
+              <a:t>The magic byte, and never trusting storage</a:t>
             </a:r>
           </a:p>
         </p:txBody>
@@ -5768,7 +5669,7 @@
         <p:spPr>
           <a:xfrm>
             <a:off x="502920" y="1188720"/>
-            <a:ext cx="7047088" cy="274320"/>
+            <a:ext cx="11185855" cy="530352"/>
           </a:xfrm>
           <a:prstGeom prst="rect">
             <a:avLst/>
@@ -5786,368 +5687,37 @@
                 <a:spcPct val="100000"/>
               </a:lnSpc>
               <a:spcAft>
-                <a:spcPts val="200"/>
-              </a:spcAft>
-              <a:defRPr sz="1200" b="1">
+                <a:spcPts val="600"/>
+              </a:spcAft>
+              <a:defRPr sz="1900" b="1">
                 <a:solidFill>
                   <a:srgbClr val="0E7C86"/>
                 </a:solidFill>
-                <a:latin typeface="Consolas"/>
-              </a:defRPr>
-            </a:pPr>
-            <a:r>
-              <a:rPr sz="1200" b="1">
+                <a:latin typeface="Calibri"/>
+              </a:defRPr>
+            </a:pPr>
+            <a:r>
+              <a:rPr sz="1900" b="1">
                 <a:solidFill>
                   <a:srgbClr val="0E7C86"/>
                 </a:solidFill>
-                <a:latin typeface="Consolas"/>
-              </a:rPr>
-              <a:t>Config.h</a:t>
-            </a:r>
-          </a:p>
-        </p:txBody>
-      </p:sp>
-      <p:sp>
-        <p:nvSpPr>
-          <p:cNvPr id="7" name="CODE_PANEL"/>
-          <p:cNvSpPr/>
+                <a:latin typeface="Calibri"/>
+              </a:rPr>
+              <a:t>Two separate checks, for two separate problems</a:t>
+            </a:r>
+          </a:p>
+        </p:txBody>
+      </p:sp>
+      <p:sp>
+        <p:nvSpPr>
+          <p:cNvPr id="7" name="TextBox 6"/>
+          <p:cNvSpPr txBox="1"/>
           <p:nvPr/>
         </p:nvSpPr>
         <p:spPr>
           <a:xfrm>
-            <a:off x="502920" y="1517904"/>
-            <a:ext cx="7047088" cy="4745736"/>
-          </a:xfrm>
-          <a:prstGeom prst="roundRect">
-            <a:avLst>
-              <a:gd name="adj" fmla="val 4000"/>
-            </a:avLst>
-          </a:prstGeom>
-          <a:solidFill>
-            <a:srgbClr val="F4F6F8"/>
-          </a:solidFill>
-          <a:ln w="12700">
-            <a:solidFill>
-              <a:srgbClr val="C8D2DE"/>
-            </a:solidFill>
-          </a:ln>
-          <a:effectLst/>
-        </p:spPr>
-        <p:style>
-          <a:lnRef idx="1">
-            <a:schemeClr val="accent1"/>
-          </a:lnRef>
-          <a:fillRef idx="3">
-            <a:schemeClr val="accent1"/>
-          </a:fillRef>
-          <a:effectRef idx="2">
-            <a:schemeClr val="accent1"/>
-          </a:effectRef>
-          <a:fontRef idx="minor">
-            <a:schemeClr val="lt1"/>
-          </a:fontRef>
-        </p:style>
-        <p:txBody>
-          <a:bodyPr rtlCol="0" anchor="t" wrap="square" lIns="146304" tIns="91440" bIns="73152"/>
-          <a:lstStyle/>
-          <a:p>
-            <a:pPr algn="l">
-              <a:lnSpc>
-                <a:spcPct val="100000"/>
-              </a:lnSpc>
-              <a:spcAft>
-                <a:spcPts val="0"/>
-              </a:spcAft>
-              <a:defRPr sz="1450">
-                <a:latin typeface="Consolas"/>
-              </a:defRPr>
-            </a:pPr>
-            <a:r>
-              <a:rPr sz="1450">
-                <a:solidFill>
-                  <a:srgbClr val="222222"/>
-                </a:solidFill>
-                <a:latin typeface="Consolas"/>
-              </a:rPr>
-              <a:t>const int ADDR_DEADZONE       =  0;   // int,   4 bytes</a:t>
-            </a:r>
-          </a:p>
-          <a:p>
-            <a:pPr algn="l">
-              <a:lnSpc>
-                <a:spcPct val="100000"/>
-              </a:lnSpc>
-              <a:spcAft>
-                <a:spcPts val="0"/>
-              </a:spcAft>
-              <a:defRPr sz="1450">
-                <a:latin typeface="Consolas"/>
-              </a:defRPr>
-            </a:pPr>
-            <a:r>
-              <a:rPr sz="1450">
-                <a:solidFill>
-                  <a:srgbClr val="222222"/>
-                </a:solidFill>
-                <a:latin typeface="Consolas"/>
-              </a:rPr>
-              <a:t>const int ADDR_DEADZONE_LS_X  =  4;</a:t>
-            </a:r>
-          </a:p>
-          <a:p>
-            <a:pPr algn="l">
-              <a:lnSpc>
-                <a:spcPct val="100000"/>
-              </a:lnSpc>
-              <a:spcAft>
-                <a:spcPts val="0"/>
-              </a:spcAft>
-              <a:defRPr sz="1450">
-                <a:latin typeface="Consolas"/>
-              </a:defRPr>
-            </a:pPr>
-            <a:r>
-              <a:rPr sz="1450">
-                <a:solidFill>
-                  <a:srgbClr val="222222"/>
-                </a:solidFill>
-                <a:latin typeface="Consolas"/>
-              </a:rPr>
-              <a:t>const int ADDR_DEADZONE_LS_Y  =  8;</a:t>
-            </a:r>
-          </a:p>
-          <a:p>
-            <a:pPr algn="l">
-              <a:lnSpc>
-                <a:spcPct val="100000"/>
-              </a:lnSpc>
-              <a:spcAft>
-                <a:spcPts val="0"/>
-              </a:spcAft>
-              <a:defRPr sz="1450">
-                <a:latin typeface="Consolas"/>
-              </a:defRPr>
-            </a:pPr>
-            <a:r>
-              <a:rPr sz="1450">
-                <a:solidFill>
-                  <a:srgbClr val="222222"/>
-                </a:solidFill>
-                <a:latin typeface="Consolas"/>
-              </a:rPr>
-              <a:t>const int ADDR_DEADZONE_RS_X  = 12;</a:t>
-            </a:r>
-          </a:p>
-          <a:p>
-            <a:pPr algn="l">
-              <a:lnSpc>
-                <a:spcPct val="100000"/>
-              </a:lnSpc>
-              <a:spcAft>
-                <a:spcPts val="0"/>
-              </a:spcAft>
-              <a:defRPr sz="1450">
-                <a:latin typeface="Consolas"/>
-              </a:defRPr>
-            </a:pPr>
-            <a:r>
-              <a:rPr sz="1450">
-                <a:solidFill>
-                  <a:srgbClr val="222222"/>
-                </a:solidFill>
-                <a:latin typeface="Consolas"/>
-              </a:rPr>
-              <a:t>const int ADDR_DEADZONE_RS_Y  = 16;</a:t>
-            </a:r>
-          </a:p>
-          <a:p>
-            <a:pPr algn="l">
-              <a:lnSpc>
-                <a:spcPct val="100000"/>
-              </a:lnSpc>
-              <a:spcAft>
-                <a:spcPts val="0"/>
-              </a:spcAft>
-              <a:defRPr sz="1450">
-                <a:latin typeface="Consolas"/>
-              </a:defRPr>
-            </a:pPr>
-            <a:r>
-              <a:rPr sz="1450">
-                <a:solidFill>
-                  <a:srgbClr val="222222"/>
-                </a:solidFill>
-                <a:latin typeface="Consolas"/>
-              </a:rPr>
-              <a:t>const int ADDR_LS_Y_SC        = 20;   // float, 4 bytes</a:t>
-            </a:r>
-          </a:p>
-          <a:p>
-            <a:pPr algn="l">
-              <a:lnSpc>
-                <a:spcPct val="100000"/>
-              </a:lnSpc>
-              <a:spcAft>
-                <a:spcPts val="0"/>
-              </a:spcAft>
-              <a:defRPr sz="1450">
-                <a:latin typeface="Consolas"/>
-              </a:defRPr>
-            </a:pPr>
-            <a:r>
-              <a:rPr sz="1450">
-                <a:solidFill>
-                  <a:srgbClr val="222222"/>
-                </a:solidFill>
-                <a:latin typeface="Consolas"/>
-              </a:rPr>
-              <a:t>const int ADDR_LS_X_SC        = 24;</a:t>
-            </a:r>
-          </a:p>
-          <a:p>
-            <a:pPr algn="l">
-              <a:lnSpc>
-                <a:spcPct val="100000"/>
-              </a:lnSpc>
-              <a:spcAft>
-                <a:spcPts val="0"/>
-              </a:spcAft>
-              <a:defRPr sz="1450">
-                <a:latin typeface="Consolas"/>
-              </a:defRPr>
-            </a:pPr>
-            <a:r>
-              <a:rPr sz="1450">
-                <a:solidFill>
-                  <a:srgbClr val="222222"/>
-                </a:solidFill>
-                <a:latin typeface="Consolas"/>
-              </a:rPr>
-              <a:t>const int ADDR_RS_Y_SC        = 28;</a:t>
-            </a:r>
-          </a:p>
-          <a:p>
-            <a:pPr algn="l">
-              <a:lnSpc>
-                <a:spcPct val="100000"/>
-              </a:lnSpc>
-              <a:spcAft>
-                <a:spcPts val="0"/>
-              </a:spcAft>
-              <a:defRPr sz="1450">
-                <a:latin typeface="Consolas"/>
-              </a:defRPr>
-            </a:pPr>
-            <a:r>
-              <a:rPr sz="1450">
-                <a:solidFill>
-                  <a:srgbClr val="222222"/>
-                </a:solidFill>
-                <a:latin typeface="Consolas"/>
-              </a:rPr>
-              <a:t>const int ADDR_RS_X_SC        = 32;</a:t>
-            </a:r>
-          </a:p>
-          <a:p>
-            <a:pPr algn="l">
-              <a:lnSpc>
-                <a:spcPct val="100000"/>
-              </a:lnSpc>
-              <a:spcAft>
-                <a:spcPts val="0"/>
-              </a:spcAft>
-              <a:defRPr sz="1450">
-                <a:latin typeface="Consolas"/>
-              </a:defRPr>
-            </a:pPr>
-            <a:r>
-              <a:rPr sz="1450" b="1">
-                <a:solidFill>
-                  <a:srgbClr val="0E7C86"/>
-                </a:solidFill>
-                <a:latin typeface="Consolas"/>
-              </a:rPr>
-              <a:t>const int ADDR_PAIRED_VALID   = 36;   // 1 byte:  0xA5 when valid</a:t>
-            </a:r>
-          </a:p>
-          <a:p>
-            <a:pPr algn="l">
-              <a:lnSpc>
-                <a:spcPct val="100000"/>
-              </a:lnSpc>
-              <a:spcAft>
-                <a:spcPts val="0"/>
-              </a:spcAft>
-              <a:defRPr sz="1450">
-                <a:latin typeface="Consolas"/>
-              </a:defRPr>
-            </a:pPr>
-            <a:r>
-              <a:rPr sz="1450" b="1">
-                <a:solidFill>
-                  <a:srgbClr val="0E7C86"/>
-                </a:solidFill>
-                <a:latin typeface="Consolas"/>
-              </a:rPr>
-              <a:t>const int ADDR_PAIRED_ADDR    = 37;   // 6 bytes: the address</a:t>
-            </a:r>
-          </a:p>
-          <a:p>
-            <a:pPr algn="l">
-              <a:lnSpc>
-                <a:spcPct val="100000"/>
-              </a:lnSpc>
-              <a:spcAft>
-                <a:spcPts val="0"/>
-              </a:spcAft>
-              <a:defRPr sz="1450">
-                <a:latin typeface="Consolas"/>
-              </a:defRPr>
-            </a:pPr>
-            <a:r>
-              <a:rPr sz="1450">
-                <a:solidFill>
-                  <a:srgbClr val="222222"/>
-                </a:solidFill>
-                <a:latin typeface="Consolas"/>
-              </a:rPr>
-              <a:t> </a:t>
-            </a:r>
-          </a:p>
-          <a:p>
-            <a:pPr algn="l">
-              <a:lnSpc>
-                <a:spcPct val="100000"/>
-              </a:lnSpc>
-              <a:spcAft>
-                <a:spcPts val="0"/>
-              </a:spcAft>
-              <a:defRPr sz="1450">
-                <a:latin typeface="Consolas"/>
-              </a:defRPr>
-            </a:pPr>
-            <a:r>
-              <a:rPr sz="1450" b="1">
-                <a:solidFill>
-                  <a:srgbClr val="0E7C86"/>
-                </a:solidFill>
-                <a:latin typeface="Consolas"/>
-              </a:rPr>
-              <a:t>const uint8_t PAIRED_VALID_MAGIC = 0xA5;</a:t>
-            </a:r>
-          </a:p>
-        </p:txBody>
-      </p:sp>
-      <p:sp>
-        <p:nvSpPr>
-          <p:cNvPr id="8" name="TextBox 7"/>
-          <p:cNvSpPr txBox="1"/>
-          <p:nvPr/>
-        </p:nvSpPr>
-        <p:spPr>
-          <a:xfrm>
-            <a:off x="7870048" y="1517904"/>
-            <a:ext cx="3818727" cy="4745736"/>
+            <a:off x="502920" y="1755648"/>
+            <a:ext cx="5364327" cy="4507992"/>
           </a:xfrm>
           <a:prstGeom prst="rect">
             <a:avLst/>
@@ -6165,7 +5735,162 @@
                 <a:spcPct val="100000"/>
               </a:lnSpc>
               <a:spcAft>
-                <a:spcPts val="700"/>
+                <a:spcPts val="900"/>
+              </a:spcAft>
+              <a:defRPr sz="1800" b="0">
+                <a:solidFill>
+                  <a:srgbClr val="222222"/>
+                </a:solidFill>
+                <a:latin typeface="Calibri"/>
+              </a:defRPr>
+            </a:pPr>
+            <a:r>
+              <a:rPr sz="1800" b="0">
+                <a:solidFill>
+                  <a:srgbClr val="222222"/>
+                </a:solidFill>
+                <a:latin typeface="Calibri"/>
+              </a:rPr>
+              <a:t>A brand new ESP32 has flash full of 0xFF. Read an int out of that and you get -1. Read a float and you get something meaningless.</a:t>
+            </a:r>
+          </a:p>
+          <a:p>
+            <a:pPr algn="l">
+              <a:lnSpc>
+                <a:spcPct val="100000"/>
+              </a:lnSpc>
+              <a:spcAft>
+                <a:spcPts val="900"/>
+              </a:spcAft>
+              <a:defRPr sz="900" b="0">
+                <a:solidFill>
+                  <a:srgbClr val="222222"/>
+                </a:solidFill>
+                <a:latin typeface="Calibri"/>
+              </a:defRPr>
+            </a:pPr>
+          </a:p>
+          <a:p>
+            <a:pPr algn="l">
+              <a:lnSpc>
+                <a:spcPct val="100000"/>
+              </a:lnSpc>
+              <a:spcAft>
+                <a:spcPts val="900"/>
+              </a:spcAft>
+              <a:defRPr sz="1800" b="0">
+                <a:solidFill>
+                  <a:srgbClr val="222222"/>
+                </a:solidFill>
+                <a:latin typeface="Calibri"/>
+              </a:defRPr>
+            </a:pPr>
+            <a:r>
+              <a:rPr sz="1800" b="0">
+                <a:solidFill>
+                  <a:srgbClr val="222222"/>
+                </a:solidFill>
+                <a:latin typeface="Calibri"/>
+              </a:rPr>
+              <a:t>So the first byte of the block is a MARKER, written only after a successful save. If it is not 0xA5, the data is not ours and we use the compiled-in defaults.</a:t>
+            </a:r>
+          </a:p>
+          <a:p>
+            <a:pPr algn="l">
+              <a:lnSpc>
+                <a:spcPct val="100000"/>
+              </a:lnSpc>
+              <a:spcAft>
+                <a:spcPts val="900"/>
+              </a:spcAft>
+              <a:defRPr sz="900" b="0">
+                <a:solidFill>
+                  <a:srgbClr val="222222"/>
+                </a:solidFill>
+                <a:latin typeface="Calibri"/>
+              </a:defRPr>
+            </a:pPr>
+          </a:p>
+          <a:p>
+            <a:pPr algn="l">
+              <a:lnSpc>
+                <a:spcPct val="100000"/>
+              </a:lnSpc>
+              <a:spcAft>
+                <a:spcPts val="900"/>
+              </a:spcAft>
+              <a:defRPr sz="1800" b="0">
+                <a:solidFill>
+                  <a:srgbClr val="222222"/>
+                </a:solidFill>
+                <a:latin typeface="Calibri"/>
+              </a:defRPr>
+            </a:pPr>
+            <a:r>
+              <a:rPr sz="1800" b="0">
+                <a:solidFill>
+                  <a:srgbClr val="222222"/>
+                </a:solidFill>
+                <a:latin typeface="Calibri"/>
+              </a:rPr>
+              <a:t>But that is not enough on its own. Even WITH the marker, every value is range checked as it loads:</a:t>
+            </a:r>
+          </a:p>
+          <a:p>
+            <a:pPr lvl="1" algn="l">
+              <a:lnSpc>
+                <a:spcPct val="100000"/>
+              </a:lnSpc>
+              <a:spcAft>
+                <a:spcPts val="900"/>
+              </a:spcAft>
+              <a:defRPr sz="1800" b="0">
+                <a:solidFill>
+                  <a:srgbClr val="222222"/>
+                </a:solidFill>
+                <a:latin typeface="Calibri"/>
+              </a:defRPr>
+            </a:pPr>
+            <a:r>
+              <a:rPr sz="1800" b="0">
+                <a:solidFill>
+                  <a:srgbClr val="222222"/>
+                </a:solidFill>
+                <a:latin typeface="Calibri"/>
+              </a:rPr>
+              <a:t>if (saved_dz &gt;= 0 &amp;&amp; saved_dz &lt;= DEADZONE_MAX)  INPUT_DEADZONE = saved_dz;</a:t>
+            </a:r>
+          </a:p>
+        </p:txBody>
+      </p:sp>
+      <p:sp>
+        <p:nvSpPr>
+          <p:cNvPr id="8" name="TextBox 7"/>
+          <p:cNvSpPr txBox="1"/>
+          <p:nvPr/>
+        </p:nvSpPr>
+        <p:spPr>
+          <a:xfrm>
+            <a:off x="6324447" y="1755648"/>
+            <a:ext cx="5364327" cy="4507992"/>
+          </a:xfrm>
+          <a:prstGeom prst="rect">
+            <a:avLst/>
+          </a:prstGeom>
+          <a:noFill/>
+        </p:spPr>
+        <p:txBody>
+          <a:bodyPr wrap="square" lIns="0" tIns="0" rIns="0" bIns="0">
+            <a:spAutoFit/>
+          </a:bodyPr>
+          <a:lstStyle/>
+          <a:p>
+            <a:pPr algn="l">
+              <a:lnSpc>
+                <a:spcPct val="100000"/>
+              </a:lnSpc>
+              <a:spcAft>
+                <a:spcPts val="900"/>
               </a:spcAft>
               <a:defRPr sz="1900" b="0">
                 <a:solidFill>
@@ -6181,16 +5906,32 @@
                 </a:solidFill>
                 <a:latin typeface="Calibri"/>
               </a:rPr>
-              <a:t>EEPROM is a flat array of bytes. YOU choose where each value lives, and nothing stops two values overlapping.</a:t>
-            </a:r>
-          </a:p>
-          <a:p>
-            <a:pPr algn="l">
-              <a:lnSpc>
-                <a:spcPct val="100000"/>
-              </a:lnSpc>
-              <a:spcAft>
-                <a:spcPts val="700"/>
+              <a:t>Why? Because a value saved by an OLDER version of the program is perfectly valid data and still wrong for this one. The marker tells you the bytes are yours. It does not tell you they still make sense.</a:t>
+            </a:r>
+          </a:p>
+          <a:p>
+            <a:pPr algn="l">
+              <a:lnSpc>
+                <a:spcPct val="100000"/>
+              </a:lnSpc>
+              <a:spcAft>
+                <a:spcPts val="900"/>
+              </a:spcAft>
+              <a:defRPr sz="950" b="0">
+                <a:solidFill>
+                  <a:srgbClr val="222222"/>
+                </a:solidFill>
+                <a:latin typeface="Calibri"/>
+              </a:defRPr>
+            </a:pPr>
+          </a:p>
+          <a:p>
+            <a:pPr algn="l">
+              <a:lnSpc>
+                <a:spcPct val="100000"/>
+              </a:lnSpc>
+              <a:spcAft>
+                <a:spcPts val="900"/>
               </a:spcAft>
               <a:defRPr sz="1900" b="0">
                 <a:solidFill>
@@ -6206,57 +5947,7 @@
                 </a:solidFill>
                 <a:latin typeface="Calibri"/>
               </a:rPr>
-              <a:t>An int is 4 bytes and a float is 4 bytes on this chip, so each slot gets 4.</a:t>
-            </a:r>
-          </a:p>
-          <a:p>
-            <a:pPr algn="l">
-              <a:lnSpc>
-                <a:spcPct val="100000"/>
-              </a:lnSpc>
-              <a:spcAft>
-                <a:spcPts val="700"/>
-              </a:spcAft>
-              <a:defRPr sz="1900" b="0">
-                <a:solidFill>
-                  <a:srgbClr val="222222"/>
-                </a:solidFill>
-                <a:latin typeface="Calibri"/>
-              </a:defRPr>
-            </a:pPr>
-            <a:r>
-              <a:rPr sz="1900" b="0">
-                <a:solidFill>
-                  <a:srgbClr val="222222"/>
-                </a:solidFill>
-                <a:latin typeface="Calibri"/>
-              </a:rPr>
-              <a:t>Laying them out as one ADDR_ constant per value, in one place, is what makes an overlap visible when you read the file.</a:t>
-            </a:r>
-          </a:p>
-          <a:p>
-            <a:pPr algn="l">
-              <a:lnSpc>
-                <a:spcPct val="100000"/>
-              </a:lnSpc>
-              <a:spcAft>
-                <a:spcPts val="700"/>
-              </a:spcAft>
-              <a:defRPr sz="1900" b="0">
-                <a:solidFill>
-                  <a:srgbClr val="222222"/>
-                </a:solidFill>
-                <a:latin typeface="Calibri"/>
-              </a:defRPr>
-            </a:pPr>
-            <a:r>
-              <a:rPr sz="1900" b="0">
-                <a:solidFill>
-                  <a:srgbClr val="222222"/>
-                </a:solidFill>
-                <a:latin typeface="Calibri"/>
-              </a:rPr>
-              <a:t>Get this wrong and one setting silently corrupts another. It will look like a hardware fault.</a:t>
+              <a:t>Defensive loading is not paranoia. It is the difference between a vehicle that boots with odd settings and one that will not boot.</a:t>
             </a:r>
           </a:p>
         </p:txBody>
@@ -6320,7 +6011,7 @@
                 </a:solidFill>
                 <a:latin typeface="Calibri"/>
               </a:rPr>
-              <a:t>The magic byte, and never trusting storage</a:t>
+              <a:t>Where we are</a:t>
             </a:r>
           </a:p>
         </p:txBody>
@@ -6461,502 +6152,6 @@
                 <a:latin typeface="Calibri"/>
               </a:rPr>
               <a:t>10</a:t>
-            </a:r>
-          </a:p>
-        </p:txBody>
-      </p:sp>
-      <p:sp>
-        <p:nvSpPr>
-          <p:cNvPr id="6" name="TextBox 5"/>
-          <p:cNvSpPr txBox="1"/>
-          <p:nvPr/>
-        </p:nvSpPr>
-        <p:spPr>
-          <a:xfrm>
-            <a:off x="502920" y="1188720"/>
-            <a:ext cx="11185855" cy="530352"/>
-          </a:xfrm>
-          <a:prstGeom prst="rect">
-            <a:avLst/>
-          </a:prstGeom>
-          <a:noFill/>
-        </p:spPr>
-        <p:txBody>
-          <a:bodyPr wrap="square" lIns="0" tIns="0" rIns="0" bIns="0">
-            <a:spAutoFit/>
-          </a:bodyPr>
-          <a:lstStyle/>
-          <a:p>
-            <a:pPr algn="l">
-              <a:lnSpc>
-                <a:spcPct val="100000"/>
-              </a:lnSpc>
-              <a:spcAft>
-                <a:spcPts val="600"/>
-              </a:spcAft>
-              <a:defRPr sz="1900" b="1">
-                <a:solidFill>
-                  <a:srgbClr val="0E7C86"/>
-                </a:solidFill>
-                <a:latin typeface="Calibri"/>
-              </a:defRPr>
-            </a:pPr>
-            <a:r>
-              <a:rPr sz="1900" b="1">
-                <a:solidFill>
-                  <a:srgbClr val="0E7C86"/>
-                </a:solidFill>
-                <a:latin typeface="Calibri"/>
-              </a:rPr>
-              <a:t>Two separate checks, for two separate problems</a:t>
-            </a:r>
-          </a:p>
-        </p:txBody>
-      </p:sp>
-      <p:sp>
-        <p:nvSpPr>
-          <p:cNvPr id="7" name="TextBox 6"/>
-          <p:cNvSpPr txBox="1"/>
-          <p:nvPr/>
-        </p:nvSpPr>
-        <p:spPr>
-          <a:xfrm>
-            <a:off x="502920" y="1755648"/>
-            <a:ext cx="5364327" cy="4507992"/>
-          </a:xfrm>
-          <a:prstGeom prst="rect">
-            <a:avLst/>
-          </a:prstGeom>
-          <a:noFill/>
-        </p:spPr>
-        <p:txBody>
-          <a:bodyPr wrap="square" lIns="0" tIns="0" rIns="0" bIns="0">
-            <a:spAutoFit/>
-          </a:bodyPr>
-          <a:lstStyle/>
-          <a:p>
-            <a:pPr algn="l">
-              <a:lnSpc>
-                <a:spcPct val="100000"/>
-              </a:lnSpc>
-              <a:spcAft>
-                <a:spcPts val="900"/>
-              </a:spcAft>
-              <a:defRPr sz="1800" b="0">
-                <a:solidFill>
-                  <a:srgbClr val="222222"/>
-                </a:solidFill>
-                <a:latin typeface="Calibri"/>
-              </a:defRPr>
-            </a:pPr>
-            <a:r>
-              <a:rPr sz="1800" b="0">
-                <a:solidFill>
-                  <a:srgbClr val="222222"/>
-                </a:solidFill>
-                <a:latin typeface="Calibri"/>
-              </a:rPr>
-              <a:t>A brand new ESP32 has flash full of 0xFF. Read an int out of that and you get -1. Read a float and you get something meaningless.</a:t>
-            </a:r>
-          </a:p>
-          <a:p>
-            <a:pPr algn="l">
-              <a:lnSpc>
-                <a:spcPct val="100000"/>
-              </a:lnSpc>
-              <a:spcAft>
-                <a:spcPts val="900"/>
-              </a:spcAft>
-              <a:defRPr sz="900" b="0">
-                <a:solidFill>
-                  <a:srgbClr val="222222"/>
-                </a:solidFill>
-                <a:latin typeface="Calibri"/>
-              </a:defRPr>
-            </a:pPr>
-          </a:p>
-          <a:p>
-            <a:pPr algn="l">
-              <a:lnSpc>
-                <a:spcPct val="100000"/>
-              </a:lnSpc>
-              <a:spcAft>
-                <a:spcPts val="900"/>
-              </a:spcAft>
-              <a:defRPr sz="1800" b="0">
-                <a:solidFill>
-                  <a:srgbClr val="222222"/>
-                </a:solidFill>
-                <a:latin typeface="Calibri"/>
-              </a:defRPr>
-            </a:pPr>
-            <a:r>
-              <a:rPr sz="1800" b="0">
-                <a:solidFill>
-                  <a:srgbClr val="222222"/>
-                </a:solidFill>
-                <a:latin typeface="Calibri"/>
-              </a:rPr>
-              <a:t>So the first byte of the block is a MARKER, written only after a successful save. If it is not 0xA5, the data is not ours and we use the compiled-in defaults.</a:t>
-            </a:r>
-          </a:p>
-          <a:p>
-            <a:pPr algn="l">
-              <a:lnSpc>
-                <a:spcPct val="100000"/>
-              </a:lnSpc>
-              <a:spcAft>
-                <a:spcPts val="900"/>
-              </a:spcAft>
-              <a:defRPr sz="900" b="0">
-                <a:solidFill>
-                  <a:srgbClr val="222222"/>
-                </a:solidFill>
-                <a:latin typeface="Calibri"/>
-              </a:defRPr>
-            </a:pPr>
-          </a:p>
-          <a:p>
-            <a:pPr algn="l">
-              <a:lnSpc>
-                <a:spcPct val="100000"/>
-              </a:lnSpc>
-              <a:spcAft>
-                <a:spcPts val="900"/>
-              </a:spcAft>
-              <a:defRPr sz="1800" b="0">
-                <a:solidFill>
-                  <a:srgbClr val="222222"/>
-                </a:solidFill>
-                <a:latin typeface="Calibri"/>
-              </a:defRPr>
-            </a:pPr>
-            <a:r>
-              <a:rPr sz="1800" b="0">
-                <a:solidFill>
-                  <a:srgbClr val="222222"/>
-                </a:solidFill>
-                <a:latin typeface="Calibri"/>
-              </a:rPr>
-              <a:t>But that is not enough on its own. Even WITH the marker, every value is range checked as it loads:</a:t>
-            </a:r>
-          </a:p>
-          <a:p>
-            <a:pPr lvl="1" algn="l">
-              <a:lnSpc>
-                <a:spcPct val="100000"/>
-              </a:lnSpc>
-              <a:spcAft>
-                <a:spcPts val="900"/>
-              </a:spcAft>
-              <a:defRPr sz="1800" b="0">
-                <a:solidFill>
-                  <a:srgbClr val="222222"/>
-                </a:solidFill>
-                <a:latin typeface="Calibri"/>
-              </a:defRPr>
-            </a:pPr>
-            <a:r>
-              <a:rPr sz="1800" b="0">
-                <a:solidFill>
-                  <a:srgbClr val="222222"/>
-                </a:solidFill>
-                <a:latin typeface="Calibri"/>
-              </a:rPr>
-              <a:t>if (saved_dz &gt;= 0 &amp;&amp; saved_dz &lt;= DEADZONE_MAX)  INPUT_DEADZONE = saved_dz;</a:t>
-            </a:r>
-          </a:p>
-        </p:txBody>
-      </p:sp>
-      <p:sp>
-        <p:nvSpPr>
-          <p:cNvPr id="8" name="TextBox 7"/>
-          <p:cNvSpPr txBox="1"/>
-          <p:nvPr/>
-        </p:nvSpPr>
-        <p:spPr>
-          <a:xfrm>
-            <a:off x="6324447" y="1755648"/>
-            <a:ext cx="5364327" cy="4507992"/>
-          </a:xfrm>
-          <a:prstGeom prst="rect">
-            <a:avLst/>
-          </a:prstGeom>
-          <a:noFill/>
-        </p:spPr>
-        <p:txBody>
-          <a:bodyPr wrap="square" lIns="0" tIns="0" rIns="0" bIns="0">
-            <a:spAutoFit/>
-          </a:bodyPr>
-          <a:lstStyle/>
-          <a:p>
-            <a:pPr algn="l">
-              <a:lnSpc>
-                <a:spcPct val="100000"/>
-              </a:lnSpc>
-              <a:spcAft>
-                <a:spcPts val="900"/>
-              </a:spcAft>
-              <a:defRPr sz="1900" b="0">
-                <a:solidFill>
-                  <a:srgbClr val="222222"/>
-                </a:solidFill>
-                <a:latin typeface="Calibri"/>
-              </a:defRPr>
-            </a:pPr>
-            <a:r>
-              <a:rPr sz="1900" b="0">
-                <a:solidFill>
-                  <a:srgbClr val="222222"/>
-                </a:solidFill>
-                <a:latin typeface="Calibri"/>
-              </a:rPr>
-              <a:t>Why? Because a value saved by an OLDER version of the program is perfectly valid data and still wrong for this one. The marker tells you the bytes are yours. It does not tell you they still make sense.</a:t>
-            </a:r>
-          </a:p>
-          <a:p>
-            <a:pPr algn="l">
-              <a:lnSpc>
-                <a:spcPct val="100000"/>
-              </a:lnSpc>
-              <a:spcAft>
-                <a:spcPts val="900"/>
-              </a:spcAft>
-              <a:defRPr sz="950" b="0">
-                <a:solidFill>
-                  <a:srgbClr val="222222"/>
-                </a:solidFill>
-                <a:latin typeface="Calibri"/>
-              </a:defRPr>
-            </a:pPr>
-          </a:p>
-          <a:p>
-            <a:pPr algn="l">
-              <a:lnSpc>
-                <a:spcPct val="100000"/>
-              </a:lnSpc>
-              <a:spcAft>
-                <a:spcPts val="900"/>
-              </a:spcAft>
-              <a:defRPr sz="1900" b="0">
-                <a:solidFill>
-                  <a:srgbClr val="222222"/>
-                </a:solidFill>
-                <a:latin typeface="Calibri"/>
-              </a:defRPr>
-            </a:pPr>
-            <a:r>
-              <a:rPr sz="1900" b="0">
-                <a:solidFill>
-                  <a:srgbClr val="222222"/>
-                </a:solidFill>
-                <a:latin typeface="Calibri"/>
-              </a:rPr>
-              <a:t>Defensive loading is not paranoia. It is the difference between a vehicle that boots with odd settings and one that will not boot.</a:t>
-            </a:r>
-          </a:p>
-        </p:txBody>
-      </p:sp>
-    </p:spTree>
-  </p:cSld>
-  <p:clrMapOvr>
-    <a:masterClrMapping/>
-  </p:clrMapOvr>
-</p:sld>
-</file>
-
-<file path=ppt/slides/slide12.xml><?xml version="1.0" encoding="utf-8"?>
-<p:sld xmlns:a="http://schemas.openxmlformats.org/drawingml/2006/main" xmlns:p="http://schemas.openxmlformats.org/presentationml/2006/main" xmlns:r="http://schemas.openxmlformats.org/officeDocument/2006/relationships">
-  <p:cSld>
-    <p:spTree>
-      <p:nvGrpSpPr>
-        <p:cNvPr id="1" name=""/>
-        <p:cNvGrpSpPr/>
-        <p:nvPr/>
-      </p:nvGrpSpPr>
-      <p:grpSpPr/>
-      <p:sp>
-        <p:nvSpPr>
-          <p:cNvPr id="2" name="Title 1"/>
-          <p:cNvSpPr>
-            <a:spLocks noGrp="1"/>
-          </p:cNvSpPr>
-          <p:nvPr>
-            <p:ph type="title"/>
-          </p:nvPr>
-        </p:nvSpPr>
-        <p:spPr>
-          <a:xfrm>
-            <a:off x="502920" y="274320"/>
-            <a:ext cx="11185855" cy="777240"/>
-          </a:xfrm>
-        </p:spPr>
-        <p:txBody>
-          <a:bodyPr wrap="square" anchor="b"/>
-          <a:lstStyle/>
-          <a:p>
-            <a:pPr algn="l">
-              <a:lnSpc>
-                <a:spcPct val="100000"/>
-              </a:lnSpc>
-              <a:spcAft>
-                <a:spcPts val="0"/>
-              </a:spcAft>
-              <a:defRPr sz="2800" b="1">
-                <a:solidFill>
-                  <a:srgbClr val="1F3A5F"/>
-                </a:solidFill>
-                <a:latin typeface="Calibri"/>
-              </a:defRPr>
-            </a:pPr>
-            <a:r>
-              <a:rPr sz="2800" b="1">
-                <a:solidFill>
-                  <a:srgbClr val="1F3A5F"/>
-                </a:solidFill>
-                <a:latin typeface="Calibri"/>
-              </a:rPr>
-              <a:t>Where we are</a:t>
-            </a:r>
-          </a:p>
-        </p:txBody>
-      </p:sp>
-      <p:sp>
-        <p:nvSpPr>
-          <p:cNvPr id="3" name="Rectangle 2"/>
-          <p:cNvSpPr/>
-          <p:nvPr/>
-        </p:nvSpPr>
-        <p:spPr>
-          <a:xfrm>
-            <a:off x="502920" y="1097280"/>
-            <a:ext cx="11185855" cy="19050"/>
-          </a:xfrm>
-          <a:prstGeom prst="rect">
-            <a:avLst/>
-          </a:prstGeom>
-          <a:solidFill>
-            <a:srgbClr val="C8D2DE"/>
-          </a:solidFill>
-          <a:ln>
-            <a:noFill/>
-          </a:ln>
-          <a:effectLst/>
-        </p:spPr>
-        <p:style>
-          <a:lnRef idx="1">
-            <a:schemeClr val="accent1"/>
-          </a:lnRef>
-          <a:fillRef idx="3">
-            <a:schemeClr val="accent1"/>
-          </a:fillRef>
-          <a:effectRef idx="2">
-            <a:schemeClr val="accent1"/>
-          </a:effectRef>
-          <a:fontRef idx="minor">
-            <a:schemeClr val="lt1"/>
-          </a:fontRef>
-        </p:style>
-        <p:txBody>
-          <a:bodyPr rtlCol="0" anchor="ctr"/>
-          <a:lstStyle/>
-          <a:p>
-            <a:pPr algn="ctr"/>
-          </a:p>
-        </p:txBody>
-      </p:sp>
-      <p:sp>
-        <p:nvSpPr>
-          <p:cNvPr id="4" name="TextBox 3"/>
-          <p:cNvSpPr txBox="1"/>
-          <p:nvPr/>
-        </p:nvSpPr>
-        <p:spPr>
-          <a:xfrm>
-            <a:off x="502920" y="6382512"/>
-            <a:ext cx="10545775" cy="274320"/>
-          </a:xfrm>
-          <a:prstGeom prst="rect">
-            <a:avLst/>
-          </a:prstGeom>
-          <a:noFill/>
-        </p:spPr>
-        <p:txBody>
-          <a:bodyPr wrap="square" lIns="0" tIns="0">
-            <a:spAutoFit/>
-          </a:bodyPr>
-          <a:lstStyle/>
-          <a:p>
-            <a:pPr algn="l">
-              <a:lnSpc>
-                <a:spcPct val="100000"/>
-              </a:lnSpc>
-              <a:spcAft>
-                <a:spcPts val="0"/>
-              </a:spcAft>
-              <a:defRPr sz="1000" b="0">
-                <a:solidFill>
-                  <a:srgbClr val="666666"/>
-                </a:solidFill>
-                <a:latin typeface="Calibri"/>
-              </a:defRPr>
-            </a:pPr>
-            <a:r>
-              <a:rPr sz="1000" b="0">
-                <a:solidFill>
-                  <a:srgbClr val="666666"/>
-                </a:solidFill>
-                <a:latin typeface="Calibri"/>
-              </a:rPr>
-              <a:t>Pathfinder Advanced - Op Program 12  |  Lesson 3</a:t>
-            </a:r>
-          </a:p>
-        </p:txBody>
-      </p:sp>
-      <p:sp>
-        <p:nvSpPr>
-          <p:cNvPr id="5" name="TextBox 4"/>
-          <p:cNvSpPr txBox="1"/>
-          <p:nvPr/>
-        </p:nvSpPr>
-        <p:spPr>
-          <a:xfrm>
-            <a:off x="11231575" y="6382512"/>
-            <a:ext cx="457200" cy="274320"/>
-          </a:xfrm>
-          <a:prstGeom prst="rect">
-            <a:avLst/>
-          </a:prstGeom>
-          <a:noFill/>
-        </p:spPr>
-        <p:txBody>
-          <a:bodyPr wrap="square" lIns="0" tIns="0">
-            <a:spAutoFit/>
-          </a:bodyPr>
-          <a:lstStyle/>
-          <a:p>
-            <a:pPr algn="r">
-              <a:lnSpc>
-                <a:spcPct val="100000"/>
-              </a:lnSpc>
-              <a:spcAft>
-                <a:spcPts val="0"/>
-              </a:spcAft>
-              <a:defRPr sz="1000" b="0">
-                <a:solidFill>
-                  <a:srgbClr val="666666"/>
-                </a:solidFill>
-                <a:latin typeface="Calibri"/>
-              </a:defRPr>
-            </a:pPr>
-            <a:r>
-              <a:rPr sz="1000" b="0">
-                <a:solidFill>
-                  <a:srgbClr val="666666"/>
-                </a:solidFill>
-                <a:latin typeface="Calibri"/>
-              </a:rPr>
-              <a:t>11</a:t>
             </a:r>
           </a:p>
         </p:txBody>
@@ -7323,7 +6518,7 @@
 </p:sld>
 </file>
 
-<file path=ppt/slides/slide13.xml><?xml version="1.0" encoding="utf-8"?>
+<file path=ppt/slides/slide12.xml><?xml version="1.0" encoding="utf-8"?>
 <p:sld xmlns:a="http://schemas.openxmlformats.org/drawingml/2006/main" xmlns:p="http://schemas.openxmlformats.org/presentationml/2006/main" xmlns:r="http://schemas.openxmlformats.org/officeDocument/2006/relationships">
   <p:cSld>
     <p:spTree>
@@ -7514,7 +6709,7 @@
                 </a:solidFill>
                 <a:latin typeface="Calibri"/>
               </a:rPr>
-              <a:t>12</a:t>
+              <a:t>11</a:t>
             </a:r>
           </a:p>
         </p:txBody>
@@ -7990,7 +7185,7 @@
 </p:sld>
 </file>
 
-<file path=ppt/slides/slide14.xml><?xml version="1.0" encoding="utf-8"?>
+<file path=ppt/slides/slide13.xml><?xml version="1.0" encoding="utf-8"?>
 <p:sld xmlns:a="http://schemas.openxmlformats.org/drawingml/2006/main" xmlns:p="http://schemas.openxmlformats.org/presentationml/2006/main" xmlns:r="http://schemas.openxmlformats.org/officeDocument/2006/relationships">
   <p:cSld>
     <p:spTree>
@@ -8181,7 +7376,7 @@
                 </a:solidFill>
                 <a:latin typeface="Calibri"/>
               </a:rPr>
-              <a:t>13</a:t>
+              <a:t>12</a:t>
             </a:r>
           </a:p>
         </p:txBody>
@@ -8675,7 +7870,7 @@
 </p:sld>
 </file>
 
-<file path=ppt/slides/slide15.xml><?xml version="1.0" encoding="utf-8"?>
+<file path=ppt/slides/slide14.xml><?xml version="1.0" encoding="utf-8"?>
 <p:sld xmlns:a="http://schemas.openxmlformats.org/drawingml/2006/main" xmlns:p="http://schemas.openxmlformats.org/presentationml/2006/main" xmlns:r="http://schemas.openxmlformats.org/officeDocument/2006/relationships">
   <p:cSld>
     <p:spTree>
@@ -8866,7 +8061,7 @@
                 </a:solidFill>
                 <a:latin typeface="Calibri"/>
               </a:rPr>
-              <a:t>14</a:t>
+              <a:t>13</a:t>
             </a:r>
           </a:p>
         </p:txBody>
@@ -9491,7 +8686,7 @@
 </p:sld>
 </file>
 
-<file path=ppt/slides/slide16.xml><?xml version="1.0" encoding="utf-8"?>
+<file path=ppt/slides/slide15.xml><?xml version="1.0" encoding="utf-8"?>
 <p:sld xmlns:a="http://schemas.openxmlformats.org/drawingml/2006/main" xmlns:p="http://schemas.openxmlformats.org/presentationml/2006/main" xmlns:r="http://schemas.openxmlformats.org/officeDocument/2006/relationships">
   <p:cSld>
     <p:spTree>
@@ -9682,7 +8877,7 @@
                 </a:solidFill>
                 <a:latin typeface="Calibri"/>
               </a:rPr>
-              <a:t>15</a:t>
+              <a:t>14</a:t>
             </a:r>
           </a:p>
         </p:txBody>
@@ -10037,7 +9232,7 @@
 </p:sld>
 </file>
 
-<file path=ppt/slides/slide17.xml><?xml version="1.0" encoding="utf-8"?>
+<file path=ppt/slides/slide16.xml><?xml version="1.0" encoding="utf-8"?>
 <p:sld xmlns:a="http://schemas.openxmlformats.org/drawingml/2006/main" xmlns:p="http://schemas.openxmlformats.org/presentationml/2006/main" xmlns:r="http://schemas.openxmlformats.org/officeDocument/2006/relationships">
   <p:cSld>
     <p:spTree>
@@ -10228,7 +9423,7 @@
                 </a:solidFill>
                 <a:latin typeface="Calibri"/>
               </a:rPr>
-              <a:t>16</a:t>
+              <a:t>15</a:t>
             </a:r>
           </a:p>
         </p:txBody>
@@ -12360,7 +11555,7 @@
         <p:spPr>
           <a:xfrm>
             <a:off x="502920" y="1755648"/>
-            <a:ext cx="11185855" cy="4507992"/>
+            <a:ext cx="5364327" cy="3419856"/>
           </a:xfrm>
           <a:prstGeom prst="rect">
             <a:avLst/>
@@ -12380,15 +11575,15 @@
               <a:spcAft>
                 <a:spcPts val="900"/>
               </a:spcAft>
-              <a:defRPr sz="2800" b="0">
-                <a:solidFill>
-                  <a:srgbClr val="222222"/>
-                </a:solidFill>
-                <a:latin typeface="Calibri"/>
-              </a:defRPr>
-            </a:pPr>
-            <a:r>
-              <a:rPr sz="2800" b="0">
+              <a:defRPr sz="1900" b="0">
+                <a:solidFill>
+                  <a:srgbClr val="222222"/>
+                </a:solidFill>
+                <a:latin typeface="Calibri"/>
+              </a:defRPr>
+            </a:pPr>
+            <a:r>
+              <a:rPr sz="1900" b="0">
                 <a:solidFill>
                   <a:srgbClr val="222222"/>
                 </a:solidFill>
@@ -12405,37 +11600,46 @@
               <a:spcAft>
                 <a:spcPts val="900"/>
               </a:spcAft>
-              <a:defRPr sz="1400" b="0">
-                <a:solidFill>
-                  <a:srgbClr val="222222"/>
-                </a:solidFill>
-                <a:latin typeface="Calibri"/>
-              </a:defRPr>
-            </a:pPr>
-          </a:p>
-          <a:p>
-            <a:pPr algn="l">
+              <a:defRPr sz="1900" b="0">
+                <a:solidFill>
+                  <a:srgbClr val="222222"/>
+                </a:solidFill>
+                <a:latin typeface="Calibri"/>
+              </a:defRPr>
+            </a:pPr>
+            <a:r>
+              <a:rPr sz="1900" b="0">
+                <a:solidFill>
+                  <a:srgbClr val="222222"/>
+                </a:solidFill>
+                <a:latin typeface="Calibri"/>
+              </a:rPr>
+              <a:t>The allowlist is a guest list checked BEFORE a connection is accepted:</a:t>
+            </a:r>
+          </a:p>
+          <a:p>
+            <a:pPr lvl="1" algn="l">
               <a:lnSpc>
                 <a:spcPct val="100000"/>
               </a:lnSpc>
               <a:spcAft>
                 <a:spcPts val="900"/>
               </a:spcAft>
-              <a:defRPr sz="2800" b="0">
-                <a:solidFill>
-                  <a:srgbClr val="222222"/>
-                </a:solidFill>
-                <a:latin typeface="Calibri"/>
-              </a:defRPr>
-            </a:pPr>
-            <a:r>
-              <a:rPr sz="2800" b="0">
-                <a:solidFill>
-                  <a:srgbClr val="222222"/>
-                </a:solidFill>
-                <a:latin typeface="Calibri"/>
-              </a:rPr>
-              <a:t>The allowlist is a guest list checked BEFORE a connection is accepted:</a:t>
+              <a:defRPr sz="1900" b="0">
+                <a:solidFill>
+                  <a:srgbClr val="222222"/>
+                </a:solidFill>
+                <a:latin typeface="Calibri"/>
+              </a:defRPr>
+            </a:pPr>
+            <a:r>
+              <a:rPr sz="1900" b="0">
+                <a:solidFill>
+                  <a:srgbClr val="222222"/>
+                </a:solidFill>
+                <a:latin typeface="Calibri"/>
+              </a:rPr>
+              <a:t>uni_bt_allowlist_remove_all();</a:t>
             </a:r>
           </a:p>
           <a:p>
@@ -12446,21 +11650,21 @@
               <a:spcAft>
                 <a:spcPts val="900"/>
               </a:spcAft>
-              <a:defRPr sz="2800" b="0">
-                <a:solidFill>
-                  <a:srgbClr val="222222"/>
-                </a:solidFill>
-                <a:latin typeface="Calibri"/>
-              </a:defRPr>
-            </a:pPr>
-            <a:r>
-              <a:rPr sz="2800" b="0">
-                <a:solidFill>
-                  <a:srgbClr val="222222"/>
-                </a:solidFill>
-                <a:latin typeface="Calibri"/>
-              </a:rPr>
-              <a:t>uni_bt_allowlist_remove_all();</a:t>
+              <a:defRPr sz="1900" b="0">
+                <a:solidFill>
+                  <a:srgbClr val="222222"/>
+                </a:solidFill>
+                <a:latin typeface="Calibri"/>
+              </a:defRPr>
+            </a:pPr>
+            <a:r>
+              <a:rPr sz="1900" b="0">
+                <a:solidFill>
+                  <a:srgbClr val="222222"/>
+                </a:solidFill>
+                <a:latin typeface="Calibri"/>
+              </a:rPr>
+              <a:t>uni_bt_allowlist_add_addr(address);</a:t>
             </a:r>
           </a:p>
           <a:p>
@@ -12471,40 +11675,15 @@
               <a:spcAft>
                 <a:spcPts val="900"/>
               </a:spcAft>
-              <a:defRPr sz="2800" b="0">
-                <a:solidFill>
-                  <a:srgbClr val="222222"/>
-                </a:solidFill>
-                <a:latin typeface="Calibri"/>
-              </a:defRPr>
-            </a:pPr>
-            <a:r>
-              <a:rPr sz="2800" b="0">
-                <a:solidFill>
-                  <a:srgbClr val="222222"/>
-                </a:solidFill>
-                <a:latin typeface="Calibri"/>
-              </a:rPr>
-              <a:t>uni_bt_allowlist_add_addr(address);</a:t>
-            </a:r>
-          </a:p>
-          <a:p>
-            <a:pPr lvl="1" algn="l">
-              <a:lnSpc>
-                <a:spcPct val="100000"/>
-              </a:lnSpc>
-              <a:spcAft>
-                <a:spcPts val="900"/>
-              </a:spcAft>
-              <a:defRPr sz="2800" b="0">
-                <a:solidFill>
-                  <a:srgbClr val="222222"/>
-                </a:solidFill>
-                <a:latin typeface="Calibri"/>
-              </a:defRPr>
-            </a:pPr>
-            <a:r>
-              <a:rPr sz="2800" b="0">
+              <a:defRPr sz="1900" b="0">
+                <a:solidFill>
+                  <a:srgbClr val="222222"/>
+                </a:solidFill>
+                <a:latin typeface="Calibri"/>
+              </a:defRPr>
+            </a:pPr>
+            <a:r>
+              <a:rPr sz="1900" b="0">
                 <a:solidFill>
                   <a:srgbClr val="222222"/>
                 </a:solidFill>
@@ -12515,124 +11694,16 @@
           </a:p>
         </p:txBody>
       </p:sp>
-    </p:spTree>
-  </p:cSld>
-  <p:clrMapOvr>
-    <a:masterClrMapping/>
-  </p:clrMapOvr>
-</p:sld>
-</file>
-
-<file path=ppt/slides/slide6.xml><?xml version="1.0" encoding="utf-8"?>
-<p:sld xmlns:a="http://schemas.openxmlformats.org/drawingml/2006/main" xmlns:p="http://schemas.openxmlformats.org/presentationml/2006/main" xmlns:r="http://schemas.openxmlformats.org/officeDocument/2006/relationships">
-  <p:cSld>
-    <p:spTree>
-      <p:nvGrpSpPr>
-        <p:cNvPr id="1" name=""/>
-        <p:cNvGrpSpPr/>
-        <p:nvPr/>
-      </p:nvGrpSpPr>
-      <p:grpSpPr/>
-      <p:sp>
-        <p:nvSpPr>
-          <p:cNvPr id="2" name="Title 1"/>
-          <p:cNvSpPr>
-            <a:spLocks noGrp="1"/>
-          </p:cNvSpPr>
-          <p:nvPr>
-            <p:ph type="title"/>
-          </p:nvPr>
+      <p:sp>
+        <p:nvSpPr>
+          <p:cNvPr id="8" name="TextBox 7"/>
+          <p:cNvSpPr txBox="1"/>
+          <p:nvPr/>
         </p:nvSpPr>
         <p:spPr>
           <a:xfrm>
-            <a:off x="502920" y="274320"/>
-            <a:ext cx="11185855" cy="777240"/>
-          </a:xfrm>
-        </p:spPr>
-        <p:txBody>
-          <a:bodyPr wrap="square" anchor="b"/>
-          <a:lstStyle/>
-          <a:p>
-            <a:pPr algn="l">
-              <a:lnSpc>
-                <a:spcPct val="100000"/>
-              </a:lnSpc>
-              <a:spcAft>
-                <a:spcPts val="0"/>
-              </a:spcAft>
-              <a:defRPr sz="2800" b="1">
-                <a:solidFill>
-                  <a:srgbClr val="1F3A5F"/>
-                </a:solidFill>
-                <a:latin typeface="Calibri"/>
-              </a:defRPr>
-            </a:pPr>
-            <a:r>
-              <a:rPr sz="2800" b="1">
-                <a:solidFill>
-                  <a:srgbClr val="1F3A5F"/>
-                </a:solidFill>
-                <a:latin typeface="Calibri"/>
-              </a:rPr>
-              <a:t>The allowlist, and the two ways to get it wrong  (continued)</a:t>
-            </a:r>
-          </a:p>
-        </p:txBody>
-      </p:sp>
-      <p:sp>
-        <p:nvSpPr>
-          <p:cNvPr id="3" name="Rectangle 2"/>
-          <p:cNvSpPr/>
-          <p:nvPr/>
-        </p:nvSpPr>
-        <p:spPr>
-          <a:xfrm>
-            <a:off x="502920" y="1097280"/>
-            <a:ext cx="11185855" cy="19050"/>
-          </a:xfrm>
-          <a:prstGeom prst="rect">
-            <a:avLst/>
-          </a:prstGeom>
-          <a:solidFill>
-            <a:srgbClr val="C8D2DE"/>
-          </a:solidFill>
-          <a:ln>
-            <a:noFill/>
-          </a:ln>
-          <a:effectLst/>
-        </p:spPr>
-        <p:style>
-          <a:lnRef idx="1">
-            <a:schemeClr val="accent1"/>
-          </a:lnRef>
-          <a:fillRef idx="3">
-            <a:schemeClr val="accent1"/>
-          </a:fillRef>
-          <a:effectRef idx="2">
-            <a:schemeClr val="accent1"/>
-          </a:effectRef>
-          <a:fontRef idx="minor">
-            <a:schemeClr val="lt1"/>
-          </a:fontRef>
-        </p:style>
-        <p:txBody>
-          <a:bodyPr rtlCol="0" anchor="ctr"/>
-          <a:lstStyle/>
-          <a:p>
-            <a:pPr algn="ctr"/>
-          </a:p>
-        </p:txBody>
-      </p:sp>
-      <p:sp>
-        <p:nvSpPr>
-          <p:cNvPr id="4" name="TextBox 3"/>
-          <p:cNvSpPr txBox="1"/>
-          <p:nvPr/>
-        </p:nvSpPr>
-        <p:spPr>
-          <a:xfrm>
-            <a:off x="502920" y="6382512"/>
-            <a:ext cx="10545775" cy="274320"/>
+            <a:off x="6324447" y="1755648"/>
+            <a:ext cx="5364327" cy="3419856"/>
           </a:xfrm>
           <a:prstGeom prst="rect">
             <a:avLst/>
@@ -12640,102 +11711,6 @@
           <a:noFill/>
         </p:spPr>
         <p:txBody>
-          <a:bodyPr wrap="square" lIns="0" tIns="0">
-            <a:spAutoFit/>
-          </a:bodyPr>
-          <a:lstStyle/>
-          <a:p>
-            <a:pPr algn="l">
-              <a:lnSpc>
-                <a:spcPct val="100000"/>
-              </a:lnSpc>
-              <a:spcAft>
-                <a:spcPts val="0"/>
-              </a:spcAft>
-              <a:defRPr sz="1000" b="0">
-                <a:solidFill>
-                  <a:srgbClr val="666666"/>
-                </a:solidFill>
-                <a:latin typeface="Calibri"/>
-              </a:defRPr>
-            </a:pPr>
-            <a:r>
-              <a:rPr sz="1000" b="0">
-                <a:solidFill>
-                  <a:srgbClr val="666666"/>
-                </a:solidFill>
-                <a:latin typeface="Calibri"/>
-              </a:rPr>
-              <a:t>Pathfinder Advanced - Op Program 12  |  Lesson 3</a:t>
-            </a:r>
-          </a:p>
-        </p:txBody>
-      </p:sp>
-      <p:sp>
-        <p:nvSpPr>
-          <p:cNvPr id="5" name="TextBox 4"/>
-          <p:cNvSpPr txBox="1"/>
-          <p:nvPr/>
-        </p:nvSpPr>
-        <p:spPr>
-          <a:xfrm>
-            <a:off x="11231575" y="6382512"/>
-            <a:ext cx="457200" cy="274320"/>
-          </a:xfrm>
-          <a:prstGeom prst="rect">
-            <a:avLst/>
-          </a:prstGeom>
-          <a:noFill/>
-        </p:spPr>
-        <p:txBody>
-          <a:bodyPr wrap="square" lIns="0" tIns="0">
-            <a:spAutoFit/>
-          </a:bodyPr>
-          <a:lstStyle/>
-          <a:p>
-            <a:pPr algn="r">
-              <a:lnSpc>
-                <a:spcPct val="100000"/>
-              </a:lnSpc>
-              <a:spcAft>
-                <a:spcPts val="0"/>
-              </a:spcAft>
-              <a:defRPr sz="1000" b="0">
-                <a:solidFill>
-                  <a:srgbClr val="666666"/>
-                </a:solidFill>
-                <a:latin typeface="Calibri"/>
-              </a:defRPr>
-            </a:pPr>
-            <a:r>
-              <a:rPr sz="1000" b="0">
-                <a:solidFill>
-                  <a:srgbClr val="666666"/>
-                </a:solidFill>
-                <a:latin typeface="Calibri"/>
-              </a:rPr>
-              <a:t>5</a:t>
-            </a:r>
-          </a:p>
-        </p:txBody>
-      </p:sp>
-      <p:sp>
-        <p:nvSpPr>
-          <p:cNvPr id="6" name="TextBox 5"/>
-          <p:cNvSpPr txBox="1"/>
-          <p:nvPr/>
-        </p:nvSpPr>
-        <p:spPr>
-          <a:xfrm>
-            <a:off x="502920" y="1188720"/>
-            <a:ext cx="11185855" cy="3986784"/>
-          </a:xfrm>
-          <a:prstGeom prst="rect">
-            <a:avLst/>
-          </a:prstGeom>
-          <a:noFill/>
-        </p:spPr>
-        <p:txBody>
           <a:bodyPr wrap="square" lIns="0" tIns="0" rIns="0" bIns="0">
             <a:spAutoFit/>
           </a:bodyPr>
@@ -12746,112 +11721,80 @@
                 <a:spcPct val="100000"/>
               </a:lnSpc>
               <a:spcAft>
-                <a:spcPts val="600"/>
-              </a:spcAft>
-              <a:defRPr sz="2200" b="0">
-                <a:solidFill>
-                  <a:srgbClr val="222222"/>
-                </a:solidFill>
-                <a:latin typeface="Calibri"/>
-              </a:defRPr>
-            </a:pPr>
-            <a:r>
-              <a:rPr sz="2200" b="0">
-                <a:solidFill>
-                  <a:srgbClr val="222222"/>
-                </a:solidFill>
-                <a:latin typeface="Calibri"/>
-              </a:rPr>
-              <a:t>MISTAKE ONE: calling them before BP32.setup(). Setup is what brings the Bluetooth stack up. Before that there is no list to add to, and the calls do nothing at all - silently.</a:t>
-            </a:r>
-          </a:p>
-          <a:p>
-            <a:pPr algn="l">
-              <a:lnSpc>
-                <a:spcPct val="100000"/>
-              </a:lnSpc>
-              <a:spcAft>
-                <a:spcPts val="600"/>
-              </a:spcAft>
-              <a:defRPr sz="1100" b="0">
-                <a:solidFill>
-                  <a:srgbClr val="222222"/>
-                </a:solidFill>
-                <a:latin typeface="Calibri"/>
-              </a:defRPr>
-            </a:pPr>
-          </a:p>
-          <a:p>
-            <a:pPr algn="l">
-              <a:lnSpc>
-                <a:spcPct val="100000"/>
-              </a:lnSpc>
-              <a:spcAft>
-                <a:spcPts val="600"/>
-              </a:spcAft>
-              <a:defRPr sz="2200" b="0">
-                <a:solidFill>
-                  <a:srgbClr val="222222"/>
-                </a:solidFill>
-                <a:latin typeface="Calibri"/>
-              </a:defRPr>
-            </a:pPr>
-            <a:r>
-              <a:rPr sz="2200" b="0">
-                <a:solidFill>
-                  <a:srgbClr val="222222"/>
-                </a:solidFill>
-                <a:latin typeface="Calibri"/>
-              </a:rPr>
-              <a:t>MISTAKE TWO: adding to the list instead of rebuilding it. Rebuild from scratch every boot and the sketch is always the single source of truth. Add, and stale entries accumulate where nobody can see them.</a:t>
-            </a:r>
-          </a:p>
-          <a:p>
-            <a:pPr algn="l">
-              <a:lnSpc>
-                <a:spcPct val="100000"/>
-              </a:lnSpc>
-              <a:spcAft>
-                <a:spcPts val="600"/>
-              </a:spcAft>
-              <a:defRPr sz="1100" b="0">
-                <a:solidFill>
-                  <a:srgbClr val="222222"/>
-                </a:solidFill>
-                <a:latin typeface="Calibri"/>
-              </a:defRPr>
-            </a:pPr>
-          </a:p>
-          <a:p>
-            <a:pPr algn="l">
-              <a:lnSpc>
-                <a:spcPct val="100000"/>
-              </a:lnSpc>
-              <a:spcAft>
-                <a:spcPts val="600"/>
-              </a:spcAft>
-              <a:defRPr sz="2200" b="0">
-                <a:solidFill>
-                  <a:srgbClr val="222222"/>
-                </a:solidFill>
-                <a:latin typeface="Calibri"/>
-              </a:defRPr>
-            </a:pPr>
-            <a:r>
-              <a:rPr sz="2200" b="0">
-                <a:solidFill>
-                  <a:srgbClr val="222222"/>
-                </a:solidFill>
-                <a:latin typeface="Calibri"/>
-              </a:rPr>
-              <a:t>Note that enableNewBluetoothConnections stays TRUE. The allowlist keeps other people out; leaving new connections on means your own pad can always get back in even if the bonding keys are lost.</a:t>
-            </a:r>
-          </a:p>
-        </p:txBody>
-      </p:sp>
-      <p:sp>
-        <p:nvSpPr>
-          <p:cNvPr id="7" name="Rounded Rectangle 6"/>
+                <a:spcPts val="900"/>
+              </a:spcAft>
+              <a:defRPr sz="1900" b="0">
+                <a:solidFill>
+                  <a:srgbClr val="222222"/>
+                </a:solidFill>
+                <a:latin typeface="Calibri"/>
+              </a:defRPr>
+            </a:pPr>
+            <a:r>
+              <a:rPr sz="1900" b="0">
+                <a:solidFill>
+                  <a:srgbClr val="222222"/>
+                </a:solidFill>
+                <a:latin typeface="Calibri"/>
+              </a:rPr>
+              <a:t>MISTAKE ONE: calling them before BP32.setup(), which is what brings the stack up. Before that there is no list, and the calls do nothing - silently.</a:t>
+            </a:r>
+          </a:p>
+          <a:p>
+            <a:pPr algn="l">
+              <a:lnSpc>
+                <a:spcPct val="100000"/>
+              </a:lnSpc>
+              <a:spcAft>
+                <a:spcPts val="900"/>
+              </a:spcAft>
+              <a:defRPr sz="1900" b="0">
+                <a:solidFill>
+                  <a:srgbClr val="222222"/>
+                </a:solidFill>
+                <a:latin typeface="Calibri"/>
+              </a:defRPr>
+            </a:pPr>
+            <a:r>
+              <a:rPr sz="1900" b="0">
+                <a:solidFill>
+                  <a:srgbClr val="222222"/>
+                </a:solidFill>
+                <a:latin typeface="Calibri"/>
+              </a:rPr>
+              <a:t>MISTAKE TWO: adding to the list instead of rebuilding it. Rebuild every boot and the sketch is the single source of truth.</a:t>
+            </a:r>
+          </a:p>
+          <a:p>
+            <a:pPr algn="l">
+              <a:lnSpc>
+                <a:spcPct val="100000"/>
+              </a:lnSpc>
+              <a:spcAft>
+                <a:spcPts val="900"/>
+              </a:spcAft>
+              <a:defRPr sz="1900" b="0">
+                <a:solidFill>
+                  <a:srgbClr val="222222"/>
+                </a:solidFill>
+                <a:latin typeface="Calibri"/>
+              </a:defRPr>
+            </a:pPr>
+            <a:r>
+              <a:rPr sz="1900" b="0">
+                <a:solidFill>
+                  <a:srgbClr val="222222"/>
+                </a:solidFill>
+                <a:latin typeface="Calibri"/>
+              </a:rPr>
+              <a:t>enableNewBluetoothConnections stays TRUE, so your own pad can get back in if the bonding keys are lost.</a:t>
+            </a:r>
+          </a:p>
+        </p:txBody>
+      </p:sp>
+      <p:sp>
+        <p:nvSpPr>
+          <p:cNvPr id="9" name="Rounded Rectangle 8"/>
           <p:cNvSpPr/>
           <p:nvPr/>
         </p:nvSpPr>
@@ -12910,7 +11853,7 @@
                 </a:solidFill>
                 <a:latin typeface="Calibri"/>
               </a:rPr>
-              <a:t>11.2 added addresses at runtime only. If those entries did not survive a reboot, a vehicle could come back up with an empty allowlist AND new connections disabled - and then refuse its own controller with no way in.</a:t>
+              <a:t>Rebuild the list every boot, and always AFTER BP32.setup(). Both mistakes fail silently.</a:t>
             </a:r>
           </a:p>
         </p:txBody>
@@ -12923,7 +11866,7 @@
 </p:sld>
 </file>
 
-<file path=ppt/slides/slide7.xml><?xml version="1.0" encoding="utf-8"?>
+<file path=ppt/slides/slide6.xml><?xml version="1.0" encoding="utf-8"?>
 <p:sld xmlns:a="http://schemas.openxmlformats.org/drawingml/2006/main" xmlns:p="http://schemas.openxmlformats.org/presentationml/2006/main" xmlns:r="http://schemas.openxmlformats.org/officeDocument/2006/relationships">
   <p:cSld>
     <p:spTree>
@@ -13114,7 +12057,7 @@
                 </a:solidFill>
                 <a:latin typeface="Calibri"/>
               </a:rPr>
-              <a:t>6</a:t>
+              <a:t>5</a:t>
             </a:r>
           </a:p>
         </p:txBody>
@@ -13433,7 +12376,7 @@
 </p:sld>
 </file>
 
-<file path=ppt/slides/slide8.xml><?xml version="1.0" encoding="utf-8"?>
+<file path=ppt/slides/slide7.xml><?xml version="1.0" encoding="utf-8"?>
 <p:sld xmlns:a="http://schemas.openxmlformats.org/drawingml/2006/main" xmlns:p="http://schemas.openxmlformats.org/presentationml/2006/main" xmlns:r="http://schemas.openxmlformats.org/officeDocument/2006/relationships">
   <p:cSld>
     <p:spTree>
@@ -13624,7 +12567,7 @@
                 </a:solidFill>
                 <a:latin typeface="Calibri"/>
               </a:rPr>
-              <a:t>7</a:t>
+              <a:t>6</a:t>
             </a:r>
           </a:p>
         </p:txBody>
@@ -14100,7 +13043,7 @@
 </p:sld>
 </file>
 
-<file path=ppt/slides/slide9.xml><?xml version="1.0" encoding="utf-8"?>
+<file path=ppt/slides/slide8.xml><?xml version="1.0" encoding="utf-8"?>
 <p:sld xmlns:a="http://schemas.openxmlformats.org/drawingml/2006/main" xmlns:p="http://schemas.openxmlformats.org/presentationml/2006/main" xmlns:r="http://schemas.openxmlformats.org/officeDocument/2006/relationships">
   <p:cSld>
     <p:spTree>
@@ -14291,7 +13234,7 @@
                 </a:solidFill>
                 <a:latin typeface="Calibri"/>
               </a:rPr>
-              <a:t>8</a:t>
+              <a:t>7</a:t>
             </a:r>
           </a:p>
         </p:txBody>
@@ -14659,6 +13602,712 @@
                 <a:latin typeface="Calibri"/>
               </a:rPr>
               <a:t>A commit() in loop() at 30 Hz burns through a hundred thousand cycles in under an hour.</a:t>
+            </a:r>
+          </a:p>
+        </p:txBody>
+      </p:sp>
+    </p:spTree>
+  </p:cSld>
+  <p:clrMapOvr>
+    <a:masterClrMapping/>
+  </p:clrMapOvr>
+</p:sld>
+</file>
+
+<file path=ppt/slides/slide9.xml><?xml version="1.0" encoding="utf-8"?>
+<p:sld xmlns:a="http://schemas.openxmlformats.org/drawingml/2006/main" xmlns:p="http://schemas.openxmlformats.org/presentationml/2006/main" xmlns:r="http://schemas.openxmlformats.org/officeDocument/2006/relationships">
+  <p:cSld>
+    <p:spTree>
+      <p:nvGrpSpPr>
+        <p:cNvPr id="1" name=""/>
+        <p:cNvGrpSpPr/>
+        <p:nvPr/>
+      </p:nvGrpSpPr>
+      <p:grpSpPr/>
+      <p:sp>
+        <p:nvSpPr>
+          <p:cNvPr id="2" name="Title 1"/>
+          <p:cNvSpPr>
+            <a:spLocks noGrp="1"/>
+          </p:cNvSpPr>
+          <p:nvPr>
+            <p:ph type="title"/>
+          </p:nvPr>
+        </p:nvSpPr>
+        <p:spPr>
+          <a:xfrm>
+            <a:off x="502920" y="274320"/>
+            <a:ext cx="11185855" cy="777240"/>
+          </a:xfrm>
+        </p:spPr>
+        <p:txBody>
+          <a:bodyPr wrap="square" anchor="b"/>
+          <a:lstStyle/>
+          <a:p>
+            <a:pPr algn="l">
+              <a:lnSpc>
+                <a:spcPct val="100000"/>
+              </a:lnSpc>
+              <a:spcAft>
+                <a:spcPts val="0"/>
+              </a:spcAft>
+              <a:defRPr sz="2800" b="1">
+                <a:solidFill>
+                  <a:srgbClr val="1F3A5F"/>
+                </a:solidFill>
+                <a:latin typeface="Calibri"/>
+              </a:defRPr>
+            </a:pPr>
+            <a:r>
+              <a:rPr sz="2800" b="1">
+                <a:solidFill>
+                  <a:srgbClr val="1F3A5F"/>
+                </a:solidFill>
+                <a:latin typeface="Calibri"/>
+              </a:rPr>
+              <a:t>The storage map, and why the addresses are spaced out</a:t>
+            </a:r>
+          </a:p>
+        </p:txBody>
+      </p:sp>
+      <p:sp>
+        <p:nvSpPr>
+          <p:cNvPr id="3" name="Rectangle 2"/>
+          <p:cNvSpPr/>
+          <p:nvPr/>
+        </p:nvSpPr>
+        <p:spPr>
+          <a:xfrm>
+            <a:off x="502920" y="1097280"/>
+            <a:ext cx="11185855" cy="19050"/>
+          </a:xfrm>
+          <a:prstGeom prst="rect">
+            <a:avLst/>
+          </a:prstGeom>
+          <a:solidFill>
+            <a:srgbClr val="C8D2DE"/>
+          </a:solidFill>
+          <a:ln>
+            <a:noFill/>
+          </a:ln>
+          <a:effectLst/>
+        </p:spPr>
+        <p:style>
+          <a:lnRef idx="1">
+            <a:schemeClr val="accent1"/>
+          </a:lnRef>
+          <a:fillRef idx="3">
+            <a:schemeClr val="accent1"/>
+          </a:fillRef>
+          <a:effectRef idx="2">
+            <a:schemeClr val="accent1"/>
+          </a:effectRef>
+          <a:fontRef idx="minor">
+            <a:schemeClr val="lt1"/>
+          </a:fontRef>
+        </p:style>
+        <p:txBody>
+          <a:bodyPr rtlCol="0" anchor="ctr"/>
+          <a:lstStyle/>
+          <a:p>
+            <a:pPr algn="ctr"/>
+          </a:p>
+        </p:txBody>
+      </p:sp>
+      <p:sp>
+        <p:nvSpPr>
+          <p:cNvPr id="4" name="TextBox 3"/>
+          <p:cNvSpPr txBox="1"/>
+          <p:nvPr/>
+        </p:nvSpPr>
+        <p:spPr>
+          <a:xfrm>
+            <a:off x="502920" y="6382512"/>
+            <a:ext cx="10545775" cy="274320"/>
+          </a:xfrm>
+          <a:prstGeom prst="rect">
+            <a:avLst/>
+          </a:prstGeom>
+          <a:noFill/>
+        </p:spPr>
+        <p:txBody>
+          <a:bodyPr wrap="square" lIns="0" tIns="0">
+            <a:spAutoFit/>
+          </a:bodyPr>
+          <a:lstStyle/>
+          <a:p>
+            <a:pPr algn="l">
+              <a:lnSpc>
+                <a:spcPct val="100000"/>
+              </a:lnSpc>
+              <a:spcAft>
+                <a:spcPts val="0"/>
+              </a:spcAft>
+              <a:defRPr sz="1000" b="0">
+                <a:solidFill>
+                  <a:srgbClr val="666666"/>
+                </a:solidFill>
+                <a:latin typeface="Calibri"/>
+              </a:defRPr>
+            </a:pPr>
+            <a:r>
+              <a:rPr sz="1000" b="0">
+                <a:solidFill>
+                  <a:srgbClr val="666666"/>
+                </a:solidFill>
+                <a:latin typeface="Calibri"/>
+              </a:rPr>
+              <a:t>Pathfinder Advanced - Op Program 12  |  Lesson 3</a:t>
+            </a:r>
+          </a:p>
+        </p:txBody>
+      </p:sp>
+      <p:sp>
+        <p:nvSpPr>
+          <p:cNvPr id="5" name="TextBox 4"/>
+          <p:cNvSpPr txBox="1"/>
+          <p:nvPr/>
+        </p:nvSpPr>
+        <p:spPr>
+          <a:xfrm>
+            <a:off x="11231575" y="6382512"/>
+            <a:ext cx="457200" cy="274320"/>
+          </a:xfrm>
+          <a:prstGeom prst="rect">
+            <a:avLst/>
+          </a:prstGeom>
+          <a:noFill/>
+        </p:spPr>
+        <p:txBody>
+          <a:bodyPr wrap="square" lIns="0" tIns="0">
+            <a:spAutoFit/>
+          </a:bodyPr>
+          <a:lstStyle/>
+          <a:p>
+            <a:pPr algn="r">
+              <a:lnSpc>
+                <a:spcPct val="100000"/>
+              </a:lnSpc>
+              <a:spcAft>
+                <a:spcPts val="0"/>
+              </a:spcAft>
+              <a:defRPr sz="1000" b="0">
+                <a:solidFill>
+                  <a:srgbClr val="666666"/>
+                </a:solidFill>
+                <a:latin typeface="Calibri"/>
+              </a:defRPr>
+            </a:pPr>
+            <a:r>
+              <a:rPr sz="1000" b="0">
+                <a:solidFill>
+                  <a:srgbClr val="666666"/>
+                </a:solidFill>
+                <a:latin typeface="Calibri"/>
+              </a:rPr>
+              <a:t>8</a:t>
+            </a:r>
+          </a:p>
+        </p:txBody>
+      </p:sp>
+      <p:sp>
+        <p:nvSpPr>
+          <p:cNvPr id="6" name="TextBox 5"/>
+          <p:cNvSpPr txBox="1"/>
+          <p:nvPr/>
+        </p:nvSpPr>
+        <p:spPr>
+          <a:xfrm>
+            <a:off x="502920" y="1188720"/>
+            <a:ext cx="7047088" cy="274320"/>
+          </a:xfrm>
+          <a:prstGeom prst="rect">
+            <a:avLst/>
+          </a:prstGeom>
+          <a:noFill/>
+        </p:spPr>
+        <p:txBody>
+          <a:bodyPr wrap="square" lIns="0" tIns="0" rIns="0" bIns="0">
+            <a:spAutoFit/>
+          </a:bodyPr>
+          <a:lstStyle/>
+          <a:p>
+            <a:pPr algn="l">
+              <a:lnSpc>
+                <a:spcPct val="100000"/>
+              </a:lnSpc>
+              <a:spcAft>
+                <a:spcPts val="200"/>
+              </a:spcAft>
+              <a:defRPr sz="1200" b="1">
+                <a:solidFill>
+                  <a:srgbClr val="0E7C86"/>
+                </a:solidFill>
+                <a:latin typeface="Consolas"/>
+              </a:defRPr>
+            </a:pPr>
+            <a:r>
+              <a:rPr sz="1200" b="1">
+                <a:solidFill>
+                  <a:srgbClr val="0E7C86"/>
+                </a:solidFill>
+                <a:latin typeface="Consolas"/>
+              </a:rPr>
+              <a:t>Config.h</a:t>
+            </a:r>
+          </a:p>
+        </p:txBody>
+      </p:sp>
+      <p:sp>
+        <p:nvSpPr>
+          <p:cNvPr id="7" name="CODE_PANEL"/>
+          <p:cNvSpPr/>
+          <p:nvPr/>
+        </p:nvSpPr>
+        <p:spPr>
+          <a:xfrm>
+            <a:off x="502920" y="1517904"/>
+            <a:ext cx="7047088" cy="4745736"/>
+          </a:xfrm>
+          <a:prstGeom prst="roundRect">
+            <a:avLst>
+              <a:gd name="adj" fmla="val 4000"/>
+            </a:avLst>
+          </a:prstGeom>
+          <a:solidFill>
+            <a:srgbClr val="F4F6F8"/>
+          </a:solidFill>
+          <a:ln w="12700">
+            <a:solidFill>
+              <a:srgbClr val="C8D2DE"/>
+            </a:solidFill>
+          </a:ln>
+          <a:effectLst/>
+        </p:spPr>
+        <p:style>
+          <a:lnRef idx="1">
+            <a:schemeClr val="accent1"/>
+          </a:lnRef>
+          <a:fillRef idx="3">
+            <a:schemeClr val="accent1"/>
+          </a:fillRef>
+          <a:effectRef idx="2">
+            <a:schemeClr val="accent1"/>
+          </a:effectRef>
+          <a:fontRef idx="minor">
+            <a:schemeClr val="lt1"/>
+          </a:fontRef>
+        </p:style>
+        <p:txBody>
+          <a:bodyPr rtlCol="0" anchor="t" wrap="square" lIns="146304" tIns="91440" bIns="73152"/>
+          <a:lstStyle/>
+          <a:p>
+            <a:pPr algn="l">
+              <a:lnSpc>
+                <a:spcPct val="100000"/>
+              </a:lnSpc>
+              <a:spcAft>
+                <a:spcPts val="0"/>
+              </a:spcAft>
+              <a:defRPr sz="1450">
+                <a:latin typeface="Consolas"/>
+              </a:defRPr>
+            </a:pPr>
+            <a:r>
+              <a:rPr sz="1450">
+                <a:solidFill>
+                  <a:srgbClr val="222222"/>
+                </a:solidFill>
+                <a:latin typeface="Consolas"/>
+              </a:rPr>
+              <a:t>const int ADDR_DEADZONE       =  0;   // int,   4 bytes</a:t>
+            </a:r>
+          </a:p>
+          <a:p>
+            <a:pPr algn="l">
+              <a:lnSpc>
+                <a:spcPct val="100000"/>
+              </a:lnSpc>
+              <a:spcAft>
+                <a:spcPts val="0"/>
+              </a:spcAft>
+              <a:defRPr sz="1450">
+                <a:latin typeface="Consolas"/>
+              </a:defRPr>
+            </a:pPr>
+            <a:r>
+              <a:rPr sz="1450">
+                <a:solidFill>
+                  <a:srgbClr val="222222"/>
+                </a:solidFill>
+                <a:latin typeface="Consolas"/>
+              </a:rPr>
+              <a:t>const int ADDR_DEADZONE_LS_X  =  4;</a:t>
+            </a:r>
+          </a:p>
+          <a:p>
+            <a:pPr algn="l">
+              <a:lnSpc>
+                <a:spcPct val="100000"/>
+              </a:lnSpc>
+              <a:spcAft>
+                <a:spcPts val="0"/>
+              </a:spcAft>
+              <a:defRPr sz="1450">
+                <a:latin typeface="Consolas"/>
+              </a:defRPr>
+            </a:pPr>
+            <a:r>
+              <a:rPr sz="1450">
+                <a:solidFill>
+                  <a:srgbClr val="222222"/>
+                </a:solidFill>
+                <a:latin typeface="Consolas"/>
+              </a:rPr>
+              <a:t>const int ADDR_DEADZONE_LS_Y  =  8;</a:t>
+            </a:r>
+          </a:p>
+          <a:p>
+            <a:pPr algn="l">
+              <a:lnSpc>
+                <a:spcPct val="100000"/>
+              </a:lnSpc>
+              <a:spcAft>
+                <a:spcPts val="0"/>
+              </a:spcAft>
+              <a:defRPr sz="1450">
+                <a:latin typeface="Consolas"/>
+              </a:defRPr>
+            </a:pPr>
+            <a:r>
+              <a:rPr sz="1450">
+                <a:solidFill>
+                  <a:srgbClr val="222222"/>
+                </a:solidFill>
+                <a:latin typeface="Consolas"/>
+              </a:rPr>
+              <a:t>const int ADDR_DEADZONE_RS_X  = 12;</a:t>
+            </a:r>
+          </a:p>
+          <a:p>
+            <a:pPr algn="l">
+              <a:lnSpc>
+                <a:spcPct val="100000"/>
+              </a:lnSpc>
+              <a:spcAft>
+                <a:spcPts val="0"/>
+              </a:spcAft>
+              <a:defRPr sz="1450">
+                <a:latin typeface="Consolas"/>
+              </a:defRPr>
+            </a:pPr>
+            <a:r>
+              <a:rPr sz="1450">
+                <a:solidFill>
+                  <a:srgbClr val="222222"/>
+                </a:solidFill>
+                <a:latin typeface="Consolas"/>
+              </a:rPr>
+              <a:t>const int ADDR_DEADZONE_RS_Y  = 16;</a:t>
+            </a:r>
+          </a:p>
+          <a:p>
+            <a:pPr algn="l">
+              <a:lnSpc>
+                <a:spcPct val="100000"/>
+              </a:lnSpc>
+              <a:spcAft>
+                <a:spcPts val="0"/>
+              </a:spcAft>
+              <a:defRPr sz="1450">
+                <a:latin typeface="Consolas"/>
+              </a:defRPr>
+            </a:pPr>
+            <a:r>
+              <a:rPr sz="1450">
+                <a:solidFill>
+                  <a:srgbClr val="222222"/>
+                </a:solidFill>
+                <a:latin typeface="Consolas"/>
+              </a:rPr>
+              <a:t>const int ADDR_LS_Y_SC        = 20;   // float, 4 bytes</a:t>
+            </a:r>
+          </a:p>
+          <a:p>
+            <a:pPr algn="l">
+              <a:lnSpc>
+                <a:spcPct val="100000"/>
+              </a:lnSpc>
+              <a:spcAft>
+                <a:spcPts val="0"/>
+              </a:spcAft>
+              <a:defRPr sz="1450">
+                <a:latin typeface="Consolas"/>
+              </a:defRPr>
+            </a:pPr>
+            <a:r>
+              <a:rPr sz="1450">
+                <a:solidFill>
+                  <a:srgbClr val="222222"/>
+                </a:solidFill>
+                <a:latin typeface="Consolas"/>
+              </a:rPr>
+              <a:t>const int ADDR_LS_X_SC        = 24;</a:t>
+            </a:r>
+          </a:p>
+          <a:p>
+            <a:pPr algn="l">
+              <a:lnSpc>
+                <a:spcPct val="100000"/>
+              </a:lnSpc>
+              <a:spcAft>
+                <a:spcPts val="0"/>
+              </a:spcAft>
+              <a:defRPr sz="1450">
+                <a:latin typeface="Consolas"/>
+              </a:defRPr>
+            </a:pPr>
+            <a:r>
+              <a:rPr sz="1450">
+                <a:solidFill>
+                  <a:srgbClr val="222222"/>
+                </a:solidFill>
+                <a:latin typeface="Consolas"/>
+              </a:rPr>
+              <a:t>const int ADDR_RS_Y_SC        = 28;</a:t>
+            </a:r>
+          </a:p>
+          <a:p>
+            <a:pPr algn="l">
+              <a:lnSpc>
+                <a:spcPct val="100000"/>
+              </a:lnSpc>
+              <a:spcAft>
+                <a:spcPts val="0"/>
+              </a:spcAft>
+              <a:defRPr sz="1450">
+                <a:latin typeface="Consolas"/>
+              </a:defRPr>
+            </a:pPr>
+            <a:r>
+              <a:rPr sz="1450">
+                <a:solidFill>
+                  <a:srgbClr val="222222"/>
+                </a:solidFill>
+                <a:latin typeface="Consolas"/>
+              </a:rPr>
+              <a:t>const int ADDR_RS_X_SC        = 32;</a:t>
+            </a:r>
+          </a:p>
+          <a:p>
+            <a:pPr algn="l">
+              <a:lnSpc>
+                <a:spcPct val="100000"/>
+              </a:lnSpc>
+              <a:spcAft>
+                <a:spcPts val="0"/>
+              </a:spcAft>
+              <a:defRPr sz="1450">
+                <a:latin typeface="Consolas"/>
+              </a:defRPr>
+            </a:pPr>
+            <a:r>
+              <a:rPr sz="1450" b="1">
+                <a:solidFill>
+                  <a:srgbClr val="0E7C86"/>
+                </a:solidFill>
+                <a:latin typeface="Consolas"/>
+              </a:rPr>
+              <a:t>const int ADDR_PAIRED_VALID   = 36;   // 1 byte:  0xA5 when valid</a:t>
+            </a:r>
+          </a:p>
+          <a:p>
+            <a:pPr algn="l">
+              <a:lnSpc>
+                <a:spcPct val="100000"/>
+              </a:lnSpc>
+              <a:spcAft>
+                <a:spcPts val="0"/>
+              </a:spcAft>
+              <a:defRPr sz="1450">
+                <a:latin typeface="Consolas"/>
+              </a:defRPr>
+            </a:pPr>
+            <a:r>
+              <a:rPr sz="1450" b="1">
+                <a:solidFill>
+                  <a:srgbClr val="0E7C86"/>
+                </a:solidFill>
+                <a:latin typeface="Consolas"/>
+              </a:rPr>
+              <a:t>const int ADDR_PAIRED_ADDR    = 37;   // 6 bytes: the address</a:t>
+            </a:r>
+          </a:p>
+          <a:p>
+            <a:pPr algn="l">
+              <a:lnSpc>
+                <a:spcPct val="100000"/>
+              </a:lnSpc>
+              <a:spcAft>
+                <a:spcPts val="0"/>
+              </a:spcAft>
+              <a:defRPr sz="1450">
+                <a:latin typeface="Consolas"/>
+              </a:defRPr>
+            </a:pPr>
+            <a:r>
+              <a:rPr sz="1450">
+                <a:solidFill>
+                  <a:srgbClr val="222222"/>
+                </a:solidFill>
+                <a:latin typeface="Consolas"/>
+              </a:rPr>
+              <a:t> </a:t>
+            </a:r>
+          </a:p>
+          <a:p>
+            <a:pPr algn="l">
+              <a:lnSpc>
+                <a:spcPct val="100000"/>
+              </a:lnSpc>
+              <a:spcAft>
+                <a:spcPts val="0"/>
+              </a:spcAft>
+              <a:defRPr sz="1450">
+                <a:latin typeface="Consolas"/>
+              </a:defRPr>
+            </a:pPr>
+            <a:r>
+              <a:rPr sz="1450" b="1">
+                <a:solidFill>
+                  <a:srgbClr val="0E7C86"/>
+                </a:solidFill>
+                <a:latin typeface="Consolas"/>
+              </a:rPr>
+              <a:t>const uint8_t PAIRED_VALID_MAGIC = 0xA5;</a:t>
+            </a:r>
+          </a:p>
+        </p:txBody>
+      </p:sp>
+      <p:sp>
+        <p:nvSpPr>
+          <p:cNvPr id="8" name="TextBox 7"/>
+          <p:cNvSpPr txBox="1"/>
+          <p:nvPr/>
+        </p:nvSpPr>
+        <p:spPr>
+          <a:xfrm>
+            <a:off x="7870048" y="1517904"/>
+            <a:ext cx="3818727" cy="4745736"/>
+          </a:xfrm>
+          <a:prstGeom prst="rect">
+            <a:avLst/>
+          </a:prstGeom>
+          <a:noFill/>
+        </p:spPr>
+        <p:txBody>
+          <a:bodyPr wrap="square" lIns="0" tIns="0" rIns="0" bIns="0">
+            <a:spAutoFit/>
+          </a:bodyPr>
+          <a:lstStyle/>
+          <a:p>
+            <a:pPr algn="l">
+              <a:lnSpc>
+                <a:spcPct val="100000"/>
+              </a:lnSpc>
+              <a:spcAft>
+                <a:spcPts val="700"/>
+              </a:spcAft>
+              <a:defRPr sz="1900" b="0">
+                <a:solidFill>
+                  <a:srgbClr val="222222"/>
+                </a:solidFill>
+                <a:latin typeface="Calibri"/>
+              </a:defRPr>
+            </a:pPr>
+            <a:r>
+              <a:rPr sz="1900" b="0">
+                <a:solidFill>
+                  <a:srgbClr val="222222"/>
+                </a:solidFill>
+                <a:latin typeface="Calibri"/>
+              </a:rPr>
+              <a:t>EEPROM is a flat array of bytes. YOU choose where each value lives, and nothing stops two values overlapping.</a:t>
+            </a:r>
+          </a:p>
+          <a:p>
+            <a:pPr algn="l">
+              <a:lnSpc>
+                <a:spcPct val="100000"/>
+              </a:lnSpc>
+              <a:spcAft>
+                <a:spcPts val="700"/>
+              </a:spcAft>
+              <a:defRPr sz="1900" b="0">
+                <a:solidFill>
+                  <a:srgbClr val="222222"/>
+                </a:solidFill>
+                <a:latin typeface="Calibri"/>
+              </a:defRPr>
+            </a:pPr>
+            <a:r>
+              <a:rPr sz="1900" b="0">
+                <a:solidFill>
+                  <a:srgbClr val="222222"/>
+                </a:solidFill>
+                <a:latin typeface="Calibri"/>
+              </a:rPr>
+              <a:t>An int is 4 bytes and a float is 4 bytes on this chip, so each slot gets 4.</a:t>
+            </a:r>
+          </a:p>
+          <a:p>
+            <a:pPr algn="l">
+              <a:lnSpc>
+                <a:spcPct val="100000"/>
+              </a:lnSpc>
+              <a:spcAft>
+                <a:spcPts val="700"/>
+              </a:spcAft>
+              <a:defRPr sz="1900" b="0">
+                <a:solidFill>
+                  <a:srgbClr val="222222"/>
+                </a:solidFill>
+                <a:latin typeface="Calibri"/>
+              </a:defRPr>
+            </a:pPr>
+            <a:r>
+              <a:rPr sz="1900" b="0">
+                <a:solidFill>
+                  <a:srgbClr val="222222"/>
+                </a:solidFill>
+                <a:latin typeface="Calibri"/>
+              </a:rPr>
+              <a:t>Laying them out as one ADDR_ constant per value, in one place, is what makes an overlap visible when you read the file.</a:t>
+            </a:r>
+          </a:p>
+          <a:p>
+            <a:pPr algn="l">
+              <a:lnSpc>
+                <a:spcPct val="100000"/>
+              </a:lnSpc>
+              <a:spcAft>
+                <a:spcPts val="700"/>
+              </a:spcAft>
+              <a:defRPr sz="1900" b="0">
+                <a:solidFill>
+                  <a:srgbClr val="222222"/>
+                </a:solidFill>
+                <a:latin typeface="Calibri"/>
+              </a:defRPr>
+            </a:pPr>
+            <a:r>
+              <a:rPr sz="1900" b="0">
+                <a:solidFill>
+                  <a:srgbClr val="222222"/>
+                </a:solidFill>
+                <a:latin typeface="Calibri"/>
+              </a:rPr>
+              <a:t>Get this wrong and one setting silently corrupts another. It will look like a hardware fault.</a:t>
             </a:r>
           </a:p>
         </p:txBody>

--- a/ground-vehicle/docs/courses/advanced/l3_bluetooth_and_storage.pptx
+++ b/ground-vehicle/docs/courses/advanced/l3_bluetooth_and_storage.pptx
@@ -5972,22 +5972,24 @@
       <p:grpSpPr/>
       <p:sp>
         <p:nvSpPr>
-          <p:cNvPr id="2" name="Title 1"/>
-          <p:cNvSpPr>
-            <a:spLocks noGrp="1"/>
-          </p:cNvSpPr>
-          <p:nvPr>
-            <p:ph type="title"/>
-          </p:nvPr>
+          <p:cNvPr id="2" name="TextBox 1"/>
+          <p:cNvSpPr txBox="1"/>
+          <p:nvPr/>
         </p:nvSpPr>
         <p:spPr>
           <a:xfrm>
-            <a:off x="502920" y="274320"/>
-            <a:ext cx="11185855" cy="777240"/>
+            <a:off x="502920" y="6382512"/>
+            <a:ext cx="10545775" cy="274320"/>
           </a:xfrm>
+          <a:prstGeom prst="rect">
+            <a:avLst/>
+          </a:prstGeom>
+          <a:noFill/>
         </p:spPr>
         <p:txBody>
-          <a:bodyPr wrap="square" anchor="b"/>
+          <a:bodyPr wrap="square" lIns="0" tIns="0">
+            <a:spAutoFit/>
+          </a:bodyPr>
           <a:lstStyle/>
           <a:p>
             <a:pPr algn="l">
@@ -5997,41 +5999,89 @@
               <a:spcAft>
                 <a:spcPts val="0"/>
               </a:spcAft>
-              <a:defRPr sz="2800" b="1">
-                <a:solidFill>
-                  <a:srgbClr val="1F3A5F"/>
-                </a:solidFill>
-                <a:latin typeface="Calibri"/>
-              </a:defRPr>
-            </a:pPr>
-            <a:r>
-              <a:rPr sz="2800" b="1">
-                <a:solidFill>
-                  <a:srgbClr val="1F3A5F"/>
-                </a:solidFill>
-                <a:latin typeface="Calibri"/>
-              </a:rPr>
-              <a:t>Where we are</a:t>
-            </a:r>
-          </a:p>
-        </p:txBody>
-      </p:sp>
-      <p:sp>
-        <p:nvSpPr>
-          <p:cNvPr id="3" name="Rectangle 2"/>
+              <a:defRPr sz="1000" b="0">
+                <a:solidFill>
+                  <a:srgbClr val="666666"/>
+                </a:solidFill>
+                <a:latin typeface="Calibri"/>
+              </a:defRPr>
+            </a:pPr>
+            <a:r>
+              <a:rPr sz="1000" b="0">
+                <a:solidFill>
+                  <a:srgbClr val="666666"/>
+                </a:solidFill>
+                <a:latin typeface="Calibri"/>
+              </a:rPr>
+              <a:t>Pathfinder Advanced - Op Program 12  |  Lesson 3</a:t>
+            </a:r>
+          </a:p>
+        </p:txBody>
+      </p:sp>
+      <p:sp>
+        <p:nvSpPr>
+          <p:cNvPr id="3" name="TextBox 2"/>
+          <p:cNvSpPr txBox="1"/>
+          <p:nvPr/>
+        </p:nvSpPr>
+        <p:spPr>
+          <a:xfrm>
+            <a:off x="11231575" y="6382512"/>
+            <a:ext cx="457200" cy="274320"/>
+          </a:xfrm>
+          <a:prstGeom prst="rect">
+            <a:avLst/>
+          </a:prstGeom>
+          <a:noFill/>
+        </p:spPr>
+        <p:txBody>
+          <a:bodyPr wrap="square" lIns="0" tIns="0">
+            <a:spAutoFit/>
+          </a:bodyPr>
+          <a:lstStyle/>
+          <a:p>
+            <a:pPr algn="r">
+              <a:lnSpc>
+                <a:spcPct val="100000"/>
+              </a:lnSpc>
+              <a:spcAft>
+                <a:spcPts val="0"/>
+              </a:spcAft>
+              <a:defRPr sz="1000" b="0">
+                <a:solidFill>
+                  <a:srgbClr val="666666"/>
+                </a:solidFill>
+                <a:latin typeface="Calibri"/>
+              </a:defRPr>
+            </a:pPr>
+            <a:r>
+              <a:rPr sz="1000" b="0">
+                <a:solidFill>
+                  <a:srgbClr val="666666"/>
+                </a:solidFill>
+                <a:latin typeface="Calibri"/>
+              </a:rPr>
+              <a:t>10</a:t>
+            </a:r>
+          </a:p>
+        </p:txBody>
+      </p:sp>
+      <p:sp>
+        <p:nvSpPr>
+          <p:cNvPr id="4" name="Rectangle 3"/>
           <p:cNvSpPr/>
           <p:nvPr/>
         </p:nvSpPr>
         <p:spPr>
           <a:xfrm>
-            <a:off x="502920" y="1097280"/>
-            <a:ext cx="11185855" cy="19050"/>
+            <a:off x="0" y="1234440"/>
+            <a:ext cx="256032" cy="1554480"/>
           </a:xfrm>
           <a:prstGeom prst="rect">
             <a:avLst/>
           </a:prstGeom>
           <a:solidFill>
-            <a:srgbClr val="C8D2DE"/>
+            <a:srgbClr val="0E7C86"/>
           </a:solidFill>
           <a:ln>
             <a:noFill/>
@@ -6062,14 +6112,14 @@
       </p:sp>
       <p:sp>
         <p:nvSpPr>
-          <p:cNvPr id="4" name="TextBox 3"/>
+          <p:cNvPr id="5" name="TextBox 4"/>
           <p:cNvSpPr txBox="1"/>
           <p:nvPr/>
         </p:nvSpPr>
         <p:spPr>
           <a:xfrm>
-            <a:off x="502920" y="6382512"/>
-            <a:ext cx="10545775" cy="274320"/>
+            <a:off x="777240" y="1325880"/>
+            <a:ext cx="10515600" cy="1051560"/>
           </a:xfrm>
           <a:prstGeom prst="rect">
             <a:avLst/>
@@ -6077,7 +6127,7 @@
           <a:noFill/>
         </p:spPr>
         <p:txBody>
-          <a:bodyPr wrap="square" lIns="0" tIns="0">
+          <a:bodyPr wrap="square" lIns="0" tIns="0" rIns="0" bIns="0">
             <a:spAutoFit/>
           </a:bodyPr>
           <a:lstStyle/>
@@ -6089,35 +6139,35 @@
               <a:spcAft>
                 <a:spcPts val="0"/>
               </a:spcAft>
-              <a:defRPr sz="1000" b="0">
-                <a:solidFill>
-                  <a:srgbClr val="666666"/>
-                </a:solidFill>
-                <a:latin typeface="Calibri"/>
-              </a:defRPr>
-            </a:pPr>
-            <a:r>
-              <a:rPr sz="1000" b="0">
-                <a:solidFill>
-                  <a:srgbClr val="666666"/>
-                </a:solidFill>
-                <a:latin typeface="Calibri"/>
-              </a:rPr>
-              <a:t>Pathfinder Advanced - Op Program 12  |  Lesson 3</a:t>
-            </a:r>
-          </a:p>
-        </p:txBody>
-      </p:sp>
-      <p:sp>
-        <p:nvSpPr>
-          <p:cNvPr id="5" name="TextBox 4"/>
+              <a:defRPr sz="3600" b="1">
+                <a:solidFill>
+                  <a:srgbClr val="1F3A5F"/>
+                </a:solidFill>
+                <a:latin typeface="Calibri"/>
+              </a:defRPr>
+            </a:pPr>
+            <a:r>
+              <a:rPr sz="3600" b="1">
+                <a:solidFill>
+                  <a:srgbClr val="1F3A5F"/>
+                </a:solidFill>
+                <a:latin typeface="Calibri"/>
+              </a:rPr>
+              <a:t>EEPROM</a:t>
+            </a:r>
+          </a:p>
+        </p:txBody>
+      </p:sp>
+      <p:sp>
+        <p:nvSpPr>
+          <p:cNvPr id="6" name="TextBox 5"/>
           <p:cNvSpPr txBox="1"/>
           <p:nvPr/>
         </p:nvSpPr>
         <p:spPr>
           <a:xfrm>
-            <a:off x="11231575" y="6382512"/>
-            <a:ext cx="457200" cy="274320"/>
+            <a:off x="777240" y="2423160"/>
+            <a:ext cx="10515600" cy="685800"/>
           </a:xfrm>
           <a:prstGeom prst="rect">
             <a:avLst/>
@@ -6125,19 +6175,19 @@
           <a:noFill/>
         </p:spPr>
         <p:txBody>
-          <a:bodyPr wrap="square" lIns="0" tIns="0">
+          <a:bodyPr wrap="square" lIns="0" tIns="0" rIns="0" bIns="0">
             <a:spAutoFit/>
           </a:bodyPr>
           <a:lstStyle/>
           <a:p>
-            <a:pPr algn="r">
-              <a:lnSpc>
-                <a:spcPct val="100000"/>
-              </a:lnSpc>
-              <a:spcAft>
-                <a:spcPts val="0"/>
-              </a:spcAft>
-              <a:defRPr sz="1000" b="0">
+            <a:pPr algn="l">
+              <a:lnSpc>
+                <a:spcPct val="100000"/>
+              </a:lnSpc>
+              <a:spcAft>
+                <a:spcPts val="400"/>
+              </a:spcAft>
+              <a:defRPr sz="1600" b="0">
                 <a:solidFill>
                   <a:srgbClr val="666666"/>
                 </a:solidFill>
@@ -6145,27 +6195,27 @@
               </a:defRPr>
             </a:pPr>
             <a:r>
-              <a:rPr sz="1000" b="0">
+              <a:rPr sz="1600" b="0">
                 <a:solidFill>
                   <a:srgbClr val="666666"/>
                 </a:solidFill>
                 <a:latin typeface="Calibri"/>
               </a:rPr>
-              <a:t>10</a:t>
-            </a:r>
-          </a:p>
-        </p:txBody>
-      </p:sp>
-      <p:sp>
-        <p:nvSpPr>
-          <p:cNvPr id="6" name="Rounded Rectangle 5"/>
+              <a:t>About 35 minutes</a:t>
+            </a:r>
+          </a:p>
+        </p:txBody>
+      </p:sp>
+      <p:sp>
+        <p:nvSpPr>
+          <p:cNvPr id="7" name="Rounded Rectangle 6"/>
           <p:cNvSpPr/>
           <p:nvPr/>
         </p:nvSpPr>
         <p:spPr>
           <a:xfrm>
-            <a:off x="502920" y="2240280"/>
-            <a:ext cx="3631082" cy="1737360"/>
+            <a:off x="502920" y="3886200"/>
+            <a:ext cx="3631082" cy="1325880"/>
           </a:xfrm>
           <a:prstGeom prst="roundRect">
             <a:avLst>
@@ -6228,14 +6278,14 @@
       </p:sp>
       <p:sp>
         <p:nvSpPr>
-          <p:cNvPr id="7" name="TextBox 6"/>
+          <p:cNvPr id="8" name="TextBox 7"/>
           <p:cNvSpPr txBox="1"/>
           <p:nvPr/>
         </p:nvSpPr>
         <p:spPr>
           <a:xfrm>
-            <a:off x="502920" y="1856232"/>
-            <a:ext cx="3631082" cy="347472"/>
+            <a:off x="502920" y="3520440"/>
+            <a:ext cx="3631082" cy="310896"/>
           </a:xfrm>
           <a:prstGeom prst="rect">
             <a:avLst/>
@@ -6253,9 +6303,9 @@
                 <a:spcPct val="100000"/>
               </a:lnSpc>
               <a:spcAft>
-                <a:spcPts val="600"/>
-              </a:spcAft>
-              <a:defRPr sz="1200" b="1">
+                <a:spcPts val="200"/>
+              </a:spcAft>
+              <a:defRPr sz="1100" b="1">
                 <a:solidFill>
                   <a:srgbClr val="0E7C86"/>
                 </a:solidFill>
@@ -6263,7 +6313,7 @@
               </a:defRPr>
             </a:pPr>
             <a:r>
-              <a:rPr sz="1200" b="1">
+              <a:rPr sz="1100" b="1">
                 <a:solidFill>
                   <a:srgbClr val="0E7C86"/>
                 </a:solidFill>
@@ -6276,14 +6326,14 @@
       </p:sp>
       <p:sp>
         <p:nvSpPr>
-          <p:cNvPr id="8" name="Rounded Rectangle 7"/>
+          <p:cNvPr id="9" name="Rounded Rectangle 8"/>
           <p:cNvSpPr/>
           <p:nvPr/>
         </p:nvSpPr>
         <p:spPr>
           <a:xfrm>
-            <a:off x="4280306" y="2240280"/>
-            <a:ext cx="3631082" cy="1737360"/>
+            <a:off x="4280306" y="3886200"/>
+            <a:ext cx="3631082" cy="1325880"/>
           </a:xfrm>
           <a:prstGeom prst="roundRect">
             <a:avLst>
@@ -6346,14 +6396,14 @@
       </p:sp>
       <p:sp>
         <p:nvSpPr>
-          <p:cNvPr id="9" name="TextBox 8"/>
+          <p:cNvPr id="10" name="TextBox 9"/>
           <p:cNvSpPr txBox="1"/>
           <p:nvPr/>
         </p:nvSpPr>
         <p:spPr>
           <a:xfrm>
-            <a:off x="4280306" y="1856232"/>
-            <a:ext cx="3631082" cy="347472"/>
+            <a:off x="4280306" y="3520440"/>
+            <a:ext cx="3631082" cy="310896"/>
           </a:xfrm>
           <a:prstGeom prst="rect">
             <a:avLst/>
@@ -6371,9 +6421,9 @@
                 <a:spcPct val="100000"/>
               </a:lnSpc>
               <a:spcAft>
-                <a:spcPts val="600"/>
-              </a:spcAft>
-              <a:defRPr sz="1200" b="1">
+                <a:spcPts val="200"/>
+              </a:spcAft>
+              <a:defRPr sz="1100" b="1">
                 <a:solidFill>
                   <a:srgbClr val="0E7C86"/>
                 </a:solidFill>
@@ -6381,7 +6431,7 @@
               </a:defRPr>
             </a:pPr>
             <a:r>
-              <a:rPr sz="1200" b="1">
+              <a:rPr sz="1100" b="1">
                 <a:solidFill>
                   <a:srgbClr val="0E7C86"/>
                 </a:solidFill>
@@ -6394,14 +6444,14 @@
       </p:sp>
       <p:sp>
         <p:nvSpPr>
-          <p:cNvPr id="10" name="Rounded Rectangle 9"/>
+          <p:cNvPr id="11" name="Rounded Rectangle 10"/>
           <p:cNvSpPr/>
           <p:nvPr/>
         </p:nvSpPr>
         <p:spPr>
           <a:xfrm>
-            <a:off x="8057692" y="2240280"/>
-            <a:ext cx="3631082" cy="1737360"/>
+            <a:off x="8057692" y="3886200"/>
+            <a:ext cx="3631082" cy="1325880"/>
           </a:xfrm>
           <a:prstGeom prst="roundRect">
             <a:avLst>
@@ -6464,14 +6514,14 @@
       </p:sp>
       <p:sp>
         <p:nvSpPr>
-          <p:cNvPr id="11" name="TextBox 10"/>
+          <p:cNvPr id="12" name="TextBox 11"/>
           <p:cNvSpPr txBox="1"/>
           <p:nvPr/>
         </p:nvSpPr>
         <p:spPr>
           <a:xfrm>
-            <a:off x="8057692" y="1856232"/>
-            <a:ext cx="3631082" cy="347472"/>
+            <a:off x="8057692" y="3520440"/>
+            <a:ext cx="3631082" cy="310896"/>
           </a:xfrm>
           <a:prstGeom prst="rect">
             <a:avLst/>
@@ -6489,9 +6539,9 @@
                 <a:spcPct val="100000"/>
               </a:lnSpc>
               <a:spcAft>
-                <a:spcPts val="600"/>
-              </a:spcAft>
-              <a:defRPr sz="1200" b="1">
+                <a:spcPts val="200"/>
+              </a:spcAft>
+              <a:defRPr sz="1100" b="1">
                 <a:solidFill>
                   <a:srgbClr val="0E7C86"/>
                 </a:solidFill>
@@ -6499,7 +6549,7 @@
               </a:defRPr>
             </a:pPr>
             <a:r>
-              <a:rPr sz="1200" b="1">
+              <a:rPr sz="1100" b="1">
                 <a:solidFill>
                   <a:srgbClr val="0E7C86"/>
                 </a:solidFill>
@@ -11878,22 +11928,24 @@
       <p:grpSpPr/>
       <p:sp>
         <p:nvSpPr>
-          <p:cNvPr id="2" name="Title 1"/>
-          <p:cNvSpPr>
-            <a:spLocks noGrp="1"/>
-          </p:cNvSpPr>
-          <p:nvPr>
-            <p:ph type="title"/>
-          </p:nvPr>
+          <p:cNvPr id="2" name="TextBox 1"/>
+          <p:cNvSpPr txBox="1"/>
+          <p:nvPr/>
         </p:nvSpPr>
         <p:spPr>
           <a:xfrm>
-            <a:off x="502920" y="274320"/>
-            <a:ext cx="11185855" cy="777240"/>
+            <a:off x="502920" y="6382512"/>
+            <a:ext cx="10545775" cy="274320"/>
           </a:xfrm>
+          <a:prstGeom prst="rect">
+            <a:avLst/>
+          </a:prstGeom>
+          <a:noFill/>
         </p:spPr>
         <p:txBody>
-          <a:bodyPr wrap="square" anchor="b"/>
+          <a:bodyPr wrap="square" lIns="0" tIns="0">
+            <a:spAutoFit/>
+          </a:bodyPr>
           <a:lstStyle/>
           <a:p>
             <a:pPr algn="l">
@@ -11903,41 +11955,89 @@
               <a:spcAft>
                 <a:spcPts val="0"/>
               </a:spcAft>
-              <a:defRPr sz="2800" b="1">
-                <a:solidFill>
-                  <a:srgbClr val="1F3A5F"/>
-                </a:solidFill>
-                <a:latin typeface="Calibri"/>
-              </a:defRPr>
-            </a:pPr>
-            <a:r>
-              <a:rPr sz="2800" b="1">
-                <a:solidFill>
-                  <a:srgbClr val="1F3A5F"/>
-                </a:solidFill>
-                <a:latin typeface="Calibri"/>
-              </a:rPr>
-              <a:t>Where we are</a:t>
-            </a:r>
-          </a:p>
-        </p:txBody>
-      </p:sp>
-      <p:sp>
-        <p:nvSpPr>
-          <p:cNvPr id="3" name="Rectangle 2"/>
+              <a:defRPr sz="1000" b="0">
+                <a:solidFill>
+                  <a:srgbClr val="666666"/>
+                </a:solidFill>
+                <a:latin typeface="Calibri"/>
+              </a:defRPr>
+            </a:pPr>
+            <a:r>
+              <a:rPr sz="1000" b="0">
+                <a:solidFill>
+                  <a:srgbClr val="666666"/>
+                </a:solidFill>
+                <a:latin typeface="Calibri"/>
+              </a:rPr>
+              <a:t>Pathfinder Advanced - Op Program 12  |  Lesson 3</a:t>
+            </a:r>
+          </a:p>
+        </p:txBody>
+      </p:sp>
+      <p:sp>
+        <p:nvSpPr>
+          <p:cNvPr id="3" name="TextBox 2"/>
+          <p:cNvSpPr txBox="1"/>
+          <p:nvPr/>
+        </p:nvSpPr>
+        <p:spPr>
+          <a:xfrm>
+            <a:off x="11231575" y="6382512"/>
+            <a:ext cx="457200" cy="274320"/>
+          </a:xfrm>
+          <a:prstGeom prst="rect">
+            <a:avLst/>
+          </a:prstGeom>
+          <a:noFill/>
+        </p:spPr>
+        <p:txBody>
+          <a:bodyPr wrap="square" lIns="0" tIns="0">
+            <a:spAutoFit/>
+          </a:bodyPr>
+          <a:lstStyle/>
+          <a:p>
+            <a:pPr algn="r">
+              <a:lnSpc>
+                <a:spcPct val="100000"/>
+              </a:lnSpc>
+              <a:spcAft>
+                <a:spcPts val="0"/>
+              </a:spcAft>
+              <a:defRPr sz="1000" b="0">
+                <a:solidFill>
+                  <a:srgbClr val="666666"/>
+                </a:solidFill>
+                <a:latin typeface="Calibri"/>
+              </a:defRPr>
+            </a:pPr>
+            <a:r>
+              <a:rPr sz="1000" b="0">
+                <a:solidFill>
+                  <a:srgbClr val="666666"/>
+                </a:solidFill>
+                <a:latin typeface="Calibri"/>
+              </a:rPr>
+              <a:t>5</a:t>
+            </a:r>
+          </a:p>
+        </p:txBody>
+      </p:sp>
+      <p:sp>
+        <p:nvSpPr>
+          <p:cNvPr id="4" name="Rectangle 3"/>
           <p:cNvSpPr/>
           <p:nvPr/>
         </p:nvSpPr>
         <p:spPr>
           <a:xfrm>
-            <a:off x="502920" y="1097280"/>
-            <a:ext cx="11185855" cy="19050"/>
+            <a:off x="0" y="1234440"/>
+            <a:ext cx="256032" cy="1554480"/>
           </a:xfrm>
           <a:prstGeom prst="rect">
             <a:avLst/>
           </a:prstGeom>
           <a:solidFill>
-            <a:srgbClr val="C8D2DE"/>
+            <a:srgbClr val="0E7C86"/>
           </a:solidFill>
           <a:ln>
             <a:noFill/>
@@ -11968,14 +12068,14 @@
       </p:sp>
       <p:sp>
         <p:nvSpPr>
-          <p:cNvPr id="4" name="TextBox 3"/>
+          <p:cNvPr id="5" name="TextBox 4"/>
           <p:cNvSpPr txBox="1"/>
           <p:nvPr/>
         </p:nvSpPr>
         <p:spPr>
           <a:xfrm>
-            <a:off x="502920" y="6382512"/>
-            <a:ext cx="10545775" cy="274320"/>
+            <a:off x="777240" y="1325880"/>
+            <a:ext cx="10515600" cy="1051560"/>
           </a:xfrm>
           <a:prstGeom prst="rect">
             <a:avLst/>
@@ -11983,7 +12083,7 @@
           <a:noFill/>
         </p:spPr>
         <p:txBody>
-          <a:bodyPr wrap="square" lIns="0" tIns="0">
+          <a:bodyPr wrap="square" lIns="0" tIns="0" rIns="0" bIns="0">
             <a:spAutoFit/>
           </a:bodyPr>
           <a:lstStyle/>
@@ -11995,35 +12095,35 @@
               <a:spcAft>
                 <a:spcPts val="0"/>
               </a:spcAft>
-              <a:defRPr sz="1000" b="0">
-                <a:solidFill>
-                  <a:srgbClr val="666666"/>
-                </a:solidFill>
-                <a:latin typeface="Calibri"/>
-              </a:defRPr>
-            </a:pPr>
-            <a:r>
-              <a:rPr sz="1000" b="0">
-                <a:solidFill>
-                  <a:srgbClr val="666666"/>
-                </a:solidFill>
-                <a:latin typeface="Calibri"/>
-              </a:rPr>
-              <a:t>Pathfinder Advanced - Op Program 12  |  Lesson 3</a:t>
-            </a:r>
-          </a:p>
-        </p:txBody>
-      </p:sp>
-      <p:sp>
-        <p:nvSpPr>
-          <p:cNvPr id="5" name="TextBox 4"/>
+              <a:defRPr sz="3600" b="1">
+                <a:solidFill>
+                  <a:srgbClr val="1F3A5F"/>
+                </a:solidFill>
+                <a:latin typeface="Calibri"/>
+              </a:defRPr>
+            </a:pPr>
+            <a:r>
+              <a:rPr sz="3600" b="1">
+                <a:solidFill>
+                  <a:srgbClr val="1F3A5F"/>
+                </a:solidFill>
+                <a:latin typeface="Calibri"/>
+              </a:rPr>
+              <a:t>Locking a board</a:t>
+            </a:r>
+          </a:p>
+        </p:txBody>
+      </p:sp>
+      <p:sp>
+        <p:nvSpPr>
+          <p:cNvPr id="6" name="TextBox 5"/>
           <p:cNvSpPr txBox="1"/>
           <p:nvPr/>
         </p:nvSpPr>
         <p:spPr>
           <a:xfrm>
-            <a:off x="11231575" y="6382512"/>
-            <a:ext cx="457200" cy="274320"/>
+            <a:off x="777240" y="2423160"/>
+            <a:ext cx="10515600" cy="685800"/>
           </a:xfrm>
           <a:prstGeom prst="rect">
             <a:avLst/>
@@ -12031,19 +12131,19 @@
           <a:noFill/>
         </p:spPr>
         <p:txBody>
-          <a:bodyPr wrap="square" lIns="0" tIns="0">
+          <a:bodyPr wrap="square" lIns="0" tIns="0" rIns="0" bIns="0">
             <a:spAutoFit/>
           </a:bodyPr>
           <a:lstStyle/>
           <a:p>
-            <a:pPr algn="r">
-              <a:lnSpc>
-                <a:spcPct val="100000"/>
-              </a:lnSpc>
-              <a:spcAft>
-                <a:spcPts val="0"/>
-              </a:spcAft>
-              <a:defRPr sz="1000" b="0">
+            <a:pPr algn="l">
+              <a:lnSpc>
+                <a:spcPct val="100000"/>
+              </a:lnSpc>
+              <a:spcAft>
+                <a:spcPts val="400"/>
+              </a:spcAft>
+              <a:defRPr sz="1600" b="0">
                 <a:solidFill>
                   <a:srgbClr val="666666"/>
                 </a:solidFill>
@@ -12051,27 +12151,27 @@
               </a:defRPr>
             </a:pPr>
             <a:r>
-              <a:rPr sz="1000" b="0">
+              <a:rPr sz="1600" b="0">
                 <a:solidFill>
                   <a:srgbClr val="666666"/>
                 </a:solidFill>
                 <a:latin typeface="Calibri"/>
               </a:rPr>
-              <a:t>5</a:t>
-            </a:r>
-          </a:p>
-        </p:txBody>
-      </p:sp>
-      <p:sp>
-        <p:nvSpPr>
-          <p:cNvPr id="6" name="Rounded Rectangle 5"/>
+              <a:t>About 30 minutes</a:t>
+            </a:r>
+          </a:p>
+        </p:txBody>
+      </p:sp>
+      <p:sp>
+        <p:nvSpPr>
+          <p:cNvPr id="7" name="Rounded Rectangle 6"/>
           <p:cNvSpPr/>
           <p:nvPr/>
         </p:nvSpPr>
         <p:spPr>
           <a:xfrm>
-            <a:off x="502920" y="2240280"/>
-            <a:ext cx="3631082" cy="1737360"/>
+            <a:off x="502920" y="3886200"/>
+            <a:ext cx="3631082" cy="1325880"/>
           </a:xfrm>
           <a:prstGeom prst="roundRect">
             <a:avLst>
@@ -12134,14 +12234,14 @@
       </p:sp>
       <p:sp>
         <p:nvSpPr>
-          <p:cNvPr id="7" name="TextBox 6"/>
+          <p:cNvPr id="8" name="TextBox 7"/>
           <p:cNvSpPr txBox="1"/>
           <p:nvPr/>
         </p:nvSpPr>
         <p:spPr>
           <a:xfrm>
-            <a:off x="502920" y="1856232"/>
-            <a:ext cx="3631082" cy="347472"/>
+            <a:off x="502920" y="3520440"/>
+            <a:ext cx="3631082" cy="310896"/>
           </a:xfrm>
           <a:prstGeom prst="rect">
             <a:avLst/>
@@ -12159,9 +12259,9 @@
                 <a:spcPct val="100000"/>
               </a:lnSpc>
               <a:spcAft>
-                <a:spcPts val="600"/>
-              </a:spcAft>
-              <a:defRPr sz="1200" b="1">
+                <a:spcPts val="200"/>
+              </a:spcAft>
+              <a:defRPr sz="1100" b="1">
                 <a:solidFill>
                   <a:srgbClr val="0E7C86"/>
                 </a:solidFill>
@@ -12169,7 +12269,7 @@
               </a:defRPr>
             </a:pPr>
             <a:r>
-              <a:rPr sz="1200" b="1">
+              <a:rPr sz="1100" b="1">
                 <a:solidFill>
                   <a:srgbClr val="0E7C86"/>
                 </a:solidFill>
@@ -12182,14 +12282,14 @@
       </p:sp>
       <p:sp>
         <p:nvSpPr>
-          <p:cNvPr id="8" name="Rounded Rectangle 7"/>
+          <p:cNvPr id="9" name="Rounded Rectangle 8"/>
           <p:cNvSpPr/>
           <p:nvPr/>
         </p:nvSpPr>
         <p:spPr>
           <a:xfrm>
-            <a:off x="4280306" y="2240280"/>
-            <a:ext cx="3631082" cy="1737360"/>
+            <a:off x="4280306" y="3886200"/>
+            <a:ext cx="3631082" cy="1325880"/>
           </a:xfrm>
           <a:prstGeom prst="roundRect">
             <a:avLst>
@@ -12252,14 +12352,14 @@
       </p:sp>
       <p:sp>
         <p:nvSpPr>
-          <p:cNvPr id="9" name="TextBox 8"/>
+          <p:cNvPr id="10" name="TextBox 9"/>
           <p:cNvSpPr txBox="1"/>
           <p:nvPr/>
         </p:nvSpPr>
         <p:spPr>
           <a:xfrm>
-            <a:off x="4280306" y="1856232"/>
-            <a:ext cx="3631082" cy="347472"/>
+            <a:off x="4280306" y="3520440"/>
+            <a:ext cx="3631082" cy="310896"/>
           </a:xfrm>
           <a:prstGeom prst="rect">
             <a:avLst/>
@@ -12277,9 +12377,9 @@
                 <a:spcPct val="100000"/>
               </a:lnSpc>
               <a:spcAft>
-                <a:spcPts val="600"/>
-              </a:spcAft>
-              <a:defRPr sz="1200" b="1">
+                <a:spcPts val="200"/>
+              </a:spcAft>
+              <a:defRPr sz="1100" b="1">
                 <a:solidFill>
                   <a:srgbClr val="0E7C86"/>
                 </a:solidFill>
@@ -12287,7 +12387,7 @@
               </a:defRPr>
             </a:pPr>
             <a:r>
-              <a:rPr sz="1200" b="1">
+              <a:rPr sz="1100" b="1">
                 <a:solidFill>
                   <a:srgbClr val="0E7C86"/>
                 </a:solidFill>
@@ -12300,14 +12400,14 @@
       </p:sp>
       <p:sp>
         <p:nvSpPr>
-          <p:cNvPr id="10" name="Rounded Rectangle 9"/>
+          <p:cNvPr id="11" name="Rounded Rectangle 10"/>
           <p:cNvSpPr/>
           <p:nvPr/>
         </p:nvSpPr>
         <p:spPr>
           <a:xfrm>
-            <a:off x="8057692" y="2240280"/>
-            <a:ext cx="3631082" cy="1737360"/>
+            <a:off x="8057692" y="3886200"/>
+            <a:ext cx="3631082" cy="1325880"/>
           </a:xfrm>
           <a:prstGeom prst="roundRect">
             <a:avLst>

--- a/ground-vehicle/docs/courses/advanced/l3_bluetooth_and_storage.pptx
+++ b/ground-vehicle/docs/courses/advanced/l3_bluetooth_and_storage.pptx
@@ -601,7 +601,7 @@
               <a:rPr sz="1200">
                 <a:latin typeface="Calibri"/>
               </a:rPr>
-              <a:t>Start with the fact: new flash is full of 0xFF. Read an int out of that and you get -1.</a:t>
+              <a:t>EEPROM is a flat array of bytes and YOU choose the layout. Nothing stops two values overlapping - the compiler cannot help you here.</a:t>
             </a:r>
           </a:p>
           <a:p>
@@ -609,7 +609,7 @@
               <a:rPr sz="1200">
                 <a:latin typeface="Calibri"/>
               </a:rPr>
-              <a:t>The magic byte says the bytes are OURS. It does not say they still make sense.</a:t>
+              <a:t>Four bytes per slot because an int and a float are both four bytes on this chip.</a:t>
             </a:r>
           </a:p>
           <a:p>
@@ -617,7 +617,7 @@
               <a:rPr sz="1200">
                 <a:latin typeface="Calibri"/>
               </a:rPr>
-              <a:t>That distinction is the whole slide. A value written by an older version of the program is perfectly valid data and still wrong for this one.</a:t>
+              <a:t>Ask why the addresses are spaced out and written down in one place. The answer is that a map you can read is a map you can extend safely.</a:t>
             </a:r>
           </a:p>
           <a:p>
@@ -625,7 +625,7 @@
               <a:rPr sz="1200">
                 <a:latin typeface="Calibri"/>
               </a:rPr>
-              <a:t>Defensive loading is not paranoia - it is the difference between a vehicle that boots with odd settings and one that will not boot at all.</a:t>
+              <a:t>They break this deliberately in step 6 of the activity, so plant the idea now.</a:t>
             </a:r>
           </a:p>
         </p:txBody>
@@ -698,7 +698,31 @@
               <a:rPr sz="1200">
                 <a:latin typeface="Calibri"/>
               </a:rPr>
-              <a:t>Twenty seconds. Second activity.</a:t>
+              <a:t>Start with the fact: new flash is full of 0xFF. Read an int out of that and you get -1.</a:t>
+            </a:r>
+          </a:p>
+          <a:p>
+            <a:r>
+              <a:rPr sz="1200">
+                <a:latin typeface="Calibri"/>
+              </a:rPr>
+              <a:t>The magic byte says the bytes are OURS. It does not say they still make sense.</a:t>
+            </a:r>
+          </a:p>
+          <a:p>
+            <a:r>
+              <a:rPr sz="1200">
+                <a:latin typeface="Calibri"/>
+              </a:rPr>
+              <a:t>That distinction is the whole slide. A value written by an older version of the program is perfectly valid data and still wrong for this one.</a:t>
+            </a:r>
+          </a:p>
+          <a:p>
+            <a:r>
+              <a:rPr sz="1200">
+                <a:latin typeface="Calibri"/>
+              </a:rPr>
+              <a:t>Defensive loading is not paranoia - it is the difference between a vehicle that boots with odd settings and one that will not boot at all.</a:t>
             </a:r>
           </a:p>
         </p:txBody>
@@ -1790,31 +1814,7 @@
               <a:rPr sz="1200">
                 <a:latin typeface="Calibri"/>
               </a:rPr>
-              <a:t>Lead with the headline: there is no EEPROM on this chip. The library is an emulation over flash.</a:t>
-            </a:r>
-          </a:p>
-          <a:p>
-            <a:r>
-              <a:rPr sz="1200">
-                <a:latin typeface="Calibri"/>
-              </a:rPr>
-              <a:t>The three consequences are all practical. begin() first, nothing saved without commit(), and flash wears out.</a:t>
-            </a:r>
-          </a:p>
-          <a:p>
-            <a:r>
-              <a:rPr sz="1200">
-                <a:latin typeface="Calibri"/>
-              </a:rPr>
-              <a:t>The warning panel has the arithmetic: a commit() in loop() at 30 Hz burns a hundred thousand cycles in under an hour. Say that number out loud.</a:t>
-            </a:r>
-          </a:p>
-          <a:p>
-            <a:r>
-              <a:rPr sz="1200">
-                <a:latin typeface="Calibri"/>
-              </a:rPr>
-              <a:t>The rule to take away: write when something changed and a person asked, never on a schedule.</a:t>
+              <a:t>Twenty seconds. Second activity.</a:t>
             </a:r>
           </a:p>
         </p:txBody>
@@ -1887,7 +1887,7 @@
               <a:rPr sz="1200">
                 <a:latin typeface="Calibri"/>
               </a:rPr>
-              <a:t>EEPROM is a flat array of bytes and YOU choose the layout. Nothing stops two values overlapping - the compiler cannot help you here.</a:t>
+              <a:t>Lead with the headline: there is no EEPROM on this chip. The library is an emulation over flash.</a:t>
             </a:r>
           </a:p>
           <a:p>
@@ -1895,7 +1895,7 @@
               <a:rPr sz="1200">
                 <a:latin typeface="Calibri"/>
               </a:rPr>
-              <a:t>Four bytes per slot because an int and a float are both four bytes on this chip.</a:t>
+              <a:t>The three consequences are all practical. begin() first, nothing saved without commit(), and flash wears out.</a:t>
             </a:r>
           </a:p>
           <a:p>
@@ -1903,7 +1903,7 @@
               <a:rPr sz="1200">
                 <a:latin typeface="Calibri"/>
               </a:rPr>
-              <a:t>Ask why the addresses are spaced out and written down in one place. The answer is that a map you can read is a map you can extend safely.</a:t>
+              <a:t>The warning panel has the arithmetic: a commit() in loop() at 30 Hz burns a hundred thousand cycles in under an hour. Say that number out loud.</a:t>
             </a:r>
           </a:p>
           <a:p>
@@ -1911,7 +1911,7 @@
               <a:rPr sz="1200">
                 <a:latin typeface="Calibri"/>
               </a:rPr>
-              <a:t>They break this deliberately in step 6 of the activity, so plant the idea now.</a:t>
+              <a:t>The rule to take away: write when something changed and a person asked, never on a schedule.</a:t>
             </a:r>
           </a:p>
         </p:txBody>
@@ -5515,7 +5515,7 @@
                 </a:solidFill>
                 <a:latin typeface="Calibri"/>
               </a:rPr>
-              <a:t>The magic byte, and never trusting storage</a:t>
+              <a:t>The storage map, and why the addresses are spaced out</a:t>
             </a:r>
           </a:p>
         </p:txBody>
@@ -5669,7 +5669,7 @@
         <p:spPr>
           <a:xfrm>
             <a:off x="502920" y="1188720"/>
-            <a:ext cx="11185855" cy="530352"/>
+            <a:ext cx="7047088" cy="274320"/>
           </a:xfrm>
           <a:prstGeom prst="rect">
             <a:avLst/>
@@ -5687,37 +5687,368 @@
                 <a:spcPct val="100000"/>
               </a:lnSpc>
               <a:spcAft>
-                <a:spcPts val="600"/>
-              </a:spcAft>
-              <a:defRPr sz="1900" b="1">
+                <a:spcPts val="200"/>
+              </a:spcAft>
+              <a:defRPr sz="1200" b="1">
                 <a:solidFill>
                   <a:srgbClr val="0E7C86"/>
                 </a:solidFill>
-                <a:latin typeface="Calibri"/>
-              </a:defRPr>
-            </a:pPr>
-            <a:r>
-              <a:rPr sz="1900" b="1">
+                <a:latin typeface="Consolas"/>
+              </a:defRPr>
+            </a:pPr>
+            <a:r>
+              <a:rPr sz="1200" b="1">
                 <a:solidFill>
                   <a:srgbClr val="0E7C86"/>
                 </a:solidFill>
-                <a:latin typeface="Calibri"/>
-              </a:rPr>
-              <a:t>Two separate checks, for two separate problems</a:t>
-            </a:r>
-          </a:p>
-        </p:txBody>
-      </p:sp>
-      <p:sp>
-        <p:nvSpPr>
-          <p:cNvPr id="7" name="TextBox 6"/>
+                <a:latin typeface="Consolas"/>
+              </a:rPr>
+              <a:t>Config.h</a:t>
+            </a:r>
+          </a:p>
+        </p:txBody>
+      </p:sp>
+      <p:sp>
+        <p:nvSpPr>
+          <p:cNvPr id="7" name="CODE_PANEL"/>
+          <p:cNvSpPr/>
+          <p:nvPr/>
+        </p:nvSpPr>
+        <p:spPr>
+          <a:xfrm>
+            <a:off x="502920" y="1517904"/>
+            <a:ext cx="7047088" cy="4745736"/>
+          </a:xfrm>
+          <a:prstGeom prst="roundRect">
+            <a:avLst>
+              <a:gd name="adj" fmla="val 4000"/>
+            </a:avLst>
+          </a:prstGeom>
+          <a:solidFill>
+            <a:srgbClr val="F4F6F8"/>
+          </a:solidFill>
+          <a:ln w="12700">
+            <a:solidFill>
+              <a:srgbClr val="C8D2DE"/>
+            </a:solidFill>
+          </a:ln>
+          <a:effectLst/>
+        </p:spPr>
+        <p:style>
+          <a:lnRef idx="1">
+            <a:schemeClr val="accent1"/>
+          </a:lnRef>
+          <a:fillRef idx="3">
+            <a:schemeClr val="accent1"/>
+          </a:fillRef>
+          <a:effectRef idx="2">
+            <a:schemeClr val="accent1"/>
+          </a:effectRef>
+          <a:fontRef idx="minor">
+            <a:schemeClr val="lt1"/>
+          </a:fontRef>
+        </p:style>
+        <p:txBody>
+          <a:bodyPr rtlCol="0" anchor="t" wrap="square" lIns="146304" tIns="91440" bIns="73152"/>
+          <a:lstStyle/>
+          <a:p>
+            <a:pPr algn="l">
+              <a:lnSpc>
+                <a:spcPct val="100000"/>
+              </a:lnSpc>
+              <a:spcAft>
+                <a:spcPts val="0"/>
+              </a:spcAft>
+              <a:defRPr sz="1450">
+                <a:latin typeface="Consolas"/>
+              </a:defRPr>
+            </a:pPr>
+            <a:r>
+              <a:rPr sz="1450">
+                <a:solidFill>
+                  <a:srgbClr val="222222"/>
+                </a:solidFill>
+                <a:latin typeface="Consolas"/>
+              </a:rPr>
+              <a:t>const int ADDR_DEADZONE       =  0;   // int,   4 bytes</a:t>
+            </a:r>
+          </a:p>
+          <a:p>
+            <a:pPr algn="l">
+              <a:lnSpc>
+                <a:spcPct val="100000"/>
+              </a:lnSpc>
+              <a:spcAft>
+                <a:spcPts val="0"/>
+              </a:spcAft>
+              <a:defRPr sz="1450">
+                <a:latin typeface="Consolas"/>
+              </a:defRPr>
+            </a:pPr>
+            <a:r>
+              <a:rPr sz="1450">
+                <a:solidFill>
+                  <a:srgbClr val="222222"/>
+                </a:solidFill>
+                <a:latin typeface="Consolas"/>
+              </a:rPr>
+              <a:t>const int ADDR_DEADZONE_LS_X  =  4;</a:t>
+            </a:r>
+          </a:p>
+          <a:p>
+            <a:pPr algn="l">
+              <a:lnSpc>
+                <a:spcPct val="100000"/>
+              </a:lnSpc>
+              <a:spcAft>
+                <a:spcPts val="0"/>
+              </a:spcAft>
+              <a:defRPr sz="1450">
+                <a:latin typeface="Consolas"/>
+              </a:defRPr>
+            </a:pPr>
+            <a:r>
+              <a:rPr sz="1450">
+                <a:solidFill>
+                  <a:srgbClr val="222222"/>
+                </a:solidFill>
+                <a:latin typeface="Consolas"/>
+              </a:rPr>
+              <a:t>const int ADDR_DEADZONE_LS_Y  =  8;</a:t>
+            </a:r>
+          </a:p>
+          <a:p>
+            <a:pPr algn="l">
+              <a:lnSpc>
+                <a:spcPct val="100000"/>
+              </a:lnSpc>
+              <a:spcAft>
+                <a:spcPts val="0"/>
+              </a:spcAft>
+              <a:defRPr sz="1450">
+                <a:latin typeface="Consolas"/>
+              </a:defRPr>
+            </a:pPr>
+            <a:r>
+              <a:rPr sz="1450">
+                <a:solidFill>
+                  <a:srgbClr val="222222"/>
+                </a:solidFill>
+                <a:latin typeface="Consolas"/>
+              </a:rPr>
+              <a:t>const int ADDR_DEADZONE_RS_X  = 12;</a:t>
+            </a:r>
+          </a:p>
+          <a:p>
+            <a:pPr algn="l">
+              <a:lnSpc>
+                <a:spcPct val="100000"/>
+              </a:lnSpc>
+              <a:spcAft>
+                <a:spcPts val="0"/>
+              </a:spcAft>
+              <a:defRPr sz="1450">
+                <a:latin typeface="Consolas"/>
+              </a:defRPr>
+            </a:pPr>
+            <a:r>
+              <a:rPr sz="1450">
+                <a:solidFill>
+                  <a:srgbClr val="222222"/>
+                </a:solidFill>
+                <a:latin typeface="Consolas"/>
+              </a:rPr>
+              <a:t>const int ADDR_DEADZONE_RS_Y  = 16;</a:t>
+            </a:r>
+          </a:p>
+          <a:p>
+            <a:pPr algn="l">
+              <a:lnSpc>
+                <a:spcPct val="100000"/>
+              </a:lnSpc>
+              <a:spcAft>
+                <a:spcPts val="0"/>
+              </a:spcAft>
+              <a:defRPr sz="1450">
+                <a:latin typeface="Consolas"/>
+              </a:defRPr>
+            </a:pPr>
+            <a:r>
+              <a:rPr sz="1450">
+                <a:solidFill>
+                  <a:srgbClr val="222222"/>
+                </a:solidFill>
+                <a:latin typeface="Consolas"/>
+              </a:rPr>
+              <a:t>const int ADDR_LS_Y_SC        = 20;   // float, 4 bytes</a:t>
+            </a:r>
+          </a:p>
+          <a:p>
+            <a:pPr algn="l">
+              <a:lnSpc>
+                <a:spcPct val="100000"/>
+              </a:lnSpc>
+              <a:spcAft>
+                <a:spcPts val="0"/>
+              </a:spcAft>
+              <a:defRPr sz="1450">
+                <a:latin typeface="Consolas"/>
+              </a:defRPr>
+            </a:pPr>
+            <a:r>
+              <a:rPr sz="1450">
+                <a:solidFill>
+                  <a:srgbClr val="222222"/>
+                </a:solidFill>
+                <a:latin typeface="Consolas"/>
+              </a:rPr>
+              <a:t>const int ADDR_LS_X_SC        = 24;</a:t>
+            </a:r>
+          </a:p>
+          <a:p>
+            <a:pPr algn="l">
+              <a:lnSpc>
+                <a:spcPct val="100000"/>
+              </a:lnSpc>
+              <a:spcAft>
+                <a:spcPts val="0"/>
+              </a:spcAft>
+              <a:defRPr sz="1450">
+                <a:latin typeface="Consolas"/>
+              </a:defRPr>
+            </a:pPr>
+            <a:r>
+              <a:rPr sz="1450">
+                <a:solidFill>
+                  <a:srgbClr val="222222"/>
+                </a:solidFill>
+                <a:latin typeface="Consolas"/>
+              </a:rPr>
+              <a:t>const int ADDR_RS_Y_SC        = 28;</a:t>
+            </a:r>
+          </a:p>
+          <a:p>
+            <a:pPr algn="l">
+              <a:lnSpc>
+                <a:spcPct val="100000"/>
+              </a:lnSpc>
+              <a:spcAft>
+                <a:spcPts val="0"/>
+              </a:spcAft>
+              <a:defRPr sz="1450">
+                <a:latin typeface="Consolas"/>
+              </a:defRPr>
+            </a:pPr>
+            <a:r>
+              <a:rPr sz="1450">
+                <a:solidFill>
+                  <a:srgbClr val="222222"/>
+                </a:solidFill>
+                <a:latin typeface="Consolas"/>
+              </a:rPr>
+              <a:t>const int ADDR_RS_X_SC        = 32;</a:t>
+            </a:r>
+          </a:p>
+          <a:p>
+            <a:pPr algn="l">
+              <a:lnSpc>
+                <a:spcPct val="100000"/>
+              </a:lnSpc>
+              <a:spcAft>
+                <a:spcPts val="0"/>
+              </a:spcAft>
+              <a:defRPr sz="1450">
+                <a:latin typeface="Consolas"/>
+              </a:defRPr>
+            </a:pPr>
+            <a:r>
+              <a:rPr sz="1450" b="1">
+                <a:solidFill>
+                  <a:srgbClr val="0E7C86"/>
+                </a:solidFill>
+                <a:latin typeface="Consolas"/>
+              </a:rPr>
+              <a:t>const int ADDR_PAIRED_VALID   = 36;   // 1 byte:  0xA5 when valid</a:t>
+            </a:r>
+          </a:p>
+          <a:p>
+            <a:pPr algn="l">
+              <a:lnSpc>
+                <a:spcPct val="100000"/>
+              </a:lnSpc>
+              <a:spcAft>
+                <a:spcPts val="0"/>
+              </a:spcAft>
+              <a:defRPr sz="1450">
+                <a:latin typeface="Consolas"/>
+              </a:defRPr>
+            </a:pPr>
+            <a:r>
+              <a:rPr sz="1450" b="1">
+                <a:solidFill>
+                  <a:srgbClr val="0E7C86"/>
+                </a:solidFill>
+                <a:latin typeface="Consolas"/>
+              </a:rPr>
+              <a:t>const int ADDR_PAIRED_ADDR    = 37;   // 6 bytes: the address</a:t>
+            </a:r>
+          </a:p>
+          <a:p>
+            <a:pPr algn="l">
+              <a:lnSpc>
+                <a:spcPct val="100000"/>
+              </a:lnSpc>
+              <a:spcAft>
+                <a:spcPts val="0"/>
+              </a:spcAft>
+              <a:defRPr sz="1450">
+                <a:latin typeface="Consolas"/>
+              </a:defRPr>
+            </a:pPr>
+            <a:r>
+              <a:rPr sz="1450">
+                <a:solidFill>
+                  <a:srgbClr val="222222"/>
+                </a:solidFill>
+                <a:latin typeface="Consolas"/>
+              </a:rPr>
+              <a:t> </a:t>
+            </a:r>
+          </a:p>
+          <a:p>
+            <a:pPr algn="l">
+              <a:lnSpc>
+                <a:spcPct val="100000"/>
+              </a:lnSpc>
+              <a:spcAft>
+                <a:spcPts val="0"/>
+              </a:spcAft>
+              <a:defRPr sz="1450">
+                <a:latin typeface="Consolas"/>
+              </a:defRPr>
+            </a:pPr>
+            <a:r>
+              <a:rPr sz="1450" b="1">
+                <a:solidFill>
+                  <a:srgbClr val="0E7C86"/>
+                </a:solidFill>
+                <a:latin typeface="Consolas"/>
+              </a:rPr>
+              <a:t>const uint8_t PAIRED_VALID_MAGIC = 0xA5;</a:t>
+            </a:r>
+          </a:p>
+        </p:txBody>
+      </p:sp>
+      <p:sp>
+        <p:nvSpPr>
+          <p:cNvPr id="8" name="TextBox 7"/>
           <p:cNvSpPr txBox="1"/>
           <p:nvPr/>
         </p:nvSpPr>
         <p:spPr>
           <a:xfrm>
-            <a:off x="502920" y="1755648"/>
-            <a:ext cx="5364327" cy="4507992"/>
+            <a:off x="7870048" y="1517904"/>
+            <a:ext cx="3818727" cy="4745736"/>
           </a:xfrm>
           <a:prstGeom prst="rect">
             <a:avLst/>
@@ -5735,162 +6066,7 @@
                 <a:spcPct val="100000"/>
               </a:lnSpc>
               <a:spcAft>
-                <a:spcPts val="900"/>
-              </a:spcAft>
-              <a:defRPr sz="1800" b="0">
-                <a:solidFill>
-                  <a:srgbClr val="222222"/>
-                </a:solidFill>
-                <a:latin typeface="Calibri"/>
-              </a:defRPr>
-            </a:pPr>
-            <a:r>
-              <a:rPr sz="1800" b="0">
-                <a:solidFill>
-                  <a:srgbClr val="222222"/>
-                </a:solidFill>
-                <a:latin typeface="Calibri"/>
-              </a:rPr>
-              <a:t>A brand new ESP32 has flash full of 0xFF. Read an int out of that and you get -1. Read a float and you get something meaningless.</a:t>
-            </a:r>
-          </a:p>
-          <a:p>
-            <a:pPr algn="l">
-              <a:lnSpc>
-                <a:spcPct val="100000"/>
-              </a:lnSpc>
-              <a:spcAft>
-                <a:spcPts val="900"/>
-              </a:spcAft>
-              <a:defRPr sz="900" b="0">
-                <a:solidFill>
-                  <a:srgbClr val="222222"/>
-                </a:solidFill>
-                <a:latin typeface="Calibri"/>
-              </a:defRPr>
-            </a:pPr>
-          </a:p>
-          <a:p>
-            <a:pPr algn="l">
-              <a:lnSpc>
-                <a:spcPct val="100000"/>
-              </a:lnSpc>
-              <a:spcAft>
-                <a:spcPts val="900"/>
-              </a:spcAft>
-              <a:defRPr sz="1800" b="0">
-                <a:solidFill>
-                  <a:srgbClr val="222222"/>
-                </a:solidFill>
-                <a:latin typeface="Calibri"/>
-              </a:defRPr>
-            </a:pPr>
-            <a:r>
-              <a:rPr sz="1800" b="0">
-                <a:solidFill>
-                  <a:srgbClr val="222222"/>
-                </a:solidFill>
-                <a:latin typeface="Calibri"/>
-              </a:rPr>
-              <a:t>So the first byte of the block is a MARKER, written only after a successful save. If it is not 0xA5, the data is not ours and we use the compiled-in defaults.</a:t>
-            </a:r>
-          </a:p>
-          <a:p>
-            <a:pPr algn="l">
-              <a:lnSpc>
-                <a:spcPct val="100000"/>
-              </a:lnSpc>
-              <a:spcAft>
-                <a:spcPts val="900"/>
-              </a:spcAft>
-              <a:defRPr sz="900" b="0">
-                <a:solidFill>
-                  <a:srgbClr val="222222"/>
-                </a:solidFill>
-                <a:latin typeface="Calibri"/>
-              </a:defRPr>
-            </a:pPr>
-          </a:p>
-          <a:p>
-            <a:pPr algn="l">
-              <a:lnSpc>
-                <a:spcPct val="100000"/>
-              </a:lnSpc>
-              <a:spcAft>
-                <a:spcPts val="900"/>
-              </a:spcAft>
-              <a:defRPr sz="1800" b="0">
-                <a:solidFill>
-                  <a:srgbClr val="222222"/>
-                </a:solidFill>
-                <a:latin typeface="Calibri"/>
-              </a:defRPr>
-            </a:pPr>
-            <a:r>
-              <a:rPr sz="1800" b="0">
-                <a:solidFill>
-                  <a:srgbClr val="222222"/>
-                </a:solidFill>
-                <a:latin typeface="Calibri"/>
-              </a:rPr>
-              <a:t>But that is not enough on its own. Even WITH the marker, every value is range checked as it loads:</a:t>
-            </a:r>
-          </a:p>
-          <a:p>
-            <a:pPr lvl="1" algn="l">
-              <a:lnSpc>
-                <a:spcPct val="100000"/>
-              </a:lnSpc>
-              <a:spcAft>
-                <a:spcPts val="900"/>
-              </a:spcAft>
-              <a:defRPr sz="1800" b="0">
-                <a:solidFill>
-                  <a:srgbClr val="222222"/>
-                </a:solidFill>
-                <a:latin typeface="Calibri"/>
-              </a:defRPr>
-            </a:pPr>
-            <a:r>
-              <a:rPr sz="1800" b="0">
-                <a:solidFill>
-                  <a:srgbClr val="222222"/>
-                </a:solidFill>
-                <a:latin typeface="Calibri"/>
-              </a:rPr>
-              <a:t>if (saved_dz &gt;= 0 &amp;&amp; saved_dz &lt;= DEADZONE_MAX)  INPUT_DEADZONE = saved_dz;</a:t>
-            </a:r>
-          </a:p>
-        </p:txBody>
-      </p:sp>
-      <p:sp>
-        <p:nvSpPr>
-          <p:cNvPr id="8" name="TextBox 7"/>
-          <p:cNvSpPr txBox="1"/>
-          <p:nvPr/>
-        </p:nvSpPr>
-        <p:spPr>
-          <a:xfrm>
-            <a:off x="6324447" y="1755648"/>
-            <a:ext cx="5364327" cy="4507992"/>
-          </a:xfrm>
-          <a:prstGeom prst="rect">
-            <a:avLst/>
-          </a:prstGeom>
-          <a:noFill/>
-        </p:spPr>
-        <p:txBody>
-          <a:bodyPr wrap="square" lIns="0" tIns="0" rIns="0" bIns="0">
-            <a:spAutoFit/>
-          </a:bodyPr>
-          <a:lstStyle/>
-          <a:p>
-            <a:pPr algn="l">
-              <a:lnSpc>
-                <a:spcPct val="100000"/>
-              </a:lnSpc>
-              <a:spcAft>
-                <a:spcPts val="900"/>
+                <a:spcPts val="700"/>
               </a:spcAft>
               <a:defRPr sz="1900" b="0">
                 <a:solidFill>
@@ -5906,32 +6082,16 @@
                 </a:solidFill>
                 <a:latin typeface="Calibri"/>
               </a:rPr>
-              <a:t>Why? Because a value saved by an OLDER version of the program is perfectly valid data and still wrong for this one. The marker tells you the bytes are yours. It does not tell you they still make sense.</a:t>
-            </a:r>
-          </a:p>
-          <a:p>
-            <a:pPr algn="l">
-              <a:lnSpc>
-                <a:spcPct val="100000"/>
-              </a:lnSpc>
-              <a:spcAft>
-                <a:spcPts val="900"/>
-              </a:spcAft>
-              <a:defRPr sz="950" b="0">
-                <a:solidFill>
-                  <a:srgbClr val="222222"/>
-                </a:solidFill>
-                <a:latin typeface="Calibri"/>
-              </a:defRPr>
-            </a:pPr>
-          </a:p>
-          <a:p>
-            <a:pPr algn="l">
-              <a:lnSpc>
-                <a:spcPct val="100000"/>
-              </a:lnSpc>
-              <a:spcAft>
-                <a:spcPts val="900"/>
+              <a:t>EEPROM is a flat array of bytes. YOU choose where each value lives, and nothing stops two values overlapping.</a:t>
+            </a:r>
+          </a:p>
+          <a:p>
+            <a:pPr algn="l">
+              <a:lnSpc>
+                <a:spcPct val="100000"/>
+              </a:lnSpc>
+              <a:spcAft>
+                <a:spcPts val="700"/>
               </a:spcAft>
               <a:defRPr sz="1900" b="0">
                 <a:solidFill>
@@ -5947,7 +6107,57 @@
                 </a:solidFill>
                 <a:latin typeface="Calibri"/>
               </a:rPr>
-              <a:t>Defensive loading is not paranoia. It is the difference between a vehicle that boots with odd settings and one that will not boot.</a:t>
+              <a:t>An int is 4 bytes and a float is 4 bytes on this chip, so each slot gets 4.</a:t>
+            </a:r>
+          </a:p>
+          <a:p>
+            <a:pPr algn="l">
+              <a:lnSpc>
+                <a:spcPct val="100000"/>
+              </a:lnSpc>
+              <a:spcAft>
+                <a:spcPts val="700"/>
+              </a:spcAft>
+              <a:defRPr sz="1900" b="0">
+                <a:solidFill>
+                  <a:srgbClr val="222222"/>
+                </a:solidFill>
+                <a:latin typeface="Calibri"/>
+              </a:defRPr>
+            </a:pPr>
+            <a:r>
+              <a:rPr sz="1900" b="0">
+                <a:solidFill>
+                  <a:srgbClr val="222222"/>
+                </a:solidFill>
+                <a:latin typeface="Calibri"/>
+              </a:rPr>
+              <a:t>Laying them out as one ADDR_ constant per value, in one place, is what makes an overlap visible when you read the file.</a:t>
+            </a:r>
+          </a:p>
+          <a:p>
+            <a:pPr algn="l">
+              <a:lnSpc>
+                <a:spcPct val="100000"/>
+              </a:lnSpc>
+              <a:spcAft>
+                <a:spcPts val="700"/>
+              </a:spcAft>
+              <a:defRPr sz="1900" b="0">
+                <a:solidFill>
+                  <a:srgbClr val="222222"/>
+                </a:solidFill>
+                <a:latin typeface="Calibri"/>
+              </a:defRPr>
+            </a:pPr>
+            <a:r>
+              <a:rPr sz="1900" b="0">
+                <a:solidFill>
+                  <a:srgbClr val="222222"/>
+                </a:solidFill>
+                <a:latin typeface="Calibri"/>
+              </a:rPr>
+              <a:t>Get this wrong and one setting silently corrupts another. It will look like a hardware fault.</a:t>
             </a:r>
           </a:p>
         </p:txBody>
@@ -5972,24 +6182,22 @@
       <p:grpSpPr/>
       <p:sp>
         <p:nvSpPr>
-          <p:cNvPr id="2" name="TextBox 1"/>
-          <p:cNvSpPr txBox="1"/>
-          <p:nvPr/>
+          <p:cNvPr id="2" name="Title 1"/>
+          <p:cNvSpPr>
+            <a:spLocks noGrp="1"/>
+          </p:cNvSpPr>
+          <p:nvPr>
+            <p:ph type="title"/>
+          </p:nvPr>
         </p:nvSpPr>
         <p:spPr>
           <a:xfrm>
-            <a:off x="502920" y="6382512"/>
-            <a:ext cx="10545775" cy="274320"/>
+            <a:off x="502920" y="274320"/>
+            <a:ext cx="11185855" cy="777240"/>
           </a:xfrm>
-          <a:prstGeom prst="rect">
-            <a:avLst/>
-          </a:prstGeom>
-          <a:noFill/>
         </p:spPr>
         <p:txBody>
-          <a:bodyPr wrap="square" lIns="0" tIns="0">
-            <a:spAutoFit/>
-          </a:bodyPr>
+          <a:bodyPr wrap="square" anchor="b"/>
           <a:lstStyle/>
           <a:p>
             <a:pPr algn="l">
@@ -5999,89 +6207,41 @@
               <a:spcAft>
                 <a:spcPts val="0"/>
               </a:spcAft>
-              <a:defRPr sz="1000" b="0">
-                <a:solidFill>
-                  <a:srgbClr val="666666"/>
-                </a:solidFill>
-                <a:latin typeface="Calibri"/>
-              </a:defRPr>
-            </a:pPr>
-            <a:r>
-              <a:rPr sz="1000" b="0">
-                <a:solidFill>
-                  <a:srgbClr val="666666"/>
-                </a:solidFill>
-                <a:latin typeface="Calibri"/>
-              </a:rPr>
-              <a:t>Pathfinder Advanced - Op Program 12  |  Lesson 3</a:t>
-            </a:r>
-          </a:p>
-        </p:txBody>
-      </p:sp>
-      <p:sp>
-        <p:nvSpPr>
-          <p:cNvPr id="3" name="TextBox 2"/>
-          <p:cNvSpPr txBox="1"/>
+              <a:defRPr sz="2800" b="1">
+                <a:solidFill>
+                  <a:srgbClr val="1F3A5F"/>
+                </a:solidFill>
+                <a:latin typeface="Calibri"/>
+              </a:defRPr>
+            </a:pPr>
+            <a:r>
+              <a:rPr sz="2800" b="1">
+                <a:solidFill>
+                  <a:srgbClr val="1F3A5F"/>
+                </a:solidFill>
+                <a:latin typeface="Calibri"/>
+              </a:rPr>
+              <a:t>The magic byte, and never trusting storage</a:t>
+            </a:r>
+          </a:p>
+        </p:txBody>
+      </p:sp>
+      <p:sp>
+        <p:nvSpPr>
+          <p:cNvPr id="3" name="Rectangle 2"/>
+          <p:cNvSpPr/>
           <p:nvPr/>
         </p:nvSpPr>
         <p:spPr>
           <a:xfrm>
-            <a:off x="11231575" y="6382512"/>
-            <a:ext cx="457200" cy="274320"/>
-          </a:xfrm>
-          <a:prstGeom prst="rect">
-            <a:avLst/>
-          </a:prstGeom>
-          <a:noFill/>
-        </p:spPr>
-        <p:txBody>
-          <a:bodyPr wrap="square" lIns="0" tIns="0">
-            <a:spAutoFit/>
-          </a:bodyPr>
-          <a:lstStyle/>
-          <a:p>
-            <a:pPr algn="r">
-              <a:lnSpc>
-                <a:spcPct val="100000"/>
-              </a:lnSpc>
-              <a:spcAft>
-                <a:spcPts val="0"/>
-              </a:spcAft>
-              <a:defRPr sz="1000" b="0">
-                <a:solidFill>
-                  <a:srgbClr val="666666"/>
-                </a:solidFill>
-                <a:latin typeface="Calibri"/>
-              </a:defRPr>
-            </a:pPr>
-            <a:r>
-              <a:rPr sz="1000" b="0">
-                <a:solidFill>
-                  <a:srgbClr val="666666"/>
-                </a:solidFill>
-                <a:latin typeface="Calibri"/>
-              </a:rPr>
-              <a:t>10</a:t>
-            </a:r>
-          </a:p>
-        </p:txBody>
-      </p:sp>
-      <p:sp>
-        <p:nvSpPr>
-          <p:cNvPr id="4" name="Rectangle 3"/>
-          <p:cNvSpPr/>
-          <p:nvPr/>
-        </p:nvSpPr>
-        <p:spPr>
-          <a:xfrm>
-            <a:off x="0" y="1234440"/>
-            <a:ext cx="256032" cy="1554480"/>
+            <a:off x="502920" y="1097280"/>
+            <a:ext cx="11185855" cy="19050"/>
           </a:xfrm>
           <a:prstGeom prst="rect">
             <a:avLst/>
           </a:prstGeom>
           <a:solidFill>
-            <a:srgbClr val="0E7C86"/>
+            <a:srgbClr val="C8D2DE"/>
           </a:solidFill>
           <a:ln>
             <a:noFill/>
@@ -6112,14 +6272,14 @@
       </p:sp>
       <p:sp>
         <p:nvSpPr>
-          <p:cNvPr id="5" name="TextBox 4"/>
+          <p:cNvPr id="4" name="TextBox 3"/>
           <p:cNvSpPr txBox="1"/>
           <p:nvPr/>
         </p:nvSpPr>
         <p:spPr>
           <a:xfrm>
-            <a:off x="777240" y="1325880"/>
-            <a:ext cx="10515600" cy="1051560"/>
+            <a:off x="502920" y="6382512"/>
+            <a:ext cx="10545775" cy="274320"/>
           </a:xfrm>
           <a:prstGeom prst="rect">
             <a:avLst/>
@@ -6127,7 +6287,7 @@
           <a:noFill/>
         </p:spPr>
         <p:txBody>
-          <a:bodyPr wrap="square" lIns="0" tIns="0" rIns="0" bIns="0">
+          <a:bodyPr wrap="square" lIns="0" tIns="0">
             <a:spAutoFit/>
           </a:bodyPr>
           <a:lstStyle/>
@@ -6139,35 +6299,35 @@
               <a:spcAft>
                 <a:spcPts val="0"/>
               </a:spcAft>
-              <a:defRPr sz="3600" b="1">
-                <a:solidFill>
-                  <a:srgbClr val="1F3A5F"/>
-                </a:solidFill>
-                <a:latin typeface="Calibri"/>
-              </a:defRPr>
-            </a:pPr>
-            <a:r>
-              <a:rPr sz="3600" b="1">
-                <a:solidFill>
-                  <a:srgbClr val="1F3A5F"/>
-                </a:solidFill>
-                <a:latin typeface="Calibri"/>
-              </a:rPr>
-              <a:t>EEPROM</a:t>
-            </a:r>
-          </a:p>
-        </p:txBody>
-      </p:sp>
-      <p:sp>
-        <p:nvSpPr>
-          <p:cNvPr id="6" name="TextBox 5"/>
+              <a:defRPr sz="1000" b="0">
+                <a:solidFill>
+                  <a:srgbClr val="666666"/>
+                </a:solidFill>
+                <a:latin typeface="Calibri"/>
+              </a:defRPr>
+            </a:pPr>
+            <a:r>
+              <a:rPr sz="1000" b="0">
+                <a:solidFill>
+                  <a:srgbClr val="666666"/>
+                </a:solidFill>
+                <a:latin typeface="Calibri"/>
+              </a:rPr>
+              <a:t>Pathfinder Advanced - Op Program 12  |  Lesson 3</a:t>
+            </a:r>
+          </a:p>
+        </p:txBody>
+      </p:sp>
+      <p:sp>
+        <p:nvSpPr>
+          <p:cNvPr id="5" name="TextBox 4"/>
           <p:cNvSpPr txBox="1"/>
           <p:nvPr/>
         </p:nvSpPr>
         <p:spPr>
           <a:xfrm>
-            <a:off x="777240" y="2423160"/>
-            <a:ext cx="10515600" cy="685800"/>
+            <a:off x="11231575" y="6382512"/>
+            <a:ext cx="457200" cy="274320"/>
           </a:xfrm>
           <a:prstGeom prst="rect">
             <a:avLst/>
@@ -6175,19 +6335,19 @@
           <a:noFill/>
         </p:spPr>
         <p:txBody>
-          <a:bodyPr wrap="square" lIns="0" tIns="0" rIns="0" bIns="0">
+          <a:bodyPr wrap="square" lIns="0" tIns="0">
             <a:spAutoFit/>
           </a:bodyPr>
           <a:lstStyle/>
           <a:p>
-            <a:pPr algn="l">
-              <a:lnSpc>
-                <a:spcPct val="100000"/>
-              </a:lnSpc>
-              <a:spcAft>
-                <a:spcPts val="400"/>
-              </a:spcAft>
-              <a:defRPr sz="1600" b="0">
+            <a:pPr algn="r">
+              <a:lnSpc>
+                <a:spcPct val="100000"/>
+              </a:lnSpc>
+              <a:spcAft>
+                <a:spcPts val="0"/>
+              </a:spcAft>
+              <a:defRPr sz="1000" b="0">
                 <a:solidFill>
                   <a:srgbClr val="666666"/>
                 </a:solidFill>
@@ -6195,97 +6355,27 @@
               </a:defRPr>
             </a:pPr>
             <a:r>
-              <a:rPr sz="1600" b="0">
+              <a:rPr sz="1000" b="0">
                 <a:solidFill>
                   <a:srgbClr val="666666"/>
                 </a:solidFill>
                 <a:latin typeface="Calibri"/>
               </a:rPr>
-              <a:t>About 35 minutes</a:t>
-            </a:r>
-          </a:p>
-        </p:txBody>
-      </p:sp>
-      <p:sp>
-        <p:nvSpPr>
-          <p:cNvPr id="7" name="Rounded Rectangle 6"/>
-          <p:cNvSpPr/>
+              <a:t>10</a:t>
+            </a:r>
+          </a:p>
+        </p:txBody>
+      </p:sp>
+      <p:sp>
+        <p:nvSpPr>
+          <p:cNvPr id="6" name="TextBox 5"/>
+          <p:cNvSpPr txBox="1"/>
           <p:nvPr/>
         </p:nvSpPr>
         <p:spPr>
           <a:xfrm>
-            <a:off x="502920" y="3886200"/>
-            <a:ext cx="3631082" cy="1325880"/>
-          </a:xfrm>
-          <a:prstGeom prst="roundRect">
-            <a:avLst>
-              <a:gd name="adj" fmla="val 8000"/>
-            </a:avLst>
-          </a:prstGeom>
-          <a:solidFill>
-            <a:srgbClr val="EEF3F8"/>
-          </a:solidFill>
-          <a:ln w="12700">
-            <a:solidFill>
-              <a:srgbClr val="0E7C86"/>
-            </a:solidFill>
-          </a:ln>
-          <a:effectLst/>
-        </p:spPr>
-        <p:style>
-          <a:lnRef idx="1">
-            <a:schemeClr val="accent1"/>
-          </a:lnRef>
-          <a:fillRef idx="3">
-            <a:schemeClr val="accent1"/>
-          </a:fillRef>
-          <a:effectRef idx="2">
-            <a:schemeClr val="accent1"/>
-          </a:effectRef>
-          <a:fontRef idx="minor">
-            <a:schemeClr val="lt1"/>
-          </a:fontRef>
-        </p:style>
-        <p:txBody>
-          <a:bodyPr rtlCol="0" anchor="ctr" wrap="square" lIns="73152" rIns="73152"/>
-          <a:lstStyle/>
-          <a:p>
-            <a:pPr algn="ctr">
-              <a:lnSpc>
-                <a:spcPct val="100000"/>
-              </a:lnSpc>
-              <a:spcAft>
-                <a:spcPts val="0"/>
-              </a:spcAft>
-              <a:defRPr sz="1700" b="0">
-                <a:solidFill>
-                  <a:srgbClr val="1F3A5F"/>
-                </a:solidFill>
-                <a:latin typeface="Calibri"/>
-              </a:defRPr>
-            </a:pPr>
-            <a:r>
-              <a:rPr sz="1700" b="0">
-                <a:solidFill>
-                  <a:srgbClr val="1F3A5F"/>
-                </a:solidFill>
-                <a:latin typeface="Calibri"/>
-              </a:rPr>
-              <a:t>Callbacks and allowlist</a:t>
-            </a:r>
-          </a:p>
-        </p:txBody>
-      </p:sp>
-      <p:sp>
-        <p:nvSpPr>
-          <p:cNvPr id="8" name="TextBox 7"/>
-          <p:cNvSpPr txBox="1"/>
-          <p:nvPr/>
-        </p:nvSpPr>
-        <p:spPr>
-          <a:xfrm>
-            <a:off x="502920" y="3520440"/>
-            <a:ext cx="3631082" cy="310896"/>
+            <a:off x="502920" y="1188720"/>
+            <a:ext cx="11185855" cy="530352"/>
           </a:xfrm>
           <a:prstGeom prst="rect">
             <a:avLst/>
@@ -6298,14 +6388,14 @@
           </a:bodyPr>
           <a:lstStyle/>
           <a:p>
-            <a:pPr algn="ctr">
-              <a:lnSpc>
-                <a:spcPct val="100000"/>
-              </a:lnSpc>
-              <a:spcAft>
-                <a:spcPts val="200"/>
-              </a:spcAft>
-              <a:defRPr sz="1100" b="1">
+            <a:pPr algn="l">
+              <a:lnSpc>
+                <a:spcPct val="100000"/>
+              </a:lnSpc>
+              <a:spcAft>
+                <a:spcPts val="600"/>
+              </a:spcAft>
+              <a:defRPr sz="1900" b="1">
                 <a:solidFill>
                   <a:srgbClr val="0E7C86"/>
                 </a:solidFill>
@@ -6313,97 +6403,27 @@
               </a:defRPr>
             </a:pPr>
             <a:r>
-              <a:rPr sz="1100" b="1">
+              <a:rPr sz="1900" b="1">
                 <a:solidFill>
                   <a:srgbClr val="0E7C86"/>
                 </a:solidFill>
                 <a:latin typeface="Calibri"/>
               </a:rPr>
-              <a:t>done</a:t>
-            </a:r>
-          </a:p>
-        </p:txBody>
-      </p:sp>
-      <p:sp>
-        <p:nvSpPr>
-          <p:cNvPr id="9" name="Rounded Rectangle 8"/>
-          <p:cNvSpPr/>
+              <a:t>Two separate checks, for two separate problems</a:t>
+            </a:r>
+          </a:p>
+        </p:txBody>
+      </p:sp>
+      <p:sp>
+        <p:nvSpPr>
+          <p:cNvPr id="7" name="TextBox 6"/>
+          <p:cNvSpPr txBox="1"/>
           <p:nvPr/>
         </p:nvSpPr>
         <p:spPr>
           <a:xfrm>
-            <a:off x="4280306" y="3886200"/>
-            <a:ext cx="3631082" cy="1325880"/>
-          </a:xfrm>
-          <a:prstGeom prst="roundRect">
-            <a:avLst>
-              <a:gd name="adj" fmla="val 8000"/>
-            </a:avLst>
-          </a:prstGeom>
-          <a:solidFill>
-            <a:srgbClr val="EEF3F8"/>
-          </a:solidFill>
-          <a:ln w="12700">
-            <a:solidFill>
-              <a:srgbClr val="0E7C86"/>
-            </a:solidFill>
-          </a:ln>
-          <a:effectLst/>
-        </p:spPr>
-        <p:style>
-          <a:lnRef idx="1">
-            <a:schemeClr val="accent1"/>
-          </a:lnRef>
-          <a:fillRef idx="3">
-            <a:schemeClr val="accent1"/>
-          </a:fillRef>
-          <a:effectRef idx="2">
-            <a:schemeClr val="accent1"/>
-          </a:effectRef>
-          <a:fontRef idx="minor">
-            <a:schemeClr val="lt1"/>
-          </a:fontRef>
-        </p:style>
-        <p:txBody>
-          <a:bodyPr rtlCol="0" anchor="ctr" wrap="square" lIns="73152" rIns="73152"/>
-          <a:lstStyle/>
-          <a:p>
-            <a:pPr algn="ctr">
-              <a:lnSpc>
-                <a:spcPct val="100000"/>
-              </a:lnSpc>
-              <a:spcAft>
-                <a:spcPts val="0"/>
-              </a:spcAft>
-              <a:defRPr sz="1700" b="0">
-                <a:solidFill>
-                  <a:srgbClr val="1F3A5F"/>
-                </a:solidFill>
-                <a:latin typeface="Calibri"/>
-              </a:defRPr>
-            </a:pPr>
-            <a:r>
-              <a:rPr sz="1700" b="0">
-                <a:solidFill>
-                  <a:srgbClr val="1F3A5F"/>
-                </a:solidFill>
-                <a:latin typeface="Calibri"/>
-              </a:rPr>
-              <a:t>Locking a board</a:t>
-            </a:r>
-          </a:p>
-        </p:txBody>
-      </p:sp>
-      <p:sp>
-        <p:nvSpPr>
-          <p:cNvPr id="10" name="TextBox 9"/>
-          <p:cNvSpPr txBox="1"/>
-          <p:nvPr/>
-        </p:nvSpPr>
-        <p:spPr>
-          <a:xfrm>
-            <a:off x="4280306" y="3520440"/>
-            <a:ext cx="3631082" cy="310896"/>
+            <a:off x="502920" y="1755648"/>
+            <a:ext cx="5364327" cy="4507992"/>
           </a:xfrm>
           <a:prstGeom prst="rect">
             <a:avLst/>
@@ -6416,112 +6436,149 @@
           </a:bodyPr>
           <a:lstStyle/>
           <a:p>
-            <a:pPr algn="ctr">
-              <a:lnSpc>
-                <a:spcPct val="100000"/>
-              </a:lnSpc>
-              <a:spcAft>
-                <a:spcPts val="200"/>
-              </a:spcAft>
-              <a:defRPr sz="1100" b="1">
-                <a:solidFill>
-                  <a:srgbClr val="0E7C86"/>
-                </a:solidFill>
-                <a:latin typeface="Calibri"/>
-              </a:defRPr>
-            </a:pPr>
-            <a:r>
-              <a:rPr sz="1100" b="1">
-                <a:solidFill>
-                  <a:srgbClr val="0E7C86"/>
-                </a:solidFill>
-                <a:latin typeface="Calibri"/>
-              </a:rPr>
-              <a:t>done</a:t>
-            </a:r>
-          </a:p>
-        </p:txBody>
-      </p:sp>
-      <p:sp>
-        <p:nvSpPr>
-          <p:cNvPr id="11" name="Rounded Rectangle 10"/>
-          <p:cNvSpPr/>
+            <a:pPr algn="l">
+              <a:lnSpc>
+                <a:spcPct val="100000"/>
+              </a:lnSpc>
+              <a:spcAft>
+                <a:spcPts val="900"/>
+              </a:spcAft>
+              <a:defRPr sz="1800" b="0">
+                <a:solidFill>
+                  <a:srgbClr val="222222"/>
+                </a:solidFill>
+                <a:latin typeface="Calibri"/>
+              </a:defRPr>
+            </a:pPr>
+            <a:r>
+              <a:rPr sz="1800" b="0">
+                <a:solidFill>
+                  <a:srgbClr val="222222"/>
+                </a:solidFill>
+                <a:latin typeface="Calibri"/>
+              </a:rPr>
+              <a:t>A brand new ESP32 has flash full of 0xFF. Read an int out of that and you get -1. Read a float and you get something meaningless.</a:t>
+            </a:r>
+          </a:p>
+          <a:p>
+            <a:pPr algn="l">
+              <a:lnSpc>
+                <a:spcPct val="100000"/>
+              </a:lnSpc>
+              <a:spcAft>
+                <a:spcPts val="900"/>
+              </a:spcAft>
+              <a:defRPr sz="900" b="0">
+                <a:solidFill>
+                  <a:srgbClr val="222222"/>
+                </a:solidFill>
+                <a:latin typeface="Calibri"/>
+              </a:defRPr>
+            </a:pPr>
+          </a:p>
+          <a:p>
+            <a:pPr algn="l">
+              <a:lnSpc>
+                <a:spcPct val="100000"/>
+              </a:lnSpc>
+              <a:spcAft>
+                <a:spcPts val="900"/>
+              </a:spcAft>
+              <a:defRPr sz="1800" b="0">
+                <a:solidFill>
+                  <a:srgbClr val="222222"/>
+                </a:solidFill>
+                <a:latin typeface="Calibri"/>
+              </a:defRPr>
+            </a:pPr>
+            <a:r>
+              <a:rPr sz="1800" b="0">
+                <a:solidFill>
+                  <a:srgbClr val="222222"/>
+                </a:solidFill>
+                <a:latin typeface="Calibri"/>
+              </a:rPr>
+              <a:t>So the first byte of the block is a MARKER, written only after a successful save. If it is not 0xA5, the data is not ours and we use the compiled-in defaults.</a:t>
+            </a:r>
+          </a:p>
+          <a:p>
+            <a:pPr algn="l">
+              <a:lnSpc>
+                <a:spcPct val="100000"/>
+              </a:lnSpc>
+              <a:spcAft>
+                <a:spcPts val="900"/>
+              </a:spcAft>
+              <a:defRPr sz="900" b="0">
+                <a:solidFill>
+                  <a:srgbClr val="222222"/>
+                </a:solidFill>
+                <a:latin typeface="Calibri"/>
+              </a:defRPr>
+            </a:pPr>
+          </a:p>
+          <a:p>
+            <a:pPr algn="l">
+              <a:lnSpc>
+                <a:spcPct val="100000"/>
+              </a:lnSpc>
+              <a:spcAft>
+                <a:spcPts val="900"/>
+              </a:spcAft>
+              <a:defRPr sz="1800" b="0">
+                <a:solidFill>
+                  <a:srgbClr val="222222"/>
+                </a:solidFill>
+                <a:latin typeface="Calibri"/>
+              </a:defRPr>
+            </a:pPr>
+            <a:r>
+              <a:rPr sz="1800" b="0">
+                <a:solidFill>
+                  <a:srgbClr val="222222"/>
+                </a:solidFill>
+                <a:latin typeface="Calibri"/>
+              </a:rPr>
+              <a:t>But that is not enough on its own. Even WITH the marker, every value is range checked as it loads:</a:t>
+            </a:r>
+          </a:p>
+          <a:p>
+            <a:pPr lvl="1" algn="l">
+              <a:lnSpc>
+                <a:spcPct val="100000"/>
+              </a:lnSpc>
+              <a:spcAft>
+                <a:spcPts val="900"/>
+              </a:spcAft>
+              <a:defRPr sz="1800" b="0">
+                <a:solidFill>
+                  <a:srgbClr val="222222"/>
+                </a:solidFill>
+                <a:latin typeface="Calibri"/>
+              </a:defRPr>
+            </a:pPr>
+            <a:r>
+              <a:rPr sz="1800" b="0">
+                <a:solidFill>
+                  <a:srgbClr val="222222"/>
+                </a:solidFill>
+                <a:latin typeface="Calibri"/>
+              </a:rPr>
+              <a:t>if (saved_dz &gt;= 0 &amp;&amp; saved_dz &lt;= DEADZONE_MAX)  INPUT_DEADZONE = saved_dz;</a:t>
+            </a:r>
+          </a:p>
+        </p:txBody>
+      </p:sp>
+      <p:sp>
+        <p:nvSpPr>
+          <p:cNvPr id="8" name="TextBox 7"/>
+          <p:cNvSpPr txBox="1"/>
           <p:nvPr/>
         </p:nvSpPr>
         <p:spPr>
           <a:xfrm>
-            <a:off x="8057692" y="3886200"/>
-            <a:ext cx="3631082" cy="1325880"/>
-          </a:xfrm>
-          <a:prstGeom prst="roundRect">
-            <a:avLst>
-              <a:gd name="adj" fmla="val 8000"/>
-            </a:avLst>
-          </a:prstGeom>
-          <a:solidFill>
-            <a:srgbClr val="D6ECEE"/>
-          </a:solidFill>
-          <a:ln w="25400">
-            <a:solidFill>
-              <a:srgbClr val="0E7C86"/>
-            </a:solidFill>
-          </a:ln>
-          <a:effectLst/>
-        </p:spPr>
-        <p:style>
-          <a:lnRef idx="1">
-            <a:schemeClr val="accent1"/>
-          </a:lnRef>
-          <a:fillRef idx="3">
-            <a:schemeClr val="accent1"/>
-          </a:fillRef>
-          <a:effectRef idx="2">
-            <a:schemeClr val="accent1"/>
-          </a:effectRef>
-          <a:fontRef idx="minor">
-            <a:schemeClr val="lt1"/>
-          </a:fontRef>
-        </p:style>
-        <p:txBody>
-          <a:bodyPr rtlCol="0" anchor="ctr" wrap="square" lIns="73152" rIns="73152"/>
-          <a:lstStyle/>
-          <a:p>
-            <a:pPr algn="ctr">
-              <a:lnSpc>
-                <a:spcPct val="100000"/>
-              </a:lnSpc>
-              <a:spcAft>
-                <a:spcPts val="0"/>
-              </a:spcAft>
-              <a:defRPr sz="1700" b="1">
-                <a:solidFill>
-                  <a:srgbClr val="1F3A5F"/>
-                </a:solidFill>
-                <a:latin typeface="Calibri"/>
-              </a:defRPr>
-            </a:pPr>
-            <a:r>
-              <a:rPr sz="1700" b="1">
-                <a:solidFill>
-                  <a:srgbClr val="1F3A5F"/>
-                </a:solidFill>
-                <a:latin typeface="Calibri"/>
-              </a:rPr>
-              <a:t>EEPROM</a:t>
-            </a:r>
-          </a:p>
-        </p:txBody>
-      </p:sp>
-      <p:sp>
-        <p:nvSpPr>
-          <p:cNvPr id="12" name="TextBox 11"/>
-          <p:cNvSpPr txBox="1"/>
-          <p:nvPr/>
-        </p:nvSpPr>
-        <p:spPr>
-          <a:xfrm>
-            <a:off x="8057692" y="3520440"/>
-            <a:ext cx="3631082" cy="310896"/>
+            <a:off x="6324447" y="1755648"/>
+            <a:ext cx="5364327" cy="4507992"/>
           </a:xfrm>
           <a:prstGeom prst="rect">
             <a:avLst/>
@@ -6534,28 +6591,69 @@
           </a:bodyPr>
           <a:lstStyle/>
           <a:p>
-            <a:pPr algn="ctr">
-              <a:lnSpc>
-                <a:spcPct val="100000"/>
-              </a:lnSpc>
-              <a:spcAft>
-                <a:spcPts val="200"/>
-              </a:spcAft>
-              <a:defRPr sz="1100" b="1">
-                <a:solidFill>
-                  <a:srgbClr val="0E7C86"/>
-                </a:solidFill>
-                <a:latin typeface="Calibri"/>
-              </a:defRPr>
-            </a:pPr>
-            <a:r>
-              <a:rPr sz="1100" b="1">
-                <a:solidFill>
-                  <a:srgbClr val="0E7C86"/>
-                </a:solidFill>
-                <a:latin typeface="Calibri"/>
-              </a:rPr>
-              <a:t>NOW</a:t>
+            <a:pPr algn="l">
+              <a:lnSpc>
+                <a:spcPct val="100000"/>
+              </a:lnSpc>
+              <a:spcAft>
+                <a:spcPts val="900"/>
+              </a:spcAft>
+              <a:defRPr sz="1900" b="0">
+                <a:solidFill>
+                  <a:srgbClr val="222222"/>
+                </a:solidFill>
+                <a:latin typeface="Calibri"/>
+              </a:defRPr>
+            </a:pPr>
+            <a:r>
+              <a:rPr sz="1900" b="0">
+                <a:solidFill>
+                  <a:srgbClr val="222222"/>
+                </a:solidFill>
+                <a:latin typeface="Calibri"/>
+              </a:rPr>
+              <a:t>Why? Because a value saved by an OLDER version of the program is perfectly valid data and still wrong for this one. The marker tells you the bytes are yours. It does not tell you they still make sense.</a:t>
+            </a:r>
+          </a:p>
+          <a:p>
+            <a:pPr algn="l">
+              <a:lnSpc>
+                <a:spcPct val="100000"/>
+              </a:lnSpc>
+              <a:spcAft>
+                <a:spcPts val="900"/>
+              </a:spcAft>
+              <a:defRPr sz="950" b="0">
+                <a:solidFill>
+                  <a:srgbClr val="222222"/>
+                </a:solidFill>
+                <a:latin typeface="Calibri"/>
+              </a:defRPr>
+            </a:pPr>
+          </a:p>
+          <a:p>
+            <a:pPr algn="l">
+              <a:lnSpc>
+                <a:spcPct val="100000"/>
+              </a:lnSpc>
+              <a:spcAft>
+                <a:spcPts val="900"/>
+              </a:spcAft>
+              <a:defRPr sz="1900" b="0">
+                <a:solidFill>
+                  <a:srgbClr val="222222"/>
+                </a:solidFill>
+                <a:latin typeface="Calibri"/>
+              </a:defRPr>
+            </a:pPr>
+            <a:r>
+              <a:rPr sz="1900" b="0">
+                <a:solidFill>
+                  <a:srgbClr val="222222"/>
+                </a:solidFill>
+                <a:latin typeface="Calibri"/>
+              </a:rPr>
+              <a:t>Defensive loading is not paranoia. It is the difference between a vehicle that boots with odd settings and one that will not boot.</a:t>
             </a:r>
           </a:p>
         </p:txBody>
@@ -13155,6 +13253,614 @@
       <p:grpSpPr/>
       <p:sp>
         <p:nvSpPr>
+          <p:cNvPr id="2" name="TextBox 1"/>
+          <p:cNvSpPr txBox="1"/>
+          <p:nvPr/>
+        </p:nvSpPr>
+        <p:spPr>
+          <a:xfrm>
+            <a:off x="502920" y="6382512"/>
+            <a:ext cx="10545775" cy="274320"/>
+          </a:xfrm>
+          <a:prstGeom prst="rect">
+            <a:avLst/>
+          </a:prstGeom>
+          <a:noFill/>
+        </p:spPr>
+        <p:txBody>
+          <a:bodyPr wrap="square" lIns="0" tIns="0">
+            <a:spAutoFit/>
+          </a:bodyPr>
+          <a:lstStyle/>
+          <a:p>
+            <a:pPr algn="l">
+              <a:lnSpc>
+                <a:spcPct val="100000"/>
+              </a:lnSpc>
+              <a:spcAft>
+                <a:spcPts val="0"/>
+              </a:spcAft>
+              <a:defRPr sz="1000" b="0">
+                <a:solidFill>
+                  <a:srgbClr val="666666"/>
+                </a:solidFill>
+                <a:latin typeface="Calibri"/>
+              </a:defRPr>
+            </a:pPr>
+            <a:r>
+              <a:rPr sz="1000" b="0">
+                <a:solidFill>
+                  <a:srgbClr val="666666"/>
+                </a:solidFill>
+                <a:latin typeface="Calibri"/>
+              </a:rPr>
+              <a:t>Pathfinder Advanced - Op Program 12  |  Lesson 3</a:t>
+            </a:r>
+          </a:p>
+        </p:txBody>
+      </p:sp>
+      <p:sp>
+        <p:nvSpPr>
+          <p:cNvPr id="3" name="TextBox 2"/>
+          <p:cNvSpPr txBox="1"/>
+          <p:nvPr/>
+        </p:nvSpPr>
+        <p:spPr>
+          <a:xfrm>
+            <a:off x="11231575" y="6382512"/>
+            <a:ext cx="457200" cy="274320"/>
+          </a:xfrm>
+          <a:prstGeom prst="rect">
+            <a:avLst/>
+          </a:prstGeom>
+          <a:noFill/>
+        </p:spPr>
+        <p:txBody>
+          <a:bodyPr wrap="square" lIns="0" tIns="0">
+            <a:spAutoFit/>
+          </a:bodyPr>
+          <a:lstStyle/>
+          <a:p>
+            <a:pPr algn="r">
+              <a:lnSpc>
+                <a:spcPct val="100000"/>
+              </a:lnSpc>
+              <a:spcAft>
+                <a:spcPts val="0"/>
+              </a:spcAft>
+              <a:defRPr sz="1000" b="0">
+                <a:solidFill>
+                  <a:srgbClr val="666666"/>
+                </a:solidFill>
+                <a:latin typeface="Calibri"/>
+              </a:defRPr>
+            </a:pPr>
+            <a:r>
+              <a:rPr sz="1000" b="0">
+                <a:solidFill>
+                  <a:srgbClr val="666666"/>
+                </a:solidFill>
+                <a:latin typeface="Calibri"/>
+              </a:rPr>
+              <a:t>7</a:t>
+            </a:r>
+          </a:p>
+        </p:txBody>
+      </p:sp>
+      <p:sp>
+        <p:nvSpPr>
+          <p:cNvPr id="4" name="Rectangle 3"/>
+          <p:cNvSpPr/>
+          <p:nvPr/>
+        </p:nvSpPr>
+        <p:spPr>
+          <a:xfrm>
+            <a:off x="0" y="1234440"/>
+            <a:ext cx="256032" cy="1554480"/>
+          </a:xfrm>
+          <a:prstGeom prst="rect">
+            <a:avLst/>
+          </a:prstGeom>
+          <a:solidFill>
+            <a:srgbClr val="0E7C86"/>
+          </a:solidFill>
+          <a:ln>
+            <a:noFill/>
+          </a:ln>
+          <a:effectLst/>
+        </p:spPr>
+        <p:style>
+          <a:lnRef idx="1">
+            <a:schemeClr val="accent1"/>
+          </a:lnRef>
+          <a:fillRef idx="3">
+            <a:schemeClr val="accent1"/>
+          </a:fillRef>
+          <a:effectRef idx="2">
+            <a:schemeClr val="accent1"/>
+          </a:effectRef>
+          <a:fontRef idx="minor">
+            <a:schemeClr val="lt1"/>
+          </a:fontRef>
+        </p:style>
+        <p:txBody>
+          <a:bodyPr rtlCol="0" anchor="ctr"/>
+          <a:lstStyle/>
+          <a:p>
+            <a:pPr algn="ctr"/>
+          </a:p>
+        </p:txBody>
+      </p:sp>
+      <p:sp>
+        <p:nvSpPr>
+          <p:cNvPr id="5" name="TextBox 4"/>
+          <p:cNvSpPr txBox="1"/>
+          <p:nvPr/>
+        </p:nvSpPr>
+        <p:spPr>
+          <a:xfrm>
+            <a:off x="777240" y="1325880"/>
+            <a:ext cx="10515600" cy="1051560"/>
+          </a:xfrm>
+          <a:prstGeom prst="rect">
+            <a:avLst/>
+          </a:prstGeom>
+          <a:noFill/>
+        </p:spPr>
+        <p:txBody>
+          <a:bodyPr wrap="square" lIns="0" tIns="0" rIns="0" bIns="0">
+            <a:spAutoFit/>
+          </a:bodyPr>
+          <a:lstStyle/>
+          <a:p>
+            <a:pPr algn="l">
+              <a:lnSpc>
+                <a:spcPct val="100000"/>
+              </a:lnSpc>
+              <a:spcAft>
+                <a:spcPts val="0"/>
+              </a:spcAft>
+              <a:defRPr sz="3600" b="1">
+                <a:solidFill>
+                  <a:srgbClr val="1F3A5F"/>
+                </a:solidFill>
+                <a:latin typeface="Calibri"/>
+              </a:defRPr>
+            </a:pPr>
+            <a:r>
+              <a:rPr sz="3600" b="1">
+                <a:solidFill>
+                  <a:srgbClr val="1F3A5F"/>
+                </a:solidFill>
+                <a:latin typeface="Calibri"/>
+              </a:rPr>
+              <a:t>EEPROM</a:t>
+            </a:r>
+          </a:p>
+        </p:txBody>
+      </p:sp>
+      <p:sp>
+        <p:nvSpPr>
+          <p:cNvPr id="6" name="TextBox 5"/>
+          <p:cNvSpPr txBox="1"/>
+          <p:nvPr/>
+        </p:nvSpPr>
+        <p:spPr>
+          <a:xfrm>
+            <a:off x="777240" y="2423160"/>
+            <a:ext cx="10515600" cy="685800"/>
+          </a:xfrm>
+          <a:prstGeom prst="rect">
+            <a:avLst/>
+          </a:prstGeom>
+          <a:noFill/>
+        </p:spPr>
+        <p:txBody>
+          <a:bodyPr wrap="square" lIns="0" tIns="0" rIns="0" bIns="0">
+            <a:spAutoFit/>
+          </a:bodyPr>
+          <a:lstStyle/>
+          <a:p>
+            <a:pPr algn="l">
+              <a:lnSpc>
+                <a:spcPct val="100000"/>
+              </a:lnSpc>
+              <a:spcAft>
+                <a:spcPts val="400"/>
+              </a:spcAft>
+              <a:defRPr sz="1600" b="0">
+                <a:solidFill>
+                  <a:srgbClr val="666666"/>
+                </a:solidFill>
+                <a:latin typeface="Calibri"/>
+              </a:defRPr>
+            </a:pPr>
+            <a:r>
+              <a:rPr sz="1600" b="0">
+                <a:solidFill>
+                  <a:srgbClr val="666666"/>
+                </a:solidFill>
+                <a:latin typeface="Calibri"/>
+              </a:rPr>
+              <a:t>About 70 minutes</a:t>
+            </a:r>
+          </a:p>
+        </p:txBody>
+      </p:sp>
+      <p:sp>
+        <p:nvSpPr>
+          <p:cNvPr id="7" name="Rounded Rectangle 6"/>
+          <p:cNvSpPr/>
+          <p:nvPr/>
+        </p:nvSpPr>
+        <p:spPr>
+          <a:xfrm>
+            <a:off x="502920" y="3886200"/>
+            <a:ext cx="3631082" cy="1325880"/>
+          </a:xfrm>
+          <a:prstGeom prst="roundRect">
+            <a:avLst>
+              <a:gd name="adj" fmla="val 8000"/>
+            </a:avLst>
+          </a:prstGeom>
+          <a:solidFill>
+            <a:srgbClr val="EEF3F8"/>
+          </a:solidFill>
+          <a:ln w="12700">
+            <a:solidFill>
+              <a:srgbClr val="0E7C86"/>
+            </a:solidFill>
+          </a:ln>
+          <a:effectLst/>
+        </p:spPr>
+        <p:style>
+          <a:lnRef idx="1">
+            <a:schemeClr val="accent1"/>
+          </a:lnRef>
+          <a:fillRef idx="3">
+            <a:schemeClr val="accent1"/>
+          </a:fillRef>
+          <a:effectRef idx="2">
+            <a:schemeClr val="accent1"/>
+          </a:effectRef>
+          <a:fontRef idx="minor">
+            <a:schemeClr val="lt1"/>
+          </a:fontRef>
+        </p:style>
+        <p:txBody>
+          <a:bodyPr rtlCol="0" anchor="ctr" wrap="square" lIns="73152" rIns="73152"/>
+          <a:lstStyle/>
+          <a:p>
+            <a:pPr algn="ctr">
+              <a:lnSpc>
+                <a:spcPct val="100000"/>
+              </a:lnSpc>
+              <a:spcAft>
+                <a:spcPts val="0"/>
+              </a:spcAft>
+              <a:defRPr sz="1700" b="0">
+                <a:solidFill>
+                  <a:srgbClr val="1F3A5F"/>
+                </a:solidFill>
+                <a:latin typeface="Calibri"/>
+              </a:defRPr>
+            </a:pPr>
+            <a:r>
+              <a:rPr sz="1700" b="0">
+                <a:solidFill>
+                  <a:srgbClr val="1F3A5F"/>
+                </a:solidFill>
+                <a:latin typeface="Calibri"/>
+              </a:rPr>
+              <a:t>Callbacks and allowlist</a:t>
+            </a:r>
+          </a:p>
+        </p:txBody>
+      </p:sp>
+      <p:sp>
+        <p:nvSpPr>
+          <p:cNvPr id="8" name="TextBox 7"/>
+          <p:cNvSpPr txBox="1"/>
+          <p:nvPr/>
+        </p:nvSpPr>
+        <p:spPr>
+          <a:xfrm>
+            <a:off x="502920" y="3520440"/>
+            <a:ext cx="3631082" cy="310896"/>
+          </a:xfrm>
+          <a:prstGeom prst="rect">
+            <a:avLst/>
+          </a:prstGeom>
+          <a:noFill/>
+        </p:spPr>
+        <p:txBody>
+          <a:bodyPr wrap="square" lIns="0" tIns="0" rIns="0" bIns="0">
+            <a:spAutoFit/>
+          </a:bodyPr>
+          <a:lstStyle/>
+          <a:p>
+            <a:pPr algn="ctr">
+              <a:lnSpc>
+                <a:spcPct val="100000"/>
+              </a:lnSpc>
+              <a:spcAft>
+                <a:spcPts val="200"/>
+              </a:spcAft>
+              <a:defRPr sz="1100" b="1">
+                <a:solidFill>
+                  <a:srgbClr val="0E7C86"/>
+                </a:solidFill>
+                <a:latin typeface="Calibri"/>
+              </a:defRPr>
+            </a:pPr>
+            <a:r>
+              <a:rPr sz="1100" b="1">
+                <a:solidFill>
+                  <a:srgbClr val="0E7C86"/>
+                </a:solidFill>
+                <a:latin typeface="Calibri"/>
+              </a:rPr>
+              <a:t>done</a:t>
+            </a:r>
+          </a:p>
+        </p:txBody>
+      </p:sp>
+      <p:sp>
+        <p:nvSpPr>
+          <p:cNvPr id="9" name="Rounded Rectangle 8"/>
+          <p:cNvSpPr/>
+          <p:nvPr/>
+        </p:nvSpPr>
+        <p:spPr>
+          <a:xfrm>
+            <a:off x="4280306" y="3886200"/>
+            <a:ext cx="3631082" cy="1325880"/>
+          </a:xfrm>
+          <a:prstGeom prst="roundRect">
+            <a:avLst>
+              <a:gd name="adj" fmla="val 8000"/>
+            </a:avLst>
+          </a:prstGeom>
+          <a:solidFill>
+            <a:srgbClr val="EEF3F8"/>
+          </a:solidFill>
+          <a:ln w="12700">
+            <a:solidFill>
+              <a:srgbClr val="0E7C86"/>
+            </a:solidFill>
+          </a:ln>
+          <a:effectLst/>
+        </p:spPr>
+        <p:style>
+          <a:lnRef idx="1">
+            <a:schemeClr val="accent1"/>
+          </a:lnRef>
+          <a:fillRef idx="3">
+            <a:schemeClr val="accent1"/>
+          </a:fillRef>
+          <a:effectRef idx="2">
+            <a:schemeClr val="accent1"/>
+          </a:effectRef>
+          <a:fontRef idx="minor">
+            <a:schemeClr val="lt1"/>
+          </a:fontRef>
+        </p:style>
+        <p:txBody>
+          <a:bodyPr rtlCol="0" anchor="ctr" wrap="square" lIns="73152" rIns="73152"/>
+          <a:lstStyle/>
+          <a:p>
+            <a:pPr algn="ctr">
+              <a:lnSpc>
+                <a:spcPct val="100000"/>
+              </a:lnSpc>
+              <a:spcAft>
+                <a:spcPts val="0"/>
+              </a:spcAft>
+              <a:defRPr sz="1700" b="0">
+                <a:solidFill>
+                  <a:srgbClr val="1F3A5F"/>
+                </a:solidFill>
+                <a:latin typeface="Calibri"/>
+              </a:defRPr>
+            </a:pPr>
+            <a:r>
+              <a:rPr sz="1700" b="0">
+                <a:solidFill>
+                  <a:srgbClr val="1F3A5F"/>
+                </a:solidFill>
+                <a:latin typeface="Calibri"/>
+              </a:rPr>
+              <a:t>Locking a board</a:t>
+            </a:r>
+          </a:p>
+        </p:txBody>
+      </p:sp>
+      <p:sp>
+        <p:nvSpPr>
+          <p:cNvPr id="10" name="TextBox 9"/>
+          <p:cNvSpPr txBox="1"/>
+          <p:nvPr/>
+        </p:nvSpPr>
+        <p:spPr>
+          <a:xfrm>
+            <a:off x="4280306" y="3520440"/>
+            <a:ext cx="3631082" cy="310896"/>
+          </a:xfrm>
+          <a:prstGeom prst="rect">
+            <a:avLst/>
+          </a:prstGeom>
+          <a:noFill/>
+        </p:spPr>
+        <p:txBody>
+          <a:bodyPr wrap="square" lIns="0" tIns="0" rIns="0" bIns="0">
+            <a:spAutoFit/>
+          </a:bodyPr>
+          <a:lstStyle/>
+          <a:p>
+            <a:pPr algn="ctr">
+              <a:lnSpc>
+                <a:spcPct val="100000"/>
+              </a:lnSpc>
+              <a:spcAft>
+                <a:spcPts val="200"/>
+              </a:spcAft>
+              <a:defRPr sz="1100" b="1">
+                <a:solidFill>
+                  <a:srgbClr val="0E7C86"/>
+                </a:solidFill>
+                <a:latin typeface="Calibri"/>
+              </a:defRPr>
+            </a:pPr>
+            <a:r>
+              <a:rPr sz="1100" b="1">
+                <a:solidFill>
+                  <a:srgbClr val="0E7C86"/>
+                </a:solidFill>
+                <a:latin typeface="Calibri"/>
+              </a:rPr>
+              <a:t>done</a:t>
+            </a:r>
+          </a:p>
+        </p:txBody>
+      </p:sp>
+      <p:sp>
+        <p:nvSpPr>
+          <p:cNvPr id="11" name="Rounded Rectangle 10"/>
+          <p:cNvSpPr/>
+          <p:nvPr/>
+        </p:nvSpPr>
+        <p:spPr>
+          <a:xfrm>
+            <a:off x="8057692" y="3886200"/>
+            <a:ext cx="3631082" cy="1325880"/>
+          </a:xfrm>
+          <a:prstGeom prst="roundRect">
+            <a:avLst>
+              <a:gd name="adj" fmla="val 8000"/>
+            </a:avLst>
+          </a:prstGeom>
+          <a:solidFill>
+            <a:srgbClr val="D6ECEE"/>
+          </a:solidFill>
+          <a:ln w="25400">
+            <a:solidFill>
+              <a:srgbClr val="0E7C86"/>
+            </a:solidFill>
+          </a:ln>
+          <a:effectLst/>
+        </p:spPr>
+        <p:style>
+          <a:lnRef idx="1">
+            <a:schemeClr val="accent1"/>
+          </a:lnRef>
+          <a:fillRef idx="3">
+            <a:schemeClr val="accent1"/>
+          </a:fillRef>
+          <a:effectRef idx="2">
+            <a:schemeClr val="accent1"/>
+          </a:effectRef>
+          <a:fontRef idx="minor">
+            <a:schemeClr val="lt1"/>
+          </a:fontRef>
+        </p:style>
+        <p:txBody>
+          <a:bodyPr rtlCol="0" anchor="ctr" wrap="square" lIns="73152" rIns="73152"/>
+          <a:lstStyle/>
+          <a:p>
+            <a:pPr algn="ctr">
+              <a:lnSpc>
+                <a:spcPct val="100000"/>
+              </a:lnSpc>
+              <a:spcAft>
+                <a:spcPts val="0"/>
+              </a:spcAft>
+              <a:defRPr sz="1700" b="1">
+                <a:solidFill>
+                  <a:srgbClr val="1F3A5F"/>
+                </a:solidFill>
+                <a:latin typeface="Calibri"/>
+              </a:defRPr>
+            </a:pPr>
+            <a:r>
+              <a:rPr sz="1700" b="1">
+                <a:solidFill>
+                  <a:srgbClr val="1F3A5F"/>
+                </a:solidFill>
+                <a:latin typeface="Calibri"/>
+              </a:rPr>
+              <a:t>EEPROM</a:t>
+            </a:r>
+          </a:p>
+        </p:txBody>
+      </p:sp>
+      <p:sp>
+        <p:nvSpPr>
+          <p:cNvPr id="12" name="TextBox 11"/>
+          <p:cNvSpPr txBox="1"/>
+          <p:nvPr/>
+        </p:nvSpPr>
+        <p:spPr>
+          <a:xfrm>
+            <a:off x="8057692" y="3520440"/>
+            <a:ext cx="3631082" cy="310896"/>
+          </a:xfrm>
+          <a:prstGeom prst="rect">
+            <a:avLst/>
+          </a:prstGeom>
+          <a:noFill/>
+        </p:spPr>
+        <p:txBody>
+          <a:bodyPr wrap="square" lIns="0" tIns="0" rIns="0" bIns="0">
+            <a:spAutoFit/>
+          </a:bodyPr>
+          <a:lstStyle/>
+          <a:p>
+            <a:pPr algn="ctr">
+              <a:lnSpc>
+                <a:spcPct val="100000"/>
+              </a:lnSpc>
+              <a:spcAft>
+                <a:spcPts val="200"/>
+              </a:spcAft>
+              <a:defRPr sz="1100" b="1">
+                <a:solidFill>
+                  <a:srgbClr val="0E7C86"/>
+                </a:solidFill>
+                <a:latin typeface="Calibri"/>
+              </a:defRPr>
+            </a:pPr>
+            <a:r>
+              <a:rPr sz="1100" b="1">
+                <a:solidFill>
+                  <a:srgbClr val="0E7C86"/>
+                </a:solidFill>
+                <a:latin typeface="Calibri"/>
+              </a:rPr>
+              <a:t>NOW</a:t>
+            </a:r>
+          </a:p>
+        </p:txBody>
+      </p:sp>
+    </p:spTree>
+  </p:cSld>
+  <p:clrMapOvr>
+    <a:masterClrMapping/>
+  </p:clrMapOvr>
+</p:sld>
+</file>
+
+<file path=ppt/slides/slide9.xml><?xml version="1.0" encoding="utf-8"?>
+<p:sld xmlns:a="http://schemas.openxmlformats.org/drawingml/2006/main" xmlns:p="http://schemas.openxmlformats.org/presentationml/2006/main" xmlns:r="http://schemas.openxmlformats.org/officeDocument/2006/relationships">
+  <p:cSld>
+    <p:spTree>
+      <p:nvGrpSpPr>
+        <p:cNvPr id="1" name=""/>
+        <p:cNvGrpSpPr/>
+        <p:nvPr/>
+      </p:nvGrpSpPr>
+      <p:grpSpPr/>
+      <p:sp>
+        <p:nvSpPr>
           <p:cNvPr id="2" name="Title 1"/>
           <p:cNvSpPr>
             <a:spLocks noGrp="1"/>
@@ -13334,7 +14040,7 @@
                 </a:solidFill>
                 <a:latin typeface="Calibri"/>
               </a:rPr>
-              <a:t>7</a:t>
+              <a:t>8</a:t>
             </a:r>
           </a:p>
         </p:txBody>
@@ -13702,712 +14408,6 @@
                 <a:latin typeface="Calibri"/>
               </a:rPr>
               <a:t>A commit() in loop() at 30 Hz burns through a hundred thousand cycles in under an hour.</a:t>
-            </a:r>
-          </a:p>
-        </p:txBody>
-      </p:sp>
-    </p:spTree>
-  </p:cSld>
-  <p:clrMapOvr>
-    <a:masterClrMapping/>
-  </p:clrMapOvr>
-</p:sld>
-</file>
-
-<file path=ppt/slides/slide9.xml><?xml version="1.0" encoding="utf-8"?>
-<p:sld xmlns:a="http://schemas.openxmlformats.org/drawingml/2006/main" xmlns:p="http://schemas.openxmlformats.org/presentationml/2006/main" xmlns:r="http://schemas.openxmlformats.org/officeDocument/2006/relationships">
-  <p:cSld>
-    <p:spTree>
-      <p:nvGrpSpPr>
-        <p:cNvPr id="1" name=""/>
-        <p:cNvGrpSpPr/>
-        <p:nvPr/>
-      </p:nvGrpSpPr>
-      <p:grpSpPr/>
-      <p:sp>
-        <p:nvSpPr>
-          <p:cNvPr id="2" name="Title 1"/>
-          <p:cNvSpPr>
-            <a:spLocks noGrp="1"/>
-          </p:cNvSpPr>
-          <p:nvPr>
-            <p:ph type="title"/>
-          </p:nvPr>
-        </p:nvSpPr>
-        <p:spPr>
-          <a:xfrm>
-            <a:off x="502920" y="274320"/>
-            <a:ext cx="11185855" cy="777240"/>
-          </a:xfrm>
-        </p:spPr>
-        <p:txBody>
-          <a:bodyPr wrap="square" anchor="b"/>
-          <a:lstStyle/>
-          <a:p>
-            <a:pPr algn="l">
-              <a:lnSpc>
-                <a:spcPct val="100000"/>
-              </a:lnSpc>
-              <a:spcAft>
-                <a:spcPts val="0"/>
-              </a:spcAft>
-              <a:defRPr sz="2800" b="1">
-                <a:solidFill>
-                  <a:srgbClr val="1F3A5F"/>
-                </a:solidFill>
-                <a:latin typeface="Calibri"/>
-              </a:defRPr>
-            </a:pPr>
-            <a:r>
-              <a:rPr sz="2800" b="1">
-                <a:solidFill>
-                  <a:srgbClr val="1F3A5F"/>
-                </a:solidFill>
-                <a:latin typeface="Calibri"/>
-              </a:rPr>
-              <a:t>The storage map, and why the addresses are spaced out</a:t>
-            </a:r>
-          </a:p>
-        </p:txBody>
-      </p:sp>
-      <p:sp>
-        <p:nvSpPr>
-          <p:cNvPr id="3" name="Rectangle 2"/>
-          <p:cNvSpPr/>
-          <p:nvPr/>
-        </p:nvSpPr>
-        <p:spPr>
-          <a:xfrm>
-            <a:off x="502920" y="1097280"/>
-            <a:ext cx="11185855" cy="19050"/>
-          </a:xfrm>
-          <a:prstGeom prst="rect">
-            <a:avLst/>
-          </a:prstGeom>
-          <a:solidFill>
-            <a:srgbClr val="C8D2DE"/>
-          </a:solidFill>
-          <a:ln>
-            <a:noFill/>
-          </a:ln>
-          <a:effectLst/>
-        </p:spPr>
-        <p:style>
-          <a:lnRef idx="1">
-            <a:schemeClr val="accent1"/>
-          </a:lnRef>
-          <a:fillRef idx="3">
-            <a:schemeClr val="accent1"/>
-          </a:fillRef>
-          <a:effectRef idx="2">
-            <a:schemeClr val="accent1"/>
-          </a:effectRef>
-          <a:fontRef idx="minor">
-            <a:schemeClr val="lt1"/>
-          </a:fontRef>
-        </p:style>
-        <p:txBody>
-          <a:bodyPr rtlCol="0" anchor="ctr"/>
-          <a:lstStyle/>
-          <a:p>
-            <a:pPr algn="ctr"/>
-          </a:p>
-        </p:txBody>
-      </p:sp>
-      <p:sp>
-        <p:nvSpPr>
-          <p:cNvPr id="4" name="TextBox 3"/>
-          <p:cNvSpPr txBox="1"/>
-          <p:nvPr/>
-        </p:nvSpPr>
-        <p:spPr>
-          <a:xfrm>
-            <a:off x="502920" y="6382512"/>
-            <a:ext cx="10545775" cy="274320"/>
-          </a:xfrm>
-          <a:prstGeom prst="rect">
-            <a:avLst/>
-          </a:prstGeom>
-          <a:noFill/>
-        </p:spPr>
-        <p:txBody>
-          <a:bodyPr wrap="square" lIns="0" tIns="0">
-            <a:spAutoFit/>
-          </a:bodyPr>
-          <a:lstStyle/>
-          <a:p>
-            <a:pPr algn="l">
-              <a:lnSpc>
-                <a:spcPct val="100000"/>
-              </a:lnSpc>
-              <a:spcAft>
-                <a:spcPts val="0"/>
-              </a:spcAft>
-              <a:defRPr sz="1000" b="0">
-                <a:solidFill>
-                  <a:srgbClr val="666666"/>
-                </a:solidFill>
-                <a:latin typeface="Calibri"/>
-              </a:defRPr>
-            </a:pPr>
-            <a:r>
-              <a:rPr sz="1000" b="0">
-                <a:solidFill>
-                  <a:srgbClr val="666666"/>
-                </a:solidFill>
-                <a:latin typeface="Calibri"/>
-              </a:rPr>
-              <a:t>Pathfinder Advanced - Op Program 12  |  Lesson 3</a:t>
-            </a:r>
-          </a:p>
-        </p:txBody>
-      </p:sp>
-      <p:sp>
-        <p:nvSpPr>
-          <p:cNvPr id="5" name="TextBox 4"/>
-          <p:cNvSpPr txBox="1"/>
-          <p:nvPr/>
-        </p:nvSpPr>
-        <p:spPr>
-          <a:xfrm>
-            <a:off x="11231575" y="6382512"/>
-            <a:ext cx="457200" cy="274320"/>
-          </a:xfrm>
-          <a:prstGeom prst="rect">
-            <a:avLst/>
-          </a:prstGeom>
-          <a:noFill/>
-        </p:spPr>
-        <p:txBody>
-          <a:bodyPr wrap="square" lIns="0" tIns="0">
-            <a:spAutoFit/>
-          </a:bodyPr>
-          <a:lstStyle/>
-          <a:p>
-            <a:pPr algn="r">
-              <a:lnSpc>
-                <a:spcPct val="100000"/>
-              </a:lnSpc>
-              <a:spcAft>
-                <a:spcPts val="0"/>
-              </a:spcAft>
-              <a:defRPr sz="1000" b="0">
-                <a:solidFill>
-                  <a:srgbClr val="666666"/>
-                </a:solidFill>
-                <a:latin typeface="Calibri"/>
-              </a:defRPr>
-            </a:pPr>
-            <a:r>
-              <a:rPr sz="1000" b="0">
-                <a:solidFill>
-                  <a:srgbClr val="666666"/>
-                </a:solidFill>
-                <a:latin typeface="Calibri"/>
-              </a:rPr>
-              <a:t>8</a:t>
-            </a:r>
-          </a:p>
-        </p:txBody>
-      </p:sp>
-      <p:sp>
-        <p:nvSpPr>
-          <p:cNvPr id="6" name="TextBox 5"/>
-          <p:cNvSpPr txBox="1"/>
-          <p:nvPr/>
-        </p:nvSpPr>
-        <p:spPr>
-          <a:xfrm>
-            <a:off x="502920" y="1188720"/>
-            <a:ext cx="7047088" cy="274320"/>
-          </a:xfrm>
-          <a:prstGeom prst="rect">
-            <a:avLst/>
-          </a:prstGeom>
-          <a:noFill/>
-        </p:spPr>
-        <p:txBody>
-          <a:bodyPr wrap="square" lIns="0" tIns="0" rIns="0" bIns="0">
-            <a:spAutoFit/>
-          </a:bodyPr>
-          <a:lstStyle/>
-          <a:p>
-            <a:pPr algn="l">
-              <a:lnSpc>
-                <a:spcPct val="100000"/>
-              </a:lnSpc>
-              <a:spcAft>
-                <a:spcPts val="200"/>
-              </a:spcAft>
-              <a:defRPr sz="1200" b="1">
-                <a:solidFill>
-                  <a:srgbClr val="0E7C86"/>
-                </a:solidFill>
-                <a:latin typeface="Consolas"/>
-              </a:defRPr>
-            </a:pPr>
-            <a:r>
-              <a:rPr sz="1200" b="1">
-                <a:solidFill>
-                  <a:srgbClr val="0E7C86"/>
-                </a:solidFill>
-                <a:latin typeface="Consolas"/>
-              </a:rPr>
-              <a:t>Config.h</a:t>
-            </a:r>
-          </a:p>
-        </p:txBody>
-      </p:sp>
-      <p:sp>
-        <p:nvSpPr>
-          <p:cNvPr id="7" name="CODE_PANEL"/>
-          <p:cNvSpPr/>
-          <p:nvPr/>
-        </p:nvSpPr>
-        <p:spPr>
-          <a:xfrm>
-            <a:off x="502920" y="1517904"/>
-            <a:ext cx="7047088" cy="4745736"/>
-          </a:xfrm>
-          <a:prstGeom prst="roundRect">
-            <a:avLst>
-              <a:gd name="adj" fmla="val 4000"/>
-            </a:avLst>
-          </a:prstGeom>
-          <a:solidFill>
-            <a:srgbClr val="F4F6F8"/>
-          </a:solidFill>
-          <a:ln w="12700">
-            <a:solidFill>
-              <a:srgbClr val="C8D2DE"/>
-            </a:solidFill>
-          </a:ln>
-          <a:effectLst/>
-        </p:spPr>
-        <p:style>
-          <a:lnRef idx="1">
-            <a:schemeClr val="accent1"/>
-          </a:lnRef>
-          <a:fillRef idx="3">
-            <a:schemeClr val="accent1"/>
-          </a:fillRef>
-          <a:effectRef idx="2">
-            <a:schemeClr val="accent1"/>
-          </a:effectRef>
-          <a:fontRef idx="minor">
-            <a:schemeClr val="lt1"/>
-          </a:fontRef>
-        </p:style>
-        <p:txBody>
-          <a:bodyPr rtlCol="0" anchor="t" wrap="square" lIns="146304" tIns="91440" bIns="73152"/>
-          <a:lstStyle/>
-          <a:p>
-            <a:pPr algn="l">
-              <a:lnSpc>
-                <a:spcPct val="100000"/>
-              </a:lnSpc>
-              <a:spcAft>
-                <a:spcPts val="0"/>
-              </a:spcAft>
-              <a:defRPr sz="1450">
-                <a:latin typeface="Consolas"/>
-              </a:defRPr>
-            </a:pPr>
-            <a:r>
-              <a:rPr sz="1450">
-                <a:solidFill>
-                  <a:srgbClr val="222222"/>
-                </a:solidFill>
-                <a:latin typeface="Consolas"/>
-              </a:rPr>
-              <a:t>const int ADDR_DEADZONE       =  0;   // int,   4 bytes</a:t>
-            </a:r>
-          </a:p>
-          <a:p>
-            <a:pPr algn="l">
-              <a:lnSpc>
-                <a:spcPct val="100000"/>
-              </a:lnSpc>
-              <a:spcAft>
-                <a:spcPts val="0"/>
-              </a:spcAft>
-              <a:defRPr sz="1450">
-                <a:latin typeface="Consolas"/>
-              </a:defRPr>
-            </a:pPr>
-            <a:r>
-              <a:rPr sz="1450">
-                <a:solidFill>
-                  <a:srgbClr val="222222"/>
-                </a:solidFill>
-                <a:latin typeface="Consolas"/>
-              </a:rPr>
-              <a:t>const int ADDR_DEADZONE_LS_X  =  4;</a:t>
-            </a:r>
-          </a:p>
-          <a:p>
-            <a:pPr algn="l">
-              <a:lnSpc>
-                <a:spcPct val="100000"/>
-              </a:lnSpc>
-              <a:spcAft>
-                <a:spcPts val="0"/>
-              </a:spcAft>
-              <a:defRPr sz="1450">
-                <a:latin typeface="Consolas"/>
-              </a:defRPr>
-            </a:pPr>
-            <a:r>
-              <a:rPr sz="1450">
-                <a:solidFill>
-                  <a:srgbClr val="222222"/>
-                </a:solidFill>
-                <a:latin typeface="Consolas"/>
-              </a:rPr>
-              <a:t>const int ADDR_DEADZONE_LS_Y  =  8;</a:t>
-            </a:r>
-          </a:p>
-          <a:p>
-            <a:pPr algn="l">
-              <a:lnSpc>
-                <a:spcPct val="100000"/>
-              </a:lnSpc>
-              <a:spcAft>
-                <a:spcPts val="0"/>
-              </a:spcAft>
-              <a:defRPr sz="1450">
-                <a:latin typeface="Consolas"/>
-              </a:defRPr>
-            </a:pPr>
-            <a:r>
-              <a:rPr sz="1450">
-                <a:solidFill>
-                  <a:srgbClr val="222222"/>
-                </a:solidFill>
-                <a:latin typeface="Consolas"/>
-              </a:rPr>
-              <a:t>const int ADDR_DEADZONE_RS_X  = 12;</a:t>
-            </a:r>
-          </a:p>
-          <a:p>
-            <a:pPr algn="l">
-              <a:lnSpc>
-                <a:spcPct val="100000"/>
-              </a:lnSpc>
-              <a:spcAft>
-                <a:spcPts val="0"/>
-              </a:spcAft>
-              <a:defRPr sz="1450">
-                <a:latin typeface="Consolas"/>
-              </a:defRPr>
-            </a:pPr>
-            <a:r>
-              <a:rPr sz="1450">
-                <a:solidFill>
-                  <a:srgbClr val="222222"/>
-                </a:solidFill>
-                <a:latin typeface="Consolas"/>
-              </a:rPr>
-              <a:t>const int ADDR_DEADZONE_RS_Y  = 16;</a:t>
-            </a:r>
-          </a:p>
-          <a:p>
-            <a:pPr algn="l">
-              <a:lnSpc>
-                <a:spcPct val="100000"/>
-              </a:lnSpc>
-              <a:spcAft>
-                <a:spcPts val="0"/>
-              </a:spcAft>
-              <a:defRPr sz="1450">
-                <a:latin typeface="Consolas"/>
-              </a:defRPr>
-            </a:pPr>
-            <a:r>
-              <a:rPr sz="1450">
-                <a:solidFill>
-                  <a:srgbClr val="222222"/>
-                </a:solidFill>
-                <a:latin typeface="Consolas"/>
-              </a:rPr>
-              <a:t>const int ADDR_LS_Y_SC        = 20;   // float, 4 bytes</a:t>
-            </a:r>
-          </a:p>
-          <a:p>
-            <a:pPr algn="l">
-              <a:lnSpc>
-                <a:spcPct val="100000"/>
-              </a:lnSpc>
-              <a:spcAft>
-                <a:spcPts val="0"/>
-              </a:spcAft>
-              <a:defRPr sz="1450">
-                <a:latin typeface="Consolas"/>
-              </a:defRPr>
-            </a:pPr>
-            <a:r>
-              <a:rPr sz="1450">
-                <a:solidFill>
-                  <a:srgbClr val="222222"/>
-                </a:solidFill>
-                <a:latin typeface="Consolas"/>
-              </a:rPr>
-              <a:t>const int ADDR_LS_X_SC        = 24;</a:t>
-            </a:r>
-          </a:p>
-          <a:p>
-            <a:pPr algn="l">
-              <a:lnSpc>
-                <a:spcPct val="100000"/>
-              </a:lnSpc>
-              <a:spcAft>
-                <a:spcPts val="0"/>
-              </a:spcAft>
-              <a:defRPr sz="1450">
-                <a:latin typeface="Consolas"/>
-              </a:defRPr>
-            </a:pPr>
-            <a:r>
-              <a:rPr sz="1450">
-                <a:solidFill>
-                  <a:srgbClr val="222222"/>
-                </a:solidFill>
-                <a:latin typeface="Consolas"/>
-              </a:rPr>
-              <a:t>const int ADDR_RS_Y_SC        = 28;</a:t>
-            </a:r>
-          </a:p>
-          <a:p>
-            <a:pPr algn="l">
-              <a:lnSpc>
-                <a:spcPct val="100000"/>
-              </a:lnSpc>
-              <a:spcAft>
-                <a:spcPts val="0"/>
-              </a:spcAft>
-              <a:defRPr sz="1450">
-                <a:latin typeface="Consolas"/>
-              </a:defRPr>
-            </a:pPr>
-            <a:r>
-              <a:rPr sz="1450">
-                <a:solidFill>
-                  <a:srgbClr val="222222"/>
-                </a:solidFill>
-                <a:latin typeface="Consolas"/>
-              </a:rPr>
-              <a:t>const int ADDR_RS_X_SC        = 32;</a:t>
-            </a:r>
-          </a:p>
-          <a:p>
-            <a:pPr algn="l">
-              <a:lnSpc>
-                <a:spcPct val="100000"/>
-              </a:lnSpc>
-              <a:spcAft>
-                <a:spcPts val="0"/>
-              </a:spcAft>
-              <a:defRPr sz="1450">
-                <a:latin typeface="Consolas"/>
-              </a:defRPr>
-            </a:pPr>
-            <a:r>
-              <a:rPr sz="1450" b="1">
-                <a:solidFill>
-                  <a:srgbClr val="0E7C86"/>
-                </a:solidFill>
-                <a:latin typeface="Consolas"/>
-              </a:rPr>
-              <a:t>const int ADDR_PAIRED_VALID   = 36;   // 1 byte:  0xA5 when valid</a:t>
-            </a:r>
-          </a:p>
-          <a:p>
-            <a:pPr algn="l">
-              <a:lnSpc>
-                <a:spcPct val="100000"/>
-              </a:lnSpc>
-              <a:spcAft>
-                <a:spcPts val="0"/>
-              </a:spcAft>
-              <a:defRPr sz="1450">
-                <a:latin typeface="Consolas"/>
-              </a:defRPr>
-            </a:pPr>
-            <a:r>
-              <a:rPr sz="1450" b="1">
-                <a:solidFill>
-                  <a:srgbClr val="0E7C86"/>
-                </a:solidFill>
-                <a:latin typeface="Consolas"/>
-              </a:rPr>
-              <a:t>const int ADDR_PAIRED_ADDR    = 37;   // 6 bytes: the address</a:t>
-            </a:r>
-          </a:p>
-          <a:p>
-            <a:pPr algn="l">
-              <a:lnSpc>
-                <a:spcPct val="100000"/>
-              </a:lnSpc>
-              <a:spcAft>
-                <a:spcPts val="0"/>
-              </a:spcAft>
-              <a:defRPr sz="1450">
-                <a:latin typeface="Consolas"/>
-              </a:defRPr>
-            </a:pPr>
-            <a:r>
-              <a:rPr sz="1450">
-                <a:solidFill>
-                  <a:srgbClr val="222222"/>
-                </a:solidFill>
-                <a:latin typeface="Consolas"/>
-              </a:rPr>
-              <a:t> </a:t>
-            </a:r>
-          </a:p>
-          <a:p>
-            <a:pPr algn="l">
-              <a:lnSpc>
-                <a:spcPct val="100000"/>
-              </a:lnSpc>
-              <a:spcAft>
-                <a:spcPts val="0"/>
-              </a:spcAft>
-              <a:defRPr sz="1450">
-                <a:latin typeface="Consolas"/>
-              </a:defRPr>
-            </a:pPr>
-            <a:r>
-              <a:rPr sz="1450" b="1">
-                <a:solidFill>
-                  <a:srgbClr val="0E7C86"/>
-                </a:solidFill>
-                <a:latin typeface="Consolas"/>
-              </a:rPr>
-              <a:t>const uint8_t PAIRED_VALID_MAGIC = 0xA5;</a:t>
-            </a:r>
-          </a:p>
-        </p:txBody>
-      </p:sp>
-      <p:sp>
-        <p:nvSpPr>
-          <p:cNvPr id="8" name="TextBox 7"/>
-          <p:cNvSpPr txBox="1"/>
-          <p:nvPr/>
-        </p:nvSpPr>
-        <p:spPr>
-          <a:xfrm>
-            <a:off x="7870048" y="1517904"/>
-            <a:ext cx="3818727" cy="4745736"/>
-          </a:xfrm>
-          <a:prstGeom prst="rect">
-            <a:avLst/>
-          </a:prstGeom>
-          <a:noFill/>
-        </p:spPr>
-        <p:txBody>
-          <a:bodyPr wrap="square" lIns="0" tIns="0" rIns="0" bIns="0">
-            <a:spAutoFit/>
-          </a:bodyPr>
-          <a:lstStyle/>
-          <a:p>
-            <a:pPr algn="l">
-              <a:lnSpc>
-                <a:spcPct val="100000"/>
-              </a:lnSpc>
-              <a:spcAft>
-                <a:spcPts val="700"/>
-              </a:spcAft>
-              <a:defRPr sz="1900" b="0">
-                <a:solidFill>
-                  <a:srgbClr val="222222"/>
-                </a:solidFill>
-                <a:latin typeface="Calibri"/>
-              </a:defRPr>
-            </a:pPr>
-            <a:r>
-              <a:rPr sz="1900" b="0">
-                <a:solidFill>
-                  <a:srgbClr val="222222"/>
-                </a:solidFill>
-                <a:latin typeface="Calibri"/>
-              </a:rPr>
-              <a:t>EEPROM is a flat array of bytes. YOU choose where each value lives, and nothing stops two values overlapping.</a:t>
-            </a:r>
-          </a:p>
-          <a:p>
-            <a:pPr algn="l">
-              <a:lnSpc>
-                <a:spcPct val="100000"/>
-              </a:lnSpc>
-              <a:spcAft>
-                <a:spcPts val="700"/>
-              </a:spcAft>
-              <a:defRPr sz="1900" b="0">
-                <a:solidFill>
-                  <a:srgbClr val="222222"/>
-                </a:solidFill>
-                <a:latin typeface="Calibri"/>
-              </a:defRPr>
-            </a:pPr>
-            <a:r>
-              <a:rPr sz="1900" b="0">
-                <a:solidFill>
-                  <a:srgbClr val="222222"/>
-                </a:solidFill>
-                <a:latin typeface="Calibri"/>
-              </a:rPr>
-              <a:t>An int is 4 bytes and a float is 4 bytes on this chip, so each slot gets 4.</a:t>
-            </a:r>
-          </a:p>
-          <a:p>
-            <a:pPr algn="l">
-              <a:lnSpc>
-                <a:spcPct val="100000"/>
-              </a:lnSpc>
-              <a:spcAft>
-                <a:spcPts val="700"/>
-              </a:spcAft>
-              <a:defRPr sz="1900" b="0">
-                <a:solidFill>
-                  <a:srgbClr val="222222"/>
-                </a:solidFill>
-                <a:latin typeface="Calibri"/>
-              </a:defRPr>
-            </a:pPr>
-            <a:r>
-              <a:rPr sz="1900" b="0">
-                <a:solidFill>
-                  <a:srgbClr val="222222"/>
-                </a:solidFill>
-                <a:latin typeface="Calibri"/>
-              </a:rPr>
-              <a:t>Laying them out as one ADDR_ constant per value, in one place, is what makes an overlap visible when you read the file.</a:t>
-            </a:r>
-          </a:p>
-          <a:p>
-            <a:pPr algn="l">
-              <a:lnSpc>
-                <a:spcPct val="100000"/>
-              </a:lnSpc>
-              <a:spcAft>
-                <a:spcPts val="700"/>
-              </a:spcAft>
-              <a:defRPr sz="1900" b="0">
-                <a:solidFill>
-                  <a:srgbClr val="222222"/>
-                </a:solidFill>
-                <a:latin typeface="Calibri"/>
-              </a:defRPr>
-            </a:pPr>
-            <a:r>
-              <a:rPr sz="1900" b="0">
-                <a:solidFill>
-                  <a:srgbClr val="222222"/>
-                </a:solidFill>
-                <a:latin typeface="Calibri"/>
-              </a:rPr>
-              <a:t>Get this wrong and one setting silently corrupts another. It will look like a hardware fault.</a:t>
             </a:r>
           </a:p>
         </p:txBody>

--- a/ground-vehicle/docs/courses/advanced/l3_bluetooth_and_storage.pptx
+++ b/ground-vehicle/docs/courses/advanced/l3_bluetooth_and_storage.pptx
@@ -5655,7 +5655,7 @@
                 </a:solidFill>
                 <a:latin typeface="Calibri"/>
               </a:rPr>
-              <a:t>9</a:t>
+              <a:t>10</a:t>
             </a:r>
           </a:p>
         </p:txBody>
@@ -6361,7 +6361,7 @@
                 </a:solidFill>
                 <a:latin typeface="Calibri"/>
               </a:rPr>
-              <a:t>10</a:t>
+              <a:t>11</a:t>
             </a:r>
           </a:p>
         </p:txBody>
@@ -6857,7 +6857,7 @@
                 </a:solidFill>
                 <a:latin typeface="Calibri"/>
               </a:rPr>
-              <a:t>11</a:t>
+              <a:t>12</a:t>
             </a:r>
           </a:p>
         </p:txBody>
@@ -7524,7 +7524,7 @@
                 </a:solidFill>
                 <a:latin typeface="Calibri"/>
               </a:rPr>
-              <a:t>12</a:t>
+              <a:t>13</a:t>
             </a:r>
           </a:p>
         </p:txBody>
@@ -7587,7 +7587,7 @@
         </p:nvGraphicFramePr>
         <p:xfrm>
           <a:off x="502920" y="1691640"/>
-          <a:ext cx="11185854" cy="3309937"/>
+          <a:ext cx="11185854" cy="3238500"/>
         </p:xfrm>
         <a:graphic>
           <a:graphicData uri="http://schemas.openxmlformats.org/drawingml/2006/table">
@@ -7596,18 +7596,18 @@
                 <a:tableStyleId>{5C22544A-7EE6-4342-B048-85BDC9FD1C3A}</a:tableStyleId>
               </a:tblPr>
               <a:tblGrid>
-                <a:gridCol w="3457446"/>
-                <a:gridCol w="4270962"/>
-                <a:gridCol w="3457446"/>
+                <a:gridCol w="3733800"/>
+                <a:gridCol w="4112530"/>
+                <a:gridCol w="3339524"/>
               </a:tblGrid>
-              <a:tr h="661987">
+              <a:tr h="647700">
                 <a:tc>
                   <a:txBody>
                     <a:bodyPr/>
                     <a:lstStyle/>
                     <a:p>
                       <a:r>
-                        <a:rPr sz="2050" b="1">
+                        <a:rPr sz="2000" b="1">
                           <a:solidFill>
                             <a:srgbClr val="FFFFFF"/>
                           </a:solidFill>
@@ -7629,7 +7629,7 @@
                     <a:lstStyle/>
                     <a:p>
                       <a:r>
-                        <a:rPr sz="2050" b="1">
+                        <a:rPr sz="2000" b="1">
                           <a:solidFill>
                             <a:srgbClr val="FFFFFF"/>
                           </a:solidFill>
@@ -7651,7 +7651,7 @@
                     <a:lstStyle/>
                     <a:p>
                       <a:r>
-                        <a:rPr sz="2050" b="1">
+                        <a:rPr sz="2000" b="1">
                           <a:solidFill>
                             <a:srgbClr val="FFFFFF"/>
                           </a:solidFill>
@@ -7668,14 +7668,14 @@
                   </a:tcPr>
                 </a:tc>
               </a:tr>
-              <a:tr h="661987">
+              <a:tr h="647700">
                 <a:tc>
                   <a:txBody>
                     <a:bodyPr/>
                     <a:lstStyle/>
                     <a:p>
                       <a:r>
-                        <a:rPr sz="2050">
+                        <a:rPr sz="2000">
                           <a:solidFill>
                             <a:srgbClr val="222222"/>
                           </a:solidFill>
@@ -7697,7 +7697,7 @@
                     <a:lstStyle/>
                     <a:p>
                       <a:r>
-                        <a:rPr sz="2050">
+                        <a:rPr sz="2000">
                           <a:solidFill>
                             <a:srgbClr val="222222"/>
                           </a:solidFill>
@@ -7719,7 +7719,7 @@
                     <a:lstStyle/>
                     <a:p>
                       <a:r>
-                        <a:rPr sz="2050">
+                        <a:rPr sz="2000">
                           <a:solidFill>
                             <a:srgbClr val="222222"/>
                           </a:solidFill>
@@ -7736,14 +7736,14 @@
                   </a:tcPr>
                 </a:tc>
               </a:tr>
-              <a:tr h="661987">
+              <a:tr h="647700">
                 <a:tc>
                   <a:txBody>
                     <a:bodyPr/>
                     <a:lstStyle/>
                     <a:p>
                       <a:r>
-                        <a:rPr sz="2050">
+                        <a:rPr sz="2000">
                           <a:solidFill>
                             <a:srgbClr val="222222"/>
                           </a:solidFill>
@@ -7765,7 +7765,7 @@
                     <a:lstStyle/>
                     <a:p>
                       <a:r>
-                        <a:rPr sz="2050">
+                        <a:rPr sz="2000">
                           <a:solidFill>
                             <a:srgbClr val="222222"/>
                           </a:solidFill>
@@ -7787,7 +7787,7 @@
                     <a:lstStyle/>
                     <a:p>
                       <a:r>
-                        <a:rPr sz="2050">
+                        <a:rPr sz="2000">
                           <a:solidFill>
                             <a:srgbClr val="222222"/>
                           </a:solidFill>
@@ -7804,14 +7804,14 @@
                   </a:tcPr>
                 </a:tc>
               </a:tr>
-              <a:tr h="661987">
+              <a:tr h="647700">
                 <a:tc>
                   <a:txBody>
                     <a:bodyPr/>
                     <a:lstStyle/>
                     <a:p>
                       <a:r>
-                        <a:rPr sz="2050">
+                        <a:rPr sz="2000">
                           <a:solidFill>
                             <a:srgbClr val="222222"/>
                           </a:solidFill>
@@ -7833,7 +7833,7 @@
                     <a:lstStyle/>
                     <a:p>
                       <a:r>
-                        <a:rPr sz="2050">
+                        <a:rPr sz="2000">
                           <a:solidFill>
                             <a:srgbClr val="222222"/>
                           </a:solidFill>
@@ -7855,7 +7855,7 @@
                     <a:lstStyle/>
                     <a:p>
                       <a:r>
-                        <a:rPr sz="2050">
+                        <a:rPr sz="2000">
                           <a:solidFill>
                             <a:srgbClr val="222222"/>
                           </a:solidFill>
@@ -7872,14 +7872,14 @@
                   </a:tcPr>
                 </a:tc>
               </a:tr>
-              <a:tr h="661989">
+              <a:tr h="647700">
                 <a:tc>
                   <a:txBody>
                     <a:bodyPr/>
                     <a:lstStyle/>
                     <a:p>
                       <a:r>
-                        <a:rPr sz="2050">
+                        <a:rPr sz="2000">
                           <a:solidFill>
                             <a:srgbClr val="222222"/>
                           </a:solidFill>
@@ -7901,7 +7901,7 @@
                     <a:lstStyle/>
                     <a:p>
                       <a:r>
-                        <a:rPr sz="2050">
+                        <a:rPr sz="2000">
                           <a:solidFill>
                             <a:srgbClr val="222222"/>
                           </a:solidFill>
@@ -7923,7 +7923,7 @@
                     <a:lstStyle/>
                     <a:p>
                       <a:r>
-                        <a:rPr sz="2050">
+                        <a:rPr sz="2000">
                           <a:solidFill>
                             <a:srgbClr val="222222"/>
                           </a:solidFill>
@@ -8209,7 +8209,7 @@
                 </a:solidFill>
                 <a:latin typeface="Calibri"/>
               </a:rPr>
-              <a:t>13</a:t>
+              <a:t>14</a:t>
             </a:r>
           </a:p>
         </p:txBody>
@@ -9025,7 +9025,7 @@
                 </a:solidFill>
                 <a:latin typeface="Calibri"/>
               </a:rPr>
-              <a:t>14</a:t>
+              <a:t>15</a:t>
             </a:r>
           </a:p>
         </p:txBody>
@@ -9571,7 +9571,7 @@
                 </a:solidFill>
                 <a:latin typeface="Calibri"/>
               </a:rPr>
-              <a:t>15</a:t>
+              <a:t>16</a:t>
             </a:r>
           </a:p>
         </p:txBody>
@@ -10046,7 +10046,7 @@
                 </a:solidFill>
                 <a:latin typeface="Calibri"/>
               </a:rPr>
-              <a:t>1</a:t>
+              <a:t>2</a:t>
             </a:r>
           </a:p>
         </p:txBody>
@@ -10446,7 +10446,7 @@
                 </a:solidFill>
                 <a:latin typeface="Calibri"/>
               </a:rPr>
-              <a:t>2</a:t>
+              <a:t>3</a:t>
             </a:r>
           </a:p>
         </p:txBody>
@@ -11136,7 +11136,7 @@
                 </a:solidFill>
                 <a:latin typeface="Calibri"/>
               </a:rPr>
-              <a:t>3</a:t>
+              <a:t>4</a:t>
             </a:r>
           </a:p>
         </p:txBody>
@@ -11641,7 +11641,7 @@
                 </a:solidFill>
                 <a:latin typeface="Calibri"/>
               </a:rPr>
-              <a:t>4</a:t>
+              <a:t>5</a:t>
             </a:r>
           </a:p>
         </p:txBody>
@@ -12115,7 +12115,7 @@
                 </a:solidFill>
                 <a:latin typeface="Calibri"/>
               </a:rPr>
-              <a:t>5</a:t>
+              <a:t>6</a:t>
             </a:r>
           </a:p>
         </p:txBody>
@@ -12765,7 +12765,7 @@
                 </a:solidFill>
                 <a:latin typeface="Calibri"/>
               </a:rPr>
-              <a:t>6</a:t>
+              <a:t>7</a:t>
             </a:r>
           </a:p>
         </p:txBody>
@@ -13342,7 +13342,7 @@
                 </a:solidFill>
                 <a:latin typeface="Calibri"/>
               </a:rPr>
-              <a:t>7</a:t>
+              <a:t>8</a:t>
             </a:r>
           </a:p>
         </p:txBody>
@@ -14040,7 +14040,7 @@
                 </a:solidFill>
                 <a:latin typeface="Calibri"/>
               </a:rPr>
-              <a:t>8</a:t>
+              <a:t>9</a:t>
             </a:r>
           </a:p>
         </p:txBody>

--- a/ground-vehicle/docs/courses/advanced/l3_bluetooth_and_storage.pptx
+++ b/ground-vehicle/docs/courses/advanced/l3_bluetooth_and_storage.pptx
@@ -7999,7 +7999,7 @@
               <a:t>KEY POINT   </a:t>
             </a:r>
             <a:r>
-              <a:rPr sz="1500">
+              <a:rPr sz="1800">
                 <a:solidFill>
                   <a:srgbClr val="222222"/>
                 </a:solidFill>
@@ -9361,7 +9361,7 @@
               <a:t>KEY POINT   </a:t>
             </a:r>
             <a:r>
-              <a:rPr sz="1500">
+              <a:rPr sz="1800">
                 <a:solidFill>
                   <a:srgbClr val="222222"/>
                 </a:solidFill>
@@ -11995,7 +11995,7 @@
               <a:t>WATCH OUT   </a:t>
             </a:r>
             <a:r>
-              <a:rPr sz="1500">
+              <a:rPr sz="1800">
                 <a:solidFill>
                   <a:srgbClr val="222222"/>
                 </a:solidFill>
@@ -14401,7 +14401,7 @@
               <a:t>WATCH OUT   </a:t>
             </a:r>
             <a:r>
-              <a:rPr sz="1500">
+              <a:rPr sz="1800">
                 <a:solidFill>
                   <a:srgbClr val="222222"/>
                 </a:solidFill>
